--- a/presentation/Prototype.pptx
+++ b/presentation/Prototype.pptx
@@ -5,7 +5,7 @@
     <p:sldMasterId id="2147483648" r:id="rId1"/>
   </p:sldMasterIdLst>
   <p:handoutMasterIdLst>
-    <p:handoutMasterId r:id="rId28"/>
+    <p:handoutMasterId r:id="rId31"/>
   </p:handoutMasterIdLst>
   <p:sldIdLst>
     <p:sldId id="256" r:id="rId2"/>
@@ -27,13 +27,16 @@
     <p:sldId id="279" r:id="rId18"/>
     <p:sldId id="278" r:id="rId19"/>
     <p:sldId id="276" r:id="rId20"/>
-    <p:sldId id="281" r:id="rId21"/>
-    <p:sldId id="263" r:id="rId22"/>
+    <p:sldId id="263" r:id="rId21"/>
+    <p:sldId id="283" r:id="rId22"/>
     <p:sldId id="280" r:id="rId23"/>
     <p:sldId id="282" r:id="rId24"/>
     <p:sldId id="265" r:id="rId25"/>
     <p:sldId id="266" r:id="rId26"/>
     <p:sldId id="267" r:id="rId27"/>
+    <p:sldId id="284" r:id="rId28"/>
+    <p:sldId id="285" r:id="rId29"/>
+    <p:sldId id="286" r:id="rId30"/>
   </p:sldIdLst>
   <p:sldSz cx="12192000" cy="6858000"/>
   <p:notesSz cx="6858000" cy="9144000"/>
@@ -11190,100 +11193,17 @@
                   <a:pPr algn="ctr"/>
                   <a14:m>
                     <m:oMath xmlns:m="http://schemas.openxmlformats.org/officeDocument/2006/math">
-                      <m:sSub>
-                        <m:sSubPr>
-                          <m:ctrlPr>
-                            <a:rPr lang="de-DE" sz="2400" i="1">
-                              <a:solidFill>
-                                <a:schemeClr val="tx1"/>
-                              </a:solidFill>
-                              <a:latin typeface="Cambria Math" panose="02040503050406030204" pitchFamily="18" charset="0"/>
-                              <a:ea typeface="Cambria Math" panose="02040503050406030204" pitchFamily="18" charset="0"/>
-                            </a:rPr>
-                          </m:ctrlPr>
-                        </m:sSubPr>
-                        <m:e>
-                          <m:r>
-                            <a:rPr lang="de-DE" sz="2400" i="1">
-                              <a:solidFill>
-                                <a:schemeClr val="tx1"/>
-                              </a:solidFill>
-                              <a:latin typeface="Cambria Math" panose="02040503050406030204" pitchFamily="18" charset="0"/>
-                              <a:ea typeface="Cambria Math" panose="02040503050406030204" pitchFamily="18" charset="0"/>
-                            </a:rPr>
-                            <m:t>𝑐</m:t>
-                          </m:r>
-                        </m:e>
-                        <m:sub>
-                          <m:r>
-                            <a:rPr lang="de-DE" sz="2400" i="1">
-                              <a:solidFill>
-                                <a:schemeClr val="tx1"/>
-                              </a:solidFill>
-                              <a:latin typeface="Cambria Math" panose="02040503050406030204" pitchFamily="18" charset="0"/>
-                              <a:ea typeface="Cambria Math" panose="02040503050406030204" pitchFamily="18" charset="0"/>
-                            </a:rPr>
-                            <m:t>𝑡</m:t>
-                          </m:r>
-                          <m:r>
-                            <a:rPr lang="de-DE" sz="2400" i="1">
-                              <a:solidFill>
-                                <a:schemeClr val="tx1"/>
-                              </a:solidFill>
-                              <a:latin typeface="Cambria Math" panose="02040503050406030204" pitchFamily="18" charset="0"/>
-                              <a:ea typeface="Cambria Math" panose="02040503050406030204" pitchFamily="18" charset="0"/>
-                            </a:rPr>
-                            <m:t>−1</m:t>
-                          </m:r>
-                        </m:sub>
-                      </m:sSub>
                       <m:r>
                         <a:rPr lang="de-DE" sz="2400" i="1">
                           <a:solidFill>
                             <a:schemeClr val="tx1"/>
                           </a:solidFill>
                           <a:latin typeface="Cambria Math" panose="02040503050406030204" pitchFamily="18" charset="0"/>
-                          <a:ea typeface="Cambria Math" panose="02040503050406030204" pitchFamily="18" charset="0"/>
                         </a:rPr>
-                        <m:t>= ±1=</m:t>
-                      </m:r>
-                    </m:oMath>
-                  </a14:m>
-                  <a:r>
-                    <a:rPr lang="en-GB" sz="2400" i="1" dirty="0">
-                      <a:solidFill>
-                        <a:schemeClr val="tx1"/>
-                      </a:solidFill>
-                      <a:latin typeface="Cambria Math" panose="02040503050406030204" pitchFamily="18" charset="0"/>
-                      <a:ea typeface="Cambria Math" panose="02040503050406030204" pitchFamily="18" charset="0"/>
-                    </a:rPr>
-                    <a:t> </a:t>
-                  </a:r>
-                  <a:r>
-                    <a:rPr lang="en-GB" sz="2400" dirty="0">
-                      <a:solidFill>
-                        <a:schemeClr val="tx1"/>
-                      </a:solidFill>
-                      <a:latin typeface="Bahnschrift" panose="020B0502040204020203" pitchFamily="34" charset="0"/>
-                    </a:rPr>
-                    <a:t>previous choice; </a:t>
-                  </a:r>
-                  <a14:m>
-                    <m:oMath xmlns:m="http://schemas.openxmlformats.org/officeDocument/2006/math">
-                      <m:r>
-                        <m:rPr>
-                          <m:sty m:val="p"/>
-                        </m:rPr>
-                        <a:rPr lang="de-DE" sz="2400">
-                          <a:solidFill>
-                            <a:schemeClr val="tx1"/>
-                          </a:solidFill>
-                          <a:latin typeface="Bahnschrift" panose="020B0502040204020203" pitchFamily="34" charset="0"/>
-                        </a:rPr>
-                        <m:t>κ</m:t>
+                        <m:t>𝛽</m:t>
                       </m:r>
                       <m:r>
-                        <a:rPr lang="de-DE" sz="2400" b="0" i="0" smtClean="0">
+                        <a:rPr lang="de-DE" sz="2400" i="1">
                           <a:solidFill>
                             <a:schemeClr val="tx1"/>
                           </a:solidFill>
@@ -11294,53 +11214,22 @@
                     </m:oMath>
                   </a14:m>
                   <a:r>
-                    <a:rPr lang="en-GB" sz="2400" dirty="0">
+                    <a:rPr lang="de-DE" sz="2400" dirty="0">
+                      <a:solidFill>
+                        <a:schemeClr val="tx1"/>
+                      </a:solidFill>
+                      <a:ea typeface="Cambria Math" panose="02040503050406030204" pitchFamily="18" charset="0"/>
+                    </a:rPr>
+                    <a:t> </a:t>
+                  </a:r>
+                  <a:r>
+                    <a:rPr lang="de-DE" sz="2400" dirty="0" smtClean="0">
                       <a:solidFill>
                         <a:schemeClr val="tx1"/>
                       </a:solidFill>
                       <a:latin typeface="Bahnschrift" panose="020B0502040204020203" pitchFamily="34" charset="0"/>
                     </a:rPr>
-                    <a:t> weights </a:t>
-                  </a:r>
-                  <a:r>
-                    <a:rPr lang="en-GB" sz="2400" dirty="0" smtClean="0">
-                      <a:solidFill>
-                        <a:schemeClr val="tx1"/>
-                      </a:solidFill>
-                      <a:latin typeface="Bahnschrift" panose="020B0502040204020203" pitchFamily="34" charset="0"/>
-                    </a:rPr>
-                    <a:t>preservation; </a:t>
-                  </a:r>
-                  <a14:m>
-                    <m:oMath xmlns:m="http://schemas.openxmlformats.org/officeDocument/2006/math">
-                      <m:r>
-                        <a:rPr lang="de-DE" sz="2400" b="0" i="1" smtClean="0">
-                          <a:solidFill>
-                            <a:schemeClr val="tx1"/>
-                          </a:solidFill>
-                          <a:latin typeface="Cambria Math" panose="02040503050406030204" pitchFamily="18" charset="0"/>
-                        </a:rPr>
-                        <m:t>𝑏</m:t>
-                      </m:r>
-                      <m:r>
-                        <a:rPr lang="de-DE" sz="2400" b="0" i="1" smtClean="0">
-                          <a:solidFill>
-                            <a:schemeClr val="tx1"/>
-                          </a:solidFill>
-                          <a:latin typeface="Cambria Math" panose="02040503050406030204" pitchFamily="18" charset="0"/>
-                        </a:rPr>
-                        <m:t>=</m:t>
-                      </m:r>
-                    </m:oMath>
-                  </a14:m>
-                  <a:r>
-                    <a:rPr lang="en-GB" sz="2400" dirty="0" smtClean="0">
-                      <a:solidFill>
-                        <a:schemeClr val="tx1"/>
-                      </a:solidFill>
-                      <a:latin typeface="Bahnschrift" panose="020B0502040204020203" pitchFamily="34" charset="0"/>
-                    </a:rPr>
-                    <a:t> overall bias </a:t>
+                    <a:t>temperature</a:t>
                   </a:r>
                   <a:endParaRPr lang="en-GB" sz="2400" dirty="0">
                     <a:solidFill>
@@ -11411,8 +11300,8 @@
               </p:nvSpPr>
               <p:spPr>
                 <a:xfrm>
-                  <a:off x="3297221" y="4543897"/>
-                  <a:ext cx="5597558" cy="430887"/>
+                  <a:off x="4245525" y="4569568"/>
+                  <a:ext cx="3700949" cy="430887"/>
                 </a:xfrm>
                 <a:prstGeom prst="rect">
                   <a:avLst/>
@@ -11533,61 +11422,6 @@
                           <a:rPr lang="de-DE" sz="2800" i="1">
                             <a:latin typeface="Cambria Math" panose="02040503050406030204" pitchFamily="18" charset="0"/>
                           </a:rPr>
-                          <m:t>+</m:t>
-                        </m:r>
-                        <m:r>
-                          <a:rPr lang="de-DE" sz="2800" i="1">
-                            <a:latin typeface="Cambria Math" panose="02040503050406030204" pitchFamily="18" charset="0"/>
-                          </a:rPr>
-                          <m:t>𝜅</m:t>
-                        </m:r>
-                        <m:sSub>
-                          <m:sSubPr>
-                            <m:ctrlPr>
-                              <a:rPr lang="de-DE" sz="2800" i="1">
-                                <a:latin typeface="Cambria Math" panose="02040503050406030204" pitchFamily="18" charset="0"/>
-                              </a:rPr>
-                            </m:ctrlPr>
-                          </m:sSubPr>
-                          <m:e>
-                            <m:r>
-                              <a:rPr lang="de-DE" sz="2800" i="1">
-                                <a:latin typeface="Cambria Math" panose="02040503050406030204" pitchFamily="18" charset="0"/>
-                              </a:rPr>
-                              <m:t>𝑐</m:t>
-                            </m:r>
-                          </m:e>
-                          <m:sub>
-                            <m:r>
-                              <a:rPr lang="de-DE" sz="2800" i="1">
-                                <a:latin typeface="Cambria Math" panose="02040503050406030204" pitchFamily="18" charset="0"/>
-                              </a:rPr>
-                              <m:t>𝑡</m:t>
-                            </m:r>
-                            <m:r>
-                              <a:rPr lang="de-DE" sz="2800" i="1">
-                                <a:latin typeface="Cambria Math" panose="02040503050406030204" pitchFamily="18" charset="0"/>
-                              </a:rPr>
-                              <m:t>−1</m:t>
-                            </m:r>
-                          </m:sub>
-                        </m:sSub>
-                        <m:r>
-                          <a:rPr lang="de-DE" sz="2800" i="1">
-                            <a:latin typeface="Cambria Math" panose="02040503050406030204" pitchFamily="18" charset="0"/>
-                          </a:rPr>
-                          <m:t>+</m:t>
-                        </m:r>
-                        <m:r>
-                          <a:rPr lang="de-DE" sz="2800" i="1">
-                            <a:latin typeface="Cambria Math" panose="02040503050406030204" pitchFamily="18" charset="0"/>
-                          </a:rPr>
-                          <m:t>𝑏</m:t>
-                        </m:r>
-                        <m:r>
-                          <a:rPr lang="de-DE" sz="2800" i="1">
-                            <a:latin typeface="Cambria Math" panose="02040503050406030204" pitchFamily="18" charset="0"/>
-                          </a:rPr>
                           <m:t>)</m:t>
                         </m:r>
                       </m:oMath>
@@ -11611,8 +11445,8 @@
               </p:nvSpPr>
               <p:spPr>
                 <a:xfrm>
-                  <a:off x="3297221" y="4543897"/>
-                  <a:ext cx="5597558" cy="430887"/>
+                  <a:off x="4245525" y="4569568"/>
+                  <a:ext cx="3700949" cy="430887"/>
                 </a:xfrm>
                 <a:prstGeom prst="rect">
                   <a:avLst/>
@@ -11640,6 +11474,79 @@
           </mc:Fallback>
         </mc:AlternateContent>
       </p:grpSp>
+      <p:sp>
+        <p:nvSpPr>
+          <p:cNvPr id="10" name="TextBox 9"/>
+          <p:cNvSpPr txBox="1"/>
+          <p:nvPr/>
+        </p:nvSpPr>
+        <p:spPr>
+          <a:xfrm>
+            <a:off x="927100" y="1886858"/>
+            <a:ext cx="10337800" cy="3108543"/>
+          </a:xfrm>
+          <a:prstGeom prst="rect">
+            <a:avLst/>
+          </a:prstGeom>
+          <a:noFill/>
+        </p:spPr>
+        <p:txBody>
+          <a:bodyPr wrap="square" rtlCol="0">
+            <a:spAutoFit/>
+          </a:bodyPr>
+          <a:lstStyle/>
+          <a:p>
+            <a:r>
+              <a:rPr lang="de-DE" sz="2800" dirty="0">
+                <a:latin typeface="Bahnschrift" panose="020B0502040204020203" pitchFamily="34" charset="0"/>
+              </a:rPr>
+              <a:t>For each side</a:t>
+            </a:r>
+            <a:r>
+              <a:rPr lang="de-DE" sz="2800" dirty="0" smtClean="0">
+                <a:latin typeface="Bahnschrift" panose="020B0502040204020203" pitchFamily="34" charset="0"/>
+              </a:rPr>
+              <a:t>:</a:t>
+            </a:r>
+          </a:p>
+          <a:p>
+            <a:endParaRPr lang="de-DE" sz="2800" dirty="0">
+              <a:latin typeface="Bahnschrift" panose="020B0502040204020203" pitchFamily="34" charset="0"/>
+            </a:endParaRPr>
+          </a:p>
+          <a:p>
+            <a:endParaRPr lang="de-DE" sz="2800" dirty="0" smtClean="0">
+              <a:latin typeface="Bahnschrift" panose="020B0502040204020203" pitchFamily="34" charset="0"/>
+            </a:endParaRPr>
+          </a:p>
+          <a:p>
+            <a:endParaRPr lang="de-DE" sz="2800" dirty="0">
+              <a:latin typeface="Bahnschrift" panose="020B0502040204020203" pitchFamily="34" charset="0"/>
+            </a:endParaRPr>
+          </a:p>
+          <a:p>
+            <a:endParaRPr lang="de-DE" sz="2800" dirty="0" smtClean="0">
+              <a:latin typeface="Bahnschrift" panose="020B0502040204020203" pitchFamily="34" charset="0"/>
+            </a:endParaRPr>
+          </a:p>
+          <a:p>
+            <a:r>
+              <a:rPr lang="de-DE" sz="2800" dirty="0" smtClean="0">
+                <a:latin typeface="Bahnschrift" panose="020B0502040204020203" pitchFamily="34" charset="0"/>
+              </a:rPr>
+              <a:t>Their difference is used to calculate the probability to gamble:</a:t>
+            </a:r>
+            <a:endParaRPr lang="de-DE" sz="2800" dirty="0">
+              <a:latin typeface="Bahnschrift" panose="020B0502040204020203" pitchFamily="34" charset="0"/>
+            </a:endParaRPr>
+          </a:p>
+          <a:p>
+            <a:endParaRPr lang="en-GB" sz="2800" dirty="0">
+              <a:latin typeface="Bahnschrift" panose="020B0502040204020203" pitchFamily="34" charset="0"/>
+            </a:endParaRPr>
+          </a:p>
+        </p:txBody>
+      </p:sp>
       <mc:AlternateContent xmlns:mc="http://schemas.openxmlformats.org/markup-compatibility/2006">
         <mc:Choice xmlns:a14="http://schemas.microsoft.com/office/drawing/2010/main" Requires="a14">
           <p:sp>
@@ -11650,8 +11557,8 @@
             </p:nvSpPr>
             <p:spPr>
               <a:xfrm>
-                <a:off x="12607034" y="1392425"/>
-                <a:ext cx="4106573" cy="2871189"/>
+                <a:off x="7946474" y="4545597"/>
+                <a:ext cx="2507295" cy="1502310"/>
               </a:xfrm>
               <a:prstGeom prst="roundRect">
                 <a:avLst>
@@ -11703,7 +11610,7 @@
                           </a:solidFill>
                           <a:latin typeface="Cambria Math" panose="02040503050406030204" pitchFamily="18" charset="0"/>
                         </a:rPr>
-                        <m:t>1</m:t>
+                        <m:t>=1</m:t>
                       </m:r>
                       <m:f>
                         <m:fPr>
@@ -11824,85 +11731,6 @@
                                 </m:sub>
                               </m:sSub>
                               <m:r>
-                                <a:rPr lang="de-DE" sz="2400" i="1">
-                                  <a:solidFill>
-                                    <a:schemeClr val="tx1"/>
-                                  </a:solidFill>
-                                  <a:latin typeface="Cambria Math" panose="02040503050406030204" pitchFamily="18" charset="0"/>
-                                </a:rPr>
-                                <m:t>+</m:t>
-                              </m:r>
-                              <m:r>
-                                <a:rPr lang="de-DE" sz="2400" i="1">
-                                  <a:solidFill>
-                                    <a:schemeClr val="tx1"/>
-                                  </a:solidFill>
-                                  <a:latin typeface="Cambria Math" panose="02040503050406030204" pitchFamily="18" charset="0"/>
-                                </a:rPr>
-                                <m:t>𝜅</m:t>
-                              </m:r>
-                              <m:sSub>
-                                <m:sSubPr>
-                                  <m:ctrlPr>
-                                    <a:rPr lang="de-DE" sz="2400" i="1">
-                                      <a:solidFill>
-                                        <a:schemeClr val="tx1"/>
-                                      </a:solidFill>
-                                      <a:latin typeface="Cambria Math" panose="02040503050406030204" pitchFamily="18" charset="0"/>
-                                    </a:rPr>
-                                  </m:ctrlPr>
-                                </m:sSubPr>
-                                <m:e>
-                                  <m:r>
-                                    <a:rPr lang="de-DE" sz="2400" i="1">
-                                      <a:solidFill>
-                                        <a:schemeClr val="tx1"/>
-                                      </a:solidFill>
-                                      <a:latin typeface="Cambria Math" panose="02040503050406030204" pitchFamily="18" charset="0"/>
-                                    </a:rPr>
-                                    <m:t>𝑐</m:t>
-                                  </m:r>
-                                </m:e>
-                                <m:sub>
-                                  <m:r>
-                                    <a:rPr lang="de-DE" sz="2400" i="1">
-                                      <a:solidFill>
-                                        <a:schemeClr val="tx1"/>
-                                      </a:solidFill>
-                                      <a:latin typeface="Cambria Math" panose="02040503050406030204" pitchFamily="18" charset="0"/>
-                                    </a:rPr>
-                                    <m:t>𝑡</m:t>
-                                  </m:r>
-                                  <m:r>
-                                    <a:rPr lang="de-DE" sz="2400" i="1">
-                                      <a:solidFill>
-                                        <a:schemeClr val="tx1"/>
-                                      </a:solidFill>
-                                      <a:latin typeface="Cambria Math" panose="02040503050406030204" pitchFamily="18" charset="0"/>
-                                    </a:rPr>
-                                    <m:t>−1</m:t>
-                                  </m:r>
-                                </m:sub>
-                              </m:sSub>
-                              <m:r>
-                                <a:rPr lang="de-DE" sz="2400" i="1">
-                                  <a:solidFill>
-                                    <a:schemeClr val="tx1"/>
-                                  </a:solidFill>
-                                  <a:latin typeface="Cambria Math" panose="02040503050406030204" pitchFamily="18" charset="0"/>
-                                </a:rPr>
-                                <m:t>+</m:t>
-                              </m:r>
-                              <m:r>
-                                <a:rPr lang="de-DE" sz="2400" i="1">
-                                  <a:solidFill>
-                                    <a:schemeClr val="tx1"/>
-                                  </a:solidFill>
-                                  <a:latin typeface="Cambria Math" panose="02040503050406030204" pitchFamily="18" charset="0"/>
-                                </a:rPr>
-                                <m:t>𝑏</m:t>
-                              </m:r>
-                              <m:r>
                                 <a:rPr lang="de-DE" sz="2400" b="0" i="1" smtClean="0">
                                   <a:solidFill>
                                     <a:schemeClr val="tx1"/>
@@ -11939,8 +11767,8 @@
             </p:nvSpPr>
             <p:spPr>
               <a:xfrm>
-                <a:off x="12607034" y="1392425"/>
-                <a:ext cx="4106573" cy="2871189"/>
+                <a:off x="7946474" y="4545597"/>
+                <a:ext cx="2507295" cy="1502310"/>
               </a:xfrm>
               <a:prstGeom prst="roundRect">
                 <a:avLst>
@@ -11977,83 +11805,10 @@
           </p:sp>
         </mc:Fallback>
       </mc:AlternateContent>
-      <p:sp>
-        <p:nvSpPr>
-          <p:cNvPr id="10" name="TextBox 9"/>
-          <p:cNvSpPr txBox="1"/>
-          <p:nvPr/>
-        </p:nvSpPr>
-        <p:spPr>
-          <a:xfrm>
-            <a:off x="927100" y="1886858"/>
-            <a:ext cx="10337800" cy="3108543"/>
-          </a:xfrm>
-          <a:prstGeom prst="rect">
-            <a:avLst/>
-          </a:prstGeom>
-          <a:noFill/>
-        </p:spPr>
-        <p:txBody>
-          <a:bodyPr wrap="square" rtlCol="0">
-            <a:spAutoFit/>
-          </a:bodyPr>
-          <a:lstStyle/>
-          <a:p>
-            <a:r>
-              <a:rPr lang="de-DE" sz="2800" dirty="0">
-                <a:latin typeface="Bahnschrift" panose="020B0502040204020203" pitchFamily="34" charset="0"/>
-              </a:rPr>
-              <a:t>For each side</a:t>
-            </a:r>
-            <a:r>
-              <a:rPr lang="de-DE" sz="2800" dirty="0" smtClean="0">
-                <a:latin typeface="Bahnschrift" panose="020B0502040204020203" pitchFamily="34" charset="0"/>
-              </a:rPr>
-              <a:t>:</a:t>
-            </a:r>
-          </a:p>
-          <a:p>
-            <a:endParaRPr lang="de-DE" sz="2800" dirty="0">
-              <a:latin typeface="Bahnschrift" panose="020B0502040204020203" pitchFamily="34" charset="0"/>
-            </a:endParaRPr>
-          </a:p>
-          <a:p>
-            <a:endParaRPr lang="de-DE" sz="2800" dirty="0" smtClean="0">
-              <a:latin typeface="Bahnschrift" panose="020B0502040204020203" pitchFamily="34" charset="0"/>
-            </a:endParaRPr>
-          </a:p>
-          <a:p>
-            <a:endParaRPr lang="de-DE" sz="2800" dirty="0">
-              <a:latin typeface="Bahnschrift" panose="020B0502040204020203" pitchFamily="34" charset="0"/>
-            </a:endParaRPr>
-          </a:p>
-          <a:p>
-            <a:endParaRPr lang="de-DE" sz="2800" dirty="0" smtClean="0">
-              <a:latin typeface="Bahnschrift" panose="020B0502040204020203" pitchFamily="34" charset="0"/>
-            </a:endParaRPr>
-          </a:p>
-          <a:p>
-            <a:r>
-              <a:rPr lang="de-DE" sz="2800" dirty="0" smtClean="0">
-                <a:latin typeface="Bahnschrift" panose="020B0502040204020203" pitchFamily="34" charset="0"/>
-              </a:rPr>
-              <a:t>Their difference is used to calculate the probability to gamble:</a:t>
-            </a:r>
-            <a:endParaRPr lang="de-DE" sz="2800" dirty="0">
-              <a:latin typeface="Bahnschrift" panose="020B0502040204020203" pitchFamily="34" charset="0"/>
-            </a:endParaRPr>
-          </a:p>
-          <a:p>
-            <a:endParaRPr lang="en-GB" sz="2800" dirty="0">
-              <a:latin typeface="Bahnschrift" panose="020B0502040204020203" pitchFamily="34" charset="0"/>
-            </a:endParaRPr>
-          </a:p>
-        </p:txBody>
-      </p:sp>
     </p:spTree>
     <p:extLst>
       <p:ext uri="{BB962C8B-B14F-4D97-AF65-F5344CB8AC3E}">
-        <p14:creationId xmlns:p14="http://schemas.microsoft.com/office/powerpoint/2010/main" val="2438381814"/>
+        <p14:creationId xmlns:p14="http://schemas.microsoft.com/office/powerpoint/2010/main" val="1249006926"/>
       </p:ext>
     </p:extLst>
   </p:cSld>
@@ -12063,9 +11818,237 @@
   <p:timing>
     <p:tnLst>
       <p:par>
-        <p:cTn id="1" dur="indefinite" restart="never" nodeType="tmRoot"/>
+        <p:cTn id="1" dur="indefinite" restart="never" nodeType="tmRoot">
+          <p:childTnLst>
+            <p:seq concurrent="1" nextAc="seek">
+              <p:cTn id="2" dur="indefinite" nodeType="mainSeq">
+                <p:childTnLst>
+                  <p:par>
+                    <p:cTn id="3" fill="hold">
+                      <p:stCondLst>
+                        <p:cond delay="indefinite"/>
+                        <p:cond evt="onBegin" delay="0">
+                          <p:tn val="2"/>
+                        </p:cond>
+                      </p:stCondLst>
+                      <p:childTnLst>
+                        <p:par>
+                          <p:cTn id="4" fill="hold">
+                            <p:stCondLst>
+                              <p:cond delay="0"/>
+                            </p:stCondLst>
+                            <p:childTnLst>
+                              <p:par>
+                                <p:cTn id="5" presetID="1" presetClass="exit" presetSubtype="0" fill="hold" grpId="2" nodeType="withEffect">
+                                  <p:stCondLst>
+                                    <p:cond delay="0"/>
+                                  </p:stCondLst>
+                                  <p:childTnLst>
+                                    <p:set>
+                                      <p:cBhvr>
+                                        <p:cTn id="6" dur="1" fill="hold">
+                                          <p:stCondLst>
+                                            <p:cond delay="0"/>
+                                          </p:stCondLst>
+                                        </p:cTn>
+                                        <p:tgtEl>
+                                          <p:spTgt spid="9"/>
+                                        </p:tgtEl>
+                                        <p:attrNameLst>
+                                          <p:attrName>style.visibility</p:attrName>
+                                        </p:attrNameLst>
+                                      </p:cBhvr>
+                                      <p:to>
+                                        <p:strVal val="hidden"/>
+                                      </p:to>
+                                    </p:set>
+                                  </p:childTnLst>
+                                </p:cTn>
+                              </p:par>
+                            </p:childTnLst>
+                          </p:cTn>
+                        </p:par>
+                      </p:childTnLst>
+                    </p:cTn>
+                  </p:par>
+                  <p:par>
+                    <p:cTn id="7" fill="hold">
+                      <p:stCondLst>
+                        <p:cond delay="indefinite"/>
+                      </p:stCondLst>
+                      <p:childTnLst>
+                        <p:par>
+                          <p:cTn id="8" fill="hold">
+                            <p:stCondLst>
+                              <p:cond delay="0"/>
+                            </p:stCondLst>
+                            <p:childTnLst>
+                              <p:par>
+                                <p:cTn id="9" presetID="53" presetClass="entr" presetSubtype="16" fill="hold" grpId="0" nodeType="clickEffect">
+                                  <p:stCondLst>
+                                    <p:cond delay="0"/>
+                                  </p:stCondLst>
+                                  <p:childTnLst>
+                                    <p:set>
+                                      <p:cBhvr>
+                                        <p:cTn id="10" dur="1" fill="hold">
+                                          <p:stCondLst>
+                                            <p:cond delay="0"/>
+                                          </p:stCondLst>
+                                        </p:cTn>
+                                        <p:tgtEl>
+                                          <p:spTgt spid="9"/>
+                                        </p:tgtEl>
+                                        <p:attrNameLst>
+                                          <p:attrName>style.visibility</p:attrName>
+                                        </p:attrNameLst>
+                                      </p:cBhvr>
+                                      <p:to>
+                                        <p:strVal val="visible"/>
+                                      </p:to>
+                                    </p:set>
+                                    <p:anim calcmode="lin" valueType="num">
+                                      <p:cBhvr>
+                                        <p:cTn id="11" dur="250" fill="hold"/>
+                                        <p:tgtEl>
+                                          <p:spTgt spid="9"/>
+                                        </p:tgtEl>
+                                        <p:attrNameLst>
+                                          <p:attrName>ppt_w</p:attrName>
+                                        </p:attrNameLst>
+                                      </p:cBhvr>
+                                      <p:tavLst>
+                                        <p:tav tm="0">
+                                          <p:val>
+                                            <p:fltVal val="0"/>
+                                          </p:val>
+                                        </p:tav>
+                                        <p:tav tm="100000">
+                                          <p:val>
+                                            <p:strVal val="#ppt_w"/>
+                                          </p:val>
+                                        </p:tav>
+                                      </p:tavLst>
+                                    </p:anim>
+                                    <p:anim calcmode="lin" valueType="num">
+                                      <p:cBhvr>
+                                        <p:cTn id="12" dur="250" fill="hold"/>
+                                        <p:tgtEl>
+                                          <p:spTgt spid="9"/>
+                                        </p:tgtEl>
+                                        <p:attrNameLst>
+                                          <p:attrName>ppt_h</p:attrName>
+                                        </p:attrNameLst>
+                                      </p:cBhvr>
+                                      <p:tavLst>
+                                        <p:tav tm="0">
+                                          <p:val>
+                                            <p:fltVal val="0"/>
+                                          </p:val>
+                                        </p:tav>
+                                        <p:tav tm="100000">
+                                          <p:val>
+                                            <p:strVal val="#ppt_h"/>
+                                          </p:val>
+                                        </p:tav>
+                                      </p:tavLst>
+                                    </p:anim>
+                                    <p:animEffect transition="in" filter="fade">
+                                      <p:cBhvr>
+                                        <p:cTn id="13" dur="250"/>
+                                        <p:tgtEl>
+                                          <p:spTgt spid="9"/>
+                                        </p:tgtEl>
+                                      </p:cBhvr>
+                                    </p:animEffect>
+                                  </p:childTnLst>
+                                </p:cTn>
+                              </p:par>
+                            </p:childTnLst>
+                          </p:cTn>
+                        </p:par>
+                      </p:childTnLst>
+                    </p:cTn>
+                  </p:par>
+                  <p:par>
+                    <p:cTn id="14" fill="hold">
+                      <p:stCondLst>
+                        <p:cond delay="indefinite"/>
+                      </p:stCondLst>
+                      <p:childTnLst>
+                        <p:par>
+                          <p:cTn id="15" fill="hold">
+                            <p:stCondLst>
+                              <p:cond delay="0"/>
+                            </p:stCondLst>
+                            <p:childTnLst>
+                              <p:par>
+                                <p:cTn id="16" presetID="10" presetClass="exit" presetSubtype="0" fill="hold" grpId="1" nodeType="clickEffect">
+                                  <p:stCondLst>
+                                    <p:cond delay="0"/>
+                                  </p:stCondLst>
+                                  <p:childTnLst>
+                                    <p:animEffect transition="out" filter="fade">
+                                      <p:cBhvr>
+                                        <p:cTn id="17" dur="250"/>
+                                        <p:tgtEl>
+                                          <p:spTgt spid="9"/>
+                                        </p:tgtEl>
+                                      </p:cBhvr>
+                                    </p:animEffect>
+                                    <p:set>
+                                      <p:cBhvr>
+                                        <p:cTn id="18" dur="1" fill="hold">
+                                          <p:stCondLst>
+                                            <p:cond delay="249"/>
+                                          </p:stCondLst>
+                                        </p:cTn>
+                                        <p:tgtEl>
+                                          <p:spTgt spid="9"/>
+                                        </p:tgtEl>
+                                        <p:attrNameLst>
+                                          <p:attrName>style.visibility</p:attrName>
+                                        </p:attrNameLst>
+                                      </p:cBhvr>
+                                      <p:to>
+                                        <p:strVal val="hidden"/>
+                                      </p:to>
+                                    </p:set>
+                                  </p:childTnLst>
+                                </p:cTn>
+                              </p:par>
+                            </p:childTnLst>
+                          </p:cTn>
+                        </p:par>
+                      </p:childTnLst>
+                    </p:cTn>
+                  </p:par>
+                </p:childTnLst>
+              </p:cTn>
+              <p:prevCondLst>
+                <p:cond evt="onPrev" delay="0">
+                  <p:tgtEl>
+                    <p:sldTgt/>
+                  </p:tgtEl>
+                </p:cond>
+              </p:prevCondLst>
+              <p:nextCondLst>
+                <p:cond evt="onNext" delay="0">
+                  <p:tgtEl>
+                    <p:sldTgt/>
+                  </p:tgtEl>
+                </p:cond>
+              </p:nextCondLst>
+            </p:seq>
+          </p:childTnLst>
+        </p:cTn>
       </p:par>
     </p:tnLst>
+    <p:bldLst>
+      <p:bldP spid="9" grpId="0" animBg="1"/>
+      <p:bldP spid="9" grpId="1" animBg="1"/>
+      <p:bldP spid="9" grpId="2" animBg="1"/>
+    </p:bldLst>
   </p:timing>
 </p:sld>
 </file>
@@ -12745,7 +12728,7 @@
                 <a:lstStyle/>
                 <a:p>
                   <a:pPr algn="ctr"/>
-                  <a:endParaRPr lang="en-GB" sz="2800" i="1" dirty="0">
+                  <a:endParaRPr lang="en-GB" sz="2800" i="1" dirty="0" smtClean="0">
                     <a:solidFill>
                       <a:schemeClr val="tx1"/>
                     </a:solidFill>
@@ -12767,10 +12750,59 @@
                   <a:pPr algn="ctr"/>
                   <a14:m>
                     <m:oMath xmlns:m="http://schemas.openxmlformats.org/officeDocument/2006/math">
+                      <m:r>
+                        <a:rPr lang="de-DE" sz="2400" i="1" smtClean="0">
+                          <a:solidFill>
+                            <a:schemeClr val="tx1"/>
+                          </a:solidFill>
+                          <a:latin typeface="Cambria Math" panose="02040503050406030204" pitchFamily="18" charset="0"/>
+                        </a:rPr>
+                        <m:t>𝛽</m:t>
+                      </m:r>
+                      <m:r>
+                        <a:rPr lang="de-DE" sz="2400" b="0" i="1" smtClean="0">
+                          <a:solidFill>
+                            <a:schemeClr val="tx1"/>
+                          </a:solidFill>
+                          <a:latin typeface="Cambria Math" panose="02040503050406030204" pitchFamily="18" charset="0"/>
+                        </a:rPr>
+                        <m:t>=</m:t>
+                      </m:r>
+                    </m:oMath>
+                  </a14:m>
+                  <a:r>
+                    <a:rPr lang="de-DE" sz="2400" dirty="0" smtClean="0">
+                      <a:solidFill>
+                        <a:schemeClr val="tx1"/>
+                      </a:solidFill>
+                      <a:ea typeface="Cambria Math" panose="02040503050406030204" pitchFamily="18" charset="0"/>
+                    </a:rPr>
+                    <a:t> </a:t>
+                  </a:r>
+                  <a:r>
+                    <a:rPr lang="de-DE" sz="2400" dirty="0" smtClean="0">
+                      <a:solidFill>
+                        <a:schemeClr val="tx1"/>
+                      </a:solidFill>
+                      <a:latin typeface="Bahnschrift" panose="020B0502040204020203" pitchFamily="34" charset="0"/>
+                    </a:rPr>
+                    <a:t>temperature;</a:t>
+                  </a:r>
+                  <a:r>
+                    <a:rPr lang="de-DE" sz="2400" dirty="0" smtClean="0">
+                      <a:solidFill>
+                        <a:schemeClr val="tx1"/>
+                      </a:solidFill>
+                      <a:ea typeface="Cambria Math" panose="02040503050406030204" pitchFamily="18" charset="0"/>
+                    </a:rPr>
+                    <a:t> </a:t>
+                  </a:r>
+                  <a14:m>
+                    <m:oMath xmlns:m="http://schemas.openxmlformats.org/officeDocument/2006/math">
                       <m:sSub>
                         <m:sSubPr>
                           <m:ctrlPr>
-                            <a:rPr lang="de-DE" sz="2400" i="1">
+                            <a:rPr lang="de-DE" sz="2400" i="1" smtClean="0">
                               <a:solidFill>
                                 <a:schemeClr val="tx1"/>
                               </a:solidFill>
@@ -13176,6 +13208,79 @@
           </mc:Fallback>
         </mc:AlternateContent>
       </p:grpSp>
+      <p:sp>
+        <p:nvSpPr>
+          <p:cNvPr id="10" name="TextBox 9"/>
+          <p:cNvSpPr txBox="1"/>
+          <p:nvPr/>
+        </p:nvSpPr>
+        <p:spPr>
+          <a:xfrm>
+            <a:off x="927100" y="1886858"/>
+            <a:ext cx="10337800" cy="3108543"/>
+          </a:xfrm>
+          <a:prstGeom prst="rect">
+            <a:avLst/>
+          </a:prstGeom>
+          <a:noFill/>
+        </p:spPr>
+        <p:txBody>
+          <a:bodyPr wrap="square" rtlCol="0">
+            <a:spAutoFit/>
+          </a:bodyPr>
+          <a:lstStyle/>
+          <a:p>
+            <a:r>
+              <a:rPr lang="de-DE" sz="2800" dirty="0">
+                <a:latin typeface="Bahnschrift" panose="020B0502040204020203" pitchFamily="34" charset="0"/>
+              </a:rPr>
+              <a:t>For each side</a:t>
+            </a:r>
+            <a:r>
+              <a:rPr lang="de-DE" sz="2800" dirty="0" smtClean="0">
+                <a:latin typeface="Bahnschrift" panose="020B0502040204020203" pitchFamily="34" charset="0"/>
+              </a:rPr>
+              <a:t>:</a:t>
+            </a:r>
+          </a:p>
+          <a:p>
+            <a:endParaRPr lang="de-DE" sz="2800" dirty="0">
+              <a:latin typeface="Bahnschrift" panose="020B0502040204020203" pitchFamily="34" charset="0"/>
+            </a:endParaRPr>
+          </a:p>
+          <a:p>
+            <a:endParaRPr lang="de-DE" sz="2800" dirty="0" smtClean="0">
+              <a:latin typeface="Bahnschrift" panose="020B0502040204020203" pitchFamily="34" charset="0"/>
+            </a:endParaRPr>
+          </a:p>
+          <a:p>
+            <a:endParaRPr lang="de-DE" sz="2800" dirty="0">
+              <a:latin typeface="Bahnschrift" panose="020B0502040204020203" pitchFamily="34" charset="0"/>
+            </a:endParaRPr>
+          </a:p>
+          <a:p>
+            <a:endParaRPr lang="de-DE" sz="2800" dirty="0" smtClean="0">
+              <a:latin typeface="Bahnschrift" panose="020B0502040204020203" pitchFamily="34" charset="0"/>
+            </a:endParaRPr>
+          </a:p>
+          <a:p>
+            <a:r>
+              <a:rPr lang="de-DE" sz="2800" dirty="0" smtClean="0">
+                <a:latin typeface="Bahnschrift" panose="020B0502040204020203" pitchFamily="34" charset="0"/>
+              </a:rPr>
+              <a:t>Their difference is used to calculate the probability to gamble:</a:t>
+            </a:r>
+            <a:endParaRPr lang="de-DE" sz="2800" dirty="0">
+              <a:latin typeface="Bahnschrift" panose="020B0502040204020203" pitchFamily="34" charset="0"/>
+            </a:endParaRPr>
+          </a:p>
+          <a:p>
+            <a:endParaRPr lang="en-GB" sz="2800" dirty="0">
+              <a:latin typeface="Bahnschrift" panose="020B0502040204020203" pitchFamily="34" charset="0"/>
+            </a:endParaRPr>
+          </a:p>
+        </p:txBody>
+      </p:sp>
       <mc:AlternateContent xmlns:mc="http://schemas.openxmlformats.org/markup-compatibility/2006">
         <mc:Choice xmlns:a14="http://schemas.microsoft.com/office/drawing/2010/main" Requires="a14">
           <p:sp>
@@ -13186,7 +13291,7 @@
             </p:nvSpPr>
             <p:spPr>
               <a:xfrm>
-                <a:off x="12607034" y="1392425"/>
+                <a:off x="12557098" y="2439693"/>
                 <a:ext cx="4106573" cy="2871189"/>
               </a:xfrm>
               <a:prstGeom prst="roundRect">
@@ -13458,7 +13563,7 @@
             </p:nvSpPr>
             <p:spPr>
               <a:xfrm>
-                <a:off x="12607034" y="1392425"/>
+                <a:off x="12557098" y="2439693"/>
                 <a:ext cx="4106573" cy="2871189"/>
               </a:xfrm>
               <a:prstGeom prst="roundRect">
@@ -13496,83 +13601,10 @@
           </p:sp>
         </mc:Fallback>
       </mc:AlternateContent>
-      <p:sp>
-        <p:nvSpPr>
-          <p:cNvPr id="10" name="TextBox 9"/>
-          <p:cNvSpPr txBox="1"/>
-          <p:nvPr/>
-        </p:nvSpPr>
-        <p:spPr>
-          <a:xfrm>
-            <a:off x="927100" y="1886858"/>
-            <a:ext cx="10337800" cy="3108543"/>
-          </a:xfrm>
-          <a:prstGeom prst="rect">
-            <a:avLst/>
-          </a:prstGeom>
-          <a:noFill/>
-        </p:spPr>
-        <p:txBody>
-          <a:bodyPr wrap="square" rtlCol="0">
-            <a:spAutoFit/>
-          </a:bodyPr>
-          <a:lstStyle/>
-          <a:p>
-            <a:r>
-              <a:rPr lang="de-DE" sz="2800" dirty="0">
-                <a:latin typeface="Bahnschrift" panose="020B0502040204020203" pitchFamily="34" charset="0"/>
-              </a:rPr>
-              <a:t>For each side</a:t>
-            </a:r>
-            <a:r>
-              <a:rPr lang="de-DE" sz="2800" dirty="0" smtClean="0">
-                <a:latin typeface="Bahnschrift" panose="020B0502040204020203" pitchFamily="34" charset="0"/>
-              </a:rPr>
-              <a:t>:</a:t>
-            </a:r>
-          </a:p>
-          <a:p>
-            <a:endParaRPr lang="de-DE" sz="2800" dirty="0">
-              <a:latin typeface="Bahnschrift" panose="020B0502040204020203" pitchFamily="34" charset="0"/>
-            </a:endParaRPr>
-          </a:p>
-          <a:p>
-            <a:endParaRPr lang="de-DE" sz="2800" dirty="0" smtClean="0">
-              <a:latin typeface="Bahnschrift" panose="020B0502040204020203" pitchFamily="34" charset="0"/>
-            </a:endParaRPr>
-          </a:p>
-          <a:p>
-            <a:endParaRPr lang="de-DE" sz="2800" dirty="0">
-              <a:latin typeface="Bahnschrift" panose="020B0502040204020203" pitchFamily="34" charset="0"/>
-            </a:endParaRPr>
-          </a:p>
-          <a:p>
-            <a:endParaRPr lang="de-DE" sz="2800" dirty="0" smtClean="0">
-              <a:latin typeface="Bahnschrift" panose="020B0502040204020203" pitchFamily="34" charset="0"/>
-            </a:endParaRPr>
-          </a:p>
-          <a:p>
-            <a:r>
-              <a:rPr lang="de-DE" sz="2800" dirty="0" smtClean="0">
-                <a:latin typeface="Bahnschrift" panose="020B0502040204020203" pitchFamily="34" charset="0"/>
-              </a:rPr>
-              <a:t>Their difference is used to calculate the probability to gamble:</a:t>
-            </a:r>
-            <a:endParaRPr lang="de-DE" sz="2800" dirty="0">
-              <a:latin typeface="Bahnschrift" panose="020B0502040204020203" pitchFamily="34" charset="0"/>
-            </a:endParaRPr>
-          </a:p>
-          <a:p>
-            <a:endParaRPr lang="en-GB" sz="2800" dirty="0">
-              <a:latin typeface="Bahnschrift" panose="020B0502040204020203" pitchFamily="34" charset="0"/>
-            </a:endParaRPr>
-          </a:p>
-        </p:txBody>
-      </p:sp>
     </p:spTree>
     <p:extLst>
       <p:ext uri="{BB962C8B-B14F-4D97-AF65-F5344CB8AC3E}">
-        <p14:creationId xmlns:p14="http://schemas.microsoft.com/office/powerpoint/2010/main" val="1249006926"/>
+        <p14:creationId xmlns:p14="http://schemas.microsoft.com/office/powerpoint/2010/main" val="3493098249"/>
       </p:ext>
     </p:extLst>
   </p:cSld>
@@ -14104,23 +14136,81 @@
       </p:sp>
       <p:sp>
         <p:nvSpPr>
-          <p:cNvPr id="3" name="Content Placeholder 2"/>
-          <p:cNvSpPr>
-            <a:spLocks noGrp="1"/>
-          </p:cNvSpPr>
+          <p:cNvPr id="5" name="Rectangle 4"/>
+          <p:cNvSpPr/>
+          <p:nvPr/>
+        </p:nvSpPr>
+        <p:spPr>
+          <a:xfrm>
+            <a:off x="-162839" y="5723898"/>
+            <a:ext cx="12776548" cy="1803748"/>
+          </a:xfrm>
+          <a:prstGeom prst="rect">
+            <a:avLst/>
+          </a:prstGeom>
+          <a:solidFill>
+            <a:srgbClr val="CFF1E6"/>
+          </a:solidFill>
+          <a:ln w="76200">
+            <a:solidFill>
+              <a:srgbClr val="0CB87F"/>
+            </a:solidFill>
+          </a:ln>
+        </p:spPr>
+        <p:style>
+          <a:lnRef idx="2">
+            <a:schemeClr val="accent1">
+              <a:shade val="50000"/>
+            </a:schemeClr>
+          </a:lnRef>
+          <a:fillRef idx="1">
+            <a:schemeClr val="accent1"/>
+          </a:fillRef>
+          <a:effectRef idx="0">
+            <a:schemeClr val="accent1"/>
+          </a:effectRef>
+          <a:fontRef idx="minor">
+            <a:schemeClr val="lt1"/>
+          </a:fontRef>
+        </p:style>
+        <p:txBody>
+          <a:bodyPr rtlCol="0" anchor="ctr"/>
+          <a:lstStyle/>
+          <a:p>
+            <a:pPr algn="ctr"/>
+            <a:endParaRPr lang="en-GB" dirty="0"/>
+          </a:p>
+        </p:txBody>
+      </p:sp>
+      <p:pic>
+        <p:nvPicPr>
+          <p:cNvPr id="9" name="Content Placeholder 8"/>
+          <p:cNvPicPr>
+            <a:picLocks noGrp="1" noChangeAspect="1"/>
+          </p:cNvPicPr>
           <p:nvPr>
             <p:ph idx="1"/>
           </p:nvPr>
-        </p:nvSpPr>
-        <p:spPr/>
-        <p:txBody>
-          <a:bodyPr/>
-          <a:lstStyle/>
-          <a:p>
-            <a:endParaRPr lang="en-GB"/>
-          </a:p>
-        </p:txBody>
-      </p:sp>
+        </p:nvPicPr>
+        <p:blipFill>
+          <a:blip r:embed="rId2">
+            <a:extLst>
+              <a:ext uri="{28A0092B-C50C-407E-A947-70E740481C1C}">
+                <a14:useLocalDpi xmlns:a14="http://schemas.microsoft.com/office/drawing/2010/main" val="0"/>
+              </a:ext>
+            </a:extLst>
+          </a:blip>
+          <a:stretch>
+            <a:fillRect/>
+          </a:stretch>
+        </p:blipFill>
+        <p:spPr>
+          <a:xfrm>
+            <a:off x="0" y="181426"/>
+            <a:ext cx="12192000" cy="6502401"/>
+          </a:xfrm>
+        </p:spPr>
+      </p:pic>
     </p:spTree>
     <p:extLst>
       <p:ext uri="{BB962C8B-B14F-4D97-AF65-F5344CB8AC3E}">
@@ -14305,6 +14395,13 @@
   <p:clrMapOvr>
     <a:masterClrMapping/>
   </p:clrMapOvr>
+  <p:timing>
+    <p:tnLst>
+      <p:par>
+        <p:cTn id="1" dur="indefinite" restart="never" nodeType="tmRoot"/>
+      </p:par>
+    </p:tnLst>
+  </p:timing>
 </p:sld>
 </file>
 
@@ -14371,6 +14468,36 @@
           </a:p>
         </p:txBody>
       </p:sp>
+      <p:pic>
+        <p:nvPicPr>
+          <p:cNvPr id="4" name="Picture 3"/>
+          <p:cNvPicPr>
+            <a:picLocks noChangeAspect="1"/>
+          </p:cNvPicPr>
+          <p:nvPr/>
+        </p:nvPicPr>
+        <p:blipFill>
+          <a:blip r:embed="rId2">
+            <a:extLst>
+              <a:ext uri="{28A0092B-C50C-407E-A947-70E740481C1C}">
+                <a14:useLocalDpi xmlns:a14="http://schemas.microsoft.com/office/drawing/2010/main" val="0"/>
+              </a:ext>
+            </a:extLst>
+          </a:blip>
+          <a:stretch>
+            <a:fillRect/>
+          </a:stretch>
+        </p:blipFill>
+        <p:spPr>
+          <a:xfrm>
+            <a:off x="1376036" y="1150609"/>
+            <a:ext cx="8725907" cy="5026354"/>
+          </a:xfrm>
+          <a:prstGeom prst="rect">
+            <a:avLst/>
+          </a:prstGeom>
+        </p:spPr>
+      </p:pic>
     </p:spTree>
     <p:extLst>
       <p:ext uri="{BB962C8B-B14F-4D97-AF65-F5344CB8AC3E}">
@@ -14381,6 +14508,296 @@
   <p:clrMapOvr>
     <a:masterClrMapping/>
   </p:clrMapOvr>
+  <p:timing>
+    <p:tnLst>
+      <p:par>
+        <p:cTn id="1" dur="indefinite" restart="never" nodeType="tmRoot"/>
+      </p:par>
+    </p:tnLst>
+  </p:timing>
+</p:sld>
+</file>
+
+<file path=ppt/slides/slide27.xml><?xml version="1.0" encoding="utf-8"?>
+<p:sld xmlns:a="http://schemas.openxmlformats.org/drawingml/2006/main" xmlns:r="http://schemas.openxmlformats.org/officeDocument/2006/relationships" xmlns:p="http://schemas.openxmlformats.org/presentationml/2006/main">
+  <p:cSld>
+    <p:spTree>
+      <p:nvGrpSpPr>
+        <p:cNvPr id="1" name=""/>
+        <p:cNvGrpSpPr/>
+        <p:nvPr/>
+      </p:nvGrpSpPr>
+      <p:grpSpPr>
+        <a:xfrm>
+          <a:off x="0" y="0"/>
+          <a:ext cx="0" cy="0"/>
+          <a:chOff x="0" y="0"/>
+          <a:chExt cx="0" cy="0"/>
+        </a:xfrm>
+      </p:grpSpPr>
+      <p:sp>
+        <p:nvSpPr>
+          <p:cNvPr id="2" name="Title 1"/>
+          <p:cNvSpPr>
+            <a:spLocks noGrp="1"/>
+          </p:cNvSpPr>
+          <p:nvPr>
+            <p:ph type="title"/>
+          </p:nvPr>
+        </p:nvSpPr>
+        <p:spPr/>
+        <p:txBody>
+          <a:bodyPr/>
+          <a:lstStyle/>
+          <a:p>
+            <a:endParaRPr lang="en-GB"/>
+          </a:p>
+        </p:txBody>
+      </p:sp>
+      <p:sp>
+        <p:nvSpPr>
+          <p:cNvPr id="5" name="Rectangle 4"/>
+          <p:cNvSpPr/>
+          <p:nvPr/>
+        </p:nvSpPr>
+        <p:spPr>
+          <a:xfrm>
+            <a:off x="-316590" y="5583745"/>
+            <a:ext cx="12776548" cy="1803748"/>
+          </a:xfrm>
+          <a:prstGeom prst="rect">
+            <a:avLst/>
+          </a:prstGeom>
+          <a:solidFill>
+            <a:srgbClr val="CFF1E6"/>
+          </a:solidFill>
+          <a:ln w="76200">
+            <a:solidFill>
+              <a:srgbClr val="0CB87F"/>
+            </a:solidFill>
+          </a:ln>
+        </p:spPr>
+        <p:style>
+          <a:lnRef idx="2">
+            <a:schemeClr val="accent1">
+              <a:shade val="50000"/>
+            </a:schemeClr>
+          </a:lnRef>
+          <a:fillRef idx="1">
+            <a:schemeClr val="accent1"/>
+          </a:fillRef>
+          <a:effectRef idx="0">
+            <a:schemeClr val="accent1"/>
+          </a:effectRef>
+          <a:fontRef idx="minor">
+            <a:schemeClr val="lt1"/>
+          </a:fontRef>
+        </p:style>
+        <p:txBody>
+          <a:bodyPr rtlCol="0" anchor="ctr"/>
+          <a:lstStyle/>
+          <a:p>
+            <a:pPr algn="ctr"/>
+            <a:endParaRPr lang="en-GB" dirty="0"/>
+          </a:p>
+        </p:txBody>
+      </p:sp>
+      <p:pic>
+        <p:nvPicPr>
+          <p:cNvPr id="4" name="Content Placeholder 3"/>
+          <p:cNvPicPr>
+            <a:picLocks noGrp="1" noChangeAspect="1"/>
+          </p:cNvPicPr>
+          <p:nvPr>
+            <p:ph idx="1"/>
+          </p:nvPr>
+        </p:nvPicPr>
+        <p:blipFill>
+          <a:blip r:embed="rId2">
+            <a:extLst>
+              <a:ext uri="{28A0092B-C50C-407E-A947-70E740481C1C}">
+                <a14:useLocalDpi xmlns:a14="http://schemas.microsoft.com/office/drawing/2010/main" val="0"/>
+              </a:ext>
+            </a:extLst>
+          </a:blip>
+          <a:stretch>
+            <a:fillRect/>
+          </a:stretch>
+        </p:blipFill>
+        <p:spPr>
+          <a:xfrm>
+            <a:off x="0" y="566058"/>
+            <a:ext cx="12192000" cy="5741530"/>
+          </a:xfrm>
+        </p:spPr>
+      </p:pic>
+    </p:spTree>
+    <p:extLst>
+      <p:ext uri="{BB962C8B-B14F-4D97-AF65-F5344CB8AC3E}">
+        <p14:creationId xmlns:p14="http://schemas.microsoft.com/office/powerpoint/2010/main" val="1339492739"/>
+      </p:ext>
+    </p:extLst>
+  </p:cSld>
+  <p:clrMapOvr>
+    <a:masterClrMapping/>
+  </p:clrMapOvr>
+  <p:timing>
+    <p:tnLst>
+      <p:par>
+        <p:cTn id="1" dur="indefinite" restart="never" nodeType="tmRoot"/>
+      </p:par>
+    </p:tnLst>
+  </p:timing>
+</p:sld>
+</file>
+
+<file path=ppt/slides/slide28.xml><?xml version="1.0" encoding="utf-8"?>
+<p:sld xmlns:a="http://schemas.openxmlformats.org/drawingml/2006/main" xmlns:r="http://schemas.openxmlformats.org/officeDocument/2006/relationships" xmlns:p="http://schemas.openxmlformats.org/presentationml/2006/main">
+  <p:cSld>
+    <p:spTree>
+      <p:nvGrpSpPr>
+        <p:cNvPr id="1" name=""/>
+        <p:cNvGrpSpPr/>
+        <p:nvPr/>
+      </p:nvGrpSpPr>
+      <p:grpSpPr>
+        <a:xfrm>
+          <a:off x="0" y="0"/>
+          <a:ext cx="0" cy="0"/>
+          <a:chOff x="0" y="0"/>
+          <a:chExt cx="0" cy="0"/>
+        </a:xfrm>
+      </p:grpSpPr>
+      <p:sp>
+        <p:nvSpPr>
+          <p:cNvPr id="2" name="Title 1"/>
+          <p:cNvSpPr>
+            <a:spLocks noGrp="1"/>
+          </p:cNvSpPr>
+          <p:nvPr>
+            <p:ph type="title"/>
+          </p:nvPr>
+        </p:nvSpPr>
+        <p:spPr/>
+        <p:txBody>
+          <a:bodyPr/>
+          <a:lstStyle/>
+          <a:p>
+            <a:endParaRPr lang="en-GB"/>
+          </a:p>
+        </p:txBody>
+      </p:sp>
+      <p:sp>
+        <p:nvSpPr>
+          <p:cNvPr id="3" name="Content Placeholder 2"/>
+          <p:cNvSpPr>
+            <a:spLocks noGrp="1"/>
+          </p:cNvSpPr>
+          <p:nvPr>
+            <p:ph idx="1"/>
+          </p:nvPr>
+        </p:nvSpPr>
+        <p:spPr/>
+        <p:txBody>
+          <a:bodyPr/>
+          <a:lstStyle/>
+          <a:p>
+            <a:endParaRPr lang="en-GB"/>
+          </a:p>
+        </p:txBody>
+      </p:sp>
+    </p:spTree>
+    <p:extLst>
+      <p:ext uri="{BB962C8B-B14F-4D97-AF65-F5344CB8AC3E}">
+        <p14:creationId xmlns:p14="http://schemas.microsoft.com/office/powerpoint/2010/main" val="1144621004"/>
+      </p:ext>
+    </p:extLst>
+  </p:cSld>
+  <p:clrMapOvr>
+    <a:masterClrMapping/>
+  </p:clrMapOvr>
+  <p:timing>
+    <p:tnLst>
+      <p:par>
+        <p:cTn id="1" dur="indefinite" restart="never" nodeType="tmRoot"/>
+      </p:par>
+    </p:tnLst>
+  </p:timing>
+</p:sld>
+</file>
+
+<file path=ppt/slides/slide29.xml><?xml version="1.0" encoding="utf-8"?>
+<p:sld xmlns:a="http://schemas.openxmlformats.org/drawingml/2006/main" xmlns:r="http://schemas.openxmlformats.org/officeDocument/2006/relationships" xmlns:p="http://schemas.openxmlformats.org/presentationml/2006/main">
+  <p:cSld>
+    <p:spTree>
+      <p:nvGrpSpPr>
+        <p:cNvPr id="1" name=""/>
+        <p:cNvGrpSpPr/>
+        <p:nvPr/>
+      </p:nvGrpSpPr>
+      <p:grpSpPr>
+        <a:xfrm>
+          <a:off x="0" y="0"/>
+          <a:ext cx="0" cy="0"/>
+          <a:chOff x="0" y="0"/>
+          <a:chExt cx="0" cy="0"/>
+        </a:xfrm>
+      </p:grpSpPr>
+      <p:sp>
+        <p:nvSpPr>
+          <p:cNvPr id="2" name="Title 1"/>
+          <p:cNvSpPr>
+            <a:spLocks noGrp="1"/>
+          </p:cNvSpPr>
+          <p:nvPr>
+            <p:ph type="title"/>
+          </p:nvPr>
+        </p:nvSpPr>
+        <p:spPr/>
+        <p:txBody>
+          <a:bodyPr/>
+          <a:lstStyle/>
+          <a:p>
+            <a:endParaRPr lang="en-GB"/>
+          </a:p>
+        </p:txBody>
+      </p:sp>
+      <p:sp>
+        <p:nvSpPr>
+          <p:cNvPr id="3" name="Content Placeholder 2"/>
+          <p:cNvSpPr>
+            <a:spLocks noGrp="1"/>
+          </p:cNvSpPr>
+          <p:nvPr>
+            <p:ph idx="1"/>
+          </p:nvPr>
+        </p:nvSpPr>
+        <p:spPr/>
+        <p:txBody>
+          <a:bodyPr/>
+          <a:lstStyle/>
+          <a:p>
+            <a:endParaRPr lang="en-GB"/>
+          </a:p>
+        </p:txBody>
+      </p:sp>
+    </p:spTree>
+    <p:extLst>
+      <p:ext uri="{BB962C8B-B14F-4D97-AF65-F5344CB8AC3E}">
+        <p14:creationId xmlns:p14="http://schemas.microsoft.com/office/powerpoint/2010/main" val="1164828355"/>
+      </p:ext>
+    </p:extLst>
+  </p:cSld>
+  <p:clrMapOvr>
+    <a:masterClrMapping/>
+  </p:clrMapOvr>
+  <p:timing>
+    <p:tnLst>
+      <p:par>
+        <p:cTn id="1" dur="indefinite" restart="never" nodeType="tmRoot"/>
+      </p:par>
+    </p:tnLst>
+  </p:timing>
 </p:sld>
 </file>
 

--- a/presentation/Prototype.pptx
+++ b/presentation/Prototype.pptx
@@ -5,7 +5,7 @@
     <p:sldMasterId id="2147483648" r:id="rId1"/>
   </p:sldMasterIdLst>
   <p:handoutMasterIdLst>
-    <p:handoutMasterId r:id="rId31"/>
+    <p:handoutMasterId r:id="rId35"/>
   </p:handoutMasterIdLst>
   <p:sldIdLst>
     <p:sldId id="256" r:id="rId2"/>
@@ -21,22 +21,26 @@
     <p:sldId id="260" r:id="rId12"/>
     <p:sldId id="268" r:id="rId13"/>
     <p:sldId id="274" r:id="rId14"/>
-    <p:sldId id="262" r:id="rId15"/>
-    <p:sldId id="275" r:id="rId16"/>
-    <p:sldId id="277" r:id="rId17"/>
-    <p:sldId id="279" r:id="rId18"/>
-    <p:sldId id="278" r:id="rId19"/>
-    <p:sldId id="276" r:id="rId20"/>
-    <p:sldId id="263" r:id="rId21"/>
-    <p:sldId id="283" r:id="rId22"/>
-    <p:sldId id="280" r:id="rId23"/>
-    <p:sldId id="282" r:id="rId24"/>
-    <p:sldId id="265" r:id="rId25"/>
-    <p:sldId id="266" r:id="rId26"/>
-    <p:sldId id="267" r:id="rId27"/>
-    <p:sldId id="284" r:id="rId28"/>
-    <p:sldId id="285" r:id="rId29"/>
-    <p:sldId id="286" r:id="rId30"/>
+    <p:sldId id="287" r:id="rId15"/>
+    <p:sldId id="262" r:id="rId16"/>
+    <p:sldId id="275" r:id="rId17"/>
+    <p:sldId id="277" r:id="rId18"/>
+    <p:sldId id="279" r:id="rId19"/>
+    <p:sldId id="278" r:id="rId20"/>
+    <p:sldId id="276" r:id="rId21"/>
+    <p:sldId id="263" r:id="rId22"/>
+    <p:sldId id="283" r:id="rId23"/>
+    <p:sldId id="280" r:id="rId24"/>
+    <p:sldId id="282" r:id="rId25"/>
+    <p:sldId id="265" r:id="rId26"/>
+    <p:sldId id="289" r:id="rId27"/>
+    <p:sldId id="290" r:id="rId28"/>
+    <p:sldId id="291" r:id="rId29"/>
+    <p:sldId id="288" r:id="rId30"/>
+    <p:sldId id="267" r:id="rId31"/>
+    <p:sldId id="284" r:id="rId32"/>
+    <p:sldId id="285" r:id="rId33"/>
+    <p:sldId id="286" r:id="rId34"/>
   </p:sldIdLst>
   <p:sldSz cx="12192000" cy="6858000"/>
   <p:notesSz cx="6858000" cy="9144000"/>
@@ -912,7 +916,7 @@
         <a:lstStyle/>
         <a:p>
           <a:r>
-            <a:rPr lang="en-US" sz="2800" kern="1200" dirty="0" smtClean="0">
+            <a:rPr lang="en-US" sz="2800" kern="1200" dirty="0">
               <a:solidFill>
                 <a:schemeClr val="tx1"/>
               </a:solidFill>
@@ -922,14 +926,6 @@
             </a:rPr>
             <a:t>out come</a:t>
           </a:r>
-          <a:endParaRPr lang="en-US" sz="2800" kern="1200" dirty="0">
-            <a:solidFill>
-              <a:schemeClr val="tx1"/>
-            </a:solidFill>
-            <a:latin typeface="Bahnschrift" panose="020B0502040204020203" pitchFamily="34" charset="0"/>
-            <a:ea typeface="+mn-ea"/>
-            <a:cs typeface="+mn-cs"/>
-          </a:endParaRPr>
         </a:p>
       </dgm:t>
     </dgm:pt>
@@ -967,7 +963,7 @@
         <a:lstStyle/>
         <a:p>
           <a:r>
-            <a:rPr lang="en-US" sz="2800" b="1" kern="1200" dirty="0" smtClean="0">
+            <a:rPr lang="en-US" sz="2800" b="1" kern="1200" dirty="0">
               <a:solidFill>
                 <a:schemeClr val="tx1"/>
               </a:solidFill>
@@ -977,14 +973,6 @@
             </a:rPr>
             <a:t>latent variables</a:t>
           </a:r>
-          <a:endParaRPr lang="en-US" sz="2800" b="1" kern="1200" dirty="0">
-            <a:solidFill>
-              <a:schemeClr val="tx1"/>
-            </a:solidFill>
-            <a:latin typeface="Bahnschrift" panose="020B0502040204020203" pitchFamily="34" charset="0"/>
-            <a:ea typeface="+mn-ea"/>
-            <a:cs typeface="+mn-cs"/>
-          </a:endParaRPr>
         </a:p>
       </dgm:t>
     </dgm:pt>
@@ -1022,7 +1010,7 @@
         <a:lstStyle/>
         <a:p>
           <a:r>
-            <a:rPr lang="en-US" sz="2800" kern="1200" dirty="0" smtClean="0">
+            <a:rPr lang="en-US" sz="2800" kern="1200" dirty="0">
               <a:solidFill>
                 <a:schemeClr val="tx1"/>
               </a:solidFill>
@@ -1032,14 +1020,6 @@
             </a:rPr>
             <a:t>choice</a:t>
           </a:r>
-          <a:endParaRPr lang="en-US" sz="2800" kern="1200" dirty="0">
-            <a:solidFill>
-              <a:schemeClr val="tx1"/>
-            </a:solidFill>
-            <a:latin typeface="Bahnschrift" panose="020B0502040204020203" pitchFamily="34" charset="0"/>
-            <a:ea typeface="+mn-ea"/>
-            <a:cs typeface="+mn-cs"/>
-          </a:endParaRPr>
         </a:p>
       </dgm:t>
     </dgm:pt>
@@ -1078,13 +1058,6 @@
     <dgm:pt modelId="{ECE168B9-97D6-4F75-9289-AF0458231259}" type="pres">
       <dgm:prSet presAssocID="{4DEA52EC-7676-47C9-8D53-46B739BD2587}" presName="wedge1" presStyleLbl="node1" presStyleIdx="0" presStyleCnt="3"/>
       <dgm:spPr/>
-      <dgm:t>
-        <a:bodyPr/>
-        <a:lstStyle/>
-        <a:p>
-          <a:endParaRPr lang="en-US"/>
-        </a:p>
-      </dgm:t>
     </dgm:pt>
     <dgm:pt modelId="{936F56D5-CB26-4B20-B0FA-6C6FE1834F39}" type="pres">
       <dgm:prSet presAssocID="{4DEA52EC-7676-47C9-8D53-46B739BD2587}" presName="dummy1a" presStyleCnt="0"/>
@@ -1103,24 +1076,10 @@
         </dgm:presLayoutVars>
       </dgm:prSet>
       <dgm:spPr/>
-      <dgm:t>
-        <a:bodyPr/>
-        <a:lstStyle/>
-        <a:p>
-          <a:endParaRPr lang="en-US"/>
-        </a:p>
-      </dgm:t>
     </dgm:pt>
     <dgm:pt modelId="{EB2BDB46-B1F8-4502-BAF4-FF4CD80D55D7}" type="pres">
       <dgm:prSet presAssocID="{4DEA52EC-7676-47C9-8D53-46B739BD2587}" presName="wedge2" presStyleLbl="node1" presStyleIdx="1" presStyleCnt="3" custScaleX="121659" custScaleY="114947"/>
       <dgm:spPr/>
-      <dgm:t>
-        <a:bodyPr/>
-        <a:lstStyle/>
-        <a:p>
-          <a:endParaRPr lang="en-US"/>
-        </a:p>
-      </dgm:t>
     </dgm:pt>
     <dgm:pt modelId="{BBCA0883-4239-43BF-8066-2531F61B2759}" type="pres">
       <dgm:prSet presAssocID="{4DEA52EC-7676-47C9-8D53-46B739BD2587}" presName="dummy2a" presStyleCnt="0"/>
@@ -1139,24 +1098,10 @@
         </dgm:presLayoutVars>
       </dgm:prSet>
       <dgm:spPr/>
-      <dgm:t>
-        <a:bodyPr/>
-        <a:lstStyle/>
-        <a:p>
-          <a:endParaRPr lang="en-US"/>
-        </a:p>
-      </dgm:t>
     </dgm:pt>
     <dgm:pt modelId="{D5E000D8-9AAE-49A4-87FF-0642AB719E81}" type="pres">
       <dgm:prSet presAssocID="{4DEA52EC-7676-47C9-8D53-46B739BD2587}" presName="wedge3" presStyleLbl="node1" presStyleIdx="2" presStyleCnt="3"/>
       <dgm:spPr/>
-      <dgm:t>
-        <a:bodyPr/>
-        <a:lstStyle/>
-        <a:p>
-          <a:endParaRPr lang="en-US"/>
-        </a:p>
-      </dgm:t>
     </dgm:pt>
     <dgm:pt modelId="{8245ECD6-57B2-4F6F-B83D-4AB0EA52FE4D}" type="pres">
       <dgm:prSet presAssocID="{4DEA52EC-7676-47C9-8D53-46B739BD2587}" presName="dummy3a" presStyleCnt="0"/>
@@ -1175,13 +1120,6 @@
         </dgm:presLayoutVars>
       </dgm:prSet>
       <dgm:spPr/>
-      <dgm:t>
-        <a:bodyPr/>
-        <a:lstStyle/>
-        <a:p>
-          <a:endParaRPr lang="en-US"/>
-        </a:p>
-      </dgm:t>
     </dgm:pt>
     <dgm:pt modelId="{E8DD7363-32E9-4432-A10F-A450F8052676}" type="pres">
       <dgm:prSet presAssocID="{2B269CAD-26B2-49B7-8DBE-9F0441B9BE1E}" presName="arrowWedge1" presStyleLbl="fgSibTrans2D1" presStyleIdx="0" presStyleCnt="3"/>
@@ -1210,15 +1148,15 @@
   </dgm:ptLst>
   <dgm:cxnLst>
     <dgm:cxn modelId="{A3BD1D09-917F-446D-BBFC-01EE249FBAC4}" srcId="{4DEA52EC-7676-47C9-8D53-46B739BD2587}" destId="{DBF283F7-617E-4082-A2AD-BFAAF939546A}" srcOrd="0" destOrd="0" parTransId="{48859DF4-1CAC-4FFA-950E-A8C3D6C6EDD0}" sibTransId="{2B269CAD-26B2-49B7-8DBE-9F0441B9BE1E}"/>
-    <dgm:cxn modelId="{BB0E7396-0C60-44A9-95EE-3F01D4E9DE43}" type="presOf" srcId="{0BC66A2B-1DD2-4A8C-A7E6-4706A5A565F2}" destId="{EB2BDB46-B1F8-4502-BAF4-FF4CD80D55D7}" srcOrd="0" destOrd="0" presId="urn:microsoft.com/office/officeart/2005/8/layout/cycle8"/>
     <dgm:cxn modelId="{E0EB9B1E-AC48-4775-B852-9ACA75C44C78}" type="presOf" srcId="{0BC66A2B-1DD2-4A8C-A7E6-4706A5A565F2}" destId="{10A53F47-8ED4-4B0B-B765-C54515E800D2}" srcOrd="1" destOrd="0" presId="urn:microsoft.com/office/officeart/2005/8/layout/cycle8"/>
     <dgm:cxn modelId="{0B220C60-5818-43B2-939E-982284DA03A5}" type="presOf" srcId="{465ABD7E-49EC-43D9-97C5-6A4B67335834}" destId="{D5E000D8-9AAE-49A4-87FF-0642AB719E81}" srcOrd="0" destOrd="0" presId="urn:microsoft.com/office/officeart/2005/8/layout/cycle8"/>
+    <dgm:cxn modelId="{26E01A93-AAB4-4B0E-9714-DDECC3C8A632}" srcId="{4DEA52EC-7676-47C9-8D53-46B739BD2587}" destId="{465ABD7E-49EC-43D9-97C5-6A4B67335834}" srcOrd="2" destOrd="0" parTransId="{F86C5027-5A3B-4A7A-A8C2-CE64D014DE97}" sibTransId="{B0E0A821-4726-4C37-A1CE-BF1E908724BF}"/>
+    <dgm:cxn modelId="{BB0E7396-0C60-44A9-95EE-3F01D4E9DE43}" type="presOf" srcId="{0BC66A2B-1DD2-4A8C-A7E6-4706A5A565F2}" destId="{EB2BDB46-B1F8-4502-BAF4-FF4CD80D55D7}" srcOrd="0" destOrd="0" presId="urn:microsoft.com/office/officeart/2005/8/layout/cycle8"/>
     <dgm:cxn modelId="{9C4AFFA6-8D65-4D9A-ACAC-4F79155E5D3C}" type="presOf" srcId="{4DEA52EC-7676-47C9-8D53-46B739BD2587}" destId="{5B589FE8-1180-43E9-9DD9-8C60F02AF256}" srcOrd="0" destOrd="0" presId="urn:microsoft.com/office/officeart/2005/8/layout/cycle8"/>
+    <dgm:cxn modelId="{645A2DB8-3540-49FE-A150-CFEC60E8473A}" type="presOf" srcId="{465ABD7E-49EC-43D9-97C5-6A4B67335834}" destId="{6DDCB976-2FE0-4A90-B6ED-DE80609CC20C}" srcOrd="1" destOrd="0" presId="urn:microsoft.com/office/officeart/2005/8/layout/cycle8"/>
+    <dgm:cxn modelId="{221C58C9-64CB-4D36-BA60-E09FC27F6E29}" type="presOf" srcId="{DBF283F7-617E-4082-A2AD-BFAAF939546A}" destId="{B96C4C7D-8621-4D0F-BBC4-D8B0CA18F115}" srcOrd="1" destOrd="0" presId="urn:microsoft.com/office/officeart/2005/8/layout/cycle8"/>
     <dgm:cxn modelId="{054D30D1-3227-4A91-8F68-5D1E792E8774}" srcId="{4DEA52EC-7676-47C9-8D53-46B739BD2587}" destId="{0BC66A2B-1DD2-4A8C-A7E6-4706A5A565F2}" srcOrd="1" destOrd="0" parTransId="{53A6D6CB-1B65-4EC5-8C87-678BCA6B287D}" sibTransId="{5F85C5D3-97EB-437D-BC96-722C0B626794}"/>
-    <dgm:cxn modelId="{221C58C9-64CB-4D36-BA60-E09FC27F6E29}" type="presOf" srcId="{DBF283F7-617E-4082-A2AD-BFAAF939546A}" destId="{B96C4C7D-8621-4D0F-BBC4-D8B0CA18F115}" srcOrd="1" destOrd="0" presId="urn:microsoft.com/office/officeart/2005/8/layout/cycle8"/>
-    <dgm:cxn modelId="{645A2DB8-3540-49FE-A150-CFEC60E8473A}" type="presOf" srcId="{465ABD7E-49EC-43D9-97C5-6A4B67335834}" destId="{6DDCB976-2FE0-4A90-B6ED-DE80609CC20C}" srcOrd="1" destOrd="0" presId="urn:microsoft.com/office/officeart/2005/8/layout/cycle8"/>
     <dgm:cxn modelId="{A888CEDD-92B2-4708-BD8D-16EAECE9934F}" type="presOf" srcId="{DBF283F7-617E-4082-A2AD-BFAAF939546A}" destId="{ECE168B9-97D6-4F75-9289-AF0458231259}" srcOrd="0" destOrd="0" presId="urn:microsoft.com/office/officeart/2005/8/layout/cycle8"/>
-    <dgm:cxn modelId="{26E01A93-AAB4-4B0E-9714-DDECC3C8A632}" srcId="{4DEA52EC-7676-47C9-8D53-46B739BD2587}" destId="{465ABD7E-49EC-43D9-97C5-6A4B67335834}" srcOrd="2" destOrd="0" parTransId="{F86C5027-5A3B-4A7A-A8C2-CE64D014DE97}" sibTransId="{B0E0A821-4726-4C37-A1CE-BF1E908724BF}"/>
     <dgm:cxn modelId="{2D01EE17-B314-4859-9BDA-46F0F211E530}" type="presParOf" srcId="{5B589FE8-1180-43E9-9DD9-8C60F02AF256}" destId="{ECE168B9-97D6-4F75-9289-AF0458231259}" srcOrd="0" destOrd="0" presId="urn:microsoft.com/office/officeart/2005/8/layout/cycle8"/>
     <dgm:cxn modelId="{650500E8-FF35-4B10-B79D-B941396585E3}" type="presParOf" srcId="{5B589FE8-1180-43E9-9DD9-8C60F02AF256}" destId="{936F56D5-CB26-4B20-B0FA-6C6FE1834F39}" srcOrd="1" destOrd="0" presId="urn:microsoft.com/office/officeart/2005/8/layout/cycle8"/>
     <dgm:cxn modelId="{AB88B786-4180-409E-85F7-4EEBABBE756B}" type="presParOf" srcId="{5B589FE8-1180-43E9-9DD9-8C60F02AF256}" destId="{F60AA58E-22C8-4E39-ACCD-DFB7D3AA2B40}" srcOrd="2" destOrd="0" presId="urn:microsoft.com/office/officeart/2005/8/layout/cycle8"/>
@@ -1306,7 +1244,7 @@
         </a:bodyPr>
         <a:lstStyle/>
         <a:p>
-          <a:pPr lvl="0" algn="ctr" defTabSz="1244600">
+          <a:pPr marL="0" lvl="0" indent="0" algn="ctr" defTabSz="1244600">
             <a:lnSpc>
               <a:spcPct val="90000"/>
             </a:lnSpc>
@@ -1316,9 +1254,10 @@
             <a:spcAft>
               <a:spcPct val="35000"/>
             </a:spcAft>
+            <a:buNone/>
           </a:pPr>
           <a:r>
-            <a:rPr lang="en-US" sz="2800" kern="1200" dirty="0" smtClean="0">
+            <a:rPr lang="en-US" sz="2800" kern="1200" dirty="0">
               <a:solidFill>
                 <a:schemeClr val="tx1"/>
               </a:solidFill>
@@ -1328,14 +1267,6 @@
             </a:rPr>
             <a:t>out come</a:t>
           </a:r>
-          <a:endParaRPr lang="en-US" sz="2800" kern="1200" dirty="0">
-            <a:solidFill>
-              <a:schemeClr val="tx1"/>
-            </a:solidFill>
-            <a:latin typeface="Bahnschrift" panose="020B0502040204020203" pitchFamily="34" charset="0"/>
-            <a:ea typeface="+mn-ea"/>
-            <a:cs typeface="+mn-cs"/>
-          </a:endParaRPr>
         </a:p>
       </dsp:txBody>
       <dsp:txXfrm>
@@ -1396,7 +1327,7 @@
         </a:bodyPr>
         <a:lstStyle/>
         <a:p>
-          <a:pPr lvl="0" algn="ctr" defTabSz="1244600">
+          <a:pPr marL="0" lvl="0" indent="0" algn="ctr" defTabSz="1244600">
             <a:lnSpc>
               <a:spcPct val="90000"/>
             </a:lnSpc>
@@ -1406,9 +1337,10 @@
             <a:spcAft>
               <a:spcPct val="35000"/>
             </a:spcAft>
+            <a:buNone/>
           </a:pPr>
           <a:r>
-            <a:rPr lang="en-US" sz="2800" b="1" kern="1200" dirty="0" smtClean="0">
+            <a:rPr lang="en-US" sz="2800" b="1" kern="1200" dirty="0">
               <a:solidFill>
                 <a:schemeClr val="tx1"/>
               </a:solidFill>
@@ -1418,14 +1350,6 @@
             </a:rPr>
             <a:t>latent variables</a:t>
           </a:r>
-          <a:endParaRPr lang="en-US" sz="2800" b="1" kern="1200" dirty="0">
-            <a:solidFill>
-              <a:schemeClr val="tx1"/>
-            </a:solidFill>
-            <a:latin typeface="Bahnschrift" panose="020B0502040204020203" pitchFamily="34" charset="0"/>
-            <a:ea typeface="+mn-ea"/>
-            <a:cs typeface="+mn-cs"/>
-          </a:endParaRPr>
         </a:p>
       </dsp:txBody>
       <dsp:txXfrm>
@@ -1486,7 +1410,7 @@
         </a:bodyPr>
         <a:lstStyle/>
         <a:p>
-          <a:pPr lvl="0" algn="ctr" defTabSz="1244600">
+          <a:pPr marL="0" lvl="0" indent="0" algn="ctr" defTabSz="1244600">
             <a:lnSpc>
               <a:spcPct val="90000"/>
             </a:lnSpc>
@@ -1496,9 +1420,10 @@
             <a:spcAft>
               <a:spcPct val="35000"/>
             </a:spcAft>
+            <a:buNone/>
           </a:pPr>
           <a:r>
-            <a:rPr lang="en-US" sz="2800" kern="1200" dirty="0" smtClean="0">
+            <a:rPr lang="en-US" sz="2800" kern="1200" dirty="0">
               <a:solidFill>
                 <a:schemeClr val="tx1"/>
               </a:solidFill>
@@ -1508,14 +1433,6 @@
             </a:rPr>
             <a:t>choice</a:t>
           </a:r>
-          <a:endParaRPr lang="en-US" sz="2800" kern="1200" dirty="0">
-            <a:solidFill>
-              <a:schemeClr val="tx1"/>
-            </a:solidFill>
-            <a:latin typeface="Bahnschrift" panose="020B0502040204020203" pitchFamily="34" charset="0"/>
-            <a:ea typeface="+mn-ea"/>
-            <a:cs typeface="+mn-cs"/>
-          </a:endParaRPr>
         </a:p>
       </dsp:txBody>
       <dsp:txXfrm>
@@ -4529,7 +4446,7 @@
           <a:p>
             <a:fld id="{5E749028-7B03-4B02-885C-D77113521619}" type="datetimeFigureOut">
               <a:rPr lang="en-GB" smtClean="0"/>
-              <a:t>26/06/2026</a:t>
+              <a:t>28/06/2026</a:t>
             </a:fld>
             <a:endParaRPr lang="en-GB"/>
           </a:p>
@@ -4595,7 +4512,7 @@
           <a:p>
             <a:fld id="{1F4AF040-EF21-481B-90AC-C83BDA3491BA}" type="slidenum">
               <a:rPr lang="en-GB" smtClean="0"/>
-              <a:t>‹#›</a:t>
+              <a:t>‹Nr.›</a:t>
             </a:fld>
             <a:endParaRPr lang="en-GB"/>
           </a:p>
@@ -4654,7 +4571,7 @@
           </a:lstStyle>
           <a:p>
             <a:r>
-              <a:rPr lang="en-US" smtClean="0"/>
+              <a:rPr lang="en-US"/>
               <a:t>Click to edit Master title style</a:t>
             </a:r>
             <a:endParaRPr lang="en-GB"/>
@@ -4719,7 +4636,7 @@
           </a:lstStyle>
           <a:p>
             <a:r>
-              <a:rPr lang="en-US" smtClean="0"/>
+              <a:rPr lang="en-US"/>
               <a:t>Click to edit Master subtitle style</a:t>
             </a:r>
             <a:endParaRPr lang="en-GB"/>
@@ -4743,7 +4660,7 @@
           <a:p>
             <a:fld id="{6F6F51E0-DBB7-4D25-9D37-AF761FC91A0D}" type="datetimeFigureOut">
               <a:rPr lang="en-GB" smtClean="0"/>
-              <a:t>26/06/2026</a:t>
+              <a:t>28/06/2026</a:t>
             </a:fld>
             <a:endParaRPr lang="en-GB"/>
           </a:p>
@@ -4785,7 +4702,7 @@
           <a:p>
             <a:fld id="{8E09F03E-0454-4873-96B1-F60F4F6155FC}" type="slidenum">
               <a:rPr lang="en-GB" smtClean="0"/>
-              <a:t>‹#›</a:t>
+              <a:t>‹Nr.›</a:t>
             </a:fld>
             <a:endParaRPr lang="en-GB"/>
           </a:p>
@@ -4837,7 +4754,7 @@
           <a:lstStyle/>
           <a:p>
             <a:r>
-              <a:rPr lang="en-US" smtClean="0"/>
+              <a:rPr lang="en-US"/>
               <a:t>Click to edit Master title style</a:t>
             </a:r>
             <a:endParaRPr lang="en-GB"/>
@@ -4861,35 +4778,35 @@
           <a:p>
             <a:pPr lvl="0"/>
             <a:r>
-              <a:rPr lang="en-US" smtClean="0"/>
+              <a:rPr lang="en-US"/>
               <a:t>Edit Master text styles</a:t>
             </a:r>
           </a:p>
           <a:p>
             <a:pPr lvl="1"/>
             <a:r>
-              <a:rPr lang="en-US" smtClean="0"/>
+              <a:rPr lang="en-US"/>
               <a:t>Second level</a:t>
             </a:r>
           </a:p>
           <a:p>
             <a:pPr lvl="2"/>
             <a:r>
-              <a:rPr lang="en-US" smtClean="0"/>
+              <a:rPr lang="en-US"/>
               <a:t>Third level</a:t>
             </a:r>
           </a:p>
           <a:p>
             <a:pPr lvl="3"/>
             <a:r>
-              <a:rPr lang="en-US" smtClean="0"/>
+              <a:rPr lang="en-US"/>
               <a:t>Fourth level</a:t>
             </a:r>
           </a:p>
           <a:p>
             <a:pPr lvl="4"/>
             <a:r>
-              <a:rPr lang="en-US" smtClean="0"/>
+              <a:rPr lang="en-US"/>
               <a:t>Fifth level</a:t>
             </a:r>
             <a:endParaRPr lang="en-GB"/>
@@ -4913,7 +4830,7 @@
           <a:p>
             <a:fld id="{6F6F51E0-DBB7-4D25-9D37-AF761FC91A0D}" type="datetimeFigureOut">
               <a:rPr lang="en-GB" smtClean="0"/>
-              <a:t>26/06/2026</a:t>
+              <a:t>28/06/2026</a:t>
             </a:fld>
             <a:endParaRPr lang="en-GB"/>
           </a:p>
@@ -4955,7 +4872,7 @@
           <a:p>
             <a:fld id="{8E09F03E-0454-4873-96B1-F60F4F6155FC}" type="slidenum">
               <a:rPr lang="en-GB" smtClean="0"/>
-              <a:t>‹#›</a:t>
+              <a:t>‹Nr.›</a:t>
             </a:fld>
             <a:endParaRPr lang="en-GB"/>
           </a:p>
@@ -5012,7 +4929,7 @@
           <a:lstStyle/>
           <a:p>
             <a:r>
-              <a:rPr lang="en-US" smtClean="0"/>
+              <a:rPr lang="en-US"/>
               <a:t>Click to edit Master title style</a:t>
             </a:r>
             <a:endParaRPr lang="en-GB"/>
@@ -5041,35 +4958,35 @@
           <a:p>
             <a:pPr lvl="0"/>
             <a:r>
-              <a:rPr lang="en-US" smtClean="0"/>
+              <a:rPr lang="en-US"/>
               <a:t>Edit Master text styles</a:t>
             </a:r>
           </a:p>
           <a:p>
             <a:pPr lvl="1"/>
             <a:r>
-              <a:rPr lang="en-US" smtClean="0"/>
+              <a:rPr lang="en-US"/>
               <a:t>Second level</a:t>
             </a:r>
           </a:p>
           <a:p>
             <a:pPr lvl="2"/>
             <a:r>
-              <a:rPr lang="en-US" smtClean="0"/>
+              <a:rPr lang="en-US"/>
               <a:t>Third level</a:t>
             </a:r>
           </a:p>
           <a:p>
             <a:pPr lvl="3"/>
             <a:r>
-              <a:rPr lang="en-US" smtClean="0"/>
+              <a:rPr lang="en-US"/>
               <a:t>Fourth level</a:t>
             </a:r>
           </a:p>
           <a:p>
             <a:pPr lvl="4"/>
             <a:r>
-              <a:rPr lang="en-US" smtClean="0"/>
+              <a:rPr lang="en-US"/>
               <a:t>Fifth level</a:t>
             </a:r>
             <a:endParaRPr lang="en-GB"/>
@@ -5093,7 +5010,7 @@
           <a:p>
             <a:fld id="{6F6F51E0-DBB7-4D25-9D37-AF761FC91A0D}" type="datetimeFigureOut">
               <a:rPr lang="en-GB" smtClean="0"/>
-              <a:t>26/06/2026</a:t>
+              <a:t>28/06/2026</a:t>
             </a:fld>
             <a:endParaRPr lang="en-GB"/>
           </a:p>
@@ -5135,7 +5052,7 @@
           <a:p>
             <a:fld id="{8E09F03E-0454-4873-96B1-F60F4F6155FC}" type="slidenum">
               <a:rPr lang="en-GB" smtClean="0"/>
-              <a:t>‹#›</a:t>
+              <a:t>‹Nr.›</a:t>
             </a:fld>
             <a:endParaRPr lang="en-GB"/>
           </a:p>
@@ -5193,7 +5110,7 @@
           </a:lstStyle>
           <a:p>
             <a:r>
-              <a:rPr lang="en-US" dirty="0" smtClean="0"/>
+              <a:rPr lang="en-US" dirty="0"/>
               <a:t>Click to edit Master title style</a:t>
             </a:r>
             <a:endParaRPr lang="en-GB" dirty="0"/>
@@ -5243,35 +5160,35 @@
           <a:p>
             <a:pPr lvl="0"/>
             <a:r>
-              <a:rPr lang="en-US" dirty="0" smtClean="0"/>
+              <a:rPr lang="en-US" dirty="0"/>
               <a:t>Edit Master text styles</a:t>
             </a:r>
           </a:p>
           <a:p>
             <a:pPr lvl="1"/>
             <a:r>
-              <a:rPr lang="en-US" dirty="0" smtClean="0"/>
+              <a:rPr lang="en-US" dirty="0"/>
               <a:t>Second level</a:t>
             </a:r>
           </a:p>
           <a:p>
             <a:pPr lvl="2"/>
             <a:r>
-              <a:rPr lang="en-US" dirty="0" smtClean="0"/>
+              <a:rPr lang="en-US" dirty="0"/>
               <a:t>Third level</a:t>
             </a:r>
           </a:p>
           <a:p>
             <a:pPr lvl="3"/>
             <a:r>
-              <a:rPr lang="en-US" dirty="0" smtClean="0"/>
+              <a:rPr lang="en-US" dirty="0"/>
               <a:t>Fourth level</a:t>
             </a:r>
           </a:p>
           <a:p>
             <a:pPr lvl="4"/>
             <a:r>
-              <a:rPr lang="en-US" dirty="0" smtClean="0"/>
+              <a:rPr lang="en-US" dirty="0"/>
               <a:t>Fifth level</a:t>
             </a:r>
             <a:endParaRPr lang="en-GB" dirty="0"/>
@@ -5295,7 +5212,7 @@
           <a:p>
             <a:fld id="{6F6F51E0-DBB7-4D25-9D37-AF761FC91A0D}" type="datetimeFigureOut">
               <a:rPr lang="en-GB" smtClean="0"/>
-              <a:t>26/06/2026</a:t>
+              <a:t>28/06/2026</a:t>
             </a:fld>
             <a:endParaRPr lang="en-GB"/>
           </a:p>
@@ -5337,7 +5254,7 @@
           <a:p>
             <a:fld id="{8E09F03E-0454-4873-96B1-F60F4F6155FC}" type="slidenum">
               <a:rPr lang="en-GB" smtClean="0"/>
-              <a:t>‹#›</a:t>
+              <a:t>‹Nr.›</a:t>
             </a:fld>
             <a:endParaRPr lang="en-GB"/>
           </a:p>
@@ -5353,13 +5270,6 @@
   <p:clrMapOvr>
     <a:masterClrMapping/>
   </p:clrMapOvr>
-  <p:timing>
-    <p:tnLst>
-      <p:par>
-        <p:cTn id="1" dur="indefinite" restart="never" nodeType="tmRoot"/>
-      </p:par>
-    </p:tnLst>
-  </p:timing>
 </p:sldLayout>
 </file>
 
@@ -5405,7 +5315,7 @@
           </a:lstStyle>
           <a:p>
             <a:r>
-              <a:rPr lang="en-US" smtClean="0"/>
+              <a:rPr lang="en-US"/>
               <a:t>Click to edit Master title style</a:t>
             </a:r>
             <a:endParaRPr lang="en-GB"/>
@@ -5525,7 +5435,7 @@
           <a:p>
             <a:pPr lvl="0"/>
             <a:r>
-              <a:rPr lang="en-US" smtClean="0"/>
+              <a:rPr lang="en-US"/>
               <a:t>Edit Master text styles</a:t>
             </a:r>
           </a:p>
@@ -5548,7 +5458,7 @@
           <a:p>
             <a:fld id="{6F6F51E0-DBB7-4D25-9D37-AF761FC91A0D}" type="datetimeFigureOut">
               <a:rPr lang="en-GB" smtClean="0"/>
-              <a:t>26/06/2026</a:t>
+              <a:t>28/06/2026</a:t>
             </a:fld>
             <a:endParaRPr lang="en-GB"/>
           </a:p>
@@ -5590,7 +5500,7 @@
           <a:p>
             <a:fld id="{8E09F03E-0454-4873-96B1-F60F4F6155FC}" type="slidenum">
               <a:rPr lang="en-GB" smtClean="0"/>
-              <a:t>‹#›</a:t>
+              <a:t>‹Nr.›</a:t>
             </a:fld>
             <a:endParaRPr lang="en-GB"/>
           </a:p>
@@ -5642,7 +5552,7 @@
           <a:lstStyle/>
           <a:p>
             <a:r>
-              <a:rPr lang="en-US" smtClean="0"/>
+              <a:rPr lang="en-US"/>
               <a:t>Click to edit Master title style</a:t>
             </a:r>
             <a:endParaRPr lang="en-GB"/>
@@ -5671,35 +5581,35 @@
           <a:p>
             <a:pPr lvl="0"/>
             <a:r>
-              <a:rPr lang="en-US" smtClean="0"/>
+              <a:rPr lang="en-US"/>
               <a:t>Edit Master text styles</a:t>
             </a:r>
           </a:p>
           <a:p>
             <a:pPr lvl="1"/>
             <a:r>
-              <a:rPr lang="en-US" smtClean="0"/>
+              <a:rPr lang="en-US"/>
               <a:t>Second level</a:t>
             </a:r>
           </a:p>
           <a:p>
             <a:pPr lvl="2"/>
             <a:r>
-              <a:rPr lang="en-US" smtClean="0"/>
+              <a:rPr lang="en-US"/>
               <a:t>Third level</a:t>
             </a:r>
           </a:p>
           <a:p>
             <a:pPr lvl="3"/>
             <a:r>
-              <a:rPr lang="en-US" smtClean="0"/>
+              <a:rPr lang="en-US"/>
               <a:t>Fourth level</a:t>
             </a:r>
           </a:p>
           <a:p>
             <a:pPr lvl="4"/>
             <a:r>
-              <a:rPr lang="en-US" smtClean="0"/>
+              <a:rPr lang="en-US"/>
               <a:t>Fifth level</a:t>
             </a:r>
             <a:endParaRPr lang="en-GB"/>
@@ -5728,35 +5638,35 @@
           <a:p>
             <a:pPr lvl="0"/>
             <a:r>
-              <a:rPr lang="en-US" smtClean="0"/>
+              <a:rPr lang="en-US"/>
               <a:t>Edit Master text styles</a:t>
             </a:r>
           </a:p>
           <a:p>
             <a:pPr lvl="1"/>
             <a:r>
-              <a:rPr lang="en-US" smtClean="0"/>
+              <a:rPr lang="en-US"/>
               <a:t>Second level</a:t>
             </a:r>
           </a:p>
           <a:p>
             <a:pPr lvl="2"/>
             <a:r>
-              <a:rPr lang="en-US" smtClean="0"/>
+              <a:rPr lang="en-US"/>
               <a:t>Third level</a:t>
             </a:r>
           </a:p>
           <a:p>
             <a:pPr lvl="3"/>
             <a:r>
-              <a:rPr lang="en-US" smtClean="0"/>
+              <a:rPr lang="en-US"/>
               <a:t>Fourth level</a:t>
             </a:r>
           </a:p>
           <a:p>
             <a:pPr lvl="4"/>
             <a:r>
-              <a:rPr lang="en-US" smtClean="0"/>
+              <a:rPr lang="en-US"/>
               <a:t>Fifth level</a:t>
             </a:r>
             <a:endParaRPr lang="en-GB"/>
@@ -5780,7 +5690,7 @@
           <a:p>
             <a:fld id="{6F6F51E0-DBB7-4D25-9D37-AF761FC91A0D}" type="datetimeFigureOut">
               <a:rPr lang="en-GB" smtClean="0"/>
-              <a:t>26/06/2026</a:t>
+              <a:t>28/06/2026</a:t>
             </a:fld>
             <a:endParaRPr lang="en-GB"/>
           </a:p>
@@ -5822,7 +5732,7 @@
           <a:p>
             <a:fld id="{8E09F03E-0454-4873-96B1-F60F4F6155FC}" type="slidenum">
               <a:rPr lang="en-GB" smtClean="0"/>
-              <a:t>‹#›</a:t>
+              <a:t>‹Nr.›</a:t>
             </a:fld>
             <a:endParaRPr lang="en-GB"/>
           </a:p>
@@ -5879,7 +5789,7 @@
           <a:lstStyle/>
           <a:p>
             <a:r>
-              <a:rPr lang="en-US" smtClean="0"/>
+              <a:rPr lang="en-US"/>
               <a:t>Click to edit Master title style</a:t>
             </a:r>
             <a:endParaRPr lang="en-GB"/>
@@ -5945,7 +5855,7 @@
           <a:p>
             <a:pPr lvl="0"/>
             <a:r>
-              <a:rPr lang="en-US" smtClean="0"/>
+              <a:rPr lang="en-US"/>
               <a:t>Edit Master text styles</a:t>
             </a:r>
           </a:p>
@@ -5973,35 +5883,35 @@
           <a:p>
             <a:pPr lvl="0"/>
             <a:r>
-              <a:rPr lang="en-US" smtClean="0"/>
+              <a:rPr lang="en-US"/>
               <a:t>Edit Master text styles</a:t>
             </a:r>
           </a:p>
           <a:p>
             <a:pPr lvl="1"/>
             <a:r>
-              <a:rPr lang="en-US" smtClean="0"/>
+              <a:rPr lang="en-US"/>
               <a:t>Second level</a:t>
             </a:r>
           </a:p>
           <a:p>
             <a:pPr lvl="2"/>
             <a:r>
-              <a:rPr lang="en-US" smtClean="0"/>
+              <a:rPr lang="en-US"/>
               <a:t>Third level</a:t>
             </a:r>
           </a:p>
           <a:p>
             <a:pPr lvl="3"/>
             <a:r>
-              <a:rPr lang="en-US" smtClean="0"/>
+              <a:rPr lang="en-US"/>
               <a:t>Fourth level</a:t>
             </a:r>
           </a:p>
           <a:p>
             <a:pPr lvl="4"/>
             <a:r>
-              <a:rPr lang="en-US" smtClean="0"/>
+              <a:rPr lang="en-US"/>
               <a:t>Fifth level</a:t>
             </a:r>
             <a:endParaRPr lang="en-GB"/>
@@ -6067,7 +5977,7 @@
           <a:p>
             <a:pPr lvl="0"/>
             <a:r>
-              <a:rPr lang="en-US" smtClean="0"/>
+              <a:rPr lang="en-US"/>
               <a:t>Edit Master text styles</a:t>
             </a:r>
           </a:p>
@@ -6095,35 +6005,35 @@
           <a:p>
             <a:pPr lvl="0"/>
             <a:r>
-              <a:rPr lang="en-US" smtClean="0"/>
+              <a:rPr lang="en-US"/>
               <a:t>Edit Master text styles</a:t>
             </a:r>
           </a:p>
           <a:p>
             <a:pPr lvl="1"/>
             <a:r>
-              <a:rPr lang="en-US" smtClean="0"/>
+              <a:rPr lang="en-US"/>
               <a:t>Second level</a:t>
             </a:r>
           </a:p>
           <a:p>
             <a:pPr lvl="2"/>
             <a:r>
-              <a:rPr lang="en-US" smtClean="0"/>
+              <a:rPr lang="en-US"/>
               <a:t>Third level</a:t>
             </a:r>
           </a:p>
           <a:p>
             <a:pPr lvl="3"/>
             <a:r>
-              <a:rPr lang="en-US" smtClean="0"/>
+              <a:rPr lang="en-US"/>
               <a:t>Fourth level</a:t>
             </a:r>
           </a:p>
           <a:p>
             <a:pPr lvl="4"/>
             <a:r>
-              <a:rPr lang="en-US" smtClean="0"/>
+              <a:rPr lang="en-US"/>
               <a:t>Fifth level</a:t>
             </a:r>
             <a:endParaRPr lang="en-GB"/>
@@ -6147,7 +6057,7 @@
           <a:p>
             <a:fld id="{6F6F51E0-DBB7-4D25-9D37-AF761FC91A0D}" type="datetimeFigureOut">
               <a:rPr lang="en-GB" smtClean="0"/>
-              <a:t>26/06/2026</a:t>
+              <a:t>28/06/2026</a:t>
             </a:fld>
             <a:endParaRPr lang="en-GB"/>
           </a:p>
@@ -6189,7 +6099,7 @@
           <a:p>
             <a:fld id="{8E09F03E-0454-4873-96B1-F60F4F6155FC}" type="slidenum">
               <a:rPr lang="en-GB" smtClean="0"/>
-              <a:t>‹#›</a:t>
+              <a:t>‹Nr.›</a:t>
             </a:fld>
             <a:endParaRPr lang="en-GB"/>
           </a:p>
@@ -6241,7 +6151,7 @@
           <a:lstStyle/>
           <a:p>
             <a:r>
-              <a:rPr lang="en-US" smtClean="0"/>
+              <a:rPr lang="en-US"/>
               <a:t>Click to edit Master title style</a:t>
             </a:r>
             <a:endParaRPr lang="en-GB"/>
@@ -6265,7 +6175,7 @@
           <a:p>
             <a:fld id="{6F6F51E0-DBB7-4D25-9D37-AF761FC91A0D}" type="datetimeFigureOut">
               <a:rPr lang="en-GB" smtClean="0"/>
-              <a:t>26/06/2026</a:t>
+              <a:t>28/06/2026</a:t>
             </a:fld>
             <a:endParaRPr lang="en-GB"/>
           </a:p>
@@ -6307,7 +6217,7 @@
           <a:p>
             <a:fld id="{8E09F03E-0454-4873-96B1-F60F4F6155FC}" type="slidenum">
               <a:rPr lang="en-GB" smtClean="0"/>
-              <a:t>‹#›</a:t>
+              <a:t>‹Nr.›</a:t>
             </a:fld>
             <a:endParaRPr lang="en-GB"/>
           </a:p>
@@ -6360,7 +6270,7 @@
           <a:p>
             <a:fld id="{6F6F51E0-DBB7-4D25-9D37-AF761FC91A0D}" type="datetimeFigureOut">
               <a:rPr lang="en-GB" smtClean="0"/>
-              <a:t>26/06/2026</a:t>
+              <a:t>28/06/2026</a:t>
             </a:fld>
             <a:endParaRPr lang="en-GB"/>
           </a:p>
@@ -6402,7 +6312,7 @@
           <a:p>
             <a:fld id="{8E09F03E-0454-4873-96B1-F60F4F6155FC}" type="slidenum">
               <a:rPr lang="en-GB" smtClean="0"/>
-              <a:t>‹#›</a:t>
+              <a:t>‹Nr.›</a:t>
             </a:fld>
             <a:endParaRPr lang="en-GB"/>
           </a:p>
@@ -6463,7 +6373,7 @@
           </a:lstStyle>
           <a:p>
             <a:r>
-              <a:rPr lang="en-US" smtClean="0"/>
+              <a:rPr lang="en-US"/>
               <a:t>Click to edit Master title style</a:t>
             </a:r>
             <a:endParaRPr lang="en-GB"/>
@@ -6520,35 +6430,35 @@
           <a:p>
             <a:pPr lvl="0"/>
             <a:r>
-              <a:rPr lang="en-US" smtClean="0"/>
+              <a:rPr lang="en-US"/>
               <a:t>Edit Master text styles</a:t>
             </a:r>
           </a:p>
           <a:p>
             <a:pPr lvl="1"/>
             <a:r>
-              <a:rPr lang="en-US" smtClean="0"/>
+              <a:rPr lang="en-US"/>
               <a:t>Second level</a:t>
             </a:r>
           </a:p>
           <a:p>
             <a:pPr lvl="2"/>
             <a:r>
-              <a:rPr lang="en-US" smtClean="0"/>
+              <a:rPr lang="en-US"/>
               <a:t>Third level</a:t>
             </a:r>
           </a:p>
           <a:p>
             <a:pPr lvl="3"/>
             <a:r>
-              <a:rPr lang="en-US" smtClean="0"/>
+              <a:rPr lang="en-US"/>
               <a:t>Fourth level</a:t>
             </a:r>
           </a:p>
           <a:p>
             <a:pPr lvl="4"/>
             <a:r>
-              <a:rPr lang="en-US" smtClean="0"/>
+              <a:rPr lang="en-US"/>
               <a:t>Fifth level</a:t>
             </a:r>
             <a:endParaRPr lang="en-GB"/>
@@ -6614,7 +6524,7 @@
           <a:p>
             <a:pPr lvl="0"/>
             <a:r>
-              <a:rPr lang="en-US" smtClean="0"/>
+              <a:rPr lang="en-US"/>
               <a:t>Edit Master text styles</a:t>
             </a:r>
           </a:p>
@@ -6637,7 +6547,7 @@
           <a:p>
             <a:fld id="{6F6F51E0-DBB7-4D25-9D37-AF761FC91A0D}" type="datetimeFigureOut">
               <a:rPr lang="en-GB" smtClean="0"/>
-              <a:t>26/06/2026</a:t>
+              <a:t>28/06/2026</a:t>
             </a:fld>
             <a:endParaRPr lang="en-GB"/>
           </a:p>
@@ -6679,7 +6589,7 @@
           <a:p>
             <a:fld id="{8E09F03E-0454-4873-96B1-F60F4F6155FC}" type="slidenum">
               <a:rPr lang="en-GB" smtClean="0"/>
-              <a:t>‹#›</a:t>
+              <a:t>‹Nr.›</a:t>
             </a:fld>
             <a:endParaRPr lang="en-GB"/>
           </a:p>
@@ -6740,7 +6650,7 @@
           </a:lstStyle>
           <a:p>
             <a:r>
-              <a:rPr lang="en-US" smtClean="0"/>
+              <a:rPr lang="en-US"/>
               <a:t>Click to edit Master title style</a:t>
             </a:r>
             <a:endParaRPr lang="en-GB"/>
@@ -6867,7 +6777,7 @@
           <a:p>
             <a:pPr lvl="0"/>
             <a:r>
-              <a:rPr lang="en-US" smtClean="0"/>
+              <a:rPr lang="en-US"/>
               <a:t>Edit Master text styles</a:t>
             </a:r>
           </a:p>
@@ -6890,7 +6800,7 @@
           <a:p>
             <a:fld id="{6F6F51E0-DBB7-4D25-9D37-AF761FC91A0D}" type="datetimeFigureOut">
               <a:rPr lang="en-GB" smtClean="0"/>
-              <a:t>26/06/2026</a:t>
+              <a:t>28/06/2026</a:t>
             </a:fld>
             <a:endParaRPr lang="en-GB"/>
           </a:p>
@@ -6932,7 +6842,7 @@
           <a:p>
             <a:fld id="{8E09F03E-0454-4873-96B1-F60F4F6155FC}" type="slidenum">
               <a:rPr lang="en-GB" smtClean="0"/>
-              <a:t>‹#›</a:t>
+              <a:t>‹Nr.›</a:t>
             </a:fld>
             <a:endParaRPr lang="en-GB"/>
           </a:p>
@@ -7008,7 +6918,7 @@
           <a:lstStyle/>
           <a:p>
             <a:r>
-              <a:rPr lang="en-US" smtClean="0"/>
+              <a:rPr lang="en-US"/>
               <a:t>Click to edit Master title style</a:t>
             </a:r>
             <a:endParaRPr lang="en-GB"/>
@@ -7042,35 +6952,35 @@
           <a:p>
             <a:pPr lvl="0"/>
             <a:r>
-              <a:rPr lang="en-US" smtClean="0"/>
+              <a:rPr lang="en-US"/>
               <a:t>Edit Master text styles</a:t>
             </a:r>
           </a:p>
           <a:p>
             <a:pPr lvl="1"/>
             <a:r>
-              <a:rPr lang="en-US" smtClean="0"/>
+              <a:rPr lang="en-US"/>
               <a:t>Second level</a:t>
             </a:r>
           </a:p>
           <a:p>
             <a:pPr lvl="2"/>
             <a:r>
-              <a:rPr lang="en-US" smtClean="0"/>
+              <a:rPr lang="en-US"/>
               <a:t>Third level</a:t>
             </a:r>
           </a:p>
           <a:p>
             <a:pPr lvl="3"/>
             <a:r>
-              <a:rPr lang="en-US" smtClean="0"/>
+              <a:rPr lang="en-US"/>
               <a:t>Fourth level</a:t>
             </a:r>
           </a:p>
           <a:p>
             <a:pPr lvl="4"/>
             <a:r>
-              <a:rPr lang="en-US" smtClean="0"/>
+              <a:rPr lang="en-US"/>
               <a:t>Fifth level</a:t>
             </a:r>
             <a:endParaRPr lang="en-GB"/>
@@ -7112,7 +7022,7 @@
           <a:p>
             <a:fld id="{6F6F51E0-DBB7-4D25-9D37-AF761FC91A0D}" type="datetimeFigureOut">
               <a:rPr lang="en-GB" smtClean="0"/>
-              <a:t>26/06/2026</a:t>
+              <a:t>28/06/2026</a:t>
             </a:fld>
             <a:endParaRPr lang="en-GB"/>
           </a:p>
@@ -7190,7 +7100,7 @@
           <a:p>
             <a:fld id="{8E09F03E-0454-4873-96B1-F60F4F6155FC}" type="slidenum">
               <a:rPr lang="en-GB" smtClean="0"/>
-              <a:t>‹#›</a:t>
+              <a:t>‹Nr.›</a:t>
             </a:fld>
             <a:endParaRPr lang="en-GB"/>
           </a:p>
@@ -7503,6 +7413,14 @@
 <file path=ppt/slides/slide1.xml><?xml version="1.0" encoding="utf-8"?>
 <p:sld xmlns:a="http://schemas.openxmlformats.org/drawingml/2006/main" xmlns:r="http://schemas.openxmlformats.org/officeDocument/2006/relationships" xmlns:p="http://schemas.openxmlformats.org/presentationml/2006/main">
   <p:cSld>
+    <p:bg>
+      <p:bgPr>
+        <a:solidFill>
+          <a:srgbClr val="FFFDF7"/>
+        </a:solidFill>
+        <a:effectLst/>
+      </p:bgPr>
+    </p:bg>
     <p:spTree>
       <p:nvGrpSpPr>
         <p:cNvPr id="1" name=""/>
@@ -7519,6 +7437,60 @@
       </p:grpSpPr>
       <p:sp>
         <p:nvSpPr>
+          <p:cNvPr id="6" name="Rectangle 1">
+            <a:extLst>
+              <a:ext uri="{FF2B5EF4-FFF2-40B4-BE49-F238E27FC236}">
+                <a16:creationId xmlns:a16="http://schemas.microsoft.com/office/drawing/2014/main" id="{68311E98-335A-BADE-A217-9B66AC600E08}"/>
+              </a:ext>
+            </a:extLst>
+          </p:cNvPr>
+          <p:cNvSpPr/>
+          <p:nvPr/>
+        </p:nvSpPr>
+        <p:spPr>
+          <a:xfrm>
+            <a:off x="-292274" y="1352146"/>
+            <a:ext cx="12776548" cy="4299624"/>
+          </a:xfrm>
+          <a:prstGeom prst="rect">
+            <a:avLst/>
+          </a:prstGeom>
+          <a:solidFill>
+            <a:srgbClr val="CFF1E6"/>
+          </a:solidFill>
+          <a:ln w="76200">
+            <a:solidFill>
+              <a:srgbClr val="0CB87F"/>
+            </a:solidFill>
+          </a:ln>
+        </p:spPr>
+        <p:style>
+          <a:lnRef idx="2">
+            <a:schemeClr val="accent1">
+              <a:shade val="50000"/>
+            </a:schemeClr>
+          </a:lnRef>
+          <a:fillRef idx="1">
+            <a:schemeClr val="accent1"/>
+          </a:fillRef>
+          <a:effectRef idx="0">
+            <a:schemeClr val="accent1"/>
+          </a:effectRef>
+          <a:fontRef idx="minor">
+            <a:schemeClr val="lt1"/>
+          </a:fontRef>
+        </p:style>
+        <p:txBody>
+          <a:bodyPr rtlCol="0" anchor="ctr"/>
+          <a:lstStyle/>
+          <a:p>
+            <a:pPr algn="ctr"/>
+            <a:endParaRPr lang="en-GB" dirty="0"/>
+          </a:p>
+        </p:txBody>
+      </p:sp>
+      <p:sp>
+        <p:nvSpPr>
           <p:cNvPr id="2" name="Title 1"/>
           <p:cNvSpPr>
             <a:spLocks noGrp="1"/>
@@ -7533,7 +7505,7 @@
           <a:lstStyle/>
           <a:p>
             <a:r>
-              <a:rPr lang="de-DE" dirty="0" smtClean="0">
+              <a:rPr lang="de-DE" dirty="0">
                 <a:latin typeface="Bahnschrift SemiBold" panose="020B0502040204020203" pitchFamily="34" charset="0"/>
               </a:rPr>
               <a:t>Reward Encoding during a two-armed bandit task</a:t>
@@ -7554,64 +7526,221 @@
             <p:ph type="subTitle" idx="1"/>
           </p:nvPr>
         </p:nvSpPr>
-        <p:spPr/>
+        <p:spPr>
+          <a:xfrm>
+            <a:off x="1524000" y="3739746"/>
+            <a:ext cx="9144000" cy="1518054"/>
+          </a:xfrm>
+        </p:spPr>
         <p:txBody>
           <a:bodyPr/>
           <a:lstStyle/>
           <a:p>
             <a:r>
-              <a:rPr lang="de-DE" dirty="0" smtClean="0"/>
-              <a:t>CNB Lab </a:t>
-            </a:r>
-            <a:r>
               <a:rPr lang="de-DE" dirty="0">
                 <a:latin typeface="Bahnschrift" panose="020B0502040204020203" pitchFamily="34" charset="0"/>
               </a:rPr>
-              <a:t>· </a:t>
+              <a:t>CNB Lab · Manuel Stammler · </a:t>
             </a:r>
             <a:r>
-              <a:rPr lang="de-DE" dirty="0" smtClean="0"/>
-              <a:t>Manuel Stammler </a:t>
-            </a:r>
-            <a:r>
-              <a:rPr lang="de-DE" dirty="0" smtClean="0">
+              <a:rPr lang="de-DE" sz="2000" dirty="0">
                 <a:latin typeface="Bahnschrift" panose="020B0502040204020203" pitchFamily="34" charset="0"/>
               </a:rPr>
-              <a:t>· </a:t>
+              <a:t>01.07.2026</a:t>
             </a:r>
-            <a:r>
-              <a:rPr lang="de-DE" sz="2000" i="1" dirty="0" smtClean="0">
-                <a:solidFill>
-                  <a:schemeClr val="bg2">
-                    <a:lumMod val="75000"/>
-                  </a:schemeClr>
-                </a:solidFill>
-                <a:latin typeface="Bahnschrift" panose="020B0502040204020203" pitchFamily="34" charset="0"/>
-              </a:rPr>
-              <a:t>26.04.2026</a:t>
-            </a:r>
-            <a:r>
-              <a:rPr lang="de-DE" sz="2000" i="1" dirty="0" smtClean="0">
-                <a:solidFill>
-                  <a:schemeClr val="bg2">
-                    <a:lumMod val="75000"/>
-                  </a:schemeClr>
-                </a:solidFill>
-                <a:latin typeface="Bahnschrift" panose="020B0502040204020203" pitchFamily="34" charset="0"/>
-              </a:rPr>
-              <a:t> </a:t>
-            </a:r>
-            <a:endParaRPr lang="en-GB" sz="2000" i="1" dirty="0">
+            <a:endParaRPr lang="en-GB" sz="2000" dirty="0">
+              <a:latin typeface="Bahnschrift" panose="020B0502040204020203" pitchFamily="34" charset="0"/>
+            </a:endParaRPr>
+          </a:p>
+        </p:txBody>
+      </p:sp>
+      <p:sp>
+        <p:nvSpPr>
+          <p:cNvPr id="4" name="Textfeld 3">
+            <a:extLst>
+              <a:ext uri="{FF2B5EF4-FFF2-40B4-BE49-F238E27FC236}">
+                <a16:creationId xmlns:a16="http://schemas.microsoft.com/office/drawing/2014/main" id="{BFA64836-FAE0-6082-597A-94B1ABD8C5B5}"/>
+              </a:ext>
+            </a:extLst>
+          </p:cNvPr>
+          <p:cNvSpPr txBox="1"/>
+          <p:nvPr/>
+        </p:nvSpPr>
+        <p:spPr>
+          <a:xfrm>
+            <a:off x="4762141" y="4980543"/>
+            <a:ext cx="184731" cy="369332"/>
+          </a:xfrm>
+          <a:prstGeom prst="rect">
+            <a:avLst/>
+          </a:prstGeom>
+          <a:noFill/>
+        </p:spPr>
+        <p:txBody>
+          <a:bodyPr wrap="none" rtlCol="0">
+            <a:spAutoFit/>
+          </a:bodyPr>
+          <a:lstStyle/>
+          <a:p>
+            <a:endParaRPr lang="en-US" i="1" dirty="0">
               <a:solidFill>
-                <a:schemeClr val="bg2">
-                  <a:lumMod val="75000"/>
-                </a:schemeClr>
+                <a:schemeClr val="accent3"/>
               </a:solidFill>
               <a:latin typeface="Bahnschrift" panose="020B0502040204020203" pitchFamily="34" charset="0"/>
             </a:endParaRPr>
           </a:p>
         </p:txBody>
       </p:sp>
+      <p:sp>
+        <p:nvSpPr>
+          <p:cNvPr id="8" name="Rounded Rectangle 7">
+            <a:extLst>
+              <a:ext uri="{FF2B5EF4-FFF2-40B4-BE49-F238E27FC236}">
+                <a16:creationId xmlns:a16="http://schemas.microsoft.com/office/drawing/2014/main" id="{7053F261-3A91-4CA9-7C23-714F14F35EEF}"/>
+              </a:ext>
+            </a:extLst>
+          </p:cNvPr>
+          <p:cNvSpPr/>
+          <p:nvPr/>
+        </p:nvSpPr>
+        <p:spPr>
+          <a:xfrm>
+            <a:off x="4545249" y="4481035"/>
+            <a:ext cx="3101501" cy="499508"/>
+          </a:xfrm>
+          <a:prstGeom prst="roundRect">
+            <a:avLst>
+              <a:gd name="adj" fmla="val 50000"/>
+            </a:avLst>
+          </a:prstGeom>
+          <a:solidFill>
+            <a:srgbClr val="FFFDF7"/>
+          </a:solidFill>
+          <a:ln w="76200">
+            <a:solidFill>
+              <a:schemeClr val="accent4">
+                <a:lumMod val="20000"/>
+                <a:lumOff val="80000"/>
+              </a:schemeClr>
+            </a:solidFill>
+          </a:ln>
+        </p:spPr>
+        <p:style>
+          <a:lnRef idx="2">
+            <a:schemeClr val="accent1">
+              <a:shade val="50000"/>
+            </a:schemeClr>
+          </a:lnRef>
+          <a:fillRef idx="1">
+            <a:schemeClr val="accent1"/>
+          </a:fillRef>
+          <a:effectRef idx="0">
+            <a:schemeClr val="accent1"/>
+          </a:effectRef>
+          <a:fontRef idx="minor">
+            <a:schemeClr val="lt1"/>
+          </a:fontRef>
+        </p:style>
+        <p:txBody>
+          <a:bodyPr rtlCol="0" anchor="ctr"/>
+          <a:lstStyle/>
+          <a:p>
+            <a:pPr algn="ctr"/>
+            <a:r>
+              <a:rPr lang="de-AT" i="1" dirty="0">
+                <a:solidFill>
+                  <a:schemeClr val="accent3"/>
+                </a:solidFill>
+                <a:latin typeface="Bahnschrift" panose="020B0502040204020203" pitchFamily="34" charset="0"/>
+              </a:rPr>
+              <a:t>- </a:t>
+            </a:r>
+            <a:r>
+              <a:rPr lang="de-AT" i="1" dirty="0" err="1">
+                <a:solidFill>
+                  <a:schemeClr val="accent3"/>
+                </a:solidFill>
+                <a:latin typeface="Bahnschrift" panose="020B0502040204020203" pitchFamily="34" charset="0"/>
+              </a:rPr>
+              <a:t>Preliminary</a:t>
+            </a:r>
+            <a:r>
+              <a:rPr lang="de-AT" i="1" dirty="0">
+                <a:solidFill>
+                  <a:schemeClr val="accent3"/>
+                </a:solidFill>
+                <a:latin typeface="Bahnschrift" panose="020B0502040204020203" pitchFamily="34" charset="0"/>
+              </a:rPr>
+              <a:t> </a:t>
+            </a:r>
+            <a:r>
+              <a:rPr lang="de-AT" i="1" dirty="0" err="1">
+                <a:solidFill>
+                  <a:schemeClr val="accent3"/>
+                </a:solidFill>
+                <a:latin typeface="Bahnschrift" panose="020B0502040204020203" pitchFamily="34" charset="0"/>
+              </a:rPr>
+              <a:t>Findings</a:t>
+            </a:r>
+            <a:r>
+              <a:rPr lang="de-AT" i="1" dirty="0">
+                <a:solidFill>
+                  <a:schemeClr val="accent3"/>
+                </a:solidFill>
+                <a:latin typeface="Bahnschrift" panose="020B0502040204020203" pitchFamily="34" charset="0"/>
+              </a:rPr>
+              <a:t> -</a:t>
+            </a:r>
+            <a:endParaRPr lang="en-US" i="1" dirty="0">
+              <a:solidFill>
+                <a:schemeClr val="accent3"/>
+              </a:solidFill>
+              <a:latin typeface="Bahnschrift" panose="020B0502040204020203" pitchFamily="34" charset="0"/>
+            </a:endParaRPr>
+          </a:p>
+        </p:txBody>
+      </p:sp>
+      <p:cxnSp>
+        <p:nvCxnSpPr>
+          <p:cNvPr id="10" name="Gerader Verbinder 9">
+            <a:extLst>
+              <a:ext uri="{FF2B5EF4-FFF2-40B4-BE49-F238E27FC236}">
+                <a16:creationId xmlns:a16="http://schemas.microsoft.com/office/drawing/2014/main" id="{AB42E287-BB3E-73C0-A51F-1ABC8E677099}"/>
+              </a:ext>
+            </a:extLst>
+          </p:cNvPr>
+          <p:cNvCxnSpPr/>
+          <p:nvPr/>
+        </p:nvCxnSpPr>
+        <p:spPr>
+          <a:xfrm>
+            <a:off x="2276272" y="3509963"/>
+            <a:ext cx="7616758" cy="0"/>
+          </a:xfrm>
+          <a:prstGeom prst="line">
+            <a:avLst/>
+          </a:prstGeom>
+          <a:ln w="38100">
+            <a:solidFill>
+              <a:srgbClr val="0CB87F"/>
+            </a:solidFill>
+          </a:ln>
+        </p:spPr>
+        <p:style>
+          <a:lnRef idx="1">
+            <a:schemeClr val="accent1"/>
+          </a:lnRef>
+          <a:fillRef idx="0">
+            <a:schemeClr val="accent1"/>
+          </a:fillRef>
+          <a:effectRef idx="0">
+            <a:schemeClr val="accent1"/>
+          </a:effectRef>
+          <a:fontRef idx="minor">
+            <a:schemeClr val="tx1"/>
+          </a:fontRef>
+        </p:style>
+      </p:cxnSp>
     </p:spTree>
     <p:extLst>
       <p:ext uri="{BB962C8B-B14F-4D97-AF65-F5344CB8AC3E}">
@@ -7622,13 +7751,6 @@
   <p:clrMapOvr>
     <a:masterClrMapping/>
   </p:clrMapOvr>
-  <p:timing>
-    <p:tnLst>
-      <p:par>
-        <p:cTn id="1" dur="indefinite" restart="never" nodeType="tmRoot"/>
-      </p:par>
-    </p:tnLst>
-  </p:timing>
 </p:sld>
 </file>
 
@@ -7665,7 +7787,7 @@
           <a:lstStyle/>
           <a:p>
             <a:r>
-              <a:rPr lang="de-DE" dirty="0" smtClean="0"/>
+              <a:rPr lang="de-DE" dirty="0"/>
               <a:t>ZETA test for time-locked spiking	</a:t>
             </a:r>
             <a:endParaRPr lang="en-GB" dirty="0"/>
@@ -7791,7 +7913,275 @@
   <p:timing>
     <p:tnLst>
       <p:par>
-        <p:cTn id="1" dur="indefinite" restart="never" nodeType="tmRoot"/>
+        <p:cTn id="1" dur="indefinite" restart="never" nodeType="tmRoot">
+          <p:childTnLst>
+            <p:seq concurrent="1" nextAc="seek">
+              <p:cTn id="2" dur="indefinite" nodeType="mainSeq">
+                <p:childTnLst>
+                  <p:par>
+                    <p:cTn id="3" fill="hold">
+                      <p:stCondLst>
+                        <p:cond delay="indefinite"/>
+                      </p:stCondLst>
+                      <p:childTnLst>
+                        <p:par>
+                          <p:cTn id="4" fill="hold">
+                            <p:stCondLst>
+                              <p:cond delay="0"/>
+                            </p:stCondLst>
+                            <p:childTnLst>
+                              <p:par>
+                                <p:cTn id="5" presetID="1" presetClass="entr" presetSubtype="0" fill="hold" nodeType="clickEffect">
+                                  <p:stCondLst>
+                                    <p:cond delay="0"/>
+                                  </p:stCondLst>
+                                  <p:childTnLst>
+                                    <p:set>
+                                      <p:cBhvr>
+                                        <p:cTn id="6" dur="1" fill="hold">
+                                          <p:stCondLst>
+                                            <p:cond delay="0"/>
+                                          </p:stCondLst>
+                                        </p:cTn>
+                                        <p:tgtEl>
+                                          <p:spTgt spid="3">
+                                            <p:txEl>
+                                              <p:pRg st="0" end="0"/>
+                                            </p:txEl>
+                                          </p:spTgt>
+                                        </p:tgtEl>
+                                        <p:attrNameLst>
+                                          <p:attrName>style.visibility</p:attrName>
+                                        </p:attrNameLst>
+                                      </p:cBhvr>
+                                      <p:to>
+                                        <p:strVal val="visible"/>
+                                      </p:to>
+                                    </p:set>
+                                  </p:childTnLst>
+                                </p:cTn>
+                              </p:par>
+                            </p:childTnLst>
+                          </p:cTn>
+                        </p:par>
+                      </p:childTnLst>
+                    </p:cTn>
+                  </p:par>
+                  <p:par>
+                    <p:cTn id="7" fill="hold">
+                      <p:stCondLst>
+                        <p:cond delay="indefinite"/>
+                      </p:stCondLst>
+                      <p:childTnLst>
+                        <p:par>
+                          <p:cTn id="8" fill="hold">
+                            <p:stCondLst>
+                              <p:cond delay="0"/>
+                            </p:stCondLst>
+                            <p:childTnLst>
+                              <p:par>
+                                <p:cTn id="9" presetID="1" presetClass="entr" presetSubtype="0" fill="hold" nodeType="clickEffect">
+                                  <p:stCondLst>
+                                    <p:cond delay="0"/>
+                                  </p:stCondLst>
+                                  <p:childTnLst>
+                                    <p:set>
+                                      <p:cBhvr>
+                                        <p:cTn id="10" dur="1" fill="hold">
+                                          <p:stCondLst>
+                                            <p:cond delay="0"/>
+                                          </p:stCondLst>
+                                        </p:cTn>
+                                        <p:tgtEl>
+                                          <p:spTgt spid="3">
+                                            <p:txEl>
+                                              <p:pRg st="1" end="1"/>
+                                            </p:txEl>
+                                          </p:spTgt>
+                                        </p:tgtEl>
+                                        <p:attrNameLst>
+                                          <p:attrName>style.visibility</p:attrName>
+                                        </p:attrNameLst>
+                                      </p:cBhvr>
+                                      <p:to>
+                                        <p:strVal val="visible"/>
+                                      </p:to>
+                                    </p:set>
+                                  </p:childTnLst>
+                                </p:cTn>
+                              </p:par>
+                            </p:childTnLst>
+                          </p:cTn>
+                        </p:par>
+                      </p:childTnLst>
+                    </p:cTn>
+                  </p:par>
+                  <p:par>
+                    <p:cTn id="11" fill="hold">
+                      <p:stCondLst>
+                        <p:cond delay="indefinite"/>
+                      </p:stCondLst>
+                      <p:childTnLst>
+                        <p:par>
+                          <p:cTn id="12" fill="hold">
+                            <p:stCondLst>
+                              <p:cond delay="0"/>
+                            </p:stCondLst>
+                            <p:childTnLst>
+                              <p:par>
+                                <p:cTn id="13" presetID="1" presetClass="entr" presetSubtype="0" fill="hold" nodeType="clickEffect">
+                                  <p:stCondLst>
+                                    <p:cond delay="0"/>
+                                  </p:stCondLst>
+                                  <p:childTnLst>
+                                    <p:set>
+                                      <p:cBhvr>
+                                        <p:cTn id="14" dur="1" fill="hold">
+                                          <p:stCondLst>
+                                            <p:cond delay="0"/>
+                                          </p:stCondLst>
+                                        </p:cTn>
+                                        <p:tgtEl>
+                                          <p:spTgt spid="3">
+                                            <p:txEl>
+                                              <p:pRg st="2" end="2"/>
+                                            </p:txEl>
+                                          </p:spTgt>
+                                        </p:tgtEl>
+                                        <p:attrNameLst>
+                                          <p:attrName>style.visibility</p:attrName>
+                                        </p:attrNameLst>
+                                      </p:cBhvr>
+                                      <p:to>
+                                        <p:strVal val="visible"/>
+                                      </p:to>
+                                    </p:set>
+                                  </p:childTnLst>
+                                </p:cTn>
+                              </p:par>
+                            </p:childTnLst>
+                          </p:cTn>
+                        </p:par>
+                      </p:childTnLst>
+                    </p:cTn>
+                  </p:par>
+                  <p:par>
+                    <p:cTn id="15" fill="hold">
+                      <p:stCondLst>
+                        <p:cond delay="indefinite"/>
+                      </p:stCondLst>
+                      <p:childTnLst>
+                        <p:par>
+                          <p:cTn id="16" fill="hold">
+                            <p:stCondLst>
+                              <p:cond delay="0"/>
+                            </p:stCondLst>
+                            <p:childTnLst>
+                              <p:par>
+                                <p:cTn id="17" presetID="1" presetClass="entr" presetSubtype="0" fill="hold" nodeType="clickEffect">
+                                  <p:stCondLst>
+                                    <p:cond delay="0"/>
+                                  </p:stCondLst>
+                                  <p:childTnLst>
+                                    <p:set>
+                                      <p:cBhvr>
+                                        <p:cTn id="18" dur="1" fill="hold">
+                                          <p:stCondLst>
+                                            <p:cond delay="0"/>
+                                          </p:stCondLst>
+                                        </p:cTn>
+                                        <p:tgtEl>
+                                          <p:spTgt spid="3">
+                                            <p:txEl>
+                                              <p:pRg st="3" end="3"/>
+                                            </p:txEl>
+                                          </p:spTgt>
+                                        </p:tgtEl>
+                                        <p:attrNameLst>
+                                          <p:attrName>style.visibility</p:attrName>
+                                        </p:attrNameLst>
+                                      </p:cBhvr>
+                                      <p:to>
+                                        <p:strVal val="visible"/>
+                                      </p:to>
+                                    </p:set>
+                                  </p:childTnLst>
+                                </p:cTn>
+                              </p:par>
+                            </p:childTnLst>
+                          </p:cTn>
+                        </p:par>
+                      </p:childTnLst>
+                    </p:cTn>
+                  </p:par>
+                  <p:par>
+                    <p:cTn id="19" fill="hold">
+                      <p:stCondLst>
+                        <p:cond delay="indefinite"/>
+                      </p:stCondLst>
+                      <p:childTnLst>
+                        <p:par>
+                          <p:cTn id="20" fill="hold">
+                            <p:stCondLst>
+                              <p:cond delay="0"/>
+                            </p:stCondLst>
+                            <p:childTnLst>
+                              <p:par>
+                                <p:cTn id="21" presetID="1" presetClass="entr" presetSubtype="0" fill="hold" nodeType="clickEffect">
+                                  <p:stCondLst>
+                                    <p:cond delay="0"/>
+                                  </p:stCondLst>
+                                  <p:childTnLst>
+                                    <p:set>
+                                      <p:cBhvr>
+                                        <p:cTn id="22" dur="1" fill="hold">
+                                          <p:stCondLst>
+                                            <p:cond delay="0"/>
+                                          </p:stCondLst>
+                                        </p:cTn>
+                                        <p:tgtEl>
+                                          <p:spTgt spid="3">
+                                            <p:txEl>
+                                              <p:pRg st="4" end="4"/>
+                                            </p:txEl>
+                                          </p:spTgt>
+                                        </p:tgtEl>
+                                        <p:attrNameLst>
+                                          <p:attrName>style.visibility</p:attrName>
+                                        </p:attrNameLst>
+                                      </p:cBhvr>
+                                      <p:to>
+                                        <p:strVal val="visible"/>
+                                      </p:to>
+                                    </p:set>
+                                  </p:childTnLst>
+                                </p:cTn>
+                              </p:par>
+                            </p:childTnLst>
+                          </p:cTn>
+                        </p:par>
+                      </p:childTnLst>
+                    </p:cTn>
+                  </p:par>
+                </p:childTnLst>
+              </p:cTn>
+              <p:prevCondLst>
+                <p:cond evt="onPrev" delay="0">
+                  <p:tgtEl>
+                    <p:sldTgt/>
+                  </p:tgtEl>
+                </p:cond>
+              </p:prevCondLst>
+              <p:nextCondLst>
+                <p:cond evt="onNext" delay="0">
+                  <p:tgtEl>
+                    <p:sldTgt/>
+                  </p:tgtEl>
+                </p:cond>
+              </p:nextCondLst>
+            </p:seq>
+          </p:childTnLst>
+        </p:cTn>
       </p:par>
     </p:tnLst>
   </p:timing>
@@ -7887,7 +8277,7 @@
           <a:lstStyle/>
           <a:p>
             <a:r>
-              <a:rPr lang="de-DE" dirty="0" smtClean="0"/>
+              <a:rPr lang="de-DE" dirty="0"/>
               <a:t>ZETA visualization</a:t>
             </a:r>
             <a:endParaRPr lang="en-GB" dirty="0"/>
@@ -7912,7 +8302,7 @@
         </p:blipFill>
         <p:spPr>
           <a:xfrm>
-            <a:off x="2163136" y="1690688"/>
+            <a:off x="2149815" y="1765333"/>
             <a:ext cx="7892370" cy="4957762"/>
           </a:xfrm>
           <a:prstGeom prst="rect">
@@ -7930,13 +8320,6 @@
   <p:clrMapOvr>
     <a:masterClrMapping/>
   </p:clrMapOvr>
-  <p:timing>
-    <p:tnLst>
-      <p:par>
-        <p:cTn id="1" dur="indefinite" restart="never" nodeType="tmRoot"/>
-      </p:par>
-    </p:tnLst>
-  </p:timing>
 </p:sld>
 </file>
 
@@ -8064,7 +8447,7 @@
           <a:lstStyle/>
           <a:p>
             <a:r>
-              <a:rPr lang="de-DE" dirty="0" smtClean="0"/>
+              <a:rPr lang="de-DE" dirty="0"/>
               <a:t>ZETA visualization</a:t>
             </a:r>
             <a:endParaRPr lang="en-GB" dirty="0"/>
@@ -8128,7 +8511,7 @@
           </a:p>
           <a:p>
             <a:r>
-              <a:rPr lang="en-GB" sz="2800" dirty="0" smtClean="0">
+              <a:rPr lang="en-GB" sz="2800" dirty="0">
                 <a:solidFill>
                   <a:schemeClr val="tx1"/>
                 </a:solidFill>
@@ -8137,7 +8520,7 @@
               <a:t>⇦ </a:t>
             </a:r>
             <a:r>
-              <a:rPr lang="en-GB" sz="2800" b="1" dirty="0" smtClean="0">
+              <a:rPr lang="en-GB" sz="2800" b="1" dirty="0">
                 <a:solidFill>
                   <a:schemeClr val="tx1"/>
                 </a:solidFill>
@@ -8146,7 +8529,7 @@
               <a:t>Normalized</a:t>
             </a:r>
             <a:r>
-              <a:rPr lang="en-GB" sz="2800" dirty="0" smtClean="0">
+              <a:rPr lang="en-GB" sz="2800" dirty="0">
                 <a:solidFill>
                   <a:schemeClr val="tx1"/>
                 </a:solidFill>
@@ -8164,7 +8547,7 @@
             </a:endParaRPr>
           </a:p>
           <a:p>
-            <a:endParaRPr lang="de-DE" sz="2800" dirty="0" smtClean="0">
+            <a:endParaRPr lang="de-DE" sz="2800" dirty="0">
               <a:solidFill>
                 <a:schemeClr val="tx1"/>
               </a:solidFill>
@@ -8172,7 +8555,7 @@
             </a:endParaRPr>
           </a:p>
           <a:p>
-            <a:endParaRPr lang="de-DE" sz="2800" dirty="0" smtClean="0">
+            <a:endParaRPr lang="de-DE" sz="2800" dirty="0">
               <a:solidFill>
                 <a:schemeClr val="tx1"/>
               </a:solidFill>
@@ -8190,7 +8573,7 @@
               <a:t>⇦ </a:t>
             </a:r>
             <a:r>
-              <a:rPr lang="en-GB" sz="2800" b="1" dirty="0" smtClean="0">
+              <a:rPr lang="en-GB" sz="2800" b="1" dirty="0">
                 <a:solidFill>
                   <a:schemeClr val="tx1"/>
                 </a:solidFill>
@@ -8199,7 +8582,7 @@
               <a:t>Mean-subtracted </a:t>
             </a:r>
             <a:r>
-              <a:rPr lang="en-GB" sz="2800" dirty="0" smtClean="0">
+              <a:rPr lang="en-GB" sz="2800" dirty="0">
                 <a:solidFill>
                   <a:schemeClr val="tx1"/>
                 </a:solidFill>
@@ -8207,15 +8590,9 @@
               </a:rPr>
               <a:t>spike density deviation</a:t>
             </a:r>
-            <a:endParaRPr lang="en-GB" sz="2800" dirty="0">
-              <a:solidFill>
-                <a:schemeClr val="tx1"/>
-              </a:solidFill>
-              <a:latin typeface="Bahnschrift" panose="020B0502040204020203" pitchFamily="34" charset="0"/>
-            </a:endParaRPr>
           </a:p>
           <a:p>
-            <a:endParaRPr lang="en-GB" sz="2800" dirty="0" smtClean="0">
+            <a:endParaRPr lang="en-GB" sz="2800" dirty="0">
               <a:solidFill>
                 <a:schemeClr val="tx1"/>
               </a:solidFill>
@@ -8231,7 +8608,7 @@
             </a:endParaRPr>
           </a:p>
           <a:p>
-            <a:endParaRPr lang="de-DE" sz="2800" dirty="0" smtClean="0">
+            <a:endParaRPr lang="de-DE" sz="2800" dirty="0">
               <a:solidFill>
                 <a:schemeClr val="tx1"/>
               </a:solidFill>
@@ -8656,7 +9033,7 @@
           <a:lstStyle/>
           <a:p>
             <a:r>
-              <a:rPr lang="de-DE" dirty="0" smtClean="0"/>
+              <a:rPr lang="de-DE" dirty="0"/>
               <a:t>ZETA visualization</a:t>
             </a:r>
             <a:endParaRPr lang="en-GB" dirty="0"/>
@@ -8673,17 +9050,98 @@
   <p:clrMapOvr>
     <a:masterClrMapping/>
   </p:clrMapOvr>
-  <p:timing>
-    <p:tnLst>
-      <p:par>
-        <p:cTn id="1" dur="indefinite" restart="never" nodeType="tmRoot"/>
-      </p:par>
-    </p:tnLst>
-  </p:timing>
 </p:sld>
 </file>
 
 <file path=ppt/slides/slide14.xml><?xml version="1.0" encoding="utf-8"?>
+<p:sld xmlns:a="http://schemas.openxmlformats.org/drawingml/2006/main" xmlns:r="http://schemas.openxmlformats.org/officeDocument/2006/relationships" xmlns:p="http://schemas.openxmlformats.org/presentationml/2006/main">
+  <p:cSld>
+    <p:spTree>
+      <p:nvGrpSpPr>
+        <p:cNvPr id="1" name=""/>
+        <p:cNvGrpSpPr/>
+        <p:nvPr/>
+      </p:nvGrpSpPr>
+      <p:grpSpPr>
+        <a:xfrm>
+          <a:off x="0" y="0"/>
+          <a:ext cx="0" cy="0"/>
+          <a:chOff x="0" y="0"/>
+          <a:chExt cx="0" cy="0"/>
+        </a:xfrm>
+      </p:grpSpPr>
+      <p:sp>
+        <p:nvSpPr>
+          <p:cNvPr id="2" name="Titel 1">
+            <a:extLst>
+              <a:ext uri="{FF2B5EF4-FFF2-40B4-BE49-F238E27FC236}">
+                <a16:creationId xmlns:a16="http://schemas.microsoft.com/office/drawing/2014/main" id="{5FBE3696-AFF0-48BF-06A1-D0D49A7EAA91}"/>
+              </a:ext>
+            </a:extLst>
+          </p:cNvPr>
+          <p:cNvSpPr>
+            <a:spLocks noGrp="1"/>
+          </p:cNvSpPr>
+          <p:nvPr>
+            <p:ph type="title"/>
+          </p:nvPr>
+        </p:nvSpPr>
+        <p:spPr/>
+        <p:txBody>
+          <a:bodyPr/>
+          <a:lstStyle/>
+          <a:p>
+            <a:r>
+              <a:rPr lang="de-AT" dirty="0"/>
+              <a:t>ZETA </a:t>
+            </a:r>
+            <a:r>
+              <a:rPr lang="de-AT" dirty="0" err="1"/>
+              <a:t>Results</a:t>
+            </a:r>
+            <a:endParaRPr lang="en-US" dirty="0"/>
+          </a:p>
+        </p:txBody>
+      </p:sp>
+      <p:sp>
+        <p:nvSpPr>
+          <p:cNvPr id="3" name="Inhaltsplatzhalter 2">
+            <a:extLst>
+              <a:ext uri="{FF2B5EF4-FFF2-40B4-BE49-F238E27FC236}">
+                <a16:creationId xmlns:a16="http://schemas.microsoft.com/office/drawing/2014/main" id="{EB286E00-2FCA-A965-B93F-CF648CFD95F5}"/>
+              </a:ext>
+            </a:extLst>
+          </p:cNvPr>
+          <p:cNvSpPr>
+            <a:spLocks noGrp="1"/>
+          </p:cNvSpPr>
+          <p:nvPr>
+            <p:ph idx="1"/>
+          </p:nvPr>
+        </p:nvSpPr>
+        <p:spPr/>
+        <p:txBody>
+          <a:bodyPr/>
+          <a:lstStyle/>
+          <a:p>
+            <a:endParaRPr lang="en-US"/>
+          </a:p>
+        </p:txBody>
+      </p:sp>
+    </p:spTree>
+    <p:extLst>
+      <p:ext uri="{BB962C8B-B14F-4D97-AF65-F5344CB8AC3E}">
+        <p14:creationId xmlns:p14="http://schemas.microsoft.com/office/powerpoint/2010/main" val="3282013958"/>
+      </p:ext>
+    </p:extLst>
+  </p:cSld>
+  <p:clrMapOvr>
+    <a:masterClrMapping/>
+  </p:clrMapOvr>
+</p:sld>
+</file>
+
+<file path=ppt/slides/slide15.xml><?xml version="1.0" encoding="utf-8"?>
 <p:sld xmlns:a="http://schemas.openxmlformats.org/drawingml/2006/main" xmlns:r="http://schemas.openxmlformats.org/officeDocument/2006/relationships" xmlns:p="http://schemas.openxmlformats.org/presentationml/2006/main">
   <p:cSld>
     <p:bg>
@@ -8842,7 +9300,7 @@
           </a:p>
           <a:p>
             <a:r>
-              <a:rPr lang="en-GB" sz="2800" dirty="0" smtClean="0">
+              <a:rPr lang="en-GB" sz="2800" dirty="0">
                 <a:solidFill>
                   <a:schemeClr val="tx1"/>
                 </a:solidFill>
@@ -8851,7 +9309,7 @@
               <a:t>⇦ Cumulative</a:t>
             </a:r>
             <a:r>
-              <a:rPr lang="en-GB" sz="2800" b="1" dirty="0" smtClean="0">
+              <a:rPr lang="en-GB" sz="2800" b="1" dirty="0">
                 <a:solidFill>
                   <a:schemeClr val="tx1"/>
                 </a:solidFill>
@@ -8859,7 +9317,7 @@
               </a:rPr>
               <a:t> Spikes/Trial</a:t>
             </a:r>
-            <a:endParaRPr lang="en-GB" sz="2800" dirty="0" smtClean="0">
+            <a:endParaRPr lang="en-GB" sz="2800" dirty="0">
               <a:solidFill>
                 <a:schemeClr val="tx1"/>
               </a:solidFill>
@@ -8875,7 +9333,7 @@
             </a:endParaRPr>
           </a:p>
           <a:p>
-            <a:endParaRPr lang="de-DE" sz="2800" dirty="0" smtClean="0">
+            <a:endParaRPr lang="de-DE" sz="2800" dirty="0">
               <a:solidFill>
                 <a:schemeClr val="tx1"/>
               </a:solidFill>
@@ -8883,7 +9341,7 @@
             </a:endParaRPr>
           </a:p>
           <a:p>
-            <a:endParaRPr lang="de-DE" sz="2800" dirty="0" smtClean="0">
+            <a:endParaRPr lang="de-DE" sz="2800" dirty="0">
               <a:solidFill>
                 <a:schemeClr val="tx1"/>
               </a:solidFill>
@@ -8901,7 +9359,7 @@
               <a:t>⇦ </a:t>
             </a:r>
             <a:r>
-              <a:rPr lang="en-GB" sz="2800" b="1" dirty="0" smtClean="0">
+              <a:rPr lang="en-GB" sz="2800" b="1" dirty="0">
                 <a:solidFill>
                   <a:schemeClr val="tx1"/>
                 </a:solidFill>
@@ -8910,7 +9368,7 @@
               <a:t>Mean-subtracted difference </a:t>
             </a:r>
             <a:r>
-              <a:rPr lang="en-GB" sz="2800" dirty="0" smtClean="0">
+              <a:rPr lang="en-GB" sz="2800" dirty="0">
                 <a:solidFill>
                   <a:schemeClr val="tx1"/>
                 </a:solidFill>
@@ -8918,15 +9376,9 @@
               </a:rPr>
               <a:t>in cumulative spikes/trial</a:t>
             </a:r>
-            <a:endParaRPr lang="en-GB" sz="2800" dirty="0">
-              <a:solidFill>
-                <a:schemeClr val="tx1"/>
-              </a:solidFill>
-              <a:latin typeface="Bahnschrift" panose="020B0502040204020203" pitchFamily="34" charset="0"/>
-            </a:endParaRPr>
           </a:p>
           <a:p>
-            <a:endParaRPr lang="en-GB" sz="2800" dirty="0" smtClean="0">
+            <a:endParaRPr lang="en-GB" sz="2800" dirty="0">
               <a:solidFill>
                 <a:schemeClr val="tx1"/>
               </a:solidFill>
@@ -8942,7 +9394,7 @@
             </a:endParaRPr>
           </a:p>
           <a:p>
-            <a:endParaRPr lang="de-DE" sz="2800" dirty="0" smtClean="0">
+            <a:endParaRPr lang="de-DE" sz="2800" dirty="0">
               <a:solidFill>
                 <a:schemeClr val="tx1"/>
               </a:solidFill>
@@ -8975,7 +9427,7 @@
           <a:lstStyle/>
           <a:p>
             <a:r>
-              <a:rPr lang="de-DE" dirty="0" smtClean="0"/>
+              <a:rPr lang="de-DE" dirty="0"/>
               <a:t>ZETA2 visualization</a:t>
             </a:r>
             <a:endParaRPr lang="en-GB" dirty="0"/>
@@ -9236,7 +9688,7 @@
 </p:sld>
 </file>
 
-<file path=ppt/slides/slide15.xml><?xml version="1.0" encoding="utf-8"?>
+<file path=ppt/slides/slide16.xml><?xml version="1.0" encoding="utf-8"?>
 <p:sld xmlns:a="http://schemas.openxmlformats.org/drawingml/2006/main" xmlns:r="http://schemas.openxmlformats.org/officeDocument/2006/relationships" xmlns:p="http://schemas.openxmlformats.org/presentationml/2006/main">
   <p:cSld>
     <p:bg>
@@ -9385,7 +9837,7 @@
           <a:lstStyle/>
           <a:p>
             <a:r>
-              <a:rPr lang="de-DE" dirty="0" smtClean="0"/>
+              <a:rPr lang="de-DE" dirty="0"/>
               <a:t>ZETA2 visualization</a:t>
             </a:r>
             <a:endParaRPr lang="en-GB" dirty="0"/>
@@ -9402,17 +9854,10 @@
   <p:clrMapOvr>
     <a:masterClrMapping/>
   </p:clrMapOvr>
-  <p:timing>
-    <p:tnLst>
-      <p:par>
-        <p:cTn id="1" dur="indefinite" restart="never" nodeType="tmRoot"/>
-      </p:par>
-    </p:tnLst>
-  </p:timing>
 </p:sld>
 </file>
 
-<file path=ppt/slides/slide16.xml><?xml version="1.0" encoding="utf-8"?>
+<file path=ppt/slides/slide17.xml><?xml version="1.0" encoding="utf-8"?>
 <p:sld xmlns:a="http://schemas.openxmlformats.org/drawingml/2006/main" xmlns:r="http://schemas.openxmlformats.org/officeDocument/2006/relationships" xmlns:p="http://schemas.openxmlformats.org/presentationml/2006/main">
   <p:cSld>
     <p:spTree>
@@ -9491,17 +9936,10 @@
   <p:clrMapOvr>
     <a:masterClrMapping/>
   </p:clrMapOvr>
-  <p:timing>
-    <p:tnLst>
-      <p:par>
-        <p:cTn id="1" dur="indefinite" restart="never" nodeType="tmRoot"/>
-      </p:par>
-    </p:tnLst>
-  </p:timing>
 </p:sld>
 </file>
 
-<file path=ppt/slides/slide17.xml><?xml version="1.0" encoding="utf-8"?>
+<file path=ppt/slides/slide18.xml><?xml version="1.0" encoding="utf-8"?>
 <p:sld xmlns:a="http://schemas.openxmlformats.org/drawingml/2006/main" xmlns:r="http://schemas.openxmlformats.org/officeDocument/2006/relationships" xmlns:p="http://schemas.openxmlformats.org/presentationml/2006/main">
   <p:cSld>
     <p:spTree>
@@ -9580,17 +10018,10 @@
   <p:clrMapOvr>
     <a:masterClrMapping/>
   </p:clrMapOvr>
-  <p:timing>
-    <p:tnLst>
-      <p:par>
-        <p:cTn id="1" dur="indefinite" restart="never" nodeType="tmRoot"/>
-      </p:par>
-    </p:tnLst>
-  </p:timing>
 </p:sld>
 </file>
 
-<file path=ppt/slides/slide18.xml><?xml version="1.0" encoding="utf-8"?>
+<file path=ppt/slides/slide19.xml><?xml version="1.0" encoding="utf-8"?>
 <p:sld xmlns:a="http://schemas.openxmlformats.org/drawingml/2006/main" xmlns:r="http://schemas.openxmlformats.org/officeDocument/2006/relationships" xmlns:p="http://schemas.openxmlformats.org/presentationml/2006/main">
   <p:cSld>
     <p:spTree>
@@ -9623,7 +10054,7 @@
           <a:lstStyle/>
           <a:p>
             <a:r>
-              <a:rPr lang="de-DE" dirty="0" smtClean="0"/>
+              <a:rPr lang="de-DE" dirty="0"/>
               <a:t>ZETA2 results</a:t>
             </a:r>
             <a:endParaRPr lang="en-GB" dirty="0"/>
@@ -9714,16 +10145,7 @@
                 </a:solidFill>
                 <a:latin typeface="Bahnschrift" panose="020B0502040204020203" pitchFamily="34" charset="0"/>
               </a:rPr>
-              <a:t>r</a:t>
-            </a:r>
-            <a:r>
-              <a:rPr lang="de-DE" sz="2800" dirty="0" smtClean="0">
-                <a:solidFill>
-                  <a:schemeClr val="tx1"/>
-                </a:solidFill>
-                <a:latin typeface="Bahnschrift" panose="020B0502040204020203" pitchFamily="34" charset="0"/>
-              </a:rPr>
-              <a:t>eward outcome selectivity is primarily frontal</a:t>
+              <a:t>reward outcome selectivity is primarily frontal</a:t>
             </a:r>
             <a:endParaRPr lang="en-GB" sz="2800" dirty="0">
               <a:solidFill>
@@ -9956,7 +10378,198 @@
 </p:sld>
 </file>
 
-<file path=ppt/slides/slide19.xml><?xml version="1.0" encoding="utf-8"?>
+<file path=ppt/slides/slide2.xml><?xml version="1.0" encoding="utf-8"?>
+<p:sld xmlns:a="http://schemas.openxmlformats.org/drawingml/2006/main" xmlns:r="http://schemas.openxmlformats.org/officeDocument/2006/relationships" xmlns:p="http://schemas.openxmlformats.org/presentationml/2006/main">
+  <p:cSld>
+    <p:spTree>
+      <p:nvGrpSpPr>
+        <p:cNvPr id="1" name=""/>
+        <p:cNvGrpSpPr/>
+        <p:nvPr/>
+      </p:nvGrpSpPr>
+      <p:grpSpPr>
+        <a:xfrm>
+          <a:off x="0" y="0"/>
+          <a:ext cx="0" cy="0"/>
+          <a:chOff x="0" y="0"/>
+          <a:chExt cx="0" cy="0"/>
+        </a:xfrm>
+      </p:grpSpPr>
+      <p:sp>
+        <p:nvSpPr>
+          <p:cNvPr id="4" name="Rectangle 3"/>
+          <p:cNvSpPr/>
+          <p:nvPr/>
+        </p:nvSpPr>
+        <p:spPr>
+          <a:xfrm>
+            <a:off x="-278953" y="1407985"/>
+            <a:ext cx="12776548" cy="5558872"/>
+          </a:xfrm>
+          <a:prstGeom prst="rect">
+            <a:avLst/>
+          </a:prstGeom>
+          <a:solidFill>
+            <a:srgbClr val="FFFDF7"/>
+          </a:solidFill>
+          <a:ln w="76200">
+            <a:noFill/>
+          </a:ln>
+        </p:spPr>
+        <p:style>
+          <a:lnRef idx="2">
+            <a:schemeClr val="accent1">
+              <a:shade val="50000"/>
+            </a:schemeClr>
+          </a:lnRef>
+          <a:fillRef idx="1">
+            <a:schemeClr val="accent1"/>
+          </a:fillRef>
+          <a:effectRef idx="0">
+            <a:schemeClr val="accent1"/>
+          </a:effectRef>
+          <a:fontRef idx="minor">
+            <a:schemeClr val="lt1"/>
+          </a:fontRef>
+        </p:style>
+        <p:txBody>
+          <a:bodyPr rtlCol="0" anchor="ctr"/>
+          <a:lstStyle/>
+          <a:p>
+            <a:pPr algn="ctr"/>
+            <a:endParaRPr lang="en-GB" dirty="0"/>
+          </a:p>
+        </p:txBody>
+      </p:sp>
+      <p:sp>
+        <p:nvSpPr>
+          <p:cNvPr id="2" name="Rectangle 1"/>
+          <p:cNvSpPr/>
+          <p:nvPr/>
+        </p:nvSpPr>
+        <p:spPr>
+          <a:xfrm>
+            <a:off x="-278953" y="-395763"/>
+            <a:ext cx="12776548" cy="1803748"/>
+          </a:xfrm>
+          <a:prstGeom prst="rect">
+            <a:avLst/>
+          </a:prstGeom>
+          <a:solidFill>
+            <a:srgbClr val="CFF1E6"/>
+          </a:solidFill>
+          <a:ln w="76200">
+            <a:solidFill>
+              <a:srgbClr val="0CB87F"/>
+            </a:solidFill>
+          </a:ln>
+        </p:spPr>
+        <p:style>
+          <a:lnRef idx="2">
+            <a:schemeClr val="accent1">
+              <a:shade val="50000"/>
+            </a:schemeClr>
+          </a:lnRef>
+          <a:fillRef idx="1">
+            <a:schemeClr val="accent1"/>
+          </a:fillRef>
+          <a:effectRef idx="0">
+            <a:schemeClr val="accent1"/>
+          </a:effectRef>
+          <a:fontRef idx="minor">
+            <a:schemeClr val="lt1"/>
+          </a:fontRef>
+        </p:style>
+        <p:txBody>
+          <a:bodyPr rtlCol="0" anchor="ctr"/>
+          <a:lstStyle/>
+          <a:p>
+            <a:pPr algn="ctr"/>
+            <a:endParaRPr lang="en-GB" dirty="0"/>
+          </a:p>
+        </p:txBody>
+      </p:sp>
+      <p:sp>
+        <p:nvSpPr>
+          <p:cNvPr id="8" name="Rounded Rectangle 7"/>
+          <p:cNvSpPr/>
+          <p:nvPr/>
+        </p:nvSpPr>
+        <p:spPr>
+          <a:xfrm>
+            <a:off x="838201" y="365125"/>
+            <a:ext cx="4154714" cy="912132"/>
+          </a:xfrm>
+          <a:prstGeom prst="roundRect">
+            <a:avLst>
+              <a:gd name="adj" fmla="val 50000"/>
+            </a:avLst>
+          </a:prstGeom>
+          <a:solidFill>
+            <a:srgbClr val="FFFDF7"/>
+          </a:solidFill>
+          <a:ln w="76200">
+            <a:solidFill>
+              <a:schemeClr val="accent4">
+                <a:lumMod val="20000"/>
+                <a:lumOff val="80000"/>
+              </a:schemeClr>
+            </a:solidFill>
+          </a:ln>
+        </p:spPr>
+        <p:style>
+          <a:lnRef idx="2">
+            <a:schemeClr val="accent1">
+              <a:shade val="50000"/>
+            </a:schemeClr>
+          </a:lnRef>
+          <a:fillRef idx="1">
+            <a:schemeClr val="accent1"/>
+          </a:fillRef>
+          <a:effectRef idx="0">
+            <a:schemeClr val="accent1"/>
+          </a:effectRef>
+          <a:fontRef idx="minor">
+            <a:schemeClr val="lt1"/>
+          </a:fontRef>
+        </p:style>
+        <p:txBody>
+          <a:bodyPr rtlCol="0" anchor="ctr"/>
+          <a:lstStyle/>
+          <a:p>
+            <a:pPr algn="ctr"/>
+            <a:r>
+              <a:rPr lang="de-DE" sz="3200" b="1" dirty="0">
+                <a:solidFill>
+                  <a:schemeClr val="tx1"/>
+                </a:solidFill>
+                <a:latin typeface="Geneva" panose="020B0503030404040204" pitchFamily="34" charset="0"/>
+              </a:rPr>
+              <a:t>Project summary</a:t>
+            </a:r>
+            <a:endParaRPr lang="en-GB" sz="3200" b="1" dirty="0">
+              <a:solidFill>
+                <a:schemeClr val="tx1"/>
+              </a:solidFill>
+              <a:latin typeface="Geneva" panose="020B0503030404040204" pitchFamily="34" charset="0"/>
+            </a:endParaRPr>
+          </a:p>
+        </p:txBody>
+      </p:sp>
+    </p:spTree>
+    <p:extLst>
+      <p:ext uri="{BB962C8B-B14F-4D97-AF65-F5344CB8AC3E}">
+        <p14:creationId xmlns:p14="http://schemas.microsoft.com/office/powerpoint/2010/main" val="22455855"/>
+      </p:ext>
+    </p:extLst>
+  </p:cSld>
+  <p:clrMapOvr>
+    <a:masterClrMapping/>
+  </p:clrMapOvr>
+</p:sld>
+</file>
+
+<file path=ppt/slides/slide20.xml><?xml version="1.0" encoding="utf-8"?>
 <p:sld xmlns:a="http://schemas.openxmlformats.org/drawingml/2006/main" xmlns:r="http://schemas.openxmlformats.org/officeDocument/2006/relationships" xmlns:p="http://schemas.openxmlformats.org/presentationml/2006/main">
   <p:cSld>
     <p:spTree>
@@ -9989,7 +10602,7 @@
           <a:lstStyle/>
           <a:p>
             <a:r>
-              <a:rPr lang="de-DE" dirty="0" smtClean="0"/>
+              <a:rPr lang="de-DE" dirty="0"/>
               <a:t>Why behavioural modelling?</a:t>
             </a:r>
             <a:endParaRPr lang="en-GB" dirty="0"/>
@@ -10017,11 +10630,11 @@
           <a:lstStyle/>
           <a:p>
             <a:r>
-              <a:rPr lang="de-DE" dirty="0" smtClean="0"/>
+              <a:rPr lang="de-DE" dirty="0"/>
               <a:t>We can only observe the </a:t>
             </a:r>
             <a:r>
-              <a:rPr lang="de-DE" b="1" dirty="0" smtClean="0">
+              <a:rPr lang="de-DE" b="1" dirty="0">
                 <a:solidFill>
                   <a:srgbClr val="0CB87F"/>
                 </a:solidFill>
@@ -10029,11 +10642,11 @@
               <a:t>choices</a:t>
             </a:r>
             <a:r>
-              <a:rPr lang="de-DE" dirty="0" smtClean="0"/>
+              <a:rPr lang="de-DE" dirty="0"/>
               <a:t> made and their </a:t>
             </a:r>
             <a:r>
-              <a:rPr lang="de-DE" b="1" dirty="0" smtClean="0">
+              <a:rPr lang="de-DE" b="1" dirty="0">
                 <a:solidFill>
                   <a:srgbClr val="0CB87F"/>
                 </a:solidFill>
@@ -10041,11 +10654,11 @@
               <a:t>outcomes </a:t>
             </a:r>
             <a:r>
-              <a:rPr lang="de-DE" dirty="0" smtClean="0"/>
+              <a:rPr lang="de-DE" dirty="0"/>
               <a:t>but not the </a:t>
             </a:r>
             <a:r>
-              <a:rPr lang="de-DE" b="1" dirty="0" smtClean="0">
+              <a:rPr lang="de-DE" b="1" dirty="0">
                 <a:solidFill>
                   <a:srgbClr val="FF9412"/>
                 </a:solidFill>
@@ -10053,52 +10666,51 @@
               <a:t>cognitive variables </a:t>
             </a:r>
             <a:r>
-              <a:rPr lang="de-DE" dirty="0" smtClean="0"/>
+              <a:rPr lang="de-DE" dirty="0"/>
               <a:t>that drive them:</a:t>
             </a:r>
           </a:p>
           <a:p>
             <a:pPr lvl="1"/>
             <a:r>
-              <a:rPr lang="de-DE" dirty="0" smtClean="0"/>
+              <a:rPr lang="de-DE" dirty="0"/>
               <a:t>Belief about probability</a:t>
             </a:r>
           </a:p>
           <a:p>
             <a:pPr lvl="1"/>
             <a:r>
-              <a:rPr lang="de-DE" dirty="0" smtClean="0"/>
+              <a:rPr lang="de-DE" dirty="0"/>
               <a:t>Prediction error</a:t>
             </a:r>
           </a:p>
           <a:p>
             <a:pPr lvl="1"/>
             <a:r>
-              <a:rPr lang="de-DE" dirty="0" smtClean="0"/>
+              <a:rPr lang="de-DE" dirty="0"/>
               <a:t>Expected Reward</a:t>
             </a:r>
           </a:p>
           <a:p>
             <a:pPr lvl="1"/>
             <a:r>
-              <a:rPr lang="de-DE" dirty="0" smtClean="0"/>
+              <a:rPr lang="de-DE" dirty="0"/>
               <a:t>...</a:t>
             </a:r>
           </a:p>
           <a:p>
             <a:r>
-              <a:rPr lang="de-DE" dirty="0" smtClean="0"/>
+              <a:rPr lang="de-DE" dirty="0"/>
               <a:t>A behavioural model is </a:t>
             </a:r>
             <a:r>
-              <a:rPr lang="de-DE" b="1" dirty="0" smtClean="0"/>
+              <a:rPr lang="de-DE" b="1" dirty="0"/>
               <a:t>a generative rule </a:t>
             </a:r>
             <a:r>
-              <a:rPr lang="de-DE" dirty="0" smtClean="0"/>
+              <a:rPr lang="de-DE" dirty="0"/>
               <a:t>fit to the participants choice</a:t>
             </a:r>
-            <a:endParaRPr lang="de-DE" dirty="0"/>
           </a:p>
           <a:p>
             <a:endParaRPr lang="en-GB" dirty="0"/>
@@ -10289,214 +10901,7 @@
 </p:sld>
 </file>
 
-<file path=ppt/slides/slide2.xml><?xml version="1.0" encoding="utf-8"?>
-<p:sld xmlns:a="http://schemas.openxmlformats.org/drawingml/2006/main" xmlns:r="http://schemas.openxmlformats.org/officeDocument/2006/relationships" xmlns:p="http://schemas.openxmlformats.org/presentationml/2006/main">
-  <p:cSld>
-    <p:spTree>
-      <p:nvGrpSpPr>
-        <p:cNvPr id="1" name=""/>
-        <p:cNvGrpSpPr/>
-        <p:nvPr/>
-      </p:nvGrpSpPr>
-      <p:grpSpPr>
-        <a:xfrm>
-          <a:off x="0" y="0"/>
-          <a:ext cx="0" cy="0"/>
-          <a:chOff x="0" y="0"/>
-          <a:chExt cx="0" cy="0"/>
-        </a:xfrm>
-      </p:grpSpPr>
-      <p:sp>
-        <p:nvSpPr>
-          <p:cNvPr id="4" name="Rectangle 3"/>
-          <p:cNvSpPr/>
-          <p:nvPr/>
-        </p:nvSpPr>
-        <p:spPr>
-          <a:xfrm>
-            <a:off x="-278953" y="1407985"/>
-            <a:ext cx="12776548" cy="5558872"/>
-          </a:xfrm>
-          <a:prstGeom prst="rect">
-            <a:avLst/>
-          </a:prstGeom>
-          <a:solidFill>
-            <a:srgbClr val="FFFDF7"/>
-          </a:solidFill>
-          <a:ln w="76200">
-            <a:noFill/>
-          </a:ln>
-        </p:spPr>
-        <p:style>
-          <a:lnRef idx="2">
-            <a:schemeClr val="accent1">
-              <a:shade val="50000"/>
-            </a:schemeClr>
-          </a:lnRef>
-          <a:fillRef idx="1">
-            <a:schemeClr val="accent1"/>
-          </a:fillRef>
-          <a:effectRef idx="0">
-            <a:schemeClr val="accent1"/>
-          </a:effectRef>
-          <a:fontRef idx="minor">
-            <a:schemeClr val="lt1"/>
-          </a:fontRef>
-        </p:style>
-        <p:txBody>
-          <a:bodyPr rtlCol="0" anchor="ctr"/>
-          <a:lstStyle/>
-          <a:p>
-            <a:pPr algn="ctr"/>
-            <a:endParaRPr lang="en-GB" dirty="0"/>
-          </a:p>
-        </p:txBody>
-      </p:sp>
-      <p:sp>
-        <p:nvSpPr>
-          <p:cNvPr id="2" name="Rectangle 1"/>
-          <p:cNvSpPr/>
-          <p:nvPr/>
-        </p:nvSpPr>
-        <p:spPr>
-          <a:xfrm>
-            <a:off x="-278953" y="-395763"/>
-            <a:ext cx="12776548" cy="1803748"/>
-          </a:xfrm>
-          <a:prstGeom prst="rect">
-            <a:avLst/>
-          </a:prstGeom>
-          <a:solidFill>
-            <a:srgbClr val="CFF1E6"/>
-          </a:solidFill>
-          <a:ln w="76200">
-            <a:solidFill>
-              <a:srgbClr val="0CB87F"/>
-            </a:solidFill>
-          </a:ln>
-        </p:spPr>
-        <p:style>
-          <a:lnRef idx="2">
-            <a:schemeClr val="accent1">
-              <a:shade val="50000"/>
-            </a:schemeClr>
-          </a:lnRef>
-          <a:fillRef idx="1">
-            <a:schemeClr val="accent1"/>
-          </a:fillRef>
-          <a:effectRef idx="0">
-            <a:schemeClr val="accent1"/>
-          </a:effectRef>
-          <a:fontRef idx="minor">
-            <a:schemeClr val="lt1"/>
-          </a:fontRef>
-        </p:style>
-        <p:txBody>
-          <a:bodyPr rtlCol="0" anchor="ctr"/>
-          <a:lstStyle/>
-          <a:p>
-            <a:pPr algn="ctr"/>
-            <a:endParaRPr lang="en-GB" dirty="0"/>
-          </a:p>
-        </p:txBody>
-      </p:sp>
-      <p:sp>
-        <p:nvSpPr>
-          <p:cNvPr id="8" name="Rounded Rectangle 7"/>
-          <p:cNvSpPr/>
-          <p:nvPr/>
-        </p:nvSpPr>
-        <p:spPr>
-          <a:xfrm>
-            <a:off x="838201" y="365125"/>
-            <a:ext cx="4154714" cy="912132"/>
-          </a:xfrm>
-          <a:prstGeom prst="roundRect">
-            <a:avLst>
-              <a:gd name="adj" fmla="val 50000"/>
-            </a:avLst>
-          </a:prstGeom>
-          <a:solidFill>
-            <a:srgbClr val="FFFDF7"/>
-          </a:solidFill>
-          <a:ln w="76200">
-            <a:solidFill>
-              <a:schemeClr val="accent4">
-                <a:lumMod val="20000"/>
-                <a:lumOff val="80000"/>
-              </a:schemeClr>
-            </a:solidFill>
-          </a:ln>
-        </p:spPr>
-        <p:style>
-          <a:lnRef idx="2">
-            <a:schemeClr val="accent1">
-              <a:shade val="50000"/>
-            </a:schemeClr>
-          </a:lnRef>
-          <a:fillRef idx="1">
-            <a:schemeClr val="accent1"/>
-          </a:fillRef>
-          <a:effectRef idx="0">
-            <a:schemeClr val="accent1"/>
-          </a:effectRef>
-          <a:fontRef idx="minor">
-            <a:schemeClr val="lt1"/>
-          </a:fontRef>
-        </p:style>
-        <p:txBody>
-          <a:bodyPr rtlCol="0" anchor="ctr"/>
-          <a:lstStyle/>
-          <a:p>
-            <a:pPr algn="ctr"/>
-            <a:r>
-              <a:rPr lang="de-DE" sz="3200" b="1" dirty="0">
-                <a:solidFill>
-                  <a:schemeClr val="tx1"/>
-                </a:solidFill>
-                <a:latin typeface="Geneva" panose="020B0503030404040204" pitchFamily="34" charset="0"/>
-              </a:rPr>
-              <a:t>Project </a:t>
-            </a:r>
-            <a:r>
-              <a:rPr lang="de-DE" sz="3200" b="1" dirty="0" smtClean="0">
-                <a:solidFill>
-                  <a:schemeClr val="tx1"/>
-                </a:solidFill>
-                <a:latin typeface="Geneva" panose="020B0503030404040204" pitchFamily="34" charset="0"/>
-              </a:rPr>
-              <a:t>summary</a:t>
-            </a:r>
-            <a:endParaRPr lang="en-GB" sz="3200" b="1" dirty="0">
-              <a:solidFill>
-                <a:schemeClr val="tx1"/>
-              </a:solidFill>
-              <a:latin typeface="Geneva" panose="020B0503030404040204" pitchFamily="34" charset="0"/>
-            </a:endParaRPr>
-          </a:p>
-        </p:txBody>
-      </p:sp>
-    </p:spTree>
-    <p:extLst>
-      <p:ext uri="{BB962C8B-B14F-4D97-AF65-F5344CB8AC3E}">
-        <p14:creationId xmlns:p14="http://schemas.microsoft.com/office/powerpoint/2010/main" val="22455855"/>
-      </p:ext>
-    </p:extLst>
-  </p:cSld>
-  <p:clrMapOvr>
-    <a:masterClrMapping/>
-  </p:clrMapOvr>
-  <p:timing>
-    <p:tnLst>
-      <p:par>
-        <p:cTn id="1" dur="indefinite" restart="never" nodeType="tmRoot"/>
-      </p:par>
-    </p:tnLst>
-  </p:timing>
-</p:sld>
-</file>
-
-<file path=ppt/slides/slide20.xml><?xml version="1.0" encoding="utf-8"?>
+<file path=ppt/slides/slide21.xml><?xml version="1.0" encoding="utf-8"?>
 <p:sld xmlns:a="http://schemas.openxmlformats.org/drawingml/2006/main" xmlns:r="http://schemas.openxmlformats.org/officeDocument/2006/relationships" xmlns:p="http://schemas.openxmlformats.org/presentationml/2006/main">
   <p:cSld>
     <p:spTree>
@@ -10529,12 +10934,8 @@
           <a:lstStyle/>
           <a:p>
             <a:r>
-              <a:rPr lang="de-DE" dirty="0" smtClean="0"/>
-              <a:t>Rescorla </a:t>
-            </a:r>
-            <a:r>
-              <a:rPr lang="de-DE" dirty="0" smtClean="0"/>
-              <a:t>wagner/ Q-learning</a:t>
+              <a:rPr lang="de-DE" dirty="0"/>
+              <a:t>Rescorla wagner/ Q-learning</a:t>
             </a:r>
             <a:endParaRPr lang="en-GB" dirty="0"/>
           </a:p>
@@ -10554,8 +10955,8 @@
             <a:chExt cx="10515600" cy="1475178"/>
           </a:xfrm>
         </p:grpSpPr>
-        <mc:AlternateContent xmlns:mc="http://schemas.openxmlformats.org/markup-compatibility/2006">
-          <mc:Choice xmlns:a14="http://schemas.microsoft.com/office/drawing/2010/main" Requires="a14">
+        <mc:AlternateContent xmlns:mc="http://schemas.openxmlformats.org/markup-compatibility/2006" xmlns:a14="http://schemas.microsoft.com/office/drawing/2010/main">
+          <mc:Choice Requires="a14">
             <p:sp>
               <p:nvSpPr>
                 <p:cNvPr id="6" name="Rounded Rectangle 5"/>
@@ -10604,7 +11005,7 @@
                 <a:bodyPr rtlCol="0" anchor="t"/>
                 <a:lstStyle/>
                 <a:p>
-                  <a:endParaRPr lang="en-GB" sz="2800" i="1" dirty="0" smtClean="0">
+                  <a:endParaRPr lang="en-GB" sz="2800" i="1" dirty="0">
                     <a:solidFill>
                       <a:schemeClr val="tx1"/>
                     </a:solidFill>
@@ -10665,7 +11066,7 @@
                     </m:oMath>
                   </a14:m>
                   <a:r>
-                    <a:rPr lang="en-GB" sz="2400" dirty="0" smtClean="0">
+                    <a:rPr lang="en-GB" sz="2400" dirty="0">
                       <a:solidFill>
                         <a:schemeClr val="tx1"/>
                       </a:solidFill>
@@ -10688,7 +11089,7 @@
                     </m:oMath>
                   </a14:m>
                   <a:r>
-                    <a:rPr lang="en-GB" sz="2400" dirty="0" smtClean="0">
+                    <a:rPr lang="en-GB" sz="2400" dirty="0">
                       <a:solidFill>
                         <a:schemeClr val="tx1"/>
                       </a:solidFill>
@@ -10696,17 +11097,11 @@
                     </a:rPr>
                     <a:t> = learning rate</a:t>
                   </a:r>
-                  <a:endParaRPr lang="en-GB" sz="2400" dirty="0">
-                    <a:solidFill>
-                      <a:schemeClr val="tx1"/>
-                    </a:solidFill>
-                    <a:latin typeface="Bahnschrift" panose="020B0502040204020203" pitchFamily="34" charset="0"/>
-                  </a:endParaRPr>
                 </a:p>
               </p:txBody>
             </p:sp>
           </mc:Choice>
-          <mc:Fallback>
+          <mc:Fallback xmlns="">
             <p:sp>
               <p:nvSpPr>
                 <p:cNvPr id="6" name="Rounded Rectangle 5"/>
@@ -10755,8 +11150,8 @@
             </p:sp>
           </mc:Fallback>
         </mc:AlternateContent>
-        <mc:AlternateContent xmlns:mc="http://schemas.openxmlformats.org/markup-compatibility/2006">
-          <mc:Choice xmlns:a14="http://schemas.microsoft.com/office/drawing/2010/main" Requires="a14">
+        <mc:AlternateContent xmlns:mc="http://schemas.openxmlformats.org/markup-compatibility/2006" xmlns:a14="http://schemas.microsoft.com/office/drawing/2010/main">
+          <mc:Choice Requires="a14">
             <p:sp>
               <p:nvSpPr>
                 <p:cNvPr id="5" name="TextBox 4"/>
@@ -10885,7 +11280,7 @@
               </p:txBody>
             </p:sp>
           </mc:Choice>
-          <mc:Fallback>
+          <mc:Fallback xmlns="">
             <p:sp>
               <p:nvSpPr>
                 <p:cNvPr id="5" name="TextBox 4"/>
@@ -10924,8 +11319,8 @@
             </p:sp>
           </mc:Fallback>
         </mc:AlternateContent>
-        <mc:AlternateContent xmlns:mc="http://schemas.openxmlformats.org/markup-compatibility/2006">
-          <mc:Choice xmlns:a14="http://schemas.microsoft.com/office/drawing/2010/main" Requires="a14">
+        <mc:AlternateContent xmlns:mc="http://schemas.openxmlformats.org/markup-compatibility/2006" xmlns:a14="http://schemas.microsoft.com/office/drawing/2010/main">
+          <mc:Choice Requires="a14">
             <p:sp>
               <p:nvSpPr>
                 <p:cNvPr id="7" name="TextBox 6"/>
@@ -11066,7 +11461,7 @@
               </p:txBody>
             </p:sp>
           </mc:Choice>
-          <mc:Fallback>
+          <mc:Fallback xmlns="">
             <p:sp>
               <p:nvSpPr>
                 <p:cNvPr id="7" name="TextBox 6"/>
@@ -11120,8 +11515,8 @@
             <a:chExt cx="10515600" cy="1475178"/>
           </a:xfrm>
         </p:grpSpPr>
-        <mc:AlternateContent xmlns:mc="http://schemas.openxmlformats.org/markup-compatibility/2006">
-          <mc:Choice xmlns:a14="http://schemas.microsoft.com/office/drawing/2010/main" Requires="a14">
+        <mc:AlternateContent xmlns:mc="http://schemas.openxmlformats.org/markup-compatibility/2006" xmlns:a14="http://schemas.microsoft.com/office/drawing/2010/main">
+          <mc:Choice Requires="a14">
             <p:sp>
               <p:nvSpPr>
                 <p:cNvPr id="8" name="Rounded Rectangle 7"/>
@@ -11181,7 +11576,7 @@
                 </a:p>
                 <a:p>
                   <a:pPr algn="ctr"/>
-                  <a:endParaRPr lang="en-GB" sz="2800" i="1" dirty="0" smtClean="0">
+                  <a:endParaRPr lang="en-GB" sz="2800" i="1" dirty="0">
                     <a:solidFill>
                       <a:schemeClr val="tx1"/>
                     </a:solidFill>
@@ -11223,7 +11618,7 @@
                     <a:t> </a:t>
                   </a:r>
                   <a:r>
-                    <a:rPr lang="de-DE" sz="2400" dirty="0" smtClean="0">
+                    <a:rPr lang="de-DE" sz="2400" dirty="0">
                       <a:solidFill>
                         <a:schemeClr val="tx1"/>
                       </a:solidFill>
@@ -11241,7 +11636,7 @@
               </p:txBody>
             </p:sp>
           </mc:Choice>
-          <mc:Fallback>
+          <mc:Fallback xmlns="">
             <p:sp>
               <p:nvSpPr>
                 <p:cNvPr id="8" name="Rounded Rectangle 7"/>
@@ -11290,8 +11685,8 @@
             </p:sp>
           </mc:Fallback>
         </mc:AlternateContent>
-        <mc:AlternateContent xmlns:mc="http://schemas.openxmlformats.org/markup-compatibility/2006">
-          <mc:Choice xmlns:a14="http://schemas.microsoft.com/office/drawing/2010/main" Requires="a14">
+        <mc:AlternateContent xmlns:mc="http://schemas.openxmlformats.org/markup-compatibility/2006" xmlns:a14="http://schemas.microsoft.com/office/drawing/2010/main">
+          <mc:Choice Requires="a14">
             <p:sp>
               <p:nvSpPr>
                 <p:cNvPr id="3" name="TextBox 2"/>
@@ -11314,6 +11709,7 @@
                 </a:bodyPr>
                 <a:lstStyle/>
                 <a:p>
+                  <a:pPr/>
                   <a14:m>
                     <m:oMathPara xmlns:m="http://schemas.openxmlformats.org/officeDocument/2006/math">
                       <m:oMathParaPr>
@@ -11434,7 +11830,7 @@
               </p:txBody>
             </p:sp>
           </mc:Choice>
-          <mc:Fallback>
+          <mc:Fallback xmlns="">
             <p:sp>
               <p:nvSpPr>
                 <p:cNvPr id="3" name="TextBox 2"/>
@@ -11500,22 +11896,11 @@
               <a:rPr lang="de-DE" sz="2800" dirty="0">
                 <a:latin typeface="Bahnschrift" panose="020B0502040204020203" pitchFamily="34" charset="0"/>
               </a:rPr>
-              <a:t>For each side</a:t>
-            </a:r>
-            <a:r>
-              <a:rPr lang="de-DE" sz="2800" dirty="0" smtClean="0">
-                <a:latin typeface="Bahnschrift" panose="020B0502040204020203" pitchFamily="34" charset="0"/>
-              </a:rPr>
-              <a:t>:</a:t>
+              <a:t>For each side:</a:t>
             </a:r>
           </a:p>
           <a:p>
             <a:endParaRPr lang="de-DE" sz="2800" dirty="0">
-              <a:latin typeface="Bahnschrift" panose="020B0502040204020203" pitchFamily="34" charset="0"/>
-            </a:endParaRPr>
-          </a:p>
-          <a:p>
-            <a:endParaRPr lang="de-DE" sz="2800" dirty="0" smtClean="0">
               <a:latin typeface="Bahnschrift" panose="020B0502040204020203" pitchFamily="34" charset="0"/>
             </a:endParaRPr>
           </a:p>
@@ -11525,20 +11910,22 @@
             </a:endParaRPr>
           </a:p>
           <a:p>
-            <a:endParaRPr lang="de-DE" sz="2800" dirty="0" smtClean="0">
+            <a:endParaRPr lang="de-DE" sz="2800" dirty="0">
+              <a:latin typeface="Bahnschrift" panose="020B0502040204020203" pitchFamily="34" charset="0"/>
+            </a:endParaRPr>
+          </a:p>
+          <a:p>
+            <a:endParaRPr lang="de-DE" sz="2800" dirty="0">
               <a:latin typeface="Bahnschrift" panose="020B0502040204020203" pitchFamily="34" charset="0"/>
             </a:endParaRPr>
           </a:p>
           <a:p>
             <a:r>
-              <a:rPr lang="de-DE" sz="2800" dirty="0" smtClean="0">
+              <a:rPr lang="de-DE" sz="2800" dirty="0">
                 <a:latin typeface="Bahnschrift" panose="020B0502040204020203" pitchFamily="34" charset="0"/>
               </a:rPr>
               <a:t>Their difference is used to calculate the probability to gamble:</a:t>
             </a:r>
-            <a:endParaRPr lang="de-DE" sz="2800" dirty="0">
-              <a:latin typeface="Bahnschrift" panose="020B0502040204020203" pitchFamily="34" charset="0"/>
-            </a:endParaRPr>
           </a:p>
           <a:p>
             <a:endParaRPr lang="en-GB" sz="2800" dirty="0">
@@ -11547,8 +11934,8 @@
           </a:p>
         </p:txBody>
       </p:sp>
-      <mc:AlternateContent xmlns:mc="http://schemas.openxmlformats.org/markup-compatibility/2006">
-        <mc:Choice xmlns:a14="http://schemas.microsoft.com/office/drawing/2010/main" Requires="a14">
+      <mc:AlternateContent xmlns:mc="http://schemas.openxmlformats.org/markup-compatibility/2006" xmlns:a14="http://schemas.microsoft.com/office/drawing/2010/main">
+        <mc:Choice Requires="a14">
           <p:sp>
             <p:nvSpPr>
               <p:cNvPr id="9" name="Rounded Rectangle 8"/>
@@ -11597,6 +11984,7 @@
               <a:bodyPr rtlCol="0" anchor="ctr"/>
               <a:lstStyle/>
               <a:p>
+                <a:pPr/>
                 <a14:m>
                   <m:oMathPara xmlns:m="http://schemas.openxmlformats.org/officeDocument/2006/math">
                     <m:oMathParaPr>
@@ -11756,7 +12144,7 @@
             </p:txBody>
           </p:sp>
         </mc:Choice>
-        <mc:Fallback>
+        <mc:Fallback xmlns="">
           <p:sp>
             <p:nvSpPr>
               <p:cNvPr id="9" name="Rounded Rectangle 8"/>
@@ -12053,7 +12441,7 @@
 </p:sld>
 </file>
 
-<file path=ppt/slides/slide21.xml><?xml version="1.0" encoding="utf-8"?>
+<file path=ppt/slides/slide22.xml><?xml version="1.0" encoding="utf-8"?>
 <p:sld xmlns:a="http://schemas.openxmlformats.org/drawingml/2006/main" xmlns:r="http://schemas.openxmlformats.org/officeDocument/2006/relationships" xmlns:p="http://schemas.openxmlformats.org/presentationml/2006/main">
   <p:cSld>
     <p:spTree>
@@ -12086,12 +12474,8 @@
           <a:lstStyle/>
           <a:p>
             <a:r>
-              <a:rPr lang="de-DE" dirty="0" smtClean="0"/>
-              <a:t>Rescorla </a:t>
-            </a:r>
-            <a:r>
-              <a:rPr lang="de-DE" dirty="0" smtClean="0"/>
-              <a:t>wagner/ Q-learning</a:t>
+              <a:rPr lang="de-DE" dirty="0"/>
+              <a:t>Rescorla wagner/ Q-learning</a:t>
             </a:r>
             <a:endParaRPr lang="en-GB" dirty="0"/>
           </a:p>
@@ -12111,8 +12495,8 @@
             <a:chExt cx="10515600" cy="1475178"/>
           </a:xfrm>
         </p:grpSpPr>
-        <mc:AlternateContent xmlns:mc="http://schemas.openxmlformats.org/markup-compatibility/2006">
-          <mc:Choice xmlns:a14="http://schemas.microsoft.com/office/drawing/2010/main" Requires="a14">
+        <mc:AlternateContent xmlns:mc="http://schemas.openxmlformats.org/markup-compatibility/2006" xmlns:a14="http://schemas.microsoft.com/office/drawing/2010/main">
+          <mc:Choice Requires="a14">
             <p:sp>
               <p:nvSpPr>
                 <p:cNvPr id="6" name="Rounded Rectangle 5"/>
@@ -12161,7 +12545,7 @@
                 <a:bodyPr rtlCol="0" anchor="t"/>
                 <a:lstStyle/>
                 <a:p>
-                  <a:endParaRPr lang="en-GB" sz="2800" i="1" dirty="0" smtClean="0">
+                  <a:endParaRPr lang="en-GB" sz="2800" i="1" dirty="0">
                     <a:solidFill>
                       <a:schemeClr val="tx1"/>
                     </a:solidFill>
@@ -12222,7 +12606,7 @@
                     </m:oMath>
                   </a14:m>
                   <a:r>
-                    <a:rPr lang="en-GB" sz="2400" dirty="0" smtClean="0">
+                    <a:rPr lang="en-GB" sz="2400" dirty="0">
                       <a:solidFill>
                         <a:schemeClr val="tx1"/>
                       </a:solidFill>
@@ -12245,7 +12629,7 @@
                     </m:oMath>
                   </a14:m>
                   <a:r>
-                    <a:rPr lang="en-GB" sz="2400" dirty="0" smtClean="0">
+                    <a:rPr lang="en-GB" sz="2400" dirty="0">
                       <a:solidFill>
                         <a:schemeClr val="tx1"/>
                       </a:solidFill>
@@ -12253,17 +12637,11 @@
                     </a:rPr>
                     <a:t> = learning rate</a:t>
                   </a:r>
-                  <a:endParaRPr lang="en-GB" sz="2400" dirty="0">
-                    <a:solidFill>
-                      <a:schemeClr val="tx1"/>
-                    </a:solidFill>
-                    <a:latin typeface="Bahnschrift" panose="020B0502040204020203" pitchFamily="34" charset="0"/>
-                  </a:endParaRPr>
                 </a:p>
               </p:txBody>
             </p:sp>
           </mc:Choice>
-          <mc:Fallback>
+          <mc:Fallback xmlns="">
             <p:sp>
               <p:nvSpPr>
                 <p:cNvPr id="6" name="Rounded Rectangle 5"/>
@@ -12312,8 +12690,8 @@
             </p:sp>
           </mc:Fallback>
         </mc:AlternateContent>
-        <mc:AlternateContent xmlns:mc="http://schemas.openxmlformats.org/markup-compatibility/2006">
-          <mc:Choice xmlns:a14="http://schemas.microsoft.com/office/drawing/2010/main" Requires="a14">
+        <mc:AlternateContent xmlns:mc="http://schemas.openxmlformats.org/markup-compatibility/2006" xmlns:a14="http://schemas.microsoft.com/office/drawing/2010/main">
+          <mc:Choice Requires="a14">
             <p:sp>
               <p:nvSpPr>
                 <p:cNvPr id="5" name="TextBox 4"/>
@@ -12442,7 +12820,7 @@
               </p:txBody>
             </p:sp>
           </mc:Choice>
-          <mc:Fallback>
+          <mc:Fallback xmlns="">
             <p:sp>
               <p:nvSpPr>
                 <p:cNvPr id="5" name="TextBox 4"/>
@@ -12481,8 +12859,8 @@
             </p:sp>
           </mc:Fallback>
         </mc:AlternateContent>
-        <mc:AlternateContent xmlns:mc="http://schemas.openxmlformats.org/markup-compatibility/2006">
-          <mc:Choice xmlns:a14="http://schemas.microsoft.com/office/drawing/2010/main" Requires="a14">
+        <mc:AlternateContent xmlns:mc="http://schemas.openxmlformats.org/markup-compatibility/2006" xmlns:a14="http://schemas.microsoft.com/office/drawing/2010/main">
+          <mc:Choice Requires="a14">
             <p:sp>
               <p:nvSpPr>
                 <p:cNvPr id="7" name="TextBox 6"/>
@@ -12623,7 +13001,7 @@
               </p:txBody>
             </p:sp>
           </mc:Choice>
-          <mc:Fallback>
+          <mc:Fallback xmlns="">
             <p:sp>
               <p:nvSpPr>
                 <p:cNvPr id="7" name="TextBox 6"/>
@@ -12677,8 +13055,8 @@
             <a:chExt cx="10515600" cy="1475178"/>
           </a:xfrm>
         </p:grpSpPr>
-        <mc:AlternateContent xmlns:mc="http://schemas.openxmlformats.org/markup-compatibility/2006">
-          <mc:Choice xmlns:a14="http://schemas.microsoft.com/office/drawing/2010/main" Requires="a14">
+        <mc:AlternateContent xmlns:mc="http://schemas.openxmlformats.org/markup-compatibility/2006" xmlns:a14="http://schemas.microsoft.com/office/drawing/2010/main">
+          <mc:Choice Requires="a14">
             <p:sp>
               <p:nvSpPr>
                 <p:cNvPr id="8" name="Rounded Rectangle 7"/>
@@ -12728,7 +13106,7 @@
                 <a:lstStyle/>
                 <a:p>
                   <a:pPr algn="ctr"/>
-                  <a:endParaRPr lang="en-GB" sz="2800" i="1" dirty="0" smtClean="0">
+                  <a:endParaRPr lang="en-GB" sz="2800" i="1" dirty="0">
                     <a:solidFill>
                       <a:schemeClr val="tx1"/>
                     </a:solidFill>
@@ -12738,7 +13116,7 @@
                 </a:p>
                 <a:p>
                   <a:pPr algn="ctr"/>
-                  <a:endParaRPr lang="en-GB" sz="2800" i="1" dirty="0" smtClean="0">
+                  <a:endParaRPr lang="en-GB" sz="2800" i="1" dirty="0">
                     <a:solidFill>
                       <a:schemeClr val="tx1"/>
                     </a:solidFill>
@@ -12771,7 +13149,7 @@
                     </m:oMath>
                   </a14:m>
                   <a:r>
-                    <a:rPr lang="de-DE" sz="2400" dirty="0" smtClean="0">
+                    <a:rPr lang="de-DE" sz="2400" dirty="0">
                       <a:solidFill>
                         <a:schemeClr val="tx1"/>
                       </a:solidFill>
@@ -12780,7 +13158,7 @@
                     <a:t> </a:t>
                   </a:r>
                   <a:r>
-                    <a:rPr lang="de-DE" sz="2400" dirty="0" smtClean="0">
+                    <a:rPr lang="de-DE" sz="2400" dirty="0">
                       <a:solidFill>
                         <a:schemeClr val="tx1"/>
                       </a:solidFill>
@@ -12789,7 +13167,7 @@
                     <a:t>temperature;</a:t>
                   </a:r>
                   <a:r>
-                    <a:rPr lang="de-DE" sz="2400" dirty="0" smtClean="0">
+                    <a:rPr lang="de-DE" sz="2400" dirty="0">
                       <a:solidFill>
                         <a:schemeClr val="tx1"/>
                       </a:solidFill>
@@ -12910,28 +13288,13 @@
                       </a:solidFill>
                       <a:latin typeface="Bahnschrift" panose="020B0502040204020203" pitchFamily="34" charset="0"/>
                     </a:rPr>
-                    <a:t> weights </a:t>
+                    <a:t> weights perseveration</a:t>
                   </a:r>
-                  <a:r>
-                    <a:rPr lang="en-GB" sz="2400" dirty="0" smtClean="0">
-                      <a:solidFill>
-                        <a:schemeClr val="tx1"/>
-                      </a:solidFill>
-                      <a:latin typeface="Bahnschrift" panose="020B0502040204020203" pitchFamily="34" charset="0"/>
-                    </a:rPr>
-                    <a:t>perseveration</a:t>
-                  </a:r>
-                  <a:endParaRPr lang="en-GB" sz="2400" dirty="0">
-                    <a:solidFill>
-                      <a:schemeClr val="tx1"/>
-                    </a:solidFill>
-                    <a:latin typeface="Bahnschrift" panose="020B0502040204020203" pitchFamily="34" charset="0"/>
-                  </a:endParaRPr>
                 </a:p>
               </p:txBody>
             </p:sp>
           </mc:Choice>
-          <mc:Fallback>
+          <mc:Fallback xmlns="">
             <p:sp>
               <p:nvSpPr>
                 <p:cNvPr id="8" name="Rounded Rectangle 7"/>
@@ -12980,8 +13343,8 @@
             </p:sp>
           </mc:Fallback>
         </mc:AlternateContent>
-        <mc:AlternateContent xmlns:mc="http://schemas.openxmlformats.org/markup-compatibility/2006">
-          <mc:Choice xmlns:a14="http://schemas.microsoft.com/office/drawing/2010/main" Requires="a14">
+        <mc:AlternateContent xmlns:mc="http://schemas.openxmlformats.org/markup-compatibility/2006" xmlns:a14="http://schemas.microsoft.com/office/drawing/2010/main">
+          <mc:Choice Requires="a14">
             <p:sp>
               <p:nvSpPr>
                 <p:cNvPr id="3" name="TextBox 2"/>
@@ -13004,6 +13367,7 @@
                 </a:bodyPr>
                 <a:lstStyle/>
                 <a:p>
+                  <a:pPr/>
                   <a14:m>
                     <m:oMathPara xmlns:m="http://schemas.openxmlformats.org/officeDocument/2006/math">
                       <m:oMathParaPr>
@@ -13168,7 +13532,7 @@
               </p:txBody>
             </p:sp>
           </mc:Choice>
-          <mc:Fallback>
+          <mc:Fallback xmlns="">
             <p:sp>
               <p:nvSpPr>
                 <p:cNvPr id="3" name="TextBox 2"/>
@@ -13234,22 +13598,11 @@
               <a:rPr lang="de-DE" sz="2800" dirty="0">
                 <a:latin typeface="Bahnschrift" panose="020B0502040204020203" pitchFamily="34" charset="0"/>
               </a:rPr>
-              <a:t>For each side</a:t>
-            </a:r>
-            <a:r>
-              <a:rPr lang="de-DE" sz="2800" dirty="0" smtClean="0">
-                <a:latin typeface="Bahnschrift" panose="020B0502040204020203" pitchFamily="34" charset="0"/>
-              </a:rPr>
-              <a:t>:</a:t>
+              <a:t>For each side:</a:t>
             </a:r>
           </a:p>
           <a:p>
             <a:endParaRPr lang="de-DE" sz="2800" dirty="0">
-              <a:latin typeface="Bahnschrift" panose="020B0502040204020203" pitchFamily="34" charset="0"/>
-            </a:endParaRPr>
-          </a:p>
-          <a:p>
-            <a:endParaRPr lang="de-DE" sz="2800" dirty="0" smtClean="0">
               <a:latin typeface="Bahnschrift" panose="020B0502040204020203" pitchFamily="34" charset="0"/>
             </a:endParaRPr>
           </a:p>
@@ -13259,20 +13612,22 @@
             </a:endParaRPr>
           </a:p>
           <a:p>
-            <a:endParaRPr lang="de-DE" sz="2800" dirty="0" smtClean="0">
+            <a:endParaRPr lang="de-DE" sz="2800" dirty="0">
+              <a:latin typeface="Bahnschrift" panose="020B0502040204020203" pitchFamily="34" charset="0"/>
+            </a:endParaRPr>
+          </a:p>
+          <a:p>
+            <a:endParaRPr lang="de-DE" sz="2800" dirty="0">
               <a:latin typeface="Bahnschrift" panose="020B0502040204020203" pitchFamily="34" charset="0"/>
             </a:endParaRPr>
           </a:p>
           <a:p>
             <a:r>
-              <a:rPr lang="de-DE" sz="2800" dirty="0" smtClean="0">
+              <a:rPr lang="de-DE" sz="2800" dirty="0">
                 <a:latin typeface="Bahnschrift" panose="020B0502040204020203" pitchFamily="34" charset="0"/>
               </a:rPr>
               <a:t>Their difference is used to calculate the probability to gamble:</a:t>
             </a:r>
-            <a:endParaRPr lang="de-DE" sz="2800" dirty="0">
-              <a:latin typeface="Bahnschrift" panose="020B0502040204020203" pitchFamily="34" charset="0"/>
-            </a:endParaRPr>
           </a:p>
           <a:p>
             <a:endParaRPr lang="en-GB" sz="2800" dirty="0">
@@ -13281,8 +13636,8 @@
           </a:p>
         </p:txBody>
       </p:sp>
-      <mc:AlternateContent xmlns:mc="http://schemas.openxmlformats.org/markup-compatibility/2006">
-        <mc:Choice xmlns:a14="http://schemas.microsoft.com/office/drawing/2010/main" Requires="a14">
+      <mc:AlternateContent xmlns:mc="http://schemas.openxmlformats.org/markup-compatibility/2006" xmlns:a14="http://schemas.microsoft.com/office/drawing/2010/main">
+        <mc:Choice Requires="a14">
           <p:sp>
             <p:nvSpPr>
               <p:cNvPr id="9" name="Rounded Rectangle 8"/>
@@ -13331,6 +13686,7 @@
               <a:bodyPr rtlCol="0" anchor="ctr"/>
               <a:lstStyle/>
               <a:p>
+                <a:pPr/>
                 <a14:m>
                   <m:oMathPara xmlns:m="http://schemas.openxmlformats.org/officeDocument/2006/math">
                     <m:oMathParaPr>
@@ -13552,7 +13908,7 @@
             </p:txBody>
           </p:sp>
         </mc:Choice>
-        <mc:Fallback>
+        <mc:Fallback xmlns="">
           <p:sp>
             <p:nvSpPr>
               <p:cNvPr id="9" name="Rounded Rectangle 8"/>
@@ -13611,17 +13967,10 @@
   <p:clrMapOvr>
     <a:masterClrMapping/>
   </p:clrMapOvr>
-  <p:timing>
-    <p:tnLst>
-      <p:par>
-        <p:cTn id="1" dur="indefinite" restart="never" nodeType="tmRoot"/>
-      </p:par>
-    </p:tnLst>
-  </p:timing>
 </p:sld>
 </file>
 
-<file path=ppt/slides/slide22.xml><?xml version="1.0" encoding="utf-8"?>
+<file path=ppt/slides/slide23.xml><?xml version="1.0" encoding="utf-8"?>
 <p:sld xmlns:a="http://schemas.openxmlformats.org/drawingml/2006/main" xmlns:r="http://schemas.openxmlformats.org/officeDocument/2006/relationships" xmlns:p="http://schemas.openxmlformats.org/presentationml/2006/main">
   <p:cSld>
     <p:spTree>
@@ -13654,19 +14003,15 @@
           <a:lstStyle/>
           <a:p>
             <a:r>
-              <a:rPr lang="de-DE" dirty="0" smtClean="0"/>
-              <a:t>Rescorla </a:t>
-            </a:r>
-            <a:r>
-              <a:rPr lang="de-DE" dirty="0" smtClean="0"/>
-              <a:t>wagner/ Q-learning</a:t>
+              <a:rPr lang="de-DE" dirty="0"/>
+              <a:t>Rescorla wagner/ Q-learning</a:t>
             </a:r>
             <a:endParaRPr lang="en-GB" dirty="0"/>
           </a:p>
         </p:txBody>
       </p:sp>
-      <mc:AlternateContent xmlns:mc="http://schemas.openxmlformats.org/markup-compatibility/2006">
-        <mc:Choice xmlns:a14="http://schemas.microsoft.com/office/drawing/2010/main" Requires="a14">
+      <mc:AlternateContent xmlns:mc="http://schemas.openxmlformats.org/markup-compatibility/2006" xmlns:a14="http://schemas.microsoft.com/office/drawing/2010/main">
+        <mc:Choice Requires="a14">
           <p:sp>
             <p:nvSpPr>
               <p:cNvPr id="9" name="Rounded Rectangle 8"/>
@@ -13715,6 +14060,7 @@
               <a:bodyPr rtlCol="0" anchor="ctr"/>
               <a:lstStyle/>
               <a:p>
+                <a:pPr/>
                 <a14:m>
                   <m:oMathPara xmlns:m="http://schemas.openxmlformats.org/officeDocument/2006/math">
                     <m:oMathParaPr>
@@ -13953,7 +14299,7 @@
             </p:txBody>
           </p:sp>
         </mc:Choice>
-        <mc:Fallback>
+        <mc:Fallback xmlns="">
           <p:sp>
             <p:nvSpPr>
               <p:cNvPr id="9" name="Rounded Rectangle 8"/>
@@ -14025,26 +14371,26 @@
           <a:lstStyle/>
           <a:p>
             <a:r>
-              <a:rPr lang="de-DE" sz="2800" dirty="0" smtClean="0">
+              <a:rPr lang="de-DE" sz="2800" dirty="0">
                 <a:latin typeface="Bahnschrift" panose="020B0502040204020203" pitchFamily="34" charset="0"/>
               </a:rPr>
               <a:t>This allows us to simulate what the model would do and see how well it would match the participants choices, but this is </a:t>
             </a:r>
             <a:r>
-              <a:rPr lang="de-DE" sz="2800" b="1" dirty="0" smtClean="0">
+              <a:rPr lang="de-DE" sz="2800" b="1" dirty="0">
                 <a:latin typeface="Bahnschrift" panose="020B0502040204020203" pitchFamily="34" charset="0"/>
               </a:rPr>
               <a:t>not </a:t>
             </a:r>
             <a:r>
-              <a:rPr lang="de-DE" sz="2800" dirty="0" smtClean="0">
+              <a:rPr lang="de-DE" sz="2800" dirty="0">
                 <a:latin typeface="Bahnschrift" panose="020B0502040204020203" pitchFamily="34" charset="0"/>
               </a:rPr>
               <a:t>what we want.</a:t>
             </a:r>
           </a:p>
           <a:p>
-            <a:endParaRPr lang="de-DE" sz="2800" dirty="0" smtClean="0">
+            <a:endParaRPr lang="de-DE" sz="2800" dirty="0">
               <a:latin typeface="Bahnschrift" panose="020B0502040204020203" pitchFamily="34" charset="0"/>
             </a:endParaRPr>
           </a:p>
@@ -14055,19 +14401,19 @@
           </a:p>
           <a:p>
             <a:r>
-              <a:rPr lang="de-DE" sz="2800" dirty="0" smtClean="0">
+              <a:rPr lang="de-DE" sz="2800" dirty="0">
                 <a:latin typeface="Bahnschrift" panose="020B0502040204020203" pitchFamily="34" charset="0"/>
               </a:rPr>
               <a:t>Instead the model </a:t>
             </a:r>
             <a:r>
-              <a:rPr lang="de-DE" sz="2800" b="1" dirty="0" smtClean="0">
+              <a:rPr lang="de-DE" sz="2800" b="1" dirty="0">
                 <a:latin typeface="Bahnschrift" panose="020B0502040204020203" pitchFamily="34" charset="0"/>
               </a:rPr>
               <a:t>shadows</a:t>
             </a:r>
             <a:r>
-              <a:rPr lang="de-DE" sz="2800" dirty="0" smtClean="0">
+              <a:rPr lang="de-DE" sz="2800" dirty="0">
                 <a:latin typeface="Bahnschrift" panose="020B0502040204020203" pitchFamily="34" charset="0"/>
               </a:rPr>
               <a:t> the participants choices and at each step determines how likely their choices are using the model weights. </a:t>
@@ -14088,17 +14434,10 @@
   <p:clrMapOvr>
     <a:masterClrMapping/>
   </p:clrMapOvr>
-  <p:timing>
-    <p:tnLst>
-      <p:par>
-        <p:cTn id="1" dur="indefinite" restart="never" nodeType="tmRoot"/>
-      </p:par>
-    </p:tnLst>
-  </p:timing>
 </p:sld>
 </file>
 
-<file path=ppt/slides/slide23.xml><?xml version="1.0" encoding="utf-8"?>
+<file path=ppt/slides/slide24.xml><?xml version="1.0" encoding="utf-8"?>
 <p:sld xmlns:a="http://schemas.openxmlformats.org/drawingml/2006/main" xmlns:r="http://schemas.openxmlformats.org/officeDocument/2006/relationships" xmlns:p="http://schemas.openxmlformats.org/presentationml/2006/main">
   <p:cSld>
     <p:spTree>
@@ -14221,108 +14560,6 @@
   <p:clrMapOvr>
     <a:masterClrMapping/>
   </p:clrMapOvr>
-  <p:timing>
-    <p:tnLst>
-      <p:par>
-        <p:cTn id="1" dur="indefinite" restart="never" nodeType="tmRoot"/>
-      </p:par>
-    </p:tnLst>
-  </p:timing>
-</p:sld>
-</file>
-
-<file path=ppt/slides/slide24.xml><?xml version="1.0" encoding="utf-8"?>
-<p:sld xmlns:a="http://schemas.openxmlformats.org/drawingml/2006/main" xmlns:r="http://schemas.openxmlformats.org/officeDocument/2006/relationships" xmlns:p="http://schemas.openxmlformats.org/presentationml/2006/main">
-  <p:cSld>
-    <p:spTree>
-      <p:nvGrpSpPr>
-        <p:cNvPr id="1" name=""/>
-        <p:cNvGrpSpPr/>
-        <p:nvPr/>
-      </p:nvGrpSpPr>
-      <p:grpSpPr>
-        <a:xfrm>
-          <a:off x="0" y="0"/>
-          <a:ext cx="0" cy="0"/>
-          <a:chOff x="0" y="0"/>
-          <a:chExt cx="0" cy="0"/>
-        </a:xfrm>
-      </p:grpSpPr>
-      <p:sp>
-        <p:nvSpPr>
-          <p:cNvPr id="2" name="Title 1"/>
-          <p:cNvSpPr>
-            <a:spLocks noGrp="1"/>
-          </p:cNvSpPr>
-          <p:nvPr>
-            <p:ph type="title"/>
-          </p:nvPr>
-        </p:nvSpPr>
-        <p:spPr/>
-        <p:txBody>
-          <a:bodyPr/>
-          <a:lstStyle/>
-          <a:p>
-            <a:r>
-              <a:rPr lang="de-DE" dirty="0" smtClean="0"/>
-              <a:t>Hierarchical Gaussian Filter</a:t>
-            </a:r>
-            <a:endParaRPr lang="en-GB" dirty="0"/>
-          </a:p>
-        </p:txBody>
-      </p:sp>
-      <p:sp>
-        <p:nvSpPr>
-          <p:cNvPr id="3" name="Content Placeholder 2"/>
-          <p:cNvSpPr>
-            <a:spLocks noGrp="1"/>
-          </p:cNvSpPr>
-          <p:nvPr>
-            <p:ph idx="1"/>
-          </p:nvPr>
-        </p:nvSpPr>
-        <p:spPr/>
-        <p:txBody>
-          <a:bodyPr/>
-          <a:lstStyle/>
-          <a:p>
-            <a:r>
-              <a:rPr lang="de-DE" dirty="0" smtClean="0"/>
-              <a:t>What is it?</a:t>
-            </a:r>
-          </a:p>
-          <a:p>
-            <a:r>
-              <a:rPr lang="de-DE" dirty="0" smtClean="0"/>
-              <a:t>Why use it instead of RW?</a:t>
-            </a:r>
-          </a:p>
-          <a:p>
-            <a:r>
-              <a:rPr lang="de-DE" dirty="0" smtClean="0"/>
-              <a:t>Equations explained?</a:t>
-            </a:r>
-            <a:endParaRPr lang="en-GB" dirty="0"/>
-          </a:p>
-        </p:txBody>
-      </p:sp>
-    </p:spTree>
-    <p:extLst>
-      <p:ext uri="{BB962C8B-B14F-4D97-AF65-F5344CB8AC3E}">
-        <p14:creationId xmlns:p14="http://schemas.microsoft.com/office/powerpoint/2010/main" val="4013591181"/>
-      </p:ext>
-    </p:extLst>
-  </p:cSld>
-  <p:clrMapOvr>
-    <a:masterClrMapping/>
-  </p:clrMapOvr>
-  <p:timing>
-    <p:tnLst>
-      <p:par>
-        <p:cTn id="1" dur="indefinite" restart="never" nodeType="tmRoot"/>
-      </p:par>
-    </p:tnLst>
-  </p:timing>
 </p:sld>
 </file>
 
@@ -14359,8 +14596,8 @@
           <a:lstStyle/>
           <a:p>
             <a:r>
-              <a:rPr lang="de-DE" dirty="0" smtClean="0"/>
-              <a:t>HGF visualization</a:t>
+              <a:rPr lang="de-DE" dirty="0"/>
+              <a:t>Hierarchical Gaussian Filter</a:t>
             </a:r>
             <a:endParaRPr lang="en-GB" dirty="0"/>
           </a:p>
@@ -14378,17 +14615,3662 @@
         </p:nvSpPr>
         <p:spPr/>
         <p:txBody>
-          <a:bodyPr/>
+          <a:bodyPr>
+            <a:normAutofit/>
+          </a:bodyPr>
           <a:lstStyle/>
           <a:p>
-            <a:endParaRPr lang="en-GB"/>
+            <a:pPr>
+              <a:lnSpc>
+                <a:spcPct val="150000"/>
+              </a:lnSpc>
+            </a:pPr>
+            <a:r>
+              <a:rPr lang="de-DE" b="1" dirty="0"/>
+              <a:t>What </a:t>
+            </a:r>
+            <a:r>
+              <a:rPr lang="de-DE" b="1" dirty="0" err="1"/>
+              <a:t>is</a:t>
+            </a:r>
+            <a:r>
+              <a:rPr lang="de-DE" b="1" dirty="0"/>
+              <a:t> </a:t>
+            </a:r>
+            <a:r>
+              <a:rPr lang="de-DE" b="1" dirty="0" err="1"/>
+              <a:t>it</a:t>
+            </a:r>
+            <a:r>
+              <a:rPr lang="de-DE" b="1" dirty="0"/>
+              <a:t>?</a:t>
+            </a:r>
+          </a:p>
+          <a:p>
+            <a:pPr lvl="1">
+              <a:lnSpc>
+                <a:spcPct val="150000"/>
+              </a:lnSpc>
+            </a:pPr>
+            <a:r>
+              <a:rPr lang="de-DE" dirty="0"/>
+              <a:t>A </a:t>
+            </a:r>
+            <a:r>
+              <a:rPr lang="de-DE" dirty="0" err="1"/>
+              <a:t>Bayesian</a:t>
+            </a:r>
+            <a:r>
+              <a:rPr lang="de-DE" dirty="0"/>
+              <a:t> </a:t>
+            </a:r>
+            <a:r>
+              <a:rPr lang="de-DE" dirty="0" err="1"/>
+              <a:t>observer</a:t>
+            </a:r>
+            <a:r>
+              <a:rPr lang="de-DE" dirty="0"/>
+              <a:t> that </a:t>
+            </a:r>
+            <a:r>
+              <a:rPr lang="de-DE" dirty="0" err="1"/>
+              <a:t>infers</a:t>
+            </a:r>
+            <a:r>
+              <a:rPr lang="de-DE" dirty="0"/>
+              <a:t> </a:t>
+            </a:r>
+            <a:r>
+              <a:rPr lang="de-DE" dirty="0" err="1"/>
+              <a:t>both</a:t>
+            </a:r>
+            <a:r>
+              <a:rPr lang="de-DE" dirty="0"/>
+              <a:t>: </a:t>
+            </a:r>
+          </a:p>
+          <a:p>
+            <a:pPr lvl="2">
+              <a:lnSpc>
+                <a:spcPct val="150000"/>
+              </a:lnSpc>
+            </a:pPr>
+            <a:r>
+              <a:rPr lang="de-DE" sz="2400" dirty="0" err="1"/>
+              <a:t>the</a:t>
+            </a:r>
+            <a:r>
+              <a:rPr lang="de-DE" sz="2400" dirty="0"/>
+              <a:t> </a:t>
+            </a:r>
+            <a:r>
+              <a:rPr lang="de-DE" sz="2400" dirty="0" err="1"/>
+              <a:t>hidden</a:t>
+            </a:r>
+            <a:r>
+              <a:rPr lang="de-DE" sz="2400" dirty="0"/>
+              <a:t>, </a:t>
+            </a:r>
+            <a:r>
+              <a:rPr lang="de-DE" sz="2400" dirty="0" err="1"/>
+              <a:t>drifting</a:t>
+            </a:r>
+            <a:r>
+              <a:rPr lang="de-DE" sz="2400" dirty="0"/>
+              <a:t> </a:t>
+            </a:r>
+            <a:r>
+              <a:rPr lang="de-DE" sz="2400" b="1" dirty="0" err="1"/>
+              <a:t>reward</a:t>
+            </a:r>
+            <a:r>
+              <a:rPr lang="de-DE" sz="2400" b="1" dirty="0"/>
+              <a:t> </a:t>
+            </a:r>
+            <a:r>
+              <a:rPr lang="de-DE" sz="2400" b="1" dirty="0" err="1"/>
+              <a:t>probability</a:t>
+            </a:r>
+            <a:endParaRPr lang="de-DE" sz="2400" b="1" dirty="0"/>
+          </a:p>
+          <a:p>
+            <a:pPr lvl="2">
+              <a:lnSpc>
+                <a:spcPct val="150000"/>
+              </a:lnSpc>
+            </a:pPr>
+            <a:r>
+              <a:rPr lang="de-DE" sz="2400" dirty="0"/>
+              <a:t>how fast </a:t>
+            </a:r>
+            <a:r>
+              <a:rPr lang="de-DE" sz="2400" dirty="0" err="1"/>
+              <a:t>the</a:t>
+            </a:r>
+            <a:r>
+              <a:rPr lang="de-DE" sz="2400" dirty="0"/>
+              <a:t> </a:t>
+            </a:r>
+            <a:r>
+              <a:rPr lang="de-DE" sz="2400" dirty="0" err="1"/>
+              <a:t>probability</a:t>
+            </a:r>
+            <a:r>
+              <a:rPr lang="de-DE" sz="2400" dirty="0"/>
+              <a:t> </a:t>
+            </a:r>
+            <a:r>
+              <a:rPr lang="de-DE" sz="2400" dirty="0" err="1"/>
+              <a:t>is</a:t>
+            </a:r>
+            <a:r>
+              <a:rPr lang="de-DE" sz="2400" dirty="0"/>
+              <a:t> </a:t>
+            </a:r>
+            <a:r>
+              <a:rPr lang="de-DE" sz="2400" dirty="0" err="1"/>
+              <a:t>changing</a:t>
+            </a:r>
+            <a:r>
+              <a:rPr lang="de-DE" sz="2400" dirty="0"/>
+              <a:t>: </a:t>
+            </a:r>
+            <a:r>
+              <a:rPr lang="de-DE" sz="2400" b="1" dirty="0" err="1"/>
+              <a:t>the</a:t>
+            </a:r>
+            <a:r>
+              <a:rPr lang="de-DE" sz="2400" b="1" dirty="0"/>
+              <a:t> </a:t>
+            </a:r>
+            <a:r>
+              <a:rPr lang="de-DE" sz="2400" b="1" dirty="0" err="1"/>
+              <a:t>volatility</a:t>
+            </a:r>
+            <a:endParaRPr lang="de-DE" sz="2400" b="1" dirty="0"/>
           </a:p>
         </p:txBody>
       </p:sp>
     </p:spTree>
     <p:extLst>
       <p:ext uri="{BB962C8B-B14F-4D97-AF65-F5344CB8AC3E}">
-        <p14:creationId xmlns:p14="http://schemas.microsoft.com/office/powerpoint/2010/main" val="2827365443"/>
+        <p14:creationId xmlns:p14="http://schemas.microsoft.com/office/powerpoint/2010/main" val="4013591181"/>
+      </p:ext>
+    </p:extLst>
+  </p:cSld>
+  <p:clrMapOvr>
+    <a:masterClrMapping/>
+  </p:clrMapOvr>
+</p:sld>
+</file>
+
+<file path=ppt/slides/slide26.xml><?xml version="1.0" encoding="utf-8"?>
+<p:sld xmlns:a="http://schemas.openxmlformats.org/drawingml/2006/main" xmlns:r="http://schemas.openxmlformats.org/officeDocument/2006/relationships" xmlns:p="http://schemas.openxmlformats.org/presentationml/2006/main">
+  <p:cSld>
+    <p:spTree>
+      <p:nvGrpSpPr>
+        <p:cNvPr id="1" name="">
+          <a:extLst>
+            <a:ext uri="{FF2B5EF4-FFF2-40B4-BE49-F238E27FC236}">
+              <a16:creationId xmlns:a16="http://schemas.microsoft.com/office/drawing/2014/main" id="{D9EE050D-E7C8-1359-FDAC-D8979B1F5DB4}"/>
+            </a:ext>
+          </a:extLst>
+        </p:cNvPr>
+        <p:cNvGrpSpPr/>
+        <p:nvPr/>
+      </p:nvGrpSpPr>
+      <p:grpSpPr>
+        <a:xfrm>
+          <a:off x="0" y="0"/>
+          <a:ext cx="0" cy="0"/>
+          <a:chOff x="0" y="0"/>
+          <a:chExt cx="0" cy="0"/>
+        </a:xfrm>
+      </p:grpSpPr>
+      <p:sp>
+        <p:nvSpPr>
+          <p:cNvPr id="2" name="Title 1">
+            <a:extLst>
+              <a:ext uri="{FF2B5EF4-FFF2-40B4-BE49-F238E27FC236}">
+                <a16:creationId xmlns:a16="http://schemas.microsoft.com/office/drawing/2014/main" id="{4CBD0DD8-3010-CAC4-48C5-4B1A9095DA4F}"/>
+              </a:ext>
+            </a:extLst>
+          </p:cNvPr>
+          <p:cNvSpPr>
+            <a:spLocks noGrp="1"/>
+          </p:cNvSpPr>
+          <p:nvPr>
+            <p:ph type="title"/>
+          </p:nvPr>
+        </p:nvSpPr>
+        <p:spPr/>
+        <p:txBody>
+          <a:bodyPr/>
+          <a:lstStyle/>
+          <a:p>
+            <a:r>
+              <a:rPr lang="de-DE" dirty="0"/>
+              <a:t>Hierarchical Gaussian Filter</a:t>
+            </a:r>
+            <a:endParaRPr lang="en-GB" dirty="0"/>
+          </a:p>
+        </p:txBody>
+      </p:sp>
+      <mc:AlternateContent xmlns:mc="http://schemas.openxmlformats.org/markup-compatibility/2006" xmlns:a14="http://schemas.microsoft.com/office/drawing/2010/main">
+        <mc:Choice Requires="a14">
+          <p:sp>
+            <p:nvSpPr>
+              <p:cNvPr id="3" name="Content Placeholder 2">
+                <a:extLst>
+                  <a:ext uri="{FF2B5EF4-FFF2-40B4-BE49-F238E27FC236}">
+                    <a16:creationId xmlns:a16="http://schemas.microsoft.com/office/drawing/2014/main" id="{1FF01282-BCC1-1539-8A90-A471BFF20E7E}"/>
+                  </a:ext>
+                </a:extLst>
+              </p:cNvPr>
+              <p:cNvSpPr>
+                <a:spLocks noGrp="1"/>
+              </p:cNvSpPr>
+              <p:nvPr>
+                <p:ph idx="1"/>
+              </p:nvPr>
+            </p:nvSpPr>
+            <p:spPr/>
+            <p:txBody>
+              <a:bodyPr>
+                <a:normAutofit/>
+              </a:bodyPr>
+              <a:lstStyle/>
+              <a:p>
+                <a:pPr>
+                  <a:lnSpc>
+                    <a:spcPct val="150000"/>
+                  </a:lnSpc>
+                </a:pPr>
+                <a:r>
+                  <a:rPr lang="en-US" b="1" dirty="0"/>
+                  <a:t>Why use it instead of RW?</a:t>
+                </a:r>
+              </a:p>
+              <a:p>
+                <a:pPr lvl="1">
+                  <a:lnSpc>
+                    <a:spcPct val="150000"/>
+                  </a:lnSpc>
+                </a:pPr>
+                <a:r>
+                  <a:rPr lang="en-US" dirty="0"/>
+                  <a:t>RW's learning rate </a:t>
+                </a:r>
+                <a14:m>
+                  <m:oMath xmlns:m="http://schemas.openxmlformats.org/officeDocument/2006/math">
+                    <m:r>
+                      <a:rPr lang="en-US" i="1">
+                        <a:latin typeface="Cambria Math" panose="02040503050406030204" pitchFamily="18" charset="0"/>
+                      </a:rPr>
+                      <m:t>𝛼</m:t>
+                    </m:r>
+                  </m:oMath>
+                </a14:m>
+                <a:r>
+                  <a:rPr lang="en-US" dirty="0"/>
+                  <a:t> is </a:t>
+                </a:r>
+                <a:r>
+                  <a:rPr lang="en-US" b="1" dirty="0"/>
+                  <a:t>fixed</a:t>
+                </a:r>
+                <a:r>
+                  <a:rPr lang="en-US" dirty="0"/>
+                  <a:t>. The HGF's learning rate is </a:t>
+                </a:r>
+                <a:r>
+                  <a:rPr lang="en-US" b="1" dirty="0"/>
+                  <a:t>dynamic</a:t>
+                </a:r>
+                <a:r>
+                  <a:rPr lang="en-US" dirty="0"/>
+                  <a:t> and rises when the environment seems volatile.</a:t>
+                </a:r>
+              </a:p>
+              <a:p>
+                <a:pPr lvl="1">
+                  <a:lnSpc>
+                    <a:spcPct val="150000"/>
+                  </a:lnSpc>
+                </a:pPr>
+                <a:r>
+                  <a:rPr lang="en-US" dirty="0"/>
+                  <a:t>This potentially represents </a:t>
+                </a:r>
+                <a:r>
+                  <a:rPr lang="en-US" b="1" dirty="0"/>
+                  <a:t>adaptive</a:t>
+                </a:r>
+                <a:r>
+                  <a:rPr lang="en-US" dirty="0"/>
+                  <a:t> learning: learn fast when the world is changing, slow when it's stable.</a:t>
+                </a:r>
+              </a:p>
+            </p:txBody>
+          </p:sp>
+        </mc:Choice>
+        <mc:Fallback xmlns="">
+          <p:sp>
+            <p:nvSpPr>
+              <p:cNvPr id="3" name="Content Placeholder 2">
+                <a:extLst>
+                  <a:ext uri="{FF2B5EF4-FFF2-40B4-BE49-F238E27FC236}">
+                    <a16:creationId xmlns:a16="http://schemas.microsoft.com/office/drawing/2014/main" id="{1FF01282-BCC1-1539-8A90-A471BFF20E7E}"/>
+                  </a:ext>
+                </a:extLst>
+              </p:cNvPr>
+              <p:cNvSpPr>
+                <a:spLocks noGrp="1" noRot="1" noChangeAspect="1" noMove="1" noResize="1" noEditPoints="1" noAdjustHandles="1" noChangeArrowheads="1" noChangeShapeType="1" noTextEdit="1"/>
+              </p:cNvSpPr>
+              <p:nvPr>
+                <p:ph idx="1"/>
+              </p:nvPr>
+            </p:nvSpPr>
+            <p:spPr>
+              <a:blipFill>
+                <a:blip r:embed="rId2"/>
+                <a:stretch>
+                  <a:fillRect l="-1043"/>
+                </a:stretch>
+              </a:blipFill>
+            </p:spPr>
+            <p:txBody>
+              <a:bodyPr/>
+              <a:lstStyle/>
+              <a:p>
+                <a:r>
+                  <a:rPr lang="en-US">
+                    <a:noFill/>
+                  </a:rPr>
+                  <a:t> </a:t>
+                </a:r>
+              </a:p>
+            </p:txBody>
+          </p:sp>
+        </mc:Fallback>
+      </mc:AlternateContent>
+    </p:spTree>
+    <p:extLst>
+      <p:ext uri="{BB962C8B-B14F-4D97-AF65-F5344CB8AC3E}">
+        <p14:creationId xmlns:p14="http://schemas.microsoft.com/office/powerpoint/2010/main" val="2442319192"/>
+      </p:ext>
+    </p:extLst>
+  </p:cSld>
+  <p:clrMapOvr>
+    <a:masterClrMapping/>
+  </p:clrMapOvr>
+</p:sld>
+</file>
+
+<file path=ppt/slides/slide27.xml><?xml version="1.0" encoding="utf-8"?>
+<p:sld xmlns:a="http://schemas.openxmlformats.org/drawingml/2006/main" xmlns:r="http://schemas.openxmlformats.org/officeDocument/2006/relationships" xmlns:p="http://schemas.openxmlformats.org/presentationml/2006/main">
+  <p:cSld>
+    <p:spTree>
+      <p:nvGrpSpPr>
+        <p:cNvPr id="1" name="">
+          <a:extLst>
+            <a:ext uri="{FF2B5EF4-FFF2-40B4-BE49-F238E27FC236}">
+              <a16:creationId xmlns:a16="http://schemas.microsoft.com/office/drawing/2014/main" id="{CAA24062-FE02-D332-ACCC-2BC29D297B97}"/>
+            </a:ext>
+          </a:extLst>
+        </p:cNvPr>
+        <p:cNvGrpSpPr/>
+        <p:nvPr/>
+      </p:nvGrpSpPr>
+      <p:grpSpPr>
+        <a:xfrm>
+          <a:off x="0" y="0"/>
+          <a:ext cx="0" cy="0"/>
+          <a:chOff x="0" y="0"/>
+          <a:chExt cx="0" cy="0"/>
+        </a:xfrm>
+      </p:grpSpPr>
+      <p:sp>
+        <p:nvSpPr>
+          <p:cNvPr id="2" name="Title 1">
+            <a:extLst>
+              <a:ext uri="{FF2B5EF4-FFF2-40B4-BE49-F238E27FC236}">
+                <a16:creationId xmlns:a16="http://schemas.microsoft.com/office/drawing/2014/main" id="{05FC6EC0-4680-977E-157D-B70D093C68CC}"/>
+              </a:ext>
+            </a:extLst>
+          </p:cNvPr>
+          <p:cNvSpPr>
+            <a:spLocks noGrp="1"/>
+          </p:cNvSpPr>
+          <p:nvPr>
+            <p:ph type="title"/>
+          </p:nvPr>
+        </p:nvSpPr>
+        <p:spPr/>
+        <p:txBody>
+          <a:bodyPr/>
+          <a:lstStyle/>
+          <a:p>
+            <a:r>
+              <a:rPr lang="de-DE" dirty="0"/>
+              <a:t>Hierarchical Gaussian Filter</a:t>
+            </a:r>
+            <a:endParaRPr lang="en-GB" dirty="0"/>
+          </a:p>
+        </p:txBody>
+      </p:sp>
+      <mc:AlternateContent xmlns:mc="http://schemas.openxmlformats.org/markup-compatibility/2006" xmlns:a14="http://schemas.microsoft.com/office/drawing/2010/main">
+        <mc:Choice Requires="a14">
+          <p:sp>
+            <p:nvSpPr>
+              <p:cNvPr id="3" name="Content Placeholder 2">
+                <a:extLst>
+                  <a:ext uri="{FF2B5EF4-FFF2-40B4-BE49-F238E27FC236}">
+                    <a16:creationId xmlns:a16="http://schemas.microsoft.com/office/drawing/2014/main" id="{841E7D93-5799-2FF4-8FE2-BE951CCCEFA7}"/>
+                  </a:ext>
+                </a:extLst>
+              </p:cNvPr>
+              <p:cNvSpPr>
+                <a:spLocks noGrp="1"/>
+              </p:cNvSpPr>
+              <p:nvPr>
+                <p:ph idx="1"/>
+              </p:nvPr>
+            </p:nvSpPr>
+            <p:spPr/>
+            <p:txBody>
+              <a:bodyPr>
+                <a:normAutofit/>
+              </a:bodyPr>
+              <a:lstStyle/>
+              <a:p>
+                <a:pPr>
+                  <a:lnSpc>
+                    <a:spcPct val="150000"/>
+                  </a:lnSpc>
+                </a:pPr>
+                <a:r>
+                  <a:rPr lang="en-US" b="1" dirty="0"/>
+                  <a:t>Why use it instead of RW?</a:t>
+                </a:r>
+              </a:p>
+              <a:p>
+                <a:pPr lvl="1">
+                  <a:lnSpc>
+                    <a:spcPct val="150000"/>
+                  </a:lnSpc>
+                </a:pPr>
+                <a:r>
+                  <a:rPr lang="en-US" dirty="0"/>
+                  <a:t>RW's learning rate </a:t>
+                </a:r>
+                <a14:m>
+                  <m:oMath xmlns:m="http://schemas.openxmlformats.org/officeDocument/2006/math">
+                    <m:r>
+                      <a:rPr lang="en-US" i="1">
+                        <a:latin typeface="Cambria Math" panose="02040503050406030204" pitchFamily="18" charset="0"/>
+                      </a:rPr>
+                      <m:t>𝛼</m:t>
+                    </m:r>
+                  </m:oMath>
+                </a14:m>
+                <a:r>
+                  <a:rPr lang="en-US" dirty="0"/>
+                  <a:t> is </a:t>
+                </a:r>
+                <a:r>
+                  <a:rPr lang="en-US" b="1" dirty="0"/>
+                  <a:t>fixed</a:t>
+                </a:r>
+                <a:r>
+                  <a:rPr lang="en-US" dirty="0"/>
+                  <a:t>. The HGF's learning rate is </a:t>
+                </a:r>
+                <a:r>
+                  <a:rPr lang="en-US" b="1" dirty="0"/>
+                  <a:t>dynamic</a:t>
+                </a:r>
+                <a:r>
+                  <a:rPr lang="en-US" dirty="0"/>
+                  <a:t> and rises when the environment seems volatile.</a:t>
+                </a:r>
+              </a:p>
+              <a:p>
+                <a:pPr lvl="1">
+                  <a:lnSpc>
+                    <a:spcPct val="150000"/>
+                  </a:lnSpc>
+                </a:pPr>
+                <a:r>
+                  <a:rPr lang="en-US" dirty="0"/>
+                  <a:t>This potentially represents </a:t>
+                </a:r>
+                <a:r>
+                  <a:rPr lang="en-US" b="1" dirty="0"/>
+                  <a:t>adaptive</a:t>
+                </a:r>
+                <a:r>
+                  <a:rPr lang="en-US" dirty="0"/>
+                  <a:t> learning: learn fast when the world is changing, slow when it's stable.</a:t>
+                </a:r>
+              </a:p>
+            </p:txBody>
+          </p:sp>
+        </mc:Choice>
+        <mc:Fallback xmlns="">
+          <p:sp>
+            <p:nvSpPr>
+              <p:cNvPr id="3" name="Content Placeholder 2">
+                <a:extLst>
+                  <a:ext uri="{FF2B5EF4-FFF2-40B4-BE49-F238E27FC236}">
+                    <a16:creationId xmlns:a16="http://schemas.microsoft.com/office/drawing/2014/main" id="{841E7D93-5799-2FF4-8FE2-BE951CCCEFA7}"/>
+                  </a:ext>
+                </a:extLst>
+              </p:cNvPr>
+              <p:cNvSpPr>
+                <a:spLocks noGrp="1" noRot="1" noChangeAspect="1" noMove="1" noResize="1" noEditPoints="1" noAdjustHandles="1" noChangeArrowheads="1" noChangeShapeType="1" noTextEdit="1"/>
+              </p:cNvSpPr>
+              <p:nvPr>
+                <p:ph idx="1"/>
+              </p:nvPr>
+            </p:nvSpPr>
+            <p:spPr>
+              <a:blipFill>
+                <a:blip r:embed="rId2"/>
+                <a:stretch>
+                  <a:fillRect l="-1043"/>
+                </a:stretch>
+              </a:blipFill>
+            </p:spPr>
+            <p:txBody>
+              <a:bodyPr/>
+              <a:lstStyle/>
+              <a:p>
+                <a:r>
+                  <a:rPr lang="en-US">
+                    <a:noFill/>
+                  </a:rPr>
+                  <a:t> </a:t>
+                </a:r>
+              </a:p>
+            </p:txBody>
+          </p:sp>
+        </mc:Fallback>
+      </mc:AlternateContent>
+    </p:spTree>
+    <p:extLst>
+      <p:ext uri="{BB962C8B-B14F-4D97-AF65-F5344CB8AC3E}">
+        <p14:creationId xmlns:p14="http://schemas.microsoft.com/office/powerpoint/2010/main" val="4012285784"/>
+      </p:ext>
+    </p:extLst>
+  </p:cSld>
+  <p:clrMapOvr>
+    <a:masterClrMapping/>
+  </p:clrMapOvr>
+</p:sld>
+</file>
+
+<file path=ppt/slides/slide28.xml><?xml version="1.0" encoding="utf-8"?>
+<p:sld xmlns:a="http://schemas.openxmlformats.org/drawingml/2006/main" xmlns:r="http://schemas.openxmlformats.org/officeDocument/2006/relationships" xmlns:p="http://schemas.openxmlformats.org/presentationml/2006/main">
+  <p:cSld>
+    <p:bg>
+      <p:bgPr>
+        <a:solidFill>
+          <a:srgbClr val="FFFDF7"/>
+        </a:solidFill>
+        <a:effectLst/>
+      </p:bgPr>
+    </p:bg>
+    <p:spTree>
+      <p:nvGrpSpPr>
+        <p:cNvPr id="1" name="">
+          <a:extLst>
+            <a:ext uri="{FF2B5EF4-FFF2-40B4-BE49-F238E27FC236}">
+              <a16:creationId xmlns:a16="http://schemas.microsoft.com/office/drawing/2014/main" id="{8FA4D2C0-71C3-A36D-C240-19C1408E9643}"/>
+            </a:ext>
+          </a:extLst>
+        </p:cNvPr>
+        <p:cNvGrpSpPr/>
+        <p:nvPr/>
+      </p:nvGrpSpPr>
+      <p:grpSpPr>
+        <a:xfrm>
+          <a:off x="0" y="0"/>
+          <a:ext cx="0" cy="0"/>
+          <a:chOff x="0" y="0"/>
+          <a:chExt cx="0" cy="0"/>
+        </a:xfrm>
+      </p:grpSpPr>
+      <p:sp>
+        <p:nvSpPr>
+          <p:cNvPr id="31" name="Rectangle 1">
+            <a:extLst>
+              <a:ext uri="{FF2B5EF4-FFF2-40B4-BE49-F238E27FC236}">
+                <a16:creationId xmlns:a16="http://schemas.microsoft.com/office/drawing/2014/main" id="{9953E334-562A-1506-26C0-BF18DCB52639}"/>
+              </a:ext>
+            </a:extLst>
+          </p:cNvPr>
+          <p:cNvSpPr/>
+          <p:nvPr/>
+        </p:nvSpPr>
+        <p:spPr>
+          <a:xfrm>
+            <a:off x="0" y="2903160"/>
+            <a:ext cx="12191997" cy="3589709"/>
+          </a:xfrm>
+          <a:prstGeom prst="rect">
+            <a:avLst/>
+          </a:prstGeom>
+          <a:solidFill>
+            <a:srgbClr val="CFF1E6">
+              <a:alpha val="47000"/>
+            </a:srgbClr>
+          </a:solidFill>
+          <a:ln w="76200">
+            <a:noFill/>
+          </a:ln>
+        </p:spPr>
+        <p:style>
+          <a:lnRef idx="2">
+            <a:schemeClr val="accent1">
+              <a:shade val="50000"/>
+            </a:schemeClr>
+          </a:lnRef>
+          <a:fillRef idx="1">
+            <a:schemeClr val="accent1"/>
+          </a:fillRef>
+          <a:effectRef idx="0">
+            <a:schemeClr val="accent1"/>
+          </a:effectRef>
+          <a:fontRef idx="minor">
+            <a:schemeClr val="lt1"/>
+          </a:fontRef>
+        </p:style>
+        <p:txBody>
+          <a:bodyPr rtlCol="0" anchor="b"/>
+          <a:lstStyle/>
+          <a:p>
+            <a:pPr algn="ctr"/>
+            <a:r>
+              <a:rPr lang="en-GB" b="1" dirty="0">
+                <a:solidFill>
+                  <a:schemeClr val="tx1"/>
+                </a:solidFill>
+                <a:latin typeface="Bahnschrift" panose="020B0502040204020203" pitchFamily="34" charset="0"/>
+              </a:rPr>
+              <a:t>“Belief”</a:t>
+            </a:r>
+          </a:p>
+        </p:txBody>
+      </p:sp>
+      <p:sp>
+        <p:nvSpPr>
+          <p:cNvPr id="15" name="Rectangle 1">
+            <a:extLst>
+              <a:ext uri="{FF2B5EF4-FFF2-40B4-BE49-F238E27FC236}">
+                <a16:creationId xmlns:a16="http://schemas.microsoft.com/office/drawing/2014/main" id="{B28D5CDD-321A-4847-71AC-6456A93EB245}"/>
+              </a:ext>
+            </a:extLst>
+          </p:cNvPr>
+          <p:cNvSpPr/>
+          <p:nvPr/>
+        </p:nvSpPr>
+        <p:spPr>
+          <a:xfrm>
+            <a:off x="138935" y="3089945"/>
+            <a:ext cx="3600000" cy="2891964"/>
+          </a:xfrm>
+          <a:prstGeom prst="rect">
+            <a:avLst/>
+          </a:prstGeom>
+          <a:solidFill>
+            <a:srgbClr val="CFF1E6"/>
+          </a:solidFill>
+          <a:ln w="76200">
+            <a:solidFill>
+              <a:srgbClr val="0CB87F"/>
+            </a:solidFill>
+          </a:ln>
+        </p:spPr>
+        <p:style>
+          <a:lnRef idx="2">
+            <a:schemeClr val="accent1">
+              <a:shade val="50000"/>
+            </a:schemeClr>
+          </a:lnRef>
+          <a:fillRef idx="1">
+            <a:schemeClr val="accent1"/>
+          </a:fillRef>
+          <a:effectRef idx="0">
+            <a:schemeClr val="accent1"/>
+          </a:effectRef>
+          <a:fontRef idx="minor">
+            <a:schemeClr val="lt1"/>
+          </a:fontRef>
+        </p:style>
+        <p:txBody>
+          <a:bodyPr rtlCol="0" anchor="b"/>
+          <a:lstStyle/>
+          <a:p>
+            <a:pPr algn="ctr"/>
+            <a:r>
+              <a:rPr lang="en-GB" b="1" dirty="0">
+                <a:solidFill>
+                  <a:schemeClr val="tx1"/>
+                </a:solidFill>
+                <a:latin typeface="Bahnschrift" panose="020B0502040204020203" pitchFamily="34" charset="0"/>
+              </a:rPr>
+              <a:t>Level 1</a:t>
+            </a:r>
+          </a:p>
+        </p:txBody>
+      </p:sp>
+      <mc:AlternateContent xmlns:mc="http://schemas.openxmlformats.org/markup-compatibility/2006">
+        <mc:Choice xmlns:a14="http://schemas.microsoft.com/office/drawing/2010/main" Requires="a14">
+          <p:sp>
+            <p:nvSpPr>
+              <p:cNvPr id="3" name="Rounded Rectangle 8">
+                <a:extLst>
+                  <a:ext uri="{FF2B5EF4-FFF2-40B4-BE49-F238E27FC236}">
+                    <a16:creationId xmlns:a16="http://schemas.microsoft.com/office/drawing/2014/main" id="{434BEED3-DF36-CD4B-9589-85B925764561}"/>
+                  </a:ext>
+                </a:extLst>
+              </p:cNvPr>
+              <p:cNvSpPr/>
+              <p:nvPr/>
+            </p:nvSpPr>
+            <p:spPr>
+              <a:xfrm>
+                <a:off x="319526" y="4717867"/>
+                <a:ext cx="2639332" cy="591553"/>
+              </a:xfrm>
+              <a:prstGeom prst="roundRect">
+                <a:avLst>
+                  <a:gd name="adj" fmla="val 5845"/>
+                </a:avLst>
+              </a:prstGeom>
+              <a:solidFill>
+                <a:srgbClr val="FFFDF7"/>
+              </a:solidFill>
+              <a:ln w="76200">
+                <a:solidFill>
+                  <a:schemeClr val="accent4">
+                    <a:lumMod val="20000"/>
+                    <a:lumOff val="80000"/>
+                  </a:schemeClr>
+                </a:solidFill>
+              </a:ln>
+            </p:spPr>
+            <p:style>
+              <a:lnRef idx="2">
+                <a:schemeClr val="accent1">
+                  <a:shade val="50000"/>
+                </a:schemeClr>
+              </a:lnRef>
+              <a:fillRef idx="1">
+                <a:schemeClr val="accent1"/>
+              </a:fillRef>
+              <a:effectRef idx="0">
+                <a:schemeClr val="accent1"/>
+              </a:effectRef>
+              <a:fontRef idx="minor">
+                <a:schemeClr val="lt1"/>
+              </a:fontRef>
+            </p:style>
+            <p:txBody>
+              <a:bodyPr rtlCol="0" anchor="ctr"/>
+              <a:lstStyle/>
+              <a:p>
+                <a14:m>
+                  <m:oMath xmlns:m="http://schemas.openxmlformats.org/officeDocument/2006/math">
+                    <m:sSub>
+                      <m:sSubPr>
+                        <m:ctrlPr>
+                          <a:rPr lang="de-AT" sz="1600" i="1" dirty="0">
+                            <a:solidFill>
+                              <a:schemeClr val="tx1"/>
+                            </a:solidFill>
+                            <a:latin typeface="Cambria Math" panose="02040503050406030204" pitchFamily="18" charset="0"/>
+                          </a:rPr>
+                        </m:ctrlPr>
+                      </m:sSubPr>
+                      <m:e>
+                        <m:r>
+                          <a:rPr lang="de-AT" sz="1600" i="1" dirty="0" smtClean="0">
+                            <a:solidFill>
+                              <a:schemeClr val="tx1"/>
+                            </a:solidFill>
+                            <a:latin typeface="Cambria Math" panose="02040503050406030204" pitchFamily="18" charset="0"/>
+                            <a:ea typeface="Cambria Math" panose="02040503050406030204" pitchFamily="18" charset="0"/>
+                          </a:rPr>
+                          <m:t>𝛿</m:t>
+                        </m:r>
+                      </m:e>
+                      <m:sub>
+                        <m:r>
+                          <a:rPr lang="de-AT" sz="1600" i="1" dirty="0">
+                            <a:solidFill>
+                              <a:schemeClr val="tx1"/>
+                            </a:solidFill>
+                            <a:latin typeface="Cambria Math" panose="02040503050406030204" pitchFamily="18" charset="0"/>
+                          </a:rPr>
+                          <m:t>1</m:t>
+                        </m:r>
+                      </m:sub>
+                    </m:sSub>
+                    <m:r>
+                      <a:rPr lang="de-AT" sz="1600" i="1" dirty="0">
+                        <a:solidFill>
+                          <a:schemeClr val="tx1"/>
+                        </a:solidFill>
+                        <a:latin typeface="Cambria Math" panose="02040503050406030204" pitchFamily="18" charset="0"/>
+                      </a:rPr>
+                      <m:t>=</m:t>
+                    </m:r>
+                  </m:oMath>
+                </a14:m>
+                <a:r>
+                  <a:rPr lang="en-GB" sz="1600" dirty="0">
+                    <a:solidFill>
+                      <a:schemeClr val="tx1"/>
+                    </a:solidFill>
+                    <a:latin typeface="Bahnschrift" panose="020B0502040204020203" pitchFamily="34" charset="0"/>
+                  </a:rPr>
+                  <a:t> prediction error</a:t>
+                </a:r>
+                <a:endParaRPr lang="en-GB" dirty="0">
+                  <a:solidFill>
+                    <a:schemeClr val="tx1"/>
+                  </a:solidFill>
+                  <a:latin typeface="Bahnschrift" panose="020B0502040204020203" pitchFamily="34" charset="0"/>
+                </a:endParaRPr>
+              </a:p>
+            </p:txBody>
+          </p:sp>
+        </mc:Choice>
+        <mc:Fallback>
+          <p:sp>
+            <p:nvSpPr>
+              <p:cNvPr id="3" name="Rounded Rectangle 8">
+                <a:extLst>
+                  <a:ext uri="{FF2B5EF4-FFF2-40B4-BE49-F238E27FC236}">
+                    <a16:creationId xmlns:a16="http://schemas.microsoft.com/office/drawing/2014/main" id="{434BEED3-DF36-CD4B-9589-85B925764561}"/>
+                  </a:ext>
+                </a:extLst>
+              </p:cNvPr>
+              <p:cNvSpPr>
+                <a:spLocks noRot="1" noChangeAspect="1" noMove="1" noResize="1" noEditPoints="1" noAdjustHandles="1" noChangeArrowheads="1" noChangeShapeType="1" noTextEdit="1"/>
+              </p:cNvSpPr>
+              <p:nvPr/>
+            </p:nvSpPr>
+            <p:spPr>
+              <a:xfrm>
+                <a:off x="319526" y="4717867"/>
+                <a:ext cx="2639332" cy="591553"/>
+              </a:xfrm>
+              <a:prstGeom prst="roundRect">
+                <a:avLst>
+                  <a:gd name="adj" fmla="val 5845"/>
+                </a:avLst>
+              </a:prstGeom>
+              <a:blipFill>
+                <a:blip r:embed="rId2"/>
+                <a:stretch>
+                  <a:fillRect/>
+                </a:stretch>
+              </a:blipFill>
+              <a:ln w="76200">
+                <a:solidFill>
+                  <a:schemeClr val="accent4">
+                    <a:lumMod val="20000"/>
+                    <a:lumOff val="80000"/>
+                  </a:schemeClr>
+                </a:solidFill>
+              </a:ln>
+            </p:spPr>
+            <p:txBody>
+              <a:bodyPr/>
+              <a:lstStyle/>
+              <a:p>
+                <a:r>
+                  <a:rPr lang="en-US">
+                    <a:noFill/>
+                  </a:rPr>
+                  <a:t> </a:t>
+                </a:r>
+              </a:p>
+            </p:txBody>
+          </p:sp>
+        </mc:Fallback>
+      </mc:AlternateContent>
+      <p:sp>
+        <p:nvSpPr>
+          <p:cNvPr id="16" name="Rectangle 1">
+            <a:extLst>
+              <a:ext uri="{FF2B5EF4-FFF2-40B4-BE49-F238E27FC236}">
+                <a16:creationId xmlns:a16="http://schemas.microsoft.com/office/drawing/2014/main" id="{EF7D8214-EDDF-6A9B-B289-793C067D8451}"/>
+              </a:ext>
+            </a:extLst>
+          </p:cNvPr>
+          <p:cNvSpPr/>
+          <p:nvPr/>
+        </p:nvSpPr>
+        <p:spPr>
+          <a:xfrm>
+            <a:off x="4296000" y="3089945"/>
+            <a:ext cx="3600000" cy="2888160"/>
+          </a:xfrm>
+          <a:prstGeom prst="rect">
+            <a:avLst/>
+          </a:prstGeom>
+          <a:solidFill>
+            <a:srgbClr val="CFF1E6"/>
+          </a:solidFill>
+          <a:ln w="76200">
+            <a:solidFill>
+              <a:srgbClr val="0CB87F"/>
+            </a:solidFill>
+          </a:ln>
+        </p:spPr>
+        <p:style>
+          <a:lnRef idx="2">
+            <a:schemeClr val="accent1">
+              <a:shade val="50000"/>
+            </a:schemeClr>
+          </a:lnRef>
+          <a:fillRef idx="1">
+            <a:schemeClr val="accent1"/>
+          </a:fillRef>
+          <a:effectRef idx="0">
+            <a:schemeClr val="accent1"/>
+          </a:effectRef>
+          <a:fontRef idx="minor">
+            <a:schemeClr val="lt1"/>
+          </a:fontRef>
+        </p:style>
+        <p:txBody>
+          <a:bodyPr rtlCol="0" anchor="b"/>
+          <a:lstStyle/>
+          <a:p>
+            <a:pPr algn="ctr"/>
+            <a:r>
+              <a:rPr lang="en-GB" b="1" dirty="0">
+                <a:solidFill>
+                  <a:schemeClr val="tx1"/>
+                </a:solidFill>
+                <a:latin typeface="Bahnschrift" panose="020B0502040204020203" pitchFamily="34" charset="0"/>
+              </a:rPr>
+              <a:t>Level 2</a:t>
+            </a:r>
+          </a:p>
+        </p:txBody>
+      </p:sp>
+      <mc:AlternateContent xmlns:mc="http://schemas.openxmlformats.org/markup-compatibility/2006">
+        <mc:Choice xmlns:a14="http://schemas.microsoft.com/office/drawing/2010/main" Requires="a14">
+          <p:sp>
+            <p:nvSpPr>
+              <p:cNvPr id="17" name="Rounded Rectangle 8">
+                <a:extLst>
+                  <a:ext uri="{FF2B5EF4-FFF2-40B4-BE49-F238E27FC236}">
+                    <a16:creationId xmlns:a16="http://schemas.microsoft.com/office/drawing/2014/main" id="{42B0618E-08A8-A4FE-C533-A1D0249A16BD}"/>
+                  </a:ext>
+                </a:extLst>
+              </p:cNvPr>
+              <p:cNvSpPr/>
+              <p:nvPr/>
+            </p:nvSpPr>
+            <p:spPr>
+              <a:xfrm>
+                <a:off x="4450663" y="4195630"/>
+                <a:ext cx="3309464" cy="591553"/>
+              </a:xfrm>
+              <a:prstGeom prst="roundRect">
+                <a:avLst>
+                  <a:gd name="adj" fmla="val 5845"/>
+                </a:avLst>
+              </a:prstGeom>
+              <a:solidFill>
+                <a:srgbClr val="FFFDF7"/>
+              </a:solidFill>
+              <a:ln w="76200">
+                <a:solidFill>
+                  <a:schemeClr val="accent4">
+                    <a:lumMod val="20000"/>
+                    <a:lumOff val="80000"/>
+                  </a:schemeClr>
+                </a:solidFill>
+              </a:ln>
+            </p:spPr>
+            <p:style>
+              <a:lnRef idx="2">
+                <a:schemeClr val="accent1">
+                  <a:shade val="50000"/>
+                </a:schemeClr>
+              </a:lnRef>
+              <a:fillRef idx="1">
+                <a:schemeClr val="accent1"/>
+              </a:fillRef>
+              <a:effectRef idx="0">
+                <a:schemeClr val="accent1"/>
+              </a:effectRef>
+              <a:fontRef idx="minor">
+                <a:schemeClr val="lt1"/>
+              </a:fontRef>
+            </p:style>
+            <p:txBody>
+              <a:bodyPr rtlCol="0" anchor="ctr"/>
+              <a:lstStyle/>
+              <a:p>
+                <a14:m>
+                  <m:oMath xmlns:m="http://schemas.openxmlformats.org/officeDocument/2006/math">
+                    <m:f>
+                      <m:fPr>
+                        <m:ctrlPr>
+                          <a:rPr lang="de-AT" sz="1600" i="1" dirty="0" smtClean="0">
+                            <a:solidFill>
+                              <a:schemeClr val="tx1"/>
+                            </a:solidFill>
+                            <a:latin typeface="Cambria Math" panose="02040503050406030204" pitchFamily="18" charset="0"/>
+                          </a:rPr>
+                        </m:ctrlPr>
+                      </m:fPr>
+                      <m:num>
+                        <m:r>
+                          <a:rPr lang="de-AT" sz="1600" b="0" i="1" dirty="0" smtClean="0">
+                            <a:solidFill>
+                              <a:schemeClr val="tx1"/>
+                            </a:solidFill>
+                            <a:latin typeface="Cambria Math" panose="02040503050406030204" pitchFamily="18" charset="0"/>
+                          </a:rPr>
+                          <m:t>1</m:t>
+                        </m:r>
+                      </m:num>
+                      <m:den>
+                        <m:sSub>
+                          <m:sSubPr>
+                            <m:ctrlPr>
+                              <a:rPr lang="de-AT" sz="1600" i="1" dirty="0" smtClean="0">
+                                <a:solidFill>
+                                  <a:schemeClr val="tx1"/>
+                                </a:solidFill>
+                                <a:latin typeface="Cambria Math" panose="02040503050406030204" pitchFamily="18" charset="0"/>
+                              </a:rPr>
+                            </m:ctrlPr>
+                          </m:sSubPr>
+                          <m:e>
+                            <m:r>
+                              <a:rPr lang="de-AT" sz="1600" i="1" dirty="0" smtClean="0">
+                                <a:solidFill>
+                                  <a:schemeClr val="tx1"/>
+                                </a:solidFill>
+                                <a:latin typeface="Cambria Math" panose="02040503050406030204" pitchFamily="18" charset="0"/>
+                                <a:ea typeface="Cambria Math" panose="02040503050406030204" pitchFamily="18" charset="0"/>
+                              </a:rPr>
+                              <m:t>𝜋</m:t>
+                            </m:r>
+                          </m:e>
+                          <m:sub>
+                            <m:r>
+                              <a:rPr lang="de-AT" sz="1600" b="0" i="1" dirty="0" smtClean="0">
+                                <a:solidFill>
+                                  <a:schemeClr val="tx1"/>
+                                </a:solidFill>
+                                <a:latin typeface="Cambria Math" panose="02040503050406030204" pitchFamily="18" charset="0"/>
+                              </a:rPr>
+                              <m:t>2</m:t>
+                            </m:r>
+                          </m:sub>
+                        </m:sSub>
+                      </m:den>
+                    </m:f>
+                    <m:r>
+                      <a:rPr lang="de-AT" sz="1600" i="1" dirty="0">
+                        <a:solidFill>
+                          <a:schemeClr val="tx1"/>
+                        </a:solidFill>
+                        <a:latin typeface="Cambria Math" panose="02040503050406030204" pitchFamily="18" charset="0"/>
+                      </a:rPr>
+                      <m:t>=</m:t>
+                    </m:r>
+                  </m:oMath>
+                </a14:m>
+                <a:r>
+                  <a:rPr lang="en-GB" sz="1600" dirty="0">
+                    <a:solidFill>
+                      <a:schemeClr val="tx1"/>
+                    </a:solidFill>
+                    <a:latin typeface="Bahnschrift" panose="020B0502040204020203" pitchFamily="34" charset="0"/>
+                  </a:rPr>
+                  <a:t> variable learning rate</a:t>
+                </a:r>
+                <a:endParaRPr lang="en-GB" dirty="0">
+                  <a:solidFill>
+                    <a:schemeClr val="tx1"/>
+                  </a:solidFill>
+                  <a:latin typeface="Bahnschrift" panose="020B0502040204020203" pitchFamily="34" charset="0"/>
+                </a:endParaRPr>
+              </a:p>
+            </p:txBody>
+          </p:sp>
+        </mc:Choice>
+        <mc:Fallback>
+          <p:sp>
+            <p:nvSpPr>
+              <p:cNvPr id="17" name="Rounded Rectangle 8">
+                <a:extLst>
+                  <a:ext uri="{FF2B5EF4-FFF2-40B4-BE49-F238E27FC236}">
+                    <a16:creationId xmlns:a16="http://schemas.microsoft.com/office/drawing/2014/main" id="{42B0618E-08A8-A4FE-C533-A1D0249A16BD}"/>
+                  </a:ext>
+                </a:extLst>
+              </p:cNvPr>
+              <p:cNvSpPr>
+                <a:spLocks noRot="1" noChangeAspect="1" noMove="1" noResize="1" noEditPoints="1" noAdjustHandles="1" noChangeArrowheads="1" noChangeShapeType="1" noTextEdit="1"/>
+              </p:cNvSpPr>
+              <p:nvPr/>
+            </p:nvSpPr>
+            <p:spPr>
+              <a:xfrm>
+                <a:off x="4450663" y="4195630"/>
+                <a:ext cx="3309464" cy="591553"/>
+              </a:xfrm>
+              <a:prstGeom prst="roundRect">
+                <a:avLst>
+                  <a:gd name="adj" fmla="val 5845"/>
+                </a:avLst>
+              </a:prstGeom>
+              <a:blipFill>
+                <a:blip r:embed="rId3"/>
+                <a:stretch>
+                  <a:fillRect/>
+                </a:stretch>
+              </a:blipFill>
+              <a:ln w="76200">
+                <a:solidFill>
+                  <a:schemeClr val="accent4">
+                    <a:lumMod val="20000"/>
+                    <a:lumOff val="80000"/>
+                  </a:schemeClr>
+                </a:solidFill>
+              </a:ln>
+            </p:spPr>
+            <p:txBody>
+              <a:bodyPr/>
+              <a:lstStyle/>
+              <a:p>
+                <a:r>
+                  <a:rPr lang="en-US">
+                    <a:noFill/>
+                  </a:rPr>
+                  <a:t> </a:t>
+                </a:r>
+              </a:p>
+            </p:txBody>
+          </p:sp>
+        </mc:Fallback>
+      </mc:AlternateContent>
+      <mc:AlternateContent xmlns:mc="http://schemas.openxmlformats.org/markup-compatibility/2006">
+        <mc:Choice xmlns:a14="http://schemas.microsoft.com/office/drawing/2010/main" Requires="a14">
+          <p:sp>
+            <p:nvSpPr>
+              <p:cNvPr id="18" name="Rounded Rectangle 8">
+                <a:extLst>
+                  <a:ext uri="{FF2B5EF4-FFF2-40B4-BE49-F238E27FC236}">
+                    <a16:creationId xmlns:a16="http://schemas.microsoft.com/office/drawing/2014/main" id="{2059F914-8D4B-80AF-1BED-BEE5AD43B17C}"/>
+                  </a:ext>
+                </a:extLst>
+              </p:cNvPr>
+              <p:cNvSpPr/>
+              <p:nvPr/>
+            </p:nvSpPr>
+            <p:spPr>
+              <a:xfrm>
+                <a:off x="4450663" y="3248323"/>
+                <a:ext cx="3309464" cy="770267"/>
+              </a:xfrm>
+              <a:prstGeom prst="roundRect">
+                <a:avLst>
+                  <a:gd name="adj" fmla="val 5845"/>
+                </a:avLst>
+              </a:prstGeom>
+              <a:solidFill>
+                <a:srgbClr val="FFFDF7"/>
+              </a:solidFill>
+              <a:ln w="76200">
+                <a:solidFill>
+                  <a:schemeClr val="accent4">
+                    <a:lumMod val="20000"/>
+                    <a:lumOff val="80000"/>
+                  </a:schemeClr>
+                </a:solidFill>
+              </a:ln>
+              <a:effectLst>
+                <a:outerShdw blurRad="63500" sx="102000" sy="102000" algn="ctr" rotWithShape="0">
+                  <a:prstClr val="black">
+                    <a:alpha val="40000"/>
+                  </a:prstClr>
+                </a:outerShdw>
+              </a:effectLst>
+            </p:spPr>
+            <p:style>
+              <a:lnRef idx="2">
+                <a:schemeClr val="accent1">
+                  <a:shade val="50000"/>
+                </a:schemeClr>
+              </a:lnRef>
+              <a:fillRef idx="1">
+                <a:schemeClr val="accent1"/>
+              </a:fillRef>
+              <a:effectRef idx="0">
+                <a:schemeClr val="accent1"/>
+              </a:effectRef>
+              <a:fontRef idx="minor">
+                <a:schemeClr val="lt1"/>
+              </a:fontRef>
+            </p:style>
+            <p:txBody>
+              <a:bodyPr rtlCol="0" anchor="ctr"/>
+              <a:lstStyle/>
+              <a:p>
+                <a14:m>
+                  <m:oMath xmlns:m="http://schemas.openxmlformats.org/officeDocument/2006/math">
+                    <m:sSub>
+                      <m:sSubPr>
+                        <m:ctrlPr>
+                          <a:rPr lang="de-AT" sz="1600" i="1" dirty="0" smtClean="0">
+                            <a:solidFill>
+                              <a:schemeClr val="tx1"/>
+                            </a:solidFill>
+                            <a:latin typeface="Cambria Math" panose="02040503050406030204" pitchFamily="18" charset="0"/>
+                          </a:rPr>
+                        </m:ctrlPr>
+                      </m:sSubPr>
+                      <m:e>
+                        <m:r>
+                          <a:rPr lang="de-AT" sz="1600" i="1" dirty="0">
+                            <a:solidFill>
+                              <a:schemeClr val="tx1"/>
+                            </a:solidFill>
+                            <a:latin typeface="Cambria Math" panose="02040503050406030204" pitchFamily="18" charset="0"/>
+                            <a:ea typeface="Cambria Math" panose="02040503050406030204" pitchFamily="18" charset="0"/>
+                          </a:rPr>
+                          <m:t>𝜇</m:t>
+                        </m:r>
+                      </m:e>
+                      <m:sub>
+                        <m:r>
+                          <a:rPr lang="de-AT" sz="1600" b="0" i="1" dirty="0" smtClean="0">
+                            <a:solidFill>
+                              <a:schemeClr val="tx1"/>
+                            </a:solidFill>
+                            <a:latin typeface="Cambria Math" panose="02040503050406030204" pitchFamily="18" charset="0"/>
+                          </a:rPr>
+                          <m:t>2</m:t>
+                        </m:r>
+                      </m:sub>
+                    </m:sSub>
+                    <m:r>
+                      <a:rPr lang="de-AT" sz="1600" i="1" dirty="0">
+                        <a:solidFill>
+                          <a:schemeClr val="tx1"/>
+                        </a:solidFill>
+                        <a:latin typeface="Cambria Math" panose="02040503050406030204" pitchFamily="18" charset="0"/>
+                      </a:rPr>
+                      <m:t>=</m:t>
+                    </m:r>
+                  </m:oMath>
+                </a14:m>
+                <a:r>
+                  <a:rPr lang="en-GB" sz="1600" dirty="0">
+                    <a:solidFill>
+                      <a:schemeClr val="tx1"/>
+                    </a:solidFill>
+                    <a:latin typeface="Bahnschrift" panose="020B0502040204020203" pitchFamily="34" charset="0"/>
+                  </a:rPr>
+                  <a:t> belief about </a:t>
+                </a:r>
+                <a:r>
+                  <a:rPr lang="en-GB" sz="1600" b="1" dirty="0">
+                    <a:solidFill>
+                      <a:schemeClr val="tx1"/>
+                    </a:solidFill>
+                    <a:latin typeface="Bahnschrift" panose="020B0502040204020203" pitchFamily="34" charset="0"/>
+                  </a:rPr>
+                  <a:t>tendency</a:t>
+                </a:r>
+              </a:p>
+              <a:p>
+                <a:r>
+                  <a:rPr lang="en-GB" sz="1600" dirty="0">
+                    <a:solidFill>
+                      <a:schemeClr val="tx1"/>
+                    </a:solidFill>
+                    <a:latin typeface="Bahnschrift" panose="020B0502040204020203" pitchFamily="34" charset="0"/>
+                  </a:rPr>
+                  <a:t>           </a:t>
+                </a:r>
+                <a14:m>
+                  <m:oMath xmlns:m="http://schemas.openxmlformats.org/officeDocument/2006/math">
+                    <m:r>
+                      <a:rPr lang="de-AT" sz="1600" b="0" i="0" dirty="0" smtClean="0">
+                        <a:solidFill>
+                          <a:schemeClr val="tx1"/>
+                        </a:solidFill>
+                        <a:latin typeface="Cambria Math" panose="02040503050406030204" pitchFamily="18" charset="0"/>
+                      </a:rPr>
+                      <m:t>{−</m:t>
+                    </m:r>
+                    <m:r>
+                      <a:rPr lang="de-AT" sz="1600" b="0" i="1" dirty="0" smtClean="0">
+                        <a:solidFill>
+                          <a:schemeClr val="tx1"/>
+                        </a:solidFill>
+                        <a:latin typeface="Cambria Math" panose="02040503050406030204" pitchFamily="18" charset="0"/>
+                        <a:ea typeface="Cambria Math" panose="02040503050406030204" pitchFamily="18" charset="0"/>
+                      </a:rPr>
+                      <m:t>∞</m:t>
+                    </m:r>
+                    <m:r>
+                      <a:rPr lang="de-AT" sz="1600" b="0" i="0" dirty="0" smtClean="0">
+                        <a:solidFill>
+                          <a:schemeClr val="tx1"/>
+                        </a:solidFill>
+                        <a:latin typeface="Cambria Math" panose="02040503050406030204" pitchFamily="18" charset="0"/>
+                      </a:rPr>
+                      <m:t>&lt;</m:t>
+                    </m:r>
+                    <m:sSub>
+                      <m:sSubPr>
+                        <m:ctrlPr>
+                          <a:rPr lang="de-AT" sz="1600" i="1" dirty="0">
+                            <a:solidFill>
+                              <a:schemeClr val="tx1"/>
+                            </a:solidFill>
+                            <a:latin typeface="Cambria Math" panose="02040503050406030204" pitchFamily="18" charset="0"/>
+                          </a:rPr>
+                        </m:ctrlPr>
+                      </m:sSubPr>
+                      <m:e>
+                        <m:r>
+                          <a:rPr lang="de-AT" sz="1600" i="1" dirty="0">
+                            <a:solidFill>
+                              <a:schemeClr val="tx1"/>
+                            </a:solidFill>
+                            <a:latin typeface="Cambria Math" panose="02040503050406030204" pitchFamily="18" charset="0"/>
+                            <a:ea typeface="Cambria Math" panose="02040503050406030204" pitchFamily="18" charset="0"/>
+                          </a:rPr>
+                          <m:t>𝜇</m:t>
+                        </m:r>
+                      </m:e>
+                      <m:sub>
+                        <m:r>
+                          <a:rPr lang="de-AT" sz="1600" b="0" i="1" dirty="0" smtClean="0">
+                            <a:solidFill>
+                              <a:schemeClr val="tx1"/>
+                            </a:solidFill>
+                            <a:latin typeface="Cambria Math" panose="02040503050406030204" pitchFamily="18" charset="0"/>
+                            <a:ea typeface="Cambria Math" panose="02040503050406030204" pitchFamily="18" charset="0"/>
+                          </a:rPr>
+                          <m:t>2</m:t>
+                        </m:r>
+                      </m:sub>
+                    </m:sSub>
+                    <m:r>
+                      <a:rPr lang="de-AT" sz="1600" b="0" i="1" dirty="0" smtClean="0">
+                        <a:solidFill>
+                          <a:schemeClr val="tx1"/>
+                        </a:solidFill>
+                        <a:latin typeface="Cambria Math" panose="02040503050406030204" pitchFamily="18" charset="0"/>
+                      </a:rPr>
+                      <m:t>&lt;</m:t>
+                    </m:r>
+                    <m:r>
+                      <a:rPr lang="de-AT" sz="1600" b="0" i="1" dirty="0" smtClean="0">
+                        <a:solidFill>
+                          <a:schemeClr val="tx1"/>
+                        </a:solidFill>
+                        <a:latin typeface="Cambria Math" panose="02040503050406030204" pitchFamily="18" charset="0"/>
+                        <a:ea typeface="Cambria Math" panose="02040503050406030204" pitchFamily="18" charset="0"/>
+                      </a:rPr>
+                      <m:t>∞</m:t>
+                    </m:r>
+                    <m:r>
+                      <a:rPr lang="de-AT" sz="1600" b="0" i="1" dirty="0" smtClean="0">
+                        <a:solidFill>
+                          <a:schemeClr val="tx1"/>
+                        </a:solidFill>
+                        <a:latin typeface="Cambria Math" panose="02040503050406030204" pitchFamily="18" charset="0"/>
+                      </a:rPr>
+                      <m:t>}</m:t>
+                    </m:r>
+                  </m:oMath>
+                </a14:m>
+                <a:r>
+                  <a:rPr lang="en-GB" dirty="0">
+                    <a:solidFill>
+                      <a:schemeClr val="tx1"/>
+                    </a:solidFill>
+                    <a:latin typeface="Bahnschrift" panose="020B0502040204020203" pitchFamily="34" charset="0"/>
+                  </a:rPr>
+                  <a:t> </a:t>
+                </a:r>
+              </a:p>
+            </p:txBody>
+          </p:sp>
+        </mc:Choice>
+        <mc:Fallback>
+          <p:sp>
+            <p:nvSpPr>
+              <p:cNvPr id="18" name="Rounded Rectangle 8">
+                <a:extLst>
+                  <a:ext uri="{FF2B5EF4-FFF2-40B4-BE49-F238E27FC236}">
+                    <a16:creationId xmlns:a16="http://schemas.microsoft.com/office/drawing/2014/main" id="{2059F914-8D4B-80AF-1BED-BEE5AD43B17C}"/>
+                  </a:ext>
+                </a:extLst>
+              </p:cNvPr>
+              <p:cNvSpPr>
+                <a:spLocks noRot="1" noChangeAspect="1" noMove="1" noResize="1" noEditPoints="1" noAdjustHandles="1" noChangeArrowheads="1" noChangeShapeType="1" noTextEdit="1"/>
+              </p:cNvSpPr>
+              <p:nvPr/>
+            </p:nvSpPr>
+            <p:spPr>
+              <a:xfrm>
+                <a:off x="4450663" y="3248323"/>
+                <a:ext cx="3309464" cy="770267"/>
+              </a:xfrm>
+              <a:prstGeom prst="roundRect">
+                <a:avLst>
+                  <a:gd name="adj" fmla="val 5845"/>
+                </a:avLst>
+              </a:prstGeom>
+              <a:blipFill>
+                <a:blip r:embed="rId4"/>
+                <a:stretch>
+                  <a:fillRect/>
+                </a:stretch>
+              </a:blipFill>
+              <a:ln w="76200">
+                <a:solidFill>
+                  <a:schemeClr val="accent4">
+                    <a:lumMod val="20000"/>
+                    <a:lumOff val="80000"/>
+                  </a:schemeClr>
+                </a:solidFill>
+              </a:ln>
+              <a:effectLst>
+                <a:outerShdw blurRad="63500" sx="102000" sy="102000" algn="ctr" rotWithShape="0">
+                  <a:prstClr val="black">
+                    <a:alpha val="40000"/>
+                  </a:prstClr>
+                </a:outerShdw>
+              </a:effectLst>
+            </p:spPr>
+            <p:txBody>
+              <a:bodyPr/>
+              <a:lstStyle/>
+              <a:p>
+                <a:r>
+                  <a:rPr lang="en-US">
+                    <a:noFill/>
+                  </a:rPr>
+                  <a:t> </a:t>
+                </a:r>
+              </a:p>
+            </p:txBody>
+          </p:sp>
+        </mc:Fallback>
+      </mc:AlternateContent>
+      <p:sp>
+        <p:nvSpPr>
+          <p:cNvPr id="77" name="Rectangle 1">
+            <a:extLst>
+              <a:ext uri="{FF2B5EF4-FFF2-40B4-BE49-F238E27FC236}">
+                <a16:creationId xmlns:a16="http://schemas.microsoft.com/office/drawing/2014/main" id="{3BDC6601-E698-8954-2BB9-94C8F9F1C48B}"/>
+              </a:ext>
+            </a:extLst>
+          </p:cNvPr>
+          <p:cNvSpPr/>
+          <p:nvPr/>
+        </p:nvSpPr>
+        <p:spPr>
+          <a:xfrm>
+            <a:off x="-278953" y="-395763"/>
+            <a:ext cx="12776548" cy="1803748"/>
+          </a:xfrm>
+          <a:prstGeom prst="rect">
+            <a:avLst/>
+          </a:prstGeom>
+          <a:solidFill>
+            <a:srgbClr val="CFF1E6"/>
+          </a:solidFill>
+          <a:ln w="76200">
+            <a:solidFill>
+              <a:srgbClr val="0CB87F"/>
+            </a:solidFill>
+          </a:ln>
+        </p:spPr>
+        <p:style>
+          <a:lnRef idx="2">
+            <a:schemeClr val="accent1">
+              <a:shade val="50000"/>
+            </a:schemeClr>
+          </a:lnRef>
+          <a:fillRef idx="1">
+            <a:schemeClr val="accent1"/>
+          </a:fillRef>
+          <a:effectRef idx="0">
+            <a:schemeClr val="accent1"/>
+          </a:effectRef>
+          <a:fontRef idx="minor">
+            <a:schemeClr val="lt1"/>
+          </a:fontRef>
+        </p:style>
+        <p:txBody>
+          <a:bodyPr rtlCol="0" anchor="ctr"/>
+          <a:lstStyle/>
+          <a:p>
+            <a:pPr algn="ctr"/>
+            <a:endParaRPr lang="en-GB" dirty="0"/>
+          </a:p>
+        </p:txBody>
+      </p:sp>
+      <p:sp>
+        <p:nvSpPr>
+          <p:cNvPr id="20" name="Rectangle 1">
+            <a:extLst>
+              <a:ext uri="{FF2B5EF4-FFF2-40B4-BE49-F238E27FC236}">
+                <a16:creationId xmlns:a16="http://schemas.microsoft.com/office/drawing/2014/main" id="{29E83E3E-5F32-DC8C-8054-8181C3F4BC64}"/>
+              </a:ext>
+            </a:extLst>
+          </p:cNvPr>
+          <p:cNvSpPr/>
+          <p:nvPr/>
+        </p:nvSpPr>
+        <p:spPr>
+          <a:xfrm>
+            <a:off x="8453065" y="3089945"/>
+            <a:ext cx="3600000" cy="2888160"/>
+          </a:xfrm>
+          <a:prstGeom prst="rect">
+            <a:avLst/>
+          </a:prstGeom>
+          <a:solidFill>
+            <a:srgbClr val="CFF1E6"/>
+          </a:solidFill>
+          <a:ln w="76200">
+            <a:solidFill>
+              <a:srgbClr val="0CB87F"/>
+            </a:solidFill>
+          </a:ln>
+        </p:spPr>
+        <p:style>
+          <a:lnRef idx="2">
+            <a:schemeClr val="accent1">
+              <a:shade val="50000"/>
+            </a:schemeClr>
+          </a:lnRef>
+          <a:fillRef idx="1">
+            <a:schemeClr val="accent1"/>
+          </a:fillRef>
+          <a:effectRef idx="0">
+            <a:schemeClr val="accent1"/>
+          </a:effectRef>
+          <a:fontRef idx="minor">
+            <a:schemeClr val="lt1"/>
+          </a:fontRef>
+        </p:style>
+        <p:txBody>
+          <a:bodyPr rtlCol="0" anchor="b"/>
+          <a:lstStyle/>
+          <a:p>
+            <a:pPr algn="ctr"/>
+            <a:r>
+              <a:rPr lang="en-GB" b="1" dirty="0">
+                <a:solidFill>
+                  <a:schemeClr val="tx1"/>
+                </a:solidFill>
+                <a:latin typeface="Bahnschrift" panose="020B0502040204020203" pitchFamily="34" charset="0"/>
+              </a:rPr>
+              <a:t>Level 3</a:t>
+            </a:r>
+          </a:p>
+        </p:txBody>
+      </p:sp>
+      <mc:AlternateContent xmlns:mc="http://schemas.openxmlformats.org/markup-compatibility/2006">
+        <mc:Choice xmlns:a14="http://schemas.microsoft.com/office/drawing/2010/main" Requires="a14">
+          <p:sp>
+            <p:nvSpPr>
+              <p:cNvPr id="21" name="Rounded Rectangle 8">
+                <a:extLst>
+                  <a:ext uri="{FF2B5EF4-FFF2-40B4-BE49-F238E27FC236}">
+                    <a16:creationId xmlns:a16="http://schemas.microsoft.com/office/drawing/2014/main" id="{C6C9CB4A-8038-90BF-F71A-000B6551A2D6}"/>
+                  </a:ext>
+                </a:extLst>
+              </p:cNvPr>
+              <p:cNvSpPr/>
+              <p:nvPr/>
+            </p:nvSpPr>
+            <p:spPr>
+              <a:xfrm>
+                <a:off x="8605650" y="4108875"/>
+                <a:ext cx="3309464" cy="770267"/>
+              </a:xfrm>
+              <a:prstGeom prst="roundRect">
+                <a:avLst>
+                  <a:gd name="adj" fmla="val 5845"/>
+                </a:avLst>
+              </a:prstGeom>
+              <a:solidFill>
+                <a:srgbClr val="FFFDF7"/>
+              </a:solidFill>
+              <a:ln w="76200">
+                <a:solidFill>
+                  <a:schemeClr val="accent4">
+                    <a:lumMod val="20000"/>
+                    <a:lumOff val="80000"/>
+                  </a:schemeClr>
+                </a:solidFill>
+              </a:ln>
+              <a:effectLst>
+                <a:outerShdw blurRad="63500" sx="102000" sy="102000" algn="ctr" rotWithShape="0">
+                  <a:prstClr val="black">
+                    <a:alpha val="40000"/>
+                  </a:prstClr>
+                </a:outerShdw>
+              </a:effectLst>
+            </p:spPr>
+            <p:style>
+              <a:lnRef idx="2">
+                <a:schemeClr val="accent1">
+                  <a:shade val="50000"/>
+                </a:schemeClr>
+              </a:lnRef>
+              <a:fillRef idx="1">
+                <a:schemeClr val="accent1"/>
+              </a:fillRef>
+              <a:effectRef idx="0">
+                <a:schemeClr val="accent1"/>
+              </a:effectRef>
+              <a:fontRef idx="minor">
+                <a:schemeClr val="lt1"/>
+              </a:fontRef>
+            </p:style>
+            <p:txBody>
+              <a:bodyPr rtlCol="0" anchor="ctr"/>
+              <a:lstStyle/>
+              <a:p>
+                <a14:m>
+                  <m:oMath xmlns:m="http://schemas.openxmlformats.org/officeDocument/2006/math">
+                    <m:sSub>
+                      <m:sSubPr>
+                        <m:ctrlPr>
+                          <a:rPr lang="de-AT" sz="1600" i="1" dirty="0" smtClean="0">
+                            <a:solidFill>
+                              <a:schemeClr val="tx1"/>
+                            </a:solidFill>
+                            <a:latin typeface="Cambria Math" panose="02040503050406030204" pitchFamily="18" charset="0"/>
+                          </a:rPr>
+                        </m:ctrlPr>
+                      </m:sSubPr>
+                      <m:e>
+                        <m:r>
+                          <a:rPr lang="de-AT" sz="1600" i="1" dirty="0">
+                            <a:solidFill>
+                              <a:schemeClr val="tx1"/>
+                            </a:solidFill>
+                            <a:latin typeface="Cambria Math" panose="02040503050406030204" pitchFamily="18" charset="0"/>
+                            <a:ea typeface="Cambria Math" panose="02040503050406030204" pitchFamily="18" charset="0"/>
+                          </a:rPr>
+                          <m:t>𝜇</m:t>
+                        </m:r>
+                      </m:e>
+                      <m:sub>
+                        <m:r>
+                          <a:rPr lang="de-AT" sz="1600" b="0" i="1" dirty="0" smtClean="0">
+                            <a:solidFill>
+                              <a:schemeClr val="tx1"/>
+                            </a:solidFill>
+                            <a:latin typeface="Cambria Math" panose="02040503050406030204" pitchFamily="18" charset="0"/>
+                          </a:rPr>
+                          <m:t>3</m:t>
+                        </m:r>
+                      </m:sub>
+                    </m:sSub>
+                    <m:r>
+                      <a:rPr lang="de-AT" sz="1600" i="1" dirty="0">
+                        <a:solidFill>
+                          <a:schemeClr val="tx1"/>
+                        </a:solidFill>
+                        <a:latin typeface="Cambria Math" panose="02040503050406030204" pitchFamily="18" charset="0"/>
+                      </a:rPr>
+                      <m:t>=</m:t>
+                    </m:r>
+                  </m:oMath>
+                </a14:m>
+                <a:r>
+                  <a:rPr lang="en-GB" sz="1600" dirty="0">
+                    <a:solidFill>
+                      <a:schemeClr val="tx1"/>
+                    </a:solidFill>
+                    <a:latin typeface="Bahnschrift" panose="020B0502040204020203" pitchFamily="34" charset="0"/>
+                  </a:rPr>
+                  <a:t> belief about </a:t>
+                </a:r>
+                <a:r>
+                  <a:rPr lang="en-GB" sz="1600" b="1" dirty="0">
+                    <a:solidFill>
+                      <a:schemeClr val="tx1"/>
+                    </a:solidFill>
+                    <a:latin typeface="Bahnschrift" panose="020B0502040204020203" pitchFamily="34" charset="0"/>
+                  </a:rPr>
+                  <a:t>volatility</a:t>
+                </a:r>
+              </a:p>
+              <a:p>
+                <a:r>
+                  <a:rPr lang="en-GB" sz="1600" dirty="0">
+                    <a:solidFill>
+                      <a:schemeClr val="tx1"/>
+                    </a:solidFill>
+                    <a:latin typeface="Bahnschrift" panose="020B0502040204020203" pitchFamily="34" charset="0"/>
+                  </a:rPr>
+                  <a:t>           </a:t>
+                </a:r>
+                <a14:m>
+                  <m:oMath xmlns:m="http://schemas.openxmlformats.org/officeDocument/2006/math">
+                    <m:r>
+                      <a:rPr lang="de-AT" sz="1600" b="0" i="0" dirty="0" smtClean="0">
+                        <a:solidFill>
+                          <a:schemeClr val="tx1"/>
+                        </a:solidFill>
+                        <a:latin typeface="Cambria Math" panose="02040503050406030204" pitchFamily="18" charset="0"/>
+                      </a:rPr>
+                      <m:t>{−</m:t>
+                    </m:r>
+                    <m:r>
+                      <a:rPr lang="de-AT" sz="1600" b="0" i="1" dirty="0" smtClean="0">
+                        <a:solidFill>
+                          <a:schemeClr val="tx1"/>
+                        </a:solidFill>
+                        <a:latin typeface="Cambria Math" panose="02040503050406030204" pitchFamily="18" charset="0"/>
+                        <a:ea typeface="Cambria Math" panose="02040503050406030204" pitchFamily="18" charset="0"/>
+                      </a:rPr>
+                      <m:t>∞</m:t>
+                    </m:r>
+                    <m:r>
+                      <a:rPr lang="de-AT" sz="1600" b="0" i="0" dirty="0" smtClean="0">
+                        <a:solidFill>
+                          <a:schemeClr val="tx1"/>
+                        </a:solidFill>
+                        <a:latin typeface="Cambria Math" panose="02040503050406030204" pitchFamily="18" charset="0"/>
+                      </a:rPr>
+                      <m:t>&lt;</m:t>
+                    </m:r>
+                    <m:sSub>
+                      <m:sSubPr>
+                        <m:ctrlPr>
+                          <a:rPr lang="de-AT" sz="1600" i="1" dirty="0">
+                            <a:solidFill>
+                              <a:schemeClr val="tx1"/>
+                            </a:solidFill>
+                            <a:latin typeface="Cambria Math" panose="02040503050406030204" pitchFamily="18" charset="0"/>
+                          </a:rPr>
+                        </m:ctrlPr>
+                      </m:sSubPr>
+                      <m:e>
+                        <m:r>
+                          <a:rPr lang="de-AT" sz="1600" i="1" dirty="0">
+                            <a:solidFill>
+                              <a:schemeClr val="tx1"/>
+                            </a:solidFill>
+                            <a:latin typeface="Cambria Math" panose="02040503050406030204" pitchFamily="18" charset="0"/>
+                            <a:ea typeface="Cambria Math" panose="02040503050406030204" pitchFamily="18" charset="0"/>
+                          </a:rPr>
+                          <m:t>𝜇</m:t>
+                        </m:r>
+                      </m:e>
+                      <m:sub>
+                        <m:r>
+                          <a:rPr lang="de-AT" sz="1600" b="0" i="1" dirty="0" smtClean="0">
+                            <a:solidFill>
+                              <a:schemeClr val="tx1"/>
+                            </a:solidFill>
+                            <a:latin typeface="Cambria Math" panose="02040503050406030204" pitchFamily="18" charset="0"/>
+                            <a:ea typeface="Cambria Math" panose="02040503050406030204" pitchFamily="18" charset="0"/>
+                          </a:rPr>
+                          <m:t>3</m:t>
+                        </m:r>
+                      </m:sub>
+                    </m:sSub>
+                    <m:r>
+                      <a:rPr lang="de-AT" sz="1600" b="0" i="1" dirty="0" smtClean="0">
+                        <a:solidFill>
+                          <a:schemeClr val="tx1"/>
+                        </a:solidFill>
+                        <a:latin typeface="Cambria Math" panose="02040503050406030204" pitchFamily="18" charset="0"/>
+                      </a:rPr>
+                      <m:t>&lt;</m:t>
+                    </m:r>
+                    <m:r>
+                      <a:rPr lang="de-AT" sz="1600" b="0" i="1" dirty="0" smtClean="0">
+                        <a:solidFill>
+                          <a:schemeClr val="tx1"/>
+                        </a:solidFill>
+                        <a:latin typeface="Cambria Math" panose="02040503050406030204" pitchFamily="18" charset="0"/>
+                        <a:ea typeface="Cambria Math" panose="02040503050406030204" pitchFamily="18" charset="0"/>
+                      </a:rPr>
+                      <m:t>∞</m:t>
+                    </m:r>
+                    <m:r>
+                      <a:rPr lang="de-AT" sz="1600" b="0" i="1" dirty="0" smtClean="0">
+                        <a:solidFill>
+                          <a:schemeClr val="tx1"/>
+                        </a:solidFill>
+                        <a:latin typeface="Cambria Math" panose="02040503050406030204" pitchFamily="18" charset="0"/>
+                      </a:rPr>
+                      <m:t>}</m:t>
+                    </m:r>
+                  </m:oMath>
+                </a14:m>
+                <a:r>
+                  <a:rPr lang="en-GB" dirty="0">
+                    <a:solidFill>
+                      <a:schemeClr val="tx1"/>
+                    </a:solidFill>
+                    <a:latin typeface="Bahnschrift" panose="020B0502040204020203" pitchFamily="34" charset="0"/>
+                  </a:rPr>
+                  <a:t> </a:t>
+                </a:r>
+              </a:p>
+            </p:txBody>
+          </p:sp>
+        </mc:Choice>
+        <mc:Fallback>
+          <p:sp>
+            <p:nvSpPr>
+              <p:cNvPr id="21" name="Rounded Rectangle 8">
+                <a:extLst>
+                  <a:ext uri="{FF2B5EF4-FFF2-40B4-BE49-F238E27FC236}">
+                    <a16:creationId xmlns:a16="http://schemas.microsoft.com/office/drawing/2014/main" id="{C6C9CB4A-8038-90BF-F71A-000B6551A2D6}"/>
+                  </a:ext>
+                </a:extLst>
+              </p:cNvPr>
+              <p:cNvSpPr>
+                <a:spLocks noRot="1" noChangeAspect="1" noMove="1" noResize="1" noEditPoints="1" noAdjustHandles="1" noChangeArrowheads="1" noChangeShapeType="1" noTextEdit="1"/>
+              </p:cNvSpPr>
+              <p:nvPr/>
+            </p:nvSpPr>
+            <p:spPr>
+              <a:xfrm>
+                <a:off x="8605650" y="4108875"/>
+                <a:ext cx="3309464" cy="770267"/>
+              </a:xfrm>
+              <a:prstGeom prst="roundRect">
+                <a:avLst>
+                  <a:gd name="adj" fmla="val 5845"/>
+                </a:avLst>
+              </a:prstGeom>
+              <a:blipFill>
+                <a:blip r:embed="rId5"/>
+                <a:stretch>
+                  <a:fillRect/>
+                </a:stretch>
+              </a:blipFill>
+              <a:ln w="76200">
+                <a:solidFill>
+                  <a:schemeClr val="accent4">
+                    <a:lumMod val="20000"/>
+                    <a:lumOff val="80000"/>
+                  </a:schemeClr>
+                </a:solidFill>
+              </a:ln>
+              <a:effectLst>
+                <a:outerShdw blurRad="63500" sx="102000" sy="102000" algn="ctr" rotWithShape="0">
+                  <a:prstClr val="black">
+                    <a:alpha val="40000"/>
+                  </a:prstClr>
+                </a:outerShdw>
+              </a:effectLst>
+            </p:spPr>
+            <p:txBody>
+              <a:bodyPr/>
+              <a:lstStyle/>
+              <a:p>
+                <a:r>
+                  <a:rPr lang="en-US">
+                    <a:noFill/>
+                  </a:rPr>
+                  <a:t> </a:t>
+                </a:r>
+              </a:p>
+            </p:txBody>
+          </p:sp>
+        </mc:Fallback>
+      </mc:AlternateContent>
+      <mc:AlternateContent xmlns:mc="http://schemas.openxmlformats.org/markup-compatibility/2006">
+        <mc:Choice xmlns:a14="http://schemas.microsoft.com/office/drawing/2010/main" Requires="a14">
+          <p:sp>
+            <p:nvSpPr>
+              <p:cNvPr id="23" name="Rounded Rectangle 5">
+                <a:extLst>
+                  <a:ext uri="{FF2B5EF4-FFF2-40B4-BE49-F238E27FC236}">
+                    <a16:creationId xmlns:a16="http://schemas.microsoft.com/office/drawing/2014/main" id="{927315D4-7799-30D6-AC13-346068C5DB9D}"/>
+                  </a:ext>
+                </a:extLst>
+              </p:cNvPr>
+              <p:cNvSpPr/>
+              <p:nvPr/>
+            </p:nvSpPr>
+            <p:spPr>
+              <a:xfrm>
+                <a:off x="4478656" y="2034695"/>
+                <a:ext cx="1914715" cy="474162"/>
+              </a:xfrm>
+              <a:prstGeom prst="roundRect">
+                <a:avLst>
+                  <a:gd name="adj" fmla="val 5845"/>
+                </a:avLst>
+              </a:prstGeom>
+              <a:solidFill>
+                <a:srgbClr val="FFFDF7"/>
+              </a:solidFill>
+              <a:ln w="76200">
+                <a:solidFill>
+                  <a:schemeClr val="accent4">
+                    <a:lumMod val="20000"/>
+                    <a:lumOff val="80000"/>
+                  </a:schemeClr>
+                </a:solidFill>
+              </a:ln>
+            </p:spPr>
+            <p:style>
+              <a:lnRef idx="2">
+                <a:schemeClr val="accent1">
+                  <a:shade val="50000"/>
+                </a:schemeClr>
+              </a:lnRef>
+              <a:fillRef idx="1">
+                <a:schemeClr val="accent1"/>
+              </a:fillRef>
+              <a:effectRef idx="0">
+                <a:schemeClr val="accent1"/>
+              </a:effectRef>
+              <a:fontRef idx="minor">
+                <a:schemeClr val="lt1"/>
+              </a:fontRef>
+            </p:style>
+            <p:txBody>
+              <a:bodyPr rtlCol="0" anchor="t"/>
+              <a:lstStyle/>
+              <a:p>
+                <a14:m>
+                  <m:oMath xmlns:m="http://schemas.openxmlformats.org/officeDocument/2006/math">
+                    <m:sSub>
+                      <m:sSubPr>
+                        <m:ctrlPr>
+                          <a:rPr lang="de-AT" sz="1600" i="1" dirty="0" smtClean="0">
+                            <a:solidFill>
+                              <a:schemeClr val="tx1"/>
+                            </a:solidFill>
+                            <a:latin typeface="Cambria Math" panose="02040503050406030204" pitchFamily="18" charset="0"/>
+                          </a:rPr>
+                        </m:ctrlPr>
+                      </m:sSubPr>
+                      <m:e>
+                        <m:r>
+                          <a:rPr lang="de-AT" sz="1600" b="0" i="1" dirty="0" smtClean="0">
+                            <a:solidFill>
+                              <a:schemeClr val="tx1"/>
+                            </a:solidFill>
+                            <a:latin typeface="Cambria Math" panose="02040503050406030204" pitchFamily="18" charset="0"/>
+                          </a:rPr>
+                          <m:t>𝑥</m:t>
+                        </m:r>
+                      </m:e>
+                      <m:sub>
+                        <m:r>
+                          <a:rPr lang="de-AT" sz="1600" b="0" i="1" dirty="0" smtClean="0">
+                            <a:solidFill>
+                              <a:schemeClr val="tx1"/>
+                            </a:solidFill>
+                            <a:latin typeface="Cambria Math" panose="02040503050406030204" pitchFamily="18" charset="0"/>
+                          </a:rPr>
+                          <m:t>2</m:t>
+                        </m:r>
+                      </m:sub>
+                    </m:sSub>
+                    <m:r>
+                      <a:rPr lang="de-AT" sz="1600" b="0" i="1" dirty="0" smtClean="0">
+                        <a:solidFill>
+                          <a:schemeClr val="tx1"/>
+                        </a:solidFill>
+                        <a:latin typeface="Cambria Math" panose="02040503050406030204" pitchFamily="18" charset="0"/>
+                      </a:rPr>
+                      <m:t>=</m:t>
+                    </m:r>
+                  </m:oMath>
+                </a14:m>
+                <a:r>
+                  <a:rPr lang="de-AT" sz="1600" dirty="0">
+                    <a:solidFill>
+                      <a:schemeClr val="tx1"/>
+                    </a:solidFill>
+                    <a:latin typeface="Bahnschrift" panose="020B0502040204020203" pitchFamily="34" charset="0"/>
+                  </a:rPr>
+                  <a:t> tendency</a:t>
+                </a:r>
+              </a:p>
+              <a:p>
+                <a:endParaRPr lang="en-GB" sz="1600" dirty="0">
+                  <a:solidFill>
+                    <a:schemeClr val="tx1"/>
+                  </a:solidFill>
+                  <a:latin typeface="Bahnschrift" panose="020B0502040204020203" pitchFamily="34" charset="0"/>
+                </a:endParaRPr>
+              </a:p>
+            </p:txBody>
+          </p:sp>
+        </mc:Choice>
+        <mc:Fallback>
+          <p:sp>
+            <p:nvSpPr>
+              <p:cNvPr id="23" name="Rounded Rectangle 5">
+                <a:extLst>
+                  <a:ext uri="{FF2B5EF4-FFF2-40B4-BE49-F238E27FC236}">
+                    <a16:creationId xmlns:a16="http://schemas.microsoft.com/office/drawing/2014/main" id="{927315D4-7799-30D6-AC13-346068C5DB9D}"/>
+                  </a:ext>
+                </a:extLst>
+              </p:cNvPr>
+              <p:cNvSpPr>
+                <a:spLocks noRot="1" noChangeAspect="1" noMove="1" noResize="1" noEditPoints="1" noAdjustHandles="1" noChangeArrowheads="1" noChangeShapeType="1" noTextEdit="1"/>
+              </p:cNvSpPr>
+              <p:nvPr/>
+            </p:nvSpPr>
+            <p:spPr>
+              <a:xfrm>
+                <a:off x="4478656" y="2034695"/>
+                <a:ext cx="1914715" cy="474162"/>
+              </a:xfrm>
+              <a:prstGeom prst="roundRect">
+                <a:avLst>
+                  <a:gd name="adj" fmla="val 5845"/>
+                </a:avLst>
+              </a:prstGeom>
+              <a:blipFill>
+                <a:blip r:embed="rId6"/>
+                <a:stretch>
+                  <a:fillRect b="-25275"/>
+                </a:stretch>
+              </a:blipFill>
+              <a:ln w="76200">
+                <a:solidFill>
+                  <a:schemeClr val="accent4">
+                    <a:lumMod val="20000"/>
+                    <a:lumOff val="80000"/>
+                  </a:schemeClr>
+                </a:solidFill>
+              </a:ln>
+            </p:spPr>
+            <p:txBody>
+              <a:bodyPr/>
+              <a:lstStyle/>
+              <a:p>
+                <a:r>
+                  <a:rPr lang="en-US">
+                    <a:noFill/>
+                  </a:rPr>
+                  <a:t> </a:t>
+                </a:r>
+              </a:p>
+            </p:txBody>
+          </p:sp>
+        </mc:Fallback>
+      </mc:AlternateContent>
+      <mc:AlternateContent xmlns:mc="http://schemas.openxmlformats.org/markup-compatibility/2006">
+        <mc:Choice xmlns:a14="http://schemas.microsoft.com/office/drawing/2010/main" Requires="a14">
+          <p:sp>
+            <p:nvSpPr>
+              <p:cNvPr id="25" name="Rounded Rectangle 5">
+                <a:extLst>
+                  <a:ext uri="{FF2B5EF4-FFF2-40B4-BE49-F238E27FC236}">
+                    <a16:creationId xmlns:a16="http://schemas.microsoft.com/office/drawing/2014/main" id="{6DF731C0-CD63-7CA8-7030-D203D4461577}"/>
+                  </a:ext>
+                </a:extLst>
+              </p:cNvPr>
+              <p:cNvSpPr/>
+              <p:nvPr/>
+            </p:nvSpPr>
+            <p:spPr>
+              <a:xfrm>
+                <a:off x="8598333" y="2034695"/>
+                <a:ext cx="1914715" cy="474162"/>
+              </a:xfrm>
+              <a:prstGeom prst="roundRect">
+                <a:avLst>
+                  <a:gd name="adj" fmla="val 5845"/>
+                </a:avLst>
+              </a:prstGeom>
+              <a:solidFill>
+                <a:srgbClr val="FFFDF7"/>
+              </a:solidFill>
+              <a:ln w="76200">
+                <a:solidFill>
+                  <a:schemeClr val="accent4">
+                    <a:lumMod val="20000"/>
+                    <a:lumOff val="80000"/>
+                  </a:schemeClr>
+                </a:solidFill>
+              </a:ln>
+            </p:spPr>
+            <p:style>
+              <a:lnRef idx="2">
+                <a:schemeClr val="accent1">
+                  <a:shade val="50000"/>
+                </a:schemeClr>
+              </a:lnRef>
+              <a:fillRef idx="1">
+                <a:schemeClr val="accent1"/>
+              </a:fillRef>
+              <a:effectRef idx="0">
+                <a:schemeClr val="accent1"/>
+              </a:effectRef>
+              <a:fontRef idx="minor">
+                <a:schemeClr val="lt1"/>
+              </a:fontRef>
+            </p:style>
+            <p:txBody>
+              <a:bodyPr rtlCol="0" anchor="t"/>
+              <a:lstStyle/>
+              <a:p>
+                <a14:m>
+                  <m:oMath xmlns:m="http://schemas.openxmlformats.org/officeDocument/2006/math">
+                    <m:sSub>
+                      <m:sSubPr>
+                        <m:ctrlPr>
+                          <a:rPr lang="de-AT" sz="1600" i="1" dirty="0" smtClean="0">
+                            <a:solidFill>
+                              <a:schemeClr val="tx1"/>
+                            </a:solidFill>
+                            <a:latin typeface="Cambria Math" panose="02040503050406030204" pitchFamily="18" charset="0"/>
+                          </a:rPr>
+                        </m:ctrlPr>
+                      </m:sSubPr>
+                      <m:e>
+                        <m:r>
+                          <a:rPr lang="de-AT" sz="1600" b="0" i="1" dirty="0" smtClean="0">
+                            <a:solidFill>
+                              <a:schemeClr val="tx1"/>
+                            </a:solidFill>
+                            <a:latin typeface="Cambria Math" panose="02040503050406030204" pitchFamily="18" charset="0"/>
+                          </a:rPr>
+                          <m:t>𝑥</m:t>
+                        </m:r>
+                      </m:e>
+                      <m:sub>
+                        <m:r>
+                          <a:rPr lang="de-AT" sz="1600" b="0" i="1" dirty="0" smtClean="0">
+                            <a:solidFill>
+                              <a:schemeClr val="tx1"/>
+                            </a:solidFill>
+                            <a:latin typeface="Cambria Math" panose="02040503050406030204" pitchFamily="18" charset="0"/>
+                          </a:rPr>
+                          <m:t>3</m:t>
+                        </m:r>
+                      </m:sub>
+                    </m:sSub>
+                    <m:r>
+                      <a:rPr lang="de-AT" sz="1600" b="0" i="1" dirty="0" smtClean="0">
+                        <a:solidFill>
+                          <a:schemeClr val="tx1"/>
+                        </a:solidFill>
+                        <a:latin typeface="Cambria Math" panose="02040503050406030204" pitchFamily="18" charset="0"/>
+                      </a:rPr>
+                      <m:t>=</m:t>
+                    </m:r>
+                  </m:oMath>
+                </a14:m>
+                <a:r>
+                  <a:rPr lang="de-AT" sz="1600" dirty="0">
+                    <a:solidFill>
+                      <a:schemeClr val="tx1"/>
+                    </a:solidFill>
+                    <a:latin typeface="Bahnschrift" panose="020B0502040204020203" pitchFamily="34" charset="0"/>
+                  </a:rPr>
+                  <a:t> volatility</a:t>
+                </a:r>
+              </a:p>
+              <a:p>
+                <a:endParaRPr lang="en-GB" sz="1600" dirty="0">
+                  <a:solidFill>
+                    <a:schemeClr val="tx1"/>
+                  </a:solidFill>
+                  <a:latin typeface="Bahnschrift" panose="020B0502040204020203" pitchFamily="34" charset="0"/>
+                </a:endParaRPr>
+              </a:p>
+            </p:txBody>
+          </p:sp>
+        </mc:Choice>
+        <mc:Fallback>
+          <p:sp>
+            <p:nvSpPr>
+              <p:cNvPr id="25" name="Rounded Rectangle 5">
+                <a:extLst>
+                  <a:ext uri="{FF2B5EF4-FFF2-40B4-BE49-F238E27FC236}">
+                    <a16:creationId xmlns:a16="http://schemas.microsoft.com/office/drawing/2014/main" id="{6DF731C0-CD63-7CA8-7030-D203D4461577}"/>
+                  </a:ext>
+                </a:extLst>
+              </p:cNvPr>
+              <p:cNvSpPr>
+                <a:spLocks noRot="1" noChangeAspect="1" noMove="1" noResize="1" noEditPoints="1" noAdjustHandles="1" noChangeArrowheads="1" noChangeShapeType="1" noTextEdit="1"/>
+              </p:cNvSpPr>
+              <p:nvPr/>
+            </p:nvSpPr>
+            <p:spPr>
+              <a:xfrm>
+                <a:off x="8598333" y="2034695"/>
+                <a:ext cx="1914715" cy="474162"/>
+              </a:xfrm>
+              <a:prstGeom prst="roundRect">
+                <a:avLst>
+                  <a:gd name="adj" fmla="val 5845"/>
+                </a:avLst>
+              </a:prstGeom>
+              <a:blipFill>
+                <a:blip r:embed="rId7"/>
+                <a:stretch>
+                  <a:fillRect b="-25275"/>
+                </a:stretch>
+              </a:blipFill>
+              <a:ln w="76200">
+                <a:solidFill>
+                  <a:schemeClr val="accent4">
+                    <a:lumMod val="20000"/>
+                    <a:lumOff val="80000"/>
+                  </a:schemeClr>
+                </a:solidFill>
+              </a:ln>
+            </p:spPr>
+            <p:txBody>
+              <a:bodyPr/>
+              <a:lstStyle/>
+              <a:p>
+                <a:r>
+                  <a:rPr lang="en-US">
+                    <a:noFill/>
+                  </a:rPr>
+                  <a:t> </a:t>
+                </a:r>
+              </a:p>
+            </p:txBody>
+          </p:sp>
+        </mc:Fallback>
+      </mc:AlternateContent>
+      <p:cxnSp>
+        <p:nvCxnSpPr>
+          <p:cNvPr id="26" name="Gerade Verbindung mit Pfeil 25">
+            <a:extLst>
+              <a:ext uri="{FF2B5EF4-FFF2-40B4-BE49-F238E27FC236}">
+                <a16:creationId xmlns:a16="http://schemas.microsoft.com/office/drawing/2014/main" id="{BFED02B5-6D48-069C-FC79-344E0086571D}"/>
+              </a:ext>
+            </a:extLst>
+          </p:cNvPr>
+          <p:cNvCxnSpPr>
+            <a:cxnSpLocks/>
+            <a:stCxn id="25" idx="1"/>
+            <a:endCxn id="23" idx="3"/>
+          </p:cNvCxnSpPr>
+          <p:nvPr/>
+        </p:nvCxnSpPr>
+        <p:spPr>
+          <a:xfrm flipH="1">
+            <a:off x="6393371" y="2271776"/>
+            <a:ext cx="2204962" cy="0"/>
+          </a:xfrm>
+          <a:prstGeom prst="straightConnector1">
+            <a:avLst/>
+          </a:prstGeom>
+          <a:ln w="57150">
+            <a:solidFill>
+              <a:srgbClr val="FFD7A7"/>
+            </a:solidFill>
+            <a:tailEnd type="triangle"/>
+          </a:ln>
+        </p:spPr>
+        <p:style>
+          <a:lnRef idx="1">
+            <a:schemeClr val="accent1"/>
+          </a:lnRef>
+          <a:fillRef idx="0">
+            <a:schemeClr val="accent1"/>
+          </a:fillRef>
+          <a:effectRef idx="0">
+            <a:schemeClr val="accent1"/>
+          </a:effectRef>
+          <a:fontRef idx="minor">
+            <a:schemeClr val="tx1"/>
+          </a:fontRef>
+        </p:style>
+      </p:cxnSp>
+      <p:sp>
+        <p:nvSpPr>
+          <p:cNvPr id="2" name="Title 1">
+            <a:extLst>
+              <a:ext uri="{FF2B5EF4-FFF2-40B4-BE49-F238E27FC236}">
+                <a16:creationId xmlns:a16="http://schemas.microsoft.com/office/drawing/2014/main" id="{CE1845DF-D283-F866-995B-BC18362A6F77}"/>
+              </a:ext>
+            </a:extLst>
+          </p:cNvPr>
+          <p:cNvSpPr>
+            <a:spLocks noGrp="1"/>
+          </p:cNvSpPr>
+          <p:nvPr>
+            <p:ph type="title"/>
+          </p:nvPr>
+        </p:nvSpPr>
+        <p:spPr>
+          <a:xfrm>
+            <a:off x="838200" y="-120067"/>
+            <a:ext cx="10515600" cy="1325563"/>
+          </a:xfrm>
+        </p:spPr>
+        <p:txBody>
+          <a:bodyPr>
+            <a:normAutofit/>
+          </a:bodyPr>
+          <a:lstStyle/>
+          <a:p>
+            <a:r>
+              <a:rPr lang="de-DE" sz="3200" dirty="0" err="1"/>
+              <a:t>Hierarchical</a:t>
+            </a:r>
+            <a:r>
+              <a:rPr lang="de-DE" sz="3200" dirty="0"/>
+              <a:t> </a:t>
+            </a:r>
+            <a:r>
+              <a:rPr lang="de-DE" sz="3200" dirty="0" err="1"/>
+              <a:t>Gaussian</a:t>
+            </a:r>
+            <a:r>
+              <a:rPr lang="de-DE" sz="3200" dirty="0"/>
+              <a:t> Filter</a:t>
+            </a:r>
+            <a:endParaRPr lang="en-GB" sz="3200" dirty="0"/>
+          </a:p>
+        </p:txBody>
+      </p:sp>
+      <mc:AlternateContent xmlns:mc="http://schemas.openxmlformats.org/markup-compatibility/2006">
+        <mc:Choice xmlns:a14="http://schemas.microsoft.com/office/drawing/2010/main" Requires="a14">
+          <p:sp>
+            <p:nvSpPr>
+              <p:cNvPr id="34" name="Rounded Rectangle 8">
+                <a:extLst>
+                  <a:ext uri="{FF2B5EF4-FFF2-40B4-BE49-F238E27FC236}">
+                    <a16:creationId xmlns:a16="http://schemas.microsoft.com/office/drawing/2014/main" id="{0B501E44-96E5-9E2A-CC10-FCD1DF0897BD}"/>
+                  </a:ext>
+                </a:extLst>
+              </p:cNvPr>
+              <p:cNvSpPr/>
+              <p:nvPr/>
+            </p:nvSpPr>
+            <p:spPr>
+              <a:xfrm>
+                <a:off x="4478656" y="4992630"/>
+                <a:ext cx="3275144" cy="591553"/>
+              </a:xfrm>
+              <a:prstGeom prst="roundRect">
+                <a:avLst>
+                  <a:gd name="adj" fmla="val 5845"/>
+                </a:avLst>
+              </a:prstGeom>
+              <a:solidFill>
+                <a:srgbClr val="FFFDF7"/>
+              </a:solidFill>
+              <a:ln w="76200">
+                <a:solidFill>
+                  <a:schemeClr val="accent4">
+                    <a:lumMod val="20000"/>
+                    <a:lumOff val="80000"/>
+                  </a:schemeClr>
+                </a:solidFill>
+              </a:ln>
+            </p:spPr>
+            <p:style>
+              <a:lnRef idx="2">
+                <a:schemeClr val="accent1">
+                  <a:shade val="50000"/>
+                </a:schemeClr>
+              </a:lnRef>
+              <a:fillRef idx="1">
+                <a:schemeClr val="accent1"/>
+              </a:fillRef>
+              <a:effectRef idx="0">
+                <a:schemeClr val="accent1"/>
+              </a:effectRef>
+              <a:fontRef idx="minor">
+                <a:schemeClr val="lt1"/>
+              </a:fontRef>
+            </p:style>
+            <p:txBody>
+              <a:bodyPr rtlCol="0" anchor="ctr"/>
+              <a:lstStyle/>
+              <a:p>
+                <a14:m>
+                  <m:oMath xmlns:m="http://schemas.openxmlformats.org/officeDocument/2006/math">
+                    <m:sSub>
+                      <m:sSubPr>
+                        <m:ctrlPr>
+                          <a:rPr lang="de-AT" sz="1600" i="1" dirty="0" smtClean="0">
+                            <a:solidFill>
+                              <a:schemeClr val="tx1"/>
+                            </a:solidFill>
+                            <a:latin typeface="Cambria Math" panose="02040503050406030204" pitchFamily="18" charset="0"/>
+                          </a:rPr>
+                        </m:ctrlPr>
+                      </m:sSubPr>
+                      <m:e>
+                        <m:r>
+                          <a:rPr lang="de-AT" sz="1600" i="1" dirty="0" smtClean="0">
+                            <a:solidFill>
+                              <a:schemeClr val="tx1"/>
+                            </a:solidFill>
+                            <a:latin typeface="Cambria Math" panose="02040503050406030204" pitchFamily="18" charset="0"/>
+                            <a:ea typeface="Cambria Math" panose="02040503050406030204" pitchFamily="18" charset="0"/>
+                          </a:rPr>
+                          <m:t>𝛿</m:t>
+                        </m:r>
+                      </m:e>
+                      <m:sub>
+                        <m:r>
+                          <a:rPr lang="de-AT" sz="1600" b="0" i="1" dirty="0" smtClean="0">
+                            <a:solidFill>
+                              <a:schemeClr val="tx1"/>
+                            </a:solidFill>
+                            <a:latin typeface="Cambria Math" panose="02040503050406030204" pitchFamily="18" charset="0"/>
+                          </a:rPr>
+                          <m:t>2</m:t>
+                        </m:r>
+                      </m:sub>
+                    </m:sSub>
+                    <m:r>
+                      <a:rPr lang="de-AT" sz="1600" i="1" dirty="0">
+                        <a:solidFill>
+                          <a:schemeClr val="tx1"/>
+                        </a:solidFill>
+                        <a:latin typeface="Cambria Math" panose="02040503050406030204" pitchFamily="18" charset="0"/>
+                      </a:rPr>
+                      <m:t>=</m:t>
+                    </m:r>
+                  </m:oMath>
+                </a14:m>
+                <a:r>
+                  <a:rPr lang="en-GB" sz="1600" dirty="0">
+                    <a:solidFill>
+                      <a:schemeClr val="tx1"/>
+                    </a:solidFill>
+                    <a:latin typeface="Bahnschrift" panose="020B0502040204020203" pitchFamily="34" charset="0"/>
+                  </a:rPr>
+                  <a:t> volatility prediction error</a:t>
+                </a:r>
+                <a:endParaRPr lang="en-GB" dirty="0">
+                  <a:solidFill>
+                    <a:schemeClr val="tx1"/>
+                  </a:solidFill>
+                  <a:latin typeface="Bahnschrift" panose="020B0502040204020203" pitchFamily="34" charset="0"/>
+                </a:endParaRPr>
+              </a:p>
+            </p:txBody>
+          </p:sp>
+        </mc:Choice>
+        <mc:Fallback>
+          <p:sp>
+            <p:nvSpPr>
+              <p:cNvPr id="34" name="Rounded Rectangle 8">
+                <a:extLst>
+                  <a:ext uri="{FF2B5EF4-FFF2-40B4-BE49-F238E27FC236}">
+                    <a16:creationId xmlns:a16="http://schemas.microsoft.com/office/drawing/2014/main" id="{0B501E44-96E5-9E2A-CC10-FCD1DF0897BD}"/>
+                  </a:ext>
+                </a:extLst>
+              </p:cNvPr>
+              <p:cNvSpPr>
+                <a:spLocks noRot="1" noChangeAspect="1" noMove="1" noResize="1" noEditPoints="1" noAdjustHandles="1" noChangeArrowheads="1" noChangeShapeType="1" noTextEdit="1"/>
+              </p:cNvSpPr>
+              <p:nvPr/>
+            </p:nvSpPr>
+            <p:spPr>
+              <a:xfrm>
+                <a:off x="4478656" y="4992630"/>
+                <a:ext cx="3275144" cy="591553"/>
+              </a:xfrm>
+              <a:prstGeom prst="roundRect">
+                <a:avLst>
+                  <a:gd name="adj" fmla="val 5845"/>
+                </a:avLst>
+              </a:prstGeom>
+              <a:blipFill>
+                <a:blip r:embed="rId8"/>
+                <a:stretch>
+                  <a:fillRect/>
+                </a:stretch>
+              </a:blipFill>
+              <a:ln w="76200">
+                <a:solidFill>
+                  <a:schemeClr val="accent4">
+                    <a:lumMod val="20000"/>
+                    <a:lumOff val="80000"/>
+                  </a:schemeClr>
+                </a:solidFill>
+              </a:ln>
+            </p:spPr>
+            <p:txBody>
+              <a:bodyPr/>
+              <a:lstStyle/>
+              <a:p>
+                <a:r>
+                  <a:rPr lang="en-US">
+                    <a:noFill/>
+                  </a:rPr>
+                  <a:t> </a:t>
+                </a:r>
+              </a:p>
+            </p:txBody>
+          </p:sp>
+        </mc:Fallback>
+      </mc:AlternateContent>
+      <p:grpSp>
+        <p:nvGrpSpPr>
+          <p:cNvPr id="78" name="Gruppieren 77">
+            <a:extLst>
+              <a:ext uri="{FF2B5EF4-FFF2-40B4-BE49-F238E27FC236}">
+                <a16:creationId xmlns:a16="http://schemas.microsoft.com/office/drawing/2014/main" id="{B1F728F4-88A8-DED3-6FA0-B231059C86F3}"/>
+              </a:ext>
+            </a:extLst>
+          </p:cNvPr>
+          <p:cNvGrpSpPr/>
+          <p:nvPr/>
+        </p:nvGrpSpPr>
+        <p:grpSpPr>
+          <a:xfrm>
+            <a:off x="299799" y="1599799"/>
+            <a:ext cx="1973895" cy="909058"/>
+            <a:chOff x="299799" y="1599799"/>
+            <a:chExt cx="1973895" cy="909058"/>
+          </a:xfrm>
+        </p:grpSpPr>
+        <mc:AlternateContent xmlns:mc="http://schemas.openxmlformats.org/markup-compatibility/2006">
+          <mc:Choice xmlns:a14="http://schemas.microsoft.com/office/drawing/2010/main" Requires="a14">
+            <p:sp>
+              <p:nvSpPr>
+                <p:cNvPr id="6" name="Rounded Rectangle 5">
+                  <a:extLst>
+                    <a:ext uri="{FF2B5EF4-FFF2-40B4-BE49-F238E27FC236}">
+                      <a16:creationId xmlns:a16="http://schemas.microsoft.com/office/drawing/2014/main" id="{3C951CDE-04C3-0755-DF44-6B668B3C5F9A}"/>
+                    </a:ext>
+                  </a:extLst>
+                </p:cNvPr>
+                <p:cNvSpPr/>
+                <p:nvPr/>
+              </p:nvSpPr>
+              <p:spPr>
+                <a:xfrm>
+                  <a:off x="299799" y="1599799"/>
+                  <a:ext cx="1973895" cy="909058"/>
+                </a:xfrm>
+                <a:prstGeom prst="roundRect">
+                  <a:avLst>
+                    <a:gd name="adj" fmla="val 5845"/>
+                  </a:avLst>
+                </a:prstGeom>
+                <a:solidFill>
+                  <a:srgbClr val="FFFDF7"/>
+                </a:solidFill>
+                <a:ln w="76200">
+                  <a:solidFill>
+                    <a:schemeClr val="accent4">
+                      <a:lumMod val="20000"/>
+                      <a:lumOff val="80000"/>
+                    </a:schemeClr>
+                  </a:solidFill>
+                </a:ln>
+              </p:spPr>
+              <p:style>
+                <a:lnRef idx="2">
+                  <a:schemeClr val="accent1">
+                    <a:shade val="50000"/>
+                  </a:schemeClr>
+                </a:lnRef>
+                <a:fillRef idx="1">
+                  <a:schemeClr val="accent1"/>
+                </a:fillRef>
+                <a:effectRef idx="0">
+                  <a:schemeClr val="accent1"/>
+                </a:effectRef>
+                <a:fontRef idx="minor">
+                  <a:schemeClr val="lt1"/>
+                </a:fontRef>
+              </p:style>
+              <p:txBody>
+                <a:bodyPr rtlCol="0" anchor="t"/>
+                <a:lstStyle/>
+                <a:p>
+                  <a14:m>
+                    <m:oMath xmlns:m="http://schemas.openxmlformats.org/officeDocument/2006/math">
+                      <m:sSub>
+                        <m:sSubPr>
+                          <m:ctrlPr>
+                            <a:rPr lang="de-AT" sz="1600" i="1" dirty="0" smtClean="0">
+                              <a:solidFill>
+                                <a:schemeClr val="tx1"/>
+                              </a:solidFill>
+                              <a:latin typeface="Cambria Math" panose="02040503050406030204" pitchFamily="18" charset="0"/>
+                            </a:rPr>
+                          </m:ctrlPr>
+                        </m:sSubPr>
+                        <m:e>
+                          <m:r>
+                            <a:rPr lang="de-AT" sz="1600" b="0" i="1" dirty="0" smtClean="0">
+                              <a:solidFill>
+                                <a:schemeClr val="tx1"/>
+                              </a:solidFill>
+                              <a:latin typeface="Cambria Math" panose="02040503050406030204" pitchFamily="18" charset="0"/>
+                            </a:rPr>
+                            <m:t>𝑥</m:t>
+                          </m:r>
+                        </m:e>
+                        <m:sub>
+                          <m:r>
+                            <a:rPr lang="de-AT" sz="1600" b="0" i="1" dirty="0" smtClean="0">
+                              <a:solidFill>
+                                <a:schemeClr val="tx1"/>
+                              </a:solidFill>
+                              <a:latin typeface="Cambria Math" panose="02040503050406030204" pitchFamily="18" charset="0"/>
+                            </a:rPr>
+                            <m:t>1</m:t>
+                          </m:r>
+                        </m:sub>
+                      </m:sSub>
+                      <m:r>
+                        <a:rPr lang="de-AT" sz="1600" b="0" i="1" dirty="0" smtClean="0">
+                          <a:solidFill>
+                            <a:schemeClr val="tx1"/>
+                          </a:solidFill>
+                          <a:latin typeface="Cambria Math" panose="02040503050406030204" pitchFamily="18" charset="0"/>
+                        </a:rPr>
+                        <m:t>=</m:t>
+                      </m:r>
+                    </m:oMath>
+                  </a14:m>
+                  <a:r>
+                    <a:rPr lang="de-AT" sz="1600" dirty="0">
+                      <a:solidFill>
+                        <a:schemeClr val="tx1"/>
+                      </a:solidFill>
+                      <a:latin typeface="Bahnschrift" panose="020B0502040204020203" pitchFamily="34" charset="0"/>
+                    </a:rPr>
+                    <a:t> </a:t>
+                  </a:r>
+                  <a:r>
+                    <a:rPr lang="de-AT" sz="1600" dirty="0" err="1">
+                      <a:solidFill>
+                        <a:schemeClr val="tx1"/>
+                      </a:solidFill>
+                      <a:latin typeface="Bahnschrift" panose="020B0502040204020203" pitchFamily="34" charset="0"/>
+                    </a:rPr>
+                    <a:t>outcome</a:t>
+                  </a:r>
+                  <a:r>
+                    <a:rPr lang="de-AT" sz="1600" dirty="0">
+                      <a:solidFill>
+                        <a:schemeClr val="tx1"/>
+                      </a:solidFill>
+                      <a:latin typeface="Bahnschrift" panose="020B0502040204020203" pitchFamily="34" charset="0"/>
+                    </a:rPr>
+                    <a:t> </a:t>
+                  </a:r>
+                </a:p>
+                <a:p>
+                  <a:endParaRPr lang="en-GB" sz="1600" dirty="0">
+                    <a:solidFill>
+                      <a:schemeClr val="tx1"/>
+                    </a:solidFill>
+                    <a:latin typeface="Bahnschrift" panose="020B0502040204020203" pitchFamily="34" charset="0"/>
+                  </a:endParaRPr>
+                </a:p>
+              </p:txBody>
+            </p:sp>
+          </mc:Choice>
+          <mc:Fallback>
+            <p:sp>
+              <p:nvSpPr>
+                <p:cNvPr id="6" name="Rounded Rectangle 5">
+                  <a:extLst>
+                    <a:ext uri="{FF2B5EF4-FFF2-40B4-BE49-F238E27FC236}">
+                      <a16:creationId xmlns:a16="http://schemas.microsoft.com/office/drawing/2014/main" id="{3C951CDE-04C3-0755-DF44-6B668B3C5F9A}"/>
+                    </a:ext>
+                  </a:extLst>
+                </p:cNvPr>
+                <p:cNvSpPr>
+                  <a:spLocks noRot="1" noChangeAspect="1" noMove="1" noResize="1" noEditPoints="1" noAdjustHandles="1" noChangeArrowheads="1" noChangeShapeType="1" noTextEdit="1"/>
+                </p:cNvSpPr>
+                <p:nvPr/>
+              </p:nvSpPr>
+              <p:spPr>
+                <a:xfrm>
+                  <a:off x="299799" y="1599799"/>
+                  <a:ext cx="1973895" cy="909058"/>
+                </a:xfrm>
+                <a:prstGeom prst="roundRect">
+                  <a:avLst>
+                    <a:gd name="adj" fmla="val 5845"/>
+                  </a:avLst>
+                </a:prstGeom>
+                <a:blipFill>
+                  <a:blip r:embed="rId9"/>
+                  <a:stretch>
+                    <a:fillRect/>
+                  </a:stretch>
+                </a:blipFill>
+                <a:ln w="76200">
+                  <a:solidFill>
+                    <a:schemeClr val="accent4">
+                      <a:lumMod val="20000"/>
+                      <a:lumOff val="80000"/>
+                    </a:schemeClr>
+                  </a:solidFill>
+                </a:ln>
+              </p:spPr>
+              <p:txBody>
+                <a:bodyPr/>
+                <a:lstStyle/>
+                <a:p>
+                  <a:r>
+                    <a:rPr lang="en-US">
+                      <a:noFill/>
+                    </a:rPr>
+                    <a:t> </a:t>
+                  </a:r>
+                </a:p>
+              </p:txBody>
+            </p:sp>
+          </mc:Fallback>
+        </mc:AlternateContent>
+        <p:pic>
+          <p:nvPicPr>
+            <p:cNvPr id="37" name="Grafik 36" descr="Sparschwein mit einfarbiger Füllung">
+              <a:extLst>
+                <a:ext uri="{FF2B5EF4-FFF2-40B4-BE49-F238E27FC236}">
+                  <a16:creationId xmlns:a16="http://schemas.microsoft.com/office/drawing/2014/main" id="{D1CDCF84-9192-1490-C531-5A7E39E86536}"/>
+                </a:ext>
+              </a:extLst>
+            </p:cNvPr>
+            <p:cNvPicPr>
+              <a:picLocks noChangeAspect="1"/>
+            </p:cNvPicPr>
+            <p:nvPr/>
+          </p:nvPicPr>
+          <p:blipFill>
+            <a:blip>
+              <a:extLst>
+                <a:ext uri="{96DAC541-7B7A-43D3-8B79-37D633B846F1}">
+                  <asvg:svgBlip xmlns:asvg="http://schemas.microsoft.com/office/drawing/2016/SVG/main" r:embed="rId10"/>
+                </a:ext>
+              </a:extLst>
+            </a:blip>
+            <a:stretch>
+              <a:fillRect/>
+            </a:stretch>
+          </p:blipFill>
+          <p:spPr>
+            <a:xfrm>
+              <a:off x="372192" y="2055000"/>
+              <a:ext cx="360000" cy="360000"/>
+            </a:xfrm>
+            <a:prstGeom prst="rect">
+              <a:avLst/>
+            </a:prstGeom>
+          </p:spPr>
+        </p:pic>
+        <p:pic>
+          <p:nvPicPr>
+            <p:cNvPr id="39" name="Grafik 38" descr="Verbotsschild mit einfarbiger Füllung">
+              <a:extLst>
+                <a:ext uri="{FF2B5EF4-FFF2-40B4-BE49-F238E27FC236}">
+                  <a16:creationId xmlns:a16="http://schemas.microsoft.com/office/drawing/2014/main" id="{2F0A2DEC-39ED-EFBB-8FC1-A08F6E72CDEC}"/>
+                </a:ext>
+              </a:extLst>
+            </p:cNvPr>
+            <p:cNvPicPr>
+              <a:picLocks noChangeAspect="1"/>
+            </p:cNvPicPr>
+            <p:nvPr/>
+          </p:nvPicPr>
+          <p:blipFill>
+            <a:blip>
+              <a:extLst>
+                <a:ext uri="{96DAC541-7B7A-43D3-8B79-37D633B846F1}">
+                  <asvg:svgBlip xmlns:asvg="http://schemas.microsoft.com/office/drawing/2016/SVG/main" r:embed="rId11"/>
+                </a:ext>
+              </a:extLst>
+            </a:blip>
+            <a:stretch>
+              <a:fillRect/>
+            </a:stretch>
+          </p:blipFill>
+          <p:spPr>
+            <a:xfrm>
+              <a:off x="1329549" y="2055000"/>
+              <a:ext cx="360000" cy="360000"/>
+            </a:xfrm>
+            <a:prstGeom prst="rect">
+              <a:avLst/>
+            </a:prstGeom>
+          </p:spPr>
+        </p:pic>
+        <p:sp>
+          <p:nvSpPr>
+            <p:cNvPr id="40" name="Textfeld 39">
+              <a:extLst>
+                <a:ext uri="{FF2B5EF4-FFF2-40B4-BE49-F238E27FC236}">
+                  <a16:creationId xmlns:a16="http://schemas.microsoft.com/office/drawing/2014/main" id="{874625B8-B30A-9340-4D76-677D447EB3EB}"/>
+                </a:ext>
+              </a:extLst>
+            </p:cNvPr>
+            <p:cNvSpPr txBox="1"/>
+            <p:nvPr/>
+          </p:nvSpPr>
+          <p:spPr>
+            <a:xfrm>
+              <a:off x="732192" y="2054328"/>
+              <a:ext cx="1482322" cy="369332"/>
+            </a:xfrm>
+            <a:prstGeom prst="rect">
+              <a:avLst/>
+            </a:prstGeom>
+            <a:noFill/>
+          </p:spPr>
+          <p:txBody>
+            <a:bodyPr wrap="square" rtlCol="0">
+              <a:spAutoFit/>
+            </a:bodyPr>
+            <a:lstStyle/>
+            <a:p>
+              <a:r>
+                <a:rPr lang="de-AT" dirty="0">
+                  <a:latin typeface="Bahnschrift" panose="020B0502040204020203" pitchFamily="34" charset="0"/>
+                </a:rPr>
+                <a:t>= 1            = 0</a:t>
+              </a:r>
+              <a:endParaRPr lang="en-US" dirty="0">
+                <a:latin typeface="Bahnschrift" panose="020B0502040204020203" pitchFamily="34" charset="0"/>
+              </a:endParaRPr>
+            </a:p>
+          </p:txBody>
+        </p:sp>
+      </p:grpSp>
+      <p:cxnSp>
+        <p:nvCxnSpPr>
+          <p:cNvPr id="46" name="Gerade Verbindung mit Pfeil 45">
+            <a:extLst>
+              <a:ext uri="{FF2B5EF4-FFF2-40B4-BE49-F238E27FC236}">
+                <a16:creationId xmlns:a16="http://schemas.microsoft.com/office/drawing/2014/main" id="{AA111B18-30BF-37B3-37FA-18D9C0B8B066}"/>
+              </a:ext>
+            </a:extLst>
+          </p:cNvPr>
+          <p:cNvCxnSpPr>
+            <a:cxnSpLocks/>
+          </p:cNvCxnSpPr>
+          <p:nvPr/>
+        </p:nvCxnSpPr>
+        <p:spPr>
+          <a:xfrm flipV="1">
+            <a:off x="2996526" y="4018590"/>
+            <a:ext cx="1482130" cy="1140366"/>
+          </a:xfrm>
+          <a:prstGeom prst="straightConnector1">
+            <a:avLst/>
+          </a:prstGeom>
+          <a:ln w="57150">
+            <a:solidFill>
+              <a:srgbClr val="FFD7A7"/>
+            </a:solidFill>
+            <a:tailEnd type="triangle"/>
+          </a:ln>
+          <a:effectLst>
+            <a:innerShdw>
+              <a:prstClr val="black"/>
+            </a:innerShdw>
+          </a:effectLst>
+        </p:spPr>
+        <p:style>
+          <a:lnRef idx="1">
+            <a:schemeClr val="accent1"/>
+          </a:lnRef>
+          <a:fillRef idx="0">
+            <a:schemeClr val="accent1"/>
+          </a:fillRef>
+          <a:effectRef idx="0">
+            <a:schemeClr val="accent1"/>
+          </a:effectRef>
+          <a:fontRef idx="minor">
+            <a:schemeClr val="tx1"/>
+          </a:fontRef>
+        </p:style>
+      </p:cxnSp>
+      <p:cxnSp>
+        <p:nvCxnSpPr>
+          <p:cNvPr id="49" name="Gerade Verbindung mit Pfeil 48">
+            <a:extLst>
+              <a:ext uri="{FF2B5EF4-FFF2-40B4-BE49-F238E27FC236}">
+                <a16:creationId xmlns:a16="http://schemas.microsoft.com/office/drawing/2014/main" id="{84E495BB-7919-ACC3-6B5B-0C4C8184FE65}"/>
+              </a:ext>
+            </a:extLst>
+          </p:cNvPr>
+          <p:cNvCxnSpPr>
+            <a:cxnSpLocks/>
+            <a:stCxn id="21" idx="1"/>
+            <a:endCxn id="17" idx="3"/>
+          </p:cNvCxnSpPr>
+          <p:nvPr/>
+        </p:nvCxnSpPr>
+        <p:spPr>
+          <a:xfrm flipH="1" flipV="1">
+            <a:off x="7760127" y="4491407"/>
+            <a:ext cx="845523" cy="2602"/>
+          </a:xfrm>
+          <a:prstGeom prst="straightConnector1">
+            <a:avLst/>
+          </a:prstGeom>
+          <a:ln w="57150">
+            <a:solidFill>
+              <a:srgbClr val="FFD7A7"/>
+            </a:solidFill>
+            <a:tailEnd type="triangle"/>
+          </a:ln>
+          <a:effectLst>
+            <a:innerShdw>
+              <a:prstClr val="black"/>
+            </a:innerShdw>
+          </a:effectLst>
+        </p:spPr>
+        <p:style>
+          <a:lnRef idx="1">
+            <a:schemeClr val="accent1"/>
+          </a:lnRef>
+          <a:fillRef idx="0">
+            <a:schemeClr val="accent1"/>
+          </a:fillRef>
+          <a:effectRef idx="0">
+            <a:schemeClr val="accent1"/>
+          </a:effectRef>
+          <a:fontRef idx="minor">
+            <a:schemeClr val="tx1"/>
+          </a:fontRef>
+        </p:style>
+      </p:cxnSp>
+      <p:cxnSp>
+        <p:nvCxnSpPr>
+          <p:cNvPr id="53" name="Gerade Verbindung mit Pfeil 52">
+            <a:extLst>
+              <a:ext uri="{FF2B5EF4-FFF2-40B4-BE49-F238E27FC236}">
+                <a16:creationId xmlns:a16="http://schemas.microsoft.com/office/drawing/2014/main" id="{238EBEA5-A74E-D7A3-1181-C6529F2EBE48}"/>
+              </a:ext>
+            </a:extLst>
+          </p:cNvPr>
+          <p:cNvCxnSpPr>
+            <a:cxnSpLocks/>
+          </p:cNvCxnSpPr>
+          <p:nvPr/>
+        </p:nvCxnSpPr>
+        <p:spPr>
+          <a:xfrm flipV="1">
+            <a:off x="7753800" y="4879142"/>
+            <a:ext cx="917167" cy="490141"/>
+          </a:xfrm>
+          <a:prstGeom prst="straightConnector1">
+            <a:avLst/>
+          </a:prstGeom>
+          <a:ln w="57150">
+            <a:solidFill>
+              <a:srgbClr val="FFD7A7"/>
+            </a:solidFill>
+            <a:tailEnd type="triangle"/>
+          </a:ln>
+          <a:effectLst>
+            <a:innerShdw>
+              <a:prstClr val="black"/>
+            </a:innerShdw>
+          </a:effectLst>
+        </p:spPr>
+        <p:style>
+          <a:lnRef idx="1">
+            <a:schemeClr val="accent1"/>
+          </a:lnRef>
+          <a:fillRef idx="0">
+            <a:schemeClr val="accent1"/>
+          </a:fillRef>
+          <a:effectRef idx="0">
+            <a:schemeClr val="accent1"/>
+          </a:effectRef>
+          <a:fontRef idx="minor">
+            <a:schemeClr val="tx1"/>
+          </a:fontRef>
+        </p:style>
+      </p:cxnSp>
+      <p:cxnSp>
+        <p:nvCxnSpPr>
+          <p:cNvPr id="57" name="Gerade Verbindung mit Pfeil 56">
+            <a:extLst>
+              <a:ext uri="{FF2B5EF4-FFF2-40B4-BE49-F238E27FC236}">
+                <a16:creationId xmlns:a16="http://schemas.microsoft.com/office/drawing/2014/main" id="{7FB5DBC8-B86E-EA87-06D0-EB01A375ED18}"/>
+              </a:ext>
+            </a:extLst>
+          </p:cNvPr>
+          <p:cNvCxnSpPr>
+            <a:cxnSpLocks/>
+          </p:cNvCxnSpPr>
+          <p:nvPr/>
+        </p:nvCxnSpPr>
+        <p:spPr>
+          <a:xfrm flipV="1">
+            <a:off x="6040073" y="3961515"/>
+            <a:ext cx="0" cy="251733"/>
+          </a:xfrm>
+          <a:prstGeom prst="straightConnector1">
+            <a:avLst/>
+          </a:prstGeom>
+          <a:ln w="57150">
+            <a:solidFill>
+              <a:srgbClr val="FFD7A7"/>
+            </a:solidFill>
+            <a:tailEnd type="triangle"/>
+          </a:ln>
+          <a:effectLst>
+            <a:innerShdw>
+              <a:prstClr val="black"/>
+            </a:innerShdw>
+          </a:effectLst>
+        </p:spPr>
+        <p:style>
+          <a:lnRef idx="1">
+            <a:schemeClr val="accent1"/>
+          </a:lnRef>
+          <a:fillRef idx="0">
+            <a:schemeClr val="accent1"/>
+          </a:fillRef>
+          <a:effectRef idx="0">
+            <a:schemeClr val="accent1"/>
+          </a:effectRef>
+          <a:fontRef idx="minor">
+            <a:schemeClr val="tx1"/>
+          </a:fontRef>
+        </p:style>
+      </p:cxnSp>
+      <p:cxnSp>
+        <p:nvCxnSpPr>
+          <p:cNvPr id="61" name="Gerade Verbindung mit Pfeil 60">
+            <a:extLst>
+              <a:ext uri="{FF2B5EF4-FFF2-40B4-BE49-F238E27FC236}">
+                <a16:creationId xmlns:a16="http://schemas.microsoft.com/office/drawing/2014/main" id="{9FB97A4B-3771-CDAE-78C0-E98058E6BB50}"/>
+              </a:ext>
+            </a:extLst>
+          </p:cNvPr>
+          <p:cNvCxnSpPr>
+            <a:cxnSpLocks/>
+          </p:cNvCxnSpPr>
+          <p:nvPr/>
+        </p:nvCxnSpPr>
+        <p:spPr>
+          <a:xfrm>
+            <a:off x="3011807" y="5130133"/>
+            <a:ext cx="1466849" cy="0"/>
+          </a:xfrm>
+          <a:prstGeom prst="straightConnector1">
+            <a:avLst/>
+          </a:prstGeom>
+          <a:ln w="57150">
+            <a:solidFill>
+              <a:srgbClr val="FFD7A7"/>
+            </a:solidFill>
+            <a:prstDash val="sysDash"/>
+            <a:tailEnd type="triangle"/>
+          </a:ln>
+          <a:effectLst>
+            <a:innerShdw>
+              <a:prstClr val="black"/>
+            </a:innerShdw>
+          </a:effectLst>
+        </p:spPr>
+        <p:style>
+          <a:lnRef idx="1">
+            <a:schemeClr val="accent1"/>
+          </a:lnRef>
+          <a:fillRef idx="0">
+            <a:schemeClr val="accent1"/>
+          </a:fillRef>
+          <a:effectRef idx="0">
+            <a:schemeClr val="accent1"/>
+          </a:effectRef>
+          <a:fontRef idx="minor">
+            <a:schemeClr val="tx1"/>
+          </a:fontRef>
+        </p:style>
+      </p:cxnSp>
+      <p:cxnSp>
+        <p:nvCxnSpPr>
+          <p:cNvPr id="64" name="Gerade Verbindung mit Pfeil 63">
+            <a:extLst>
+              <a:ext uri="{FF2B5EF4-FFF2-40B4-BE49-F238E27FC236}">
+                <a16:creationId xmlns:a16="http://schemas.microsoft.com/office/drawing/2014/main" id="{6F18FC9D-99F9-4D22-9C1E-B269ECDB5332}"/>
+              </a:ext>
+            </a:extLst>
+          </p:cNvPr>
+          <p:cNvCxnSpPr>
+            <a:cxnSpLocks/>
+          </p:cNvCxnSpPr>
+          <p:nvPr/>
+        </p:nvCxnSpPr>
+        <p:spPr>
+          <a:xfrm>
+            <a:off x="552192" y="2508856"/>
+            <a:ext cx="0" cy="2148869"/>
+          </a:xfrm>
+          <a:prstGeom prst="straightConnector1">
+            <a:avLst/>
+          </a:prstGeom>
+          <a:ln w="57150">
+            <a:solidFill>
+              <a:srgbClr val="FFD7A7"/>
+            </a:solidFill>
+            <a:tailEnd type="triangle"/>
+          </a:ln>
+        </p:spPr>
+        <p:style>
+          <a:lnRef idx="1">
+            <a:schemeClr val="accent1"/>
+          </a:lnRef>
+          <a:fillRef idx="0">
+            <a:schemeClr val="accent1"/>
+          </a:fillRef>
+          <a:effectRef idx="0">
+            <a:schemeClr val="accent1"/>
+          </a:effectRef>
+          <a:fontRef idx="minor">
+            <a:schemeClr val="tx1"/>
+          </a:fontRef>
+        </p:style>
+      </p:cxnSp>
+      <mc:AlternateContent xmlns:mc="http://schemas.openxmlformats.org/markup-compatibility/2006">
+        <mc:Choice xmlns:a14="http://schemas.microsoft.com/office/drawing/2010/main" Requires="a14">
+          <p:sp>
+            <p:nvSpPr>
+              <p:cNvPr id="4" name="Rounded Rectangle 8">
+                <a:extLst>
+                  <a:ext uri="{FF2B5EF4-FFF2-40B4-BE49-F238E27FC236}">
+                    <a16:creationId xmlns:a16="http://schemas.microsoft.com/office/drawing/2014/main" id="{637CDFD7-F231-D0C0-9BE2-8983DF8F9B90}"/>
+                  </a:ext>
+                </a:extLst>
+              </p:cNvPr>
+              <p:cNvSpPr/>
+              <p:nvPr/>
+            </p:nvSpPr>
+            <p:spPr>
+              <a:xfrm>
+                <a:off x="319526" y="3453258"/>
+                <a:ext cx="3182799" cy="770400"/>
+              </a:xfrm>
+              <a:prstGeom prst="roundRect">
+                <a:avLst>
+                  <a:gd name="adj" fmla="val 5845"/>
+                </a:avLst>
+              </a:prstGeom>
+              <a:solidFill>
+                <a:srgbClr val="FFFDF7"/>
+              </a:solidFill>
+              <a:ln w="76200">
+                <a:solidFill>
+                  <a:schemeClr val="accent4">
+                    <a:lumMod val="20000"/>
+                    <a:lumOff val="80000"/>
+                  </a:schemeClr>
+                </a:solidFill>
+              </a:ln>
+              <a:effectLst>
+                <a:outerShdw blurRad="63500" sx="102000" sy="102000" algn="ctr" rotWithShape="0">
+                  <a:prstClr val="black">
+                    <a:alpha val="40000"/>
+                  </a:prstClr>
+                </a:outerShdw>
+              </a:effectLst>
+            </p:spPr>
+            <p:style>
+              <a:lnRef idx="2">
+                <a:schemeClr val="accent1">
+                  <a:shade val="50000"/>
+                </a:schemeClr>
+              </a:lnRef>
+              <a:fillRef idx="1">
+                <a:schemeClr val="accent1"/>
+              </a:fillRef>
+              <a:effectRef idx="0">
+                <a:schemeClr val="accent1"/>
+              </a:effectRef>
+              <a:fontRef idx="minor">
+                <a:schemeClr val="lt1"/>
+              </a:fontRef>
+            </p:style>
+            <p:txBody>
+              <a:bodyPr rtlCol="0" anchor="ctr"/>
+              <a:lstStyle/>
+              <a:p>
+                <a14:m>
+                  <m:oMath xmlns:m="http://schemas.openxmlformats.org/officeDocument/2006/math">
+                    <m:sSub>
+                      <m:sSubPr>
+                        <m:ctrlPr>
+                          <a:rPr lang="de-AT" sz="1600" i="1" dirty="0" smtClean="0">
+                            <a:solidFill>
+                              <a:schemeClr val="tx1"/>
+                            </a:solidFill>
+                            <a:latin typeface="Cambria Math" panose="02040503050406030204" pitchFamily="18" charset="0"/>
+                          </a:rPr>
+                        </m:ctrlPr>
+                      </m:sSubPr>
+                      <m:e>
+                        <m:r>
+                          <a:rPr lang="de-AT" sz="1600" i="1" dirty="0">
+                            <a:solidFill>
+                              <a:schemeClr val="tx1"/>
+                            </a:solidFill>
+                            <a:latin typeface="Cambria Math" panose="02040503050406030204" pitchFamily="18" charset="0"/>
+                            <a:ea typeface="Cambria Math" panose="02040503050406030204" pitchFamily="18" charset="0"/>
+                          </a:rPr>
+                          <m:t>𝜇</m:t>
+                        </m:r>
+                      </m:e>
+                      <m:sub>
+                        <m:r>
+                          <a:rPr lang="de-AT" sz="1600" i="1" dirty="0">
+                            <a:solidFill>
+                              <a:schemeClr val="tx1"/>
+                            </a:solidFill>
+                            <a:latin typeface="Cambria Math" panose="02040503050406030204" pitchFamily="18" charset="0"/>
+                          </a:rPr>
+                          <m:t>1</m:t>
+                        </m:r>
+                      </m:sub>
+                    </m:sSub>
+                    <m:r>
+                      <a:rPr lang="de-AT" sz="1600" i="1" dirty="0">
+                        <a:solidFill>
+                          <a:schemeClr val="tx1"/>
+                        </a:solidFill>
+                        <a:latin typeface="Cambria Math" panose="02040503050406030204" pitchFamily="18" charset="0"/>
+                      </a:rPr>
+                      <m:t>=</m:t>
+                    </m:r>
+                  </m:oMath>
+                </a14:m>
+                <a:r>
+                  <a:rPr lang="en-GB" sz="1600" dirty="0">
+                    <a:solidFill>
+                      <a:schemeClr val="tx1"/>
+                    </a:solidFill>
+                    <a:latin typeface="Bahnschrift" panose="020B0502040204020203" pitchFamily="34" charset="0"/>
+                  </a:rPr>
+                  <a:t> belief about </a:t>
+                </a:r>
+                <a:r>
+                  <a:rPr lang="en-GB" sz="1600" b="1" dirty="0">
+                    <a:solidFill>
+                      <a:schemeClr val="tx1"/>
+                    </a:solidFill>
+                    <a:latin typeface="Bahnschrift" panose="020B0502040204020203" pitchFamily="34" charset="0"/>
+                  </a:rPr>
+                  <a:t>outcome</a:t>
+                </a:r>
+              </a:p>
+              <a:p>
+                <a:r>
+                  <a:rPr lang="en-GB" sz="1600" dirty="0">
+                    <a:solidFill>
+                      <a:schemeClr val="tx1"/>
+                    </a:solidFill>
+                    <a:latin typeface="Bahnschrift" panose="020B0502040204020203" pitchFamily="34" charset="0"/>
+                  </a:rPr>
+                  <a:t>            </a:t>
+                </a:r>
+                <a14:m>
+                  <m:oMath xmlns:m="http://schemas.openxmlformats.org/officeDocument/2006/math">
+                    <m:r>
+                      <a:rPr lang="de-AT" sz="1600" b="0" i="0" dirty="0" smtClean="0">
+                        <a:solidFill>
+                          <a:schemeClr val="tx1"/>
+                        </a:solidFill>
+                        <a:latin typeface="Cambria Math" panose="02040503050406030204" pitchFamily="18" charset="0"/>
+                      </a:rPr>
+                      <m:t>{0&lt;</m:t>
+                    </m:r>
+                    <m:sSub>
+                      <m:sSubPr>
+                        <m:ctrlPr>
+                          <a:rPr lang="de-AT" sz="1600" i="1" dirty="0">
+                            <a:solidFill>
+                              <a:schemeClr val="tx1"/>
+                            </a:solidFill>
+                            <a:latin typeface="Cambria Math" panose="02040503050406030204" pitchFamily="18" charset="0"/>
+                          </a:rPr>
+                        </m:ctrlPr>
+                      </m:sSubPr>
+                      <m:e>
+                        <m:r>
+                          <a:rPr lang="de-AT" sz="1600" i="1" dirty="0">
+                            <a:solidFill>
+                              <a:schemeClr val="tx1"/>
+                            </a:solidFill>
+                            <a:latin typeface="Cambria Math" panose="02040503050406030204" pitchFamily="18" charset="0"/>
+                            <a:ea typeface="Cambria Math" panose="02040503050406030204" pitchFamily="18" charset="0"/>
+                          </a:rPr>
+                          <m:t>𝜇</m:t>
+                        </m:r>
+                      </m:e>
+                      <m:sub>
+                        <m:r>
+                          <a:rPr lang="de-AT" sz="1600" i="1" dirty="0">
+                            <a:solidFill>
+                              <a:schemeClr val="tx1"/>
+                            </a:solidFill>
+                            <a:latin typeface="Cambria Math" panose="02040503050406030204" pitchFamily="18" charset="0"/>
+                          </a:rPr>
+                          <m:t>1</m:t>
+                        </m:r>
+                      </m:sub>
+                    </m:sSub>
+                    <m:r>
+                      <a:rPr lang="de-AT" sz="1600" b="0" i="1" dirty="0" smtClean="0">
+                        <a:solidFill>
+                          <a:schemeClr val="tx1"/>
+                        </a:solidFill>
+                        <a:latin typeface="Cambria Math" panose="02040503050406030204" pitchFamily="18" charset="0"/>
+                      </a:rPr>
+                      <m:t>&lt;1}</m:t>
+                    </m:r>
+                  </m:oMath>
+                </a14:m>
+                <a:endParaRPr lang="en-GB" dirty="0">
+                  <a:solidFill>
+                    <a:schemeClr val="tx1"/>
+                  </a:solidFill>
+                  <a:latin typeface="Bahnschrift" panose="020B0502040204020203" pitchFamily="34" charset="0"/>
+                </a:endParaRPr>
+              </a:p>
+            </p:txBody>
+          </p:sp>
+        </mc:Choice>
+        <mc:Fallback>
+          <p:sp>
+            <p:nvSpPr>
+              <p:cNvPr id="4" name="Rounded Rectangle 8">
+                <a:extLst>
+                  <a:ext uri="{FF2B5EF4-FFF2-40B4-BE49-F238E27FC236}">
+                    <a16:creationId xmlns:a16="http://schemas.microsoft.com/office/drawing/2014/main" id="{637CDFD7-F231-D0C0-9BE2-8983DF8F9B90}"/>
+                  </a:ext>
+                </a:extLst>
+              </p:cNvPr>
+              <p:cNvSpPr>
+                <a:spLocks noRot="1" noChangeAspect="1" noMove="1" noResize="1" noEditPoints="1" noAdjustHandles="1" noChangeArrowheads="1" noChangeShapeType="1" noTextEdit="1"/>
+              </p:cNvSpPr>
+              <p:nvPr/>
+            </p:nvSpPr>
+            <p:spPr>
+              <a:xfrm>
+                <a:off x="319526" y="3453258"/>
+                <a:ext cx="3182799" cy="770400"/>
+              </a:xfrm>
+              <a:prstGeom prst="roundRect">
+                <a:avLst>
+                  <a:gd name="adj" fmla="val 5845"/>
+                </a:avLst>
+              </a:prstGeom>
+              <a:blipFill>
+                <a:blip r:embed="rId12"/>
+                <a:stretch>
+                  <a:fillRect/>
+                </a:stretch>
+              </a:blipFill>
+              <a:ln w="76200">
+                <a:solidFill>
+                  <a:schemeClr val="accent4">
+                    <a:lumMod val="20000"/>
+                    <a:lumOff val="80000"/>
+                  </a:schemeClr>
+                </a:solidFill>
+              </a:ln>
+              <a:effectLst>
+                <a:outerShdw blurRad="63500" sx="102000" sy="102000" algn="ctr" rotWithShape="0">
+                  <a:prstClr val="black">
+                    <a:alpha val="40000"/>
+                  </a:prstClr>
+                </a:outerShdw>
+              </a:effectLst>
+            </p:spPr>
+            <p:txBody>
+              <a:bodyPr/>
+              <a:lstStyle/>
+              <a:p>
+                <a:r>
+                  <a:rPr lang="en-US">
+                    <a:noFill/>
+                  </a:rPr>
+                  <a:t> </a:t>
+                </a:r>
+              </a:p>
+            </p:txBody>
+          </p:sp>
+        </mc:Fallback>
+      </mc:AlternateContent>
+      <p:cxnSp>
+        <p:nvCxnSpPr>
+          <p:cNvPr id="41" name="Gerade Verbindung mit Pfeil 40">
+            <a:extLst>
+              <a:ext uri="{FF2B5EF4-FFF2-40B4-BE49-F238E27FC236}">
+                <a16:creationId xmlns:a16="http://schemas.microsoft.com/office/drawing/2014/main" id="{23B5996E-424C-950D-D4E1-0F1E9D740BD4}"/>
+              </a:ext>
+            </a:extLst>
+          </p:cNvPr>
+          <p:cNvCxnSpPr>
+            <a:cxnSpLocks/>
+          </p:cNvCxnSpPr>
+          <p:nvPr/>
+        </p:nvCxnSpPr>
+        <p:spPr>
+          <a:xfrm flipH="1">
+            <a:off x="3502325" y="3838458"/>
+            <a:ext cx="917151" cy="0"/>
+          </a:xfrm>
+          <a:prstGeom prst="straightConnector1">
+            <a:avLst/>
+          </a:prstGeom>
+          <a:ln w="57150">
+            <a:solidFill>
+              <a:srgbClr val="FFD7A7"/>
+            </a:solidFill>
+            <a:tailEnd type="triangle"/>
+          </a:ln>
+          <a:effectLst>
+            <a:innerShdw>
+              <a:prstClr val="black"/>
+            </a:innerShdw>
+          </a:effectLst>
+        </p:spPr>
+        <p:style>
+          <a:lnRef idx="1">
+            <a:schemeClr val="accent1"/>
+          </a:lnRef>
+          <a:fillRef idx="0">
+            <a:schemeClr val="accent1"/>
+          </a:fillRef>
+          <a:effectRef idx="0">
+            <a:schemeClr val="accent1"/>
+          </a:effectRef>
+          <a:fontRef idx="minor">
+            <a:schemeClr val="tx1"/>
+          </a:fontRef>
+        </p:style>
+      </p:cxnSp>
+      <p:cxnSp>
+        <p:nvCxnSpPr>
+          <p:cNvPr id="66" name="Gerade Verbindung mit Pfeil 65">
+            <a:extLst>
+              <a:ext uri="{FF2B5EF4-FFF2-40B4-BE49-F238E27FC236}">
+                <a16:creationId xmlns:a16="http://schemas.microsoft.com/office/drawing/2014/main" id="{3E945AC5-0655-143B-DB87-E307C2591405}"/>
+              </a:ext>
+            </a:extLst>
+          </p:cNvPr>
+          <p:cNvCxnSpPr>
+            <a:cxnSpLocks/>
+          </p:cNvCxnSpPr>
+          <p:nvPr/>
+        </p:nvCxnSpPr>
+        <p:spPr>
+          <a:xfrm>
+            <a:off x="1081699" y="4192505"/>
+            <a:ext cx="0" cy="505509"/>
+          </a:xfrm>
+          <a:prstGeom prst="straightConnector1">
+            <a:avLst/>
+          </a:prstGeom>
+          <a:ln w="57150">
+            <a:solidFill>
+              <a:srgbClr val="FFD7A7"/>
+            </a:solidFill>
+            <a:tailEnd type="triangle"/>
+          </a:ln>
+        </p:spPr>
+        <p:style>
+          <a:lnRef idx="1">
+            <a:schemeClr val="accent1"/>
+          </a:lnRef>
+          <a:fillRef idx="0">
+            <a:schemeClr val="accent1"/>
+          </a:fillRef>
+          <a:effectRef idx="0">
+            <a:schemeClr val="accent1"/>
+          </a:effectRef>
+          <a:fontRef idx="minor">
+            <a:schemeClr val="tx1"/>
+          </a:fontRef>
+        </p:style>
+      </p:cxnSp>
+      <p:sp>
+        <p:nvSpPr>
+          <p:cNvPr id="70" name="Rectangle 1">
+            <a:extLst>
+              <a:ext uri="{FF2B5EF4-FFF2-40B4-BE49-F238E27FC236}">
+                <a16:creationId xmlns:a16="http://schemas.microsoft.com/office/drawing/2014/main" id="{DF5B3491-3224-51AF-48AF-9D10AAAE3CB5}"/>
+              </a:ext>
+            </a:extLst>
+          </p:cNvPr>
+          <p:cNvSpPr/>
+          <p:nvPr/>
+        </p:nvSpPr>
+        <p:spPr>
+          <a:xfrm>
+            <a:off x="-138932" y="1112140"/>
+            <a:ext cx="12191997" cy="325310"/>
+          </a:xfrm>
+          <a:prstGeom prst="rect">
+            <a:avLst/>
+          </a:prstGeom>
+          <a:noFill/>
+          <a:ln w="76200">
+            <a:noFill/>
+          </a:ln>
+        </p:spPr>
+        <p:style>
+          <a:lnRef idx="2">
+            <a:schemeClr val="accent1">
+              <a:shade val="50000"/>
+            </a:schemeClr>
+          </a:lnRef>
+          <a:fillRef idx="1">
+            <a:schemeClr val="accent1"/>
+          </a:fillRef>
+          <a:effectRef idx="0">
+            <a:schemeClr val="accent1"/>
+          </a:effectRef>
+          <a:fontRef idx="minor">
+            <a:schemeClr val="lt1"/>
+          </a:fontRef>
+        </p:style>
+        <p:txBody>
+          <a:bodyPr rtlCol="0" anchor="b"/>
+          <a:lstStyle/>
+          <a:p>
+            <a:pPr algn="ctr"/>
+            <a:r>
+              <a:rPr lang="en-GB" b="1" dirty="0">
+                <a:solidFill>
+                  <a:schemeClr val="tx1"/>
+                </a:solidFill>
+                <a:latin typeface="Bahnschrift" panose="020B0502040204020203" pitchFamily="34" charset="0"/>
+              </a:rPr>
+              <a:t>“Real World”</a:t>
+            </a:r>
+          </a:p>
+        </p:txBody>
+      </p:sp>
+      <p:cxnSp>
+        <p:nvCxnSpPr>
+          <p:cNvPr id="29" name="Gerade Verbindung mit Pfeil 28">
+            <a:extLst>
+              <a:ext uri="{FF2B5EF4-FFF2-40B4-BE49-F238E27FC236}">
+                <a16:creationId xmlns:a16="http://schemas.microsoft.com/office/drawing/2014/main" id="{BC611557-4595-CB84-8873-88DAA0552844}"/>
+              </a:ext>
+            </a:extLst>
+          </p:cNvPr>
+          <p:cNvCxnSpPr>
+            <a:cxnSpLocks/>
+          </p:cNvCxnSpPr>
+          <p:nvPr/>
+        </p:nvCxnSpPr>
+        <p:spPr>
+          <a:xfrm flipH="1">
+            <a:off x="2214514" y="2283584"/>
+            <a:ext cx="2204962" cy="0"/>
+          </a:xfrm>
+          <a:prstGeom prst="straightConnector1">
+            <a:avLst/>
+          </a:prstGeom>
+          <a:ln w="57150">
+            <a:solidFill>
+              <a:srgbClr val="FFD7A7"/>
+            </a:solidFill>
+            <a:tailEnd type="triangle"/>
+          </a:ln>
+          <a:effectLst>
+            <a:innerShdw>
+              <a:prstClr val="black"/>
+            </a:innerShdw>
+          </a:effectLst>
+        </p:spPr>
+        <p:style>
+          <a:lnRef idx="1">
+            <a:schemeClr val="accent1"/>
+          </a:lnRef>
+          <a:fillRef idx="0">
+            <a:schemeClr val="accent1"/>
+          </a:fillRef>
+          <a:effectRef idx="0">
+            <a:schemeClr val="accent1"/>
+          </a:effectRef>
+          <a:fontRef idx="minor">
+            <a:schemeClr val="tx1"/>
+          </a:fontRef>
+        </p:style>
+      </p:cxnSp>
+    </p:spTree>
+    <p:extLst>
+      <p:ext uri="{BB962C8B-B14F-4D97-AF65-F5344CB8AC3E}">
+        <p14:creationId xmlns:p14="http://schemas.microsoft.com/office/powerpoint/2010/main" val="3069887207"/>
       </p:ext>
     </p:extLst>
   </p:cSld>
@@ -14398,14 +18280,1445 @@
   <p:timing>
     <p:tnLst>
       <p:par>
-        <p:cTn id="1" dur="indefinite" restart="never" nodeType="tmRoot"/>
+        <p:cTn id="1" dur="indefinite" restart="never" nodeType="tmRoot">
+          <p:childTnLst>
+            <p:seq concurrent="1" nextAc="seek">
+              <p:cTn id="2" dur="indefinite" nodeType="mainSeq">
+                <p:childTnLst>
+                  <p:par>
+                    <p:cTn id="3" fill="hold">
+                      <p:stCondLst>
+                        <p:cond delay="indefinite"/>
+                      </p:stCondLst>
+                      <p:childTnLst>
+                        <p:par>
+                          <p:cTn id="4" fill="hold">
+                            <p:stCondLst>
+                              <p:cond delay="0"/>
+                            </p:stCondLst>
+                            <p:childTnLst>
+                              <p:par>
+                                <p:cTn id="5" presetID="42" presetClass="path" presetSubtype="0" accel="50000" decel="50000" fill="hold" grpId="0" nodeType="clickEffect">
+                                  <p:stCondLst>
+                                    <p:cond delay="0"/>
+                                  </p:stCondLst>
+                                  <p:childTnLst>
+                                    <p:animMotion origin="layout" path="M -1.66667E-6 -2.59259E-6 L -0.00104 -0.07384 " pathEditMode="relative" rAng="0" ptsTypes="AA">
+                                      <p:cBhvr>
+                                        <p:cTn id="6" dur="500" fill="hold"/>
+                                        <p:tgtEl>
+                                          <p:spTgt spid="77"/>
+                                        </p:tgtEl>
+                                        <p:attrNameLst>
+                                          <p:attrName>ppt_x</p:attrName>
+                                          <p:attrName>ppt_y</p:attrName>
+                                        </p:attrNameLst>
+                                      </p:cBhvr>
+                                      <p:rCtr x="-52" y="-3704"/>
+                                    </p:animMotion>
+                                  </p:childTnLst>
+                                </p:cTn>
+                              </p:par>
+                            </p:childTnLst>
+                          </p:cTn>
+                        </p:par>
+                        <p:par>
+                          <p:cTn id="7" fill="hold">
+                            <p:stCondLst>
+                              <p:cond delay="500"/>
+                            </p:stCondLst>
+                            <p:childTnLst>
+                              <p:par>
+                                <p:cTn id="8" presetID="10" presetClass="entr" presetSubtype="0" fill="hold" grpId="0" nodeType="afterEffect">
+                                  <p:stCondLst>
+                                    <p:cond delay="0"/>
+                                  </p:stCondLst>
+                                  <p:childTnLst>
+                                    <p:set>
+                                      <p:cBhvr>
+                                        <p:cTn id="9" dur="1" fill="hold">
+                                          <p:stCondLst>
+                                            <p:cond delay="0"/>
+                                          </p:stCondLst>
+                                        </p:cTn>
+                                        <p:tgtEl>
+                                          <p:spTgt spid="2"/>
+                                        </p:tgtEl>
+                                        <p:attrNameLst>
+                                          <p:attrName>style.visibility</p:attrName>
+                                        </p:attrNameLst>
+                                      </p:cBhvr>
+                                      <p:to>
+                                        <p:strVal val="visible"/>
+                                      </p:to>
+                                    </p:set>
+                                    <p:animEffect transition="in" filter="fade">
+                                      <p:cBhvr>
+                                        <p:cTn id="10" dur="250"/>
+                                        <p:tgtEl>
+                                          <p:spTgt spid="2"/>
+                                        </p:tgtEl>
+                                      </p:cBhvr>
+                                    </p:animEffect>
+                                  </p:childTnLst>
+                                </p:cTn>
+                              </p:par>
+                            </p:childTnLst>
+                          </p:cTn>
+                        </p:par>
+                      </p:childTnLst>
+                    </p:cTn>
+                  </p:par>
+                  <p:par>
+                    <p:cTn id="11" fill="hold">
+                      <p:stCondLst>
+                        <p:cond delay="indefinite"/>
+                      </p:stCondLst>
+                      <p:childTnLst>
+                        <p:par>
+                          <p:cTn id="12" fill="hold">
+                            <p:stCondLst>
+                              <p:cond delay="0"/>
+                            </p:stCondLst>
+                            <p:childTnLst>
+                              <p:par>
+                                <p:cTn id="13" presetID="1" presetClass="entr" presetSubtype="0" fill="hold" nodeType="clickEffect">
+                                  <p:stCondLst>
+                                    <p:cond delay="0"/>
+                                  </p:stCondLst>
+                                  <p:childTnLst>
+                                    <p:set>
+                                      <p:cBhvr>
+                                        <p:cTn id="14" dur="1" fill="hold">
+                                          <p:stCondLst>
+                                            <p:cond delay="0"/>
+                                          </p:stCondLst>
+                                        </p:cTn>
+                                        <p:tgtEl>
+                                          <p:spTgt spid="78"/>
+                                        </p:tgtEl>
+                                        <p:attrNameLst>
+                                          <p:attrName>style.visibility</p:attrName>
+                                        </p:attrNameLst>
+                                      </p:cBhvr>
+                                      <p:to>
+                                        <p:strVal val="visible"/>
+                                      </p:to>
+                                    </p:set>
+                                  </p:childTnLst>
+                                </p:cTn>
+                              </p:par>
+                            </p:childTnLst>
+                          </p:cTn>
+                        </p:par>
+                      </p:childTnLst>
+                    </p:cTn>
+                  </p:par>
+                  <p:par>
+                    <p:cTn id="15" fill="hold">
+                      <p:stCondLst>
+                        <p:cond delay="indefinite"/>
+                      </p:stCondLst>
+                      <p:childTnLst>
+                        <p:par>
+                          <p:cTn id="16" fill="hold">
+                            <p:stCondLst>
+                              <p:cond delay="0"/>
+                            </p:stCondLst>
+                            <p:childTnLst>
+                              <p:par>
+                                <p:cTn id="17" presetID="1" presetClass="entr" presetSubtype="0" fill="hold" grpId="0" nodeType="clickEffect">
+                                  <p:stCondLst>
+                                    <p:cond delay="0"/>
+                                  </p:stCondLst>
+                                  <p:childTnLst>
+                                    <p:set>
+                                      <p:cBhvr>
+                                        <p:cTn id="18" dur="1" fill="hold">
+                                          <p:stCondLst>
+                                            <p:cond delay="0"/>
+                                          </p:stCondLst>
+                                        </p:cTn>
+                                        <p:tgtEl>
+                                          <p:spTgt spid="23"/>
+                                        </p:tgtEl>
+                                        <p:attrNameLst>
+                                          <p:attrName>style.visibility</p:attrName>
+                                        </p:attrNameLst>
+                                      </p:cBhvr>
+                                      <p:to>
+                                        <p:strVal val="visible"/>
+                                      </p:to>
+                                    </p:set>
+                                  </p:childTnLst>
+                                </p:cTn>
+                              </p:par>
+                            </p:childTnLst>
+                          </p:cTn>
+                        </p:par>
+                      </p:childTnLst>
+                    </p:cTn>
+                  </p:par>
+                  <p:par>
+                    <p:cTn id="19" fill="hold">
+                      <p:stCondLst>
+                        <p:cond delay="indefinite"/>
+                      </p:stCondLst>
+                      <p:childTnLst>
+                        <p:par>
+                          <p:cTn id="20" fill="hold">
+                            <p:stCondLst>
+                              <p:cond delay="0"/>
+                            </p:stCondLst>
+                            <p:childTnLst>
+                              <p:par>
+                                <p:cTn id="21" presetID="1" presetClass="entr" presetSubtype="0" fill="hold" grpId="0" nodeType="clickEffect">
+                                  <p:stCondLst>
+                                    <p:cond delay="0"/>
+                                  </p:stCondLst>
+                                  <p:childTnLst>
+                                    <p:set>
+                                      <p:cBhvr>
+                                        <p:cTn id="22" dur="1" fill="hold">
+                                          <p:stCondLst>
+                                            <p:cond delay="0"/>
+                                          </p:stCondLst>
+                                        </p:cTn>
+                                        <p:tgtEl>
+                                          <p:spTgt spid="25"/>
+                                        </p:tgtEl>
+                                        <p:attrNameLst>
+                                          <p:attrName>style.visibility</p:attrName>
+                                        </p:attrNameLst>
+                                      </p:cBhvr>
+                                      <p:to>
+                                        <p:strVal val="visible"/>
+                                      </p:to>
+                                    </p:set>
+                                  </p:childTnLst>
+                                </p:cTn>
+                              </p:par>
+                            </p:childTnLst>
+                          </p:cTn>
+                        </p:par>
+                      </p:childTnLst>
+                    </p:cTn>
+                  </p:par>
+                  <p:par>
+                    <p:cTn id="23" fill="hold">
+                      <p:stCondLst>
+                        <p:cond delay="indefinite"/>
+                      </p:stCondLst>
+                      <p:childTnLst>
+                        <p:par>
+                          <p:cTn id="24" fill="hold">
+                            <p:stCondLst>
+                              <p:cond delay="0"/>
+                            </p:stCondLst>
+                            <p:childTnLst>
+                              <p:par>
+                                <p:cTn id="25" presetID="1" presetClass="entr" presetSubtype="0" fill="hold" nodeType="clickEffect">
+                                  <p:stCondLst>
+                                    <p:cond delay="0"/>
+                                  </p:stCondLst>
+                                  <p:childTnLst>
+                                    <p:set>
+                                      <p:cBhvr>
+                                        <p:cTn id="26" dur="1" fill="hold">
+                                          <p:stCondLst>
+                                            <p:cond delay="0"/>
+                                          </p:stCondLst>
+                                        </p:cTn>
+                                        <p:tgtEl>
+                                          <p:spTgt spid="26"/>
+                                        </p:tgtEl>
+                                        <p:attrNameLst>
+                                          <p:attrName>style.visibility</p:attrName>
+                                        </p:attrNameLst>
+                                      </p:cBhvr>
+                                      <p:to>
+                                        <p:strVal val="visible"/>
+                                      </p:to>
+                                    </p:set>
+                                  </p:childTnLst>
+                                </p:cTn>
+                              </p:par>
+                            </p:childTnLst>
+                          </p:cTn>
+                        </p:par>
+                      </p:childTnLst>
+                    </p:cTn>
+                  </p:par>
+                  <p:par>
+                    <p:cTn id="27" fill="hold">
+                      <p:stCondLst>
+                        <p:cond delay="indefinite"/>
+                      </p:stCondLst>
+                      <p:childTnLst>
+                        <p:par>
+                          <p:cTn id="28" fill="hold">
+                            <p:stCondLst>
+                              <p:cond delay="0"/>
+                            </p:stCondLst>
+                            <p:childTnLst>
+                              <p:par>
+                                <p:cTn id="29" presetID="1" presetClass="entr" presetSubtype="0" fill="hold" nodeType="clickEffect">
+                                  <p:stCondLst>
+                                    <p:cond delay="0"/>
+                                  </p:stCondLst>
+                                  <p:childTnLst>
+                                    <p:set>
+                                      <p:cBhvr>
+                                        <p:cTn id="30" dur="1" fill="hold">
+                                          <p:stCondLst>
+                                            <p:cond delay="0"/>
+                                          </p:stCondLst>
+                                        </p:cTn>
+                                        <p:tgtEl>
+                                          <p:spTgt spid="29"/>
+                                        </p:tgtEl>
+                                        <p:attrNameLst>
+                                          <p:attrName>style.visibility</p:attrName>
+                                        </p:attrNameLst>
+                                      </p:cBhvr>
+                                      <p:to>
+                                        <p:strVal val="visible"/>
+                                      </p:to>
+                                    </p:set>
+                                  </p:childTnLst>
+                                </p:cTn>
+                              </p:par>
+                            </p:childTnLst>
+                          </p:cTn>
+                        </p:par>
+                      </p:childTnLst>
+                    </p:cTn>
+                  </p:par>
+                  <p:par>
+                    <p:cTn id="31" fill="hold">
+                      <p:stCondLst>
+                        <p:cond delay="indefinite"/>
+                      </p:stCondLst>
+                      <p:childTnLst>
+                        <p:par>
+                          <p:cTn id="32" fill="hold">
+                            <p:stCondLst>
+                              <p:cond delay="0"/>
+                            </p:stCondLst>
+                            <p:childTnLst>
+                              <p:par>
+                                <p:cTn id="33" presetID="10" presetClass="entr" presetSubtype="0" fill="hold" grpId="0" nodeType="clickEffect">
+                                  <p:stCondLst>
+                                    <p:cond delay="0"/>
+                                  </p:stCondLst>
+                                  <p:childTnLst>
+                                    <p:set>
+                                      <p:cBhvr>
+                                        <p:cTn id="34" dur="1" fill="hold">
+                                          <p:stCondLst>
+                                            <p:cond delay="0"/>
+                                          </p:stCondLst>
+                                        </p:cTn>
+                                        <p:tgtEl>
+                                          <p:spTgt spid="70"/>
+                                        </p:tgtEl>
+                                        <p:attrNameLst>
+                                          <p:attrName>style.visibility</p:attrName>
+                                        </p:attrNameLst>
+                                      </p:cBhvr>
+                                      <p:to>
+                                        <p:strVal val="visible"/>
+                                      </p:to>
+                                    </p:set>
+                                    <p:animEffect transition="in" filter="fade">
+                                      <p:cBhvr>
+                                        <p:cTn id="35" dur="500"/>
+                                        <p:tgtEl>
+                                          <p:spTgt spid="70"/>
+                                        </p:tgtEl>
+                                      </p:cBhvr>
+                                    </p:animEffect>
+                                  </p:childTnLst>
+                                </p:cTn>
+                              </p:par>
+                            </p:childTnLst>
+                          </p:cTn>
+                        </p:par>
+                      </p:childTnLst>
+                    </p:cTn>
+                  </p:par>
+                  <p:par>
+                    <p:cTn id="36" fill="hold">
+                      <p:stCondLst>
+                        <p:cond delay="indefinite"/>
+                      </p:stCondLst>
+                      <p:childTnLst>
+                        <p:par>
+                          <p:cTn id="37" fill="hold">
+                            <p:stCondLst>
+                              <p:cond delay="0"/>
+                            </p:stCondLst>
+                            <p:childTnLst>
+                              <p:par>
+                                <p:cTn id="38" presetID="10" presetClass="entr" presetSubtype="0" fill="hold" grpId="0" nodeType="clickEffect">
+                                  <p:stCondLst>
+                                    <p:cond delay="0"/>
+                                  </p:stCondLst>
+                                  <p:childTnLst>
+                                    <p:set>
+                                      <p:cBhvr>
+                                        <p:cTn id="39" dur="1" fill="hold">
+                                          <p:stCondLst>
+                                            <p:cond delay="0"/>
+                                          </p:stCondLst>
+                                        </p:cTn>
+                                        <p:tgtEl>
+                                          <p:spTgt spid="31"/>
+                                        </p:tgtEl>
+                                        <p:attrNameLst>
+                                          <p:attrName>style.visibility</p:attrName>
+                                        </p:attrNameLst>
+                                      </p:cBhvr>
+                                      <p:to>
+                                        <p:strVal val="visible"/>
+                                      </p:to>
+                                    </p:set>
+                                    <p:animEffect transition="in" filter="fade">
+                                      <p:cBhvr>
+                                        <p:cTn id="40" dur="500"/>
+                                        <p:tgtEl>
+                                          <p:spTgt spid="31"/>
+                                        </p:tgtEl>
+                                      </p:cBhvr>
+                                    </p:animEffect>
+                                  </p:childTnLst>
+                                </p:cTn>
+                              </p:par>
+                            </p:childTnLst>
+                          </p:cTn>
+                        </p:par>
+                      </p:childTnLst>
+                    </p:cTn>
+                  </p:par>
+                  <p:par>
+                    <p:cTn id="41" fill="hold">
+                      <p:stCondLst>
+                        <p:cond delay="indefinite"/>
+                      </p:stCondLst>
+                      <p:childTnLst>
+                        <p:par>
+                          <p:cTn id="42" fill="hold">
+                            <p:stCondLst>
+                              <p:cond delay="0"/>
+                            </p:stCondLst>
+                            <p:childTnLst>
+                              <p:par>
+                                <p:cTn id="43" presetID="10" presetClass="entr" presetSubtype="0" fill="hold" grpId="0" nodeType="clickEffect">
+                                  <p:stCondLst>
+                                    <p:cond delay="0"/>
+                                  </p:stCondLst>
+                                  <p:childTnLst>
+                                    <p:set>
+                                      <p:cBhvr>
+                                        <p:cTn id="44" dur="1" fill="hold">
+                                          <p:stCondLst>
+                                            <p:cond delay="0"/>
+                                          </p:stCondLst>
+                                        </p:cTn>
+                                        <p:tgtEl>
+                                          <p:spTgt spid="15"/>
+                                        </p:tgtEl>
+                                        <p:attrNameLst>
+                                          <p:attrName>style.visibility</p:attrName>
+                                        </p:attrNameLst>
+                                      </p:cBhvr>
+                                      <p:to>
+                                        <p:strVal val="visible"/>
+                                      </p:to>
+                                    </p:set>
+                                    <p:animEffect transition="in" filter="fade">
+                                      <p:cBhvr>
+                                        <p:cTn id="45" dur="250"/>
+                                        <p:tgtEl>
+                                          <p:spTgt spid="15"/>
+                                        </p:tgtEl>
+                                      </p:cBhvr>
+                                    </p:animEffect>
+                                  </p:childTnLst>
+                                </p:cTn>
+                              </p:par>
+                            </p:childTnLst>
+                          </p:cTn>
+                        </p:par>
+                        <p:par>
+                          <p:cTn id="46" fill="hold">
+                            <p:stCondLst>
+                              <p:cond delay="250"/>
+                            </p:stCondLst>
+                            <p:childTnLst>
+                              <p:par>
+                                <p:cTn id="47" presetID="10" presetClass="entr" presetSubtype="0" fill="hold" grpId="0" nodeType="afterEffect">
+                                  <p:stCondLst>
+                                    <p:cond delay="0"/>
+                                  </p:stCondLst>
+                                  <p:childTnLst>
+                                    <p:set>
+                                      <p:cBhvr>
+                                        <p:cTn id="48" dur="1" fill="hold">
+                                          <p:stCondLst>
+                                            <p:cond delay="0"/>
+                                          </p:stCondLst>
+                                        </p:cTn>
+                                        <p:tgtEl>
+                                          <p:spTgt spid="16"/>
+                                        </p:tgtEl>
+                                        <p:attrNameLst>
+                                          <p:attrName>style.visibility</p:attrName>
+                                        </p:attrNameLst>
+                                      </p:cBhvr>
+                                      <p:to>
+                                        <p:strVal val="visible"/>
+                                      </p:to>
+                                    </p:set>
+                                    <p:animEffect transition="in" filter="fade">
+                                      <p:cBhvr>
+                                        <p:cTn id="49" dur="250"/>
+                                        <p:tgtEl>
+                                          <p:spTgt spid="16"/>
+                                        </p:tgtEl>
+                                      </p:cBhvr>
+                                    </p:animEffect>
+                                  </p:childTnLst>
+                                </p:cTn>
+                              </p:par>
+                            </p:childTnLst>
+                          </p:cTn>
+                        </p:par>
+                        <p:par>
+                          <p:cTn id="50" fill="hold">
+                            <p:stCondLst>
+                              <p:cond delay="500"/>
+                            </p:stCondLst>
+                            <p:childTnLst>
+                              <p:par>
+                                <p:cTn id="51" presetID="10" presetClass="entr" presetSubtype="0" fill="hold" grpId="0" nodeType="afterEffect">
+                                  <p:stCondLst>
+                                    <p:cond delay="0"/>
+                                  </p:stCondLst>
+                                  <p:childTnLst>
+                                    <p:set>
+                                      <p:cBhvr>
+                                        <p:cTn id="52" dur="1" fill="hold">
+                                          <p:stCondLst>
+                                            <p:cond delay="0"/>
+                                          </p:stCondLst>
+                                        </p:cTn>
+                                        <p:tgtEl>
+                                          <p:spTgt spid="20"/>
+                                        </p:tgtEl>
+                                        <p:attrNameLst>
+                                          <p:attrName>style.visibility</p:attrName>
+                                        </p:attrNameLst>
+                                      </p:cBhvr>
+                                      <p:to>
+                                        <p:strVal val="visible"/>
+                                      </p:to>
+                                    </p:set>
+                                    <p:animEffect transition="in" filter="fade">
+                                      <p:cBhvr>
+                                        <p:cTn id="53" dur="250"/>
+                                        <p:tgtEl>
+                                          <p:spTgt spid="20"/>
+                                        </p:tgtEl>
+                                      </p:cBhvr>
+                                    </p:animEffect>
+                                  </p:childTnLst>
+                                </p:cTn>
+                              </p:par>
+                            </p:childTnLst>
+                          </p:cTn>
+                        </p:par>
+                      </p:childTnLst>
+                    </p:cTn>
+                  </p:par>
+                  <p:par>
+                    <p:cTn id="54" fill="hold">
+                      <p:stCondLst>
+                        <p:cond delay="indefinite"/>
+                      </p:stCondLst>
+                      <p:childTnLst>
+                        <p:par>
+                          <p:cTn id="55" fill="hold">
+                            <p:stCondLst>
+                              <p:cond delay="0"/>
+                            </p:stCondLst>
+                            <p:childTnLst>
+                              <p:par>
+                                <p:cTn id="56" presetID="1" presetClass="entr" presetSubtype="0" fill="hold" grpId="0" nodeType="clickEffect">
+                                  <p:stCondLst>
+                                    <p:cond delay="0"/>
+                                  </p:stCondLst>
+                                  <p:childTnLst>
+                                    <p:set>
+                                      <p:cBhvr>
+                                        <p:cTn id="57" dur="1" fill="hold">
+                                          <p:stCondLst>
+                                            <p:cond delay="0"/>
+                                          </p:stCondLst>
+                                        </p:cTn>
+                                        <p:tgtEl>
+                                          <p:spTgt spid="4"/>
+                                        </p:tgtEl>
+                                        <p:attrNameLst>
+                                          <p:attrName>style.visibility</p:attrName>
+                                        </p:attrNameLst>
+                                      </p:cBhvr>
+                                      <p:to>
+                                        <p:strVal val="visible"/>
+                                      </p:to>
+                                    </p:set>
+                                  </p:childTnLst>
+                                </p:cTn>
+                              </p:par>
+                            </p:childTnLst>
+                          </p:cTn>
+                        </p:par>
+                      </p:childTnLst>
+                    </p:cTn>
+                  </p:par>
+                  <p:par>
+                    <p:cTn id="58" fill="hold">
+                      <p:stCondLst>
+                        <p:cond delay="indefinite"/>
+                      </p:stCondLst>
+                      <p:childTnLst>
+                        <p:par>
+                          <p:cTn id="59" fill="hold">
+                            <p:stCondLst>
+                              <p:cond delay="0"/>
+                            </p:stCondLst>
+                            <p:childTnLst>
+                              <p:par>
+                                <p:cTn id="60" presetID="1" presetClass="entr" presetSubtype="0" fill="hold" grpId="0" nodeType="clickEffect">
+                                  <p:stCondLst>
+                                    <p:cond delay="0"/>
+                                  </p:stCondLst>
+                                  <p:childTnLst>
+                                    <p:set>
+                                      <p:cBhvr>
+                                        <p:cTn id="61" dur="1" fill="hold">
+                                          <p:stCondLst>
+                                            <p:cond delay="0"/>
+                                          </p:stCondLst>
+                                        </p:cTn>
+                                        <p:tgtEl>
+                                          <p:spTgt spid="3"/>
+                                        </p:tgtEl>
+                                        <p:attrNameLst>
+                                          <p:attrName>style.visibility</p:attrName>
+                                        </p:attrNameLst>
+                                      </p:cBhvr>
+                                      <p:to>
+                                        <p:strVal val="visible"/>
+                                      </p:to>
+                                    </p:set>
+                                  </p:childTnLst>
+                                </p:cTn>
+                              </p:par>
+                            </p:childTnLst>
+                          </p:cTn>
+                        </p:par>
+                      </p:childTnLst>
+                    </p:cTn>
+                  </p:par>
+                  <p:par>
+                    <p:cTn id="62" fill="hold">
+                      <p:stCondLst>
+                        <p:cond delay="indefinite"/>
+                      </p:stCondLst>
+                      <p:childTnLst>
+                        <p:par>
+                          <p:cTn id="63" fill="hold">
+                            <p:stCondLst>
+                              <p:cond delay="0"/>
+                            </p:stCondLst>
+                            <p:childTnLst>
+                              <p:par>
+                                <p:cTn id="64" presetID="1" presetClass="entr" presetSubtype="0" fill="hold" nodeType="clickEffect">
+                                  <p:stCondLst>
+                                    <p:cond delay="0"/>
+                                  </p:stCondLst>
+                                  <p:childTnLst>
+                                    <p:set>
+                                      <p:cBhvr>
+                                        <p:cTn id="65" dur="1" fill="hold">
+                                          <p:stCondLst>
+                                            <p:cond delay="0"/>
+                                          </p:stCondLst>
+                                        </p:cTn>
+                                        <p:tgtEl>
+                                          <p:spTgt spid="64"/>
+                                        </p:tgtEl>
+                                        <p:attrNameLst>
+                                          <p:attrName>style.visibility</p:attrName>
+                                        </p:attrNameLst>
+                                      </p:cBhvr>
+                                      <p:to>
+                                        <p:strVal val="visible"/>
+                                      </p:to>
+                                    </p:set>
+                                  </p:childTnLst>
+                                </p:cTn>
+                              </p:par>
+                              <p:par>
+                                <p:cTn id="66" presetID="1" presetClass="entr" presetSubtype="0" fill="hold" nodeType="withEffect">
+                                  <p:stCondLst>
+                                    <p:cond delay="0"/>
+                                  </p:stCondLst>
+                                  <p:childTnLst>
+                                    <p:set>
+                                      <p:cBhvr>
+                                        <p:cTn id="67" dur="1" fill="hold">
+                                          <p:stCondLst>
+                                            <p:cond delay="0"/>
+                                          </p:stCondLst>
+                                        </p:cTn>
+                                        <p:tgtEl>
+                                          <p:spTgt spid="66"/>
+                                        </p:tgtEl>
+                                        <p:attrNameLst>
+                                          <p:attrName>style.visibility</p:attrName>
+                                        </p:attrNameLst>
+                                      </p:cBhvr>
+                                      <p:to>
+                                        <p:strVal val="visible"/>
+                                      </p:to>
+                                    </p:set>
+                                  </p:childTnLst>
+                                </p:cTn>
+                              </p:par>
+                            </p:childTnLst>
+                          </p:cTn>
+                        </p:par>
+                      </p:childTnLst>
+                    </p:cTn>
+                  </p:par>
+                  <p:par>
+                    <p:cTn id="68" fill="hold">
+                      <p:stCondLst>
+                        <p:cond delay="indefinite"/>
+                      </p:stCondLst>
+                      <p:childTnLst>
+                        <p:par>
+                          <p:cTn id="69" fill="hold">
+                            <p:stCondLst>
+                              <p:cond delay="0"/>
+                            </p:stCondLst>
+                            <p:childTnLst>
+                              <p:par>
+                                <p:cTn id="70" presetID="1" presetClass="entr" presetSubtype="0" fill="hold" grpId="0" nodeType="clickEffect">
+                                  <p:stCondLst>
+                                    <p:cond delay="0"/>
+                                  </p:stCondLst>
+                                  <p:childTnLst>
+                                    <p:set>
+                                      <p:cBhvr>
+                                        <p:cTn id="71" dur="1" fill="hold">
+                                          <p:stCondLst>
+                                            <p:cond delay="0"/>
+                                          </p:stCondLst>
+                                        </p:cTn>
+                                        <p:tgtEl>
+                                          <p:spTgt spid="18"/>
+                                        </p:tgtEl>
+                                        <p:attrNameLst>
+                                          <p:attrName>style.visibility</p:attrName>
+                                        </p:attrNameLst>
+                                      </p:cBhvr>
+                                      <p:to>
+                                        <p:strVal val="visible"/>
+                                      </p:to>
+                                    </p:set>
+                                  </p:childTnLst>
+                                </p:cTn>
+                              </p:par>
+                              <p:par>
+                                <p:cTn id="72" presetID="1" presetClass="entr" presetSubtype="0" fill="hold" nodeType="withEffect">
+                                  <p:stCondLst>
+                                    <p:cond delay="0"/>
+                                  </p:stCondLst>
+                                  <p:childTnLst>
+                                    <p:set>
+                                      <p:cBhvr>
+                                        <p:cTn id="73" dur="1" fill="hold">
+                                          <p:stCondLst>
+                                            <p:cond delay="0"/>
+                                          </p:stCondLst>
+                                        </p:cTn>
+                                        <p:tgtEl>
+                                          <p:spTgt spid="41"/>
+                                        </p:tgtEl>
+                                        <p:attrNameLst>
+                                          <p:attrName>style.visibility</p:attrName>
+                                        </p:attrNameLst>
+                                      </p:cBhvr>
+                                      <p:to>
+                                        <p:strVal val="visible"/>
+                                      </p:to>
+                                    </p:set>
+                                  </p:childTnLst>
+                                </p:cTn>
+                              </p:par>
+                            </p:childTnLst>
+                          </p:cTn>
+                        </p:par>
+                      </p:childTnLst>
+                    </p:cTn>
+                  </p:par>
+                  <p:par>
+                    <p:cTn id="74" fill="hold">
+                      <p:stCondLst>
+                        <p:cond delay="indefinite"/>
+                      </p:stCondLst>
+                      <p:childTnLst>
+                        <p:par>
+                          <p:cTn id="75" fill="hold">
+                            <p:stCondLst>
+                              <p:cond delay="0"/>
+                            </p:stCondLst>
+                            <p:childTnLst>
+                              <p:par>
+                                <p:cTn id="76" presetID="1" presetClass="entr" presetSubtype="0" fill="hold" nodeType="clickEffect">
+                                  <p:stCondLst>
+                                    <p:cond delay="0"/>
+                                  </p:stCondLst>
+                                  <p:childTnLst>
+                                    <p:set>
+                                      <p:cBhvr>
+                                        <p:cTn id="77" dur="1" fill="hold">
+                                          <p:stCondLst>
+                                            <p:cond delay="0"/>
+                                          </p:stCondLst>
+                                        </p:cTn>
+                                        <p:tgtEl>
+                                          <p:spTgt spid="46"/>
+                                        </p:tgtEl>
+                                        <p:attrNameLst>
+                                          <p:attrName>style.visibility</p:attrName>
+                                        </p:attrNameLst>
+                                      </p:cBhvr>
+                                      <p:to>
+                                        <p:strVal val="visible"/>
+                                      </p:to>
+                                    </p:set>
+                                  </p:childTnLst>
+                                </p:cTn>
+                              </p:par>
+                            </p:childTnLst>
+                          </p:cTn>
+                        </p:par>
+                      </p:childTnLst>
+                    </p:cTn>
+                  </p:par>
+                  <p:par>
+                    <p:cTn id="78" fill="hold">
+                      <p:stCondLst>
+                        <p:cond delay="indefinite"/>
+                      </p:stCondLst>
+                      <p:childTnLst>
+                        <p:par>
+                          <p:cTn id="79" fill="hold">
+                            <p:stCondLst>
+                              <p:cond delay="0"/>
+                            </p:stCondLst>
+                            <p:childTnLst>
+                              <p:par>
+                                <p:cTn id="80" presetID="1" presetClass="entr" presetSubtype="0" fill="hold" grpId="0" nodeType="clickEffect">
+                                  <p:stCondLst>
+                                    <p:cond delay="0"/>
+                                  </p:stCondLst>
+                                  <p:childTnLst>
+                                    <p:set>
+                                      <p:cBhvr>
+                                        <p:cTn id="81" dur="1" fill="hold">
+                                          <p:stCondLst>
+                                            <p:cond delay="0"/>
+                                          </p:stCondLst>
+                                        </p:cTn>
+                                        <p:tgtEl>
+                                          <p:spTgt spid="17"/>
+                                        </p:tgtEl>
+                                        <p:attrNameLst>
+                                          <p:attrName>style.visibility</p:attrName>
+                                        </p:attrNameLst>
+                                      </p:cBhvr>
+                                      <p:to>
+                                        <p:strVal val="visible"/>
+                                      </p:to>
+                                    </p:set>
+                                  </p:childTnLst>
+                                </p:cTn>
+                              </p:par>
+                              <p:par>
+                                <p:cTn id="82" presetID="1" presetClass="entr" presetSubtype="0" fill="hold" nodeType="withEffect">
+                                  <p:stCondLst>
+                                    <p:cond delay="0"/>
+                                  </p:stCondLst>
+                                  <p:childTnLst>
+                                    <p:set>
+                                      <p:cBhvr>
+                                        <p:cTn id="83" dur="1" fill="hold">
+                                          <p:stCondLst>
+                                            <p:cond delay="0"/>
+                                          </p:stCondLst>
+                                        </p:cTn>
+                                        <p:tgtEl>
+                                          <p:spTgt spid="57"/>
+                                        </p:tgtEl>
+                                        <p:attrNameLst>
+                                          <p:attrName>style.visibility</p:attrName>
+                                        </p:attrNameLst>
+                                      </p:cBhvr>
+                                      <p:to>
+                                        <p:strVal val="visible"/>
+                                      </p:to>
+                                    </p:set>
+                                  </p:childTnLst>
+                                </p:cTn>
+                              </p:par>
+                            </p:childTnLst>
+                          </p:cTn>
+                        </p:par>
+                      </p:childTnLst>
+                    </p:cTn>
+                  </p:par>
+                  <p:par>
+                    <p:cTn id="84" fill="hold">
+                      <p:stCondLst>
+                        <p:cond delay="indefinite"/>
+                      </p:stCondLst>
+                      <p:childTnLst>
+                        <p:par>
+                          <p:cTn id="85" fill="hold">
+                            <p:stCondLst>
+                              <p:cond delay="0"/>
+                            </p:stCondLst>
+                            <p:childTnLst>
+                              <p:par>
+                                <p:cTn id="86" presetID="1" presetClass="entr" presetSubtype="0" fill="hold" grpId="0" nodeType="clickEffect">
+                                  <p:stCondLst>
+                                    <p:cond delay="0"/>
+                                  </p:stCondLst>
+                                  <p:childTnLst>
+                                    <p:set>
+                                      <p:cBhvr>
+                                        <p:cTn id="87" dur="1" fill="hold">
+                                          <p:stCondLst>
+                                            <p:cond delay="0"/>
+                                          </p:stCondLst>
+                                        </p:cTn>
+                                        <p:tgtEl>
+                                          <p:spTgt spid="21"/>
+                                        </p:tgtEl>
+                                        <p:attrNameLst>
+                                          <p:attrName>style.visibility</p:attrName>
+                                        </p:attrNameLst>
+                                      </p:cBhvr>
+                                      <p:to>
+                                        <p:strVal val="visible"/>
+                                      </p:to>
+                                    </p:set>
+                                  </p:childTnLst>
+                                </p:cTn>
+                              </p:par>
+                              <p:par>
+                                <p:cTn id="88" presetID="1" presetClass="entr" presetSubtype="0" fill="hold" nodeType="withEffect">
+                                  <p:stCondLst>
+                                    <p:cond delay="0"/>
+                                  </p:stCondLst>
+                                  <p:childTnLst>
+                                    <p:set>
+                                      <p:cBhvr>
+                                        <p:cTn id="89" dur="1" fill="hold">
+                                          <p:stCondLst>
+                                            <p:cond delay="0"/>
+                                          </p:stCondLst>
+                                        </p:cTn>
+                                        <p:tgtEl>
+                                          <p:spTgt spid="49"/>
+                                        </p:tgtEl>
+                                        <p:attrNameLst>
+                                          <p:attrName>style.visibility</p:attrName>
+                                        </p:attrNameLst>
+                                      </p:cBhvr>
+                                      <p:to>
+                                        <p:strVal val="visible"/>
+                                      </p:to>
+                                    </p:set>
+                                  </p:childTnLst>
+                                </p:cTn>
+                              </p:par>
+                            </p:childTnLst>
+                          </p:cTn>
+                        </p:par>
+                      </p:childTnLst>
+                    </p:cTn>
+                  </p:par>
+                  <p:par>
+                    <p:cTn id="90" fill="hold">
+                      <p:stCondLst>
+                        <p:cond delay="indefinite"/>
+                      </p:stCondLst>
+                      <p:childTnLst>
+                        <p:par>
+                          <p:cTn id="91" fill="hold">
+                            <p:stCondLst>
+                              <p:cond delay="0"/>
+                            </p:stCondLst>
+                            <p:childTnLst>
+                              <p:par>
+                                <p:cTn id="92" presetID="1" presetClass="entr" presetSubtype="0" fill="hold" nodeType="clickEffect">
+                                  <p:stCondLst>
+                                    <p:cond delay="0"/>
+                                  </p:stCondLst>
+                                  <p:childTnLst>
+                                    <p:set>
+                                      <p:cBhvr>
+                                        <p:cTn id="93" dur="1" fill="hold">
+                                          <p:stCondLst>
+                                            <p:cond delay="0"/>
+                                          </p:stCondLst>
+                                        </p:cTn>
+                                        <p:tgtEl>
+                                          <p:spTgt spid="61"/>
+                                        </p:tgtEl>
+                                        <p:attrNameLst>
+                                          <p:attrName>style.visibility</p:attrName>
+                                        </p:attrNameLst>
+                                      </p:cBhvr>
+                                      <p:to>
+                                        <p:strVal val="visible"/>
+                                      </p:to>
+                                    </p:set>
+                                  </p:childTnLst>
+                                </p:cTn>
+                              </p:par>
+                              <p:par>
+                                <p:cTn id="94" presetID="1" presetClass="entr" presetSubtype="0" fill="hold" grpId="0" nodeType="withEffect">
+                                  <p:stCondLst>
+                                    <p:cond delay="0"/>
+                                  </p:stCondLst>
+                                  <p:childTnLst>
+                                    <p:set>
+                                      <p:cBhvr>
+                                        <p:cTn id="95" dur="1" fill="hold">
+                                          <p:stCondLst>
+                                            <p:cond delay="0"/>
+                                          </p:stCondLst>
+                                        </p:cTn>
+                                        <p:tgtEl>
+                                          <p:spTgt spid="34"/>
+                                        </p:tgtEl>
+                                        <p:attrNameLst>
+                                          <p:attrName>style.visibility</p:attrName>
+                                        </p:attrNameLst>
+                                      </p:cBhvr>
+                                      <p:to>
+                                        <p:strVal val="visible"/>
+                                      </p:to>
+                                    </p:set>
+                                  </p:childTnLst>
+                                </p:cTn>
+                              </p:par>
+                              <p:par>
+                                <p:cTn id="96" presetID="1" presetClass="entr" presetSubtype="0" fill="hold" nodeType="withEffect">
+                                  <p:stCondLst>
+                                    <p:cond delay="0"/>
+                                  </p:stCondLst>
+                                  <p:childTnLst>
+                                    <p:set>
+                                      <p:cBhvr>
+                                        <p:cTn id="97" dur="1" fill="hold">
+                                          <p:stCondLst>
+                                            <p:cond delay="0"/>
+                                          </p:stCondLst>
+                                        </p:cTn>
+                                        <p:tgtEl>
+                                          <p:spTgt spid="53"/>
+                                        </p:tgtEl>
+                                        <p:attrNameLst>
+                                          <p:attrName>style.visibility</p:attrName>
+                                        </p:attrNameLst>
+                                      </p:cBhvr>
+                                      <p:to>
+                                        <p:strVal val="visible"/>
+                                      </p:to>
+                                    </p:set>
+                                  </p:childTnLst>
+                                </p:cTn>
+                              </p:par>
+                            </p:childTnLst>
+                          </p:cTn>
+                        </p:par>
+                      </p:childTnLst>
+                    </p:cTn>
+                  </p:par>
+                </p:childTnLst>
+              </p:cTn>
+              <p:prevCondLst>
+                <p:cond evt="onPrev" delay="0">
+                  <p:tgtEl>
+                    <p:sldTgt/>
+                  </p:tgtEl>
+                </p:cond>
+              </p:prevCondLst>
+              <p:nextCondLst>
+                <p:cond evt="onNext" delay="0">
+                  <p:tgtEl>
+                    <p:sldTgt/>
+                  </p:tgtEl>
+                </p:cond>
+              </p:nextCondLst>
+            </p:seq>
+          </p:childTnLst>
+        </p:cTn>
       </p:par>
     </p:tnLst>
+    <p:bldLst>
+      <p:bldP spid="31" grpId="0" animBg="1"/>
+      <p:bldP spid="15" grpId="0" animBg="1"/>
+      <p:bldP spid="3" grpId="0" animBg="1"/>
+      <p:bldP spid="16" grpId="0" animBg="1"/>
+      <p:bldP spid="17" grpId="0" animBg="1"/>
+      <p:bldP spid="18" grpId="0" animBg="1"/>
+      <p:bldP spid="77" grpId="0" animBg="1"/>
+      <p:bldP spid="20" grpId="0" animBg="1"/>
+      <p:bldP spid="21" grpId="0" animBg="1"/>
+      <p:bldP spid="23" grpId="0" animBg="1"/>
+      <p:bldP spid="25" grpId="0" animBg="1"/>
+      <p:bldP spid="2" grpId="0"/>
+      <p:bldP spid="34" grpId="0" animBg="1"/>
+      <p:bldP spid="4" grpId="0" animBg="1"/>
+      <p:bldP spid="70" grpId="0"/>
+    </p:bldLst>
   </p:timing>
 </p:sld>
 </file>
 
-<file path=ppt/slides/slide26.xml><?xml version="1.0" encoding="utf-8"?>
+<file path=ppt/slides/slide29.xml><?xml version="1.0" encoding="utf-8"?>
+<p:sld xmlns:a="http://schemas.openxmlformats.org/drawingml/2006/main" xmlns:r="http://schemas.openxmlformats.org/officeDocument/2006/relationships" xmlns:p="http://schemas.openxmlformats.org/presentationml/2006/main">
+  <p:cSld>
+    <p:spTree>
+      <p:nvGrpSpPr>
+        <p:cNvPr id="1" name=""/>
+        <p:cNvGrpSpPr/>
+        <p:nvPr/>
+      </p:nvGrpSpPr>
+      <p:grpSpPr>
+        <a:xfrm>
+          <a:off x="0" y="0"/>
+          <a:ext cx="0" cy="0"/>
+          <a:chOff x="0" y="0"/>
+          <a:chExt cx="0" cy="0"/>
+        </a:xfrm>
+      </p:grpSpPr>
+      <p:sp>
+        <p:nvSpPr>
+          <p:cNvPr id="2" name="Titel 1">
+            <a:extLst>
+              <a:ext uri="{FF2B5EF4-FFF2-40B4-BE49-F238E27FC236}">
+                <a16:creationId xmlns:a16="http://schemas.microsoft.com/office/drawing/2014/main" id="{8645EF51-F07F-D9E8-105E-D7722EAACFF9}"/>
+              </a:ext>
+            </a:extLst>
+          </p:cNvPr>
+          <p:cNvSpPr>
+            <a:spLocks noGrp="1"/>
+          </p:cNvSpPr>
+          <p:nvPr>
+            <p:ph type="title"/>
+          </p:nvPr>
+        </p:nvSpPr>
+        <p:spPr/>
+        <p:txBody>
+          <a:bodyPr/>
+          <a:lstStyle/>
+          <a:p>
+            <a:r>
+              <a:rPr lang="de-AT" dirty="0"/>
+              <a:t>Model </a:t>
+            </a:r>
+            <a:r>
+              <a:rPr lang="de-AT" dirty="0" err="1"/>
+              <a:t>comparison</a:t>
+            </a:r>
+            <a:endParaRPr lang="en-US" dirty="0"/>
+          </a:p>
+        </p:txBody>
+      </p:sp>
+      <p:pic>
+        <p:nvPicPr>
+          <p:cNvPr id="5" name="Inhaltsplatzhalter 4">
+            <a:extLst>
+              <a:ext uri="{FF2B5EF4-FFF2-40B4-BE49-F238E27FC236}">
+                <a16:creationId xmlns:a16="http://schemas.microsoft.com/office/drawing/2014/main" id="{3CA6B3A0-0964-6272-34DB-C75C85FED4F0}"/>
+              </a:ext>
+            </a:extLst>
+          </p:cNvPr>
+          <p:cNvPicPr>
+            <a:picLocks noGrp="1" noChangeAspect="1"/>
+          </p:cNvPicPr>
+          <p:nvPr>
+            <p:ph idx="1"/>
+          </p:nvPr>
+        </p:nvPicPr>
+        <p:blipFill>
+          <a:blip r:embed="rId2">
+            <a:extLst>
+              <a:ext uri="{28A0092B-C50C-407E-A947-70E740481C1C}">
+                <a14:useLocalDpi xmlns:a14="http://schemas.microsoft.com/office/drawing/2010/main" val="0"/>
+              </a:ext>
+            </a:extLst>
+          </a:blip>
+          <a:stretch>
+            <a:fillRect/>
+          </a:stretch>
+        </p:blipFill>
+        <p:spPr>
+          <a:xfrm>
+            <a:off x="71277" y="1894966"/>
+            <a:ext cx="12049445" cy="3515775"/>
+          </a:xfrm>
+          <a:prstGeom prst="rect">
+            <a:avLst/>
+          </a:prstGeom>
+        </p:spPr>
+      </p:pic>
+      <p:sp>
+        <p:nvSpPr>
+          <p:cNvPr id="6" name="Content Placeholder 2">
+            <a:extLst>
+              <a:ext uri="{FF2B5EF4-FFF2-40B4-BE49-F238E27FC236}">
+                <a16:creationId xmlns:a16="http://schemas.microsoft.com/office/drawing/2014/main" id="{AA27A79D-7BD5-695A-BDEA-09A8112CD80B}"/>
+              </a:ext>
+            </a:extLst>
+          </p:cNvPr>
+          <p:cNvSpPr txBox="1">
+            <a:spLocks/>
+          </p:cNvSpPr>
+          <p:nvPr/>
+        </p:nvSpPr>
+        <p:spPr>
+          <a:xfrm>
+            <a:off x="838199" y="5641997"/>
+            <a:ext cx="10515600" cy="662571"/>
+          </a:xfrm>
+          <a:prstGeom prst="rect">
+            <a:avLst/>
+          </a:prstGeom>
+        </p:spPr>
+        <p:txBody>
+          <a:bodyPr vert="horz" lIns="91440" tIns="45720" rIns="91440" bIns="45720" rtlCol="0">
+            <a:normAutofit/>
+          </a:bodyPr>
+          <a:lstStyle>
+            <a:lvl1pPr marL="228600" indent="-228600" algn="l" defTabSz="914400" rtl="0" eaLnBrk="1" latinLnBrk="0" hangingPunct="1">
+              <a:lnSpc>
+                <a:spcPct val="90000"/>
+              </a:lnSpc>
+              <a:spcBef>
+                <a:spcPts val="1000"/>
+              </a:spcBef>
+              <a:buFont typeface="Arial" panose="020B0604020202020204" pitchFamily="34" charset="0"/>
+              <a:buChar char="•"/>
+              <a:defRPr sz="2800" kern="1200">
+                <a:solidFill>
+                  <a:schemeClr val="tx1"/>
+                </a:solidFill>
+                <a:latin typeface="Bahnschrift" panose="020B0502040204020203" pitchFamily="34" charset="0"/>
+                <a:ea typeface="+mn-ea"/>
+                <a:cs typeface="+mn-cs"/>
+              </a:defRPr>
+            </a:lvl1pPr>
+            <a:lvl2pPr marL="685800" indent="-228600" algn="l" defTabSz="914400" rtl="0" eaLnBrk="1" latinLnBrk="0" hangingPunct="1">
+              <a:lnSpc>
+                <a:spcPct val="90000"/>
+              </a:lnSpc>
+              <a:spcBef>
+                <a:spcPts val="500"/>
+              </a:spcBef>
+              <a:buFont typeface="Arial" panose="020B0604020202020204" pitchFamily="34" charset="0"/>
+              <a:buChar char="•"/>
+              <a:defRPr sz="2400" kern="1200">
+                <a:solidFill>
+                  <a:schemeClr val="tx1"/>
+                </a:solidFill>
+                <a:latin typeface="Bahnschrift" panose="020B0502040204020203" pitchFamily="34" charset="0"/>
+                <a:ea typeface="+mn-ea"/>
+                <a:cs typeface="+mn-cs"/>
+              </a:defRPr>
+            </a:lvl2pPr>
+            <a:lvl3pPr marL="1143000" indent="-228600" algn="l" defTabSz="914400" rtl="0" eaLnBrk="1" latinLnBrk="0" hangingPunct="1">
+              <a:lnSpc>
+                <a:spcPct val="90000"/>
+              </a:lnSpc>
+              <a:spcBef>
+                <a:spcPts val="500"/>
+              </a:spcBef>
+              <a:buFont typeface="Arial" panose="020B0604020202020204" pitchFamily="34" charset="0"/>
+              <a:buChar char="•"/>
+              <a:defRPr sz="2000" kern="1200">
+                <a:solidFill>
+                  <a:schemeClr val="tx1"/>
+                </a:solidFill>
+                <a:latin typeface="Bahnschrift" panose="020B0502040204020203" pitchFamily="34" charset="0"/>
+                <a:ea typeface="+mn-ea"/>
+                <a:cs typeface="+mn-cs"/>
+              </a:defRPr>
+            </a:lvl3pPr>
+            <a:lvl4pPr marL="1600200" indent="-228600" algn="l" defTabSz="914400" rtl="0" eaLnBrk="1" latinLnBrk="0" hangingPunct="1">
+              <a:lnSpc>
+                <a:spcPct val="90000"/>
+              </a:lnSpc>
+              <a:spcBef>
+                <a:spcPts val="500"/>
+              </a:spcBef>
+              <a:buFont typeface="Arial" panose="020B0604020202020204" pitchFamily="34" charset="0"/>
+              <a:buChar char="•"/>
+              <a:defRPr sz="1800" kern="1200">
+                <a:solidFill>
+                  <a:schemeClr val="tx1"/>
+                </a:solidFill>
+                <a:latin typeface="Bahnschrift" panose="020B0502040204020203" pitchFamily="34" charset="0"/>
+                <a:ea typeface="+mn-ea"/>
+                <a:cs typeface="+mn-cs"/>
+              </a:defRPr>
+            </a:lvl4pPr>
+            <a:lvl5pPr marL="2057400" indent="-228600" algn="l" defTabSz="914400" rtl="0" eaLnBrk="1" latinLnBrk="0" hangingPunct="1">
+              <a:lnSpc>
+                <a:spcPct val="90000"/>
+              </a:lnSpc>
+              <a:spcBef>
+                <a:spcPts val="500"/>
+              </a:spcBef>
+              <a:buFont typeface="Arial" panose="020B0604020202020204" pitchFamily="34" charset="0"/>
+              <a:buChar char="•"/>
+              <a:defRPr sz="1800" kern="1200">
+                <a:solidFill>
+                  <a:schemeClr val="tx1"/>
+                </a:solidFill>
+                <a:latin typeface="Bahnschrift" panose="020B0502040204020203" pitchFamily="34" charset="0"/>
+                <a:ea typeface="+mn-ea"/>
+                <a:cs typeface="+mn-cs"/>
+              </a:defRPr>
+            </a:lvl5pPr>
+            <a:lvl6pPr marL="2514600" indent="-228600" algn="l" defTabSz="914400" rtl="0" eaLnBrk="1" latinLnBrk="0" hangingPunct="1">
+              <a:lnSpc>
+                <a:spcPct val="90000"/>
+              </a:lnSpc>
+              <a:spcBef>
+                <a:spcPts val="500"/>
+              </a:spcBef>
+              <a:buFont typeface="Arial" panose="020B0604020202020204" pitchFamily="34" charset="0"/>
+              <a:buChar char="•"/>
+              <a:defRPr sz="1800" kern="1200">
+                <a:solidFill>
+                  <a:schemeClr val="tx1"/>
+                </a:solidFill>
+                <a:latin typeface="+mn-lt"/>
+                <a:ea typeface="+mn-ea"/>
+                <a:cs typeface="+mn-cs"/>
+              </a:defRPr>
+            </a:lvl6pPr>
+            <a:lvl7pPr marL="2971800" indent="-228600" algn="l" defTabSz="914400" rtl="0" eaLnBrk="1" latinLnBrk="0" hangingPunct="1">
+              <a:lnSpc>
+                <a:spcPct val="90000"/>
+              </a:lnSpc>
+              <a:spcBef>
+                <a:spcPts val="500"/>
+              </a:spcBef>
+              <a:buFont typeface="Arial" panose="020B0604020202020204" pitchFamily="34" charset="0"/>
+              <a:buChar char="•"/>
+              <a:defRPr sz="1800" kern="1200">
+                <a:solidFill>
+                  <a:schemeClr val="tx1"/>
+                </a:solidFill>
+                <a:latin typeface="+mn-lt"/>
+                <a:ea typeface="+mn-ea"/>
+                <a:cs typeface="+mn-cs"/>
+              </a:defRPr>
+            </a:lvl7pPr>
+            <a:lvl8pPr marL="3429000" indent="-228600" algn="l" defTabSz="914400" rtl="0" eaLnBrk="1" latinLnBrk="0" hangingPunct="1">
+              <a:lnSpc>
+                <a:spcPct val="90000"/>
+              </a:lnSpc>
+              <a:spcBef>
+                <a:spcPts val="500"/>
+              </a:spcBef>
+              <a:buFont typeface="Arial" panose="020B0604020202020204" pitchFamily="34" charset="0"/>
+              <a:buChar char="•"/>
+              <a:defRPr sz="1800" kern="1200">
+                <a:solidFill>
+                  <a:schemeClr val="tx1"/>
+                </a:solidFill>
+                <a:latin typeface="+mn-lt"/>
+                <a:ea typeface="+mn-ea"/>
+                <a:cs typeface="+mn-cs"/>
+              </a:defRPr>
+            </a:lvl8pPr>
+            <a:lvl9pPr marL="3886200" indent="-228600" algn="l" defTabSz="914400" rtl="0" eaLnBrk="1" latinLnBrk="0" hangingPunct="1">
+              <a:lnSpc>
+                <a:spcPct val="90000"/>
+              </a:lnSpc>
+              <a:spcBef>
+                <a:spcPts val="500"/>
+              </a:spcBef>
+              <a:buFont typeface="Arial" panose="020B0604020202020204" pitchFamily="34" charset="0"/>
+              <a:buChar char="•"/>
+              <a:defRPr sz="1800" kern="1200">
+                <a:solidFill>
+                  <a:schemeClr val="tx1"/>
+                </a:solidFill>
+                <a:latin typeface="+mn-lt"/>
+                <a:ea typeface="+mn-ea"/>
+                <a:cs typeface="+mn-cs"/>
+              </a:defRPr>
+            </a:lvl9pPr>
+          </a:lstStyle>
+          <a:p>
+            <a:pPr>
+              <a:lnSpc>
+                <a:spcPct val="150000"/>
+              </a:lnSpc>
+            </a:pPr>
+            <a:r>
+              <a:rPr lang="de-AT" sz="2400" dirty="0"/>
+              <a:t>s</a:t>
+            </a:r>
+            <a:r>
+              <a:rPr lang="en-US" sz="2400" dirty="0" err="1"/>
+              <a:t>imple</a:t>
+            </a:r>
+            <a:r>
+              <a:rPr lang="en-US" sz="2400" dirty="0"/>
+              <a:t> beats complicated</a:t>
+            </a:r>
+          </a:p>
+        </p:txBody>
+      </p:sp>
+    </p:spTree>
+    <p:extLst>
+      <p:ext uri="{BB962C8B-B14F-4D97-AF65-F5344CB8AC3E}">
+        <p14:creationId xmlns:p14="http://schemas.microsoft.com/office/powerpoint/2010/main" val="98988724"/>
+      </p:ext>
+    </p:extLst>
+  </p:cSld>
+  <p:clrMapOvr>
+    <a:masterClrMapping/>
+  </p:clrMapOvr>
+</p:sld>
+</file>
+
+<file path=ppt/slides/slide3.xml><?xml version="1.0" encoding="utf-8"?>
 <p:sld xmlns:a="http://schemas.openxmlformats.org/drawingml/2006/main" xmlns:r="http://schemas.openxmlformats.org/officeDocument/2006/relationships" xmlns:p="http://schemas.openxmlformats.org/presentationml/2006/main">
   <p:cSld>
     <p:spTree>
@@ -14438,8 +19751,14 @@
           <a:lstStyle/>
           <a:p>
             <a:r>
-              <a:rPr lang="de-DE" dirty="0" smtClean="0"/>
-              <a:t>HGF results – prediction error vs firing rates</a:t>
+              <a:rPr lang="de-DE" dirty="0">
+                <a:latin typeface="Bahnschrift" panose="020B0502040204020203" pitchFamily="34" charset="0"/>
+              </a:rPr>
+              <a:t>Introduction</a:t>
+            </a:r>
+            <a:r>
+              <a:rPr lang="de-DE" dirty="0"/>
+              <a:t> to me</a:t>
             </a:r>
             <a:endParaRPr lang="en-GB" dirty="0"/>
           </a:p>
@@ -14460,14 +19779,71 @@
           <a:bodyPr/>
           <a:lstStyle/>
           <a:p>
+            <a:endParaRPr lang="de-DE" dirty="0">
+              <a:latin typeface="Bahnschrift" panose="020B0502040204020203" pitchFamily="34" charset="0"/>
+            </a:endParaRPr>
+          </a:p>
+          <a:p>
             <a:r>
-              <a:rPr lang="de-DE" dirty="0" smtClean="0"/>
-              <a:t>Figures</a:t>
+              <a:rPr lang="de-DE" dirty="0">
+                <a:latin typeface="Bahnschrift" panose="020B0502040204020203" pitchFamily="34" charset="0"/>
+              </a:rPr>
+              <a:t>Bachelor</a:t>
             </a:r>
-            <a:endParaRPr lang="en-GB" dirty="0"/>
+          </a:p>
+          <a:p>
+            <a:r>
+              <a:rPr lang="de-DE" dirty="0">
+                <a:latin typeface="Bahnschrift" panose="020B0502040204020203" pitchFamily="34" charset="0"/>
+              </a:rPr>
+              <a:t>Master</a:t>
+            </a:r>
+          </a:p>
+          <a:p>
+            <a:endParaRPr lang="en-GB" dirty="0">
+              <a:latin typeface="Bahnschrift" panose="020B0502040204020203" pitchFamily="34" charset="0"/>
+            </a:endParaRPr>
           </a:p>
         </p:txBody>
       </p:sp>
+    </p:spTree>
+    <p:extLst>
+      <p:ext uri="{BB962C8B-B14F-4D97-AF65-F5344CB8AC3E}">
+        <p14:creationId xmlns:p14="http://schemas.microsoft.com/office/powerpoint/2010/main" val="1405010918"/>
+      </p:ext>
+    </p:extLst>
+  </p:cSld>
+  <p:clrMapOvr>
+    <a:masterClrMapping/>
+  </p:clrMapOvr>
+</p:sld>
+</file>
+
+<file path=ppt/slides/slide30.xml><?xml version="1.0" encoding="utf-8"?>
+<p:sld xmlns:a="http://schemas.openxmlformats.org/drawingml/2006/main" xmlns:r="http://schemas.openxmlformats.org/officeDocument/2006/relationships" xmlns:p="http://schemas.openxmlformats.org/presentationml/2006/main">
+  <p:cSld>
+    <p:bg>
+      <p:bgPr>
+        <a:solidFill>
+          <a:srgbClr val="FFFFFF"/>
+        </a:solidFill>
+        <a:effectLst/>
+      </p:bgPr>
+    </p:bg>
+    <p:spTree>
+      <p:nvGrpSpPr>
+        <p:cNvPr id="1" name=""/>
+        <p:cNvGrpSpPr/>
+        <p:nvPr/>
+      </p:nvGrpSpPr>
+      <p:grpSpPr>
+        <a:xfrm>
+          <a:off x="0" y="0"/>
+          <a:ext cx="0" cy="0"/>
+          <a:chOff x="0" y="0"/>
+          <a:chExt cx="0" cy="0"/>
+        </a:xfrm>
+      </p:grpSpPr>
       <p:pic>
         <p:nvPicPr>
           <p:cNvPr id="4" name="Picture 3"/>
@@ -14490,14 +19866,39 @@
         </p:blipFill>
         <p:spPr>
           <a:xfrm>
-            <a:off x="1376036" y="1150609"/>
-            <a:ext cx="8725907" cy="5026354"/>
+            <a:off x="838199" y="400367"/>
+            <a:ext cx="10515601" cy="6057265"/>
           </a:xfrm>
           <a:prstGeom prst="rect">
             <a:avLst/>
           </a:prstGeom>
         </p:spPr>
       </p:pic>
+      <p:sp>
+        <p:nvSpPr>
+          <p:cNvPr id="8" name="Inhaltsplatzhalter 7">
+            <a:extLst>
+              <a:ext uri="{FF2B5EF4-FFF2-40B4-BE49-F238E27FC236}">
+                <a16:creationId xmlns:a16="http://schemas.microsoft.com/office/drawing/2014/main" id="{CC1487FC-86EA-0219-5773-8F3F781BD251}"/>
+              </a:ext>
+            </a:extLst>
+          </p:cNvPr>
+          <p:cNvSpPr>
+            <a:spLocks noGrp="1"/>
+          </p:cNvSpPr>
+          <p:nvPr>
+            <p:ph idx="1"/>
+          </p:nvPr>
+        </p:nvSpPr>
+        <p:spPr/>
+        <p:txBody>
+          <a:bodyPr/>
+          <a:lstStyle/>
+          <a:p>
+            <a:endParaRPr lang="en-US" dirty="0"/>
+          </a:p>
+        </p:txBody>
+      </p:sp>
     </p:spTree>
     <p:extLst>
       <p:ext uri="{BB962C8B-B14F-4D97-AF65-F5344CB8AC3E}">
@@ -14508,17 +19909,10 @@
   <p:clrMapOvr>
     <a:masterClrMapping/>
   </p:clrMapOvr>
-  <p:timing>
-    <p:tnLst>
-      <p:par>
-        <p:cTn id="1" dur="indefinite" restart="never" nodeType="tmRoot"/>
-      </p:par>
-    </p:tnLst>
-  </p:timing>
 </p:sld>
 </file>
 
-<file path=ppt/slides/slide27.xml><?xml version="1.0" encoding="utf-8"?>
+<file path=ppt/slides/slide31.xml><?xml version="1.0" encoding="utf-8"?>
 <p:sld xmlns:a="http://schemas.openxmlformats.org/drawingml/2006/main" xmlns:r="http://schemas.openxmlformats.org/officeDocument/2006/relationships" xmlns:p="http://schemas.openxmlformats.org/presentationml/2006/main">
   <p:cSld>
     <p:spTree>
@@ -14535,25 +19929,6 @@
           <a:chExt cx="0" cy="0"/>
         </a:xfrm>
       </p:grpSpPr>
-      <p:sp>
-        <p:nvSpPr>
-          <p:cNvPr id="2" name="Title 1"/>
-          <p:cNvSpPr>
-            <a:spLocks noGrp="1"/>
-          </p:cNvSpPr>
-          <p:nvPr>
-            <p:ph type="title"/>
-          </p:nvPr>
-        </p:nvSpPr>
-        <p:spPr/>
-        <p:txBody>
-          <a:bodyPr/>
-          <a:lstStyle/>
-          <a:p>
-            <a:endParaRPr lang="en-GB"/>
-          </a:p>
-        </p:txBody>
-      </p:sp>
       <p:sp>
         <p:nvSpPr>
           <p:cNvPr id="5" name="Rectangle 4"/>
@@ -14641,17 +20016,10 @@
   <p:clrMapOvr>
     <a:masterClrMapping/>
   </p:clrMapOvr>
-  <p:timing>
-    <p:tnLst>
-      <p:par>
-        <p:cTn id="1" dur="indefinite" restart="never" nodeType="tmRoot"/>
-      </p:par>
-    </p:tnLst>
-  </p:timing>
 </p:sld>
 </file>
 
-<file path=ppt/slides/slide28.xml><?xml version="1.0" encoding="utf-8"?>
+<file path=ppt/slides/slide32.xml><?xml version="1.0" encoding="utf-8"?>
 <p:sld xmlns:a="http://schemas.openxmlformats.org/drawingml/2006/main" xmlns:r="http://schemas.openxmlformats.org/officeDocument/2006/relationships" xmlns:p="http://schemas.openxmlformats.org/presentationml/2006/main">
   <p:cSld>
     <p:spTree>
@@ -14716,17 +20084,10 @@
   <p:clrMapOvr>
     <a:masterClrMapping/>
   </p:clrMapOvr>
-  <p:timing>
-    <p:tnLst>
-      <p:par>
-        <p:cTn id="1" dur="indefinite" restart="never" nodeType="tmRoot"/>
-      </p:par>
-    </p:tnLst>
-  </p:timing>
 </p:sld>
 </file>
 
-<file path=ppt/slides/slide29.xml><?xml version="1.0" encoding="utf-8"?>
+<file path=ppt/slides/slide33.xml><?xml version="1.0" encoding="utf-8"?>
 <p:sld xmlns:a="http://schemas.openxmlformats.org/drawingml/2006/main" xmlns:r="http://schemas.openxmlformats.org/officeDocument/2006/relationships" xmlns:p="http://schemas.openxmlformats.org/presentationml/2006/main">
   <p:cSld>
     <p:spTree>
@@ -14791,121 +20152,6 @@
   <p:clrMapOvr>
     <a:masterClrMapping/>
   </p:clrMapOvr>
-  <p:timing>
-    <p:tnLst>
-      <p:par>
-        <p:cTn id="1" dur="indefinite" restart="never" nodeType="tmRoot"/>
-      </p:par>
-    </p:tnLst>
-  </p:timing>
-</p:sld>
-</file>
-
-<file path=ppt/slides/slide3.xml><?xml version="1.0" encoding="utf-8"?>
-<p:sld xmlns:a="http://schemas.openxmlformats.org/drawingml/2006/main" xmlns:r="http://schemas.openxmlformats.org/officeDocument/2006/relationships" xmlns:p="http://schemas.openxmlformats.org/presentationml/2006/main">
-  <p:cSld>
-    <p:spTree>
-      <p:nvGrpSpPr>
-        <p:cNvPr id="1" name=""/>
-        <p:cNvGrpSpPr/>
-        <p:nvPr/>
-      </p:nvGrpSpPr>
-      <p:grpSpPr>
-        <a:xfrm>
-          <a:off x="0" y="0"/>
-          <a:ext cx="0" cy="0"/>
-          <a:chOff x="0" y="0"/>
-          <a:chExt cx="0" cy="0"/>
-        </a:xfrm>
-      </p:grpSpPr>
-      <p:sp>
-        <p:nvSpPr>
-          <p:cNvPr id="2" name="Title 1"/>
-          <p:cNvSpPr>
-            <a:spLocks noGrp="1"/>
-          </p:cNvSpPr>
-          <p:nvPr>
-            <p:ph type="title"/>
-          </p:nvPr>
-        </p:nvSpPr>
-        <p:spPr/>
-        <p:txBody>
-          <a:bodyPr/>
-          <a:lstStyle/>
-          <a:p>
-            <a:r>
-              <a:rPr lang="de-DE" dirty="0" smtClean="0">
-                <a:latin typeface="Bahnschrift" panose="020B0502040204020203" pitchFamily="34" charset="0"/>
-              </a:rPr>
-              <a:t>Introduction</a:t>
-            </a:r>
-            <a:r>
-              <a:rPr lang="de-DE" dirty="0" smtClean="0"/>
-              <a:t> to me</a:t>
-            </a:r>
-            <a:endParaRPr lang="en-GB" dirty="0"/>
-          </a:p>
-        </p:txBody>
-      </p:sp>
-      <p:sp>
-        <p:nvSpPr>
-          <p:cNvPr id="3" name="Content Placeholder 2"/>
-          <p:cNvSpPr>
-            <a:spLocks noGrp="1"/>
-          </p:cNvSpPr>
-          <p:nvPr>
-            <p:ph idx="1"/>
-          </p:nvPr>
-        </p:nvSpPr>
-        <p:spPr/>
-        <p:txBody>
-          <a:bodyPr/>
-          <a:lstStyle/>
-          <a:p>
-            <a:endParaRPr lang="de-DE" dirty="0" smtClean="0">
-              <a:latin typeface="Bahnschrift" panose="020B0502040204020203" pitchFamily="34" charset="0"/>
-            </a:endParaRPr>
-          </a:p>
-          <a:p>
-            <a:r>
-              <a:rPr lang="de-DE" dirty="0" smtClean="0">
-                <a:latin typeface="Bahnschrift" panose="020B0502040204020203" pitchFamily="34" charset="0"/>
-              </a:rPr>
-              <a:t>Bachelor</a:t>
-            </a:r>
-          </a:p>
-          <a:p>
-            <a:r>
-              <a:rPr lang="de-DE" dirty="0" smtClean="0">
-                <a:latin typeface="Bahnschrift" panose="020B0502040204020203" pitchFamily="34" charset="0"/>
-              </a:rPr>
-              <a:t>Master</a:t>
-            </a:r>
-          </a:p>
-          <a:p>
-            <a:endParaRPr lang="en-GB" dirty="0">
-              <a:latin typeface="Bahnschrift" panose="020B0502040204020203" pitchFamily="34" charset="0"/>
-            </a:endParaRPr>
-          </a:p>
-        </p:txBody>
-      </p:sp>
-    </p:spTree>
-    <p:extLst>
-      <p:ext uri="{BB962C8B-B14F-4D97-AF65-F5344CB8AC3E}">
-        <p14:creationId xmlns:p14="http://schemas.microsoft.com/office/powerpoint/2010/main" val="1405010918"/>
-      </p:ext>
-    </p:extLst>
-  </p:cSld>
-  <p:clrMapOvr>
-    <a:masterClrMapping/>
-  </p:clrMapOvr>
-  <p:timing>
-    <p:tnLst>
-      <p:par>
-        <p:cTn id="1" dur="indefinite" restart="never" nodeType="tmRoot"/>
-      </p:par>
-    </p:tnLst>
-  </p:timing>
 </p:sld>
 </file>
 
@@ -14942,7 +20188,7 @@
           <a:lstStyle/>
           <a:p>
             <a:r>
-              <a:rPr lang="de-DE" dirty="0" smtClean="0">
+              <a:rPr lang="de-DE" dirty="0">
                 <a:latin typeface="Bahnschrift SemiBold" panose="020B0502040204020203" pitchFamily="34" charset="0"/>
               </a:rPr>
               <a:t>Project Summary</a:t>
@@ -14979,7 +20225,7 @@
               </a:buClr>
             </a:pPr>
             <a:r>
-              <a:rPr lang="de-DE" dirty="0" smtClean="0">
+              <a:rPr lang="de-DE" dirty="0">
                 <a:solidFill>
                   <a:srgbClr val="088259"/>
                 </a:solidFill>
@@ -14988,7 +20234,7 @@
               <a:t>Stroke patient </a:t>
             </a:r>
             <a:r>
-              <a:rPr lang="de-DE" dirty="0" smtClean="0">
+              <a:rPr lang="de-DE" dirty="0">
                 <a:latin typeface="Bahnschrift" panose="020B0502040204020203" pitchFamily="34" charset="0"/>
               </a:rPr>
               <a:t>with chronically implanted </a:t>
@@ -15005,7 +20251,7 @@
           </a:p>
           <a:p>
             <a:r>
-              <a:rPr lang="de-DE" dirty="0" smtClean="0">
+              <a:rPr lang="de-DE" dirty="0">
                 <a:latin typeface="Bahnschrift" panose="020B0502040204020203" pitchFamily="34" charset="0"/>
               </a:rPr>
               <a:t>Spikes sorted into units and sampled at </a:t>
@@ -15036,7 +20282,7 @@
               <a:t>Four</a:t>
             </a:r>
             <a:r>
-              <a:rPr lang="de-DE" dirty="0" smtClean="0">
+              <a:rPr lang="de-DE" dirty="0">
                 <a:latin typeface="Bahnschrift" panose="020B0502040204020203" pitchFamily="34" charset="0"/>
               </a:rPr>
               <a:t> recorded cortical regions </a:t>
@@ -15051,7 +20297,7 @@
               <a:buChar char="§"/>
             </a:pPr>
             <a:r>
-              <a:rPr lang="de-DE" dirty="0" smtClean="0">
+              <a:rPr lang="de-DE" dirty="0">
                 <a:latin typeface="Bahnschrift" panose="020B0502040204020203" pitchFamily="34" charset="0"/>
               </a:rPr>
               <a:t>Frontal:</a:t>
@@ -15066,7 +20312,7 @@
               <a:buChar char="§"/>
             </a:pPr>
             <a:r>
-              <a:rPr lang="de-DE" dirty="0" smtClean="0">
+              <a:rPr lang="de-DE" dirty="0">
                 <a:latin typeface="Bahnschrift" panose="020B0502040204020203" pitchFamily="34" charset="0"/>
               </a:rPr>
               <a:t>MFG &amp; IFG</a:t>
@@ -15081,7 +20327,7 @@
               <a:buChar char="§"/>
             </a:pPr>
             <a:r>
-              <a:rPr lang="de-DE" dirty="0" smtClean="0">
+              <a:rPr lang="de-DE" dirty="0">
                 <a:latin typeface="Bahnschrift" panose="020B0502040204020203" pitchFamily="34" charset="0"/>
               </a:rPr>
               <a:t>Parietal</a:t>
@@ -15096,7 +20342,7 @@
               <a:buChar char="§"/>
             </a:pPr>
             <a:r>
-              <a:rPr lang="de-DE" dirty="0" smtClean="0">
+              <a:rPr lang="de-DE" dirty="0">
                 <a:latin typeface="Bahnschrift" panose="020B0502040204020203" pitchFamily="34" charset="0"/>
               </a:rPr>
               <a:t>SMG &amp; AG</a:t>
@@ -15169,7 +20415,7 @@
           <a:lstStyle/>
           <a:p>
             <a:r>
-              <a:rPr lang="de-DE" sz="1600" dirty="0" smtClean="0">
+              <a:rPr lang="de-DE" sz="1600" dirty="0">
                 <a:solidFill>
                   <a:schemeClr val="tx1">
                     <a:lumMod val="75000"/>
@@ -15215,7 +20461,7 @@
           <a:lstStyle/>
           <a:p>
             <a:r>
-              <a:rPr lang="de-DE" sz="1600" dirty="0" smtClean="0">
+              <a:rPr lang="de-DE" sz="1600" dirty="0">
                 <a:solidFill>
                   <a:schemeClr val="tx1">
                     <a:lumMod val="75000"/>
@@ -15382,13 +20628,6 @@
   <p:clrMapOvr>
     <a:masterClrMapping/>
   </p:clrMapOvr>
-  <p:timing>
-    <p:tnLst>
-      <p:par>
-        <p:cTn id="1" dur="indefinite" restart="never" nodeType="tmRoot"/>
-      </p:par>
-    </p:tnLst>
-  </p:timing>
 </p:sld>
 </file>
 
@@ -15435,7 +20674,7 @@
               </a:buClr>
             </a:pPr>
             <a:r>
-              <a:rPr lang="de-DE" dirty="0" smtClean="0">
+              <a:rPr lang="de-DE" dirty="0">
                 <a:solidFill>
                   <a:srgbClr val="088259"/>
                 </a:solidFill>
@@ -15444,7 +20683,7 @@
               <a:t>Stroke patient </a:t>
             </a:r>
             <a:r>
-              <a:rPr lang="de-DE" dirty="0" smtClean="0">
+              <a:rPr lang="de-DE" dirty="0">
                 <a:latin typeface="Bahnschrift" panose="020B0502040204020203" pitchFamily="34" charset="0"/>
               </a:rPr>
               <a:t>with chronically implanted </a:t>
@@ -15461,7 +20700,7 @@
           </a:p>
           <a:p>
             <a:r>
-              <a:rPr lang="de-DE" dirty="0" smtClean="0">
+              <a:rPr lang="de-DE" dirty="0">
                 <a:latin typeface="Bahnschrift" panose="020B0502040204020203" pitchFamily="34" charset="0"/>
               </a:rPr>
               <a:t>Spikes sorted into units and sampled at </a:t>
@@ -15492,7 +20731,7 @@
               <a:t>Four</a:t>
             </a:r>
             <a:r>
-              <a:rPr lang="de-DE" dirty="0" smtClean="0">
+              <a:rPr lang="de-DE" dirty="0">
                 <a:latin typeface="Bahnschrift" panose="020B0502040204020203" pitchFamily="34" charset="0"/>
               </a:rPr>
               <a:t> recorded cortical regions </a:t>
@@ -15507,7 +20746,7 @@
               <a:buChar char="§"/>
             </a:pPr>
             <a:r>
-              <a:rPr lang="de-DE" dirty="0" smtClean="0">
+              <a:rPr lang="de-DE" dirty="0">
                 <a:latin typeface="Bahnschrift" panose="020B0502040204020203" pitchFamily="34" charset="0"/>
               </a:rPr>
               <a:t>Frontal:</a:t>
@@ -15522,7 +20761,7 @@
               <a:buChar char="§"/>
             </a:pPr>
             <a:r>
-              <a:rPr lang="de-DE" dirty="0" smtClean="0">
+              <a:rPr lang="de-DE" dirty="0">
                 <a:latin typeface="Bahnschrift" panose="020B0502040204020203" pitchFamily="34" charset="0"/>
               </a:rPr>
               <a:t>MFG &amp; IFG</a:t>
@@ -15537,7 +20776,7 @@
               <a:buChar char="§"/>
             </a:pPr>
             <a:r>
-              <a:rPr lang="de-DE" dirty="0" smtClean="0">
+              <a:rPr lang="de-DE" dirty="0">
                 <a:latin typeface="Bahnschrift" panose="020B0502040204020203" pitchFamily="34" charset="0"/>
               </a:rPr>
               <a:t>Parietal</a:t>
@@ -15552,7 +20791,7 @@
               <a:buChar char="§"/>
             </a:pPr>
             <a:r>
-              <a:rPr lang="de-DE" dirty="0" smtClean="0">
+              <a:rPr lang="de-DE" dirty="0">
                 <a:latin typeface="Bahnschrift" panose="020B0502040204020203" pitchFamily="34" charset="0"/>
               </a:rPr>
               <a:t>SMG &amp; AG</a:t>
@@ -15682,13 +20921,6 @@
   <p:clrMapOvr>
     <a:masterClrMapping/>
   </p:clrMapOvr>
-  <p:timing>
-    <p:tnLst>
-      <p:par>
-        <p:cTn id="1" dur="indefinite" restart="never" nodeType="tmRoot"/>
-      </p:par>
-    </p:tnLst>
-  </p:timing>
 </p:sld>
 </file>
 
@@ -15730,7 +20962,7 @@
           <a:lstStyle/>
           <a:p>
             <a:r>
-              <a:rPr lang="de-DE" dirty="0" smtClean="0"/>
+              <a:rPr lang="de-DE" dirty="0"/>
               <a:t>Project Summary</a:t>
             </a:r>
             <a:endParaRPr lang="en-GB" dirty="0"/>
@@ -15830,7 +21062,7 @@
                     <a:lstStyle/>
                     <a:p>
                       <a:r>
-                        <a:rPr lang="de-DE" sz="1800" b="1" dirty="0" smtClean="0">
+                        <a:rPr lang="de-DE" sz="1800" b="1" dirty="0">
                           <a:latin typeface="Bahnschrift" panose="020B0502040204020203" pitchFamily="34" charset="0"/>
                         </a:rPr>
                         <a:t>Safe Side</a:t>
@@ -15852,13 +21084,13 @@
                     <a:lstStyle/>
                     <a:p>
                       <a:r>
-                        <a:rPr lang="de-DE" sz="1800" b="1" dirty="0" smtClean="0">
+                        <a:rPr lang="de-DE" sz="1800" b="1" dirty="0">
                           <a:latin typeface="Bahnschrift" panose="020B0502040204020203" pitchFamily="34" charset="0"/>
                         </a:rPr>
                         <a:t>Gamble</a:t>
                       </a:r>
                       <a:r>
-                        <a:rPr lang="de-DE" sz="1800" b="1" baseline="0" dirty="0" smtClean="0">
+                        <a:rPr lang="de-DE" sz="1800" b="1" baseline="0" dirty="0">
                           <a:latin typeface="Bahnschrift" panose="020B0502040204020203" pitchFamily="34" charset="0"/>
                         </a:rPr>
                         <a:t> Side</a:t>
@@ -15887,7 +21119,7 @@
                     <a:lstStyle/>
                     <a:p>
                       <a:r>
-                        <a:rPr lang="de-DE" b="0" dirty="0" smtClean="0">
+                        <a:rPr lang="de-DE" b="0" dirty="0">
                           <a:latin typeface="Bahnschrift" panose="020B0502040204020203" pitchFamily="34" charset="0"/>
                         </a:rPr>
                         <a:t>1x reward</a:t>
@@ -15909,7 +21141,7 @@
                     <a:lstStyle/>
                     <a:p>
                       <a:r>
-                        <a:rPr lang="de-DE" b="0" dirty="0" smtClean="0">
+                        <a:rPr lang="de-DE" b="0" dirty="0">
                           <a:latin typeface="Bahnschrift" panose="020B0502040204020203" pitchFamily="34" charset="0"/>
                         </a:rPr>
                         <a:t>4x reward</a:t>
@@ -15938,7 +21170,7 @@
                     <a:lstStyle/>
                     <a:p>
                       <a:r>
-                        <a:rPr lang="de-DE" b="0" dirty="0" smtClean="0">
+                        <a:rPr lang="de-DE" b="0" dirty="0">
                           <a:latin typeface="Bahnschrift" panose="020B0502040204020203" pitchFamily="34" charset="0"/>
                         </a:rPr>
                         <a:t>guaranteed probability</a:t>
@@ -15969,7 +21201,7 @@
                     <a:lstStyle/>
                     <a:p>
                       <a:r>
-                        <a:rPr lang="de-DE" b="0" dirty="0" smtClean="0">
+                        <a:rPr lang="de-DE" b="0" dirty="0">
                           <a:latin typeface="Bahnschrift" panose="020B0502040204020203" pitchFamily="34" charset="0"/>
                         </a:rPr>
                         <a:t>varying probability: {0.1, 0.2, 0.4, 0.8}</a:t>
@@ -16024,7 +21256,7 @@
                         <a:defRPr/>
                       </a:pPr>
                       <a:r>
-                        <a:rPr lang="de-DE" b="0" dirty="0" smtClean="0">
+                        <a:rPr lang="de-DE" b="0" dirty="0">
                           <a:latin typeface="Bahnschrift" panose="020B0502040204020203" pitchFamily="34" charset="0"/>
                         </a:rPr>
                         <a:t>          ~3 seconds trial start to trial end</a:t>
@@ -16108,7 +21340,7 @@
                         <a:defRPr/>
                       </a:pPr>
                       <a:r>
-                        <a:rPr lang="de-DE" b="0" dirty="0" smtClean="0">
+                        <a:rPr lang="de-DE" b="0" dirty="0">
                           <a:latin typeface="Bahnschrift" panose="020B0502040204020203" pitchFamily="34" charset="0"/>
                         </a:rPr>
                         <a:t>          ~2h per session duration</a:t>
@@ -16183,7 +21415,7 @@
                         <a:defRPr/>
                       </a:pPr>
                       <a:r>
-                        <a:rPr lang="de-DE" b="0" dirty="0" smtClean="0">
+                        <a:rPr lang="de-DE" b="0" dirty="0">
                           <a:latin typeface="Bahnschrift" panose="020B0502040204020203" pitchFamily="34" charset="0"/>
                         </a:rPr>
                         <a:t>          randomized probability schedule per session</a:t>
@@ -16315,7 +21547,7 @@
             <a:lstStyle/>
             <a:p>
               <a:r>
-                <a:rPr lang="de-DE" sz="1400" dirty="0" smtClean="0">
+                <a:rPr lang="de-DE" sz="1400" dirty="0">
                   <a:latin typeface="Bahnschrift" panose="020B0502040204020203" pitchFamily="34" charset="0"/>
                 </a:rPr>
                 <a:t>Choice Behaviour – Session 21.05.2025</a:t>
@@ -20166,7 +25398,7 @@
           <a:p>
             <a:pPr algn="ctr"/>
             <a:r>
-              <a:rPr lang="de-DE" sz="6600" b="1" dirty="0" smtClean="0">
+              <a:rPr lang="de-DE" sz="6600" b="1" dirty="0">
                 <a:solidFill>
                   <a:schemeClr val="tx1"/>
                 </a:solidFill>
@@ -20174,7 +25406,7 @@
               </a:rPr>
               <a:t>8</a:t>
             </a:r>
-            <a:endParaRPr lang="de-DE" sz="3200" b="1" dirty="0" smtClean="0">
+            <a:endParaRPr lang="de-DE" sz="3200" b="1" dirty="0">
               <a:solidFill>
                 <a:schemeClr val="tx1"/>
               </a:solidFill>
@@ -20184,7 +25416,7 @@
           <a:p>
             <a:pPr algn="ctr"/>
             <a:r>
-              <a:rPr lang="de-DE" sz="2000" b="1" dirty="0" smtClean="0">
+              <a:rPr lang="de-DE" sz="2000" b="1" dirty="0">
                 <a:solidFill>
                   <a:schemeClr val="tx1"/>
                 </a:solidFill>
@@ -20251,7 +25483,7 @@
           <a:p>
             <a:pPr algn="ctr"/>
             <a:r>
-              <a:rPr lang="de-DE" sz="6600" b="1" dirty="0" smtClean="0">
+              <a:rPr lang="de-DE" sz="6600" b="1" dirty="0">
                 <a:solidFill>
                   <a:schemeClr val="tx1"/>
                 </a:solidFill>
@@ -20259,7 +25491,7 @@
               </a:rPr>
               <a:t>6,627</a:t>
             </a:r>
-            <a:endParaRPr lang="de-DE" sz="3200" b="1" dirty="0" smtClean="0">
+            <a:endParaRPr lang="de-DE" sz="3200" b="1" dirty="0">
               <a:solidFill>
                 <a:schemeClr val="tx1"/>
               </a:solidFill>
@@ -20275,16 +25507,7 @@
                 </a:solidFill>
                 <a:latin typeface="Bahnschrift" panose="020B0502040204020203" pitchFamily="34" charset="0"/>
               </a:rPr>
-              <a:t>r</a:t>
-            </a:r>
-            <a:r>
-              <a:rPr lang="de-DE" sz="2000" b="1" dirty="0" smtClean="0">
-                <a:solidFill>
-                  <a:schemeClr val="tx1"/>
-                </a:solidFill>
-                <a:latin typeface="Bahnschrift" panose="020B0502040204020203" pitchFamily="34" charset="0"/>
-              </a:rPr>
-              <a:t>esponding trials</a:t>
+              <a:t>responding trials</a:t>
             </a:r>
             <a:endParaRPr lang="en-GB" sz="3200" b="1" dirty="0">
               <a:solidFill>
@@ -20345,7 +25568,7 @@
           <a:p>
             <a:pPr algn="ctr"/>
             <a:r>
-              <a:rPr lang="de-DE" sz="6600" b="1" dirty="0" smtClean="0">
+              <a:rPr lang="de-DE" sz="6600" b="1" dirty="0">
                 <a:solidFill>
                   <a:schemeClr val="tx1"/>
                 </a:solidFill>
@@ -20353,7 +25576,7 @@
               </a:rPr>
               <a:t>37%</a:t>
             </a:r>
-            <a:endParaRPr lang="de-DE" sz="3200" b="1" dirty="0" smtClean="0">
+            <a:endParaRPr lang="de-DE" sz="3200" b="1" dirty="0">
               <a:solidFill>
                 <a:schemeClr val="tx1"/>
               </a:solidFill>
@@ -20363,7 +25586,7 @@
           <a:p>
             <a:pPr algn="ctr"/>
             <a:r>
-              <a:rPr lang="de-DE" sz="2000" b="1" dirty="0" smtClean="0">
+              <a:rPr lang="de-DE" sz="2000" b="1" dirty="0">
                 <a:solidFill>
                   <a:schemeClr val="tx1"/>
                 </a:solidFill>
@@ -20649,7 +25872,7 @@
           <a:lstStyle/>
           <a:p>
             <a:r>
-              <a:rPr lang="de-DE" dirty="0" smtClean="0">
+              <a:rPr lang="de-DE" dirty="0">
                 <a:latin typeface="Bahnschrift SemiBold" panose="020B0502040204020203" pitchFamily="34" charset="0"/>
               </a:rPr>
               <a:t>Research Questions</a:t>
@@ -20709,7 +25932,7 @@
           <a:lstStyle/>
           <a:p>
             <a:r>
-              <a:rPr lang="de-DE" sz="2800" dirty="0" smtClean="0">
+              <a:rPr lang="de-DE" sz="2800" dirty="0">
                 <a:solidFill>
                   <a:schemeClr val="tx1"/>
                 </a:solidFill>
@@ -20717,6 +25940,8 @@
               </a:rPr>
               <a:t>1 · Selectivity</a:t>
             </a:r>
+          </a:p>
+          <a:p>
             <a:endParaRPr lang="de-DE" sz="2800" dirty="0">
               <a:solidFill>
                 <a:schemeClr val="tx1"/>
@@ -20725,15 +25950,7 @@
             </a:endParaRPr>
           </a:p>
           <a:p>
-            <a:endParaRPr lang="de-DE" sz="2800" dirty="0" smtClean="0">
-              <a:solidFill>
-                <a:schemeClr val="tx1"/>
-              </a:solidFill>
-              <a:latin typeface="Bahnschrift" panose="020B0502040204020203" pitchFamily="34" charset="0"/>
-            </a:endParaRPr>
-          </a:p>
-          <a:p>
-            <a:endParaRPr lang="de-DE" sz="2800" dirty="0" smtClean="0">
+            <a:endParaRPr lang="de-DE" sz="2800" dirty="0">
               <a:solidFill>
                 <a:schemeClr val="tx1"/>
               </a:solidFill>
@@ -20742,22 +25959,13 @@
           </a:p>
           <a:p>
             <a:r>
-              <a:rPr lang="de-DE" sz="2800" dirty="0" smtClean="0">
-                <a:solidFill>
-                  <a:schemeClr val="tx1"/>
-                </a:solidFill>
-                <a:latin typeface="Bahnschrift" panose="020B0502040204020203" pitchFamily="34" charset="0"/>
-              </a:rPr>
-              <a:t>Are </a:t>
-            </a:r>
-            <a:r>
               <a:rPr lang="de-DE" sz="2800" dirty="0">
                 <a:solidFill>
                   <a:schemeClr val="tx1"/>
                 </a:solidFill>
                 <a:latin typeface="Bahnschrift" panose="020B0502040204020203" pitchFamily="34" charset="0"/>
               </a:rPr>
-              <a:t>there neurons that respond </a:t>
+              <a:t>Are there neurons that respond </a:t>
             </a:r>
             <a:r>
               <a:rPr lang="de-DE" sz="2800" b="1" dirty="0">
@@ -20829,23 +26037,8 @@
                 </a:solidFill>
                 <a:latin typeface="Bahnschrift" panose="020B0502040204020203" pitchFamily="34" charset="0"/>
               </a:rPr>
-              <a:t> </a:t>
+              <a:t> arm?</a:t>
             </a:r>
-            <a:r>
-              <a:rPr lang="de-DE" sz="2800" dirty="0" smtClean="0">
-                <a:solidFill>
-                  <a:schemeClr val="tx1"/>
-                </a:solidFill>
-                <a:latin typeface="Bahnschrift" panose="020B0502040204020203" pitchFamily="34" charset="0"/>
-              </a:rPr>
-              <a:t>arm?</a:t>
-            </a:r>
-            <a:endParaRPr lang="de-DE" sz="2800" dirty="0">
-              <a:solidFill>
-                <a:schemeClr val="tx1"/>
-              </a:solidFill>
-              <a:latin typeface="Bahnschrift" panose="020B0502040204020203" pitchFamily="34" charset="0"/>
-            </a:endParaRPr>
           </a:p>
         </p:txBody>
       </p:sp>
@@ -20904,26 +26097,11 @@
                 </a:solidFill>
                 <a:latin typeface="Bahnschrift" panose="020B0502040204020203" pitchFamily="34" charset="0"/>
               </a:rPr>
-              <a:t>2 </a:t>
+              <a:t>2 · Latent Variable encoding</a:t>
             </a:r>
-            <a:r>
-              <a:rPr lang="de-DE" sz="2800" dirty="0" smtClean="0">
-                <a:solidFill>
-                  <a:schemeClr val="tx1"/>
-                </a:solidFill>
-                <a:latin typeface="Bahnschrift" panose="020B0502040204020203" pitchFamily="34" charset="0"/>
-              </a:rPr>
-              <a:t>· Latent Variable encoding</a:t>
-            </a:r>
-            <a:endParaRPr lang="de-DE" sz="2800" dirty="0">
-              <a:solidFill>
-                <a:schemeClr val="tx1"/>
-              </a:solidFill>
-              <a:latin typeface="Bahnschrift" panose="020B0502040204020203" pitchFamily="34" charset="0"/>
-            </a:endParaRPr>
           </a:p>
           <a:p>
-            <a:endParaRPr lang="de-DE" sz="2800" dirty="0" smtClean="0">
+            <a:endParaRPr lang="de-DE" sz="2800" dirty="0">
               <a:solidFill>
                 <a:schemeClr val="tx1"/>
               </a:solidFill>
@@ -20940,7 +26118,7 @@
           </a:p>
           <a:p>
             <a:r>
-              <a:rPr lang="en-GB" sz="2800" dirty="0" smtClean="0">
+              <a:rPr lang="en-GB" sz="2800" dirty="0">
                 <a:solidFill>
                   <a:schemeClr val="tx1"/>
                 </a:solidFill>
@@ -20994,7 +26172,7 @@
               <a:t>model of behaviour</a:t>
             </a:r>
             <a:r>
-              <a:rPr lang="en-GB" sz="2800" dirty="0" smtClean="0">
+              <a:rPr lang="en-GB" sz="2800" dirty="0">
                 <a:solidFill>
                   <a:schemeClr val="tx1"/>
                 </a:solidFill>
@@ -21002,12 +26180,6 @@
               </a:rPr>
               <a:t>?</a:t>
             </a:r>
-            <a:endParaRPr lang="en-GB" sz="2800" dirty="0">
-              <a:solidFill>
-                <a:schemeClr val="tx1"/>
-              </a:solidFill>
-              <a:latin typeface="Bahnschrift" panose="020B0502040204020203" pitchFamily="34" charset="0"/>
-            </a:endParaRPr>
           </a:p>
         </p:txBody>
       </p:sp>
@@ -21280,7 +26452,7 @@
               <a:buNone/>
             </a:pPr>
             <a:r>
-              <a:rPr lang="de-DE" sz="5400" b="1" dirty="0" smtClean="0"/>
+              <a:rPr lang="de-DE" sz="5400" b="1" dirty="0"/>
               <a:t>Z</a:t>
             </a:r>
           </a:p>
@@ -21289,7 +26461,7 @@
               <a:buNone/>
             </a:pPr>
             <a:r>
-              <a:rPr lang="de-DE" sz="5400" b="1" dirty="0" smtClean="0"/>
+              <a:rPr lang="de-DE" sz="5400" b="1" dirty="0"/>
               <a:t>E</a:t>
             </a:r>
           </a:p>
@@ -21298,7 +26470,7 @@
               <a:buNone/>
             </a:pPr>
             <a:r>
-              <a:rPr lang="de-DE" sz="5400" b="1" dirty="0" smtClean="0"/>
+              <a:rPr lang="de-DE" sz="5400" b="1" dirty="0"/>
               <a:t>T   </a:t>
             </a:r>
           </a:p>
@@ -21307,10 +26479,10 @@
               <a:buNone/>
             </a:pPr>
             <a:r>
-              <a:rPr lang="de-DE" sz="5400" b="1" dirty="0" smtClean="0"/>
+              <a:rPr lang="de-DE" sz="5400" b="1" dirty="0"/>
               <a:t>A</a:t>
             </a:r>
-            <a:endParaRPr lang="de-DE" sz="4000" b="1" dirty="0" smtClean="0"/>
+            <a:endParaRPr lang="de-DE" sz="4000" b="1" dirty="0"/>
           </a:p>
           <a:p>
             <a:pPr marL="0" indent="0">
@@ -21559,7 +26731,7 @@
               <a:buNone/>
             </a:pPr>
             <a:r>
-              <a:rPr lang="de-DE" sz="5400" dirty="0" smtClean="0"/>
+              <a:rPr lang="de-DE" sz="5400" dirty="0"/>
               <a:t>enith of</a:t>
             </a:r>
           </a:p>
@@ -21569,7 +26741,7 @@
               <a:buNone/>
             </a:pPr>
             <a:r>
-              <a:rPr lang="de-DE" sz="5400" dirty="0" smtClean="0"/>
+              <a:rPr lang="de-DE" sz="5400" dirty="0"/>
               <a:t>vent-based</a:t>
             </a:r>
           </a:p>
@@ -21579,7 +26751,7 @@
               <a:buNone/>
             </a:pPr>
             <a:r>
-              <a:rPr lang="de-DE" sz="5400" dirty="0" smtClean="0"/>
+              <a:rPr lang="de-DE" sz="5400" dirty="0"/>
               <a:t>ime locked</a:t>
             </a:r>
           </a:p>
@@ -21589,7 +26761,7 @@
               <a:buNone/>
             </a:pPr>
             <a:r>
-              <a:rPr lang="de-DE" sz="5400" dirty="0" smtClean="0"/>
+              <a:rPr lang="de-DE" sz="5400" dirty="0"/>
               <a:t>nomalies</a:t>
             </a:r>
           </a:p>

--- a/presentation/Prototype.pptx
+++ b/presentation/Prototype.pptx
@@ -5,7 +5,7 @@
     <p:sldMasterId id="2147483648" r:id="rId1"/>
   </p:sldMasterIdLst>
   <p:handoutMasterIdLst>
-    <p:handoutMasterId r:id="rId39"/>
+    <p:handoutMasterId r:id="rId40"/>
   </p:handoutMasterIdLst>
   <p:sldIdLst>
     <p:sldId id="256" r:id="rId2"/>
@@ -24,27 +24,28 @@
     <p:sldId id="260" r:id="rId15"/>
     <p:sldId id="268" r:id="rId16"/>
     <p:sldId id="274" r:id="rId17"/>
-    <p:sldId id="287" r:id="rId18"/>
-    <p:sldId id="262" r:id="rId19"/>
-    <p:sldId id="275" r:id="rId20"/>
-    <p:sldId id="277" r:id="rId21"/>
-    <p:sldId id="279" r:id="rId22"/>
-    <p:sldId id="278" r:id="rId23"/>
-    <p:sldId id="296" r:id="rId24"/>
-    <p:sldId id="276" r:id="rId25"/>
-    <p:sldId id="263" r:id="rId26"/>
-    <p:sldId id="283" r:id="rId27"/>
-    <p:sldId id="280" r:id="rId28"/>
-    <p:sldId id="282" r:id="rId29"/>
-    <p:sldId id="265" r:id="rId30"/>
-    <p:sldId id="289" r:id="rId31"/>
+    <p:sldId id="298" r:id="rId18"/>
+    <p:sldId id="287" r:id="rId19"/>
+    <p:sldId id="262" r:id="rId20"/>
+    <p:sldId id="275" r:id="rId21"/>
+    <p:sldId id="277" r:id="rId22"/>
+    <p:sldId id="279" r:id="rId23"/>
+    <p:sldId id="278" r:id="rId24"/>
+    <p:sldId id="296" r:id="rId25"/>
+    <p:sldId id="276" r:id="rId26"/>
+    <p:sldId id="263" r:id="rId27"/>
+    <p:sldId id="283" r:id="rId28"/>
+    <p:sldId id="280" r:id="rId29"/>
+    <p:sldId id="282" r:id="rId30"/>
+    <p:sldId id="265" r:id="rId31"/>
     <p:sldId id="290" r:id="rId32"/>
     <p:sldId id="291" r:id="rId33"/>
     <p:sldId id="288" r:id="rId34"/>
     <p:sldId id="267" r:id="rId35"/>
-    <p:sldId id="284" r:id="rId36"/>
-    <p:sldId id="285" r:id="rId37"/>
-    <p:sldId id="286" r:id="rId38"/>
+    <p:sldId id="300" r:id="rId36"/>
+    <p:sldId id="284" r:id="rId37"/>
+    <p:sldId id="297" r:id="rId38"/>
+    <p:sldId id="299" r:id="rId39"/>
   </p:sldIdLst>
   <p:sldSz cx="12192000" cy="6858000"/>
   <p:notesSz cx="6858000" cy="9144000"/>
@@ -920,7 +921,7 @@
         <a:lstStyle/>
         <a:p>
           <a:r>
-            <a:rPr lang="en-US" sz="2800" kern="1200" dirty="0">
+            <a:rPr lang="en-US" sz="2800" kern="1200" dirty="0" smtClean="0">
               <a:solidFill>
                 <a:schemeClr val="tx1"/>
               </a:solidFill>
@@ -928,8 +929,16 @@
               <a:ea typeface="+mn-ea"/>
               <a:cs typeface="+mn-cs"/>
             </a:rPr>
-            <a:t>out come</a:t>
+            <a:t>out-come</a:t>
           </a:r>
+          <a:endParaRPr lang="en-US" sz="2800" kern="1200" dirty="0">
+            <a:solidFill>
+              <a:schemeClr val="tx1"/>
+            </a:solidFill>
+            <a:latin typeface="Bahnschrift" panose="020B0502040204020203" pitchFamily="34" charset="0"/>
+            <a:ea typeface="+mn-ea"/>
+            <a:cs typeface="+mn-cs"/>
+          </a:endParaRPr>
         </a:p>
       </dgm:t>
     </dgm:pt>
@@ -1062,6 +1071,13 @@
     <dgm:pt modelId="{ECE168B9-97D6-4F75-9289-AF0458231259}" type="pres">
       <dgm:prSet presAssocID="{4DEA52EC-7676-47C9-8D53-46B739BD2587}" presName="wedge1" presStyleLbl="node1" presStyleIdx="0" presStyleCnt="3"/>
       <dgm:spPr/>
+      <dgm:t>
+        <a:bodyPr/>
+        <a:lstStyle/>
+        <a:p>
+          <a:endParaRPr lang="en-US"/>
+        </a:p>
+      </dgm:t>
     </dgm:pt>
     <dgm:pt modelId="{936F56D5-CB26-4B20-B0FA-6C6FE1834F39}" type="pres">
       <dgm:prSet presAssocID="{4DEA52EC-7676-47C9-8D53-46B739BD2587}" presName="dummy1a" presStyleCnt="0"/>
@@ -1080,10 +1096,24 @@
         </dgm:presLayoutVars>
       </dgm:prSet>
       <dgm:spPr/>
+      <dgm:t>
+        <a:bodyPr/>
+        <a:lstStyle/>
+        <a:p>
+          <a:endParaRPr lang="en-US"/>
+        </a:p>
+      </dgm:t>
     </dgm:pt>
     <dgm:pt modelId="{EB2BDB46-B1F8-4502-BAF4-FF4CD80D55D7}" type="pres">
       <dgm:prSet presAssocID="{4DEA52EC-7676-47C9-8D53-46B739BD2587}" presName="wedge2" presStyleLbl="node1" presStyleIdx="1" presStyleCnt="3" custScaleX="121659" custScaleY="114947"/>
       <dgm:spPr/>
+      <dgm:t>
+        <a:bodyPr/>
+        <a:lstStyle/>
+        <a:p>
+          <a:endParaRPr lang="en-US"/>
+        </a:p>
+      </dgm:t>
     </dgm:pt>
     <dgm:pt modelId="{BBCA0883-4239-43BF-8066-2531F61B2759}" type="pres">
       <dgm:prSet presAssocID="{4DEA52EC-7676-47C9-8D53-46B739BD2587}" presName="dummy2a" presStyleCnt="0"/>
@@ -1102,10 +1132,24 @@
         </dgm:presLayoutVars>
       </dgm:prSet>
       <dgm:spPr/>
+      <dgm:t>
+        <a:bodyPr/>
+        <a:lstStyle/>
+        <a:p>
+          <a:endParaRPr lang="en-US"/>
+        </a:p>
+      </dgm:t>
     </dgm:pt>
     <dgm:pt modelId="{D5E000D8-9AAE-49A4-87FF-0642AB719E81}" type="pres">
       <dgm:prSet presAssocID="{4DEA52EC-7676-47C9-8D53-46B739BD2587}" presName="wedge3" presStyleLbl="node1" presStyleIdx="2" presStyleCnt="3"/>
       <dgm:spPr/>
+      <dgm:t>
+        <a:bodyPr/>
+        <a:lstStyle/>
+        <a:p>
+          <a:endParaRPr lang="en-US"/>
+        </a:p>
+      </dgm:t>
     </dgm:pt>
     <dgm:pt modelId="{8245ECD6-57B2-4F6F-B83D-4AB0EA52FE4D}" type="pres">
       <dgm:prSet presAssocID="{4DEA52EC-7676-47C9-8D53-46B739BD2587}" presName="dummy3a" presStyleCnt="0"/>
@@ -1124,6 +1168,13 @@
         </dgm:presLayoutVars>
       </dgm:prSet>
       <dgm:spPr/>
+      <dgm:t>
+        <a:bodyPr/>
+        <a:lstStyle/>
+        <a:p>
+          <a:endParaRPr lang="en-US"/>
+        </a:p>
+      </dgm:t>
     </dgm:pt>
     <dgm:pt modelId="{E8DD7363-32E9-4432-A10F-A450F8052676}" type="pres">
       <dgm:prSet presAssocID="{2B269CAD-26B2-49B7-8DBE-9F0441B9BE1E}" presName="arrowWedge1" presStyleLbl="fgSibTrans2D1" presStyleIdx="0" presStyleCnt="3"/>
@@ -1151,16 +1202,16 @@
     </dgm:pt>
   </dgm:ptLst>
   <dgm:cxnLst>
+    <dgm:cxn modelId="{26E01A93-AAB4-4B0E-9714-DDECC3C8A632}" srcId="{4DEA52EC-7676-47C9-8D53-46B739BD2587}" destId="{465ABD7E-49EC-43D9-97C5-6A4B67335834}" srcOrd="2" destOrd="0" parTransId="{F86C5027-5A3B-4A7A-A8C2-CE64D014DE97}" sibTransId="{B0E0A821-4726-4C37-A1CE-BF1E908724BF}"/>
     <dgm:cxn modelId="{A3BD1D09-917F-446D-BBFC-01EE249FBAC4}" srcId="{4DEA52EC-7676-47C9-8D53-46B739BD2587}" destId="{DBF283F7-617E-4082-A2AD-BFAAF939546A}" srcOrd="0" destOrd="0" parTransId="{48859DF4-1CAC-4FFA-950E-A8C3D6C6EDD0}" sibTransId="{2B269CAD-26B2-49B7-8DBE-9F0441B9BE1E}"/>
+    <dgm:cxn modelId="{9C4AFFA6-8D65-4D9A-ACAC-4F79155E5D3C}" type="presOf" srcId="{4DEA52EC-7676-47C9-8D53-46B739BD2587}" destId="{5B589FE8-1180-43E9-9DD9-8C60F02AF256}" srcOrd="0" destOrd="0" presId="urn:microsoft.com/office/officeart/2005/8/layout/cycle8"/>
+    <dgm:cxn modelId="{A888CEDD-92B2-4708-BD8D-16EAECE9934F}" type="presOf" srcId="{DBF283F7-617E-4082-A2AD-BFAAF939546A}" destId="{ECE168B9-97D6-4F75-9289-AF0458231259}" srcOrd="0" destOrd="0" presId="urn:microsoft.com/office/officeart/2005/8/layout/cycle8"/>
     <dgm:cxn modelId="{E0EB9B1E-AC48-4775-B852-9ACA75C44C78}" type="presOf" srcId="{0BC66A2B-1DD2-4A8C-A7E6-4706A5A565F2}" destId="{10A53F47-8ED4-4B0B-B765-C54515E800D2}" srcOrd="1" destOrd="0" presId="urn:microsoft.com/office/officeart/2005/8/layout/cycle8"/>
     <dgm:cxn modelId="{0B220C60-5818-43B2-939E-982284DA03A5}" type="presOf" srcId="{465ABD7E-49EC-43D9-97C5-6A4B67335834}" destId="{D5E000D8-9AAE-49A4-87FF-0642AB719E81}" srcOrd="0" destOrd="0" presId="urn:microsoft.com/office/officeart/2005/8/layout/cycle8"/>
-    <dgm:cxn modelId="{26E01A93-AAB4-4B0E-9714-DDECC3C8A632}" srcId="{4DEA52EC-7676-47C9-8D53-46B739BD2587}" destId="{465ABD7E-49EC-43D9-97C5-6A4B67335834}" srcOrd="2" destOrd="0" parTransId="{F86C5027-5A3B-4A7A-A8C2-CE64D014DE97}" sibTransId="{B0E0A821-4726-4C37-A1CE-BF1E908724BF}"/>
     <dgm:cxn modelId="{BB0E7396-0C60-44A9-95EE-3F01D4E9DE43}" type="presOf" srcId="{0BC66A2B-1DD2-4A8C-A7E6-4706A5A565F2}" destId="{EB2BDB46-B1F8-4502-BAF4-FF4CD80D55D7}" srcOrd="0" destOrd="0" presId="urn:microsoft.com/office/officeart/2005/8/layout/cycle8"/>
-    <dgm:cxn modelId="{9C4AFFA6-8D65-4D9A-ACAC-4F79155E5D3C}" type="presOf" srcId="{4DEA52EC-7676-47C9-8D53-46B739BD2587}" destId="{5B589FE8-1180-43E9-9DD9-8C60F02AF256}" srcOrd="0" destOrd="0" presId="urn:microsoft.com/office/officeart/2005/8/layout/cycle8"/>
+    <dgm:cxn modelId="{054D30D1-3227-4A91-8F68-5D1E792E8774}" srcId="{4DEA52EC-7676-47C9-8D53-46B739BD2587}" destId="{0BC66A2B-1DD2-4A8C-A7E6-4706A5A565F2}" srcOrd="1" destOrd="0" parTransId="{53A6D6CB-1B65-4EC5-8C87-678BCA6B287D}" sibTransId="{5F85C5D3-97EB-437D-BC96-722C0B626794}"/>
     <dgm:cxn modelId="{645A2DB8-3540-49FE-A150-CFEC60E8473A}" type="presOf" srcId="{465ABD7E-49EC-43D9-97C5-6A4B67335834}" destId="{6DDCB976-2FE0-4A90-B6ED-DE80609CC20C}" srcOrd="1" destOrd="0" presId="urn:microsoft.com/office/officeart/2005/8/layout/cycle8"/>
     <dgm:cxn modelId="{221C58C9-64CB-4D36-BA60-E09FC27F6E29}" type="presOf" srcId="{DBF283F7-617E-4082-A2AD-BFAAF939546A}" destId="{B96C4C7D-8621-4D0F-BBC4-D8B0CA18F115}" srcOrd="1" destOrd="0" presId="urn:microsoft.com/office/officeart/2005/8/layout/cycle8"/>
-    <dgm:cxn modelId="{054D30D1-3227-4A91-8F68-5D1E792E8774}" srcId="{4DEA52EC-7676-47C9-8D53-46B739BD2587}" destId="{0BC66A2B-1DD2-4A8C-A7E6-4706A5A565F2}" srcOrd="1" destOrd="0" parTransId="{53A6D6CB-1B65-4EC5-8C87-678BCA6B287D}" sibTransId="{5F85C5D3-97EB-437D-BC96-722C0B626794}"/>
-    <dgm:cxn modelId="{A888CEDD-92B2-4708-BD8D-16EAECE9934F}" type="presOf" srcId="{DBF283F7-617E-4082-A2AD-BFAAF939546A}" destId="{ECE168B9-97D6-4F75-9289-AF0458231259}" srcOrd="0" destOrd="0" presId="urn:microsoft.com/office/officeart/2005/8/layout/cycle8"/>
     <dgm:cxn modelId="{2D01EE17-B314-4859-9BDA-46F0F211E530}" type="presParOf" srcId="{5B589FE8-1180-43E9-9DD9-8C60F02AF256}" destId="{ECE168B9-97D6-4F75-9289-AF0458231259}" srcOrd="0" destOrd="0" presId="urn:microsoft.com/office/officeart/2005/8/layout/cycle8"/>
     <dgm:cxn modelId="{650500E8-FF35-4B10-B79D-B941396585E3}" type="presParOf" srcId="{5B589FE8-1180-43E9-9DD9-8C60F02AF256}" destId="{936F56D5-CB26-4B20-B0FA-6C6FE1834F39}" srcOrd="1" destOrd="0" presId="urn:microsoft.com/office/officeart/2005/8/layout/cycle8"/>
     <dgm:cxn modelId="{AB88B786-4180-409E-85F7-4EEBABBE756B}" type="presParOf" srcId="{5B589FE8-1180-43E9-9DD9-8C60F02AF256}" destId="{F60AA58E-22C8-4E39-ACCD-DFB7D3AA2B40}" srcOrd="2" destOrd="0" presId="urn:microsoft.com/office/officeart/2005/8/layout/cycle8"/>
@@ -1248,7 +1299,7 @@
         </a:bodyPr>
         <a:lstStyle/>
         <a:p>
-          <a:pPr marL="0" lvl="0" indent="0" algn="ctr" defTabSz="1244600">
+          <a:pPr lvl="0" algn="ctr" defTabSz="1244600">
             <a:lnSpc>
               <a:spcPct val="90000"/>
             </a:lnSpc>
@@ -1258,10 +1309,9 @@
             <a:spcAft>
               <a:spcPct val="35000"/>
             </a:spcAft>
-            <a:buNone/>
           </a:pPr>
           <a:r>
-            <a:rPr lang="en-US" sz="2800" kern="1200" dirty="0">
+            <a:rPr lang="en-US" sz="2800" kern="1200" dirty="0" smtClean="0">
               <a:solidFill>
                 <a:schemeClr val="tx1"/>
               </a:solidFill>
@@ -1269,8 +1319,16 @@
               <a:ea typeface="+mn-ea"/>
               <a:cs typeface="+mn-cs"/>
             </a:rPr>
-            <a:t>out come</a:t>
+            <a:t>out-come</a:t>
           </a:r>
+          <a:endParaRPr lang="en-US" sz="2800" kern="1200" dirty="0">
+            <a:solidFill>
+              <a:schemeClr val="tx1"/>
+            </a:solidFill>
+            <a:latin typeface="Bahnschrift" panose="020B0502040204020203" pitchFamily="34" charset="0"/>
+            <a:ea typeface="+mn-ea"/>
+            <a:cs typeface="+mn-cs"/>
+          </a:endParaRPr>
         </a:p>
       </dsp:txBody>
       <dsp:txXfrm>
@@ -1331,7 +1389,7 @@
         </a:bodyPr>
         <a:lstStyle/>
         <a:p>
-          <a:pPr marL="0" lvl="0" indent="0" algn="ctr" defTabSz="1244600">
+          <a:pPr lvl="0" algn="ctr" defTabSz="1244600">
             <a:lnSpc>
               <a:spcPct val="90000"/>
             </a:lnSpc>
@@ -1341,7 +1399,6 @@
             <a:spcAft>
               <a:spcPct val="35000"/>
             </a:spcAft>
-            <a:buNone/>
           </a:pPr>
           <a:r>
             <a:rPr lang="en-US" sz="2800" b="1" kern="1200" dirty="0">
@@ -1414,7 +1471,7 @@
         </a:bodyPr>
         <a:lstStyle/>
         <a:p>
-          <a:pPr marL="0" lvl="0" indent="0" algn="ctr" defTabSz="1244600">
+          <a:pPr lvl="0" algn="ctr" defTabSz="1244600">
             <a:lnSpc>
               <a:spcPct val="90000"/>
             </a:lnSpc>
@@ -1424,7 +1481,6 @@
             <a:spcAft>
               <a:spcPct val="35000"/>
             </a:spcAft>
-            <a:buNone/>
           </a:pPr>
           <a:r>
             <a:rPr lang="en-US" sz="2800" kern="1200" dirty="0">
@@ -4450,7 +4506,7 @@
           <a:p>
             <a:fld id="{5E749028-7B03-4B02-885C-D77113521619}" type="datetimeFigureOut">
               <a:rPr lang="en-GB" smtClean="0"/>
-              <a:t>28/06/2026</a:t>
+              <a:t>29/06/2026</a:t>
             </a:fld>
             <a:endParaRPr lang="en-GB"/>
           </a:p>
@@ -4516,7 +4572,7 @@
           <a:p>
             <a:fld id="{1F4AF040-EF21-481B-90AC-C83BDA3491BA}" type="slidenum">
               <a:rPr lang="en-GB" smtClean="0"/>
-              <a:t>‹Nr.›</a:t>
+              <a:t>‹#›</a:t>
             </a:fld>
             <a:endParaRPr lang="en-GB"/>
           </a:p>
@@ -4664,7 +4720,7 @@
           <a:p>
             <a:fld id="{6F6F51E0-DBB7-4D25-9D37-AF761FC91A0D}" type="datetimeFigureOut">
               <a:rPr lang="en-GB" smtClean="0"/>
-              <a:t>28/06/2026</a:t>
+              <a:t>29/06/2026</a:t>
             </a:fld>
             <a:endParaRPr lang="en-GB"/>
           </a:p>
@@ -4706,7 +4762,7 @@
           <a:p>
             <a:fld id="{8E09F03E-0454-4873-96B1-F60F4F6155FC}" type="slidenum">
               <a:rPr lang="en-GB" smtClean="0"/>
-              <a:t>‹Nr.›</a:t>
+              <a:t>‹#›</a:t>
             </a:fld>
             <a:endParaRPr lang="en-GB"/>
           </a:p>
@@ -4834,7 +4890,7 @@
           <a:p>
             <a:fld id="{6F6F51E0-DBB7-4D25-9D37-AF761FC91A0D}" type="datetimeFigureOut">
               <a:rPr lang="en-GB" smtClean="0"/>
-              <a:t>28/06/2026</a:t>
+              <a:t>29/06/2026</a:t>
             </a:fld>
             <a:endParaRPr lang="en-GB"/>
           </a:p>
@@ -4876,7 +4932,7 @@
           <a:p>
             <a:fld id="{8E09F03E-0454-4873-96B1-F60F4F6155FC}" type="slidenum">
               <a:rPr lang="en-GB" smtClean="0"/>
-              <a:t>‹Nr.›</a:t>
+              <a:t>‹#›</a:t>
             </a:fld>
             <a:endParaRPr lang="en-GB"/>
           </a:p>
@@ -5014,7 +5070,7 @@
           <a:p>
             <a:fld id="{6F6F51E0-DBB7-4D25-9D37-AF761FC91A0D}" type="datetimeFigureOut">
               <a:rPr lang="en-GB" smtClean="0"/>
-              <a:t>28/06/2026</a:t>
+              <a:t>29/06/2026</a:t>
             </a:fld>
             <a:endParaRPr lang="en-GB"/>
           </a:p>
@@ -5056,7 +5112,7 @@
           <a:p>
             <a:fld id="{8E09F03E-0454-4873-96B1-F60F4F6155FC}" type="slidenum">
               <a:rPr lang="en-GB" smtClean="0"/>
-              <a:t>‹Nr.›</a:t>
+              <a:t>‹#›</a:t>
             </a:fld>
             <a:endParaRPr lang="en-GB"/>
           </a:p>
@@ -5216,7 +5272,7 @@
           <a:p>
             <a:fld id="{6F6F51E0-DBB7-4D25-9D37-AF761FC91A0D}" type="datetimeFigureOut">
               <a:rPr lang="en-GB" smtClean="0"/>
-              <a:t>28/06/2026</a:t>
+              <a:t>29/06/2026</a:t>
             </a:fld>
             <a:endParaRPr lang="en-GB"/>
           </a:p>
@@ -5258,7 +5314,7 @@
           <a:p>
             <a:fld id="{8E09F03E-0454-4873-96B1-F60F4F6155FC}" type="slidenum">
               <a:rPr lang="en-GB" smtClean="0"/>
-              <a:t>‹Nr.›</a:t>
+              <a:t>‹#›</a:t>
             </a:fld>
             <a:endParaRPr lang="en-GB"/>
           </a:p>
@@ -5462,7 +5518,7 @@
           <a:p>
             <a:fld id="{6F6F51E0-DBB7-4D25-9D37-AF761FC91A0D}" type="datetimeFigureOut">
               <a:rPr lang="en-GB" smtClean="0"/>
-              <a:t>28/06/2026</a:t>
+              <a:t>29/06/2026</a:t>
             </a:fld>
             <a:endParaRPr lang="en-GB"/>
           </a:p>
@@ -5504,7 +5560,7 @@
           <a:p>
             <a:fld id="{8E09F03E-0454-4873-96B1-F60F4F6155FC}" type="slidenum">
               <a:rPr lang="en-GB" smtClean="0"/>
-              <a:t>‹Nr.›</a:t>
+              <a:t>‹#›</a:t>
             </a:fld>
             <a:endParaRPr lang="en-GB"/>
           </a:p>
@@ -5694,7 +5750,7 @@
           <a:p>
             <a:fld id="{6F6F51E0-DBB7-4D25-9D37-AF761FC91A0D}" type="datetimeFigureOut">
               <a:rPr lang="en-GB" smtClean="0"/>
-              <a:t>28/06/2026</a:t>
+              <a:t>29/06/2026</a:t>
             </a:fld>
             <a:endParaRPr lang="en-GB"/>
           </a:p>
@@ -5736,7 +5792,7 @@
           <a:p>
             <a:fld id="{8E09F03E-0454-4873-96B1-F60F4F6155FC}" type="slidenum">
               <a:rPr lang="en-GB" smtClean="0"/>
-              <a:t>‹Nr.›</a:t>
+              <a:t>‹#›</a:t>
             </a:fld>
             <a:endParaRPr lang="en-GB"/>
           </a:p>
@@ -6061,7 +6117,7 @@
           <a:p>
             <a:fld id="{6F6F51E0-DBB7-4D25-9D37-AF761FC91A0D}" type="datetimeFigureOut">
               <a:rPr lang="en-GB" smtClean="0"/>
-              <a:t>28/06/2026</a:t>
+              <a:t>29/06/2026</a:t>
             </a:fld>
             <a:endParaRPr lang="en-GB"/>
           </a:p>
@@ -6103,7 +6159,7 @@
           <a:p>
             <a:fld id="{8E09F03E-0454-4873-96B1-F60F4F6155FC}" type="slidenum">
               <a:rPr lang="en-GB" smtClean="0"/>
-              <a:t>‹Nr.›</a:t>
+              <a:t>‹#›</a:t>
             </a:fld>
             <a:endParaRPr lang="en-GB"/>
           </a:p>
@@ -6179,7 +6235,7 @@
           <a:p>
             <a:fld id="{6F6F51E0-DBB7-4D25-9D37-AF761FC91A0D}" type="datetimeFigureOut">
               <a:rPr lang="en-GB" smtClean="0"/>
-              <a:t>28/06/2026</a:t>
+              <a:t>29/06/2026</a:t>
             </a:fld>
             <a:endParaRPr lang="en-GB"/>
           </a:p>
@@ -6221,7 +6277,7 @@
           <a:p>
             <a:fld id="{8E09F03E-0454-4873-96B1-F60F4F6155FC}" type="slidenum">
               <a:rPr lang="en-GB" smtClean="0"/>
-              <a:t>‹Nr.›</a:t>
+              <a:t>‹#›</a:t>
             </a:fld>
             <a:endParaRPr lang="en-GB"/>
           </a:p>
@@ -6274,7 +6330,7 @@
           <a:p>
             <a:fld id="{6F6F51E0-DBB7-4D25-9D37-AF761FC91A0D}" type="datetimeFigureOut">
               <a:rPr lang="en-GB" smtClean="0"/>
-              <a:t>28/06/2026</a:t>
+              <a:t>29/06/2026</a:t>
             </a:fld>
             <a:endParaRPr lang="en-GB"/>
           </a:p>
@@ -6316,7 +6372,7 @@
           <a:p>
             <a:fld id="{8E09F03E-0454-4873-96B1-F60F4F6155FC}" type="slidenum">
               <a:rPr lang="en-GB" smtClean="0"/>
-              <a:t>‹Nr.›</a:t>
+              <a:t>‹#›</a:t>
             </a:fld>
             <a:endParaRPr lang="en-GB"/>
           </a:p>
@@ -6551,7 +6607,7 @@
           <a:p>
             <a:fld id="{6F6F51E0-DBB7-4D25-9D37-AF761FC91A0D}" type="datetimeFigureOut">
               <a:rPr lang="en-GB" smtClean="0"/>
-              <a:t>28/06/2026</a:t>
+              <a:t>29/06/2026</a:t>
             </a:fld>
             <a:endParaRPr lang="en-GB"/>
           </a:p>
@@ -6593,7 +6649,7 @@
           <a:p>
             <a:fld id="{8E09F03E-0454-4873-96B1-F60F4F6155FC}" type="slidenum">
               <a:rPr lang="en-GB" smtClean="0"/>
-              <a:t>‹Nr.›</a:t>
+              <a:t>‹#›</a:t>
             </a:fld>
             <a:endParaRPr lang="en-GB"/>
           </a:p>
@@ -6804,7 +6860,7 @@
           <a:p>
             <a:fld id="{6F6F51E0-DBB7-4D25-9D37-AF761FC91A0D}" type="datetimeFigureOut">
               <a:rPr lang="en-GB" smtClean="0"/>
-              <a:t>28/06/2026</a:t>
+              <a:t>29/06/2026</a:t>
             </a:fld>
             <a:endParaRPr lang="en-GB"/>
           </a:p>
@@ -6846,7 +6902,7 @@
           <a:p>
             <a:fld id="{8E09F03E-0454-4873-96B1-F60F4F6155FC}" type="slidenum">
               <a:rPr lang="en-GB" smtClean="0"/>
-              <a:t>‹Nr.›</a:t>
+              <a:t>‹#›</a:t>
             </a:fld>
             <a:endParaRPr lang="en-GB"/>
           </a:p>
@@ -7026,7 +7082,7 @@
           <a:p>
             <a:fld id="{6F6F51E0-DBB7-4D25-9D37-AF761FC91A0D}" type="datetimeFigureOut">
               <a:rPr lang="en-GB" smtClean="0"/>
-              <a:t>28/06/2026</a:t>
+              <a:t>29/06/2026</a:t>
             </a:fld>
             <a:endParaRPr lang="en-GB"/>
           </a:p>
@@ -7104,7 +7160,7 @@
           <a:p>
             <a:fld id="{8E09F03E-0454-4873-96B1-F60F4F6155FC}" type="slidenum">
               <a:rPr lang="en-GB" smtClean="0"/>
-              <a:t>‹Nr.›</a:t>
+              <a:t>‹#›</a:t>
             </a:fld>
             <a:endParaRPr lang="en-GB"/>
           </a:p>
@@ -7755,6 +7811,13 @@
   <p:clrMapOvr>
     <a:masterClrMapping/>
   </p:clrMapOvr>
+  <p:timing>
+    <p:tnLst>
+      <p:par>
+        <p:cTn id="1" dur="indefinite" restart="never" nodeType="tmRoot"/>
+      </p:par>
+    </p:tnLst>
+  </p:timing>
 </p:sld>
 </file>
 
@@ -13703,6 +13766,79 @@
           </a:p>
         </p:txBody>
       </p:sp>
+      <p:sp>
+        <p:nvSpPr>
+          <p:cNvPr id="4" name="Rounded Rectangle 8">
+            <a:extLst>
+              <a:ext uri="{FF2B5EF4-FFF2-40B4-BE49-F238E27FC236}">
+                <a16:creationId xmlns:a16="http://schemas.microsoft.com/office/drawing/2014/main" id="{E4DA88D5-3355-65A7-49E6-A8851A2ADA16}"/>
+              </a:ext>
+            </a:extLst>
+          </p:cNvPr>
+          <p:cNvSpPr/>
+          <p:nvPr/>
+        </p:nvSpPr>
+        <p:spPr>
+          <a:xfrm>
+            <a:off x="7262949" y="2857521"/>
+            <a:ext cx="2915195" cy="1516561"/>
+          </a:xfrm>
+          <a:prstGeom prst="roundRect">
+            <a:avLst>
+              <a:gd name="adj" fmla="val 37941"/>
+            </a:avLst>
+          </a:prstGeom>
+          <a:solidFill>
+            <a:srgbClr val="FFFDF7"/>
+          </a:solidFill>
+          <a:ln w="76200">
+            <a:solidFill>
+              <a:schemeClr val="accent4">
+                <a:lumMod val="20000"/>
+                <a:lumOff val="80000"/>
+              </a:schemeClr>
+            </a:solidFill>
+          </a:ln>
+        </p:spPr>
+        <p:style>
+          <a:lnRef idx="2">
+            <a:schemeClr val="accent1">
+              <a:shade val="50000"/>
+            </a:schemeClr>
+          </a:lnRef>
+          <a:fillRef idx="1">
+            <a:schemeClr val="accent1"/>
+          </a:fillRef>
+          <a:effectRef idx="0">
+            <a:schemeClr val="accent1"/>
+          </a:effectRef>
+          <a:fontRef idx="minor">
+            <a:schemeClr val="lt1"/>
+          </a:fontRef>
+        </p:style>
+        <p:txBody>
+          <a:bodyPr rtlCol="0" anchor="ctr"/>
+          <a:lstStyle/>
+          <a:p>
+            <a:pPr algn="ctr"/>
+            <a:r>
+              <a:rPr lang="de-DE" sz="3200" b="1" dirty="0" smtClean="0">
+                <a:solidFill>
+                  <a:schemeClr val="tx1"/>
+                </a:solidFill>
+                <a:latin typeface="Bahnschrift" panose="020B0502040204020203" pitchFamily="34" charset="0"/>
+              </a:rPr>
+              <a:t>More visual</a:t>
+            </a:r>
+            <a:endParaRPr lang="en-GB" sz="1200" b="1" dirty="0">
+              <a:solidFill>
+                <a:schemeClr val="tx1"/>
+              </a:solidFill>
+              <a:latin typeface="Bahnschrift" panose="020B0502040204020203" pitchFamily="34" charset="0"/>
+            </a:endParaRPr>
+          </a:p>
+        </p:txBody>
+      </p:sp>
     </p:spTree>
     <p:extLst>
       <p:ext uri="{BB962C8B-B14F-4D97-AF65-F5344CB8AC3E}">
@@ -13963,6 +14099,50 @@
                             </p:childTnLst>
                           </p:cTn>
                         </p:par>
+                        <p:par>
+                          <p:cTn id="23" fill="hold">
+                            <p:stCondLst>
+                              <p:cond delay="0"/>
+                            </p:stCondLst>
+                            <p:childTnLst>
+                              <p:par>
+                                <p:cTn id="24" presetID="10" presetClass="entr" presetSubtype="0" fill="hold" grpId="0" nodeType="afterEffect">
+                                  <p:stCondLst>
+                                    <p:cond delay="0"/>
+                                  </p:stCondLst>
+                                  <p:childTnLst>
+                                    <p:set>
+                                      <p:cBhvr>
+                                        <p:cTn id="25" dur="1" fill="hold">
+                                          <p:stCondLst>
+                                            <p:cond delay="0"/>
+                                          </p:stCondLst>
+                                        </p:cTn>
+                                        <p:tgtEl>
+                                          <p:spTgt spid="4"/>
+                                        </p:tgtEl>
+                                        <p:attrNameLst>
+                                          <p:attrName>style.visibility</p:attrName>
+                                        </p:attrNameLst>
+                                      </p:cBhvr>
+                                      <p:to>
+                                        <p:strVal val="visible"/>
+                                      </p:to>
+                                    </p:set>
+                                    <p:animEffect transition="in" filter="fade">
+                                      <p:cBhvr>
+                                        <p:cTn id="26" dur="250"/>
+                                        <p:tgtEl>
+                                          <p:spTgt spid="4"/>
+                                        </p:tgtEl>
+                                      </p:cBhvr>
+                                    </p:animEffect>
+                                  </p:childTnLst>
+                                </p:cTn>
+                              </p:par>
+                            </p:childTnLst>
+                          </p:cTn>
+                        </p:par>
                       </p:childTnLst>
                     </p:cTn>
                   </p:par>
@@ -13987,6 +14167,9 @@
         </p:cTn>
       </p:par>
     </p:tnLst>
+    <p:bldLst>
+      <p:bldP spid="4" grpId="0" animBg="1"/>
+    </p:bldLst>
   </p:timing>
 </p:sld>
 </file>
@@ -14123,6 +14306,13 @@
   <p:clrMapOvr>
     <a:masterClrMapping/>
   </p:clrMapOvr>
+  <p:timing>
+    <p:tnLst>
+      <p:par>
+        <p:cTn id="1" dur="indefinite" restart="never" nodeType="tmRoot"/>
+      </p:par>
+    </p:tnLst>
+  </p:timing>
 </p:sld>
 </file>
 
@@ -14189,8 +14379,8 @@
         </p:nvSpPr>
         <p:spPr>
           <a:xfrm>
-            <a:off x="-278953" y="-395763"/>
-            <a:ext cx="12776548" cy="1803748"/>
+            <a:off x="-278953" y="-72825"/>
+            <a:ext cx="12556851" cy="1480810"/>
           </a:xfrm>
           <a:prstGeom prst="rect">
             <a:avLst/>
@@ -14420,6 +14610,79 @@
           </a:p>
           <a:p>
             <a:endParaRPr lang="en-GB" sz="2800" dirty="0">
+              <a:solidFill>
+                <a:schemeClr val="tx1"/>
+              </a:solidFill>
+              <a:latin typeface="Bahnschrift" panose="020B0502040204020203" pitchFamily="34" charset="0"/>
+            </a:endParaRPr>
+          </a:p>
+        </p:txBody>
+      </p:sp>
+      <p:sp>
+        <p:nvSpPr>
+          <p:cNvPr id="6" name="Rounded Rectangle 8">
+            <a:extLst>
+              <a:ext uri="{FF2B5EF4-FFF2-40B4-BE49-F238E27FC236}">
+                <a16:creationId xmlns:a16="http://schemas.microsoft.com/office/drawing/2014/main" id="{E4DA88D5-3355-65A7-49E6-A8851A2ADA16}"/>
+              </a:ext>
+            </a:extLst>
+          </p:cNvPr>
+          <p:cNvSpPr/>
+          <p:nvPr/>
+        </p:nvSpPr>
+        <p:spPr>
+          <a:xfrm>
+            <a:off x="5599599" y="3864932"/>
+            <a:ext cx="2915195" cy="1516561"/>
+          </a:xfrm>
+          <a:prstGeom prst="roundRect">
+            <a:avLst>
+              <a:gd name="adj" fmla="val 37941"/>
+            </a:avLst>
+          </a:prstGeom>
+          <a:solidFill>
+            <a:srgbClr val="FFFDF7"/>
+          </a:solidFill>
+          <a:ln w="76200">
+            <a:solidFill>
+              <a:schemeClr val="accent4">
+                <a:lumMod val="20000"/>
+                <a:lumOff val="80000"/>
+              </a:schemeClr>
+            </a:solidFill>
+          </a:ln>
+        </p:spPr>
+        <p:style>
+          <a:lnRef idx="2">
+            <a:schemeClr val="accent1">
+              <a:shade val="50000"/>
+            </a:schemeClr>
+          </a:lnRef>
+          <a:fillRef idx="1">
+            <a:schemeClr val="accent1"/>
+          </a:fillRef>
+          <a:effectRef idx="0">
+            <a:schemeClr val="accent1"/>
+          </a:effectRef>
+          <a:fontRef idx="minor">
+            <a:schemeClr val="lt1"/>
+          </a:fontRef>
+        </p:style>
+        <p:txBody>
+          <a:bodyPr rtlCol="0" anchor="ctr"/>
+          <a:lstStyle/>
+          <a:p>
+            <a:pPr algn="ctr"/>
+            <a:r>
+              <a:rPr lang="de-DE" sz="3200" b="1" dirty="0" smtClean="0">
+                <a:solidFill>
+                  <a:schemeClr val="tx1"/>
+                </a:solidFill>
+                <a:latin typeface="Bahnschrift" panose="020B0502040204020203" pitchFamily="34" charset="0"/>
+              </a:rPr>
+              <a:t>rasterplot</a:t>
+            </a:r>
+            <a:endParaRPr lang="en-GB" sz="1200" b="1" dirty="0">
               <a:solidFill>
                 <a:schemeClr val="tx1"/>
               </a:solidFill>
@@ -14651,6 +14914,50 @@
                             </p:childTnLst>
                           </p:cTn>
                         </p:par>
+                        <p:par>
+                          <p:cTn id="16" fill="hold">
+                            <p:stCondLst>
+                              <p:cond delay="250"/>
+                            </p:stCondLst>
+                            <p:childTnLst>
+                              <p:par>
+                                <p:cTn id="17" presetID="10" presetClass="entr" presetSubtype="0" fill="hold" grpId="0" nodeType="afterEffect">
+                                  <p:stCondLst>
+                                    <p:cond delay="0"/>
+                                  </p:stCondLst>
+                                  <p:childTnLst>
+                                    <p:set>
+                                      <p:cBhvr>
+                                        <p:cTn id="18" dur="1" fill="hold">
+                                          <p:stCondLst>
+                                            <p:cond delay="0"/>
+                                          </p:stCondLst>
+                                        </p:cTn>
+                                        <p:tgtEl>
+                                          <p:spTgt spid="6"/>
+                                        </p:tgtEl>
+                                        <p:attrNameLst>
+                                          <p:attrName>style.visibility</p:attrName>
+                                        </p:attrNameLst>
+                                      </p:cBhvr>
+                                      <p:to>
+                                        <p:strVal val="visible"/>
+                                      </p:to>
+                                    </p:set>
+                                    <p:animEffect transition="in" filter="fade">
+                                      <p:cBhvr>
+                                        <p:cTn id="19" dur="250"/>
+                                        <p:tgtEl>
+                                          <p:spTgt spid="6"/>
+                                        </p:tgtEl>
+                                      </p:cBhvr>
+                                    </p:animEffect>
+                                  </p:childTnLst>
+                                </p:cTn>
+                              </p:par>
+                            </p:childTnLst>
+                          </p:cTn>
+                        </p:par>
                       </p:childTnLst>
                     </p:cTn>
                   </p:par>
@@ -14677,6 +14984,7 @@
     </p:tnLst>
     <p:bldLst>
       <p:bldP spid="11" grpId="0" animBg="1"/>
+      <p:bldP spid="6" grpId="0" animBg="1"/>
     </p:bldLst>
   </p:timing>
 </p:sld>
@@ -14853,10 +15161,190 @@
   <p:clrMapOvr>
     <a:masterClrMapping/>
   </p:clrMapOvr>
+  <p:timing>
+    <p:tnLst>
+      <p:par>
+        <p:cTn id="1" dur="indefinite" restart="never" nodeType="tmRoot"/>
+      </p:par>
+    </p:tnLst>
+  </p:timing>
 </p:sld>
 </file>
 
 <file path=ppt/slides/slide17.xml><?xml version="1.0" encoding="utf-8"?>
+<p:sld xmlns:a="http://schemas.openxmlformats.org/drawingml/2006/main" xmlns:r="http://schemas.openxmlformats.org/officeDocument/2006/relationships" xmlns:p="http://schemas.openxmlformats.org/presentationml/2006/main">
+  <p:cSld>
+    <p:spTree>
+      <p:nvGrpSpPr>
+        <p:cNvPr id="1" name=""/>
+        <p:cNvGrpSpPr/>
+        <p:nvPr/>
+      </p:nvGrpSpPr>
+      <p:grpSpPr>
+        <a:xfrm>
+          <a:off x="0" y="0"/>
+          <a:ext cx="0" cy="0"/>
+          <a:chOff x="0" y="0"/>
+          <a:chExt cx="0" cy="0"/>
+        </a:xfrm>
+      </p:grpSpPr>
+      <p:pic>
+        <p:nvPicPr>
+          <p:cNvPr id="4" name="Picture 3"/>
+          <p:cNvPicPr>
+            <a:picLocks noChangeAspect="1"/>
+          </p:cNvPicPr>
+          <p:nvPr/>
+        </p:nvPicPr>
+        <p:blipFill>
+          <a:blip r:embed="rId2" cstate="print">
+            <a:extLst>
+              <a:ext uri="{28A0092B-C50C-407E-A947-70E740481C1C}">
+                <a14:useLocalDpi xmlns:a14="http://schemas.microsoft.com/office/drawing/2010/main" val="0"/>
+              </a:ext>
+            </a:extLst>
+          </a:blip>
+          <a:stretch>
+            <a:fillRect/>
+          </a:stretch>
+        </p:blipFill>
+        <p:spPr>
+          <a:xfrm>
+            <a:off x="0" y="2312894"/>
+            <a:ext cx="3928813" cy="3666420"/>
+          </a:xfrm>
+          <a:prstGeom prst="rect">
+            <a:avLst/>
+          </a:prstGeom>
+        </p:spPr>
+      </p:pic>
+      <p:pic>
+        <p:nvPicPr>
+          <p:cNvPr id="5" name="Picture 4"/>
+          <p:cNvPicPr>
+            <a:picLocks noChangeAspect="1"/>
+          </p:cNvPicPr>
+          <p:nvPr/>
+        </p:nvPicPr>
+        <p:blipFill>
+          <a:blip r:embed="rId3">
+            <a:extLst>
+              <a:ext uri="{28A0092B-C50C-407E-A947-70E740481C1C}">
+                <a14:useLocalDpi xmlns:a14="http://schemas.microsoft.com/office/drawing/2010/main" val="0"/>
+              </a:ext>
+            </a:extLst>
+          </a:blip>
+          <a:stretch>
+            <a:fillRect/>
+          </a:stretch>
+        </p:blipFill>
+        <p:spPr>
+          <a:xfrm>
+            <a:off x="3928812" y="2406320"/>
+            <a:ext cx="8165505" cy="3529962"/>
+          </a:xfrm>
+          <a:prstGeom prst="rect">
+            <a:avLst/>
+          </a:prstGeom>
+        </p:spPr>
+      </p:pic>
+      <p:sp>
+        <p:nvSpPr>
+          <p:cNvPr id="8" name="Rectangle 7"/>
+          <p:cNvSpPr/>
+          <p:nvPr/>
+        </p:nvSpPr>
+        <p:spPr>
+          <a:xfrm>
+            <a:off x="-278953" y="-395763"/>
+            <a:ext cx="12776548" cy="1803748"/>
+          </a:xfrm>
+          <a:prstGeom prst="rect">
+            <a:avLst/>
+          </a:prstGeom>
+          <a:solidFill>
+            <a:srgbClr val="CFF1E6"/>
+          </a:solidFill>
+          <a:ln w="76200">
+            <a:solidFill>
+              <a:srgbClr val="0CB87F"/>
+            </a:solidFill>
+          </a:ln>
+        </p:spPr>
+        <p:style>
+          <a:lnRef idx="2">
+            <a:schemeClr val="accent1">
+              <a:shade val="50000"/>
+            </a:schemeClr>
+          </a:lnRef>
+          <a:fillRef idx="1">
+            <a:schemeClr val="accent1"/>
+          </a:fillRef>
+          <a:effectRef idx="0">
+            <a:schemeClr val="accent1"/>
+          </a:effectRef>
+          <a:fontRef idx="minor">
+            <a:schemeClr val="lt1"/>
+          </a:fontRef>
+        </p:style>
+        <p:txBody>
+          <a:bodyPr rtlCol="0" anchor="ctr"/>
+          <a:lstStyle/>
+          <a:p>
+            <a:pPr algn="ctr"/>
+            <a:endParaRPr lang="en-GB" dirty="0"/>
+          </a:p>
+        </p:txBody>
+      </p:sp>
+      <p:sp>
+        <p:nvSpPr>
+          <p:cNvPr id="10" name="Title 1"/>
+          <p:cNvSpPr>
+            <a:spLocks noGrp="1"/>
+          </p:cNvSpPr>
+          <p:nvPr>
+            <p:ph type="title"/>
+          </p:nvPr>
+        </p:nvSpPr>
+        <p:spPr>
+          <a:xfrm>
+            <a:off x="838200" y="365125"/>
+            <a:ext cx="10515600" cy="1325563"/>
+          </a:xfrm>
+        </p:spPr>
+        <p:txBody>
+          <a:bodyPr/>
+          <a:lstStyle/>
+          <a:p>
+            <a:r>
+              <a:rPr lang="de-DE" dirty="0"/>
+              <a:t>ZETA visualization</a:t>
+            </a:r>
+            <a:endParaRPr lang="en-GB" dirty="0"/>
+          </a:p>
+        </p:txBody>
+      </p:sp>
+    </p:spTree>
+    <p:extLst>
+      <p:ext uri="{BB962C8B-B14F-4D97-AF65-F5344CB8AC3E}">
+        <p14:creationId xmlns:p14="http://schemas.microsoft.com/office/powerpoint/2010/main" val="784260180"/>
+      </p:ext>
+    </p:extLst>
+  </p:cSld>
+  <p:clrMapOvr>
+    <a:masterClrMapping/>
+  </p:clrMapOvr>
+  <p:timing>
+    <p:tnLst>
+      <p:par>
+        <p:cTn id="1" dur="indefinite" restart="never" nodeType="tmRoot"/>
+      </p:par>
+    </p:tnLst>
+  </p:timing>
+</p:sld>
+</file>
+
+<file path=ppt/slides/slide18.xml><?xml version="1.0" encoding="utf-8"?>
 <p:sld xmlns:a="http://schemas.openxmlformats.org/drawingml/2006/main" xmlns:r="http://schemas.openxmlformats.org/officeDocument/2006/relationships" xmlns:p="http://schemas.openxmlformats.org/presentationml/2006/main">
   <p:cSld>
     <p:spTree>
@@ -14922,9 +15410,16 @@
             <p:ph idx="1"/>
           </p:nvPr>
         </p:nvSpPr>
-        <p:spPr/>
+        <p:spPr>
+          <a:xfrm>
+            <a:off x="838200" y="1825625"/>
+            <a:ext cx="4834654" cy="4351338"/>
+          </a:xfrm>
+        </p:spPr>
         <p:txBody>
-          <a:bodyPr/>
+          <a:bodyPr>
+            <a:normAutofit lnSpcReduction="10000"/>
+          </a:bodyPr>
           <a:lstStyle/>
           <a:p>
             <a:r>
@@ -14961,9 +15456,9 @@
             </a:r>
           </a:p>
           <a:p>
-            <a:endParaRPr lang="de-AT" dirty="0"/>
-          </a:p>
-          <a:p>
+            <a:pPr marL="0" indent="0">
+              <a:buNone/>
+            </a:pPr>
             <a:endParaRPr lang="de-AT" dirty="0"/>
           </a:p>
           <a:p>
@@ -15120,6 +15615,36 @@
           </a:p>
         </p:txBody>
       </p:sp>
+      <p:pic>
+        <p:nvPicPr>
+          <p:cNvPr id="4" name="Picture 3"/>
+          <p:cNvPicPr>
+            <a:picLocks noChangeAspect="1"/>
+          </p:cNvPicPr>
+          <p:nvPr/>
+        </p:nvPicPr>
+        <p:blipFill>
+          <a:blip r:embed="rId2">
+            <a:extLst>
+              <a:ext uri="{28A0092B-C50C-407E-A947-70E740481C1C}">
+                <a14:useLocalDpi xmlns:a14="http://schemas.microsoft.com/office/drawing/2010/main" val="0"/>
+              </a:ext>
+            </a:extLst>
+          </a:blip>
+          <a:stretch>
+            <a:fillRect/>
+          </a:stretch>
+        </p:blipFill>
+        <p:spPr>
+          <a:xfrm>
+            <a:off x="5672854" y="1515790"/>
+            <a:ext cx="6519146" cy="4638502"/>
+          </a:xfrm>
+          <a:prstGeom prst="rect">
+            <a:avLst/>
+          </a:prstGeom>
+        </p:spPr>
+      </p:pic>
     </p:spTree>
     <p:extLst>
       <p:ext uri="{BB962C8B-B14F-4D97-AF65-F5344CB8AC3E}">
@@ -15130,10 +15655,89 @@
   <p:clrMapOvr>
     <a:masterClrMapping/>
   </p:clrMapOvr>
+  <p:timing>
+    <p:tnLst>
+      <p:par>
+        <p:cTn id="1" dur="indefinite" restart="never" nodeType="tmRoot">
+          <p:childTnLst>
+            <p:seq concurrent="1" nextAc="seek">
+              <p:cTn id="2" dur="indefinite" nodeType="mainSeq">
+                <p:childTnLst>
+                  <p:par>
+                    <p:cTn id="3" fill="hold">
+                      <p:stCondLst>
+                        <p:cond delay="indefinite"/>
+                      </p:stCondLst>
+                      <p:childTnLst>
+                        <p:par>
+                          <p:cTn id="4" fill="hold">
+                            <p:stCondLst>
+                              <p:cond delay="0"/>
+                            </p:stCondLst>
+                            <p:childTnLst>
+                              <p:par>
+                                <p:cTn id="5" presetID="1" presetClass="entr" presetSubtype="0" fill="hold" nodeType="clickEffect">
+                                  <p:stCondLst>
+                                    <p:cond delay="0"/>
+                                  </p:stCondLst>
+                                  <p:childTnLst>
+                                    <p:set>
+                                      <p:cBhvr>
+                                        <p:cTn id="6" dur="1" fill="hold">
+                                          <p:stCondLst>
+                                            <p:cond delay="0"/>
+                                          </p:stCondLst>
+                                        </p:cTn>
+                                        <p:tgtEl>
+                                          <p:spTgt spid="3">
+                                            <p:txEl>
+                                              <p:pRg st="0" end="0"/>
+                                            </p:txEl>
+                                          </p:spTgt>
+                                        </p:tgtEl>
+                                        <p:attrNameLst>
+                                          <p:attrName>style.visibility</p:attrName>
+                                        </p:attrNameLst>
+                                      </p:cBhvr>
+                                      <p:to>
+                                        <p:strVal val="visible"/>
+                                      </p:to>
+                                    </p:set>
+                                  </p:childTnLst>
+                                </p:cTn>
+                              </p:par>
+                            </p:childTnLst>
+                          </p:cTn>
+                        </p:par>
+                      </p:childTnLst>
+                    </p:cTn>
+                  </p:par>
+                </p:childTnLst>
+              </p:cTn>
+              <p:prevCondLst>
+                <p:cond evt="onPrev" delay="0">
+                  <p:tgtEl>
+                    <p:sldTgt/>
+                  </p:tgtEl>
+                </p:cond>
+              </p:prevCondLst>
+              <p:nextCondLst>
+                <p:cond evt="onNext" delay="0">
+                  <p:tgtEl>
+                    <p:sldTgt/>
+                  </p:tgtEl>
+                </p:cond>
+              </p:nextCondLst>
+            </p:seq>
+          </p:childTnLst>
+        </p:cTn>
+      </p:par>
+    </p:tnLst>
+  </p:timing>
 </p:sld>
 </file>
 
-<file path=ppt/slides/slide18.xml><?xml version="1.0" encoding="utf-8"?>
+<file path=ppt/slides/slide19.xml><?xml version="1.0" encoding="utf-8"?>
 <p:sld xmlns:a="http://schemas.openxmlformats.org/drawingml/2006/main" xmlns:r="http://schemas.openxmlformats.org/officeDocument/2006/relationships" xmlns:p="http://schemas.openxmlformats.org/presentationml/2006/main">
   <p:cSld>
     <p:bg>
@@ -15924,175 +16528,6 @@
 </p:sld>
 </file>
 
-<file path=ppt/slides/slide19.xml><?xml version="1.0" encoding="utf-8"?>
-<p:sld xmlns:a="http://schemas.openxmlformats.org/drawingml/2006/main" xmlns:r="http://schemas.openxmlformats.org/officeDocument/2006/relationships" xmlns:p="http://schemas.openxmlformats.org/presentationml/2006/main">
-  <p:cSld>
-    <p:bg>
-      <p:bgPr>
-        <a:solidFill>
-          <a:srgbClr val="FFFFFF"/>
-        </a:solidFill>
-        <a:effectLst/>
-      </p:bgPr>
-    </p:bg>
-    <p:spTree>
-      <p:nvGrpSpPr>
-        <p:cNvPr id="1" name=""/>
-        <p:cNvGrpSpPr/>
-        <p:nvPr/>
-      </p:nvGrpSpPr>
-      <p:grpSpPr>
-        <a:xfrm>
-          <a:off x="0" y="0"/>
-          <a:ext cx="0" cy="0"/>
-          <a:chOff x="0" y="0"/>
-          <a:chExt cx="0" cy="0"/>
-        </a:xfrm>
-      </p:grpSpPr>
-      <p:pic>
-        <p:nvPicPr>
-          <p:cNvPr id="4" name="Picture 3"/>
-          <p:cNvPicPr>
-            <a:picLocks noChangeAspect="1"/>
-          </p:cNvPicPr>
-          <p:nvPr/>
-        </p:nvPicPr>
-        <p:blipFill>
-          <a:blip r:embed="rId2">
-            <a:extLst>
-              <a:ext uri="{28A0092B-C50C-407E-A947-70E740481C1C}">
-                <a14:useLocalDpi xmlns:a14="http://schemas.microsoft.com/office/drawing/2010/main" val="0"/>
-              </a:ext>
-            </a:extLst>
-          </a:blip>
-          <a:stretch>
-            <a:fillRect/>
-          </a:stretch>
-        </p:blipFill>
-        <p:spPr>
-          <a:xfrm>
-            <a:off x="4035151" y="1956744"/>
-            <a:ext cx="7852049" cy="4355156"/>
-          </a:xfrm>
-          <a:prstGeom prst="rect">
-            <a:avLst/>
-          </a:prstGeom>
-        </p:spPr>
-      </p:pic>
-      <p:sp>
-        <p:nvSpPr>
-          <p:cNvPr id="6" name="Rectangle 5"/>
-          <p:cNvSpPr/>
-          <p:nvPr/>
-        </p:nvSpPr>
-        <p:spPr>
-          <a:xfrm>
-            <a:off x="-278953" y="-395763"/>
-            <a:ext cx="12776548" cy="1803748"/>
-          </a:xfrm>
-          <a:prstGeom prst="rect">
-            <a:avLst/>
-          </a:prstGeom>
-          <a:solidFill>
-            <a:srgbClr val="CFF1E6"/>
-          </a:solidFill>
-          <a:ln w="76200">
-            <a:solidFill>
-              <a:srgbClr val="0CB87F"/>
-            </a:solidFill>
-          </a:ln>
-        </p:spPr>
-        <p:style>
-          <a:lnRef idx="2">
-            <a:schemeClr val="accent1">
-              <a:shade val="50000"/>
-            </a:schemeClr>
-          </a:lnRef>
-          <a:fillRef idx="1">
-            <a:schemeClr val="accent1"/>
-          </a:fillRef>
-          <a:effectRef idx="0">
-            <a:schemeClr val="accent1"/>
-          </a:effectRef>
-          <a:fontRef idx="minor">
-            <a:schemeClr val="lt1"/>
-          </a:fontRef>
-        </p:style>
-        <p:txBody>
-          <a:bodyPr rtlCol="0" anchor="ctr"/>
-          <a:lstStyle/>
-          <a:p>
-            <a:pPr algn="ctr"/>
-            <a:endParaRPr lang="en-GB" dirty="0"/>
-          </a:p>
-        </p:txBody>
-      </p:sp>
-      <p:pic>
-        <p:nvPicPr>
-          <p:cNvPr id="5" name="Content Placeholder 3"/>
-          <p:cNvPicPr>
-            <a:picLocks noChangeAspect="1"/>
-          </p:cNvPicPr>
-          <p:nvPr/>
-        </p:nvPicPr>
-        <p:blipFill>
-          <a:blip r:embed="rId3" cstate="print">
-            <a:extLst>
-              <a:ext uri="{28A0092B-C50C-407E-A947-70E740481C1C}">
-                <a14:useLocalDpi xmlns:a14="http://schemas.microsoft.com/office/drawing/2010/main" val="0"/>
-              </a:ext>
-            </a:extLst>
-          </a:blip>
-          <a:stretch>
-            <a:fillRect/>
-          </a:stretch>
-        </p:blipFill>
-        <p:spPr>
-          <a:xfrm>
-            <a:off x="52242" y="2168872"/>
-            <a:ext cx="3982909" cy="3713551"/>
-          </a:xfrm>
-          <a:prstGeom prst="rect">
-            <a:avLst/>
-          </a:prstGeom>
-        </p:spPr>
-      </p:pic>
-      <p:sp>
-        <p:nvSpPr>
-          <p:cNvPr id="2" name="Title 1"/>
-          <p:cNvSpPr>
-            <a:spLocks noGrp="1"/>
-          </p:cNvSpPr>
-          <p:nvPr>
-            <p:ph type="title"/>
-          </p:nvPr>
-        </p:nvSpPr>
-        <p:spPr/>
-        <p:txBody>
-          <a:bodyPr/>
-          <a:lstStyle/>
-          <a:p>
-            <a:r>
-              <a:rPr lang="de-DE" dirty="0"/>
-              <a:t>ZETA2 visualization</a:t>
-            </a:r>
-            <a:endParaRPr lang="en-GB" dirty="0"/>
-          </a:p>
-        </p:txBody>
-      </p:sp>
-    </p:spTree>
-    <p:extLst>
-      <p:ext uri="{BB962C8B-B14F-4D97-AF65-F5344CB8AC3E}">
-        <p14:creationId xmlns:p14="http://schemas.microsoft.com/office/powerpoint/2010/main" val="2582723932"/>
-      </p:ext>
-    </p:extLst>
-  </p:cSld>
-  <p:clrMapOvr>
-    <a:masterClrMapping/>
-  </p:clrMapOvr>
-</p:sld>
-</file>
-
 <file path=ppt/slides/slide2.xml><?xml version="1.0" encoding="utf-8"?>
 <p:sld xmlns:a="http://schemas.openxmlformats.org/drawingml/2006/main" xmlns:r="http://schemas.openxmlformats.org/officeDocument/2006/relationships" xmlns:p="http://schemas.openxmlformats.org/presentationml/2006/main">
   <p:cSld>
@@ -16281,12 +16716,27 @@
   <p:clrMapOvr>
     <a:masterClrMapping/>
   </p:clrMapOvr>
+  <p:timing>
+    <p:tnLst>
+      <p:par>
+        <p:cTn id="1" dur="indefinite" restart="never" nodeType="tmRoot"/>
+      </p:par>
+    </p:tnLst>
+  </p:timing>
 </p:sld>
 </file>
 
 <file path=ppt/slides/slide20.xml><?xml version="1.0" encoding="utf-8"?>
 <p:sld xmlns:a="http://schemas.openxmlformats.org/drawingml/2006/main" xmlns:r="http://schemas.openxmlformats.org/officeDocument/2006/relationships" xmlns:p="http://schemas.openxmlformats.org/presentationml/2006/main">
   <p:cSld>
+    <p:bg>
+      <p:bgPr>
+        <a:solidFill>
+          <a:srgbClr val="FFFFFF"/>
+        </a:solidFill>
+        <a:effectLst/>
+      </p:bgPr>
+    </p:bg>
     <p:spTree>
       <p:nvGrpSpPr>
         <p:cNvPr id="1" name=""/>
@@ -16301,6 +16751,114 @@
           <a:chExt cx="0" cy="0"/>
         </a:xfrm>
       </p:grpSpPr>
+      <p:pic>
+        <p:nvPicPr>
+          <p:cNvPr id="4" name="Picture 3"/>
+          <p:cNvPicPr>
+            <a:picLocks noChangeAspect="1"/>
+          </p:cNvPicPr>
+          <p:nvPr/>
+        </p:nvPicPr>
+        <p:blipFill>
+          <a:blip r:embed="rId2">
+            <a:extLst>
+              <a:ext uri="{28A0092B-C50C-407E-A947-70E740481C1C}">
+                <a14:useLocalDpi xmlns:a14="http://schemas.microsoft.com/office/drawing/2010/main" val="0"/>
+              </a:ext>
+            </a:extLst>
+          </a:blip>
+          <a:stretch>
+            <a:fillRect/>
+          </a:stretch>
+        </p:blipFill>
+        <p:spPr>
+          <a:xfrm>
+            <a:off x="4035151" y="1956744"/>
+            <a:ext cx="7852049" cy="4355156"/>
+          </a:xfrm>
+          <a:prstGeom prst="rect">
+            <a:avLst/>
+          </a:prstGeom>
+        </p:spPr>
+      </p:pic>
+      <p:sp>
+        <p:nvSpPr>
+          <p:cNvPr id="6" name="Rectangle 5"/>
+          <p:cNvSpPr/>
+          <p:nvPr/>
+        </p:nvSpPr>
+        <p:spPr>
+          <a:xfrm>
+            <a:off x="-278953" y="-395763"/>
+            <a:ext cx="12776548" cy="1803748"/>
+          </a:xfrm>
+          <a:prstGeom prst="rect">
+            <a:avLst/>
+          </a:prstGeom>
+          <a:solidFill>
+            <a:srgbClr val="CFF1E6"/>
+          </a:solidFill>
+          <a:ln w="76200">
+            <a:solidFill>
+              <a:srgbClr val="0CB87F"/>
+            </a:solidFill>
+          </a:ln>
+        </p:spPr>
+        <p:style>
+          <a:lnRef idx="2">
+            <a:schemeClr val="accent1">
+              <a:shade val="50000"/>
+            </a:schemeClr>
+          </a:lnRef>
+          <a:fillRef idx="1">
+            <a:schemeClr val="accent1"/>
+          </a:fillRef>
+          <a:effectRef idx="0">
+            <a:schemeClr val="accent1"/>
+          </a:effectRef>
+          <a:fontRef idx="minor">
+            <a:schemeClr val="lt1"/>
+          </a:fontRef>
+        </p:style>
+        <p:txBody>
+          <a:bodyPr rtlCol="0" anchor="ctr"/>
+          <a:lstStyle/>
+          <a:p>
+            <a:pPr algn="ctr"/>
+            <a:endParaRPr lang="en-GB" dirty="0"/>
+          </a:p>
+        </p:txBody>
+      </p:sp>
+      <p:pic>
+        <p:nvPicPr>
+          <p:cNvPr id="5" name="Content Placeholder 3"/>
+          <p:cNvPicPr>
+            <a:picLocks noChangeAspect="1"/>
+          </p:cNvPicPr>
+          <p:nvPr/>
+        </p:nvPicPr>
+        <p:blipFill>
+          <a:blip r:embed="rId3" cstate="print">
+            <a:extLst>
+              <a:ext uri="{28A0092B-C50C-407E-A947-70E740481C1C}">
+                <a14:useLocalDpi xmlns:a14="http://schemas.microsoft.com/office/drawing/2010/main" val="0"/>
+              </a:ext>
+            </a:extLst>
+          </a:blip>
+          <a:stretch>
+            <a:fillRect/>
+          </a:stretch>
+        </p:blipFill>
+        <p:spPr>
+          <a:xfrm>
+            <a:off x="52242" y="2168872"/>
+            <a:ext cx="3982909" cy="3713551"/>
+          </a:xfrm>
+          <a:prstGeom prst="rect">
+            <a:avLst/>
+          </a:prstGeom>
+        </p:spPr>
+      </p:pic>
       <p:sp>
         <p:nvSpPr>
           <p:cNvPr id="2" name="Title 1"/>
@@ -16324,45 +16882,178 @@
           </a:p>
         </p:txBody>
       </p:sp>
-      <p:pic>
-        <p:nvPicPr>
-          <p:cNvPr id="4" name="Content Placeholder 3"/>
-          <p:cNvPicPr>
-            <a:picLocks noGrp="1" noChangeAspect="1"/>
-          </p:cNvPicPr>
-          <p:nvPr>
-            <p:ph idx="1"/>
-          </p:nvPr>
-        </p:nvPicPr>
-        <p:blipFill>
-          <a:blip r:embed="rId2">
+      <p:sp>
+        <p:nvSpPr>
+          <p:cNvPr id="7" name="Rounded Rectangle 8">
             <a:extLst>
-              <a:ext uri="{28A0092B-C50C-407E-A947-70E740481C1C}">
-                <a14:useLocalDpi xmlns:a14="http://schemas.microsoft.com/office/drawing/2010/main" val="0"/>
+              <a:ext uri="{FF2B5EF4-FFF2-40B4-BE49-F238E27FC236}">
+                <a16:creationId xmlns:a16="http://schemas.microsoft.com/office/drawing/2014/main" id="{E4DA88D5-3355-65A7-49E6-A8851A2ADA16}"/>
               </a:ext>
             </a:extLst>
-          </a:blip>
-          <a:stretch>
-            <a:fillRect/>
-          </a:stretch>
-        </p:blipFill>
+          </p:cNvPr>
+          <p:cNvSpPr/>
+          <p:nvPr/>
+        </p:nvSpPr>
         <p:spPr>
           <a:xfrm>
-            <a:off x="186986" y="1591161"/>
-            <a:ext cx="11818027" cy="4402016"/>
+            <a:off x="6780811" y="2849208"/>
+            <a:ext cx="2915195" cy="1516561"/>
           </a:xfrm>
+          <a:prstGeom prst="roundRect">
+            <a:avLst>
+              <a:gd name="adj" fmla="val 37941"/>
+            </a:avLst>
+          </a:prstGeom>
+          <a:solidFill>
+            <a:srgbClr val="FFFDF7"/>
+          </a:solidFill>
+          <a:ln w="76200">
+            <a:solidFill>
+              <a:schemeClr val="accent4">
+                <a:lumMod val="20000"/>
+                <a:lumOff val="80000"/>
+              </a:schemeClr>
+            </a:solidFill>
+          </a:ln>
         </p:spPr>
-      </p:pic>
+        <p:style>
+          <a:lnRef idx="2">
+            <a:schemeClr val="accent1">
+              <a:shade val="50000"/>
+            </a:schemeClr>
+          </a:lnRef>
+          <a:fillRef idx="1">
+            <a:schemeClr val="accent1"/>
+          </a:fillRef>
+          <a:effectRef idx="0">
+            <a:schemeClr val="accent1"/>
+          </a:effectRef>
+          <a:fontRef idx="minor">
+            <a:schemeClr val="lt1"/>
+          </a:fontRef>
+        </p:style>
+        <p:txBody>
+          <a:bodyPr rtlCol="0" anchor="ctr"/>
+          <a:lstStyle/>
+          <a:p>
+            <a:pPr algn="ctr"/>
+            <a:r>
+              <a:rPr lang="de-DE" sz="3200" b="1" dirty="0" smtClean="0">
+                <a:solidFill>
+                  <a:schemeClr val="tx1"/>
+                </a:solidFill>
+                <a:latin typeface="Bahnschrift" panose="020B0502040204020203" pitchFamily="34" charset="0"/>
+              </a:rPr>
+              <a:t>rasterplot</a:t>
+            </a:r>
+            <a:endParaRPr lang="en-GB" sz="1200" b="1" dirty="0">
+              <a:solidFill>
+                <a:schemeClr val="tx1"/>
+              </a:solidFill>
+              <a:latin typeface="Bahnschrift" panose="020B0502040204020203" pitchFamily="34" charset="0"/>
+            </a:endParaRPr>
+          </a:p>
+        </p:txBody>
+      </p:sp>
     </p:spTree>
     <p:extLst>
       <p:ext uri="{BB962C8B-B14F-4D97-AF65-F5344CB8AC3E}">
-        <p14:creationId xmlns:p14="http://schemas.microsoft.com/office/powerpoint/2010/main" val="1539764643"/>
+        <p14:creationId xmlns:p14="http://schemas.microsoft.com/office/powerpoint/2010/main" val="2582723932"/>
       </p:ext>
     </p:extLst>
   </p:cSld>
   <p:clrMapOvr>
     <a:masterClrMapping/>
   </p:clrMapOvr>
+  <p:timing>
+    <p:tnLst>
+      <p:par>
+        <p:cTn id="1" dur="indefinite" restart="never" nodeType="tmRoot">
+          <p:childTnLst>
+            <p:seq concurrent="1" nextAc="seek">
+              <p:cTn id="2" dur="indefinite" nodeType="mainSeq">
+                <p:childTnLst>
+                  <p:par>
+                    <p:cTn id="3" fill="hold">
+                      <p:stCondLst>
+                        <p:cond delay="indefinite"/>
+                        <p:cond evt="onBegin" delay="0">
+                          <p:tn val="2"/>
+                        </p:cond>
+                      </p:stCondLst>
+                      <p:childTnLst>
+                        <p:par>
+                          <p:cTn id="4" fill="hold">
+                            <p:stCondLst>
+                              <p:cond delay="0"/>
+                            </p:stCondLst>
+                            <p:childTnLst>
+                              <p:par>
+                                <p:cTn id="5" presetID="10" presetClass="entr" presetSubtype="0" fill="hold" grpId="0" nodeType="afterEffect">
+                                  <p:stCondLst>
+                                    <p:cond delay="0"/>
+                                  </p:stCondLst>
+                                  <p:childTnLst>
+                                    <p:set>
+                                      <p:cBhvr>
+                                        <p:cTn id="6" dur="1" fill="hold">
+                                          <p:stCondLst>
+                                            <p:cond delay="0"/>
+                                          </p:stCondLst>
+                                        </p:cTn>
+                                        <p:tgtEl>
+                                          <p:spTgt spid="7"/>
+                                        </p:tgtEl>
+                                        <p:attrNameLst>
+                                          <p:attrName>style.visibility</p:attrName>
+                                        </p:attrNameLst>
+                                      </p:cBhvr>
+                                      <p:to>
+                                        <p:strVal val="visible"/>
+                                      </p:to>
+                                    </p:set>
+                                    <p:animEffect transition="in" filter="fade">
+                                      <p:cBhvr>
+                                        <p:cTn id="7" dur="250"/>
+                                        <p:tgtEl>
+                                          <p:spTgt spid="7"/>
+                                        </p:tgtEl>
+                                      </p:cBhvr>
+                                    </p:animEffect>
+                                  </p:childTnLst>
+                                </p:cTn>
+                              </p:par>
+                            </p:childTnLst>
+                          </p:cTn>
+                        </p:par>
+                      </p:childTnLst>
+                    </p:cTn>
+                  </p:par>
+                </p:childTnLst>
+              </p:cTn>
+              <p:prevCondLst>
+                <p:cond evt="onPrev" delay="0">
+                  <p:tgtEl>
+                    <p:sldTgt/>
+                  </p:tgtEl>
+                </p:cond>
+              </p:prevCondLst>
+              <p:nextCondLst>
+                <p:cond evt="onNext" delay="0">
+                  <p:tgtEl>
+                    <p:sldTgt/>
+                  </p:tgtEl>
+                </p:cond>
+              </p:nextCondLst>
+            </p:seq>
+          </p:childTnLst>
+        </p:cTn>
+      </p:par>
+    </p:tnLst>
+    <p:bldLst>
+      <p:bldP spid="7" grpId="0" animBg="1"/>
+    </p:bldLst>
+  </p:timing>
 </p:sld>
 </file>
 
@@ -16408,6 +17099,250 @@
       </p:sp>
       <p:pic>
         <p:nvPicPr>
+          <p:cNvPr id="4" name="Content Placeholder 3"/>
+          <p:cNvPicPr>
+            <a:picLocks noGrp="1" noChangeAspect="1"/>
+          </p:cNvPicPr>
+          <p:nvPr>
+            <p:ph idx="1"/>
+          </p:nvPr>
+        </p:nvPicPr>
+        <p:blipFill>
+          <a:blip r:embed="rId2">
+            <a:extLst>
+              <a:ext uri="{28A0092B-C50C-407E-A947-70E740481C1C}">
+                <a14:useLocalDpi xmlns:a14="http://schemas.microsoft.com/office/drawing/2010/main" val="0"/>
+              </a:ext>
+            </a:extLst>
+          </a:blip>
+          <a:stretch>
+            <a:fillRect/>
+          </a:stretch>
+        </p:blipFill>
+        <p:spPr>
+          <a:xfrm>
+            <a:off x="186986" y="1591161"/>
+            <a:ext cx="11818027" cy="4402016"/>
+          </a:xfrm>
+        </p:spPr>
+      </p:pic>
+      <p:sp>
+        <p:nvSpPr>
+          <p:cNvPr id="5" name="Rounded Rectangle 8">
+            <a:extLst>
+              <a:ext uri="{FF2B5EF4-FFF2-40B4-BE49-F238E27FC236}">
+                <a16:creationId xmlns:a16="http://schemas.microsoft.com/office/drawing/2014/main" id="{E4DA88D5-3355-65A7-49E6-A8851A2ADA16}"/>
+              </a:ext>
+            </a:extLst>
+          </p:cNvPr>
+          <p:cNvSpPr/>
+          <p:nvPr/>
+        </p:nvSpPr>
+        <p:spPr>
+          <a:xfrm>
+            <a:off x="7262949" y="2857521"/>
+            <a:ext cx="2915195" cy="1516561"/>
+          </a:xfrm>
+          <a:prstGeom prst="roundRect">
+            <a:avLst>
+              <a:gd name="adj" fmla="val 37941"/>
+            </a:avLst>
+          </a:prstGeom>
+          <a:solidFill>
+            <a:srgbClr val="FFFDF7"/>
+          </a:solidFill>
+          <a:ln w="76200">
+            <a:solidFill>
+              <a:schemeClr val="accent4">
+                <a:lumMod val="20000"/>
+                <a:lumOff val="80000"/>
+              </a:schemeClr>
+            </a:solidFill>
+          </a:ln>
+        </p:spPr>
+        <p:style>
+          <a:lnRef idx="2">
+            <a:schemeClr val="accent1">
+              <a:shade val="50000"/>
+            </a:schemeClr>
+          </a:lnRef>
+          <a:fillRef idx="1">
+            <a:schemeClr val="accent1"/>
+          </a:fillRef>
+          <a:effectRef idx="0">
+            <a:schemeClr val="accent1"/>
+          </a:effectRef>
+          <a:fontRef idx="minor">
+            <a:schemeClr val="lt1"/>
+          </a:fontRef>
+        </p:style>
+        <p:txBody>
+          <a:bodyPr rtlCol="0" anchor="ctr"/>
+          <a:lstStyle/>
+          <a:p>
+            <a:pPr algn="ctr"/>
+            <a:r>
+              <a:rPr lang="de-DE" sz="3200" b="1" dirty="0" smtClean="0">
+                <a:solidFill>
+                  <a:schemeClr val="tx1"/>
+                </a:solidFill>
+                <a:latin typeface="Bahnschrift" panose="020B0502040204020203" pitchFamily="34" charset="0"/>
+              </a:rPr>
+              <a:t>Bigger legend</a:t>
+            </a:r>
+            <a:endParaRPr lang="en-GB" sz="1200" b="1" dirty="0">
+              <a:solidFill>
+                <a:schemeClr val="tx1"/>
+              </a:solidFill>
+              <a:latin typeface="Bahnschrift" panose="020B0502040204020203" pitchFamily="34" charset="0"/>
+            </a:endParaRPr>
+          </a:p>
+        </p:txBody>
+      </p:sp>
+    </p:spTree>
+    <p:extLst>
+      <p:ext uri="{BB962C8B-B14F-4D97-AF65-F5344CB8AC3E}">
+        <p14:creationId xmlns:p14="http://schemas.microsoft.com/office/powerpoint/2010/main" val="1539764643"/>
+      </p:ext>
+    </p:extLst>
+  </p:cSld>
+  <p:clrMapOvr>
+    <a:masterClrMapping/>
+  </p:clrMapOvr>
+  <p:timing>
+    <p:tnLst>
+      <p:par>
+        <p:cTn id="1" dur="indefinite" restart="never" nodeType="tmRoot">
+          <p:childTnLst>
+            <p:seq concurrent="1" nextAc="seek">
+              <p:cTn id="2" dur="indefinite" nodeType="mainSeq">
+                <p:childTnLst>
+                  <p:par>
+                    <p:cTn id="3" fill="hold">
+                      <p:stCondLst>
+                        <p:cond delay="indefinite"/>
+                        <p:cond evt="onBegin" delay="0">
+                          <p:tn val="2"/>
+                        </p:cond>
+                      </p:stCondLst>
+                      <p:childTnLst>
+                        <p:par>
+                          <p:cTn id="4" fill="hold">
+                            <p:stCondLst>
+                              <p:cond delay="0"/>
+                            </p:stCondLst>
+                            <p:childTnLst>
+                              <p:par>
+                                <p:cTn id="5" presetID="10" presetClass="entr" presetSubtype="0" fill="hold" grpId="0" nodeType="afterEffect">
+                                  <p:stCondLst>
+                                    <p:cond delay="0"/>
+                                  </p:stCondLst>
+                                  <p:childTnLst>
+                                    <p:set>
+                                      <p:cBhvr>
+                                        <p:cTn id="6" dur="1" fill="hold">
+                                          <p:stCondLst>
+                                            <p:cond delay="0"/>
+                                          </p:stCondLst>
+                                        </p:cTn>
+                                        <p:tgtEl>
+                                          <p:spTgt spid="5"/>
+                                        </p:tgtEl>
+                                        <p:attrNameLst>
+                                          <p:attrName>style.visibility</p:attrName>
+                                        </p:attrNameLst>
+                                      </p:cBhvr>
+                                      <p:to>
+                                        <p:strVal val="visible"/>
+                                      </p:to>
+                                    </p:set>
+                                    <p:animEffect transition="in" filter="fade">
+                                      <p:cBhvr>
+                                        <p:cTn id="7" dur="250"/>
+                                        <p:tgtEl>
+                                          <p:spTgt spid="5"/>
+                                        </p:tgtEl>
+                                      </p:cBhvr>
+                                    </p:animEffect>
+                                  </p:childTnLst>
+                                </p:cTn>
+                              </p:par>
+                            </p:childTnLst>
+                          </p:cTn>
+                        </p:par>
+                      </p:childTnLst>
+                    </p:cTn>
+                  </p:par>
+                </p:childTnLst>
+              </p:cTn>
+              <p:prevCondLst>
+                <p:cond evt="onPrev" delay="0">
+                  <p:tgtEl>
+                    <p:sldTgt/>
+                  </p:tgtEl>
+                </p:cond>
+              </p:prevCondLst>
+              <p:nextCondLst>
+                <p:cond evt="onNext" delay="0">
+                  <p:tgtEl>
+                    <p:sldTgt/>
+                  </p:tgtEl>
+                </p:cond>
+              </p:nextCondLst>
+            </p:seq>
+          </p:childTnLst>
+        </p:cTn>
+      </p:par>
+    </p:tnLst>
+    <p:bldLst>
+      <p:bldP spid="5" grpId="0" animBg="1"/>
+    </p:bldLst>
+  </p:timing>
+</p:sld>
+</file>
+
+<file path=ppt/slides/slide22.xml><?xml version="1.0" encoding="utf-8"?>
+<p:sld xmlns:a="http://schemas.openxmlformats.org/drawingml/2006/main" xmlns:r="http://schemas.openxmlformats.org/officeDocument/2006/relationships" xmlns:p="http://schemas.openxmlformats.org/presentationml/2006/main">
+  <p:cSld>
+    <p:spTree>
+      <p:nvGrpSpPr>
+        <p:cNvPr id="1" name=""/>
+        <p:cNvGrpSpPr/>
+        <p:nvPr/>
+      </p:nvGrpSpPr>
+      <p:grpSpPr>
+        <a:xfrm>
+          <a:off x="0" y="0"/>
+          <a:ext cx="0" cy="0"/>
+          <a:chOff x="0" y="0"/>
+          <a:chExt cx="0" cy="0"/>
+        </a:xfrm>
+      </p:grpSpPr>
+      <p:sp>
+        <p:nvSpPr>
+          <p:cNvPr id="2" name="Title 1"/>
+          <p:cNvSpPr>
+            <a:spLocks noGrp="1"/>
+          </p:cNvSpPr>
+          <p:nvPr>
+            <p:ph type="title"/>
+          </p:nvPr>
+        </p:nvSpPr>
+        <p:spPr/>
+        <p:txBody>
+          <a:bodyPr/>
+          <a:lstStyle/>
+          <a:p>
+            <a:r>
+              <a:rPr lang="de-DE" dirty="0"/>
+              <a:t>ZETA2 visualization</a:t>
+            </a:r>
+            <a:endParaRPr lang="en-GB" dirty="0"/>
+          </a:p>
+        </p:txBody>
+      </p:sp>
+      <p:pic>
+        <p:nvPicPr>
           <p:cNvPr id="5" name="Content Placeholder 4"/>
           <p:cNvPicPr>
             <a:picLocks noGrp="1" noChangeAspect="1"/>
@@ -16430,7 +17365,7 @@
         </p:blipFill>
         <p:spPr>
           <a:xfrm>
-            <a:off x="32310" y="1690688"/>
+            <a:off x="32310" y="1549372"/>
             <a:ext cx="12127380" cy="4653411"/>
           </a:xfrm>
         </p:spPr>
@@ -16445,10 +17380,17 @@
   <p:clrMapOvr>
     <a:masterClrMapping/>
   </p:clrMapOvr>
+  <p:timing>
+    <p:tnLst>
+      <p:par>
+        <p:cTn id="1" dur="indefinite" restart="never" nodeType="tmRoot"/>
+      </p:par>
+    </p:tnLst>
+  </p:timing>
 </p:sld>
 </file>
 
-<file path=ppt/slides/slide22.xml><?xml version="1.0" encoding="utf-8"?>
+<file path=ppt/slides/slide23.xml><?xml version="1.0" encoding="utf-8"?>
 <p:sld xmlns:a="http://schemas.openxmlformats.org/drawingml/2006/main" xmlns:r="http://schemas.openxmlformats.org/officeDocument/2006/relationships" xmlns:p="http://schemas.openxmlformats.org/presentationml/2006/main">
   <p:cSld>
     <p:spTree>
@@ -16583,6 +17525,79 @@
           </a:p>
           <a:p>
             <a:endParaRPr lang="en-GB" sz="2800" dirty="0">
+              <a:solidFill>
+                <a:schemeClr val="tx1"/>
+              </a:solidFill>
+              <a:latin typeface="Bahnschrift" panose="020B0502040204020203" pitchFamily="34" charset="0"/>
+            </a:endParaRPr>
+          </a:p>
+        </p:txBody>
+      </p:sp>
+      <p:sp>
+        <p:nvSpPr>
+          <p:cNvPr id="6" name="Rounded Rectangle 8">
+            <a:extLst>
+              <a:ext uri="{FF2B5EF4-FFF2-40B4-BE49-F238E27FC236}">
+                <a16:creationId xmlns:a16="http://schemas.microsoft.com/office/drawing/2014/main" id="{E4DA88D5-3355-65A7-49E6-A8851A2ADA16}"/>
+              </a:ext>
+            </a:extLst>
+          </p:cNvPr>
+          <p:cNvSpPr/>
+          <p:nvPr/>
+        </p:nvSpPr>
+        <p:spPr>
+          <a:xfrm>
+            <a:off x="4153989" y="1991619"/>
+            <a:ext cx="2915195" cy="1516561"/>
+          </a:xfrm>
+          <a:prstGeom prst="roundRect">
+            <a:avLst>
+              <a:gd name="adj" fmla="val 37941"/>
+            </a:avLst>
+          </a:prstGeom>
+          <a:solidFill>
+            <a:srgbClr val="FFFDF7"/>
+          </a:solidFill>
+          <a:ln w="76200">
+            <a:solidFill>
+              <a:schemeClr val="accent4">
+                <a:lumMod val="20000"/>
+                <a:lumOff val="80000"/>
+              </a:schemeClr>
+            </a:solidFill>
+          </a:ln>
+        </p:spPr>
+        <p:style>
+          <a:lnRef idx="2">
+            <a:schemeClr val="accent1">
+              <a:shade val="50000"/>
+            </a:schemeClr>
+          </a:lnRef>
+          <a:fillRef idx="1">
+            <a:schemeClr val="accent1"/>
+          </a:fillRef>
+          <a:effectRef idx="0">
+            <a:schemeClr val="accent1"/>
+          </a:effectRef>
+          <a:fontRef idx="minor">
+            <a:schemeClr val="lt1"/>
+          </a:fontRef>
+        </p:style>
+        <p:txBody>
+          <a:bodyPr rtlCol="0" anchor="ctr"/>
+          <a:lstStyle/>
+          <a:p>
+            <a:pPr algn="ctr"/>
+            <a:r>
+              <a:rPr lang="de-DE" sz="3200" b="1" dirty="0" smtClean="0">
+                <a:solidFill>
+                  <a:schemeClr val="tx1"/>
+                </a:solidFill>
+                <a:latin typeface="Bahnschrift" panose="020B0502040204020203" pitchFamily="34" charset="0"/>
+              </a:rPr>
+              <a:t>Percentage?</a:t>
+            </a:r>
+            <a:endParaRPr lang="en-GB" sz="1200" b="1" dirty="0">
               <a:solidFill>
                 <a:schemeClr val="tx1"/>
               </a:solidFill>
@@ -16774,6 +17789,50 @@
                             </p:childTnLst>
                           </p:cTn>
                         </p:par>
+                        <p:par>
+                          <p:cTn id="13" fill="hold">
+                            <p:stCondLst>
+                              <p:cond delay="250"/>
+                            </p:stCondLst>
+                            <p:childTnLst>
+                              <p:par>
+                                <p:cTn id="14" presetID="10" presetClass="entr" presetSubtype="0" fill="hold" grpId="0" nodeType="afterEffect">
+                                  <p:stCondLst>
+                                    <p:cond delay="0"/>
+                                  </p:stCondLst>
+                                  <p:childTnLst>
+                                    <p:set>
+                                      <p:cBhvr>
+                                        <p:cTn id="15" dur="1" fill="hold">
+                                          <p:stCondLst>
+                                            <p:cond delay="0"/>
+                                          </p:stCondLst>
+                                        </p:cTn>
+                                        <p:tgtEl>
+                                          <p:spTgt spid="6"/>
+                                        </p:tgtEl>
+                                        <p:attrNameLst>
+                                          <p:attrName>style.visibility</p:attrName>
+                                        </p:attrNameLst>
+                                      </p:cBhvr>
+                                      <p:to>
+                                        <p:strVal val="visible"/>
+                                      </p:to>
+                                    </p:set>
+                                    <p:animEffect transition="in" filter="fade">
+                                      <p:cBhvr>
+                                        <p:cTn id="16" dur="250"/>
+                                        <p:tgtEl>
+                                          <p:spTgt spid="6"/>
+                                        </p:tgtEl>
+                                      </p:cBhvr>
+                                    </p:animEffect>
+                                  </p:childTnLst>
+                                </p:cTn>
+                              </p:par>
+                            </p:childTnLst>
+                          </p:cTn>
+                        </p:par>
                       </p:childTnLst>
                     </p:cTn>
                   </p:par>
@@ -16800,12 +17859,13 @@
     </p:tnLst>
     <p:bldLst>
       <p:bldP spid="5" grpId="0" animBg="1"/>
+      <p:bldP spid="6" grpId="0" animBg="1"/>
     </p:bldLst>
   </p:timing>
 </p:sld>
 </file>
 
-<file path=ppt/slides/slide23.xml><?xml version="1.0" encoding="utf-8"?>
+<file path=ppt/slides/slide24.xml><?xml version="1.0" encoding="utf-8"?>
 <p:sld xmlns:a="http://schemas.openxmlformats.org/drawingml/2006/main" xmlns:r="http://schemas.openxmlformats.org/officeDocument/2006/relationships" xmlns:p="http://schemas.openxmlformats.org/presentationml/2006/main">
   <p:cSld>
     <p:spTree>
@@ -17055,10 +18115,10 @@
           <a:lstStyle/>
           <a:p>
             <a:r>
-              <a:rPr lang="de-AT" sz="4800" dirty="0">
+              <a:rPr lang="de-AT" sz="4800" dirty="0" smtClean="0">
                 <a:latin typeface="Bahnschrift" panose="020B0502040204020203" pitchFamily="34" charset="0"/>
               </a:rPr>
-              <a:t>-Yes</a:t>
+              <a:t>Yes</a:t>
             </a:r>
             <a:endParaRPr lang="en-US" sz="4800" dirty="0">
               <a:latin typeface="Bahnschrift" panose="020B0502040204020203" pitchFamily="34" charset="0"/>
@@ -17211,7 +18271,7 @@
 </p:sld>
 </file>
 
-<file path=ppt/slides/slide24.xml><?xml version="1.0" encoding="utf-8"?>
+<file path=ppt/slides/slide25.xml><?xml version="1.0" encoding="utf-8"?>
 <p:sld xmlns:a="http://schemas.openxmlformats.org/drawingml/2006/main" xmlns:r="http://schemas.openxmlformats.org/officeDocument/2006/relationships" xmlns:p="http://schemas.openxmlformats.org/presentationml/2006/main">
   <p:cSld>
     <p:spTree>
@@ -17366,7 +18426,7 @@
           <p:nvPr>
             <p:extLst>
               <p:ext uri="{D42A27DB-BD31-4B8C-83A1-F6EECF244321}">
-                <p14:modId xmlns:p14="http://schemas.microsoft.com/office/powerpoint/2010/main" val="1990946605"/>
+                <p14:modId xmlns:p14="http://schemas.microsoft.com/office/powerpoint/2010/main" val="4080177821"/>
               </p:ext>
             </p:extLst>
           </p:nvPr>
@@ -17381,115 +18441,6 @@
           </a:graphicData>
         </a:graphic>
       </p:graphicFrame>
-      <p:sp>
-        <p:nvSpPr>
-          <p:cNvPr id="4" name="Rounded Rectangle 8">
-            <a:extLst>
-              <a:ext uri="{FF2B5EF4-FFF2-40B4-BE49-F238E27FC236}">
-                <a16:creationId xmlns:a16="http://schemas.microsoft.com/office/drawing/2014/main" id="{DD50C4C5-8F14-51BB-A493-23F69E80AE77}"/>
-              </a:ext>
-            </a:extLst>
-          </p:cNvPr>
-          <p:cNvSpPr/>
-          <p:nvPr/>
-        </p:nvSpPr>
-        <p:spPr>
-          <a:xfrm>
-            <a:off x="2085430" y="4795339"/>
-            <a:ext cx="3839120" cy="1516561"/>
-          </a:xfrm>
-          <a:prstGeom prst="roundRect">
-            <a:avLst>
-              <a:gd name="adj" fmla="val 37941"/>
-            </a:avLst>
-          </a:prstGeom>
-          <a:solidFill>
-            <a:srgbClr val="FFFDF7"/>
-          </a:solidFill>
-          <a:ln w="76200">
-            <a:solidFill>
-              <a:schemeClr val="accent4">
-                <a:lumMod val="20000"/>
-                <a:lumOff val="80000"/>
-              </a:schemeClr>
-            </a:solidFill>
-          </a:ln>
-        </p:spPr>
-        <p:style>
-          <a:lnRef idx="2">
-            <a:schemeClr val="accent1">
-              <a:shade val="50000"/>
-            </a:schemeClr>
-          </a:lnRef>
-          <a:fillRef idx="1">
-            <a:schemeClr val="accent1"/>
-          </a:fillRef>
-          <a:effectRef idx="0">
-            <a:schemeClr val="accent1"/>
-          </a:effectRef>
-          <a:fontRef idx="minor">
-            <a:schemeClr val="lt1"/>
-          </a:fontRef>
-        </p:style>
-        <p:txBody>
-          <a:bodyPr rtlCol="0" anchor="ctr"/>
-          <a:lstStyle/>
-          <a:p>
-            <a:pPr algn="ctr"/>
-            <a:r>
-              <a:rPr lang="de-DE" sz="3200" b="1" dirty="0" err="1">
-                <a:solidFill>
-                  <a:schemeClr val="tx1"/>
-                </a:solidFill>
-                <a:latin typeface="Bahnschrift" panose="020B0502040204020203" pitchFamily="34" charset="0"/>
-              </a:rPr>
-              <a:t>arguments</a:t>
-            </a:r>
-            <a:r>
-              <a:rPr lang="de-DE" sz="3200" b="1" dirty="0">
-                <a:solidFill>
-                  <a:schemeClr val="tx1"/>
-                </a:solidFill>
-                <a:latin typeface="Bahnschrift" panose="020B0502040204020203" pitchFamily="34" charset="0"/>
-              </a:rPr>
-              <a:t> </a:t>
-            </a:r>
-            <a:r>
-              <a:rPr lang="de-DE" sz="3200" b="1" dirty="0" err="1">
-                <a:solidFill>
-                  <a:schemeClr val="tx1"/>
-                </a:solidFill>
-                <a:latin typeface="Bahnschrift" panose="020B0502040204020203" pitchFamily="34" charset="0"/>
-              </a:rPr>
-              <a:t>for</a:t>
-            </a:r>
-            <a:r>
-              <a:rPr lang="de-DE" sz="3200" b="1" dirty="0">
-                <a:solidFill>
-                  <a:schemeClr val="tx1"/>
-                </a:solidFill>
-                <a:latin typeface="Bahnschrift" panose="020B0502040204020203" pitchFamily="34" charset="0"/>
-              </a:rPr>
-              <a:t> </a:t>
-            </a:r>
-            <a:r>
-              <a:rPr lang="de-DE" sz="3200" b="1" dirty="0" err="1">
-                <a:solidFill>
-                  <a:schemeClr val="tx1"/>
-                </a:solidFill>
-                <a:latin typeface="Bahnschrift" panose="020B0502040204020203" pitchFamily="34" charset="0"/>
-              </a:rPr>
-              <a:t>modelling</a:t>
-            </a:r>
-            <a:endParaRPr lang="en-GB" sz="1200" b="1" dirty="0">
-              <a:solidFill>
-                <a:schemeClr val="tx1"/>
-              </a:solidFill>
-              <a:latin typeface="Bahnschrift" panose="020B0502040204020203" pitchFamily="34" charset="0"/>
-            </a:endParaRPr>
-          </a:p>
-        </p:txBody>
-      </p:sp>
     </p:spTree>
     <p:extLst>
       <p:ext uri="{BB962C8B-B14F-4D97-AF65-F5344CB8AC3E}">
@@ -17619,50 +18570,6 @@
                             </p:childTnLst>
                           </p:cTn>
                         </p:par>
-                        <p:par>
-                          <p:cTn id="13" fill="hold">
-                            <p:stCondLst>
-                              <p:cond delay="500"/>
-                            </p:stCondLst>
-                            <p:childTnLst>
-                              <p:par>
-                                <p:cTn id="14" presetID="10" presetClass="entr" presetSubtype="0" fill="hold" grpId="0" nodeType="afterEffect">
-                                  <p:stCondLst>
-                                    <p:cond delay="0"/>
-                                  </p:stCondLst>
-                                  <p:childTnLst>
-                                    <p:set>
-                                      <p:cBhvr>
-                                        <p:cTn id="15" dur="1" fill="hold">
-                                          <p:stCondLst>
-                                            <p:cond delay="0"/>
-                                          </p:stCondLst>
-                                        </p:cTn>
-                                        <p:tgtEl>
-                                          <p:spTgt spid="4"/>
-                                        </p:tgtEl>
-                                        <p:attrNameLst>
-                                          <p:attrName>style.visibility</p:attrName>
-                                        </p:attrNameLst>
-                                      </p:cBhvr>
-                                      <p:to>
-                                        <p:strVal val="visible"/>
-                                      </p:to>
-                                    </p:set>
-                                    <p:animEffect transition="in" filter="fade">
-                                      <p:cBhvr>
-                                        <p:cTn id="16" dur="250"/>
-                                        <p:tgtEl>
-                                          <p:spTgt spid="4"/>
-                                        </p:tgtEl>
-                                      </p:cBhvr>
-                                    </p:animEffect>
-                                  </p:childTnLst>
-                                </p:cTn>
-                              </p:par>
-                            </p:childTnLst>
-                          </p:cTn>
-                        </p:par>
                       </p:childTnLst>
                     </p:cTn>
                   </p:par>
@@ -17691,13 +18598,12 @@
       <p:bldGraphic spid="5" grpId="0">
         <p:bldAsOne/>
       </p:bldGraphic>
-      <p:bldP spid="4" grpId="0" animBg="1"/>
     </p:bldLst>
   </p:timing>
 </p:sld>
 </file>
 
-<file path=ppt/slides/slide25.xml><?xml version="1.0" encoding="utf-8"?>
+<file path=ppt/slides/slide26.xml><?xml version="1.0" encoding="utf-8"?>
 <p:sld xmlns:a="http://schemas.openxmlformats.org/drawingml/2006/main" xmlns:r="http://schemas.openxmlformats.org/officeDocument/2006/relationships" xmlns:p="http://schemas.openxmlformats.org/presentationml/2006/main">
   <p:cSld>
     <p:spTree>
@@ -19286,7 +20192,7 @@
 </p:sld>
 </file>
 
-<file path=ppt/slides/slide26.xml><?xml version="1.0" encoding="utf-8"?>
+<file path=ppt/slides/slide27.xml><?xml version="1.0" encoding="utf-8"?>
 <p:sld xmlns:a="http://schemas.openxmlformats.org/drawingml/2006/main" xmlns:r="http://schemas.openxmlformats.org/officeDocument/2006/relationships" xmlns:p="http://schemas.openxmlformats.org/presentationml/2006/main">
   <p:cSld>
     <p:spTree>
@@ -20812,10 +21718,17 @@
   <p:clrMapOvr>
     <a:masterClrMapping/>
   </p:clrMapOvr>
+  <p:timing>
+    <p:tnLst>
+      <p:par>
+        <p:cTn id="1" dur="indefinite" restart="never" nodeType="tmRoot"/>
+      </p:par>
+    </p:tnLst>
+  </p:timing>
 </p:sld>
 </file>
 
-<file path=ppt/slides/slide27.xml><?xml version="1.0" encoding="utf-8"?>
+<file path=ppt/slides/slide28.xml><?xml version="1.0" encoding="utf-8"?>
 <p:sld xmlns:a="http://schemas.openxmlformats.org/drawingml/2006/main" xmlns:r="http://schemas.openxmlformats.org/officeDocument/2006/relationships" xmlns:p="http://schemas.openxmlformats.org/presentationml/2006/main">
   <p:cSld>
     <p:spTree>
@@ -21279,10 +22192,17 @@
   <p:clrMapOvr>
     <a:masterClrMapping/>
   </p:clrMapOvr>
+  <p:timing>
+    <p:tnLst>
+      <p:par>
+        <p:cTn id="1" dur="indefinite" restart="never" nodeType="tmRoot"/>
+      </p:par>
+    </p:tnLst>
+  </p:timing>
 </p:sld>
 </file>
 
-<file path=ppt/slides/slide28.xml><?xml version="1.0" encoding="utf-8"?>
+<file path=ppt/slides/slide29.xml><?xml version="1.0" encoding="utf-8"?>
 <p:sld xmlns:a="http://schemas.openxmlformats.org/drawingml/2006/main" xmlns:r="http://schemas.openxmlformats.org/officeDocument/2006/relationships" xmlns:p="http://schemas.openxmlformats.org/presentationml/2006/main">
   <p:cSld>
     <p:spTree>
@@ -21395,6 +22315,79 @@
           </a:xfrm>
         </p:spPr>
       </p:pic>
+      <p:sp>
+        <p:nvSpPr>
+          <p:cNvPr id="6" name="Rounded Rectangle 8">
+            <a:extLst>
+              <a:ext uri="{FF2B5EF4-FFF2-40B4-BE49-F238E27FC236}">
+                <a16:creationId xmlns:a16="http://schemas.microsoft.com/office/drawing/2014/main" id="{E4DA88D5-3355-65A7-49E6-A8851A2ADA16}"/>
+              </a:ext>
+            </a:extLst>
+          </p:cNvPr>
+          <p:cNvSpPr/>
+          <p:nvPr/>
+        </p:nvSpPr>
+        <p:spPr>
+          <a:xfrm>
+            <a:off x="7262949" y="2857521"/>
+            <a:ext cx="2915195" cy="1516561"/>
+          </a:xfrm>
+          <a:prstGeom prst="roundRect">
+            <a:avLst>
+              <a:gd name="adj" fmla="val 37941"/>
+            </a:avLst>
+          </a:prstGeom>
+          <a:solidFill>
+            <a:srgbClr val="FFFDF7"/>
+          </a:solidFill>
+          <a:ln w="76200">
+            <a:solidFill>
+              <a:schemeClr val="accent4">
+                <a:lumMod val="20000"/>
+                <a:lumOff val="80000"/>
+              </a:schemeClr>
+            </a:solidFill>
+          </a:ln>
+        </p:spPr>
+        <p:style>
+          <a:lnRef idx="2">
+            <a:schemeClr val="accent1">
+              <a:shade val="50000"/>
+            </a:schemeClr>
+          </a:lnRef>
+          <a:fillRef idx="1">
+            <a:schemeClr val="accent1"/>
+          </a:fillRef>
+          <a:effectRef idx="0">
+            <a:schemeClr val="accent1"/>
+          </a:effectRef>
+          <a:fontRef idx="minor">
+            <a:schemeClr val="lt1"/>
+          </a:fontRef>
+        </p:style>
+        <p:txBody>
+          <a:bodyPr rtlCol="0" anchor="ctr"/>
+          <a:lstStyle/>
+          <a:p>
+            <a:pPr algn="ctr"/>
+            <a:r>
+              <a:rPr lang="de-DE" sz="3200" b="1" dirty="0" smtClean="0">
+                <a:solidFill>
+                  <a:schemeClr val="tx1"/>
+                </a:solidFill>
+                <a:latin typeface="Bahnschrift" panose="020B0502040204020203" pitchFamily="34" charset="0"/>
+              </a:rPr>
+              <a:t>Show less</a:t>
+            </a:r>
+            <a:endParaRPr lang="en-GB" sz="1200" b="1" dirty="0">
+              <a:solidFill>
+                <a:schemeClr val="tx1"/>
+              </a:solidFill>
+              <a:latin typeface="Bahnschrift" panose="020B0502040204020203" pitchFamily="34" charset="0"/>
+            </a:endParaRPr>
+          </a:p>
+        </p:txBody>
+      </p:sp>
     </p:spTree>
     <p:extLst>
       <p:ext uri="{BB962C8B-B14F-4D97-AF65-F5344CB8AC3E}">
@@ -21405,247 +22398,95 @@
   <p:clrMapOvr>
     <a:masterClrMapping/>
   </p:clrMapOvr>
-</p:sld>
-</file>
-
-<file path=ppt/slides/slide29.xml><?xml version="1.0" encoding="utf-8"?>
-<p:sld xmlns:a="http://schemas.openxmlformats.org/drawingml/2006/main" xmlns:r="http://schemas.openxmlformats.org/officeDocument/2006/relationships" xmlns:p="http://schemas.openxmlformats.org/presentationml/2006/main">
-  <p:cSld>
-    <p:spTree>
-      <p:nvGrpSpPr>
-        <p:cNvPr id="1" name=""/>
-        <p:cNvGrpSpPr/>
-        <p:nvPr/>
-      </p:nvGrpSpPr>
-      <p:grpSpPr>
-        <a:xfrm>
-          <a:off x="0" y="0"/>
-          <a:ext cx="0" cy="0"/>
-          <a:chOff x="0" y="0"/>
-          <a:chExt cx="0" cy="0"/>
-        </a:xfrm>
-      </p:grpSpPr>
-      <p:sp>
-        <p:nvSpPr>
-          <p:cNvPr id="2" name="Title 1"/>
-          <p:cNvSpPr>
-            <a:spLocks noGrp="1"/>
-          </p:cNvSpPr>
-          <p:nvPr>
-            <p:ph type="title"/>
-          </p:nvPr>
-        </p:nvSpPr>
-        <p:spPr/>
-        <p:txBody>
-          <a:bodyPr/>
-          <a:lstStyle/>
-          <a:p>
-            <a:r>
-              <a:rPr lang="de-DE" dirty="0"/>
-              <a:t>Hierarchical Gaussian Filter</a:t>
-            </a:r>
-            <a:endParaRPr lang="en-GB" dirty="0"/>
-          </a:p>
-        </p:txBody>
-      </p:sp>
-      <p:sp>
-        <p:nvSpPr>
-          <p:cNvPr id="3" name="Content Placeholder 2"/>
-          <p:cNvSpPr>
-            <a:spLocks noGrp="1"/>
-          </p:cNvSpPr>
-          <p:nvPr>
-            <p:ph idx="1"/>
-          </p:nvPr>
-        </p:nvSpPr>
-        <p:spPr/>
-        <p:txBody>
-          <a:bodyPr>
-            <a:normAutofit/>
-          </a:bodyPr>
-          <a:lstStyle/>
-          <a:p>
-            <a:pPr>
-              <a:lnSpc>
-                <a:spcPct val="150000"/>
-              </a:lnSpc>
-            </a:pPr>
-            <a:r>
-              <a:rPr lang="de-DE" b="1" dirty="0"/>
-              <a:t>What </a:t>
-            </a:r>
-            <a:r>
-              <a:rPr lang="de-DE" b="1" dirty="0" err="1"/>
-              <a:t>is</a:t>
-            </a:r>
-            <a:r>
-              <a:rPr lang="de-DE" b="1" dirty="0"/>
-              <a:t> </a:t>
-            </a:r>
-            <a:r>
-              <a:rPr lang="de-DE" b="1" dirty="0" err="1"/>
-              <a:t>it</a:t>
-            </a:r>
-            <a:r>
-              <a:rPr lang="de-DE" b="1" dirty="0"/>
-              <a:t>?</a:t>
-            </a:r>
-          </a:p>
-          <a:p>
-            <a:pPr lvl="1">
-              <a:lnSpc>
-                <a:spcPct val="150000"/>
-              </a:lnSpc>
-            </a:pPr>
-            <a:r>
-              <a:rPr lang="de-DE" dirty="0"/>
-              <a:t>A </a:t>
-            </a:r>
-            <a:r>
-              <a:rPr lang="de-DE" dirty="0" err="1"/>
-              <a:t>Bayesian</a:t>
-            </a:r>
-            <a:r>
-              <a:rPr lang="de-DE" dirty="0"/>
-              <a:t> </a:t>
-            </a:r>
-            <a:r>
-              <a:rPr lang="de-DE" dirty="0" err="1"/>
-              <a:t>observer</a:t>
-            </a:r>
-            <a:r>
-              <a:rPr lang="de-DE" dirty="0"/>
-              <a:t> that </a:t>
-            </a:r>
-            <a:r>
-              <a:rPr lang="de-DE" dirty="0" err="1"/>
-              <a:t>infers</a:t>
-            </a:r>
-            <a:r>
-              <a:rPr lang="de-DE" dirty="0"/>
-              <a:t> </a:t>
-            </a:r>
-            <a:r>
-              <a:rPr lang="de-DE" dirty="0" err="1"/>
-              <a:t>both</a:t>
-            </a:r>
-            <a:r>
-              <a:rPr lang="de-DE" dirty="0"/>
-              <a:t>: </a:t>
-            </a:r>
-          </a:p>
-          <a:p>
-            <a:pPr lvl="2">
-              <a:lnSpc>
-                <a:spcPct val="150000"/>
-              </a:lnSpc>
-            </a:pPr>
-            <a:r>
-              <a:rPr lang="de-DE" sz="2400" dirty="0" err="1"/>
-              <a:t>the</a:t>
-            </a:r>
-            <a:r>
-              <a:rPr lang="de-DE" sz="2400" dirty="0"/>
-              <a:t> </a:t>
-            </a:r>
-            <a:r>
-              <a:rPr lang="de-DE" sz="2400" dirty="0" err="1"/>
-              <a:t>hidden</a:t>
-            </a:r>
-            <a:r>
-              <a:rPr lang="de-DE" sz="2400" dirty="0"/>
-              <a:t>, </a:t>
-            </a:r>
-            <a:r>
-              <a:rPr lang="de-DE" sz="2400" dirty="0" err="1"/>
-              <a:t>drifting</a:t>
-            </a:r>
-            <a:r>
-              <a:rPr lang="de-DE" sz="2400" dirty="0"/>
-              <a:t> </a:t>
-            </a:r>
-            <a:r>
-              <a:rPr lang="de-DE" sz="2400" b="1" dirty="0" err="1"/>
-              <a:t>reward</a:t>
-            </a:r>
-            <a:r>
-              <a:rPr lang="de-DE" sz="2400" b="1" dirty="0"/>
-              <a:t> </a:t>
-            </a:r>
-            <a:r>
-              <a:rPr lang="de-DE" sz="2400" b="1" dirty="0" err="1"/>
-              <a:t>probability</a:t>
-            </a:r>
-            <a:endParaRPr lang="de-DE" sz="2400" b="1" dirty="0"/>
-          </a:p>
-          <a:p>
-            <a:pPr lvl="2">
-              <a:lnSpc>
-                <a:spcPct val="150000"/>
-              </a:lnSpc>
-            </a:pPr>
-            <a:r>
-              <a:rPr lang="de-DE" sz="2400" dirty="0"/>
-              <a:t>how fast </a:t>
-            </a:r>
-            <a:r>
-              <a:rPr lang="de-DE" sz="2400" dirty="0" err="1"/>
-              <a:t>the</a:t>
-            </a:r>
-            <a:r>
-              <a:rPr lang="de-DE" sz="2400" dirty="0"/>
-              <a:t> </a:t>
-            </a:r>
-            <a:r>
-              <a:rPr lang="de-DE" sz="2400" dirty="0" err="1"/>
-              <a:t>probability</a:t>
-            </a:r>
-            <a:r>
-              <a:rPr lang="de-DE" sz="2400" dirty="0"/>
-              <a:t> </a:t>
-            </a:r>
-            <a:r>
-              <a:rPr lang="de-DE" sz="2400" dirty="0" err="1"/>
-              <a:t>is</a:t>
-            </a:r>
-            <a:r>
-              <a:rPr lang="de-DE" sz="2400" dirty="0"/>
-              <a:t> </a:t>
-            </a:r>
-            <a:r>
-              <a:rPr lang="de-DE" sz="2400" dirty="0" err="1"/>
-              <a:t>changing</a:t>
-            </a:r>
-            <a:r>
-              <a:rPr lang="de-DE" sz="2400" dirty="0"/>
-              <a:t>: </a:t>
-            </a:r>
-            <a:r>
-              <a:rPr lang="de-DE" sz="2400" b="1" dirty="0" err="1"/>
-              <a:t>the</a:t>
-            </a:r>
-            <a:r>
-              <a:rPr lang="de-DE" sz="2400" b="1" dirty="0"/>
-              <a:t> </a:t>
-            </a:r>
-            <a:r>
-              <a:rPr lang="de-DE" sz="2400" b="1" dirty="0" err="1"/>
-              <a:t>volatility</a:t>
-            </a:r>
-            <a:endParaRPr lang="de-DE" sz="2400" b="1" dirty="0"/>
-          </a:p>
-        </p:txBody>
-      </p:sp>
-    </p:spTree>
-    <p:extLst>
-      <p:ext uri="{BB962C8B-B14F-4D97-AF65-F5344CB8AC3E}">
-        <p14:creationId xmlns:p14="http://schemas.microsoft.com/office/powerpoint/2010/main" val="4013591181"/>
-      </p:ext>
-    </p:extLst>
-  </p:cSld>
-  <p:clrMapOvr>
-    <a:masterClrMapping/>
-  </p:clrMapOvr>
+  <p:timing>
+    <p:tnLst>
+      <p:par>
+        <p:cTn id="1" dur="indefinite" restart="never" nodeType="tmRoot">
+          <p:childTnLst>
+            <p:seq concurrent="1" nextAc="seek">
+              <p:cTn id="2" dur="indefinite" nodeType="mainSeq">
+                <p:childTnLst>
+                  <p:par>
+                    <p:cTn id="3" fill="hold">
+                      <p:stCondLst>
+                        <p:cond delay="indefinite"/>
+                        <p:cond evt="onBegin" delay="0">
+                          <p:tn val="2"/>
+                        </p:cond>
+                      </p:stCondLst>
+                      <p:childTnLst>
+                        <p:par>
+                          <p:cTn id="4" fill="hold">
+                            <p:stCondLst>
+                              <p:cond delay="0"/>
+                            </p:stCondLst>
+                            <p:childTnLst>
+                              <p:par>
+                                <p:cTn id="5" presetID="10" presetClass="entr" presetSubtype="0" fill="hold" grpId="0" nodeType="afterEffect">
+                                  <p:stCondLst>
+                                    <p:cond delay="0"/>
+                                  </p:stCondLst>
+                                  <p:childTnLst>
+                                    <p:set>
+                                      <p:cBhvr>
+                                        <p:cTn id="6" dur="1" fill="hold">
+                                          <p:stCondLst>
+                                            <p:cond delay="0"/>
+                                          </p:stCondLst>
+                                        </p:cTn>
+                                        <p:tgtEl>
+                                          <p:spTgt spid="6"/>
+                                        </p:tgtEl>
+                                        <p:attrNameLst>
+                                          <p:attrName>style.visibility</p:attrName>
+                                        </p:attrNameLst>
+                                      </p:cBhvr>
+                                      <p:to>
+                                        <p:strVal val="visible"/>
+                                      </p:to>
+                                    </p:set>
+                                    <p:animEffect transition="in" filter="fade">
+                                      <p:cBhvr>
+                                        <p:cTn id="7" dur="250"/>
+                                        <p:tgtEl>
+                                          <p:spTgt spid="6"/>
+                                        </p:tgtEl>
+                                      </p:cBhvr>
+                                    </p:animEffect>
+                                  </p:childTnLst>
+                                </p:cTn>
+                              </p:par>
+                            </p:childTnLst>
+                          </p:cTn>
+                        </p:par>
+                      </p:childTnLst>
+                    </p:cTn>
+                  </p:par>
+                </p:childTnLst>
+              </p:cTn>
+              <p:prevCondLst>
+                <p:cond evt="onPrev" delay="0">
+                  <p:tgtEl>
+                    <p:sldTgt/>
+                  </p:tgtEl>
+                </p:cond>
+              </p:prevCondLst>
+              <p:nextCondLst>
+                <p:cond evt="onNext" delay="0">
+                  <p:tgtEl>
+                    <p:sldTgt/>
+                  </p:tgtEl>
+                </p:cond>
+              </p:nextCondLst>
+            </p:seq>
+          </p:childTnLst>
+        </p:cTn>
+      </p:par>
+    </p:tnLst>
+    <p:bldLst>
+      <p:bldP spid="6" grpId="0" animBg="1"/>
+    </p:bldLst>
+  </p:timing>
 </p:sld>
 </file>
 
@@ -22620,13 +23461,7 @@
   <p:cSld>
     <p:spTree>
       <p:nvGrpSpPr>
-        <p:cNvPr id="1" name="">
-          <a:extLst>
-            <a:ext uri="{FF2B5EF4-FFF2-40B4-BE49-F238E27FC236}">
-              <a16:creationId xmlns:a16="http://schemas.microsoft.com/office/drawing/2014/main" id="{D9EE050D-E7C8-1359-FDAC-D8979B1F5DB4}"/>
-            </a:ext>
-          </a:extLst>
-        </p:cNvPr>
+        <p:cNvPr id="1" name=""/>
         <p:cNvGrpSpPr/>
         <p:nvPr/>
       </p:nvGrpSpPr>
@@ -22640,13 +23475,7 @@
       </p:grpSpPr>
       <p:sp>
         <p:nvSpPr>
-          <p:cNvPr id="2" name="Title 1">
-            <a:extLst>
-              <a:ext uri="{FF2B5EF4-FFF2-40B4-BE49-F238E27FC236}">
-                <a16:creationId xmlns:a16="http://schemas.microsoft.com/office/drawing/2014/main" id="{4CBD0DD8-3010-CAC4-48C5-4B1A9095DA4F}"/>
-              </a:ext>
-            </a:extLst>
-          </p:cNvPr>
+          <p:cNvPr id="2" name="Title 1"/>
           <p:cNvSpPr>
             <a:spLocks noGrp="1"/>
           </p:cNvSpPr>
@@ -22667,154 +23496,211 @@
           </a:p>
         </p:txBody>
       </p:sp>
-      <mc:AlternateContent xmlns:mc="http://schemas.openxmlformats.org/markup-compatibility/2006" xmlns:a14="http://schemas.microsoft.com/office/drawing/2010/main">
-        <mc:Choice Requires="a14">
-          <p:sp>
-            <p:nvSpPr>
-              <p:cNvPr id="3" name="Content Placeholder 2">
-                <a:extLst>
-                  <a:ext uri="{FF2B5EF4-FFF2-40B4-BE49-F238E27FC236}">
-                    <a16:creationId xmlns:a16="http://schemas.microsoft.com/office/drawing/2014/main" id="{1FF01282-BCC1-1539-8A90-A471BFF20E7E}"/>
-                  </a:ext>
-                </a:extLst>
-              </p:cNvPr>
-              <p:cNvSpPr>
-                <a:spLocks noGrp="1"/>
-              </p:cNvSpPr>
-              <p:nvPr>
-                <p:ph idx="1"/>
-              </p:nvPr>
-            </p:nvSpPr>
-            <p:spPr/>
-            <p:txBody>
-              <a:bodyPr>
-                <a:normAutofit/>
-              </a:bodyPr>
-              <a:lstStyle/>
-              <a:p>
-                <a:pPr>
-                  <a:lnSpc>
-                    <a:spcPct val="150000"/>
-                  </a:lnSpc>
-                </a:pPr>
-                <a:r>
-                  <a:rPr lang="en-US" b="1" dirty="0"/>
-                  <a:t>Why use it instead of RW?</a:t>
-                </a:r>
-              </a:p>
-              <a:p>
-                <a:pPr lvl="1">
-                  <a:lnSpc>
-                    <a:spcPct val="150000"/>
-                  </a:lnSpc>
-                </a:pPr>
-                <a:r>
-                  <a:rPr lang="en-US" dirty="0"/>
-                  <a:t>RW's learning rate </a:t>
-                </a:r>
-                <a14:m>
-                  <m:oMath xmlns:m="http://schemas.openxmlformats.org/officeDocument/2006/math">
-                    <m:r>
-                      <a:rPr lang="en-US" i="1">
-                        <a:latin typeface="Cambria Math" panose="02040503050406030204" pitchFamily="18" charset="0"/>
-                      </a:rPr>
-                      <m:t>𝛼</m:t>
-                    </m:r>
-                  </m:oMath>
-                </a14:m>
-                <a:r>
-                  <a:rPr lang="en-US" dirty="0"/>
-                  <a:t> is </a:t>
-                </a:r>
-                <a:r>
-                  <a:rPr lang="en-US" b="1" dirty="0"/>
-                  <a:t>fixed</a:t>
-                </a:r>
-                <a:r>
-                  <a:rPr lang="en-US" dirty="0"/>
-                  <a:t>. The HGF's learning rate is </a:t>
-                </a:r>
-                <a:r>
-                  <a:rPr lang="en-US" b="1" dirty="0"/>
-                  <a:t>dynamic</a:t>
-                </a:r>
-                <a:r>
-                  <a:rPr lang="en-US" dirty="0"/>
-                  <a:t> and rises when the environment seems volatile.</a:t>
-                </a:r>
-              </a:p>
-              <a:p>
-                <a:pPr lvl="1">
-                  <a:lnSpc>
-                    <a:spcPct val="150000"/>
-                  </a:lnSpc>
-                </a:pPr>
-                <a:r>
-                  <a:rPr lang="en-US" dirty="0"/>
-                  <a:t>This potentially represents </a:t>
-                </a:r>
-                <a:r>
-                  <a:rPr lang="en-US" b="1" dirty="0"/>
-                  <a:t>adaptive</a:t>
-                </a:r>
-                <a:r>
-                  <a:rPr lang="en-US" dirty="0"/>
-                  <a:t> learning: learn fast when the world is changing, slow when it's stable.</a:t>
-                </a:r>
-              </a:p>
-            </p:txBody>
-          </p:sp>
-        </mc:Choice>
-        <mc:Fallback xmlns="">
-          <p:sp>
-            <p:nvSpPr>
-              <p:cNvPr id="3" name="Content Placeholder 2">
-                <a:extLst>
-                  <a:ext uri="{FF2B5EF4-FFF2-40B4-BE49-F238E27FC236}">
-                    <a16:creationId xmlns:a16="http://schemas.microsoft.com/office/drawing/2014/main" id="{1FF01282-BCC1-1539-8A90-A471BFF20E7E}"/>
-                  </a:ext>
-                </a:extLst>
-              </p:cNvPr>
-              <p:cNvSpPr>
-                <a:spLocks noGrp="1" noRot="1" noChangeAspect="1" noMove="1" noResize="1" noEditPoints="1" noAdjustHandles="1" noChangeArrowheads="1" noChangeShapeType="1" noTextEdit="1"/>
-              </p:cNvSpPr>
-              <p:nvPr>
-                <p:ph idx="1"/>
-              </p:nvPr>
-            </p:nvSpPr>
-            <p:spPr>
-              <a:blipFill>
-                <a:blip r:embed="rId2"/>
-                <a:stretch>
-                  <a:fillRect l="-1043"/>
-                </a:stretch>
-              </a:blipFill>
-            </p:spPr>
-            <p:txBody>
-              <a:bodyPr/>
-              <a:lstStyle/>
-              <a:p>
-                <a:r>
-                  <a:rPr lang="en-US">
-                    <a:noFill/>
-                  </a:rPr>
-                  <a:t> </a:t>
-                </a:r>
-              </a:p>
-            </p:txBody>
-          </p:sp>
-        </mc:Fallback>
-      </mc:AlternateContent>
+      <p:sp>
+        <p:nvSpPr>
+          <p:cNvPr id="3" name="Content Placeholder 2"/>
+          <p:cNvSpPr>
+            <a:spLocks noGrp="1"/>
+          </p:cNvSpPr>
+          <p:nvPr>
+            <p:ph idx="1"/>
+          </p:nvPr>
+        </p:nvSpPr>
+        <p:spPr/>
+        <p:txBody>
+          <a:bodyPr>
+            <a:normAutofit/>
+          </a:bodyPr>
+          <a:lstStyle/>
+          <a:p>
+            <a:pPr>
+              <a:lnSpc>
+                <a:spcPct val="150000"/>
+              </a:lnSpc>
+            </a:pPr>
+            <a:r>
+              <a:rPr lang="de-DE" b="1" dirty="0"/>
+              <a:t>What </a:t>
+            </a:r>
+            <a:r>
+              <a:rPr lang="de-DE" b="1" dirty="0" err="1"/>
+              <a:t>is</a:t>
+            </a:r>
+            <a:r>
+              <a:rPr lang="de-DE" b="1" dirty="0"/>
+              <a:t> </a:t>
+            </a:r>
+            <a:r>
+              <a:rPr lang="de-DE" b="1" dirty="0" err="1"/>
+              <a:t>it</a:t>
+            </a:r>
+            <a:r>
+              <a:rPr lang="de-DE" b="1" dirty="0"/>
+              <a:t>?</a:t>
+            </a:r>
+          </a:p>
+          <a:p>
+            <a:pPr lvl="1">
+              <a:lnSpc>
+                <a:spcPct val="150000"/>
+              </a:lnSpc>
+            </a:pPr>
+            <a:r>
+              <a:rPr lang="de-DE" dirty="0"/>
+              <a:t>A </a:t>
+            </a:r>
+            <a:r>
+              <a:rPr lang="de-DE" dirty="0" err="1"/>
+              <a:t>Bayesian</a:t>
+            </a:r>
+            <a:r>
+              <a:rPr lang="de-DE" dirty="0"/>
+              <a:t> </a:t>
+            </a:r>
+            <a:r>
+              <a:rPr lang="de-DE" dirty="0" err="1"/>
+              <a:t>observer</a:t>
+            </a:r>
+            <a:r>
+              <a:rPr lang="de-DE" dirty="0"/>
+              <a:t> that </a:t>
+            </a:r>
+            <a:r>
+              <a:rPr lang="de-DE" dirty="0" err="1"/>
+              <a:t>infers</a:t>
+            </a:r>
+            <a:r>
+              <a:rPr lang="de-DE" dirty="0"/>
+              <a:t> </a:t>
+            </a:r>
+            <a:r>
+              <a:rPr lang="de-DE" dirty="0" err="1"/>
+              <a:t>both</a:t>
+            </a:r>
+            <a:r>
+              <a:rPr lang="de-DE" dirty="0"/>
+              <a:t>: </a:t>
+            </a:r>
+          </a:p>
+          <a:p>
+            <a:pPr lvl="2">
+              <a:lnSpc>
+                <a:spcPct val="150000"/>
+              </a:lnSpc>
+            </a:pPr>
+            <a:r>
+              <a:rPr lang="de-DE" sz="2400" dirty="0" err="1"/>
+              <a:t>the</a:t>
+            </a:r>
+            <a:r>
+              <a:rPr lang="de-DE" sz="2400" dirty="0"/>
+              <a:t> </a:t>
+            </a:r>
+            <a:r>
+              <a:rPr lang="de-DE" sz="2400" dirty="0" err="1"/>
+              <a:t>hidden</a:t>
+            </a:r>
+            <a:r>
+              <a:rPr lang="de-DE" sz="2400" dirty="0"/>
+              <a:t>, </a:t>
+            </a:r>
+            <a:r>
+              <a:rPr lang="de-DE" sz="2400" dirty="0" err="1"/>
+              <a:t>drifting</a:t>
+            </a:r>
+            <a:r>
+              <a:rPr lang="de-DE" sz="2400" dirty="0"/>
+              <a:t> </a:t>
+            </a:r>
+            <a:r>
+              <a:rPr lang="de-DE" sz="2400" b="1" dirty="0" err="1"/>
+              <a:t>reward</a:t>
+            </a:r>
+            <a:r>
+              <a:rPr lang="de-DE" sz="2400" b="1" dirty="0"/>
+              <a:t> </a:t>
+            </a:r>
+            <a:r>
+              <a:rPr lang="de-DE" sz="2400" b="1" dirty="0" err="1"/>
+              <a:t>probability</a:t>
+            </a:r>
+            <a:endParaRPr lang="de-DE" sz="2400" b="1" dirty="0"/>
+          </a:p>
+          <a:p>
+            <a:pPr lvl="2">
+              <a:lnSpc>
+                <a:spcPct val="150000"/>
+              </a:lnSpc>
+            </a:pPr>
+            <a:r>
+              <a:rPr lang="de-DE" sz="2400" dirty="0"/>
+              <a:t>how fast </a:t>
+            </a:r>
+            <a:r>
+              <a:rPr lang="de-DE" sz="2400" dirty="0" err="1"/>
+              <a:t>the</a:t>
+            </a:r>
+            <a:r>
+              <a:rPr lang="de-DE" sz="2400" dirty="0"/>
+              <a:t> </a:t>
+            </a:r>
+            <a:r>
+              <a:rPr lang="de-DE" sz="2400" dirty="0" err="1"/>
+              <a:t>probability</a:t>
+            </a:r>
+            <a:r>
+              <a:rPr lang="de-DE" sz="2400" dirty="0"/>
+              <a:t> </a:t>
+            </a:r>
+            <a:r>
+              <a:rPr lang="de-DE" sz="2400" dirty="0" err="1"/>
+              <a:t>is</a:t>
+            </a:r>
+            <a:r>
+              <a:rPr lang="de-DE" sz="2400" dirty="0"/>
+              <a:t> </a:t>
+            </a:r>
+            <a:r>
+              <a:rPr lang="de-DE" sz="2400" dirty="0" err="1"/>
+              <a:t>changing</a:t>
+            </a:r>
+            <a:r>
+              <a:rPr lang="de-DE" sz="2400" dirty="0"/>
+              <a:t>: </a:t>
+            </a:r>
+            <a:r>
+              <a:rPr lang="de-DE" sz="2400" b="1" dirty="0" err="1"/>
+              <a:t>the</a:t>
+            </a:r>
+            <a:r>
+              <a:rPr lang="de-DE" sz="2400" b="1" dirty="0"/>
+              <a:t> </a:t>
+            </a:r>
+            <a:r>
+              <a:rPr lang="de-DE" sz="2400" b="1" dirty="0" err="1"/>
+              <a:t>volatility</a:t>
+            </a:r>
+            <a:endParaRPr lang="de-DE" sz="2400" b="1" dirty="0"/>
+          </a:p>
+        </p:txBody>
+      </p:sp>
     </p:spTree>
     <p:extLst>
       <p:ext uri="{BB962C8B-B14F-4D97-AF65-F5344CB8AC3E}">
-        <p14:creationId xmlns:p14="http://schemas.microsoft.com/office/powerpoint/2010/main" val="2442319192"/>
+        <p14:creationId xmlns:p14="http://schemas.microsoft.com/office/powerpoint/2010/main" val="4013591181"/>
       </p:ext>
     </p:extLst>
   </p:cSld>
   <p:clrMapOvr>
     <a:masterClrMapping/>
   </p:clrMapOvr>
+  <p:timing>
+    <p:tnLst>
+      <p:par>
+        <p:cTn id="1" dur="indefinite" restart="never" nodeType="tmRoot"/>
+      </p:par>
+    </p:tnLst>
+  </p:timing>
 </p:sld>
 </file>
 
@@ -23018,6 +23904,13 @@
   <p:clrMapOvr>
     <a:masterClrMapping/>
   </p:clrMapOvr>
+  <p:timing>
+    <p:tnLst>
+      <p:par>
+        <p:cTn id="1" dur="indefinite" restart="never" nodeType="tmRoot"/>
+      </p:par>
+    </p:tnLst>
+  </p:timing>
 </p:sld>
 </file>
 
@@ -25222,7 +26115,7 @@
             <a:blip>
               <a:extLst>
                 <a:ext uri="{96DAC541-7B7A-43D3-8B79-37D633B846F1}">
-                  <asvg:svgBlip xmlns:asvg="http://schemas.microsoft.com/office/drawing/2016/SVG/main" r:embed="rId10"/>
+                  <asvg:svgBlip xmlns:asvg="http://schemas.microsoft.com/office/drawing/2016/SVG/main" xmlns="" r:embed="rId10"/>
                 </a:ext>
               </a:extLst>
             </a:blip>
@@ -25258,7 +26151,7 @@
             <a:blip>
               <a:extLst>
                 <a:ext uri="{96DAC541-7B7A-43D3-8B79-37D633B846F1}">
-                  <asvg:svgBlip xmlns:asvg="http://schemas.microsoft.com/office/drawing/2016/SVG/main" r:embed="rId11"/>
+                  <asvg:svgBlip xmlns:asvg="http://schemas.microsoft.com/office/drawing/2016/SVG/main" xmlns="" r:embed="rId11"/>
                 </a:ext>
               </a:extLst>
             </a:blip>
@@ -27526,6 +28419,13 @@
   <p:clrMapOvr>
     <a:masterClrMapping/>
   </p:clrMapOvr>
+  <p:timing>
+    <p:tnLst>
+      <p:par>
+        <p:cTn id="1" dur="indefinite" restart="never" nodeType="tmRoot"/>
+      </p:par>
+    </p:tnLst>
+  </p:timing>
 </p:sld>
 </file>
 
@@ -27619,6 +28519,13 @@
   <p:clrMapOvr>
     <a:masterClrMapping/>
   </p:clrMapOvr>
+  <p:timing>
+    <p:tnLst>
+      <p:par>
+        <p:cTn id="1" dur="indefinite" restart="never" nodeType="tmRoot"/>
+      </p:par>
+    </p:tnLst>
+  </p:timing>
 </p:sld>
 </file>
 
@@ -27711,21 +28618,28 @@
         </p:blipFill>
         <p:spPr>
           <a:xfrm>
-            <a:off x="0" y="566058"/>
-            <a:ext cx="12192000" cy="5741530"/>
+            <a:off x="3038223" y="1825625"/>
+            <a:ext cx="6115554" cy="4351338"/>
           </a:xfrm>
         </p:spPr>
       </p:pic>
     </p:spTree>
     <p:extLst>
       <p:ext uri="{BB962C8B-B14F-4D97-AF65-F5344CB8AC3E}">
-        <p14:creationId xmlns:p14="http://schemas.microsoft.com/office/powerpoint/2010/main" val="1339492739"/>
+        <p14:creationId xmlns:p14="http://schemas.microsoft.com/office/powerpoint/2010/main" val="743115257"/>
       </p:ext>
     </p:extLst>
   </p:cSld>
   <p:clrMapOvr>
     <a:masterClrMapping/>
   </p:clrMapOvr>
+  <p:timing>
+    <p:tnLst>
+      <p:par>
+        <p:cTn id="1" dur="indefinite" restart="never" nodeType="tmRoot"/>
+      </p:par>
+    </p:tnLst>
+  </p:timing>
 </p:sld>
 </file>
 
@@ -27748,52 +28662,98 @@
       </p:grpSpPr>
       <p:sp>
         <p:nvSpPr>
-          <p:cNvPr id="2" name="Title 1"/>
-          <p:cNvSpPr>
-            <a:spLocks noGrp="1"/>
-          </p:cNvSpPr>
-          <p:nvPr>
-            <p:ph type="title"/>
-          </p:nvPr>
+          <p:cNvPr id="5" name="Rectangle 4"/>
+          <p:cNvSpPr/>
+          <p:nvPr/>
         </p:nvSpPr>
-        <p:spPr/>
+        <p:spPr>
+          <a:xfrm>
+            <a:off x="-316590" y="5583745"/>
+            <a:ext cx="12776548" cy="1803748"/>
+          </a:xfrm>
+          <a:prstGeom prst="rect">
+            <a:avLst/>
+          </a:prstGeom>
+          <a:solidFill>
+            <a:srgbClr val="CFF1E6"/>
+          </a:solidFill>
+          <a:ln w="76200">
+            <a:solidFill>
+              <a:srgbClr val="0CB87F"/>
+            </a:solidFill>
+          </a:ln>
+        </p:spPr>
+        <p:style>
+          <a:lnRef idx="2">
+            <a:schemeClr val="accent1">
+              <a:shade val="50000"/>
+            </a:schemeClr>
+          </a:lnRef>
+          <a:fillRef idx="1">
+            <a:schemeClr val="accent1"/>
+          </a:fillRef>
+          <a:effectRef idx="0">
+            <a:schemeClr val="accent1"/>
+          </a:effectRef>
+          <a:fontRef idx="minor">
+            <a:schemeClr val="lt1"/>
+          </a:fontRef>
+        </p:style>
         <p:txBody>
-          <a:bodyPr/>
+          <a:bodyPr rtlCol="0" anchor="ctr"/>
           <a:lstStyle/>
           <a:p>
-            <a:endParaRPr lang="en-GB"/>
+            <a:pPr algn="ctr"/>
+            <a:endParaRPr lang="en-GB" dirty="0"/>
           </a:p>
         </p:txBody>
       </p:sp>
-      <p:sp>
-        <p:nvSpPr>
+      <p:pic>
+        <p:nvPicPr>
           <p:cNvPr id="3" name="Content Placeholder 2"/>
-          <p:cNvSpPr>
-            <a:spLocks noGrp="1"/>
-          </p:cNvSpPr>
+          <p:cNvPicPr>
+            <a:picLocks noGrp="1" noChangeAspect="1"/>
+          </p:cNvPicPr>
           <p:nvPr>
             <p:ph idx="1"/>
           </p:nvPr>
-        </p:nvSpPr>
-        <p:spPr/>
-        <p:txBody>
-          <a:bodyPr/>
-          <a:lstStyle/>
-          <a:p>
-            <a:endParaRPr lang="en-GB"/>
-          </a:p>
-        </p:txBody>
-      </p:sp>
+        </p:nvPicPr>
+        <p:blipFill>
+          <a:blip r:embed="rId2">
+            <a:extLst>
+              <a:ext uri="{28A0092B-C50C-407E-A947-70E740481C1C}">
+                <a14:useLocalDpi xmlns:a14="http://schemas.microsoft.com/office/drawing/2010/main" val="0"/>
+              </a:ext>
+            </a:extLst>
+          </a:blip>
+          <a:stretch>
+            <a:fillRect/>
+          </a:stretch>
+        </p:blipFill>
+        <p:spPr>
+          <a:xfrm>
+            <a:off x="1848818" y="653529"/>
+            <a:ext cx="8445731" cy="6009305"/>
+          </a:xfrm>
+        </p:spPr>
+      </p:pic>
     </p:spTree>
     <p:extLst>
       <p:ext uri="{BB962C8B-B14F-4D97-AF65-F5344CB8AC3E}">
-        <p14:creationId xmlns:p14="http://schemas.microsoft.com/office/powerpoint/2010/main" val="1144621004"/>
+        <p14:creationId xmlns:p14="http://schemas.microsoft.com/office/powerpoint/2010/main" val="1339492739"/>
       </p:ext>
     </p:extLst>
   </p:cSld>
   <p:clrMapOvr>
     <a:masterClrMapping/>
   </p:clrMapOvr>
+  <p:timing>
+    <p:tnLst>
+      <p:par>
+        <p:cTn id="1" dur="indefinite" restart="never" nodeType="tmRoot"/>
+      </p:par>
+    </p:tnLst>
+  </p:timing>
 </p:sld>
 </file>
 
@@ -27829,7 +28789,381 @@
           <a:bodyPr/>
           <a:lstStyle/>
           <a:p>
-            <a:endParaRPr lang="en-GB"/>
+            <a:r>
+              <a:rPr lang="de-DE" dirty="0">
+                <a:latin typeface="Bahnschrift SemiBold" panose="020B0502040204020203" pitchFamily="34" charset="0"/>
+              </a:rPr>
+              <a:t>Research Questions</a:t>
+            </a:r>
+            <a:endParaRPr lang="en-GB" dirty="0">
+              <a:latin typeface="Bahnschrift SemiBold" panose="020B0502040204020203" pitchFamily="34" charset="0"/>
+            </a:endParaRPr>
+          </a:p>
+        </p:txBody>
+      </p:sp>
+      <p:sp>
+        <p:nvSpPr>
+          <p:cNvPr id="6" name="Rounded Rectangle 5"/>
+          <p:cNvSpPr/>
+          <p:nvPr/>
+        </p:nvSpPr>
+        <p:spPr>
+          <a:xfrm>
+            <a:off x="6466114" y="1795192"/>
+            <a:ext cx="4887686" cy="4035197"/>
+          </a:xfrm>
+          <a:prstGeom prst="roundRect">
+            <a:avLst>
+              <a:gd name="adj" fmla="val 5845"/>
+            </a:avLst>
+          </a:prstGeom>
+          <a:solidFill>
+            <a:srgbClr val="FFFDF7"/>
+          </a:solidFill>
+          <a:ln w="76200">
+            <a:solidFill>
+              <a:schemeClr val="accent4">
+                <a:lumMod val="20000"/>
+                <a:lumOff val="80000"/>
+              </a:schemeClr>
+            </a:solidFill>
+          </a:ln>
+        </p:spPr>
+        <p:style>
+          <a:lnRef idx="2">
+            <a:schemeClr val="accent1">
+              <a:shade val="50000"/>
+            </a:schemeClr>
+          </a:lnRef>
+          <a:fillRef idx="1">
+            <a:schemeClr val="accent1"/>
+          </a:fillRef>
+          <a:effectRef idx="0">
+            <a:schemeClr val="accent1"/>
+          </a:effectRef>
+          <a:fontRef idx="minor">
+            <a:schemeClr val="lt1"/>
+          </a:fontRef>
+        </p:style>
+        <p:txBody>
+          <a:bodyPr rtlCol="0" anchor="t"/>
+          <a:lstStyle/>
+          <a:p>
+            <a:r>
+              <a:rPr lang="de-DE" sz="2800" dirty="0">
+                <a:solidFill>
+                  <a:schemeClr val="tx1"/>
+                </a:solidFill>
+                <a:latin typeface="Bahnschrift" panose="020B0502040204020203" pitchFamily="34" charset="0"/>
+              </a:rPr>
+              <a:t>2 · Latent Variable encoding</a:t>
+            </a:r>
+          </a:p>
+          <a:p>
+            <a:endParaRPr lang="de-DE" sz="2800" dirty="0">
+              <a:solidFill>
+                <a:schemeClr val="tx1"/>
+              </a:solidFill>
+              <a:latin typeface="Bahnschrift" panose="020B0502040204020203" pitchFamily="34" charset="0"/>
+            </a:endParaRPr>
+          </a:p>
+          <a:p>
+            <a:endParaRPr lang="de-DE" sz="2800" dirty="0">
+              <a:solidFill>
+                <a:schemeClr val="tx1"/>
+              </a:solidFill>
+              <a:latin typeface="Bahnschrift" panose="020B0502040204020203" pitchFamily="34" charset="0"/>
+            </a:endParaRPr>
+          </a:p>
+          <a:p>
+            <a:r>
+              <a:rPr lang="en-GB" sz="2800" dirty="0">
+                <a:solidFill>
+                  <a:schemeClr val="tx1"/>
+                </a:solidFill>
+                <a:latin typeface="Bahnschrift" panose="020B0502040204020203" pitchFamily="34" charset="0"/>
+              </a:rPr>
+              <a:t>Do </a:t>
+            </a:r>
+            <a:r>
+              <a:rPr lang="en-GB" sz="2800" b="1" dirty="0">
+                <a:solidFill>
+                  <a:schemeClr val="tx1"/>
+                </a:solidFill>
+                <a:latin typeface="Bahnschrift" panose="020B0502040204020203" pitchFamily="34" charset="0"/>
+              </a:rPr>
+              <a:t>neuronal firing rates </a:t>
+            </a:r>
+            <a:r>
+              <a:rPr lang="en-GB" sz="2800" dirty="0">
+                <a:solidFill>
+                  <a:schemeClr val="tx1"/>
+                </a:solidFill>
+                <a:latin typeface="Bahnschrift" panose="020B0502040204020203" pitchFamily="34" charset="0"/>
+              </a:rPr>
+              <a:t>encode </a:t>
+            </a:r>
+            <a:r>
+              <a:rPr lang="en-GB" sz="2800" b="1" dirty="0">
+                <a:solidFill>
+                  <a:schemeClr val="tx1"/>
+                </a:solidFill>
+                <a:latin typeface="Bahnschrift" panose="020B0502040204020203" pitchFamily="34" charset="0"/>
+              </a:rPr>
+              <a:t>prediction errors </a:t>
+            </a:r>
+            <a:r>
+              <a:rPr lang="en-GB" sz="2800" dirty="0">
+                <a:solidFill>
+                  <a:schemeClr val="tx1"/>
+                </a:solidFill>
+                <a:latin typeface="Bahnschrift" panose="020B0502040204020203" pitchFamily="34" charset="0"/>
+              </a:rPr>
+              <a:t>estimated from a computational </a:t>
+            </a:r>
+            <a:r>
+              <a:rPr lang="en-GB" sz="2800" b="1" dirty="0">
+                <a:solidFill>
+                  <a:schemeClr val="tx1"/>
+                </a:solidFill>
+                <a:latin typeface="Bahnschrift" panose="020B0502040204020203" pitchFamily="34" charset="0"/>
+              </a:rPr>
+              <a:t>model of behaviour</a:t>
+            </a:r>
+            <a:r>
+              <a:rPr lang="en-GB" sz="2800" dirty="0">
+                <a:solidFill>
+                  <a:schemeClr val="tx1"/>
+                </a:solidFill>
+                <a:latin typeface="Bahnschrift" panose="020B0502040204020203" pitchFamily="34" charset="0"/>
+              </a:rPr>
+              <a:t>?</a:t>
+            </a:r>
+          </a:p>
+        </p:txBody>
+      </p:sp>
+      <p:sp>
+        <p:nvSpPr>
+          <p:cNvPr id="7" name="Textfeld 3">
+            <a:extLst>
+              <a:ext uri="{FF2B5EF4-FFF2-40B4-BE49-F238E27FC236}">
+                <a16:creationId xmlns:a16="http://schemas.microsoft.com/office/drawing/2014/main" id="{FE8BC9CB-A270-A1A7-41C1-7DB1E9BBFC01}"/>
+              </a:ext>
+            </a:extLst>
+          </p:cNvPr>
+          <p:cNvSpPr txBox="1"/>
+          <p:nvPr/>
+        </p:nvSpPr>
+        <p:spPr>
+          <a:xfrm>
+            <a:off x="1229072" y="3397291"/>
+            <a:ext cx="3725314" cy="830997"/>
+          </a:xfrm>
+          <a:prstGeom prst="rect">
+            <a:avLst/>
+          </a:prstGeom>
+          <a:noFill/>
+        </p:spPr>
+        <p:txBody>
+          <a:bodyPr wrap="square" rtlCol="0">
+            <a:spAutoFit/>
+          </a:bodyPr>
+          <a:lstStyle/>
+          <a:p>
+            <a:r>
+              <a:rPr lang="de-AT" sz="4800" dirty="0" smtClean="0">
+                <a:latin typeface="Bahnschrift" panose="020B0502040204020203" pitchFamily="34" charset="0"/>
+              </a:rPr>
+              <a:t>Probably?</a:t>
+            </a:r>
+            <a:endParaRPr lang="en-US" sz="4800" dirty="0">
+              <a:latin typeface="Bahnschrift" panose="020B0502040204020203" pitchFamily="34" charset="0"/>
+            </a:endParaRPr>
+          </a:p>
+        </p:txBody>
+      </p:sp>
+    </p:spTree>
+    <p:extLst>
+      <p:ext uri="{BB962C8B-B14F-4D97-AF65-F5344CB8AC3E}">
+        <p14:creationId xmlns:p14="http://schemas.microsoft.com/office/powerpoint/2010/main" val="1385732501"/>
+      </p:ext>
+    </p:extLst>
+  </p:cSld>
+  <p:clrMapOvr>
+    <a:masterClrMapping/>
+  </p:clrMapOvr>
+  <p:timing>
+    <p:tnLst>
+      <p:par>
+        <p:cTn id="1" dur="indefinite" restart="never" nodeType="tmRoot">
+          <p:childTnLst>
+            <p:seq concurrent="1" nextAc="seek">
+              <p:cTn id="2" dur="indefinite" nodeType="mainSeq">
+                <p:childTnLst>
+                  <p:par>
+                    <p:cTn id="3" fill="hold">
+                      <p:stCondLst>
+                        <p:cond delay="indefinite"/>
+                      </p:stCondLst>
+                      <p:childTnLst>
+                        <p:par>
+                          <p:cTn id="4" fill="hold">
+                            <p:stCondLst>
+                              <p:cond delay="0"/>
+                            </p:stCondLst>
+                            <p:childTnLst>
+                              <p:par>
+                                <p:cTn id="5" presetID="10" presetClass="entr" presetSubtype="0" fill="hold" grpId="0" nodeType="clickEffect">
+                                  <p:stCondLst>
+                                    <p:cond delay="0"/>
+                                  </p:stCondLst>
+                                  <p:childTnLst>
+                                    <p:set>
+                                      <p:cBhvr>
+                                        <p:cTn id="6" dur="1" fill="hold">
+                                          <p:stCondLst>
+                                            <p:cond delay="0"/>
+                                          </p:stCondLst>
+                                        </p:cTn>
+                                        <p:tgtEl>
+                                          <p:spTgt spid="6"/>
+                                        </p:tgtEl>
+                                        <p:attrNameLst>
+                                          <p:attrName>style.visibility</p:attrName>
+                                        </p:attrNameLst>
+                                      </p:cBhvr>
+                                      <p:to>
+                                        <p:strVal val="visible"/>
+                                      </p:to>
+                                    </p:set>
+                                    <p:animEffect transition="in" filter="fade">
+                                      <p:cBhvr>
+                                        <p:cTn id="7" dur="500"/>
+                                        <p:tgtEl>
+                                          <p:spTgt spid="6"/>
+                                        </p:tgtEl>
+                                      </p:cBhvr>
+                                    </p:animEffect>
+                                  </p:childTnLst>
+                                </p:cTn>
+                              </p:par>
+                            </p:childTnLst>
+                          </p:cTn>
+                        </p:par>
+                      </p:childTnLst>
+                    </p:cTn>
+                  </p:par>
+                  <p:par>
+                    <p:cTn id="8" fill="hold">
+                      <p:stCondLst>
+                        <p:cond delay="indefinite"/>
+                      </p:stCondLst>
+                      <p:childTnLst>
+                        <p:par>
+                          <p:cTn id="9" fill="hold">
+                            <p:stCondLst>
+                              <p:cond delay="0"/>
+                            </p:stCondLst>
+                            <p:childTnLst>
+                              <p:par>
+                                <p:cTn id="10" presetID="1" presetClass="entr" presetSubtype="0" fill="hold" grpId="0" nodeType="clickEffect">
+                                  <p:stCondLst>
+                                    <p:cond delay="0"/>
+                                  </p:stCondLst>
+                                  <p:childTnLst>
+                                    <p:set>
+                                      <p:cBhvr>
+                                        <p:cTn id="11" dur="1" fill="hold">
+                                          <p:stCondLst>
+                                            <p:cond delay="0"/>
+                                          </p:stCondLst>
+                                        </p:cTn>
+                                        <p:tgtEl>
+                                          <p:spTgt spid="7"/>
+                                        </p:tgtEl>
+                                        <p:attrNameLst>
+                                          <p:attrName>style.visibility</p:attrName>
+                                        </p:attrNameLst>
+                                      </p:cBhvr>
+                                      <p:to>
+                                        <p:strVal val="visible"/>
+                                      </p:to>
+                                    </p:set>
+                                  </p:childTnLst>
+                                </p:cTn>
+                              </p:par>
+                            </p:childTnLst>
+                          </p:cTn>
+                        </p:par>
+                      </p:childTnLst>
+                    </p:cTn>
+                  </p:par>
+                </p:childTnLst>
+              </p:cTn>
+              <p:prevCondLst>
+                <p:cond evt="onPrev" delay="0">
+                  <p:tgtEl>
+                    <p:sldTgt/>
+                  </p:tgtEl>
+                </p:cond>
+              </p:prevCondLst>
+              <p:nextCondLst>
+                <p:cond evt="onNext" delay="0">
+                  <p:tgtEl>
+                    <p:sldTgt/>
+                  </p:tgtEl>
+                </p:cond>
+              </p:nextCondLst>
+            </p:seq>
+          </p:childTnLst>
+        </p:cTn>
+      </p:par>
+    </p:tnLst>
+    <p:bldLst>
+      <p:bldP spid="6" grpId="0" animBg="1"/>
+      <p:bldP spid="7" grpId="0"/>
+    </p:bldLst>
+  </p:timing>
+</p:sld>
+</file>
+
+<file path=ppt/slides/slide38.xml><?xml version="1.0" encoding="utf-8"?>
+<p:sld xmlns:a="http://schemas.openxmlformats.org/drawingml/2006/main" xmlns:r="http://schemas.openxmlformats.org/officeDocument/2006/relationships" xmlns:p="http://schemas.openxmlformats.org/presentationml/2006/main">
+  <p:cSld>
+    <p:spTree>
+      <p:nvGrpSpPr>
+        <p:cNvPr id="1" name=""/>
+        <p:cNvGrpSpPr/>
+        <p:nvPr/>
+      </p:nvGrpSpPr>
+      <p:grpSpPr>
+        <a:xfrm>
+          <a:off x="0" y="0"/>
+          <a:ext cx="0" cy="0"/>
+          <a:chOff x="0" y="0"/>
+          <a:chExt cx="0" cy="0"/>
+        </a:xfrm>
+      </p:grpSpPr>
+      <p:sp>
+        <p:nvSpPr>
+          <p:cNvPr id="2" name="Title 1"/>
+          <p:cNvSpPr>
+            <a:spLocks noGrp="1"/>
+          </p:cNvSpPr>
+          <p:nvPr>
+            <p:ph type="title"/>
+          </p:nvPr>
+        </p:nvSpPr>
+        <p:spPr/>
+        <p:txBody>
+          <a:bodyPr/>
+          <a:lstStyle/>
+          <a:p>
+            <a:r>
+              <a:rPr lang="de-DE" dirty="0" smtClean="0"/>
+              <a:t>Future Direction</a:t>
+            </a:r>
+            <a:endParaRPr lang="en-GB" dirty="0"/>
           </a:p>
         </p:txBody>
       </p:sp>
@@ -27848,20 +29182,49 @@
           <a:bodyPr/>
           <a:lstStyle/>
           <a:p>
-            <a:endParaRPr lang="en-GB"/>
+            <a:r>
+              <a:rPr lang="de-DE" dirty="0" smtClean="0"/>
+              <a:t>Sign of prediction error vs firing rate correlation</a:t>
+            </a:r>
+          </a:p>
+          <a:p>
+            <a:r>
+              <a:rPr lang="de-DE" dirty="0" smtClean="0"/>
+              <a:t>Timing of firing rate changes after events</a:t>
+            </a:r>
+          </a:p>
+          <a:p>
+            <a:r>
+              <a:rPr lang="de-DE" dirty="0" smtClean="0"/>
+              <a:t>Choice selectivity</a:t>
+            </a:r>
+          </a:p>
+          <a:p>
+            <a:r>
+              <a:rPr lang="de-DE" dirty="0" smtClean="0"/>
+              <a:t>Research Angual Gyrus</a:t>
+            </a:r>
+            <a:endParaRPr lang="en-GB" dirty="0"/>
           </a:p>
         </p:txBody>
       </p:sp>
     </p:spTree>
     <p:extLst>
       <p:ext uri="{BB962C8B-B14F-4D97-AF65-F5344CB8AC3E}">
-        <p14:creationId xmlns:p14="http://schemas.microsoft.com/office/powerpoint/2010/main" val="1164828355"/>
+        <p14:creationId xmlns:p14="http://schemas.microsoft.com/office/powerpoint/2010/main" val="4262919648"/>
       </p:ext>
     </p:extLst>
   </p:cSld>
   <p:clrMapOvr>
     <a:masterClrMapping/>
   </p:clrMapOvr>
+  <p:timing>
+    <p:tnLst>
+      <p:par>
+        <p:cTn id="1" dur="indefinite" restart="never" nodeType="tmRoot"/>
+      </p:par>
+    </p:tnLst>
+  </p:timing>
 </p:sld>
 </file>
 
@@ -30512,6 +31875,13 @@
   <p:clrMapOvr>
     <a:masterClrMapping/>
   </p:clrMapOvr>
+  <p:timing>
+    <p:tnLst>
+      <p:par>
+        <p:cTn id="1" dur="indefinite" restart="never" nodeType="tmRoot"/>
+      </p:par>
+    </p:tnLst>
+  </p:timing>
 </p:sld>
 </file>
 
@@ -30988,6 +32358,13 @@
   <p:clrMapOvr>
     <a:masterClrMapping/>
   </p:clrMapOvr>
+  <p:timing>
+    <p:tnLst>
+      <p:par>
+        <p:cTn id="1" dur="indefinite" restart="never" nodeType="tmRoot"/>
+      </p:par>
+    </p:tnLst>
+  </p:timing>
 </p:sld>
 </file>
 
@@ -31491,6 +32868,13 @@
   <p:clrMapOvr>
     <a:masterClrMapping/>
   </p:clrMapOvr>
+  <p:timing>
+    <p:tnLst>
+      <p:par>
+        <p:cTn id="1" dur="indefinite" restart="never" nodeType="tmRoot"/>
+      </p:par>
+    </p:tnLst>
+  </p:timing>
 </p:sld>
 </file>
 

--- a/presentation/Prototype.pptx
+++ b/presentation/Prototype.pptx
@@ -5,7 +5,7 @@
     <p:sldMasterId id="2147483648" r:id="rId1"/>
   </p:sldMasterIdLst>
   <p:handoutMasterIdLst>
-    <p:handoutMasterId r:id="rId40"/>
+    <p:handoutMasterId r:id="rId42"/>
   </p:handoutMasterIdLst>
   <p:sldIdLst>
     <p:sldId id="256" r:id="rId2"/>
@@ -41,11 +41,13 @@
     <p:sldId id="290" r:id="rId32"/>
     <p:sldId id="291" r:id="rId33"/>
     <p:sldId id="288" r:id="rId34"/>
-    <p:sldId id="267" r:id="rId35"/>
-    <p:sldId id="300" r:id="rId36"/>
-    <p:sldId id="284" r:id="rId37"/>
+    <p:sldId id="284" r:id="rId35"/>
+    <p:sldId id="304" r:id="rId36"/>
+    <p:sldId id="303" r:id="rId37"/>
     <p:sldId id="297" r:id="rId38"/>
-    <p:sldId id="299" r:id="rId39"/>
+    <p:sldId id="301" r:id="rId39"/>
+    <p:sldId id="299" r:id="rId40"/>
+    <p:sldId id="302" r:id="rId41"/>
   </p:sldIdLst>
   <p:sldSz cx="12192000" cy="6858000"/>
   <p:notesSz cx="6858000" cy="9144000"/>
@@ -14618,79 +14620,6 @@
           </a:p>
         </p:txBody>
       </p:sp>
-      <p:sp>
-        <p:nvSpPr>
-          <p:cNvPr id="6" name="Rounded Rectangle 8">
-            <a:extLst>
-              <a:ext uri="{FF2B5EF4-FFF2-40B4-BE49-F238E27FC236}">
-                <a16:creationId xmlns:a16="http://schemas.microsoft.com/office/drawing/2014/main" id="{E4DA88D5-3355-65A7-49E6-A8851A2ADA16}"/>
-              </a:ext>
-            </a:extLst>
-          </p:cNvPr>
-          <p:cNvSpPr/>
-          <p:nvPr/>
-        </p:nvSpPr>
-        <p:spPr>
-          <a:xfrm>
-            <a:off x="5599599" y="3864932"/>
-            <a:ext cx="2915195" cy="1516561"/>
-          </a:xfrm>
-          <a:prstGeom prst="roundRect">
-            <a:avLst>
-              <a:gd name="adj" fmla="val 37941"/>
-            </a:avLst>
-          </a:prstGeom>
-          <a:solidFill>
-            <a:srgbClr val="FFFDF7"/>
-          </a:solidFill>
-          <a:ln w="76200">
-            <a:solidFill>
-              <a:schemeClr val="accent4">
-                <a:lumMod val="20000"/>
-                <a:lumOff val="80000"/>
-              </a:schemeClr>
-            </a:solidFill>
-          </a:ln>
-        </p:spPr>
-        <p:style>
-          <a:lnRef idx="2">
-            <a:schemeClr val="accent1">
-              <a:shade val="50000"/>
-            </a:schemeClr>
-          </a:lnRef>
-          <a:fillRef idx="1">
-            <a:schemeClr val="accent1"/>
-          </a:fillRef>
-          <a:effectRef idx="0">
-            <a:schemeClr val="accent1"/>
-          </a:effectRef>
-          <a:fontRef idx="minor">
-            <a:schemeClr val="lt1"/>
-          </a:fontRef>
-        </p:style>
-        <p:txBody>
-          <a:bodyPr rtlCol="0" anchor="ctr"/>
-          <a:lstStyle/>
-          <a:p>
-            <a:pPr algn="ctr"/>
-            <a:r>
-              <a:rPr lang="de-DE" sz="3200" b="1" dirty="0" smtClean="0">
-                <a:solidFill>
-                  <a:schemeClr val="tx1"/>
-                </a:solidFill>
-                <a:latin typeface="Bahnschrift" panose="020B0502040204020203" pitchFamily="34" charset="0"/>
-              </a:rPr>
-              <a:t>rasterplot</a:t>
-            </a:r>
-            <a:endParaRPr lang="en-GB" sz="1200" b="1" dirty="0">
-              <a:solidFill>
-                <a:schemeClr val="tx1"/>
-              </a:solidFill>
-              <a:latin typeface="Bahnschrift" panose="020B0502040204020203" pitchFamily="34" charset="0"/>
-            </a:endParaRPr>
-          </a:p>
-        </p:txBody>
-      </p:sp>
     </p:spTree>
     <p:extLst>
       <p:ext uri="{BB962C8B-B14F-4D97-AF65-F5344CB8AC3E}">
@@ -14914,50 +14843,6 @@
                             </p:childTnLst>
                           </p:cTn>
                         </p:par>
-                        <p:par>
-                          <p:cTn id="16" fill="hold">
-                            <p:stCondLst>
-                              <p:cond delay="250"/>
-                            </p:stCondLst>
-                            <p:childTnLst>
-                              <p:par>
-                                <p:cTn id="17" presetID="10" presetClass="entr" presetSubtype="0" fill="hold" grpId="0" nodeType="afterEffect">
-                                  <p:stCondLst>
-                                    <p:cond delay="0"/>
-                                  </p:stCondLst>
-                                  <p:childTnLst>
-                                    <p:set>
-                                      <p:cBhvr>
-                                        <p:cTn id="18" dur="1" fill="hold">
-                                          <p:stCondLst>
-                                            <p:cond delay="0"/>
-                                          </p:stCondLst>
-                                        </p:cTn>
-                                        <p:tgtEl>
-                                          <p:spTgt spid="6"/>
-                                        </p:tgtEl>
-                                        <p:attrNameLst>
-                                          <p:attrName>style.visibility</p:attrName>
-                                        </p:attrNameLst>
-                                      </p:cBhvr>
-                                      <p:to>
-                                        <p:strVal val="visible"/>
-                                      </p:to>
-                                    </p:set>
-                                    <p:animEffect transition="in" filter="fade">
-                                      <p:cBhvr>
-                                        <p:cTn id="19" dur="250"/>
-                                        <p:tgtEl>
-                                          <p:spTgt spid="6"/>
-                                        </p:tgtEl>
-                                      </p:cBhvr>
-                                    </p:animEffect>
-                                  </p:childTnLst>
-                                </p:cTn>
-                              </p:par>
-                            </p:childTnLst>
-                          </p:cTn>
-                        </p:par>
                       </p:childTnLst>
                     </p:cTn>
                   </p:par>
@@ -14984,7 +14869,6 @@
     </p:tnLst>
     <p:bldLst>
       <p:bldP spid="11" grpId="0" animBg="1"/>
-      <p:bldP spid="6" grpId="0" animBg="1"/>
     </p:bldLst>
   </p:timing>
 </p:sld>
@@ -15412,7 +15296,7 @@
         </p:nvSpPr>
         <p:spPr>
           <a:xfrm>
-            <a:off x="838200" y="1825625"/>
+            <a:off x="763552" y="1825625"/>
             <a:ext cx="4834654" cy="4351338"/>
           </a:xfrm>
         </p:spPr>
@@ -15637,12 +15521,17 @@
         </p:blipFill>
         <p:spPr>
           <a:xfrm>
-            <a:off x="5672854" y="1515790"/>
+            <a:off x="5551551" y="1515790"/>
             <a:ext cx="6519146" cy="4638502"/>
           </a:xfrm>
           <a:prstGeom prst="rect">
             <a:avLst/>
           </a:prstGeom>
+          <a:ln w="76200">
+            <a:solidFill>
+              <a:srgbClr val="0AB77E"/>
+            </a:solidFill>
+          </a:ln>
         </p:spPr>
       </p:pic>
     </p:spTree>
@@ -16882,79 +16771,6 @@
           </a:p>
         </p:txBody>
       </p:sp>
-      <p:sp>
-        <p:nvSpPr>
-          <p:cNvPr id="7" name="Rounded Rectangle 8">
-            <a:extLst>
-              <a:ext uri="{FF2B5EF4-FFF2-40B4-BE49-F238E27FC236}">
-                <a16:creationId xmlns:a16="http://schemas.microsoft.com/office/drawing/2014/main" id="{E4DA88D5-3355-65A7-49E6-A8851A2ADA16}"/>
-              </a:ext>
-            </a:extLst>
-          </p:cNvPr>
-          <p:cNvSpPr/>
-          <p:nvPr/>
-        </p:nvSpPr>
-        <p:spPr>
-          <a:xfrm>
-            <a:off x="6780811" y="2849208"/>
-            <a:ext cx="2915195" cy="1516561"/>
-          </a:xfrm>
-          <a:prstGeom prst="roundRect">
-            <a:avLst>
-              <a:gd name="adj" fmla="val 37941"/>
-            </a:avLst>
-          </a:prstGeom>
-          <a:solidFill>
-            <a:srgbClr val="FFFDF7"/>
-          </a:solidFill>
-          <a:ln w="76200">
-            <a:solidFill>
-              <a:schemeClr val="accent4">
-                <a:lumMod val="20000"/>
-                <a:lumOff val="80000"/>
-              </a:schemeClr>
-            </a:solidFill>
-          </a:ln>
-        </p:spPr>
-        <p:style>
-          <a:lnRef idx="2">
-            <a:schemeClr val="accent1">
-              <a:shade val="50000"/>
-            </a:schemeClr>
-          </a:lnRef>
-          <a:fillRef idx="1">
-            <a:schemeClr val="accent1"/>
-          </a:fillRef>
-          <a:effectRef idx="0">
-            <a:schemeClr val="accent1"/>
-          </a:effectRef>
-          <a:fontRef idx="minor">
-            <a:schemeClr val="lt1"/>
-          </a:fontRef>
-        </p:style>
-        <p:txBody>
-          <a:bodyPr rtlCol="0" anchor="ctr"/>
-          <a:lstStyle/>
-          <a:p>
-            <a:pPr algn="ctr"/>
-            <a:r>
-              <a:rPr lang="de-DE" sz="3200" b="1" dirty="0" smtClean="0">
-                <a:solidFill>
-                  <a:schemeClr val="tx1"/>
-                </a:solidFill>
-                <a:latin typeface="Bahnschrift" panose="020B0502040204020203" pitchFamily="34" charset="0"/>
-              </a:rPr>
-              <a:t>rasterplot</a:t>
-            </a:r>
-            <a:endParaRPr lang="en-GB" sz="1200" b="1" dirty="0">
-              <a:solidFill>
-                <a:schemeClr val="tx1"/>
-              </a:solidFill>
-              <a:latin typeface="Bahnschrift" panose="020B0502040204020203" pitchFamily="34" charset="0"/>
-            </a:endParaRPr>
-          </a:p>
-        </p:txBody>
-      </p:sp>
     </p:spTree>
     <p:extLst>
       <p:ext uri="{BB962C8B-B14F-4D97-AF65-F5344CB8AC3E}">
@@ -16968,91 +16784,9 @@
   <p:timing>
     <p:tnLst>
       <p:par>
-        <p:cTn id="1" dur="indefinite" restart="never" nodeType="tmRoot">
-          <p:childTnLst>
-            <p:seq concurrent="1" nextAc="seek">
-              <p:cTn id="2" dur="indefinite" nodeType="mainSeq">
-                <p:childTnLst>
-                  <p:par>
-                    <p:cTn id="3" fill="hold">
-                      <p:stCondLst>
-                        <p:cond delay="indefinite"/>
-                        <p:cond evt="onBegin" delay="0">
-                          <p:tn val="2"/>
-                        </p:cond>
-                      </p:stCondLst>
-                      <p:childTnLst>
-                        <p:par>
-                          <p:cTn id="4" fill="hold">
-                            <p:stCondLst>
-                              <p:cond delay="0"/>
-                            </p:stCondLst>
-                            <p:childTnLst>
-                              <p:par>
-                                <p:cTn id="5" presetID="10" presetClass="entr" presetSubtype="0" fill="hold" grpId="0" nodeType="afterEffect">
-                                  <p:stCondLst>
-                                    <p:cond delay="0"/>
-                                  </p:stCondLst>
-                                  <p:childTnLst>
-                                    <p:set>
-                                      <p:cBhvr>
-                                        <p:cTn id="6" dur="1" fill="hold">
-                                          <p:stCondLst>
-                                            <p:cond delay="0"/>
-                                          </p:stCondLst>
-                                        </p:cTn>
-                                        <p:tgtEl>
-                                          <p:spTgt spid="7"/>
-                                        </p:tgtEl>
-                                        <p:attrNameLst>
-                                          <p:attrName>style.visibility</p:attrName>
-                                        </p:attrNameLst>
-                                      </p:cBhvr>
-                                      <p:to>
-                                        <p:strVal val="visible"/>
-                                      </p:to>
-                                    </p:set>
-                                    <p:animEffect transition="in" filter="fade">
-                                      <p:cBhvr>
-                                        <p:cTn id="7" dur="250"/>
-                                        <p:tgtEl>
-                                          <p:spTgt spid="7"/>
-                                        </p:tgtEl>
-                                      </p:cBhvr>
-                                    </p:animEffect>
-                                  </p:childTnLst>
-                                </p:cTn>
-                              </p:par>
-                            </p:childTnLst>
-                          </p:cTn>
-                        </p:par>
-                      </p:childTnLst>
-                    </p:cTn>
-                  </p:par>
-                </p:childTnLst>
-              </p:cTn>
-              <p:prevCondLst>
-                <p:cond evt="onPrev" delay="0">
-                  <p:tgtEl>
-                    <p:sldTgt/>
-                  </p:tgtEl>
-                </p:cond>
-              </p:prevCondLst>
-              <p:nextCondLst>
-                <p:cond evt="onNext" delay="0">
-                  <p:tgtEl>
-                    <p:sldTgt/>
-                  </p:tgtEl>
-                </p:cond>
-              </p:nextCondLst>
-            </p:seq>
-          </p:childTnLst>
-        </p:cTn>
+        <p:cTn id="1" dur="indefinite" restart="never" nodeType="tmRoot"/>
       </p:par>
     </p:tnLst>
-    <p:bldLst>
-      <p:bldP spid="7" grpId="0" animBg="1"/>
-    </p:bldLst>
   </p:timing>
 </p:sld>
 </file>
@@ -17121,32 +16855,24 @@
         </p:blipFill>
         <p:spPr>
           <a:xfrm>
-            <a:off x="186986" y="1591161"/>
-            <a:ext cx="11818027" cy="4402016"/>
+            <a:off x="61253" y="1576873"/>
+            <a:ext cx="12078549" cy="4499056"/>
           </a:xfrm>
         </p:spPr>
       </p:pic>
       <p:sp>
         <p:nvSpPr>
-          <p:cNvPr id="5" name="Rounded Rectangle 8">
-            <a:extLst>
-              <a:ext uri="{FF2B5EF4-FFF2-40B4-BE49-F238E27FC236}">
-                <a16:creationId xmlns:a16="http://schemas.microsoft.com/office/drawing/2014/main" id="{E4DA88D5-3355-65A7-49E6-A8851A2ADA16}"/>
-              </a:ext>
-            </a:extLst>
-          </p:cNvPr>
+          <p:cNvPr id="3" name="Rounded Rectangle 2"/>
           <p:cNvSpPr/>
           <p:nvPr/>
         </p:nvSpPr>
         <p:spPr>
           <a:xfrm>
-            <a:off x="7262949" y="2857521"/>
-            <a:ext cx="2915195" cy="1516561"/>
+            <a:off x="269033" y="6251511"/>
+            <a:ext cx="11084767" cy="531844"/>
           </a:xfrm>
           <a:prstGeom prst="roundRect">
-            <a:avLst>
-              <a:gd name="adj" fmla="val 37941"/>
-            </a:avLst>
+            <a:avLst/>
           </a:prstGeom>
           <a:solidFill>
             <a:srgbClr val="FFFDF7"/>
@@ -17177,20 +16903,110 @@
           </a:fontRef>
         </p:style>
         <p:txBody>
-          <a:bodyPr rtlCol="0" anchor="ctr"/>
+          <a:bodyPr rtlCol="0" anchor="t"/>
           <a:lstStyle/>
           <a:p>
             <a:pPr algn="ctr"/>
             <a:r>
-              <a:rPr lang="de-DE" sz="3200" b="1" dirty="0" smtClean="0">
+              <a:rPr lang="de-DE" sz="2400" dirty="0">
+                <a:solidFill>
+                  <a:srgbClr val="FF9E28"/>
+                </a:solidFill>
+                <a:latin typeface="Bahnschrift" panose="020B0502040204020203" pitchFamily="34" charset="0"/>
+              </a:rPr>
+              <a:t>—</a:t>
+            </a:r>
+            <a:r>
+              <a:rPr lang="de-DE" dirty="0" smtClean="0">
                 <a:solidFill>
                   <a:schemeClr val="tx1"/>
                 </a:solidFill>
                 <a:latin typeface="Bahnschrift" panose="020B0502040204020203" pitchFamily="34" charset="0"/>
               </a:rPr>
-              <a:t>Bigger legend</a:t>
-            </a:r>
-            <a:endParaRPr lang="en-GB" sz="1200" b="1" dirty="0">
+              <a:t> </a:t>
+            </a:r>
+            <a:r>
+              <a:rPr lang="de-DE" dirty="0">
+                <a:solidFill>
+                  <a:schemeClr val="tx1"/>
+                </a:solidFill>
+                <a:latin typeface="Bahnschrift" panose="020B0502040204020203" pitchFamily="34" charset="0"/>
+              </a:rPr>
+              <a:t>Gamble + Rew; </a:t>
+            </a:r>
+            <a:r>
+              <a:rPr lang="de-DE" sz="2400" dirty="0">
+                <a:solidFill>
+                  <a:srgbClr val="B32424"/>
+                </a:solidFill>
+                <a:latin typeface="Bahnschrift" panose="020B0502040204020203" pitchFamily="34" charset="0"/>
+              </a:rPr>
+              <a:t>—</a:t>
+            </a:r>
+            <a:r>
+              <a:rPr lang="de-DE" dirty="0" smtClean="0">
+                <a:solidFill>
+                  <a:schemeClr val="tx1"/>
+                </a:solidFill>
+                <a:latin typeface="Bahnschrift" panose="020B0502040204020203" pitchFamily="34" charset="0"/>
+              </a:rPr>
+              <a:t> </a:t>
+            </a:r>
+            <a:r>
+              <a:rPr lang="de-DE" dirty="0">
+                <a:solidFill>
+                  <a:schemeClr val="tx1"/>
+                </a:solidFill>
+                <a:latin typeface="Bahnschrift" panose="020B0502040204020203" pitchFamily="34" charset="0"/>
+              </a:rPr>
+              <a:t>Gamble + No Rew; </a:t>
+            </a:r>
+            <a:r>
+              <a:rPr lang="de-DE" sz="2400" dirty="0">
+                <a:solidFill>
+                  <a:srgbClr val="48996B"/>
+                </a:solidFill>
+                <a:latin typeface="Bahnschrift" panose="020B0502040204020203" pitchFamily="34" charset="0"/>
+              </a:rPr>
+              <a:t>—</a:t>
+            </a:r>
+            <a:r>
+              <a:rPr lang="de-DE" dirty="0" smtClean="0">
+                <a:solidFill>
+                  <a:schemeClr val="tx1"/>
+                </a:solidFill>
+                <a:latin typeface="Bahnschrift" panose="020B0502040204020203" pitchFamily="34" charset="0"/>
+              </a:rPr>
+              <a:t> </a:t>
+            </a:r>
+            <a:r>
+              <a:rPr lang="de-DE" dirty="0">
+                <a:solidFill>
+                  <a:schemeClr val="tx1"/>
+                </a:solidFill>
+                <a:latin typeface="Bahnschrift" panose="020B0502040204020203" pitchFamily="34" charset="0"/>
+              </a:rPr>
+              <a:t>Safe + Rew; </a:t>
+            </a:r>
+            <a:r>
+              <a:rPr lang="de-DE" dirty="0">
+                <a:solidFill>
+                  <a:srgbClr val="FF0000"/>
+                </a:solidFill>
+                <a:latin typeface="Bahnschrift" panose="020B0502040204020203" pitchFamily="34" charset="0"/>
+              </a:rPr>
+              <a:t>---</a:t>
+            </a:r>
+            <a:r>
+              <a:rPr lang="de-DE" dirty="0">
+                <a:solidFill>
+                  <a:schemeClr val="tx1"/>
+                </a:solidFill>
+                <a:latin typeface="Bahnschrift" panose="020B0502040204020203" pitchFamily="34" charset="0"/>
+              </a:rPr>
+              <a:t> Reward  </a:t>
+            </a:r>
+            <a:endParaRPr lang="en-GB" dirty="0">
               <a:solidFill>
                 <a:schemeClr val="tx1"/>
               </a:solidFill>
@@ -17212,91 +17028,9 @@
   <p:timing>
     <p:tnLst>
       <p:par>
-        <p:cTn id="1" dur="indefinite" restart="never" nodeType="tmRoot">
-          <p:childTnLst>
-            <p:seq concurrent="1" nextAc="seek">
-              <p:cTn id="2" dur="indefinite" nodeType="mainSeq">
-                <p:childTnLst>
-                  <p:par>
-                    <p:cTn id="3" fill="hold">
-                      <p:stCondLst>
-                        <p:cond delay="indefinite"/>
-                        <p:cond evt="onBegin" delay="0">
-                          <p:tn val="2"/>
-                        </p:cond>
-                      </p:stCondLst>
-                      <p:childTnLst>
-                        <p:par>
-                          <p:cTn id="4" fill="hold">
-                            <p:stCondLst>
-                              <p:cond delay="0"/>
-                            </p:stCondLst>
-                            <p:childTnLst>
-                              <p:par>
-                                <p:cTn id="5" presetID="10" presetClass="entr" presetSubtype="0" fill="hold" grpId="0" nodeType="afterEffect">
-                                  <p:stCondLst>
-                                    <p:cond delay="0"/>
-                                  </p:stCondLst>
-                                  <p:childTnLst>
-                                    <p:set>
-                                      <p:cBhvr>
-                                        <p:cTn id="6" dur="1" fill="hold">
-                                          <p:stCondLst>
-                                            <p:cond delay="0"/>
-                                          </p:stCondLst>
-                                        </p:cTn>
-                                        <p:tgtEl>
-                                          <p:spTgt spid="5"/>
-                                        </p:tgtEl>
-                                        <p:attrNameLst>
-                                          <p:attrName>style.visibility</p:attrName>
-                                        </p:attrNameLst>
-                                      </p:cBhvr>
-                                      <p:to>
-                                        <p:strVal val="visible"/>
-                                      </p:to>
-                                    </p:set>
-                                    <p:animEffect transition="in" filter="fade">
-                                      <p:cBhvr>
-                                        <p:cTn id="7" dur="250"/>
-                                        <p:tgtEl>
-                                          <p:spTgt spid="5"/>
-                                        </p:tgtEl>
-                                      </p:cBhvr>
-                                    </p:animEffect>
-                                  </p:childTnLst>
-                                </p:cTn>
-                              </p:par>
-                            </p:childTnLst>
-                          </p:cTn>
-                        </p:par>
-                      </p:childTnLst>
-                    </p:cTn>
-                  </p:par>
-                </p:childTnLst>
-              </p:cTn>
-              <p:prevCondLst>
-                <p:cond evt="onPrev" delay="0">
-                  <p:tgtEl>
-                    <p:sldTgt/>
-                  </p:tgtEl>
-                </p:cond>
-              </p:prevCondLst>
-              <p:nextCondLst>
-                <p:cond evt="onNext" delay="0">
-                  <p:tgtEl>
-                    <p:sldTgt/>
-                  </p:tgtEl>
-                </p:cond>
-              </p:nextCondLst>
-            </p:seq>
-          </p:childTnLst>
-        </p:cTn>
+        <p:cTn id="1" dur="indefinite" restart="never" nodeType="tmRoot"/>
       </p:par>
     </p:tnLst>
-    <p:bldLst>
-      <p:bldP spid="5" grpId="0" animBg="1"/>
-    </p:bldLst>
   </p:timing>
 </p:sld>
 </file>
@@ -17430,35 +17164,6 @@
           </a:p>
         </p:txBody>
       </p:sp>
-      <p:pic>
-        <p:nvPicPr>
-          <p:cNvPr id="4" name="Content Placeholder 3"/>
-          <p:cNvPicPr>
-            <a:picLocks noGrp="1" noChangeAspect="1"/>
-          </p:cNvPicPr>
-          <p:nvPr>
-            <p:ph idx="1"/>
-          </p:nvPr>
-        </p:nvPicPr>
-        <p:blipFill>
-          <a:blip r:embed="rId2">
-            <a:extLst>
-              <a:ext uri="{28A0092B-C50C-407E-A947-70E740481C1C}">
-                <a14:useLocalDpi xmlns:a14="http://schemas.microsoft.com/office/drawing/2010/main" val="0"/>
-              </a:ext>
-            </a:extLst>
-          </a:blip>
-          <a:stretch>
-            <a:fillRect/>
-          </a:stretch>
-        </p:blipFill>
-        <p:spPr>
-          <a:xfrm>
-            <a:off x="1" y="1524000"/>
-            <a:ext cx="7464314" cy="5318234"/>
-          </a:xfrm>
-        </p:spPr>
-      </p:pic>
       <p:sp>
         <p:nvSpPr>
           <p:cNvPr id="5" name="Rounded Rectangle 4"/>
@@ -17603,6 +17308,60 @@
               </a:solidFill>
               <a:latin typeface="Bahnschrift" panose="020B0502040204020203" pitchFamily="34" charset="0"/>
             </a:endParaRPr>
+          </a:p>
+        </p:txBody>
+      </p:sp>
+      <p:pic>
+        <p:nvPicPr>
+          <p:cNvPr id="8" name="Picture 7"/>
+          <p:cNvPicPr>
+            <a:picLocks noChangeAspect="1"/>
+          </p:cNvPicPr>
+          <p:nvPr/>
+        </p:nvPicPr>
+        <p:blipFill>
+          <a:blip r:embed="rId2">
+            <a:extLst>
+              <a:ext uri="{28A0092B-C50C-407E-A947-70E740481C1C}">
+                <a14:useLocalDpi xmlns:a14="http://schemas.microsoft.com/office/drawing/2010/main" val="0"/>
+              </a:ext>
+            </a:extLst>
+          </a:blip>
+          <a:stretch>
+            <a:fillRect/>
+          </a:stretch>
+        </p:blipFill>
+        <p:spPr>
+          <a:xfrm>
+            <a:off x="199506" y="1505888"/>
+            <a:ext cx="7089333" cy="5044202"/>
+          </a:xfrm>
+          <a:prstGeom prst="rect">
+            <a:avLst/>
+          </a:prstGeom>
+          <a:ln w="76200">
+            <a:solidFill>
+              <a:srgbClr val="0AB77E"/>
+            </a:solidFill>
+          </a:ln>
+        </p:spPr>
+      </p:pic>
+      <p:sp>
+        <p:nvSpPr>
+          <p:cNvPr id="9" name="Content Placeholder 8"/>
+          <p:cNvSpPr>
+            <a:spLocks noGrp="1"/>
+          </p:cNvSpPr>
+          <p:nvPr>
+            <p:ph idx="1"/>
+          </p:nvPr>
+        </p:nvSpPr>
+        <p:spPr/>
+        <p:txBody>
+          <a:bodyPr/>
+          <a:lstStyle/>
+          <a:p>
+            <a:endParaRPr lang="en-GB" dirty="0"/>
           </a:p>
         </p:txBody>
       </p:sp>
@@ -22286,35 +22045,6 @@
           </a:p>
         </p:txBody>
       </p:sp>
-      <p:pic>
-        <p:nvPicPr>
-          <p:cNvPr id="9" name="Content Placeholder 8"/>
-          <p:cNvPicPr>
-            <a:picLocks noGrp="1" noChangeAspect="1"/>
-          </p:cNvPicPr>
-          <p:nvPr>
-            <p:ph idx="1"/>
-          </p:nvPr>
-        </p:nvPicPr>
-        <p:blipFill>
-          <a:blip r:embed="rId2">
-            <a:extLst>
-              <a:ext uri="{28A0092B-C50C-407E-A947-70E740481C1C}">
-                <a14:useLocalDpi xmlns:a14="http://schemas.microsoft.com/office/drawing/2010/main" val="0"/>
-              </a:ext>
-            </a:extLst>
-          </a:blip>
-          <a:stretch>
-            <a:fillRect/>
-          </a:stretch>
-        </p:blipFill>
-        <p:spPr>
-          <a:xfrm>
-            <a:off x="0" y="181426"/>
-            <a:ext cx="12192000" cy="6502401"/>
-          </a:xfrm>
-        </p:spPr>
-      </p:pic>
       <p:sp>
         <p:nvSpPr>
           <p:cNvPr id="6" name="Rounded Rectangle 8">
@@ -22388,6 +22118,35 @@
           </a:p>
         </p:txBody>
       </p:sp>
+      <p:pic>
+        <p:nvPicPr>
+          <p:cNvPr id="4" name="Content Placeholder 3"/>
+          <p:cNvPicPr>
+            <a:picLocks noGrp="1" noChangeAspect="1"/>
+          </p:cNvPicPr>
+          <p:nvPr>
+            <p:ph idx="1"/>
+          </p:nvPr>
+        </p:nvPicPr>
+        <p:blipFill>
+          <a:blip r:embed="rId2">
+            <a:extLst>
+              <a:ext uri="{28A0092B-C50C-407E-A947-70E740481C1C}">
+                <a14:useLocalDpi xmlns:a14="http://schemas.microsoft.com/office/drawing/2010/main" val="0"/>
+              </a:ext>
+            </a:extLst>
+          </a:blip>
+          <a:stretch>
+            <a:fillRect/>
+          </a:stretch>
+        </p:blipFill>
+        <p:spPr>
+          <a:xfrm>
+            <a:off x="0" y="365125"/>
+            <a:ext cx="12192000" cy="6242051"/>
+          </a:xfrm>
+        </p:spPr>
+      </p:pic>
     </p:spTree>
     <p:extLst>
       <p:ext uri="{BB962C8B-B14F-4D97-AF65-F5344CB8AC3E}">
@@ -28189,8 +27948,8 @@
         </p:blipFill>
         <p:spPr>
           <a:xfrm>
-            <a:off x="71277" y="1894966"/>
-            <a:ext cx="12049445" cy="3515775"/>
+            <a:off x="1" y="1894966"/>
+            <a:ext cx="12120722" cy="3536572"/>
           </a:xfrm>
           <a:prstGeom prst="rect">
             <a:avLst/>
@@ -28214,7 +27973,7 @@
         <p:spPr>
           <a:xfrm>
             <a:off x="838199" y="5641997"/>
-            <a:ext cx="10515600" cy="662571"/>
+            <a:ext cx="10515600" cy="1066713"/>
           </a:xfrm>
           <a:prstGeom prst="rect">
             <a:avLst/>
@@ -28222,7 +27981,7 @@
         </p:spPr>
         <p:txBody>
           <a:bodyPr vert="horz" lIns="91440" tIns="45720" rIns="91440" bIns="45720" rtlCol="0">
-            <a:normAutofit/>
+            <a:normAutofit fontScale="85000" lnSpcReduction="20000"/>
           </a:bodyPr>
           <a:lstStyle>
             <a:lvl1pPr marL="228600" indent="-228600" algn="l" defTabSz="914400" rtl="0" eaLnBrk="1" latinLnBrk="0" hangingPunct="1">
@@ -28395,7 +28154,18 @@
               </a:lnSpc>
             </a:pPr>
             <a:r>
-              <a:rPr lang="de-AT" sz="2400" dirty="0"/>
+              <a:rPr lang="de-AT" sz="2400" dirty="0" smtClean="0"/>
+              <a:t>BIC = Bayesian Information Criterion. Measures model fit quality</a:t>
+            </a:r>
+          </a:p>
+          <a:p>
+            <a:pPr>
+              <a:lnSpc>
+                <a:spcPct val="150000"/>
+              </a:lnSpc>
+            </a:pPr>
+            <a:r>
+              <a:rPr lang="de-AT" sz="2400" dirty="0" smtClean="0"/>
               <a:t>s</a:t>
             </a:r>
             <a:r>
@@ -28432,14 +28202,77 @@
 <file path=ppt/slides/slide34.xml><?xml version="1.0" encoding="utf-8"?>
 <p:sld xmlns:a="http://schemas.openxmlformats.org/drawingml/2006/main" xmlns:r="http://schemas.openxmlformats.org/officeDocument/2006/relationships" xmlns:p="http://schemas.openxmlformats.org/presentationml/2006/main">
   <p:cSld>
-    <p:bg>
-      <p:bgPr>
-        <a:solidFill>
-          <a:srgbClr val="FFFFFF"/>
-        </a:solidFill>
-        <a:effectLst/>
-      </p:bgPr>
-    </p:bg>
+    <p:spTree>
+      <p:nvGrpSpPr>
+        <p:cNvPr id="1" name=""/>
+        <p:cNvGrpSpPr/>
+        <p:nvPr/>
+      </p:nvGrpSpPr>
+      <p:grpSpPr>
+        <a:xfrm>
+          <a:off x="0" y="0"/>
+          <a:ext cx="0" cy="0"/>
+          <a:chOff x="0" y="0"/>
+          <a:chExt cx="0" cy="0"/>
+        </a:xfrm>
+      </p:grpSpPr>
+      <p:pic>
+        <p:nvPicPr>
+          <p:cNvPr id="3" name="Content Placeholder 2"/>
+          <p:cNvPicPr>
+            <a:picLocks noGrp="1" noChangeAspect="1"/>
+          </p:cNvPicPr>
+          <p:nvPr>
+            <p:ph idx="1"/>
+          </p:nvPr>
+        </p:nvPicPr>
+        <p:blipFill>
+          <a:blip r:embed="rId2">
+            <a:extLst>
+              <a:ext uri="{28A0092B-C50C-407E-A947-70E740481C1C}">
+                <a14:useLocalDpi xmlns:a14="http://schemas.microsoft.com/office/drawing/2010/main" val="0"/>
+              </a:ext>
+            </a:extLst>
+          </a:blip>
+          <a:stretch>
+            <a:fillRect/>
+          </a:stretch>
+        </p:blipFill>
+        <p:spPr>
+          <a:xfrm>
+            <a:off x="1858148" y="476247"/>
+            <a:ext cx="8445731" cy="6009305"/>
+          </a:xfrm>
+          <a:ln w="76200">
+            <a:solidFill>
+              <a:srgbClr val="0CB87F"/>
+            </a:solidFill>
+          </a:ln>
+        </p:spPr>
+      </p:pic>
+    </p:spTree>
+    <p:extLst>
+      <p:ext uri="{BB962C8B-B14F-4D97-AF65-F5344CB8AC3E}">
+        <p14:creationId xmlns:p14="http://schemas.microsoft.com/office/powerpoint/2010/main" val="1339492739"/>
+      </p:ext>
+    </p:extLst>
+  </p:cSld>
+  <p:clrMapOvr>
+    <a:masterClrMapping/>
+  </p:clrMapOvr>
+  <p:timing>
+    <p:tnLst>
+      <p:par>
+        <p:cTn id="1" dur="indefinite" restart="never" nodeType="tmRoot"/>
+      </p:par>
+    </p:tnLst>
+  </p:timing>
+</p:sld>
+</file>
+
+<file path=ppt/slides/slide35.xml><?xml version="1.0" encoding="utf-8"?>
+<p:sld xmlns:a="http://schemas.openxmlformats.org/drawingml/2006/main" xmlns:r="http://schemas.openxmlformats.org/officeDocument/2006/relationships" xmlns:p="http://schemas.openxmlformats.org/presentationml/2006/main">
+  <p:cSld>
     <p:spTree>
       <p:nvGrpSpPr>
         <p:cNvPr id="1" name=""/>
@@ -28476,157 +28309,23 @@
         </p:blipFill>
         <p:spPr>
           <a:xfrm>
-            <a:off x="838199" y="400367"/>
-            <a:ext cx="10515601" cy="6057265"/>
+            <a:off x="1444691" y="696778"/>
+            <a:ext cx="9270628" cy="5340128"/>
           </a:xfrm>
           <a:prstGeom prst="rect">
             <a:avLst/>
           </a:prstGeom>
-        </p:spPr>
-      </p:pic>
-      <p:sp>
-        <p:nvSpPr>
-          <p:cNvPr id="8" name="Inhaltsplatzhalter 7">
-            <a:extLst>
-              <a:ext uri="{FF2B5EF4-FFF2-40B4-BE49-F238E27FC236}">
-                <a16:creationId xmlns:a16="http://schemas.microsoft.com/office/drawing/2014/main" id="{CC1487FC-86EA-0219-5773-8F3F781BD251}"/>
-              </a:ext>
-            </a:extLst>
-          </p:cNvPr>
-          <p:cNvSpPr>
-            <a:spLocks noGrp="1"/>
-          </p:cNvSpPr>
-          <p:nvPr>
-            <p:ph idx="1"/>
-          </p:nvPr>
-        </p:nvSpPr>
-        <p:spPr/>
-        <p:txBody>
-          <a:bodyPr/>
-          <a:lstStyle/>
-          <a:p>
-            <a:endParaRPr lang="en-US" dirty="0"/>
-          </a:p>
-        </p:txBody>
-      </p:sp>
-    </p:spTree>
-    <p:extLst>
-      <p:ext uri="{BB962C8B-B14F-4D97-AF65-F5344CB8AC3E}">
-        <p14:creationId xmlns:p14="http://schemas.microsoft.com/office/powerpoint/2010/main" val="2688455579"/>
-      </p:ext>
-    </p:extLst>
-  </p:cSld>
-  <p:clrMapOvr>
-    <a:masterClrMapping/>
-  </p:clrMapOvr>
-  <p:timing>
-    <p:tnLst>
-      <p:par>
-        <p:cTn id="1" dur="indefinite" restart="never" nodeType="tmRoot"/>
-      </p:par>
-    </p:tnLst>
-  </p:timing>
-</p:sld>
-</file>
-
-<file path=ppt/slides/slide35.xml><?xml version="1.0" encoding="utf-8"?>
-<p:sld xmlns:a="http://schemas.openxmlformats.org/drawingml/2006/main" xmlns:r="http://schemas.openxmlformats.org/officeDocument/2006/relationships" xmlns:p="http://schemas.openxmlformats.org/presentationml/2006/main">
-  <p:cSld>
-    <p:spTree>
-      <p:nvGrpSpPr>
-        <p:cNvPr id="1" name=""/>
-        <p:cNvGrpSpPr/>
-        <p:nvPr/>
-      </p:nvGrpSpPr>
-      <p:grpSpPr>
-        <a:xfrm>
-          <a:off x="0" y="0"/>
-          <a:ext cx="0" cy="0"/>
-          <a:chOff x="0" y="0"/>
-          <a:chExt cx="0" cy="0"/>
-        </a:xfrm>
-      </p:grpSpPr>
-      <p:sp>
-        <p:nvSpPr>
-          <p:cNvPr id="5" name="Rectangle 4"/>
-          <p:cNvSpPr/>
-          <p:nvPr/>
-        </p:nvSpPr>
-        <p:spPr>
-          <a:xfrm>
-            <a:off x="-316590" y="5583745"/>
-            <a:ext cx="12776548" cy="1803748"/>
-          </a:xfrm>
-          <a:prstGeom prst="rect">
-            <a:avLst/>
-          </a:prstGeom>
-          <a:solidFill>
-            <a:srgbClr val="CFF1E6"/>
-          </a:solidFill>
           <a:ln w="76200">
             <a:solidFill>
               <a:srgbClr val="0CB87F"/>
             </a:solidFill>
           </a:ln>
         </p:spPr>
-        <p:style>
-          <a:lnRef idx="2">
-            <a:schemeClr val="accent1">
-              <a:shade val="50000"/>
-            </a:schemeClr>
-          </a:lnRef>
-          <a:fillRef idx="1">
-            <a:schemeClr val="accent1"/>
-          </a:fillRef>
-          <a:effectRef idx="0">
-            <a:schemeClr val="accent1"/>
-          </a:effectRef>
-          <a:fontRef idx="minor">
-            <a:schemeClr val="lt1"/>
-          </a:fontRef>
-        </p:style>
-        <p:txBody>
-          <a:bodyPr rtlCol="0" anchor="ctr"/>
-          <a:lstStyle/>
-          <a:p>
-            <a:pPr algn="ctr"/>
-            <a:endParaRPr lang="en-GB" dirty="0"/>
-          </a:p>
-        </p:txBody>
-      </p:sp>
-      <p:pic>
-        <p:nvPicPr>
-          <p:cNvPr id="4" name="Content Placeholder 3"/>
-          <p:cNvPicPr>
-            <a:picLocks noGrp="1" noChangeAspect="1"/>
-          </p:cNvPicPr>
-          <p:nvPr>
-            <p:ph idx="1"/>
-          </p:nvPr>
-        </p:nvPicPr>
-        <p:blipFill>
-          <a:blip r:embed="rId2">
-            <a:extLst>
-              <a:ext uri="{28A0092B-C50C-407E-A947-70E740481C1C}">
-                <a14:useLocalDpi xmlns:a14="http://schemas.microsoft.com/office/drawing/2010/main" val="0"/>
-              </a:ext>
-            </a:extLst>
-          </a:blip>
-          <a:stretch>
-            <a:fillRect/>
-          </a:stretch>
-        </p:blipFill>
-        <p:spPr>
-          <a:xfrm>
-            <a:off x="3038223" y="1825625"/>
-            <a:ext cx="6115554" cy="4351338"/>
-          </a:xfrm>
-        </p:spPr>
       </p:pic>
     </p:spTree>
     <p:extLst>
       <p:ext uri="{BB962C8B-B14F-4D97-AF65-F5344CB8AC3E}">
-        <p14:creationId xmlns:p14="http://schemas.microsoft.com/office/powerpoint/2010/main" val="743115257"/>
+        <p14:creationId xmlns:p14="http://schemas.microsoft.com/office/powerpoint/2010/main" val="1930811403"/>
       </p:ext>
     </p:extLst>
   </p:cSld>
@@ -28660,63 +28359,13 @@
           <a:chExt cx="0" cy="0"/>
         </a:xfrm>
       </p:grpSpPr>
-      <p:sp>
-        <p:nvSpPr>
-          <p:cNvPr id="5" name="Rectangle 4"/>
-          <p:cNvSpPr/>
-          <p:nvPr/>
-        </p:nvSpPr>
-        <p:spPr>
-          <a:xfrm>
-            <a:off x="-316590" y="5583745"/>
-            <a:ext cx="12776548" cy="1803748"/>
-          </a:xfrm>
-          <a:prstGeom prst="rect">
-            <a:avLst/>
-          </a:prstGeom>
-          <a:solidFill>
-            <a:srgbClr val="CFF1E6"/>
-          </a:solidFill>
-          <a:ln w="76200">
-            <a:solidFill>
-              <a:srgbClr val="0CB87F"/>
-            </a:solidFill>
-          </a:ln>
-        </p:spPr>
-        <p:style>
-          <a:lnRef idx="2">
-            <a:schemeClr val="accent1">
-              <a:shade val="50000"/>
-            </a:schemeClr>
-          </a:lnRef>
-          <a:fillRef idx="1">
-            <a:schemeClr val="accent1"/>
-          </a:fillRef>
-          <a:effectRef idx="0">
-            <a:schemeClr val="accent1"/>
-          </a:effectRef>
-          <a:fontRef idx="minor">
-            <a:schemeClr val="lt1"/>
-          </a:fontRef>
-        </p:style>
-        <p:txBody>
-          <a:bodyPr rtlCol="0" anchor="ctr"/>
-          <a:lstStyle/>
-          <a:p>
-            <a:pPr algn="ctr"/>
-            <a:endParaRPr lang="en-GB" dirty="0"/>
-          </a:p>
-        </p:txBody>
-      </p:sp>
       <p:pic>
         <p:nvPicPr>
-          <p:cNvPr id="3" name="Content Placeholder 2"/>
+          <p:cNvPr id="4" name="Content Placeholder 3"/>
           <p:cNvPicPr>
-            <a:picLocks noGrp="1" noChangeAspect="1"/>
+            <a:picLocks noChangeAspect="1"/>
           </p:cNvPicPr>
-          <p:nvPr>
-            <p:ph idx="1"/>
-          </p:nvPr>
+          <p:nvPr/>
         </p:nvPicPr>
         <p:blipFill>
           <a:blip r:embed="rId2">
@@ -28732,15 +28381,23 @@
         </p:blipFill>
         <p:spPr>
           <a:xfrm>
-            <a:off x="1848818" y="653529"/>
-            <a:ext cx="8445731" cy="6009305"/>
+            <a:off x="2212967" y="492535"/>
+            <a:ext cx="7766066" cy="5525710"/>
           </a:xfrm>
+          <a:prstGeom prst="rect">
+            <a:avLst/>
+          </a:prstGeom>
+          <a:ln w="76200">
+            <a:solidFill>
+              <a:srgbClr val="0CB87F"/>
+            </a:solidFill>
+          </a:ln>
         </p:spPr>
       </p:pic>
     </p:spTree>
     <p:extLst>
       <p:ext uri="{BB962C8B-B14F-4D97-AF65-F5344CB8AC3E}">
-        <p14:creationId xmlns:p14="http://schemas.microsoft.com/office/powerpoint/2010/main" val="1339492739"/>
+        <p14:creationId xmlns:p14="http://schemas.microsoft.com/office/powerpoint/2010/main" val="2294222220"/>
       </p:ext>
     </p:extLst>
   </p:cSld>
@@ -29161,6 +28818,481 @@
           <a:p>
             <a:r>
               <a:rPr lang="de-DE" dirty="0" smtClean="0"/>
+              <a:t>Conclusion</a:t>
+            </a:r>
+            <a:endParaRPr lang="en-GB" dirty="0"/>
+          </a:p>
+        </p:txBody>
+      </p:sp>
+      <p:sp>
+        <p:nvSpPr>
+          <p:cNvPr id="3" name="Content Placeholder 2"/>
+          <p:cNvSpPr>
+            <a:spLocks noGrp="1"/>
+          </p:cNvSpPr>
+          <p:nvPr>
+            <p:ph idx="1"/>
+          </p:nvPr>
+        </p:nvSpPr>
+        <p:spPr/>
+        <p:txBody>
+          <a:bodyPr>
+            <a:normAutofit/>
+          </a:bodyPr>
+          <a:lstStyle/>
+          <a:p>
+            <a:r>
+              <a:rPr lang="en-GB" b="1" dirty="0"/>
+              <a:t>Reward-selective neurons exist and are predominantly frontal</a:t>
+            </a:r>
+          </a:p>
+          <a:p>
+            <a:pPr lvl="1"/>
+            <a:r>
+              <a:rPr lang="en-GB" sz="1800" dirty="0">
+                <a:solidFill>
+                  <a:schemeClr val="bg1">
+                    <a:lumMod val="50000"/>
+                  </a:schemeClr>
+                </a:solidFill>
+              </a:rPr>
+              <a:t>ZETA analysis across 8 sessions (6,627 trials) shows time-locked spiking responses to reward outcomes, with outcome selectivity concentrated in MFG/IFG rather than parietal regions (SMG/AG).</a:t>
+            </a:r>
+          </a:p>
+          <a:p>
+            <a:r>
+              <a:rPr lang="en-GB" b="1" dirty="0"/>
+              <a:t>Simple reinforcement learning best captures behaviour</a:t>
+            </a:r>
+          </a:p>
+          <a:p>
+            <a:pPr lvl="1"/>
+            <a:r>
+              <a:rPr lang="en-GB" sz="1800" dirty="0">
+                <a:solidFill>
+                  <a:schemeClr val="bg1">
+                    <a:lumMod val="50000"/>
+                  </a:schemeClr>
+                </a:solidFill>
+              </a:rPr>
+              <a:t>Model comparison favours </a:t>
+            </a:r>
+            <a:r>
+              <a:rPr lang="en-GB" sz="1800" dirty="0" err="1">
+                <a:solidFill>
+                  <a:schemeClr val="bg1">
+                    <a:lumMod val="50000"/>
+                  </a:schemeClr>
+                </a:solidFill>
+              </a:rPr>
+              <a:t>Rescorla</a:t>
+            </a:r>
+            <a:r>
+              <a:rPr lang="en-GB" sz="1800" dirty="0">
+                <a:solidFill>
+                  <a:schemeClr val="bg1">
+                    <a:lumMod val="50000"/>
+                  </a:schemeClr>
+                </a:solidFill>
+              </a:rPr>
+              <a:t>-Wagner/Q-learning over the Hierarchical Gaussian Filter — participants' choices are well described by a basic prediction-error update rule.</a:t>
+            </a:r>
+          </a:p>
+          <a:p>
+            <a:r>
+              <a:rPr lang="en-GB" b="1" dirty="0"/>
+              <a:t>Neuronal firing rates tentatively track prediction errors</a:t>
+            </a:r>
+          </a:p>
+          <a:p>
+            <a:pPr lvl="1"/>
+            <a:r>
+              <a:rPr lang="en-GB" sz="1800" dirty="0">
+                <a:solidFill>
+                  <a:schemeClr val="bg1">
+                    <a:lumMod val="50000"/>
+                  </a:schemeClr>
+                </a:solidFill>
+              </a:rPr>
+              <a:t>Firing rates correlate with trial-by-trial RW prediction errors, suggesting frontal neurons may represent the learning signal — but direction, timing, and choice selectivity remain to be characterised.</a:t>
+            </a:r>
+          </a:p>
+          <a:p>
+            <a:endParaRPr lang="en-GB" dirty="0"/>
+          </a:p>
+        </p:txBody>
+      </p:sp>
+    </p:spTree>
+    <p:extLst>
+      <p:ext uri="{BB962C8B-B14F-4D97-AF65-F5344CB8AC3E}">
+        <p14:creationId xmlns:p14="http://schemas.microsoft.com/office/powerpoint/2010/main" val="173805490"/>
+      </p:ext>
+    </p:extLst>
+  </p:cSld>
+  <p:clrMapOvr>
+    <a:masterClrMapping/>
+  </p:clrMapOvr>
+  <p:timing>
+    <p:tnLst>
+      <p:par>
+        <p:cTn id="1" dur="indefinite" restart="never" nodeType="tmRoot">
+          <p:childTnLst>
+            <p:seq concurrent="1" nextAc="seek">
+              <p:cTn id="2" dur="indefinite" nodeType="mainSeq">
+                <p:childTnLst>
+                  <p:par>
+                    <p:cTn id="3" fill="hold">
+                      <p:stCondLst>
+                        <p:cond delay="indefinite"/>
+                      </p:stCondLst>
+                      <p:childTnLst>
+                        <p:par>
+                          <p:cTn id="4" fill="hold">
+                            <p:stCondLst>
+                              <p:cond delay="0"/>
+                            </p:stCondLst>
+                            <p:childTnLst>
+                              <p:par>
+                                <p:cTn id="5" presetID="1" presetClass="entr" presetSubtype="0" fill="hold" nodeType="clickEffect">
+                                  <p:stCondLst>
+                                    <p:cond delay="0"/>
+                                  </p:stCondLst>
+                                  <p:childTnLst>
+                                    <p:set>
+                                      <p:cBhvr>
+                                        <p:cTn id="6" dur="1" fill="hold">
+                                          <p:stCondLst>
+                                            <p:cond delay="0"/>
+                                          </p:stCondLst>
+                                        </p:cTn>
+                                        <p:tgtEl>
+                                          <p:spTgt spid="3">
+                                            <p:txEl>
+                                              <p:pRg st="0" end="0"/>
+                                            </p:txEl>
+                                          </p:spTgt>
+                                        </p:tgtEl>
+                                        <p:attrNameLst>
+                                          <p:attrName>style.visibility</p:attrName>
+                                        </p:attrNameLst>
+                                      </p:cBhvr>
+                                      <p:to>
+                                        <p:strVal val="visible"/>
+                                      </p:to>
+                                    </p:set>
+                                  </p:childTnLst>
+                                </p:cTn>
+                              </p:par>
+                            </p:childTnLst>
+                          </p:cTn>
+                        </p:par>
+                      </p:childTnLst>
+                    </p:cTn>
+                  </p:par>
+                  <p:par>
+                    <p:cTn id="7" fill="hold">
+                      <p:stCondLst>
+                        <p:cond delay="indefinite"/>
+                      </p:stCondLst>
+                      <p:childTnLst>
+                        <p:par>
+                          <p:cTn id="8" fill="hold">
+                            <p:stCondLst>
+                              <p:cond delay="0"/>
+                            </p:stCondLst>
+                            <p:childTnLst>
+                              <p:par>
+                                <p:cTn id="9" presetID="1" presetClass="entr" presetSubtype="0" fill="hold" nodeType="clickEffect">
+                                  <p:stCondLst>
+                                    <p:cond delay="0"/>
+                                  </p:stCondLst>
+                                  <p:childTnLst>
+                                    <p:set>
+                                      <p:cBhvr>
+                                        <p:cTn id="10" dur="1" fill="hold">
+                                          <p:stCondLst>
+                                            <p:cond delay="0"/>
+                                          </p:stCondLst>
+                                        </p:cTn>
+                                        <p:tgtEl>
+                                          <p:spTgt spid="3">
+                                            <p:txEl>
+                                              <p:pRg st="1" end="1"/>
+                                            </p:txEl>
+                                          </p:spTgt>
+                                        </p:tgtEl>
+                                        <p:attrNameLst>
+                                          <p:attrName>style.visibility</p:attrName>
+                                        </p:attrNameLst>
+                                      </p:cBhvr>
+                                      <p:to>
+                                        <p:strVal val="visible"/>
+                                      </p:to>
+                                    </p:set>
+                                  </p:childTnLst>
+                                </p:cTn>
+                              </p:par>
+                            </p:childTnLst>
+                          </p:cTn>
+                        </p:par>
+                      </p:childTnLst>
+                    </p:cTn>
+                  </p:par>
+                  <p:par>
+                    <p:cTn id="11" fill="hold">
+                      <p:stCondLst>
+                        <p:cond delay="indefinite"/>
+                      </p:stCondLst>
+                      <p:childTnLst>
+                        <p:par>
+                          <p:cTn id="12" fill="hold">
+                            <p:stCondLst>
+                              <p:cond delay="0"/>
+                            </p:stCondLst>
+                            <p:childTnLst>
+                              <p:par>
+                                <p:cTn id="13" presetID="1" presetClass="entr" presetSubtype="0" fill="hold" nodeType="clickEffect">
+                                  <p:stCondLst>
+                                    <p:cond delay="0"/>
+                                  </p:stCondLst>
+                                  <p:childTnLst>
+                                    <p:set>
+                                      <p:cBhvr>
+                                        <p:cTn id="14" dur="1" fill="hold">
+                                          <p:stCondLst>
+                                            <p:cond delay="0"/>
+                                          </p:stCondLst>
+                                        </p:cTn>
+                                        <p:tgtEl>
+                                          <p:spTgt spid="3">
+                                            <p:txEl>
+                                              <p:pRg st="2" end="2"/>
+                                            </p:txEl>
+                                          </p:spTgt>
+                                        </p:tgtEl>
+                                        <p:attrNameLst>
+                                          <p:attrName>style.visibility</p:attrName>
+                                        </p:attrNameLst>
+                                      </p:cBhvr>
+                                      <p:to>
+                                        <p:strVal val="visible"/>
+                                      </p:to>
+                                    </p:set>
+                                  </p:childTnLst>
+                                </p:cTn>
+                              </p:par>
+                            </p:childTnLst>
+                          </p:cTn>
+                        </p:par>
+                      </p:childTnLst>
+                    </p:cTn>
+                  </p:par>
+                  <p:par>
+                    <p:cTn id="15" fill="hold">
+                      <p:stCondLst>
+                        <p:cond delay="indefinite"/>
+                      </p:stCondLst>
+                      <p:childTnLst>
+                        <p:par>
+                          <p:cTn id="16" fill="hold">
+                            <p:stCondLst>
+                              <p:cond delay="0"/>
+                            </p:stCondLst>
+                            <p:childTnLst>
+                              <p:par>
+                                <p:cTn id="17" presetID="1" presetClass="entr" presetSubtype="0" fill="hold" nodeType="clickEffect">
+                                  <p:stCondLst>
+                                    <p:cond delay="0"/>
+                                  </p:stCondLst>
+                                  <p:childTnLst>
+                                    <p:set>
+                                      <p:cBhvr>
+                                        <p:cTn id="18" dur="1" fill="hold">
+                                          <p:stCondLst>
+                                            <p:cond delay="0"/>
+                                          </p:stCondLst>
+                                        </p:cTn>
+                                        <p:tgtEl>
+                                          <p:spTgt spid="3">
+                                            <p:txEl>
+                                              <p:pRg st="3" end="3"/>
+                                            </p:txEl>
+                                          </p:spTgt>
+                                        </p:tgtEl>
+                                        <p:attrNameLst>
+                                          <p:attrName>style.visibility</p:attrName>
+                                        </p:attrNameLst>
+                                      </p:cBhvr>
+                                      <p:to>
+                                        <p:strVal val="visible"/>
+                                      </p:to>
+                                    </p:set>
+                                  </p:childTnLst>
+                                </p:cTn>
+                              </p:par>
+                            </p:childTnLst>
+                          </p:cTn>
+                        </p:par>
+                      </p:childTnLst>
+                    </p:cTn>
+                  </p:par>
+                  <p:par>
+                    <p:cTn id="19" fill="hold">
+                      <p:stCondLst>
+                        <p:cond delay="indefinite"/>
+                      </p:stCondLst>
+                      <p:childTnLst>
+                        <p:par>
+                          <p:cTn id="20" fill="hold">
+                            <p:stCondLst>
+                              <p:cond delay="0"/>
+                            </p:stCondLst>
+                            <p:childTnLst>
+                              <p:par>
+                                <p:cTn id="21" presetID="1" presetClass="entr" presetSubtype="0" fill="hold" nodeType="clickEffect">
+                                  <p:stCondLst>
+                                    <p:cond delay="0"/>
+                                  </p:stCondLst>
+                                  <p:childTnLst>
+                                    <p:set>
+                                      <p:cBhvr>
+                                        <p:cTn id="22" dur="1" fill="hold">
+                                          <p:stCondLst>
+                                            <p:cond delay="0"/>
+                                          </p:stCondLst>
+                                        </p:cTn>
+                                        <p:tgtEl>
+                                          <p:spTgt spid="3">
+                                            <p:txEl>
+                                              <p:pRg st="4" end="4"/>
+                                            </p:txEl>
+                                          </p:spTgt>
+                                        </p:tgtEl>
+                                        <p:attrNameLst>
+                                          <p:attrName>style.visibility</p:attrName>
+                                        </p:attrNameLst>
+                                      </p:cBhvr>
+                                      <p:to>
+                                        <p:strVal val="visible"/>
+                                      </p:to>
+                                    </p:set>
+                                  </p:childTnLst>
+                                </p:cTn>
+                              </p:par>
+                            </p:childTnLst>
+                          </p:cTn>
+                        </p:par>
+                      </p:childTnLst>
+                    </p:cTn>
+                  </p:par>
+                  <p:par>
+                    <p:cTn id="23" fill="hold">
+                      <p:stCondLst>
+                        <p:cond delay="indefinite"/>
+                      </p:stCondLst>
+                      <p:childTnLst>
+                        <p:par>
+                          <p:cTn id="24" fill="hold">
+                            <p:stCondLst>
+                              <p:cond delay="0"/>
+                            </p:stCondLst>
+                            <p:childTnLst>
+                              <p:par>
+                                <p:cTn id="25" presetID="1" presetClass="entr" presetSubtype="0" fill="hold" nodeType="clickEffect">
+                                  <p:stCondLst>
+                                    <p:cond delay="0"/>
+                                  </p:stCondLst>
+                                  <p:childTnLst>
+                                    <p:set>
+                                      <p:cBhvr>
+                                        <p:cTn id="26" dur="1" fill="hold">
+                                          <p:stCondLst>
+                                            <p:cond delay="0"/>
+                                          </p:stCondLst>
+                                        </p:cTn>
+                                        <p:tgtEl>
+                                          <p:spTgt spid="3">
+                                            <p:txEl>
+                                              <p:pRg st="5" end="5"/>
+                                            </p:txEl>
+                                          </p:spTgt>
+                                        </p:tgtEl>
+                                        <p:attrNameLst>
+                                          <p:attrName>style.visibility</p:attrName>
+                                        </p:attrNameLst>
+                                      </p:cBhvr>
+                                      <p:to>
+                                        <p:strVal val="visible"/>
+                                      </p:to>
+                                    </p:set>
+                                  </p:childTnLst>
+                                </p:cTn>
+                              </p:par>
+                            </p:childTnLst>
+                          </p:cTn>
+                        </p:par>
+                      </p:childTnLst>
+                    </p:cTn>
+                  </p:par>
+                </p:childTnLst>
+              </p:cTn>
+              <p:prevCondLst>
+                <p:cond evt="onPrev" delay="0">
+                  <p:tgtEl>
+                    <p:sldTgt/>
+                  </p:tgtEl>
+                </p:cond>
+              </p:prevCondLst>
+              <p:nextCondLst>
+                <p:cond evt="onNext" delay="0">
+                  <p:tgtEl>
+                    <p:sldTgt/>
+                  </p:tgtEl>
+                </p:cond>
+              </p:nextCondLst>
+            </p:seq>
+          </p:childTnLst>
+        </p:cTn>
+      </p:par>
+    </p:tnLst>
+  </p:timing>
+</p:sld>
+</file>
+
+<file path=ppt/slides/slide39.xml><?xml version="1.0" encoding="utf-8"?>
+<p:sld xmlns:a="http://schemas.openxmlformats.org/drawingml/2006/main" xmlns:r="http://schemas.openxmlformats.org/officeDocument/2006/relationships" xmlns:p="http://schemas.openxmlformats.org/presentationml/2006/main">
+  <p:cSld>
+    <p:spTree>
+      <p:nvGrpSpPr>
+        <p:cNvPr id="1" name=""/>
+        <p:cNvGrpSpPr/>
+        <p:nvPr/>
+      </p:nvGrpSpPr>
+      <p:grpSpPr>
+        <a:xfrm>
+          <a:off x="0" y="0"/>
+          <a:ext cx="0" cy="0"/>
+          <a:chOff x="0" y="0"/>
+          <a:chExt cx="0" cy="0"/>
+        </a:xfrm>
+      </p:grpSpPr>
+      <p:sp>
+        <p:nvSpPr>
+          <p:cNvPr id="2" name="Title 1"/>
+          <p:cNvSpPr>
+            <a:spLocks noGrp="1"/>
+          </p:cNvSpPr>
+          <p:nvPr>
+            <p:ph type="title"/>
+          </p:nvPr>
+        </p:nvSpPr>
+        <p:spPr/>
+        <p:txBody>
+          <a:bodyPr/>
+          <a:lstStyle/>
+          <a:p>
+            <a:r>
+              <a:rPr lang="de-DE" dirty="0" smtClean="0"/>
               <a:t>Future Direction</a:t>
             </a:r>
             <a:endParaRPr lang="en-GB" dirty="0"/>
@@ -29185,6 +29317,12 @@
             <a:r>
               <a:rPr lang="de-DE" dirty="0" smtClean="0"/>
               <a:t>Sign of prediction error vs firing rate correlation</a:t>
+            </a:r>
+          </a:p>
+          <a:p>
+            <a:r>
+              <a:rPr lang="de-DE" dirty="0" smtClean="0"/>
+              <a:t>Find a better model</a:t>
             </a:r>
           </a:p>
           <a:p>
@@ -30272,6 +30410,118 @@
     <p:bldLst>
       <p:bldP spid="22" grpId="0" animBg="1"/>
     </p:bldLst>
+  </p:timing>
+</p:sld>
+</file>
+
+<file path=ppt/slides/slide40.xml><?xml version="1.0" encoding="utf-8"?>
+<p:sld xmlns:a="http://schemas.openxmlformats.org/drawingml/2006/main" xmlns:r="http://schemas.openxmlformats.org/officeDocument/2006/relationships" xmlns:p="http://schemas.openxmlformats.org/presentationml/2006/main">
+  <p:cSld>
+    <p:spTree>
+      <p:nvGrpSpPr>
+        <p:cNvPr id="1" name=""/>
+        <p:cNvGrpSpPr/>
+        <p:nvPr/>
+      </p:nvGrpSpPr>
+      <p:grpSpPr>
+        <a:xfrm>
+          <a:off x="0" y="0"/>
+          <a:ext cx="0" cy="0"/>
+          <a:chOff x="0" y="0"/>
+          <a:chExt cx="0" cy="0"/>
+        </a:xfrm>
+      </p:grpSpPr>
+      <p:sp>
+        <p:nvSpPr>
+          <p:cNvPr id="2" name="Title 1"/>
+          <p:cNvSpPr>
+            <a:spLocks noGrp="1"/>
+          </p:cNvSpPr>
+          <p:nvPr>
+            <p:ph type="title"/>
+          </p:nvPr>
+        </p:nvSpPr>
+        <p:spPr/>
+        <p:txBody>
+          <a:bodyPr/>
+          <a:lstStyle/>
+          <a:p>
+            <a:r>
+              <a:rPr lang="de-DE" dirty="0" smtClean="0"/>
+              <a:t>Acknowledgements</a:t>
+            </a:r>
+            <a:endParaRPr lang="en-GB" dirty="0"/>
+          </a:p>
+        </p:txBody>
+      </p:sp>
+      <p:sp>
+        <p:nvSpPr>
+          <p:cNvPr id="3" name="Content Placeholder 2"/>
+          <p:cNvSpPr>
+            <a:spLocks noGrp="1"/>
+          </p:cNvSpPr>
+          <p:nvPr>
+            <p:ph idx="1"/>
+          </p:nvPr>
+        </p:nvSpPr>
+        <p:spPr>
+          <a:xfrm>
+            <a:off x="838200" y="2859578"/>
+            <a:ext cx="10515600" cy="3317384"/>
+          </a:xfrm>
+        </p:spPr>
+        <p:txBody>
+          <a:bodyPr/>
+          <a:lstStyle/>
+          <a:p>
+            <a:r>
+              <a:rPr lang="de-DE" dirty="0" smtClean="0"/>
+              <a:t>Hugo, Dimitris and everyone in the lab giving me much needed advice and direction</a:t>
+            </a:r>
+          </a:p>
+          <a:p>
+            <a:r>
+              <a:rPr lang="de-DE" dirty="0" smtClean="0"/>
+              <a:t>Simon Jacob Lab</a:t>
+            </a:r>
+          </a:p>
+          <a:p>
+            <a:r>
+              <a:rPr lang="de-DE" dirty="0" smtClean="0"/>
+              <a:t>Chen Hongbiao</a:t>
+            </a:r>
+          </a:p>
+          <a:p>
+            <a:r>
+              <a:rPr lang="de-DE" dirty="0" smtClean="0">
+                <a:solidFill>
+                  <a:srgbClr val="FFF8E5"/>
+                </a:solidFill>
+              </a:rPr>
+              <a:t>coffee</a:t>
+            </a:r>
+          </a:p>
+          <a:p>
+            <a:endParaRPr lang="en-GB" dirty="0"/>
+          </a:p>
+        </p:txBody>
+      </p:sp>
+    </p:spTree>
+    <p:extLst>
+      <p:ext uri="{BB962C8B-B14F-4D97-AF65-F5344CB8AC3E}">
+        <p14:creationId xmlns:p14="http://schemas.microsoft.com/office/powerpoint/2010/main" val="3075735988"/>
+      </p:ext>
+    </p:extLst>
+  </p:cSld>
+  <p:clrMapOvr>
+    <a:masterClrMapping/>
+  </p:clrMapOvr>
+  <p:timing>
+    <p:tnLst>
+      <p:par>
+        <p:cTn id="1" dur="indefinite" restart="never" nodeType="tmRoot"/>
+      </p:par>
+    </p:tnLst>
   </p:timing>
 </p:sld>
 </file>

--- a/presentation/Prototype.pptx
+++ b/presentation/Prototype.pptx
@@ -5,7 +5,7 @@
     <p:sldMasterId id="2147483648" r:id="rId1"/>
   </p:sldMasterIdLst>
   <p:handoutMasterIdLst>
-    <p:handoutMasterId r:id="rId42"/>
+    <p:handoutMasterId r:id="rId44"/>
   </p:handoutMasterIdLst>
   <p:sldIdLst>
     <p:sldId id="256" r:id="rId2"/>
@@ -21,33 +21,35 @@
     <p:sldId id="261" r:id="rId12"/>
     <p:sldId id="273" r:id="rId13"/>
     <p:sldId id="259" r:id="rId14"/>
-    <p:sldId id="260" r:id="rId15"/>
-    <p:sldId id="268" r:id="rId16"/>
-    <p:sldId id="274" r:id="rId17"/>
-    <p:sldId id="298" r:id="rId18"/>
-    <p:sldId id="287" r:id="rId19"/>
-    <p:sldId id="262" r:id="rId20"/>
-    <p:sldId id="275" r:id="rId21"/>
-    <p:sldId id="277" r:id="rId22"/>
-    <p:sldId id="279" r:id="rId23"/>
-    <p:sldId id="278" r:id="rId24"/>
-    <p:sldId id="296" r:id="rId25"/>
-    <p:sldId id="276" r:id="rId26"/>
-    <p:sldId id="263" r:id="rId27"/>
-    <p:sldId id="283" r:id="rId28"/>
-    <p:sldId id="280" r:id="rId29"/>
-    <p:sldId id="282" r:id="rId30"/>
-    <p:sldId id="265" r:id="rId31"/>
-    <p:sldId id="290" r:id="rId32"/>
-    <p:sldId id="291" r:id="rId33"/>
-    <p:sldId id="288" r:id="rId34"/>
-    <p:sldId id="284" r:id="rId35"/>
-    <p:sldId id="304" r:id="rId36"/>
-    <p:sldId id="303" r:id="rId37"/>
-    <p:sldId id="297" r:id="rId38"/>
-    <p:sldId id="301" r:id="rId39"/>
-    <p:sldId id="299" r:id="rId40"/>
-    <p:sldId id="302" r:id="rId41"/>
+    <p:sldId id="306" r:id="rId15"/>
+    <p:sldId id="260" r:id="rId16"/>
+    <p:sldId id="307" r:id="rId17"/>
+    <p:sldId id="308" r:id="rId18"/>
+    <p:sldId id="305" r:id="rId19"/>
+    <p:sldId id="268" r:id="rId20"/>
+    <p:sldId id="274" r:id="rId21"/>
+    <p:sldId id="287" r:id="rId22"/>
+    <p:sldId id="262" r:id="rId23"/>
+    <p:sldId id="275" r:id="rId24"/>
+    <p:sldId id="277" r:id="rId25"/>
+    <p:sldId id="278" r:id="rId26"/>
+    <p:sldId id="296" r:id="rId27"/>
+    <p:sldId id="276" r:id="rId28"/>
+    <p:sldId id="263" r:id="rId29"/>
+    <p:sldId id="283" r:id="rId30"/>
+    <p:sldId id="280" r:id="rId31"/>
+    <p:sldId id="282" r:id="rId32"/>
+    <p:sldId id="265" r:id="rId33"/>
+    <p:sldId id="290" r:id="rId34"/>
+    <p:sldId id="291" r:id="rId35"/>
+    <p:sldId id="288" r:id="rId36"/>
+    <p:sldId id="304" r:id="rId37"/>
+    <p:sldId id="303" r:id="rId38"/>
+    <p:sldId id="284" r:id="rId39"/>
+    <p:sldId id="297" r:id="rId40"/>
+    <p:sldId id="301" r:id="rId41"/>
+    <p:sldId id="299" r:id="rId42"/>
+    <p:sldId id="302" r:id="rId43"/>
   </p:sldIdLst>
   <p:sldSz cx="12192000" cy="6858000"/>
   <p:notesSz cx="6858000" cy="9144000"/>
@@ -923,7 +925,7 @@
         <a:lstStyle/>
         <a:p>
           <a:r>
-            <a:rPr lang="en-US" sz="2800" kern="1200" dirty="0" smtClean="0">
+            <a:rPr lang="en-US" sz="2800" kern="1200" dirty="0">
               <a:solidFill>
                 <a:schemeClr val="tx1"/>
               </a:solidFill>
@@ -933,14 +935,6 @@
             </a:rPr>
             <a:t>out-come</a:t>
           </a:r>
-          <a:endParaRPr lang="en-US" sz="2800" kern="1200" dirty="0">
-            <a:solidFill>
-              <a:schemeClr val="tx1"/>
-            </a:solidFill>
-            <a:latin typeface="Bahnschrift" panose="020B0502040204020203" pitchFamily="34" charset="0"/>
-            <a:ea typeface="+mn-ea"/>
-            <a:cs typeface="+mn-cs"/>
-          </a:endParaRPr>
         </a:p>
       </dgm:t>
     </dgm:pt>
@@ -1073,13 +1067,6 @@
     <dgm:pt modelId="{ECE168B9-97D6-4F75-9289-AF0458231259}" type="pres">
       <dgm:prSet presAssocID="{4DEA52EC-7676-47C9-8D53-46B739BD2587}" presName="wedge1" presStyleLbl="node1" presStyleIdx="0" presStyleCnt="3"/>
       <dgm:spPr/>
-      <dgm:t>
-        <a:bodyPr/>
-        <a:lstStyle/>
-        <a:p>
-          <a:endParaRPr lang="en-US"/>
-        </a:p>
-      </dgm:t>
     </dgm:pt>
     <dgm:pt modelId="{936F56D5-CB26-4B20-B0FA-6C6FE1834F39}" type="pres">
       <dgm:prSet presAssocID="{4DEA52EC-7676-47C9-8D53-46B739BD2587}" presName="dummy1a" presStyleCnt="0"/>
@@ -1098,24 +1085,10 @@
         </dgm:presLayoutVars>
       </dgm:prSet>
       <dgm:spPr/>
-      <dgm:t>
-        <a:bodyPr/>
-        <a:lstStyle/>
-        <a:p>
-          <a:endParaRPr lang="en-US"/>
-        </a:p>
-      </dgm:t>
     </dgm:pt>
     <dgm:pt modelId="{EB2BDB46-B1F8-4502-BAF4-FF4CD80D55D7}" type="pres">
       <dgm:prSet presAssocID="{4DEA52EC-7676-47C9-8D53-46B739BD2587}" presName="wedge2" presStyleLbl="node1" presStyleIdx="1" presStyleCnt="3" custScaleX="121659" custScaleY="114947"/>
       <dgm:spPr/>
-      <dgm:t>
-        <a:bodyPr/>
-        <a:lstStyle/>
-        <a:p>
-          <a:endParaRPr lang="en-US"/>
-        </a:p>
-      </dgm:t>
     </dgm:pt>
     <dgm:pt modelId="{BBCA0883-4239-43BF-8066-2531F61B2759}" type="pres">
       <dgm:prSet presAssocID="{4DEA52EC-7676-47C9-8D53-46B739BD2587}" presName="dummy2a" presStyleCnt="0"/>
@@ -1134,24 +1107,10 @@
         </dgm:presLayoutVars>
       </dgm:prSet>
       <dgm:spPr/>
-      <dgm:t>
-        <a:bodyPr/>
-        <a:lstStyle/>
-        <a:p>
-          <a:endParaRPr lang="en-US"/>
-        </a:p>
-      </dgm:t>
     </dgm:pt>
     <dgm:pt modelId="{D5E000D8-9AAE-49A4-87FF-0642AB719E81}" type="pres">
       <dgm:prSet presAssocID="{4DEA52EC-7676-47C9-8D53-46B739BD2587}" presName="wedge3" presStyleLbl="node1" presStyleIdx="2" presStyleCnt="3"/>
       <dgm:spPr/>
-      <dgm:t>
-        <a:bodyPr/>
-        <a:lstStyle/>
-        <a:p>
-          <a:endParaRPr lang="en-US"/>
-        </a:p>
-      </dgm:t>
     </dgm:pt>
     <dgm:pt modelId="{8245ECD6-57B2-4F6F-B83D-4AB0EA52FE4D}" type="pres">
       <dgm:prSet presAssocID="{4DEA52EC-7676-47C9-8D53-46B739BD2587}" presName="dummy3a" presStyleCnt="0"/>
@@ -1170,13 +1129,6 @@
         </dgm:presLayoutVars>
       </dgm:prSet>
       <dgm:spPr/>
-      <dgm:t>
-        <a:bodyPr/>
-        <a:lstStyle/>
-        <a:p>
-          <a:endParaRPr lang="en-US"/>
-        </a:p>
-      </dgm:t>
     </dgm:pt>
     <dgm:pt modelId="{E8DD7363-32E9-4432-A10F-A450F8052676}" type="pres">
       <dgm:prSet presAssocID="{2B269CAD-26B2-49B7-8DBE-9F0441B9BE1E}" presName="arrowWedge1" presStyleLbl="fgSibTrans2D1" presStyleIdx="0" presStyleCnt="3"/>
@@ -1204,16 +1156,16 @@
     </dgm:pt>
   </dgm:ptLst>
   <dgm:cxnLst>
-    <dgm:cxn modelId="{26E01A93-AAB4-4B0E-9714-DDECC3C8A632}" srcId="{4DEA52EC-7676-47C9-8D53-46B739BD2587}" destId="{465ABD7E-49EC-43D9-97C5-6A4B67335834}" srcOrd="2" destOrd="0" parTransId="{F86C5027-5A3B-4A7A-A8C2-CE64D014DE97}" sibTransId="{B0E0A821-4726-4C37-A1CE-BF1E908724BF}"/>
     <dgm:cxn modelId="{A3BD1D09-917F-446D-BBFC-01EE249FBAC4}" srcId="{4DEA52EC-7676-47C9-8D53-46B739BD2587}" destId="{DBF283F7-617E-4082-A2AD-BFAAF939546A}" srcOrd="0" destOrd="0" parTransId="{48859DF4-1CAC-4FFA-950E-A8C3D6C6EDD0}" sibTransId="{2B269CAD-26B2-49B7-8DBE-9F0441B9BE1E}"/>
-    <dgm:cxn modelId="{9C4AFFA6-8D65-4D9A-ACAC-4F79155E5D3C}" type="presOf" srcId="{4DEA52EC-7676-47C9-8D53-46B739BD2587}" destId="{5B589FE8-1180-43E9-9DD9-8C60F02AF256}" srcOrd="0" destOrd="0" presId="urn:microsoft.com/office/officeart/2005/8/layout/cycle8"/>
-    <dgm:cxn modelId="{A888CEDD-92B2-4708-BD8D-16EAECE9934F}" type="presOf" srcId="{DBF283F7-617E-4082-A2AD-BFAAF939546A}" destId="{ECE168B9-97D6-4F75-9289-AF0458231259}" srcOrd="0" destOrd="0" presId="urn:microsoft.com/office/officeart/2005/8/layout/cycle8"/>
     <dgm:cxn modelId="{E0EB9B1E-AC48-4775-B852-9ACA75C44C78}" type="presOf" srcId="{0BC66A2B-1DD2-4A8C-A7E6-4706A5A565F2}" destId="{10A53F47-8ED4-4B0B-B765-C54515E800D2}" srcOrd="1" destOrd="0" presId="urn:microsoft.com/office/officeart/2005/8/layout/cycle8"/>
     <dgm:cxn modelId="{0B220C60-5818-43B2-939E-982284DA03A5}" type="presOf" srcId="{465ABD7E-49EC-43D9-97C5-6A4B67335834}" destId="{D5E000D8-9AAE-49A4-87FF-0642AB719E81}" srcOrd="0" destOrd="0" presId="urn:microsoft.com/office/officeart/2005/8/layout/cycle8"/>
+    <dgm:cxn modelId="{26E01A93-AAB4-4B0E-9714-DDECC3C8A632}" srcId="{4DEA52EC-7676-47C9-8D53-46B739BD2587}" destId="{465ABD7E-49EC-43D9-97C5-6A4B67335834}" srcOrd="2" destOrd="0" parTransId="{F86C5027-5A3B-4A7A-A8C2-CE64D014DE97}" sibTransId="{B0E0A821-4726-4C37-A1CE-BF1E908724BF}"/>
     <dgm:cxn modelId="{BB0E7396-0C60-44A9-95EE-3F01D4E9DE43}" type="presOf" srcId="{0BC66A2B-1DD2-4A8C-A7E6-4706A5A565F2}" destId="{EB2BDB46-B1F8-4502-BAF4-FF4CD80D55D7}" srcOrd="0" destOrd="0" presId="urn:microsoft.com/office/officeart/2005/8/layout/cycle8"/>
-    <dgm:cxn modelId="{054D30D1-3227-4A91-8F68-5D1E792E8774}" srcId="{4DEA52EC-7676-47C9-8D53-46B739BD2587}" destId="{0BC66A2B-1DD2-4A8C-A7E6-4706A5A565F2}" srcOrd="1" destOrd="0" parTransId="{53A6D6CB-1B65-4EC5-8C87-678BCA6B287D}" sibTransId="{5F85C5D3-97EB-437D-BC96-722C0B626794}"/>
+    <dgm:cxn modelId="{9C4AFFA6-8D65-4D9A-ACAC-4F79155E5D3C}" type="presOf" srcId="{4DEA52EC-7676-47C9-8D53-46B739BD2587}" destId="{5B589FE8-1180-43E9-9DD9-8C60F02AF256}" srcOrd="0" destOrd="0" presId="urn:microsoft.com/office/officeart/2005/8/layout/cycle8"/>
     <dgm:cxn modelId="{645A2DB8-3540-49FE-A150-CFEC60E8473A}" type="presOf" srcId="{465ABD7E-49EC-43D9-97C5-6A4B67335834}" destId="{6DDCB976-2FE0-4A90-B6ED-DE80609CC20C}" srcOrd="1" destOrd="0" presId="urn:microsoft.com/office/officeart/2005/8/layout/cycle8"/>
     <dgm:cxn modelId="{221C58C9-64CB-4D36-BA60-E09FC27F6E29}" type="presOf" srcId="{DBF283F7-617E-4082-A2AD-BFAAF939546A}" destId="{B96C4C7D-8621-4D0F-BBC4-D8B0CA18F115}" srcOrd="1" destOrd="0" presId="urn:microsoft.com/office/officeart/2005/8/layout/cycle8"/>
+    <dgm:cxn modelId="{054D30D1-3227-4A91-8F68-5D1E792E8774}" srcId="{4DEA52EC-7676-47C9-8D53-46B739BD2587}" destId="{0BC66A2B-1DD2-4A8C-A7E6-4706A5A565F2}" srcOrd="1" destOrd="0" parTransId="{53A6D6CB-1B65-4EC5-8C87-678BCA6B287D}" sibTransId="{5F85C5D3-97EB-437D-BC96-722C0B626794}"/>
+    <dgm:cxn modelId="{A888CEDD-92B2-4708-BD8D-16EAECE9934F}" type="presOf" srcId="{DBF283F7-617E-4082-A2AD-BFAAF939546A}" destId="{ECE168B9-97D6-4F75-9289-AF0458231259}" srcOrd="0" destOrd="0" presId="urn:microsoft.com/office/officeart/2005/8/layout/cycle8"/>
     <dgm:cxn modelId="{2D01EE17-B314-4859-9BDA-46F0F211E530}" type="presParOf" srcId="{5B589FE8-1180-43E9-9DD9-8C60F02AF256}" destId="{ECE168B9-97D6-4F75-9289-AF0458231259}" srcOrd="0" destOrd="0" presId="urn:microsoft.com/office/officeart/2005/8/layout/cycle8"/>
     <dgm:cxn modelId="{650500E8-FF35-4B10-B79D-B941396585E3}" type="presParOf" srcId="{5B589FE8-1180-43E9-9DD9-8C60F02AF256}" destId="{936F56D5-CB26-4B20-B0FA-6C6FE1834F39}" srcOrd="1" destOrd="0" presId="urn:microsoft.com/office/officeart/2005/8/layout/cycle8"/>
     <dgm:cxn modelId="{AB88B786-4180-409E-85F7-4EEBABBE756B}" type="presParOf" srcId="{5B589FE8-1180-43E9-9DD9-8C60F02AF256}" destId="{F60AA58E-22C8-4E39-ACCD-DFB7D3AA2B40}" srcOrd="2" destOrd="0" presId="urn:microsoft.com/office/officeart/2005/8/layout/cycle8"/>
@@ -1301,7 +1253,7 @@
         </a:bodyPr>
         <a:lstStyle/>
         <a:p>
-          <a:pPr lvl="0" algn="ctr" defTabSz="1244600">
+          <a:pPr marL="0" lvl="0" indent="0" algn="ctr" defTabSz="1244600">
             <a:lnSpc>
               <a:spcPct val="90000"/>
             </a:lnSpc>
@@ -1311,9 +1263,10 @@
             <a:spcAft>
               <a:spcPct val="35000"/>
             </a:spcAft>
+            <a:buNone/>
           </a:pPr>
           <a:r>
-            <a:rPr lang="en-US" sz="2800" kern="1200" dirty="0" smtClean="0">
+            <a:rPr lang="en-US" sz="2800" kern="1200" dirty="0">
               <a:solidFill>
                 <a:schemeClr val="tx1"/>
               </a:solidFill>
@@ -1323,14 +1276,6 @@
             </a:rPr>
             <a:t>out-come</a:t>
           </a:r>
-          <a:endParaRPr lang="en-US" sz="2800" kern="1200" dirty="0">
-            <a:solidFill>
-              <a:schemeClr val="tx1"/>
-            </a:solidFill>
-            <a:latin typeface="Bahnschrift" panose="020B0502040204020203" pitchFamily="34" charset="0"/>
-            <a:ea typeface="+mn-ea"/>
-            <a:cs typeface="+mn-cs"/>
-          </a:endParaRPr>
         </a:p>
       </dsp:txBody>
       <dsp:txXfrm>
@@ -1391,7 +1336,7 @@
         </a:bodyPr>
         <a:lstStyle/>
         <a:p>
-          <a:pPr lvl="0" algn="ctr" defTabSz="1244600">
+          <a:pPr marL="0" lvl="0" indent="0" algn="ctr" defTabSz="1244600">
             <a:lnSpc>
               <a:spcPct val="90000"/>
             </a:lnSpc>
@@ -1401,6 +1346,7 @@
             <a:spcAft>
               <a:spcPct val="35000"/>
             </a:spcAft>
+            <a:buNone/>
           </a:pPr>
           <a:r>
             <a:rPr lang="en-US" sz="2800" b="1" kern="1200" dirty="0">
@@ -1473,7 +1419,7 @@
         </a:bodyPr>
         <a:lstStyle/>
         <a:p>
-          <a:pPr lvl="0" algn="ctr" defTabSz="1244600">
+          <a:pPr marL="0" lvl="0" indent="0" algn="ctr" defTabSz="1244600">
             <a:lnSpc>
               <a:spcPct val="90000"/>
             </a:lnSpc>
@@ -1483,6 +1429,7 @@
             <a:spcAft>
               <a:spcPct val="35000"/>
             </a:spcAft>
+            <a:buNone/>
           </a:pPr>
           <a:r>
             <a:rPr lang="en-US" sz="2800" kern="1200" dirty="0">
@@ -4574,7 +4521,7 @@
           <a:p>
             <a:fld id="{1F4AF040-EF21-481B-90AC-C83BDA3491BA}" type="slidenum">
               <a:rPr lang="en-GB" smtClean="0"/>
-              <a:t>‹#›</a:t>
+              <a:t>‹Nr.›</a:t>
             </a:fld>
             <a:endParaRPr lang="en-GB"/>
           </a:p>
@@ -4764,7 +4711,7 @@
           <a:p>
             <a:fld id="{8E09F03E-0454-4873-96B1-F60F4F6155FC}" type="slidenum">
               <a:rPr lang="en-GB" smtClean="0"/>
-              <a:t>‹#›</a:t>
+              <a:t>‹Nr.›</a:t>
             </a:fld>
             <a:endParaRPr lang="en-GB"/>
           </a:p>
@@ -4934,7 +4881,7 @@
           <a:p>
             <a:fld id="{8E09F03E-0454-4873-96B1-F60F4F6155FC}" type="slidenum">
               <a:rPr lang="en-GB" smtClean="0"/>
-              <a:t>‹#›</a:t>
+              <a:t>‹Nr.›</a:t>
             </a:fld>
             <a:endParaRPr lang="en-GB"/>
           </a:p>
@@ -5114,7 +5061,7 @@
           <a:p>
             <a:fld id="{8E09F03E-0454-4873-96B1-F60F4F6155FC}" type="slidenum">
               <a:rPr lang="en-GB" smtClean="0"/>
-              <a:t>‹#›</a:t>
+              <a:t>‹Nr.›</a:t>
             </a:fld>
             <a:endParaRPr lang="en-GB"/>
           </a:p>
@@ -5316,7 +5263,7 @@
           <a:p>
             <a:fld id="{8E09F03E-0454-4873-96B1-F60F4F6155FC}" type="slidenum">
               <a:rPr lang="en-GB" smtClean="0"/>
-              <a:t>‹#›</a:t>
+              <a:t>‹Nr.›</a:t>
             </a:fld>
             <a:endParaRPr lang="en-GB"/>
           </a:p>
@@ -5562,7 +5509,7 @@
           <a:p>
             <a:fld id="{8E09F03E-0454-4873-96B1-F60F4F6155FC}" type="slidenum">
               <a:rPr lang="en-GB" smtClean="0"/>
-              <a:t>‹#›</a:t>
+              <a:t>‹Nr.›</a:t>
             </a:fld>
             <a:endParaRPr lang="en-GB"/>
           </a:p>
@@ -5794,7 +5741,7 @@
           <a:p>
             <a:fld id="{8E09F03E-0454-4873-96B1-F60F4F6155FC}" type="slidenum">
               <a:rPr lang="en-GB" smtClean="0"/>
-              <a:t>‹#›</a:t>
+              <a:t>‹Nr.›</a:t>
             </a:fld>
             <a:endParaRPr lang="en-GB"/>
           </a:p>
@@ -6161,7 +6108,7 @@
           <a:p>
             <a:fld id="{8E09F03E-0454-4873-96B1-F60F4F6155FC}" type="slidenum">
               <a:rPr lang="en-GB" smtClean="0"/>
-              <a:t>‹#›</a:t>
+              <a:t>‹Nr.›</a:t>
             </a:fld>
             <a:endParaRPr lang="en-GB"/>
           </a:p>
@@ -6279,7 +6226,7 @@
           <a:p>
             <a:fld id="{8E09F03E-0454-4873-96B1-F60F4F6155FC}" type="slidenum">
               <a:rPr lang="en-GB" smtClean="0"/>
-              <a:t>‹#›</a:t>
+              <a:t>‹Nr.›</a:t>
             </a:fld>
             <a:endParaRPr lang="en-GB"/>
           </a:p>
@@ -6374,7 +6321,7 @@
           <a:p>
             <a:fld id="{8E09F03E-0454-4873-96B1-F60F4F6155FC}" type="slidenum">
               <a:rPr lang="en-GB" smtClean="0"/>
-              <a:t>‹#›</a:t>
+              <a:t>‹Nr.›</a:t>
             </a:fld>
             <a:endParaRPr lang="en-GB"/>
           </a:p>
@@ -6651,7 +6598,7 @@
           <a:p>
             <a:fld id="{8E09F03E-0454-4873-96B1-F60F4F6155FC}" type="slidenum">
               <a:rPr lang="en-GB" smtClean="0"/>
-              <a:t>‹#›</a:t>
+              <a:t>‹Nr.›</a:t>
             </a:fld>
             <a:endParaRPr lang="en-GB"/>
           </a:p>
@@ -6904,7 +6851,7 @@
           <a:p>
             <a:fld id="{8E09F03E-0454-4873-96B1-F60F4F6155FC}" type="slidenum">
               <a:rPr lang="en-GB" smtClean="0"/>
-              <a:t>‹#›</a:t>
+              <a:t>‹Nr.›</a:t>
             </a:fld>
             <a:endParaRPr lang="en-GB"/>
           </a:p>
@@ -7162,7 +7109,7 @@
           <a:p>
             <a:fld id="{8E09F03E-0454-4873-96B1-F60F4F6155FC}" type="slidenum">
               <a:rPr lang="en-GB" smtClean="0"/>
-              <a:t>‹#›</a:t>
+              <a:t>‹Nr.›</a:t>
             </a:fld>
             <a:endParaRPr lang="en-GB"/>
           </a:p>
@@ -7813,13 +7760,6 @@
   <p:clrMapOvr>
     <a:masterClrMapping/>
   </p:clrMapOvr>
-  <p:timing>
-    <p:tnLst>
-      <p:par>
-        <p:cTn id="1" dur="indefinite" restart="never" nodeType="tmRoot"/>
-      </p:par>
-    </p:tnLst>
-  </p:timing>
 </p:sld>
 </file>
 
@@ -11702,106 +11642,6 @@
           </a:p>
         </p:txBody>
       </p:sp>
-      <p:sp>
-        <p:nvSpPr>
-          <p:cNvPr id="2" name="Rounded Rectangle 8">
-            <a:extLst>
-              <a:ext uri="{FF2B5EF4-FFF2-40B4-BE49-F238E27FC236}">
-                <a16:creationId xmlns:a16="http://schemas.microsoft.com/office/drawing/2014/main" id="{E4DA88D5-3355-65A7-49E6-A8851A2ADA16}"/>
-              </a:ext>
-            </a:extLst>
-          </p:cNvPr>
-          <p:cNvSpPr/>
-          <p:nvPr/>
-        </p:nvSpPr>
-        <p:spPr>
-          <a:xfrm>
-            <a:off x="7262949" y="2857521"/>
-            <a:ext cx="2915195" cy="1516561"/>
-          </a:xfrm>
-          <a:prstGeom prst="roundRect">
-            <a:avLst>
-              <a:gd name="adj" fmla="val 37941"/>
-            </a:avLst>
-          </a:prstGeom>
-          <a:solidFill>
-            <a:srgbClr val="FFFDF7"/>
-          </a:solidFill>
-          <a:ln w="76200">
-            <a:solidFill>
-              <a:schemeClr val="accent4">
-                <a:lumMod val="20000"/>
-                <a:lumOff val="80000"/>
-              </a:schemeClr>
-            </a:solidFill>
-          </a:ln>
-        </p:spPr>
-        <p:style>
-          <a:lnRef idx="2">
-            <a:schemeClr val="accent1">
-              <a:shade val="50000"/>
-            </a:schemeClr>
-          </a:lnRef>
-          <a:fillRef idx="1">
-            <a:schemeClr val="accent1"/>
-          </a:fillRef>
-          <a:effectRef idx="0">
-            <a:schemeClr val="accent1"/>
-          </a:effectRef>
-          <a:fontRef idx="minor">
-            <a:schemeClr val="lt1"/>
-          </a:fontRef>
-        </p:style>
-        <p:txBody>
-          <a:bodyPr rtlCol="0" anchor="ctr"/>
-          <a:lstStyle/>
-          <a:p>
-            <a:pPr algn="ctr"/>
-            <a:r>
-              <a:rPr lang="de-DE" sz="3200" b="1" dirty="0">
-                <a:solidFill>
-                  <a:schemeClr val="tx1"/>
-                </a:solidFill>
-                <a:latin typeface="Bahnschrift" panose="020B0502040204020203" pitchFamily="34" charset="0"/>
-              </a:rPr>
-              <a:t>check </a:t>
-            </a:r>
-            <a:r>
-              <a:rPr lang="de-DE" sz="3200" b="1" dirty="0" err="1">
-                <a:solidFill>
-                  <a:schemeClr val="tx1"/>
-                </a:solidFill>
-                <a:latin typeface="Bahnschrift" panose="020B0502040204020203" pitchFamily="34" charset="0"/>
-              </a:rPr>
-              <a:t>these</a:t>
-            </a:r>
-            <a:r>
-              <a:rPr lang="de-DE" sz="3200" b="1" dirty="0">
-                <a:solidFill>
-                  <a:schemeClr val="tx1"/>
-                </a:solidFill>
-                <a:latin typeface="Bahnschrift" panose="020B0502040204020203" pitchFamily="34" charset="0"/>
-              </a:rPr>
-              <a:t> </a:t>
-            </a:r>
-            <a:r>
-              <a:rPr lang="de-DE" sz="3200" b="1" dirty="0" err="1">
-                <a:solidFill>
-                  <a:schemeClr val="tx1"/>
-                </a:solidFill>
-                <a:latin typeface="Bahnschrift" panose="020B0502040204020203" pitchFamily="34" charset="0"/>
-              </a:rPr>
-              <a:t>values</a:t>
-            </a:r>
-            <a:endParaRPr lang="en-GB" sz="1200" b="1" dirty="0">
-              <a:solidFill>
-                <a:schemeClr val="tx1"/>
-              </a:solidFill>
-              <a:latin typeface="Bahnschrift" panose="020B0502040204020203" pitchFamily="34" charset="0"/>
-            </a:endParaRPr>
-          </a:p>
-        </p:txBody>
-      </p:sp>
     </p:spTree>
     <p:extLst>
       <p:ext uri="{BB962C8B-B14F-4D97-AF65-F5344CB8AC3E}">
@@ -12005,50 +11845,6 @@
                             </p:childTnLst>
                           </p:cTn>
                         </p:par>
-                        <p:par>
-                          <p:cTn id="20" fill="hold">
-                            <p:stCondLst>
-                              <p:cond delay="1000"/>
-                            </p:stCondLst>
-                            <p:childTnLst>
-                              <p:par>
-                                <p:cTn id="21" presetID="10" presetClass="entr" presetSubtype="0" fill="hold" grpId="0" nodeType="afterEffect">
-                                  <p:stCondLst>
-                                    <p:cond delay="0"/>
-                                  </p:stCondLst>
-                                  <p:childTnLst>
-                                    <p:set>
-                                      <p:cBhvr>
-                                        <p:cTn id="22" dur="1" fill="hold">
-                                          <p:stCondLst>
-                                            <p:cond delay="0"/>
-                                          </p:stCondLst>
-                                        </p:cTn>
-                                        <p:tgtEl>
-                                          <p:spTgt spid="2"/>
-                                        </p:tgtEl>
-                                        <p:attrNameLst>
-                                          <p:attrName>style.visibility</p:attrName>
-                                        </p:attrNameLst>
-                                      </p:cBhvr>
-                                      <p:to>
-                                        <p:strVal val="visible"/>
-                                      </p:to>
-                                    </p:set>
-                                    <p:animEffect transition="in" filter="fade">
-                                      <p:cBhvr>
-                                        <p:cTn id="23" dur="250"/>
-                                        <p:tgtEl>
-                                          <p:spTgt spid="2"/>
-                                        </p:tgtEl>
-                                      </p:cBhvr>
-                                    </p:animEffect>
-                                  </p:childTnLst>
-                                </p:cTn>
-                              </p:par>
-                            </p:childTnLst>
-                          </p:cTn>
-                        </p:par>
                       </p:childTnLst>
                     </p:cTn>
                   </p:par>
@@ -12077,7 +11873,6 @@
       <p:bldP spid="8" grpId="0" animBg="1"/>
       <p:bldP spid="9" grpId="0" animBg="1"/>
       <p:bldP spid="10" grpId="0" animBg="1"/>
-      <p:bldP spid="2" grpId="0" animBg="1"/>
     </p:bldLst>
   </p:timing>
 </p:sld>
@@ -13768,79 +13563,6 @@
           </a:p>
         </p:txBody>
       </p:sp>
-      <p:sp>
-        <p:nvSpPr>
-          <p:cNvPr id="4" name="Rounded Rectangle 8">
-            <a:extLst>
-              <a:ext uri="{FF2B5EF4-FFF2-40B4-BE49-F238E27FC236}">
-                <a16:creationId xmlns:a16="http://schemas.microsoft.com/office/drawing/2014/main" id="{E4DA88D5-3355-65A7-49E6-A8851A2ADA16}"/>
-              </a:ext>
-            </a:extLst>
-          </p:cNvPr>
-          <p:cNvSpPr/>
-          <p:nvPr/>
-        </p:nvSpPr>
-        <p:spPr>
-          <a:xfrm>
-            <a:off x="7262949" y="2857521"/>
-            <a:ext cx="2915195" cy="1516561"/>
-          </a:xfrm>
-          <a:prstGeom prst="roundRect">
-            <a:avLst>
-              <a:gd name="adj" fmla="val 37941"/>
-            </a:avLst>
-          </a:prstGeom>
-          <a:solidFill>
-            <a:srgbClr val="FFFDF7"/>
-          </a:solidFill>
-          <a:ln w="76200">
-            <a:solidFill>
-              <a:schemeClr val="accent4">
-                <a:lumMod val="20000"/>
-                <a:lumOff val="80000"/>
-              </a:schemeClr>
-            </a:solidFill>
-          </a:ln>
-        </p:spPr>
-        <p:style>
-          <a:lnRef idx="2">
-            <a:schemeClr val="accent1">
-              <a:shade val="50000"/>
-            </a:schemeClr>
-          </a:lnRef>
-          <a:fillRef idx="1">
-            <a:schemeClr val="accent1"/>
-          </a:fillRef>
-          <a:effectRef idx="0">
-            <a:schemeClr val="accent1"/>
-          </a:effectRef>
-          <a:fontRef idx="minor">
-            <a:schemeClr val="lt1"/>
-          </a:fontRef>
-        </p:style>
-        <p:txBody>
-          <a:bodyPr rtlCol="0" anchor="ctr"/>
-          <a:lstStyle/>
-          <a:p>
-            <a:pPr algn="ctr"/>
-            <a:r>
-              <a:rPr lang="de-DE" sz="3200" b="1" dirty="0" smtClean="0">
-                <a:solidFill>
-                  <a:schemeClr val="tx1"/>
-                </a:solidFill>
-                <a:latin typeface="Bahnschrift" panose="020B0502040204020203" pitchFamily="34" charset="0"/>
-              </a:rPr>
-              <a:t>More visual</a:t>
-            </a:r>
-            <a:endParaRPr lang="en-GB" sz="1200" b="1" dirty="0">
-              <a:solidFill>
-                <a:schemeClr val="tx1"/>
-              </a:solidFill>
-              <a:latin typeface="Bahnschrift" panose="020B0502040204020203" pitchFamily="34" charset="0"/>
-            </a:endParaRPr>
-          </a:p>
-        </p:txBody>
-      </p:sp>
     </p:spTree>
     <p:extLst>
       <p:ext uri="{BB962C8B-B14F-4D97-AF65-F5344CB8AC3E}">
@@ -14101,27 +13823,247 @@
                             </p:childTnLst>
                           </p:cTn>
                         </p:par>
+                      </p:childTnLst>
+                    </p:cTn>
+                  </p:par>
+                </p:childTnLst>
+              </p:cTn>
+              <p:prevCondLst>
+                <p:cond evt="onPrev" delay="0">
+                  <p:tgtEl>
+                    <p:sldTgt/>
+                  </p:tgtEl>
+                </p:cond>
+              </p:prevCondLst>
+              <p:nextCondLst>
+                <p:cond evt="onNext" delay="0">
+                  <p:tgtEl>
+                    <p:sldTgt/>
+                  </p:tgtEl>
+                </p:cond>
+              </p:nextCondLst>
+            </p:seq>
+          </p:childTnLst>
+        </p:cTn>
+      </p:par>
+    </p:tnLst>
+  </p:timing>
+</p:sld>
+</file>
+
+<file path=ppt/slides/slide14.xml><?xml version="1.0" encoding="utf-8"?>
+<p:sld xmlns:a="http://schemas.openxmlformats.org/drawingml/2006/main" xmlns:r="http://schemas.openxmlformats.org/officeDocument/2006/relationships" xmlns:p="http://schemas.openxmlformats.org/presentationml/2006/main">
+  <p:cSld>
+    <p:spTree>
+      <p:nvGrpSpPr>
+        <p:cNvPr id="1" name="">
+          <a:extLst>
+            <a:ext uri="{FF2B5EF4-FFF2-40B4-BE49-F238E27FC236}">
+              <a16:creationId xmlns:a16="http://schemas.microsoft.com/office/drawing/2014/main" id="{86A03681-9103-1C64-BEDA-9AAE26551CDA}"/>
+            </a:ext>
+          </a:extLst>
+        </p:cNvPr>
+        <p:cNvGrpSpPr/>
+        <p:nvPr/>
+      </p:nvGrpSpPr>
+      <p:grpSpPr>
+        <a:xfrm>
+          <a:off x="0" y="0"/>
+          <a:ext cx="0" cy="0"/>
+          <a:chOff x="0" y="0"/>
+          <a:chExt cx="0" cy="0"/>
+        </a:xfrm>
+      </p:grpSpPr>
+      <p:sp>
+        <p:nvSpPr>
+          <p:cNvPr id="2" name="Title 1">
+            <a:extLst>
+              <a:ext uri="{FF2B5EF4-FFF2-40B4-BE49-F238E27FC236}">
+                <a16:creationId xmlns:a16="http://schemas.microsoft.com/office/drawing/2014/main" id="{B74211EA-5299-2DA9-660D-8CD52CC7F83C}"/>
+              </a:ext>
+            </a:extLst>
+          </p:cNvPr>
+          <p:cNvSpPr>
+            <a:spLocks noGrp="1"/>
+          </p:cNvSpPr>
+          <p:nvPr>
+            <p:ph type="title"/>
+          </p:nvPr>
+        </p:nvSpPr>
+        <p:spPr/>
+        <p:txBody>
+          <a:bodyPr/>
+          <a:lstStyle/>
+          <a:p>
+            <a:r>
+              <a:rPr lang="de-DE" dirty="0"/>
+              <a:t>ZETA test for time-locked spiking	</a:t>
+            </a:r>
+            <a:endParaRPr lang="en-GB" dirty="0"/>
+          </a:p>
+        </p:txBody>
+      </p:sp>
+      <p:sp>
+        <p:nvSpPr>
+          <p:cNvPr id="3" name="Content Placeholder 2">
+            <a:extLst>
+              <a:ext uri="{FF2B5EF4-FFF2-40B4-BE49-F238E27FC236}">
+                <a16:creationId xmlns:a16="http://schemas.microsoft.com/office/drawing/2014/main" id="{D32B3DBF-E46D-4E0A-8E35-0FEBEF349DF8}"/>
+              </a:ext>
+            </a:extLst>
+          </p:cNvPr>
+          <p:cNvSpPr>
+            <a:spLocks noGrp="1"/>
+          </p:cNvSpPr>
+          <p:nvPr>
+            <p:ph idx="1"/>
+          </p:nvPr>
+        </p:nvSpPr>
+        <p:spPr/>
+        <p:txBody>
+          <a:bodyPr/>
+          <a:lstStyle/>
+          <a:p>
+            <a:pPr marL="514350" indent="-514350">
+              <a:buFont typeface="+mj-lt"/>
+              <a:buAutoNum type="arabicPeriod"/>
+            </a:pPr>
+            <a:r>
+              <a:rPr lang="en-GB" dirty="0"/>
+              <a:t>Pool spike times relative to the event across all trials.</a:t>
+            </a:r>
+          </a:p>
+          <a:p>
+            <a:pPr marL="514350" indent="-514350">
+              <a:buFont typeface="+mj-lt"/>
+              <a:buAutoNum type="arabicPeriod"/>
+            </a:pPr>
+            <a:r>
+              <a:rPr lang="en-GB" dirty="0"/>
+              <a:t>Build their </a:t>
+            </a:r>
+            <a:r>
+              <a:rPr lang="en-GB" b="1" dirty="0"/>
+              <a:t>cumulative distribution</a:t>
+            </a:r>
+            <a:r>
+              <a:rPr lang="en-GB" dirty="0"/>
+              <a:t>.</a:t>
+            </a:r>
+          </a:p>
+          <a:p>
+            <a:pPr marL="514350" indent="-514350">
+              <a:buFont typeface="+mj-lt"/>
+              <a:buAutoNum type="arabicPeriod"/>
+            </a:pPr>
+            <a:r>
+              <a:rPr lang="en-GB" dirty="0"/>
+              <a:t>Compare to the flat line expected if spikes were </a:t>
+            </a:r>
+            <a:r>
+              <a:rPr lang="en-GB" b="1" dirty="0"/>
+              <a:t>uniformly</a:t>
+            </a:r>
+            <a:r>
+              <a:rPr lang="en-GB" dirty="0"/>
+              <a:t> spread (no time-locking).</a:t>
+            </a:r>
+          </a:p>
+          <a:p>
+            <a:pPr marL="514350" indent="-514350">
+              <a:buFont typeface="+mj-lt"/>
+              <a:buAutoNum type="arabicPeriod"/>
+            </a:pPr>
+            <a:r>
+              <a:rPr lang="en-GB" dirty="0"/>
+              <a:t>The </a:t>
+            </a:r>
+            <a:r>
+              <a:rPr lang="en-GB" b="1" dirty="0"/>
+              <a:t>largest deviation</a:t>
+            </a:r>
+            <a:r>
+              <a:rPr lang="en-GB" dirty="0"/>
+              <a:t> from that line is ZETA; its timing is the </a:t>
+            </a:r>
+            <a:r>
+              <a:rPr lang="en-GB" b="1" dirty="0"/>
+              <a:t>zenith</a:t>
+            </a:r>
+            <a:r>
+              <a:rPr lang="en-GB" dirty="0"/>
+              <a:t>.</a:t>
+            </a:r>
+          </a:p>
+          <a:p>
+            <a:pPr marL="514350" indent="-514350">
+              <a:buFont typeface="+mj-lt"/>
+              <a:buAutoNum type="arabicPeriod"/>
+            </a:pPr>
+            <a:r>
+              <a:rPr lang="en-GB" dirty="0"/>
+              <a:t>Significance from </a:t>
+            </a:r>
+            <a:r>
+              <a:rPr lang="en-GB" b="1" dirty="0"/>
+              <a:t>jittered</a:t>
+            </a:r>
+            <a:r>
+              <a:rPr lang="en-GB" dirty="0"/>
+              <a:t> resampling of event times.</a:t>
+            </a:r>
+          </a:p>
+        </p:txBody>
+      </p:sp>
+    </p:spTree>
+    <p:extLst>
+      <p:ext uri="{BB962C8B-B14F-4D97-AF65-F5344CB8AC3E}">
+        <p14:creationId xmlns:p14="http://schemas.microsoft.com/office/powerpoint/2010/main" val="2176750673"/>
+      </p:ext>
+    </p:extLst>
+  </p:cSld>
+  <p:clrMapOvr>
+    <a:masterClrMapping/>
+  </p:clrMapOvr>
+  <p:timing>
+    <p:tnLst>
+      <p:par>
+        <p:cTn id="1" dur="indefinite" restart="never" nodeType="tmRoot">
+          <p:childTnLst>
+            <p:seq concurrent="1" nextAc="seek">
+              <p:cTn id="2" dur="indefinite" nodeType="mainSeq">
+                <p:childTnLst>
+                  <p:par>
+                    <p:cTn id="3" fill="hold">
+                      <p:stCondLst>
+                        <p:cond delay="indefinite"/>
+                      </p:stCondLst>
+                      <p:childTnLst>
                         <p:par>
-                          <p:cTn id="23" fill="hold">
+                          <p:cTn id="4" fill="hold">
                             <p:stCondLst>
                               <p:cond delay="0"/>
                             </p:stCondLst>
                             <p:childTnLst>
                               <p:par>
-                                <p:cTn id="24" presetID="10" presetClass="entr" presetSubtype="0" fill="hold" grpId="0" nodeType="afterEffect">
+                                <p:cTn id="5" presetID="1" presetClass="entr" presetSubtype="0" fill="hold" nodeType="clickEffect">
                                   <p:stCondLst>
                                     <p:cond delay="0"/>
                                   </p:stCondLst>
                                   <p:childTnLst>
                                     <p:set>
                                       <p:cBhvr>
-                                        <p:cTn id="25" dur="1" fill="hold">
+                                        <p:cTn id="6" dur="1" fill="hold">
                                           <p:stCondLst>
                                             <p:cond delay="0"/>
                                           </p:stCondLst>
                                         </p:cTn>
                                         <p:tgtEl>
-                                          <p:spTgt spid="4"/>
+                                          <p:spTgt spid="3">
+                                            <p:txEl>
+                                              <p:pRg st="0" end="0"/>
+                                            </p:txEl>
+                                          </p:spTgt>
                                         </p:tgtEl>
                                         <p:attrNameLst>
                                           <p:attrName>style.visibility</p:attrName>
@@ -14131,14 +14073,202 @@
                                         <p:strVal val="visible"/>
                                       </p:to>
                                     </p:set>
-                                    <p:animEffect transition="in" filter="fade">
+                                  </p:childTnLst>
+                                </p:cTn>
+                              </p:par>
+                            </p:childTnLst>
+                          </p:cTn>
+                        </p:par>
+                      </p:childTnLst>
+                    </p:cTn>
+                  </p:par>
+                  <p:par>
+                    <p:cTn id="7" fill="hold">
+                      <p:stCondLst>
+                        <p:cond delay="indefinite"/>
+                      </p:stCondLst>
+                      <p:childTnLst>
+                        <p:par>
+                          <p:cTn id="8" fill="hold">
+                            <p:stCondLst>
+                              <p:cond delay="0"/>
+                            </p:stCondLst>
+                            <p:childTnLst>
+                              <p:par>
+                                <p:cTn id="9" presetID="1" presetClass="entr" presetSubtype="0" fill="hold" nodeType="clickEffect">
+                                  <p:stCondLst>
+                                    <p:cond delay="0"/>
+                                  </p:stCondLst>
+                                  <p:childTnLst>
+                                    <p:set>
                                       <p:cBhvr>
-                                        <p:cTn id="26" dur="250"/>
+                                        <p:cTn id="10" dur="1" fill="hold">
+                                          <p:stCondLst>
+                                            <p:cond delay="0"/>
+                                          </p:stCondLst>
+                                        </p:cTn>
                                         <p:tgtEl>
-                                          <p:spTgt spid="4"/>
+                                          <p:spTgt spid="3">
+                                            <p:txEl>
+                                              <p:pRg st="1" end="1"/>
+                                            </p:txEl>
+                                          </p:spTgt>
                                         </p:tgtEl>
+                                        <p:attrNameLst>
+                                          <p:attrName>style.visibility</p:attrName>
+                                        </p:attrNameLst>
                                       </p:cBhvr>
-                                    </p:animEffect>
+                                      <p:to>
+                                        <p:strVal val="visible"/>
+                                      </p:to>
+                                    </p:set>
+                                  </p:childTnLst>
+                                </p:cTn>
+                              </p:par>
+                            </p:childTnLst>
+                          </p:cTn>
+                        </p:par>
+                      </p:childTnLst>
+                    </p:cTn>
+                  </p:par>
+                  <p:par>
+                    <p:cTn id="11" fill="hold">
+                      <p:stCondLst>
+                        <p:cond delay="indefinite"/>
+                      </p:stCondLst>
+                      <p:childTnLst>
+                        <p:par>
+                          <p:cTn id="12" fill="hold">
+                            <p:stCondLst>
+                              <p:cond delay="0"/>
+                            </p:stCondLst>
+                            <p:childTnLst>
+                              <p:par>
+                                <p:cTn id="13" presetID="1" presetClass="entr" presetSubtype="0" fill="hold" nodeType="clickEffect">
+                                  <p:stCondLst>
+                                    <p:cond delay="0"/>
+                                  </p:stCondLst>
+                                  <p:childTnLst>
+                                    <p:set>
+                                      <p:cBhvr>
+                                        <p:cTn id="14" dur="1" fill="hold">
+                                          <p:stCondLst>
+                                            <p:cond delay="0"/>
+                                          </p:stCondLst>
+                                        </p:cTn>
+                                        <p:tgtEl>
+                                          <p:spTgt spid="3">
+                                            <p:txEl>
+                                              <p:pRg st="2" end="2"/>
+                                            </p:txEl>
+                                          </p:spTgt>
+                                        </p:tgtEl>
+                                        <p:attrNameLst>
+                                          <p:attrName>style.visibility</p:attrName>
+                                        </p:attrNameLst>
+                                      </p:cBhvr>
+                                      <p:to>
+                                        <p:strVal val="visible"/>
+                                      </p:to>
+                                    </p:set>
+                                  </p:childTnLst>
+                                </p:cTn>
+                              </p:par>
+                            </p:childTnLst>
+                          </p:cTn>
+                        </p:par>
+                      </p:childTnLst>
+                    </p:cTn>
+                  </p:par>
+                  <p:par>
+                    <p:cTn id="15" fill="hold">
+                      <p:stCondLst>
+                        <p:cond delay="indefinite"/>
+                      </p:stCondLst>
+                      <p:childTnLst>
+                        <p:par>
+                          <p:cTn id="16" fill="hold">
+                            <p:stCondLst>
+                              <p:cond delay="0"/>
+                            </p:stCondLst>
+                            <p:childTnLst>
+                              <p:par>
+                                <p:cTn id="17" presetID="1" presetClass="entr" presetSubtype="0" fill="hold" nodeType="clickEffect">
+                                  <p:stCondLst>
+                                    <p:cond delay="0"/>
+                                  </p:stCondLst>
+                                  <p:childTnLst>
+                                    <p:set>
+                                      <p:cBhvr>
+                                        <p:cTn id="18" dur="1" fill="hold">
+                                          <p:stCondLst>
+                                            <p:cond delay="0"/>
+                                          </p:stCondLst>
+                                        </p:cTn>
+                                        <p:tgtEl>
+                                          <p:spTgt spid="3">
+                                            <p:txEl>
+                                              <p:pRg st="3" end="3"/>
+                                            </p:txEl>
+                                          </p:spTgt>
+                                        </p:tgtEl>
+                                        <p:attrNameLst>
+                                          <p:attrName>style.visibility</p:attrName>
+                                        </p:attrNameLst>
+                                      </p:cBhvr>
+                                      <p:to>
+                                        <p:strVal val="visible"/>
+                                      </p:to>
+                                    </p:set>
+                                  </p:childTnLst>
+                                </p:cTn>
+                              </p:par>
+                            </p:childTnLst>
+                          </p:cTn>
+                        </p:par>
+                      </p:childTnLst>
+                    </p:cTn>
+                  </p:par>
+                  <p:par>
+                    <p:cTn id="19" fill="hold">
+                      <p:stCondLst>
+                        <p:cond delay="indefinite"/>
+                      </p:stCondLst>
+                      <p:childTnLst>
+                        <p:par>
+                          <p:cTn id="20" fill="hold">
+                            <p:stCondLst>
+                              <p:cond delay="0"/>
+                            </p:stCondLst>
+                            <p:childTnLst>
+                              <p:par>
+                                <p:cTn id="21" presetID="1" presetClass="entr" presetSubtype="0" fill="hold" nodeType="clickEffect">
+                                  <p:stCondLst>
+                                    <p:cond delay="0"/>
+                                  </p:stCondLst>
+                                  <p:childTnLst>
+                                    <p:set>
+                                      <p:cBhvr>
+                                        <p:cTn id="22" dur="1" fill="hold">
+                                          <p:stCondLst>
+                                            <p:cond delay="0"/>
+                                          </p:stCondLst>
+                                        </p:cTn>
+                                        <p:tgtEl>
+                                          <p:spTgt spid="3">
+                                            <p:txEl>
+                                              <p:pRg st="4" end="4"/>
+                                            </p:txEl>
+                                          </p:spTgt>
+                                        </p:tgtEl>
+                                        <p:attrNameLst>
+                                          <p:attrName>style.visibility</p:attrName>
+                                        </p:attrNameLst>
+                                      </p:cBhvr>
+                                      <p:to>
+                                        <p:strVal val="visible"/>
+                                      </p:to>
+                                    </p:set>
                                   </p:childTnLst>
                                 </p:cTn>
                               </p:par>
@@ -14169,14 +14299,11 @@
         </p:cTn>
       </p:par>
     </p:tnLst>
-    <p:bldLst>
-      <p:bldP spid="4" grpId="0" animBg="1"/>
-    </p:bldLst>
   </p:timing>
 </p:sld>
 </file>
 
-<file path=ppt/slides/slide14.xml><?xml version="1.0" encoding="utf-8"?>
+<file path=ppt/slides/slide15.xml><?xml version="1.0" encoding="utf-8"?>
 <p:sld xmlns:a="http://schemas.openxmlformats.org/drawingml/2006/main" xmlns:r="http://schemas.openxmlformats.org/officeDocument/2006/relationships" xmlns:p="http://schemas.openxmlformats.org/presentationml/2006/main">
   <p:cSld>
     <p:bg>
@@ -14272,10 +14399,1216 @@
           </a:p>
         </p:txBody>
       </p:sp>
+      <p:sp>
+        <p:nvSpPr>
+          <p:cNvPr id="11" name="Content Placeholder 2">
+            <a:extLst>
+              <a:ext uri="{FF2B5EF4-FFF2-40B4-BE49-F238E27FC236}">
+                <a16:creationId xmlns:a16="http://schemas.microsoft.com/office/drawing/2014/main" id="{CF948D53-7C64-9B33-FFF6-96E0F3840352}"/>
+              </a:ext>
+            </a:extLst>
+          </p:cNvPr>
+          <p:cNvSpPr>
+            <a:spLocks noGrp="1"/>
+          </p:cNvSpPr>
+          <p:nvPr>
+            <p:ph idx="1"/>
+          </p:nvPr>
+        </p:nvSpPr>
+        <p:spPr>
+          <a:xfrm>
+            <a:off x="838200" y="1825625"/>
+            <a:ext cx="10515600" cy="625951"/>
+          </a:xfrm>
+        </p:spPr>
+        <p:txBody>
+          <a:bodyPr/>
+          <a:lstStyle/>
+          <a:p>
+            <a:pPr marL="514350" indent="-514350">
+              <a:buFont typeface="+mj-lt"/>
+              <a:buAutoNum type="arabicPeriod"/>
+            </a:pPr>
+            <a:r>
+              <a:rPr lang="en-GB" dirty="0"/>
+              <a:t>Pool spike times relative to the event across all trials.</a:t>
+            </a:r>
+          </a:p>
+        </p:txBody>
+      </p:sp>
+      <p:grpSp>
+        <p:nvGrpSpPr>
+          <p:cNvPr id="16" name="Gruppieren 15">
+            <a:extLst>
+              <a:ext uri="{FF2B5EF4-FFF2-40B4-BE49-F238E27FC236}">
+                <a16:creationId xmlns:a16="http://schemas.microsoft.com/office/drawing/2014/main" id="{D23A08A0-8F84-A557-CDDE-8DFC56628F75}"/>
+              </a:ext>
+            </a:extLst>
+          </p:cNvPr>
+          <p:cNvGrpSpPr/>
+          <p:nvPr/>
+        </p:nvGrpSpPr>
+        <p:grpSpPr>
+          <a:xfrm>
+            <a:off x="2156006" y="2680584"/>
+            <a:ext cx="6951580" cy="2672466"/>
+            <a:chOff x="2156006" y="2680584"/>
+            <a:chExt cx="6951580" cy="2672466"/>
+          </a:xfrm>
+        </p:grpSpPr>
+        <p:pic>
+          <p:nvPicPr>
+            <p:cNvPr id="10" name="Grafik 9">
+              <a:extLst>
+                <a:ext uri="{FF2B5EF4-FFF2-40B4-BE49-F238E27FC236}">
+                  <a16:creationId xmlns:a16="http://schemas.microsoft.com/office/drawing/2014/main" id="{1093F723-27A6-4F33-C588-6F79F8F05305}"/>
+                </a:ext>
+              </a:extLst>
+            </p:cNvPr>
+            <p:cNvPicPr>
+              <a:picLocks noChangeAspect="1"/>
+            </p:cNvPicPr>
+            <p:nvPr/>
+          </p:nvPicPr>
+          <p:blipFill>
+            <a:blip r:embed="rId2"/>
+            <a:stretch>
+              <a:fillRect/>
+            </a:stretch>
+          </p:blipFill>
+          <p:spPr>
+            <a:xfrm>
+              <a:off x="2206747" y="3993208"/>
+              <a:ext cx="6854749" cy="1256983"/>
+            </a:xfrm>
+            <a:prstGeom prst="rect">
+              <a:avLst/>
+            </a:prstGeom>
+          </p:spPr>
+        </p:pic>
+        <p:pic>
+          <p:nvPicPr>
+            <p:cNvPr id="8" name="Grafik 7">
+              <a:extLst>
+                <a:ext uri="{FF2B5EF4-FFF2-40B4-BE49-F238E27FC236}">
+                  <a16:creationId xmlns:a16="http://schemas.microsoft.com/office/drawing/2014/main" id="{0ABDF2E8-3384-EF43-498B-ED28DC838870}"/>
+                </a:ext>
+              </a:extLst>
+            </p:cNvPr>
+            <p:cNvPicPr>
+              <a:picLocks noChangeAspect="1"/>
+            </p:cNvPicPr>
+            <p:nvPr/>
+          </p:nvPicPr>
+          <p:blipFill>
+            <a:blip r:embed="rId3"/>
+            <a:stretch>
+              <a:fillRect/>
+            </a:stretch>
+          </p:blipFill>
+          <p:spPr>
+            <a:xfrm>
+              <a:off x="2156006" y="3364717"/>
+              <a:ext cx="6888269" cy="1256983"/>
+            </a:xfrm>
+            <a:prstGeom prst="rect">
+              <a:avLst/>
+            </a:prstGeom>
+          </p:spPr>
+        </p:pic>
+        <p:pic>
+          <p:nvPicPr>
+            <p:cNvPr id="4" name="Grafik 3">
+              <a:extLst>
+                <a:ext uri="{FF2B5EF4-FFF2-40B4-BE49-F238E27FC236}">
+                  <a16:creationId xmlns:a16="http://schemas.microsoft.com/office/drawing/2014/main" id="{F3F9BC3E-2534-CB5C-D00B-2D5F1C6DB521}"/>
+                </a:ext>
+              </a:extLst>
+            </p:cNvPr>
+            <p:cNvPicPr>
+              <a:picLocks noChangeAspect="1"/>
+            </p:cNvPicPr>
+            <p:nvPr/>
+          </p:nvPicPr>
+          <p:blipFill>
+            <a:blip r:embed="rId4"/>
+            <a:srcRect t="35710"/>
+            <a:stretch>
+              <a:fillRect/>
+            </a:stretch>
+          </p:blipFill>
+          <p:spPr>
+            <a:xfrm>
+              <a:off x="2160658" y="3152775"/>
+              <a:ext cx="6946928" cy="840434"/>
+            </a:xfrm>
+            <a:prstGeom prst="rect">
+              <a:avLst/>
+            </a:prstGeom>
+          </p:spPr>
+        </p:pic>
+        <p:sp>
+          <p:nvSpPr>
+            <p:cNvPr id="14" name="Textfeld 13">
+              <a:extLst>
+                <a:ext uri="{FF2B5EF4-FFF2-40B4-BE49-F238E27FC236}">
+                  <a16:creationId xmlns:a16="http://schemas.microsoft.com/office/drawing/2014/main" id="{F65891DC-C378-AABC-C6B3-EBBD546981F0}"/>
+                </a:ext>
+              </a:extLst>
+            </p:cNvPr>
+            <p:cNvSpPr txBox="1"/>
+            <p:nvPr/>
+          </p:nvSpPr>
+          <p:spPr>
+            <a:xfrm>
+              <a:off x="2371629" y="2680584"/>
+              <a:ext cx="971741" cy="369332"/>
+            </a:xfrm>
+            <a:prstGeom prst="rect">
+              <a:avLst/>
+            </a:prstGeom>
+            <a:noFill/>
+          </p:spPr>
+          <p:txBody>
+            <a:bodyPr wrap="none" rtlCol="0">
+              <a:spAutoFit/>
+            </a:bodyPr>
+            <a:lstStyle/>
+            <a:p>
+              <a:r>
+                <a:rPr lang="de-AT" dirty="0" err="1">
+                  <a:latin typeface="Bahnschrift" panose="020B0502040204020203" pitchFamily="34" charset="0"/>
+                </a:rPr>
+                <a:t>Reward</a:t>
+              </a:r>
+              <a:endParaRPr lang="en-US" dirty="0">
+                <a:latin typeface="Bahnschrift" panose="020B0502040204020203" pitchFamily="34" charset="0"/>
+              </a:endParaRPr>
+            </a:p>
+          </p:txBody>
+        </p:sp>
+        <p:cxnSp>
+          <p:nvCxnSpPr>
+            <p:cNvPr id="13" name="Gerader Verbinder 12">
+              <a:extLst>
+                <a:ext uri="{FF2B5EF4-FFF2-40B4-BE49-F238E27FC236}">
+                  <a16:creationId xmlns:a16="http://schemas.microsoft.com/office/drawing/2014/main" id="{1334CB19-8F2E-A999-8483-22B118CC27F9}"/>
+                </a:ext>
+              </a:extLst>
+            </p:cNvPr>
+            <p:cNvCxnSpPr/>
+            <p:nvPr/>
+          </p:nvCxnSpPr>
+          <p:spPr>
+            <a:xfrm flipV="1">
+              <a:off x="2857500" y="2971800"/>
+              <a:ext cx="0" cy="2381250"/>
+            </a:xfrm>
+            <a:prstGeom prst="line">
+              <a:avLst/>
+            </a:prstGeom>
+            <a:ln w="38100">
+              <a:solidFill>
+                <a:srgbClr val="FF0000"/>
+              </a:solidFill>
+              <a:prstDash val="dash"/>
+            </a:ln>
+          </p:spPr>
+          <p:style>
+            <a:lnRef idx="1">
+              <a:schemeClr val="accent1"/>
+            </a:lnRef>
+            <a:fillRef idx="0">
+              <a:schemeClr val="accent1"/>
+            </a:fillRef>
+            <a:effectRef idx="0">
+              <a:schemeClr val="accent1"/>
+            </a:effectRef>
+            <a:fontRef idx="minor">
+              <a:schemeClr val="tx1"/>
+            </a:fontRef>
+          </p:style>
+        </p:cxnSp>
+      </p:grpSp>
+    </p:spTree>
+    <p:extLst>
+      <p:ext uri="{BB962C8B-B14F-4D97-AF65-F5344CB8AC3E}">
+        <p14:creationId xmlns:p14="http://schemas.microsoft.com/office/powerpoint/2010/main" val="2588401569"/>
+      </p:ext>
+    </p:extLst>
+  </p:cSld>
+  <p:clrMapOvr>
+    <a:masterClrMapping/>
+  </p:clrMapOvr>
+  <p:timing>
+    <p:tnLst>
+      <p:par>
+        <p:cTn id="1" dur="indefinite" restart="never" nodeType="tmRoot">
+          <p:childTnLst>
+            <p:seq concurrent="1" nextAc="seek">
+              <p:cTn id="2" dur="indefinite" nodeType="mainSeq">
+                <p:childTnLst>
+                  <p:par>
+                    <p:cTn id="3" fill="hold">
+                      <p:stCondLst>
+                        <p:cond delay="indefinite"/>
+                      </p:stCondLst>
+                      <p:childTnLst>
+                        <p:par>
+                          <p:cTn id="4" fill="hold">
+                            <p:stCondLst>
+                              <p:cond delay="0"/>
+                            </p:stCondLst>
+                            <p:childTnLst>
+                              <p:par>
+                                <p:cTn id="5" presetID="1" presetClass="entr" presetSubtype="0" fill="hold" nodeType="clickEffect">
+                                  <p:stCondLst>
+                                    <p:cond delay="0"/>
+                                  </p:stCondLst>
+                                  <p:childTnLst>
+                                    <p:set>
+                                      <p:cBhvr>
+                                        <p:cTn id="6" dur="1" fill="hold">
+                                          <p:stCondLst>
+                                            <p:cond delay="0"/>
+                                          </p:stCondLst>
+                                        </p:cTn>
+                                        <p:tgtEl>
+                                          <p:spTgt spid="11">
+                                            <p:txEl>
+                                              <p:pRg st="0" end="0"/>
+                                            </p:txEl>
+                                          </p:spTgt>
+                                        </p:tgtEl>
+                                        <p:attrNameLst>
+                                          <p:attrName>style.visibility</p:attrName>
+                                        </p:attrNameLst>
+                                      </p:cBhvr>
+                                      <p:to>
+                                        <p:strVal val="visible"/>
+                                      </p:to>
+                                    </p:set>
+                                  </p:childTnLst>
+                                </p:cTn>
+                              </p:par>
+                            </p:childTnLst>
+                          </p:cTn>
+                        </p:par>
+                      </p:childTnLst>
+                    </p:cTn>
+                  </p:par>
+                  <p:par>
+                    <p:cTn id="7" fill="hold">
+                      <p:stCondLst>
+                        <p:cond delay="indefinite"/>
+                      </p:stCondLst>
+                      <p:childTnLst>
+                        <p:par>
+                          <p:cTn id="8" fill="hold">
+                            <p:stCondLst>
+                              <p:cond delay="0"/>
+                            </p:stCondLst>
+                            <p:childTnLst>
+                              <p:par>
+                                <p:cTn id="9" presetID="1" presetClass="entr" presetSubtype="0" fill="hold" nodeType="clickEffect">
+                                  <p:stCondLst>
+                                    <p:cond delay="0"/>
+                                  </p:stCondLst>
+                                  <p:childTnLst>
+                                    <p:set>
+                                      <p:cBhvr>
+                                        <p:cTn id="10" dur="1" fill="hold">
+                                          <p:stCondLst>
+                                            <p:cond delay="0"/>
+                                          </p:stCondLst>
+                                        </p:cTn>
+                                        <p:tgtEl>
+                                          <p:spTgt spid="16"/>
+                                        </p:tgtEl>
+                                        <p:attrNameLst>
+                                          <p:attrName>style.visibility</p:attrName>
+                                        </p:attrNameLst>
+                                      </p:cBhvr>
+                                      <p:to>
+                                        <p:strVal val="visible"/>
+                                      </p:to>
+                                    </p:set>
+                                  </p:childTnLst>
+                                </p:cTn>
+                              </p:par>
+                            </p:childTnLst>
+                          </p:cTn>
+                        </p:par>
+                      </p:childTnLst>
+                    </p:cTn>
+                  </p:par>
+                </p:childTnLst>
+              </p:cTn>
+              <p:prevCondLst>
+                <p:cond evt="onPrev" delay="0">
+                  <p:tgtEl>
+                    <p:sldTgt/>
+                  </p:tgtEl>
+                </p:cond>
+              </p:prevCondLst>
+              <p:nextCondLst>
+                <p:cond evt="onNext" delay="0">
+                  <p:tgtEl>
+                    <p:sldTgt/>
+                  </p:tgtEl>
+                </p:cond>
+              </p:nextCondLst>
+            </p:seq>
+          </p:childTnLst>
+        </p:cTn>
+      </p:par>
+    </p:tnLst>
+  </p:timing>
+</p:sld>
+</file>
+
+<file path=ppt/slides/slide16.xml><?xml version="1.0" encoding="utf-8"?>
+<p:sld xmlns:a="http://schemas.openxmlformats.org/drawingml/2006/main" xmlns:r="http://schemas.openxmlformats.org/officeDocument/2006/relationships" xmlns:p="http://schemas.openxmlformats.org/presentationml/2006/main">
+  <p:cSld>
+    <p:bg>
+      <p:bgPr>
+        <a:solidFill>
+          <a:srgbClr val="F8FAFC"/>
+        </a:solidFill>
+        <a:effectLst/>
+      </p:bgPr>
+    </p:bg>
+    <p:spTree>
+      <p:nvGrpSpPr>
+        <p:cNvPr id="1" name="">
+          <a:extLst>
+            <a:ext uri="{FF2B5EF4-FFF2-40B4-BE49-F238E27FC236}">
+              <a16:creationId xmlns:a16="http://schemas.microsoft.com/office/drawing/2014/main" id="{29EB8796-5A82-D75D-95F8-A70535C573CE}"/>
+            </a:ext>
+          </a:extLst>
+        </p:cNvPr>
+        <p:cNvGrpSpPr/>
+        <p:nvPr/>
+      </p:nvGrpSpPr>
+      <p:grpSpPr>
+        <a:xfrm>
+          <a:off x="0" y="0"/>
+          <a:ext cx="0" cy="0"/>
+          <a:chOff x="0" y="0"/>
+          <a:chExt cx="0" cy="0"/>
+        </a:xfrm>
+      </p:grpSpPr>
+      <p:sp>
+        <p:nvSpPr>
+          <p:cNvPr id="5" name="Rectangle 4">
+            <a:extLst>
+              <a:ext uri="{FF2B5EF4-FFF2-40B4-BE49-F238E27FC236}">
+                <a16:creationId xmlns:a16="http://schemas.microsoft.com/office/drawing/2014/main" id="{E3E80B22-451A-F42B-50C9-C2F973E6C723}"/>
+              </a:ext>
+            </a:extLst>
+          </p:cNvPr>
+          <p:cNvSpPr/>
+          <p:nvPr/>
+        </p:nvSpPr>
+        <p:spPr>
+          <a:xfrm>
+            <a:off x="-278953" y="-395763"/>
+            <a:ext cx="12776548" cy="1803748"/>
+          </a:xfrm>
+          <a:prstGeom prst="rect">
+            <a:avLst/>
+          </a:prstGeom>
+          <a:solidFill>
+            <a:srgbClr val="CFF1E6"/>
+          </a:solidFill>
+          <a:ln w="76200">
+            <a:solidFill>
+              <a:srgbClr val="0CB87F"/>
+            </a:solidFill>
+          </a:ln>
+        </p:spPr>
+        <p:style>
+          <a:lnRef idx="2">
+            <a:schemeClr val="accent1">
+              <a:shade val="50000"/>
+            </a:schemeClr>
+          </a:lnRef>
+          <a:fillRef idx="1">
+            <a:schemeClr val="accent1"/>
+          </a:fillRef>
+          <a:effectRef idx="0">
+            <a:schemeClr val="accent1"/>
+          </a:effectRef>
+          <a:fontRef idx="minor">
+            <a:schemeClr val="lt1"/>
+          </a:fontRef>
+        </p:style>
+        <p:txBody>
+          <a:bodyPr rtlCol="0" anchor="ctr"/>
+          <a:lstStyle/>
+          <a:p>
+            <a:pPr algn="ctr"/>
+            <a:endParaRPr lang="en-GB" dirty="0"/>
+          </a:p>
+        </p:txBody>
+      </p:sp>
+      <p:sp>
+        <p:nvSpPr>
+          <p:cNvPr id="2" name="Title 1">
+            <a:extLst>
+              <a:ext uri="{FF2B5EF4-FFF2-40B4-BE49-F238E27FC236}">
+                <a16:creationId xmlns:a16="http://schemas.microsoft.com/office/drawing/2014/main" id="{32CD9750-63C5-0A18-B21A-F678BE3384BE}"/>
+              </a:ext>
+            </a:extLst>
+          </p:cNvPr>
+          <p:cNvSpPr>
+            <a:spLocks noGrp="1"/>
+          </p:cNvSpPr>
+          <p:nvPr>
+            <p:ph type="title"/>
+          </p:nvPr>
+        </p:nvSpPr>
+        <p:spPr/>
+        <p:txBody>
+          <a:bodyPr/>
+          <a:lstStyle/>
+          <a:p>
+            <a:r>
+              <a:rPr lang="de-DE" dirty="0"/>
+              <a:t>ZETA visualization</a:t>
+            </a:r>
+            <a:endParaRPr lang="en-GB" dirty="0"/>
+          </a:p>
+        </p:txBody>
+      </p:sp>
+      <p:pic>
+        <p:nvPicPr>
+          <p:cNvPr id="6" name="Grafik 5">
+            <a:extLst>
+              <a:ext uri="{FF2B5EF4-FFF2-40B4-BE49-F238E27FC236}">
+                <a16:creationId xmlns:a16="http://schemas.microsoft.com/office/drawing/2014/main" id="{3F3A1D3B-C5D5-D02B-3AD5-AB1FFA0E0F90}"/>
+              </a:ext>
+            </a:extLst>
+          </p:cNvPr>
+          <p:cNvPicPr>
+            <a:picLocks noChangeAspect="1"/>
+          </p:cNvPicPr>
+          <p:nvPr/>
+        </p:nvPicPr>
+        <p:blipFill>
+          <a:blip r:embed="rId2"/>
+          <a:stretch>
+            <a:fillRect/>
+          </a:stretch>
+        </p:blipFill>
+        <p:spPr>
+          <a:xfrm>
+            <a:off x="1608866" y="3265636"/>
+            <a:ext cx="8974267" cy="3227239"/>
+          </a:xfrm>
+          <a:prstGeom prst="rect">
+            <a:avLst/>
+          </a:prstGeom>
+        </p:spPr>
+      </p:pic>
+      <p:sp>
+        <p:nvSpPr>
+          <p:cNvPr id="8" name="Content Placeholder 2">
+            <a:extLst>
+              <a:ext uri="{FF2B5EF4-FFF2-40B4-BE49-F238E27FC236}">
+                <a16:creationId xmlns:a16="http://schemas.microsoft.com/office/drawing/2014/main" id="{FE9E657D-0773-4D6C-8402-7CADCD840996}"/>
+              </a:ext>
+            </a:extLst>
+          </p:cNvPr>
+          <p:cNvSpPr>
+            <a:spLocks noGrp="1"/>
+          </p:cNvSpPr>
+          <p:nvPr>
+            <p:ph idx="1"/>
+          </p:nvPr>
+        </p:nvSpPr>
+        <p:spPr>
+          <a:xfrm>
+            <a:off x="838200" y="1825625"/>
+            <a:ext cx="7543800" cy="4351338"/>
+          </a:xfrm>
+        </p:spPr>
+        <p:txBody>
+          <a:bodyPr/>
+          <a:lstStyle/>
+          <a:p>
+            <a:pPr marL="514350" indent="-514350">
+              <a:buFont typeface="+mj-lt"/>
+              <a:buAutoNum type="arabicPeriod" startAt="2"/>
+            </a:pPr>
+            <a:r>
+              <a:rPr lang="en-GB" dirty="0"/>
+              <a:t>Build their </a:t>
+            </a:r>
+            <a:r>
+              <a:rPr lang="en-GB" b="1" dirty="0"/>
+              <a:t>cumulative distribution</a:t>
+            </a:r>
+            <a:r>
+              <a:rPr lang="en-GB" dirty="0"/>
+              <a:t>.</a:t>
+            </a:r>
+          </a:p>
+          <a:p>
+            <a:pPr marL="514350" indent="-514350">
+              <a:buFont typeface="+mj-lt"/>
+              <a:buAutoNum type="arabicPeriod" startAt="2"/>
+            </a:pPr>
+            <a:r>
+              <a:rPr lang="en-GB" dirty="0"/>
+              <a:t>Compare to the flat line expected if spikes           were </a:t>
+            </a:r>
+            <a:r>
+              <a:rPr lang="en-GB" b="1" dirty="0"/>
+              <a:t>uniformly</a:t>
+            </a:r>
+            <a:r>
+              <a:rPr lang="en-GB" dirty="0"/>
+              <a:t> spread (no time-locking).</a:t>
+            </a:r>
+          </a:p>
+        </p:txBody>
+      </p:sp>
+    </p:spTree>
+    <p:extLst>
+      <p:ext uri="{BB962C8B-B14F-4D97-AF65-F5344CB8AC3E}">
+        <p14:creationId xmlns:p14="http://schemas.microsoft.com/office/powerpoint/2010/main" val="3270290433"/>
+      </p:ext>
+    </p:extLst>
+  </p:cSld>
+  <p:clrMapOvr>
+    <a:masterClrMapping/>
+  </p:clrMapOvr>
+  <p:timing>
+    <p:tnLst>
+      <p:par>
+        <p:cTn id="1" dur="indefinite" restart="never" nodeType="tmRoot">
+          <p:childTnLst>
+            <p:seq concurrent="1" nextAc="seek">
+              <p:cTn id="2" dur="indefinite" nodeType="mainSeq">
+                <p:childTnLst>
+                  <p:par>
+                    <p:cTn id="3" fill="hold">
+                      <p:stCondLst>
+                        <p:cond delay="indefinite"/>
+                      </p:stCondLst>
+                      <p:childTnLst>
+                        <p:par>
+                          <p:cTn id="4" fill="hold">
+                            <p:stCondLst>
+                              <p:cond delay="0"/>
+                            </p:stCondLst>
+                            <p:childTnLst>
+                              <p:par>
+                                <p:cTn id="5" presetID="1" presetClass="entr" presetSubtype="0" fill="hold" nodeType="clickEffect">
+                                  <p:stCondLst>
+                                    <p:cond delay="0"/>
+                                  </p:stCondLst>
+                                  <p:childTnLst>
+                                    <p:set>
+                                      <p:cBhvr>
+                                        <p:cTn id="6" dur="1" fill="hold">
+                                          <p:stCondLst>
+                                            <p:cond delay="0"/>
+                                          </p:stCondLst>
+                                        </p:cTn>
+                                        <p:tgtEl>
+                                          <p:spTgt spid="8">
+                                            <p:txEl>
+                                              <p:pRg st="0" end="0"/>
+                                            </p:txEl>
+                                          </p:spTgt>
+                                        </p:tgtEl>
+                                        <p:attrNameLst>
+                                          <p:attrName>style.visibility</p:attrName>
+                                        </p:attrNameLst>
+                                      </p:cBhvr>
+                                      <p:to>
+                                        <p:strVal val="visible"/>
+                                      </p:to>
+                                    </p:set>
+                                  </p:childTnLst>
+                                </p:cTn>
+                              </p:par>
+                            </p:childTnLst>
+                          </p:cTn>
+                        </p:par>
+                      </p:childTnLst>
+                    </p:cTn>
+                  </p:par>
+                  <p:par>
+                    <p:cTn id="7" fill="hold">
+                      <p:stCondLst>
+                        <p:cond delay="indefinite"/>
+                      </p:stCondLst>
+                      <p:childTnLst>
+                        <p:par>
+                          <p:cTn id="8" fill="hold">
+                            <p:stCondLst>
+                              <p:cond delay="0"/>
+                            </p:stCondLst>
+                            <p:childTnLst>
+                              <p:par>
+                                <p:cTn id="9" presetID="1" presetClass="entr" presetSubtype="0" fill="hold" nodeType="clickEffect">
+                                  <p:stCondLst>
+                                    <p:cond delay="0"/>
+                                  </p:stCondLst>
+                                  <p:childTnLst>
+                                    <p:set>
+                                      <p:cBhvr>
+                                        <p:cTn id="10" dur="1" fill="hold">
+                                          <p:stCondLst>
+                                            <p:cond delay="0"/>
+                                          </p:stCondLst>
+                                        </p:cTn>
+                                        <p:tgtEl>
+                                          <p:spTgt spid="8">
+                                            <p:txEl>
+                                              <p:pRg st="1" end="1"/>
+                                            </p:txEl>
+                                          </p:spTgt>
+                                        </p:tgtEl>
+                                        <p:attrNameLst>
+                                          <p:attrName>style.visibility</p:attrName>
+                                        </p:attrNameLst>
+                                      </p:cBhvr>
+                                      <p:to>
+                                        <p:strVal val="visible"/>
+                                      </p:to>
+                                    </p:set>
+                                  </p:childTnLst>
+                                </p:cTn>
+                              </p:par>
+                            </p:childTnLst>
+                          </p:cTn>
+                        </p:par>
+                      </p:childTnLst>
+                    </p:cTn>
+                  </p:par>
+                  <p:par>
+                    <p:cTn id="11" fill="hold">
+                      <p:stCondLst>
+                        <p:cond delay="indefinite"/>
+                      </p:stCondLst>
+                      <p:childTnLst>
+                        <p:par>
+                          <p:cTn id="12" fill="hold">
+                            <p:stCondLst>
+                              <p:cond delay="0"/>
+                            </p:stCondLst>
+                            <p:childTnLst>
+                              <p:par>
+                                <p:cTn id="13" presetID="1" presetClass="entr" presetSubtype="0" fill="hold" nodeType="clickEffect">
+                                  <p:stCondLst>
+                                    <p:cond delay="0"/>
+                                  </p:stCondLst>
+                                  <p:childTnLst>
+                                    <p:set>
+                                      <p:cBhvr>
+                                        <p:cTn id="14" dur="1" fill="hold">
+                                          <p:stCondLst>
+                                            <p:cond delay="0"/>
+                                          </p:stCondLst>
+                                        </p:cTn>
+                                        <p:tgtEl>
+                                          <p:spTgt spid="6"/>
+                                        </p:tgtEl>
+                                        <p:attrNameLst>
+                                          <p:attrName>style.visibility</p:attrName>
+                                        </p:attrNameLst>
+                                      </p:cBhvr>
+                                      <p:to>
+                                        <p:strVal val="visible"/>
+                                      </p:to>
+                                    </p:set>
+                                  </p:childTnLst>
+                                </p:cTn>
+                              </p:par>
+                            </p:childTnLst>
+                          </p:cTn>
+                        </p:par>
+                      </p:childTnLst>
+                    </p:cTn>
+                  </p:par>
+                </p:childTnLst>
+              </p:cTn>
+              <p:prevCondLst>
+                <p:cond evt="onPrev" delay="0">
+                  <p:tgtEl>
+                    <p:sldTgt/>
+                  </p:tgtEl>
+                </p:cond>
+              </p:prevCondLst>
+              <p:nextCondLst>
+                <p:cond evt="onNext" delay="0">
+                  <p:tgtEl>
+                    <p:sldTgt/>
+                  </p:tgtEl>
+                </p:cond>
+              </p:nextCondLst>
+            </p:seq>
+          </p:childTnLst>
+        </p:cTn>
+      </p:par>
+    </p:tnLst>
+  </p:timing>
+</p:sld>
+</file>
+
+<file path=ppt/slides/slide17.xml><?xml version="1.0" encoding="utf-8"?>
+<p:sld xmlns:a="http://schemas.openxmlformats.org/drawingml/2006/main" xmlns:r="http://schemas.openxmlformats.org/officeDocument/2006/relationships" xmlns:p="http://schemas.openxmlformats.org/presentationml/2006/main">
+  <p:cSld>
+    <p:bg>
+      <p:bgPr>
+        <a:solidFill>
+          <a:srgbClr val="F8FAFC"/>
+        </a:solidFill>
+        <a:effectLst/>
+      </p:bgPr>
+    </p:bg>
+    <p:spTree>
+      <p:nvGrpSpPr>
+        <p:cNvPr id="1" name="">
+          <a:extLst>
+            <a:ext uri="{FF2B5EF4-FFF2-40B4-BE49-F238E27FC236}">
+              <a16:creationId xmlns:a16="http://schemas.microsoft.com/office/drawing/2014/main" id="{140B3A81-F5F8-B094-F593-818CBE99F025}"/>
+            </a:ext>
+          </a:extLst>
+        </p:cNvPr>
+        <p:cNvGrpSpPr/>
+        <p:nvPr/>
+      </p:nvGrpSpPr>
+      <p:grpSpPr>
+        <a:xfrm>
+          <a:off x="0" y="0"/>
+          <a:ext cx="0" cy="0"/>
+          <a:chOff x="0" y="0"/>
+          <a:chExt cx="0" cy="0"/>
+        </a:xfrm>
+      </p:grpSpPr>
+      <p:sp>
+        <p:nvSpPr>
+          <p:cNvPr id="5" name="Rectangle 4">
+            <a:extLst>
+              <a:ext uri="{FF2B5EF4-FFF2-40B4-BE49-F238E27FC236}">
+                <a16:creationId xmlns:a16="http://schemas.microsoft.com/office/drawing/2014/main" id="{40ED12E6-410B-7FA9-024E-B85CA31079FD}"/>
+              </a:ext>
+            </a:extLst>
+          </p:cNvPr>
+          <p:cNvSpPr/>
+          <p:nvPr/>
+        </p:nvSpPr>
+        <p:spPr>
+          <a:xfrm>
+            <a:off x="-278953" y="-395763"/>
+            <a:ext cx="12776548" cy="1803748"/>
+          </a:xfrm>
+          <a:prstGeom prst="rect">
+            <a:avLst/>
+          </a:prstGeom>
+          <a:solidFill>
+            <a:srgbClr val="CFF1E6"/>
+          </a:solidFill>
+          <a:ln w="76200">
+            <a:solidFill>
+              <a:srgbClr val="0CB87F"/>
+            </a:solidFill>
+          </a:ln>
+        </p:spPr>
+        <p:style>
+          <a:lnRef idx="2">
+            <a:schemeClr val="accent1">
+              <a:shade val="50000"/>
+            </a:schemeClr>
+          </a:lnRef>
+          <a:fillRef idx="1">
+            <a:schemeClr val="accent1"/>
+          </a:fillRef>
+          <a:effectRef idx="0">
+            <a:schemeClr val="accent1"/>
+          </a:effectRef>
+          <a:fontRef idx="minor">
+            <a:schemeClr val="lt1"/>
+          </a:fontRef>
+        </p:style>
+        <p:txBody>
+          <a:bodyPr rtlCol="0" anchor="ctr"/>
+          <a:lstStyle/>
+          <a:p>
+            <a:pPr algn="ctr"/>
+            <a:endParaRPr lang="en-GB" dirty="0"/>
+          </a:p>
+        </p:txBody>
+      </p:sp>
+      <p:sp>
+        <p:nvSpPr>
+          <p:cNvPr id="2" name="Title 1">
+            <a:extLst>
+              <a:ext uri="{FF2B5EF4-FFF2-40B4-BE49-F238E27FC236}">
+                <a16:creationId xmlns:a16="http://schemas.microsoft.com/office/drawing/2014/main" id="{8734ED68-61CF-46B1-666F-96F8C3E53692}"/>
+              </a:ext>
+            </a:extLst>
+          </p:cNvPr>
+          <p:cNvSpPr>
+            <a:spLocks noGrp="1"/>
+          </p:cNvSpPr>
+          <p:nvPr>
+            <p:ph type="title"/>
+          </p:nvPr>
+        </p:nvSpPr>
+        <p:spPr/>
+        <p:txBody>
+          <a:bodyPr/>
+          <a:lstStyle/>
+          <a:p>
+            <a:r>
+              <a:rPr lang="de-DE" dirty="0"/>
+              <a:t>ZETA visualization</a:t>
+            </a:r>
+            <a:endParaRPr lang="en-GB" dirty="0"/>
+          </a:p>
+        </p:txBody>
+      </p:sp>
+      <p:sp>
+        <p:nvSpPr>
+          <p:cNvPr id="8" name="Content Placeholder 2">
+            <a:extLst>
+              <a:ext uri="{FF2B5EF4-FFF2-40B4-BE49-F238E27FC236}">
+                <a16:creationId xmlns:a16="http://schemas.microsoft.com/office/drawing/2014/main" id="{FA373045-A293-6B9C-D996-59D828F438E4}"/>
+              </a:ext>
+            </a:extLst>
+          </p:cNvPr>
+          <p:cNvSpPr>
+            <a:spLocks noGrp="1"/>
+          </p:cNvSpPr>
+          <p:nvPr>
+            <p:ph idx="1"/>
+          </p:nvPr>
+        </p:nvSpPr>
+        <p:spPr>
+          <a:xfrm>
+            <a:off x="838199" y="1825625"/>
+            <a:ext cx="9677401" cy="4351338"/>
+          </a:xfrm>
+        </p:spPr>
+        <p:txBody>
+          <a:bodyPr/>
+          <a:lstStyle/>
+          <a:p>
+            <a:pPr marL="514350" indent="-514350">
+              <a:buFont typeface="+mj-lt"/>
+              <a:buAutoNum type="arabicPeriod" startAt="4"/>
+            </a:pPr>
+            <a:r>
+              <a:rPr lang="en-GB" dirty="0"/>
+              <a:t>The </a:t>
+            </a:r>
+            <a:r>
+              <a:rPr lang="en-GB" b="1" dirty="0"/>
+              <a:t>largest deviation</a:t>
+            </a:r>
+            <a:r>
+              <a:rPr lang="en-GB" dirty="0"/>
+              <a:t> from that line is ZETA;  its timing is the </a:t>
+            </a:r>
+            <a:r>
+              <a:rPr lang="en-GB" b="1" dirty="0"/>
+              <a:t>zenith</a:t>
+            </a:r>
+            <a:r>
+              <a:rPr lang="en-GB" dirty="0"/>
+              <a:t>.</a:t>
+            </a:r>
+          </a:p>
+        </p:txBody>
+      </p:sp>
+      <p:pic>
+        <p:nvPicPr>
+          <p:cNvPr id="4" name="Grafik 3">
+            <a:extLst>
+              <a:ext uri="{FF2B5EF4-FFF2-40B4-BE49-F238E27FC236}">
+                <a16:creationId xmlns:a16="http://schemas.microsoft.com/office/drawing/2014/main" id="{3A31366A-1A19-878A-4C18-801AC6BC2312}"/>
+              </a:ext>
+            </a:extLst>
+          </p:cNvPr>
+          <p:cNvPicPr>
+            <a:picLocks noChangeAspect="1"/>
+          </p:cNvPicPr>
+          <p:nvPr/>
+        </p:nvPicPr>
+        <p:blipFill>
+          <a:blip r:embed="rId2"/>
+          <a:stretch>
+            <a:fillRect/>
+          </a:stretch>
+        </p:blipFill>
+        <p:spPr>
+          <a:xfrm>
+            <a:off x="507839" y="2828363"/>
+            <a:ext cx="11202963" cy="4029637"/>
+          </a:xfrm>
+          <a:prstGeom prst="rect">
+            <a:avLst/>
+          </a:prstGeom>
+        </p:spPr>
+      </p:pic>
+    </p:spTree>
+    <p:extLst>
+      <p:ext uri="{BB962C8B-B14F-4D97-AF65-F5344CB8AC3E}">
+        <p14:creationId xmlns:p14="http://schemas.microsoft.com/office/powerpoint/2010/main" val="1536814639"/>
+      </p:ext>
+    </p:extLst>
+  </p:cSld>
+  <p:clrMapOvr>
+    <a:masterClrMapping/>
+  </p:clrMapOvr>
+  <p:timing>
+    <p:tnLst>
+      <p:par>
+        <p:cTn id="1" dur="indefinite" restart="never" nodeType="tmRoot">
+          <p:childTnLst>
+            <p:seq concurrent="1" nextAc="seek">
+              <p:cTn id="2" dur="indefinite" nodeType="mainSeq">
+                <p:childTnLst>
+                  <p:par>
+                    <p:cTn id="3" fill="hold">
+                      <p:stCondLst>
+                        <p:cond delay="indefinite"/>
+                      </p:stCondLst>
+                      <p:childTnLst>
+                        <p:par>
+                          <p:cTn id="4" fill="hold">
+                            <p:stCondLst>
+                              <p:cond delay="0"/>
+                            </p:stCondLst>
+                            <p:childTnLst>
+                              <p:par>
+                                <p:cTn id="5" presetID="1" presetClass="entr" presetSubtype="0" fill="hold" nodeType="clickEffect">
+                                  <p:stCondLst>
+                                    <p:cond delay="0"/>
+                                  </p:stCondLst>
+                                  <p:childTnLst>
+                                    <p:set>
+                                      <p:cBhvr>
+                                        <p:cTn id="6" dur="1" fill="hold">
+                                          <p:stCondLst>
+                                            <p:cond delay="0"/>
+                                          </p:stCondLst>
+                                        </p:cTn>
+                                        <p:tgtEl>
+                                          <p:spTgt spid="8">
+                                            <p:txEl>
+                                              <p:pRg st="0" end="0"/>
+                                            </p:txEl>
+                                          </p:spTgt>
+                                        </p:tgtEl>
+                                        <p:attrNameLst>
+                                          <p:attrName>style.visibility</p:attrName>
+                                        </p:attrNameLst>
+                                      </p:cBhvr>
+                                      <p:to>
+                                        <p:strVal val="visible"/>
+                                      </p:to>
+                                    </p:set>
+                                  </p:childTnLst>
+                                </p:cTn>
+                              </p:par>
+                            </p:childTnLst>
+                          </p:cTn>
+                        </p:par>
+                      </p:childTnLst>
+                    </p:cTn>
+                  </p:par>
+                  <p:par>
+                    <p:cTn id="7" fill="hold">
+                      <p:stCondLst>
+                        <p:cond delay="indefinite"/>
+                      </p:stCondLst>
+                      <p:childTnLst>
+                        <p:par>
+                          <p:cTn id="8" fill="hold">
+                            <p:stCondLst>
+                              <p:cond delay="0"/>
+                            </p:stCondLst>
+                            <p:childTnLst>
+                              <p:par>
+                                <p:cTn id="9" presetID="1" presetClass="entr" presetSubtype="0" fill="hold" nodeType="clickEffect">
+                                  <p:stCondLst>
+                                    <p:cond delay="0"/>
+                                  </p:stCondLst>
+                                  <p:childTnLst>
+                                    <p:set>
+                                      <p:cBhvr>
+                                        <p:cTn id="10" dur="1" fill="hold">
+                                          <p:stCondLst>
+                                            <p:cond delay="0"/>
+                                          </p:stCondLst>
+                                        </p:cTn>
+                                        <p:tgtEl>
+                                          <p:spTgt spid="4"/>
+                                        </p:tgtEl>
+                                        <p:attrNameLst>
+                                          <p:attrName>style.visibility</p:attrName>
+                                        </p:attrNameLst>
+                                      </p:cBhvr>
+                                      <p:to>
+                                        <p:strVal val="visible"/>
+                                      </p:to>
+                                    </p:set>
+                                  </p:childTnLst>
+                                </p:cTn>
+                              </p:par>
+                            </p:childTnLst>
+                          </p:cTn>
+                        </p:par>
+                      </p:childTnLst>
+                    </p:cTn>
+                  </p:par>
+                </p:childTnLst>
+              </p:cTn>
+              <p:prevCondLst>
+                <p:cond evt="onPrev" delay="0">
+                  <p:tgtEl>
+                    <p:sldTgt/>
+                  </p:tgtEl>
+                </p:cond>
+              </p:prevCondLst>
+              <p:nextCondLst>
+                <p:cond evt="onNext" delay="0">
+                  <p:tgtEl>
+                    <p:sldTgt/>
+                  </p:tgtEl>
+                </p:cond>
+              </p:nextCondLst>
+            </p:seq>
+          </p:childTnLst>
+        </p:cTn>
+      </p:par>
+    </p:tnLst>
+  </p:timing>
+</p:sld>
+</file>
+
+<file path=ppt/slides/slide18.xml><?xml version="1.0" encoding="utf-8"?>
+<p:sld xmlns:a="http://schemas.openxmlformats.org/drawingml/2006/main" xmlns:r="http://schemas.openxmlformats.org/officeDocument/2006/relationships" xmlns:p="http://schemas.openxmlformats.org/presentationml/2006/main">
+  <p:cSld>
+    <p:spTree>
+      <p:nvGrpSpPr>
+        <p:cNvPr id="1" name="">
+          <a:extLst>
+            <a:ext uri="{FF2B5EF4-FFF2-40B4-BE49-F238E27FC236}">
+              <a16:creationId xmlns:a16="http://schemas.microsoft.com/office/drawing/2014/main" id="{F2ADC178-F996-3A5C-12DE-052C3BD4B6DA}"/>
+            </a:ext>
+          </a:extLst>
+        </p:cNvPr>
+        <p:cNvGrpSpPr/>
+        <p:nvPr/>
+      </p:nvGrpSpPr>
+      <p:grpSpPr>
+        <a:xfrm>
+          <a:off x="0" y="0"/>
+          <a:ext cx="0" cy="0"/>
+          <a:chOff x="0" y="0"/>
+          <a:chExt cx="0" cy="0"/>
+        </a:xfrm>
+      </p:grpSpPr>
+      <p:sp>
+        <p:nvSpPr>
+          <p:cNvPr id="5" name="Rectangle 4">
+            <a:extLst>
+              <a:ext uri="{FF2B5EF4-FFF2-40B4-BE49-F238E27FC236}">
+                <a16:creationId xmlns:a16="http://schemas.microsoft.com/office/drawing/2014/main" id="{AE8CE460-2BEE-6C49-037A-44C4ED309EAF}"/>
+              </a:ext>
+            </a:extLst>
+          </p:cNvPr>
+          <p:cNvSpPr/>
+          <p:nvPr/>
+        </p:nvSpPr>
+        <p:spPr>
+          <a:xfrm>
+            <a:off x="-278953" y="-395763"/>
+            <a:ext cx="12776548" cy="1803748"/>
+          </a:xfrm>
+          <a:prstGeom prst="rect">
+            <a:avLst/>
+          </a:prstGeom>
+          <a:solidFill>
+            <a:srgbClr val="CFF1E6"/>
+          </a:solidFill>
+          <a:ln w="76200">
+            <a:solidFill>
+              <a:srgbClr val="0CB87F"/>
+            </a:solidFill>
+          </a:ln>
+        </p:spPr>
+        <p:style>
+          <a:lnRef idx="2">
+            <a:schemeClr val="accent1">
+              <a:shade val="50000"/>
+            </a:schemeClr>
+          </a:lnRef>
+          <a:fillRef idx="1">
+            <a:schemeClr val="accent1"/>
+          </a:fillRef>
+          <a:effectRef idx="0">
+            <a:schemeClr val="accent1"/>
+          </a:effectRef>
+          <a:fontRef idx="minor">
+            <a:schemeClr val="lt1"/>
+          </a:fontRef>
+        </p:style>
+        <p:txBody>
+          <a:bodyPr rtlCol="0" anchor="ctr"/>
+          <a:lstStyle/>
+          <a:p>
+            <a:pPr algn="ctr"/>
+            <a:endParaRPr lang="en-GB" dirty="0"/>
+          </a:p>
+        </p:txBody>
+      </p:sp>
+      <p:sp>
+        <p:nvSpPr>
+          <p:cNvPr id="2" name="Title 1">
+            <a:extLst>
+              <a:ext uri="{FF2B5EF4-FFF2-40B4-BE49-F238E27FC236}">
+                <a16:creationId xmlns:a16="http://schemas.microsoft.com/office/drawing/2014/main" id="{D9B29714-81E7-A73E-BCC9-47601D218942}"/>
+              </a:ext>
+            </a:extLst>
+          </p:cNvPr>
+          <p:cNvSpPr>
+            <a:spLocks noGrp="1"/>
+          </p:cNvSpPr>
+          <p:nvPr>
+            <p:ph type="title"/>
+          </p:nvPr>
+        </p:nvSpPr>
+        <p:spPr/>
+        <p:txBody>
+          <a:bodyPr/>
+          <a:lstStyle/>
+          <a:p>
+            <a:r>
+              <a:rPr lang="de-DE" dirty="0"/>
+              <a:t>ZETA visualization</a:t>
+            </a:r>
+            <a:endParaRPr lang="en-GB" dirty="0"/>
+          </a:p>
+        </p:txBody>
+      </p:sp>
       <p:pic>
         <p:nvPicPr>
           <p:cNvPr id="7" name="Picture 6">
             <a:hlinkClick r:id="rId2" action="ppaction://hlinkfile"/>
+            <a:extLst>
+              <a:ext uri="{FF2B5EF4-FFF2-40B4-BE49-F238E27FC236}">
+                <a16:creationId xmlns:a16="http://schemas.microsoft.com/office/drawing/2014/main" id="{414C0054-2835-51F6-610C-9766FF98AEB3}"/>
+              </a:ext>
+            </a:extLst>
           </p:cNvPr>
           <p:cNvPicPr>
             <a:picLocks noChangeAspect="1"/>
@@ -14290,7 +15623,7 @@
         </p:blipFill>
         <p:spPr>
           <a:xfrm>
-            <a:off x="2149815" y="1765333"/>
+            <a:off x="2524125" y="1535113"/>
             <a:ext cx="7892370" cy="4957762"/>
           </a:xfrm>
           <a:prstGeom prst="rect">
@@ -14301,24 +15634,17 @@
     </p:spTree>
     <p:extLst>
       <p:ext uri="{BB962C8B-B14F-4D97-AF65-F5344CB8AC3E}">
-        <p14:creationId xmlns:p14="http://schemas.microsoft.com/office/powerpoint/2010/main" val="2588401569"/>
+        <p14:creationId xmlns:p14="http://schemas.microsoft.com/office/powerpoint/2010/main" val="2510512384"/>
       </p:ext>
     </p:extLst>
   </p:cSld>
   <p:clrMapOvr>
     <a:masterClrMapping/>
   </p:clrMapOvr>
-  <p:timing>
-    <p:tnLst>
-      <p:par>
-        <p:cTn id="1" dur="indefinite" restart="never" nodeType="tmRoot"/>
-      </p:par>
-    </p:tnLst>
-  </p:timing>
 </p:sld>
 </file>
 
-<file path=ppt/slides/slide15.xml><?xml version="1.0" encoding="utf-8"?>
+<file path=ppt/slides/slide19.xml><?xml version="1.0" encoding="utf-8"?>
 <p:sld xmlns:a="http://schemas.openxmlformats.org/drawingml/2006/main" xmlns:r="http://schemas.openxmlformats.org/officeDocument/2006/relationships" xmlns:p="http://schemas.openxmlformats.org/presentationml/2006/main">
   <p:cSld>
     <p:bg>
@@ -14343,36 +15669,6 @@
           <a:chExt cx="0" cy="0"/>
         </a:xfrm>
       </p:grpSpPr>
-      <p:pic>
-        <p:nvPicPr>
-          <p:cNvPr id="4" name="Picture 3"/>
-          <p:cNvPicPr>
-            <a:picLocks noChangeAspect="1"/>
-          </p:cNvPicPr>
-          <p:nvPr/>
-        </p:nvPicPr>
-        <p:blipFill>
-          <a:blip r:embed="rId2">
-            <a:extLst>
-              <a:ext uri="{28A0092B-C50C-407E-A947-70E740481C1C}">
-                <a14:useLocalDpi xmlns:a14="http://schemas.microsoft.com/office/drawing/2010/main" val="0"/>
-              </a:ext>
-            </a:extLst>
-          </a:blip>
-          <a:stretch>
-            <a:fillRect/>
-          </a:stretch>
-        </p:blipFill>
-        <p:spPr>
-          <a:xfrm>
-            <a:off x="1215614" y="1549101"/>
-            <a:ext cx="5529798" cy="5160480"/>
-          </a:xfrm>
-          <a:prstGeom prst="rect">
-            <a:avLst/>
-          </a:prstGeom>
-        </p:spPr>
-      </p:pic>
       <p:sp>
         <p:nvSpPr>
           <p:cNvPr id="8" name="Rectangle 7"/>
@@ -14457,7 +15753,7 @@
         </p:nvSpPr>
         <p:spPr>
           <a:xfrm>
-            <a:off x="6928693" y="2111742"/>
+            <a:off x="6938218" y="2282525"/>
             <a:ext cx="4887686" cy="4035197"/>
           </a:xfrm>
           <a:prstGeom prst="roundRect">
@@ -14620,6 +15916,95 @@
           </a:p>
         </p:txBody>
       </p:sp>
+      <p:sp>
+        <p:nvSpPr>
+          <p:cNvPr id="3" name="Textfeld 2">
+            <a:extLst>
+              <a:ext uri="{FF2B5EF4-FFF2-40B4-BE49-F238E27FC236}">
+                <a16:creationId xmlns:a16="http://schemas.microsoft.com/office/drawing/2014/main" id="{6D07EB95-11BC-4D3A-091B-40D375680245}"/>
+              </a:ext>
+            </a:extLst>
+          </p:cNvPr>
+          <p:cNvSpPr txBox="1"/>
+          <p:nvPr/>
+        </p:nvSpPr>
+        <p:spPr>
+          <a:xfrm>
+            <a:off x="1223963" y="1583645"/>
+            <a:ext cx="10515600" cy="523220"/>
+          </a:xfrm>
+          <a:prstGeom prst="rect">
+            <a:avLst/>
+          </a:prstGeom>
+          <a:noFill/>
+        </p:spPr>
+        <p:txBody>
+          <a:bodyPr wrap="square">
+            <a:spAutoFit/>
+          </a:bodyPr>
+          <a:lstStyle/>
+          <a:p>
+            <a:pPr marL="514350" indent="-514350">
+              <a:buFont typeface="+mj-lt"/>
+              <a:buAutoNum type="arabicPeriod" startAt="5"/>
+            </a:pPr>
+            <a:r>
+              <a:rPr lang="en-GB" sz="2800" dirty="0">
+                <a:latin typeface="Bahnschrift" panose="020B0502040204020203" pitchFamily="34" charset="0"/>
+              </a:rPr>
+              <a:t>Significance from </a:t>
+            </a:r>
+            <a:r>
+              <a:rPr lang="en-GB" sz="2800" b="1" dirty="0">
+                <a:latin typeface="Bahnschrift" panose="020B0502040204020203" pitchFamily="34" charset="0"/>
+              </a:rPr>
+              <a:t>jittered</a:t>
+            </a:r>
+            <a:r>
+              <a:rPr lang="en-GB" sz="2800" dirty="0">
+                <a:latin typeface="Bahnschrift" panose="020B0502040204020203" pitchFamily="34" charset="0"/>
+              </a:rPr>
+              <a:t> resampling of event times.</a:t>
+            </a:r>
+          </a:p>
+        </p:txBody>
+      </p:sp>
+      <p:pic>
+        <p:nvPicPr>
+          <p:cNvPr id="9" name="Grafik 8">
+            <a:extLst>
+              <a:ext uri="{FF2B5EF4-FFF2-40B4-BE49-F238E27FC236}">
+                <a16:creationId xmlns:a16="http://schemas.microsoft.com/office/drawing/2014/main" id="{BC5FD32B-3D30-B394-41D6-8122E2FA6540}"/>
+              </a:ext>
+            </a:extLst>
+          </p:cNvPr>
+          <p:cNvPicPr>
+            <a:picLocks noChangeAspect="1"/>
+          </p:cNvPicPr>
+          <p:nvPr/>
+        </p:nvPicPr>
+        <p:blipFill>
+          <a:blip r:embed="rId2">
+            <a:extLst>
+              <a:ext uri="{28A0092B-C50C-407E-A947-70E740481C1C}">
+                <a14:useLocalDpi xmlns:a14="http://schemas.microsoft.com/office/drawing/2010/main" val="0"/>
+              </a:ext>
+            </a:extLst>
+          </a:blip>
+          <a:stretch>
+            <a:fillRect/>
+          </a:stretch>
+        </p:blipFill>
+        <p:spPr>
+          <a:xfrm>
+            <a:off x="838200" y="2106865"/>
+            <a:ext cx="5091158" cy="4751135"/>
+          </a:xfrm>
+          <a:prstGeom prst="rect">
+            <a:avLst/>
+          </a:prstGeom>
+        </p:spPr>
+      </p:pic>
     </p:spTree>
     <p:extLst>
       <p:ext uri="{BB962C8B-B14F-4D97-AF65-F5344CB8AC3E}">
@@ -14874,7 +16259,299 @@
 </p:sld>
 </file>
 
-<file path=ppt/slides/slide16.xml><?xml version="1.0" encoding="utf-8"?>
+<file path=ppt/slides/slide2.xml><?xml version="1.0" encoding="utf-8"?>
+<p:sld xmlns:a="http://schemas.openxmlformats.org/drawingml/2006/main" xmlns:r="http://schemas.openxmlformats.org/officeDocument/2006/relationships" xmlns:p="http://schemas.openxmlformats.org/presentationml/2006/main">
+  <p:cSld>
+    <p:spTree>
+      <p:nvGrpSpPr>
+        <p:cNvPr id="1" name=""/>
+        <p:cNvGrpSpPr/>
+        <p:nvPr/>
+      </p:nvGrpSpPr>
+      <p:grpSpPr>
+        <a:xfrm>
+          <a:off x="0" y="0"/>
+          <a:ext cx="0" cy="0"/>
+          <a:chOff x="0" y="0"/>
+          <a:chExt cx="0" cy="0"/>
+        </a:xfrm>
+      </p:grpSpPr>
+      <p:sp>
+        <p:nvSpPr>
+          <p:cNvPr id="4" name="Rectangle 3"/>
+          <p:cNvSpPr/>
+          <p:nvPr/>
+        </p:nvSpPr>
+        <p:spPr>
+          <a:xfrm>
+            <a:off x="-278953" y="1407985"/>
+            <a:ext cx="12776548" cy="5558872"/>
+          </a:xfrm>
+          <a:prstGeom prst="rect">
+            <a:avLst/>
+          </a:prstGeom>
+          <a:solidFill>
+            <a:srgbClr val="FFFDF7"/>
+          </a:solidFill>
+          <a:ln w="76200">
+            <a:noFill/>
+          </a:ln>
+        </p:spPr>
+        <p:style>
+          <a:lnRef idx="2">
+            <a:schemeClr val="accent1">
+              <a:shade val="50000"/>
+            </a:schemeClr>
+          </a:lnRef>
+          <a:fillRef idx="1">
+            <a:schemeClr val="accent1"/>
+          </a:fillRef>
+          <a:effectRef idx="0">
+            <a:schemeClr val="accent1"/>
+          </a:effectRef>
+          <a:fontRef idx="minor">
+            <a:schemeClr val="lt1"/>
+          </a:fontRef>
+        </p:style>
+        <p:txBody>
+          <a:bodyPr rtlCol="0" anchor="ctr"/>
+          <a:lstStyle/>
+          <a:p>
+            <a:pPr algn="ctr"/>
+            <a:r>
+              <a:rPr lang="en-GB" dirty="0" err="1">
+                <a:solidFill>
+                  <a:schemeClr val="tx1"/>
+                </a:solidFill>
+              </a:rPr>
+              <a:t>toi</a:t>
+            </a:r>
+            <a:r>
+              <a:rPr lang="en-GB" dirty="0">
+                <a:solidFill>
+                  <a:schemeClr val="tx1"/>
+                </a:solidFill>
+              </a:rPr>
+              <a:t> do:</a:t>
+            </a:r>
+            <a:br>
+              <a:rPr lang="en-GB" dirty="0">
+                <a:solidFill>
+                  <a:schemeClr val="tx1"/>
+                </a:solidFill>
+              </a:rPr>
+            </a:br>
+            <a:r>
+              <a:rPr lang="en-GB" dirty="0">
+                <a:solidFill>
+                  <a:schemeClr val="tx1"/>
+                </a:solidFill>
+              </a:rPr>
+              <a:t>what is zenith value</a:t>
+            </a:r>
+          </a:p>
+          <a:p>
+            <a:pPr algn="ctr"/>
+            <a:r>
+              <a:rPr lang="en-GB" dirty="0">
+                <a:solidFill>
+                  <a:schemeClr val="tx1"/>
+                </a:solidFill>
+              </a:rPr>
+              <a:t>how exactly does zeta 2 work</a:t>
+            </a:r>
+          </a:p>
+          <a:p>
+            <a:pPr algn="ctr"/>
+            <a:r>
+              <a:rPr lang="en-GB" dirty="0">
+                <a:solidFill>
+                  <a:schemeClr val="tx1"/>
+                </a:solidFill>
+              </a:rPr>
+              <a:t>correct </a:t>
+            </a:r>
+            <a:r>
+              <a:rPr lang="en-GB" dirty="0" err="1">
+                <a:solidFill>
+                  <a:schemeClr val="tx1"/>
+                </a:solidFill>
+              </a:rPr>
+              <a:t>colors</a:t>
+            </a:r>
+            <a:r>
+              <a:rPr lang="en-GB" dirty="0">
+                <a:solidFill>
+                  <a:schemeClr val="tx1"/>
+                </a:solidFill>
+              </a:rPr>
+              <a:t> for zeta demo</a:t>
+            </a:r>
+          </a:p>
+          <a:p>
+            <a:pPr algn="ctr"/>
+            <a:r>
+              <a:rPr lang="en-GB" dirty="0">
+                <a:solidFill>
+                  <a:schemeClr val="tx1"/>
+                </a:solidFill>
+              </a:rPr>
+              <a:t>better arguments for modelling</a:t>
+            </a:r>
+          </a:p>
+          <a:p>
+            <a:pPr algn="ctr"/>
+            <a:r>
+              <a:rPr lang="en-GB" dirty="0">
+                <a:solidFill>
+                  <a:schemeClr val="tx1"/>
+                </a:solidFill>
+              </a:rPr>
+              <a:t>stickiness</a:t>
+            </a:r>
+          </a:p>
+          <a:p>
+            <a:pPr algn="ctr"/>
+            <a:r>
+              <a:rPr lang="en-GB" dirty="0">
+                <a:solidFill>
+                  <a:schemeClr val="tx1"/>
+                </a:solidFill>
+              </a:rPr>
+              <a:t>example to go through with modelling</a:t>
+            </a:r>
+          </a:p>
+        </p:txBody>
+      </p:sp>
+      <p:sp>
+        <p:nvSpPr>
+          <p:cNvPr id="2" name="Rectangle 1"/>
+          <p:cNvSpPr/>
+          <p:nvPr/>
+        </p:nvSpPr>
+        <p:spPr>
+          <a:xfrm>
+            <a:off x="-278953" y="-395763"/>
+            <a:ext cx="12776548" cy="1803748"/>
+          </a:xfrm>
+          <a:prstGeom prst="rect">
+            <a:avLst/>
+          </a:prstGeom>
+          <a:solidFill>
+            <a:srgbClr val="CFF1E6"/>
+          </a:solidFill>
+          <a:ln w="76200">
+            <a:solidFill>
+              <a:srgbClr val="0CB87F"/>
+            </a:solidFill>
+          </a:ln>
+        </p:spPr>
+        <p:style>
+          <a:lnRef idx="2">
+            <a:schemeClr val="accent1">
+              <a:shade val="50000"/>
+            </a:schemeClr>
+          </a:lnRef>
+          <a:fillRef idx="1">
+            <a:schemeClr val="accent1"/>
+          </a:fillRef>
+          <a:effectRef idx="0">
+            <a:schemeClr val="accent1"/>
+          </a:effectRef>
+          <a:fontRef idx="minor">
+            <a:schemeClr val="lt1"/>
+          </a:fontRef>
+        </p:style>
+        <p:txBody>
+          <a:bodyPr rtlCol="0" anchor="ctr"/>
+          <a:lstStyle/>
+          <a:p>
+            <a:pPr algn="ctr"/>
+            <a:endParaRPr lang="en-GB" dirty="0"/>
+          </a:p>
+        </p:txBody>
+      </p:sp>
+      <p:sp>
+        <p:nvSpPr>
+          <p:cNvPr id="8" name="Rounded Rectangle 7"/>
+          <p:cNvSpPr/>
+          <p:nvPr/>
+        </p:nvSpPr>
+        <p:spPr>
+          <a:xfrm>
+            <a:off x="838201" y="365125"/>
+            <a:ext cx="4154714" cy="912132"/>
+          </a:xfrm>
+          <a:prstGeom prst="roundRect">
+            <a:avLst>
+              <a:gd name="adj" fmla="val 50000"/>
+            </a:avLst>
+          </a:prstGeom>
+          <a:solidFill>
+            <a:srgbClr val="FFFDF7"/>
+          </a:solidFill>
+          <a:ln w="76200">
+            <a:solidFill>
+              <a:schemeClr val="accent4">
+                <a:lumMod val="20000"/>
+                <a:lumOff val="80000"/>
+              </a:schemeClr>
+            </a:solidFill>
+          </a:ln>
+        </p:spPr>
+        <p:style>
+          <a:lnRef idx="2">
+            <a:schemeClr val="accent1">
+              <a:shade val="50000"/>
+            </a:schemeClr>
+          </a:lnRef>
+          <a:fillRef idx="1">
+            <a:schemeClr val="accent1"/>
+          </a:fillRef>
+          <a:effectRef idx="0">
+            <a:schemeClr val="accent1"/>
+          </a:effectRef>
+          <a:fontRef idx="minor">
+            <a:schemeClr val="lt1"/>
+          </a:fontRef>
+        </p:style>
+        <p:txBody>
+          <a:bodyPr rtlCol="0" anchor="ctr"/>
+          <a:lstStyle/>
+          <a:p>
+            <a:pPr algn="ctr"/>
+            <a:r>
+              <a:rPr lang="de-DE" sz="3200" b="1" dirty="0">
+                <a:solidFill>
+                  <a:schemeClr val="tx1"/>
+                </a:solidFill>
+                <a:latin typeface="Geneva" panose="020B0503030404040204" pitchFamily="34" charset="0"/>
+              </a:rPr>
+              <a:t>Project summary</a:t>
+            </a:r>
+            <a:endParaRPr lang="en-GB" sz="3200" b="1" dirty="0">
+              <a:solidFill>
+                <a:schemeClr val="tx1"/>
+              </a:solidFill>
+              <a:latin typeface="Geneva" panose="020B0503030404040204" pitchFamily="34" charset="0"/>
+            </a:endParaRPr>
+          </a:p>
+        </p:txBody>
+      </p:sp>
+    </p:spTree>
+    <p:extLst>
+      <p:ext uri="{BB962C8B-B14F-4D97-AF65-F5344CB8AC3E}">
+        <p14:creationId xmlns:p14="http://schemas.microsoft.com/office/powerpoint/2010/main" val="22455855"/>
+      </p:ext>
+    </p:extLst>
+  </p:cSld>
+  <p:clrMapOvr>
+    <a:masterClrMapping/>
+  </p:clrMapOvr>
+</p:sld>
+</file>
+
+<file path=ppt/slides/slide20.xml><?xml version="1.0" encoding="utf-8"?>
 <p:sld xmlns:a="http://schemas.openxmlformats.org/drawingml/2006/main" xmlns:r="http://schemas.openxmlformats.org/officeDocument/2006/relationships" xmlns:p="http://schemas.openxmlformats.org/presentationml/2006/main">
   <p:cSld>
     <p:bg>
@@ -14901,14 +16578,14 @@
       </p:grpSpPr>
       <p:pic>
         <p:nvPicPr>
-          <p:cNvPr id="4" name="Picture 3"/>
+          <p:cNvPr id="5" name="Picture 4"/>
           <p:cNvPicPr>
             <a:picLocks noChangeAspect="1"/>
           </p:cNvPicPr>
           <p:nvPr/>
         </p:nvPicPr>
         <p:blipFill>
-          <a:blip r:embed="rId2" cstate="print">
+          <a:blip r:embed="rId2">
             <a:extLst>
               <a:ext uri="{28A0092B-C50C-407E-A947-70E740481C1C}">
                 <a14:useLocalDpi xmlns:a14="http://schemas.microsoft.com/office/drawing/2010/main" val="0"/>
@@ -14921,37 +16598,7 @@
         </p:blipFill>
         <p:spPr>
           <a:xfrm>
-            <a:off x="0" y="2312894"/>
-            <a:ext cx="3928813" cy="3666420"/>
-          </a:xfrm>
-          <a:prstGeom prst="rect">
-            <a:avLst/>
-          </a:prstGeom>
-        </p:spPr>
-      </p:pic>
-      <p:pic>
-        <p:nvPicPr>
-          <p:cNvPr id="5" name="Picture 4"/>
-          <p:cNvPicPr>
-            <a:picLocks noChangeAspect="1"/>
-          </p:cNvPicPr>
-          <p:nvPr/>
-        </p:nvPicPr>
-        <p:blipFill>
-          <a:blip r:embed="rId3">
-            <a:extLst>
-              <a:ext uri="{28A0092B-C50C-407E-A947-70E740481C1C}">
-                <a14:useLocalDpi xmlns:a14="http://schemas.microsoft.com/office/drawing/2010/main" val="0"/>
-              </a:ext>
-            </a:extLst>
-          </a:blip>
-          <a:stretch>
-            <a:fillRect/>
-          </a:stretch>
-        </p:blipFill>
-        <p:spPr>
-          <a:xfrm>
-            <a:off x="3928812" y="2406320"/>
+            <a:off x="3928812" y="2168873"/>
             <a:ext cx="8165505" cy="3529962"/>
           </a:xfrm>
           <a:prstGeom prst="rect">
@@ -15035,53 +16682,22 @@
           </a:p>
         </p:txBody>
       </p:sp>
-    </p:spTree>
-    <p:extLst>
-      <p:ext uri="{BB962C8B-B14F-4D97-AF65-F5344CB8AC3E}">
-        <p14:creationId xmlns:p14="http://schemas.microsoft.com/office/powerpoint/2010/main" val="200621097"/>
-      </p:ext>
-    </p:extLst>
-  </p:cSld>
-  <p:clrMapOvr>
-    <a:masterClrMapping/>
-  </p:clrMapOvr>
-  <p:timing>
-    <p:tnLst>
-      <p:par>
-        <p:cTn id="1" dur="indefinite" restart="never" nodeType="tmRoot"/>
-      </p:par>
-    </p:tnLst>
-  </p:timing>
-</p:sld>
-</file>
-
-<file path=ppt/slides/slide17.xml><?xml version="1.0" encoding="utf-8"?>
-<p:sld xmlns:a="http://schemas.openxmlformats.org/drawingml/2006/main" xmlns:r="http://schemas.openxmlformats.org/officeDocument/2006/relationships" xmlns:p="http://schemas.openxmlformats.org/presentationml/2006/main">
-  <p:cSld>
-    <p:spTree>
-      <p:nvGrpSpPr>
-        <p:cNvPr id="1" name=""/>
-        <p:cNvGrpSpPr/>
-        <p:nvPr/>
-      </p:nvGrpSpPr>
-      <p:grpSpPr>
-        <a:xfrm>
-          <a:off x="0" y="0"/>
-          <a:ext cx="0" cy="0"/>
-          <a:chOff x="0" y="0"/>
-          <a:chExt cx="0" cy="0"/>
-        </a:xfrm>
-      </p:grpSpPr>
       <p:pic>
         <p:nvPicPr>
-          <p:cNvPr id="4" name="Picture 3"/>
+          <p:cNvPr id="11" name="Grafik 10">
+            <a:extLst>
+              <a:ext uri="{FF2B5EF4-FFF2-40B4-BE49-F238E27FC236}">
+                <a16:creationId xmlns:a16="http://schemas.microsoft.com/office/drawing/2014/main" id="{514A3F41-B373-20F5-47F4-0806D09E58FD}"/>
+              </a:ext>
+            </a:extLst>
+          </p:cNvPr>
           <p:cNvPicPr>
             <a:picLocks noChangeAspect="1"/>
           </p:cNvPicPr>
           <p:nvPr/>
         </p:nvPicPr>
         <p:blipFill>
-          <a:blip r:embed="rId2" cstate="print">
+          <a:blip r:embed="rId3" cstate="print">
             <a:extLst>
               <a:ext uri="{28A0092B-C50C-407E-A947-70E740481C1C}">
                 <a14:useLocalDpi xmlns:a14="http://schemas.microsoft.com/office/drawing/2010/main" val="0"/>
@@ -15094,141 +16710,28 @@
         </p:blipFill>
         <p:spPr>
           <a:xfrm>
-            <a:off x="0" y="2312894"/>
-            <a:ext cx="3928813" cy="3666420"/>
+            <a:off x="146222" y="2168873"/>
+            <a:ext cx="3782590" cy="3529962"/>
           </a:xfrm>
           <a:prstGeom prst="rect">
             <a:avLst/>
           </a:prstGeom>
         </p:spPr>
       </p:pic>
-      <p:pic>
-        <p:nvPicPr>
-          <p:cNvPr id="5" name="Picture 4"/>
-          <p:cNvPicPr>
-            <a:picLocks noChangeAspect="1"/>
-          </p:cNvPicPr>
-          <p:nvPr/>
-        </p:nvPicPr>
-        <p:blipFill>
-          <a:blip r:embed="rId3">
-            <a:extLst>
-              <a:ext uri="{28A0092B-C50C-407E-A947-70E740481C1C}">
-                <a14:useLocalDpi xmlns:a14="http://schemas.microsoft.com/office/drawing/2010/main" val="0"/>
-              </a:ext>
-            </a:extLst>
-          </a:blip>
-          <a:stretch>
-            <a:fillRect/>
-          </a:stretch>
-        </p:blipFill>
-        <p:spPr>
-          <a:xfrm>
-            <a:off x="3928812" y="2406320"/>
-            <a:ext cx="8165505" cy="3529962"/>
-          </a:xfrm>
-          <a:prstGeom prst="rect">
-            <a:avLst/>
-          </a:prstGeom>
-        </p:spPr>
-      </p:pic>
-      <p:sp>
-        <p:nvSpPr>
-          <p:cNvPr id="8" name="Rectangle 7"/>
-          <p:cNvSpPr/>
-          <p:nvPr/>
-        </p:nvSpPr>
-        <p:spPr>
-          <a:xfrm>
-            <a:off x="-278953" y="-395763"/>
-            <a:ext cx="12776548" cy="1803748"/>
-          </a:xfrm>
-          <a:prstGeom prst="rect">
-            <a:avLst/>
-          </a:prstGeom>
-          <a:solidFill>
-            <a:srgbClr val="CFF1E6"/>
-          </a:solidFill>
-          <a:ln w="76200">
-            <a:solidFill>
-              <a:srgbClr val="0CB87F"/>
-            </a:solidFill>
-          </a:ln>
-        </p:spPr>
-        <p:style>
-          <a:lnRef idx="2">
-            <a:schemeClr val="accent1">
-              <a:shade val="50000"/>
-            </a:schemeClr>
-          </a:lnRef>
-          <a:fillRef idx="1">
-            <a:schemeClr val="accent1"/>
-          </a:fillRef>
-          <a:effectRef idx="0">
-            <a:schemeClr val="accent1"/>
-          </a:effectRef>
-          <a:fontRef idx="minor">
-            <a:schemeClr val="lt1"/>
-          </a:fontRef>
-        </p:style>
-        <p:txBody>
-          <a:bodyPr rtlCol="0" anchor="ctr"/>
-          <a:lstStyle/>
-          <a:p>
-            <a:pPr algn="ctr"/>
-            <a:endParaRPr lang="en-GB" dirty="0"/>
-          </a:p>
-        </p:txBody>
-      </p:sp>
-      <p:sp>
-        <p:nvSpPr>
-          <p:cNvPr id="10" name="Title 1"/>
-          <p:cNvSpPr>
-            <a:spLocks noGrp="1"/>
-          </p:cNvSpPr>
-          <p:nvPr>
-            <p:ph type="title"/>
-          </p:nvPr>
-        </p:nvSpPr>
-        <p:spPr>
-          <a:xfrm>
-            <a:off x="838200" y="365125"/>
-            <a:ext cx="10515600" cy="1325563"/>
-          </a:xfrm>
-        </p:spPr>
-        <p:txBody>
-          <a:bodyPr/>
-          <a:lstStyle/>
-          <a:p>
-            <a:r>
-              <a:rPr lang="de-DE" dirty="0"/>
-              <a:t>ZETA visualization</a:t>
-            </a:r>
-            <a:endParaRPr lang="en-GB" dirty="0"/>
-          </a:p>
-        </p:txBody>
-      </p:sp>
     </p:spTree>
     <p:extLst>
       <p:ext uri="{BB962C8B-B14F-4D97-AF65-F5344CB8AC3E}">
-        <p14:creationId xmlns:p14="http://schemas.microsoft.com/office/powerpoint/2010/main" val="784260180"/>
+        <p14:creationId xmlns:p14="http://schemas.microsoft.com/office/powerpoint/2010/main" val="200621097"/>
       </p:ext>
     </p:extLst>
   </p:cSld>
   <p:clrMapOvr>
     <a:masterClrMapping/>
   </p:clrMapOvr>
-  <p:timing>
-    <p:tnLst>
-      <p:par>
-        <p:cTn id="1" dur="indefinite" restart="never" nodeType="tmRoot"/>
-      </p:par>
-    </p:tnLst>
-  </p:timing>
 </p:sld>
 </file>
 
-<file path=ppt/slides/slide18.xml><?xml version="1.0" encoding="utf-8"?>
+<file path=ppt/slides/slide21.xml><?xml version="1.0" encoding="utf-8"?>
 <p:sld xmlns:a="http://schemas.openxmlformats.org/drawingml/2006/main" xmlns:r="http://schemas.openxmlformats.org/officeDocument/2006/relationships" xmlns:p="http://schemas.openxmlformats.org/presentationml/2006/main">
   <p:cSld>
     <p:spTree>
@@ -15297,7 +16800,7 @@
         <p:spPr>
           <a:xfrm>
             <a:off x="763552" y="1825625"/>
-            <a:ext cx="4834654" cy="4351338"/>
+            <a:ext cx="4646648" cy="4351338"/>
           </a:xfrm>
         </p:spPr>
         <p:txBody>
@@ -15595,6 +17098,144 @@
                                   </p:childTnLst>
                                 </p:cTn>
                               </p:par>
+                              <p:par>
+                                <p:cTn id="7" presetID="1" presetClass="entr" presetSubtype="0" fill="hold" nodeType="withEffect">
+                                  <p:stCondLst>
+                                    <p:cond delay="0"/>
+                                  </p:stCondLst>
+                                  <p:childTnLst>
+                                    <p:set>
+                                      <p:cBhvr>
+                                        <p:cTn id="8" dur="1" fill="hold">
+                                          <p:stCondLst>
+                                            <p:cond delay="0"/>
+                                          </p:stCondLst>
+                                        </p:cTn>
+                                        <p:tgtEl>
+                                          <p:spTgt spid="4"/>
+                                        </p:tgtEl>
+                                        <p:attrNameLst>
+                                          <p:attrName>style.visibility</p:attrName>
+                                        </p:attrNameLst>
+                                      </p:cBhvr>
+                                      <p:to>
+                                        <p:strVal val="visible"/>
+                                      </p:to>
+                                    </p:set>
+                                  </p:childTnLst>
+                                </p:cTn>
+                              </p:par>
+                            </p:childTnLst>
+                          </p:cTn>
+                        </p:par>
+                      </p:childTnLst>
+                    </p:cTn>
+                  </p:par>
+                  <p:par>
+                    <p:cTn id="9" fill="hold">
+                      <p:stCondLst>
+                        <p:cond delay="indefinite"/>
+                      </p:stCondLst>
+                      <p:childTnLst>
+                        <p:par>
+                          <p:cTn id="10" fill="hold">
+                            <p:stCondLst>
+                              <p:cond delay="0"/>
+                            </p:stCondLst>
+                            <p:childTnLst>
+                              <p:par>
+                                <p:cTn id="11" presetID="1" presetClass="entr" presetSubtype="0" fill="hold" nodeType="clickEffect">
+                                  <p:stCondLst>
+                                    <p:cond delay="0"/>
+                                  </p:stCondLst>
+                                  <p:childTnLst>
+                                    <p:set>
+                                      <p:cBhvr>
+                                        <p:cTn id="12" dur="1" fill="hold">
+                                          <p:stCondLst>
+                                            <p:cond delay="0"/>
+                                          </p:stCondLst>
+                                        </p:cTn>
+                                        <p:tgtEl>
+                                          <p:spTgt spid="3">
+                                            <p:txEl>
+                                              <p:pRg st="2" end="2"/>
+                                            </p:txEl>
+                                          </p:spTgt>
+                                        </p:tgtEl>
+                                        <p:attrNameLst>
+                                          <p:attrName>style.visibility</p:attrName>
+                                        </p:attrNameLst>
+                                      </p:cBhvr>
+                                      <p:to>
+                                        <p:strVal val="visible"/>
+                                      </p:to>
+                                    </p:set>
+                                  </p:childTnLst>
+                                </p:cTn>
+                              </p:par>
+                              <p:par>
+                                <p:cTn id="13" presetID="1" presetClass="entr" presetSubtype="0" fill="hold" nodeType="withEffect">
+                                  <p:stCondLst>
+                                    <p:cond delay="0"/>
+                                  </p:stCondLst>
+                                  <p:childTnLst>
+                                    <p:set>
+                                      <p:cBhvr>
+                                        <p:cTn id="14" dur="1" fill="hold">
+                                          <p:stCondLst>
+                                            <p:cond delay="0"/>
+                                          </p:stCondLst>
+                                        </p:cTn>
+                                        <p:tgtEl>
+                                          <p:spTgt spid="3">
+                                            <p:txEl>
+                                              <p:pRg st="3" end="3"/>
+                                            </p:txEl>
+                                          </p:spTgt>
+                                        </p:tgtEl>
+                                        <p:attrNameLst>
+                                          <p:attrName>style.visibility</p:attrName>
+                                        </p:attrNameLst>
+                                      </p:cBhvr>
+                                      <p:to>
+                                        <p:strVal val="visible"/>
+                                      </p:to>
+                                    </p:set>
+                                  </p:childTnLst>
+                                </p:cTn>
+                              </p:par>
+                              <p:par>
+                                <p:cTn id="15" presetID="1" presetClass="entr" presetSubtype="0" fill="hold" nodeType="withEffect">
+                                  <p:stCondLst>
+                                    <p:cond delay="0"/>
+                                  </p:stCondLst>
+                                  <p:childTnLst>
+                                    <p:set>
+                                      <p:cBhvr>
+                                        <p:cTn id="16" dur="1" fill="hold">
+                                          <p:stCondLst>
+                                            <p:cond delay="0"/>
+                                          </p:stCondLst>
+                                        </p:cTn>
+                                        <p:tgtEl>
+                                          <p:spTgt spid="3">
+                                            <p:txEl>
+                                              <p:pRg st="4" end="4"/>
+                                            </p:txEl>
+                                          </p:spTgt>
+                                        </p:tgtEl>
+                                        <p:attrNameLst>
+                                          <p:attrName>style.visibility</p:attrName>
+                                        </p:attrNameLst>
+                                      </p:cBhvr>
+                                      <p:to>
+                                        <p:strVal val="visible"/>
+                                      </p:to>
+                                    </p:set>
+                                  </p:childTnLst>
+                                </p:cTn>
+                              </p:par>
                             </p:childTnLst>
                           </p:cTn>
                         </p:par>
@@ -15626,7 +17267,7 @@
 </p:sld>
 </file>
 
-<file path=ppt/slides/slide19.xml><?xml version="1.0" encoding="utf-8"?>
+<file path=ppt/slides/slide22.xml><?xml version="1.0" encoding="utf-8"?>
 <p:sld xmlns:a="http://schemas.openxmlformats.org/drawingml/2006/main" xmlns:r="http://schemas.openxmlformats.org/officeDocument/2006/relationships" xmlns:p="http://schemas.openxmlformats.org/presentationml/2006/main">
   <p:cSld>
     <p:bg>
@@ -15651,35 +17292,6 @@
           <a:chExt cx="0" cy="0"/>
         </a:xfrm>
       </p:grpSpPr>
-      <p:pic>
-        <p:nvPicPr>
-          <p:cNvPr id="4" name="Content Placeholder 3"/>
-          <p:cNvPicPr>
-            <a:picLocks noGrp="1" noChangeAspect="1"/>
-          </p:cNvPicPr>
-          <p:nvPr>
-            <p:ph idx="1"/>
-          </p:nvPr>
-        </p:nvPicPr>
-        <p:blipFill>
-          <a:blip r:embed="rId2">
-            <a:extLst>
-              <a:ext uri="{28A0092B-C50C-407E-A947-70E740481C1C}">
-                <a14:useLocalDpi xmlns:a14="http://schemas.microsoft.com/office/drawing/2010/main" val="0"/>
-              </a:ext>
-            </a:extLst>
-          </a:blip>
-          <a:stretch>
-            <a:fillRect/>
-          </a:stretch>
-        </p:blipFill>
-        <p:spPr>
-          <a:xfrm>
-            <a:off x="609600" y="1512008"/>
-            <a:ext cx="5733757" cy="5345992"/>
-          </a:xfrm>
-        </p:spPr>
-      </p:pic>
       <p:sp>
         <p:nvSpPr>
           <p:cNvPr id="7" name="Rectangle 6"/>
@@ -15919,205 +17531,42 @@
           </a:p>
         </p:txBody>
       </p:sp>
-      <p:sp>
-        <p:nvSpPr>
-          <p:cNvPr id="3" name="Rounded Rectangle 8">
+      <p:pic>
+        <p:nvPicPr>
+          <p:cNvPr id="12" name="Grafik 11">
             <a:extLst>
               <a:ext uri="{FF2B5EF4-FFF2-40B4-BE49-F238E27FC236}">
-                <a16:creationId xmlns:a16="http://schemas.microsoft.com/office/drawing/2014/main" id="{3F45D3EE-92C0-13A1-72E2-B30AABC82EC6}"/>
+                <a16:creationId xmlns:a16="http://schemas.microsoft.com/office/drawing/2014/main" id="{21D8C127-6FAE-A765-EBAD-1270A460321E}"/>
               </a:ext>
             </a:extLst>
           </p:cNvPr>
-          <p:cNvSpPr/>
+          <p:cNvPicPr>
+            <a:picLocks noChangeAspect="1"/>
+          </p:cNvPicPr>
           <p:nvPr/>
-        </p:nvSpPr>
+        </p:nvPicPr>
+        <p:blipFill>
+          <a:blip r:embed="rId2">
+            <a:extLst>
+              <a:ext uri="{28A0092B-C50C-407E-A947-70E740481C1C}">
+                <a14:useLocalDpi xmlns:a14="http://schemas.microsoft.com/office/drawing/2010/main" val="0"/>
+              </a:ext>
+            </a:extLst>
+          </a:blip>
+          <a:stretch>
+            <a:fillRect/>
+          </a:stretch>
+        </p:blipFill>
         <p:spPr>
           <a:xfrm>
-            <a:off x="3180805" y="3086121"/>
-            <a:ext cx="3839120" cy="1516561"/>
+            <a:off x="582977" y="1508819"/>
+            <a:ext cx="5583939" cy="5206306"/>
           </a:xfrm>
-          <a:prstGeom prst="roundRect">
-            <a:avLst>
-              <a:gd name="adj" fmla="val 37941"/>
-            </a:avLst>
+          <a:prstGeom prst="rect">
+            <a:avLst/>
           </a:prstGeom>
-          <a:solidFill>
-            <a:srgbClr val="FFFDF7"/>
-          </a:solidFill>
-          <a:ln w="76200">
-            <a:solidFill>
-              <a:schemeClr val="accent4">
-                <a:lumMod val="20000"/>
-                <a:lumOff val="80000"/>
-              </a:schemeClr>
-            </a:solidFill>
-          </a:ln>
         </p:spPr>
-        <p:style>
-          <a:lnRef idx="2">
-            <a:schemeClr val="accent1">
-              <a:shade val="50000"/>
-            </a:schemeClr>
-          </a:lnRef>
-          <a:fillRef idx="1">
-            <a:schemeClr val="accent1"/>
-          </a:fillRef>
-          <a:effectRef idx="0">
-            <a:schemeClr val="accent1"/>
-          </a:effectRef>
-          <a:fontRef idx="minor">
-            <a:schemeClr val="lt1"/>
-          </a:fontRef>
-        </p:style>
-        <p:txBody>
-          <a:bodyPr rtlCol="0" anchor="ctr"/>
-          <a:lstStyle/>
-          <a:p>
-            <a:pPr algn="ctr"/>
-            <a:r>
-              <a:rPr lang="de-DE" sz="3200" b="1" dirty="0">
-                <a:solidFill>
-                  <a:schemeClr val="tx1"/>
-                </a:solidFill>
-                <a:latin typeface="Bahnschrift" panose="020B0502040204020203" pitchFamily="34" charset="0"/>
-              </a:rPr>
-              <a:t>what </a:t>
-            </a:r>
-            <a:r>
-              <a:rPr lang="de-DE" sz="3200" b="1" dirty="0" err="1">
-                <a:solidFill>
-                  <a:schemeClr val="tx1"/>
-                </a:solidFill>
-                <a:latin typeface="Bahnschrift" panose="020B0502040204020203" pitchFamily="34" charset="0"/>
-              </a:rPr>
-              <a:t>exactly</a:t>
-            </a:r>
-            <a:r>
-              <a:rPr lang="de-DE" sz="3200" b="1" dirty="0">
-                <a:solidFill>
-                  <a:schemeClr val="tx1"/>
-                </a:solidFill>
-                <a:latin typeface="Bahnschrift" panose="020B0502040204020203" pitchFamily="34" charset="0"/>
-              </a:rPr>
-              <a:t> </a:t>
-            </a:r>
-            <a:r>
-              <a:rPr lang="de-DE" sz="3200" b="1" dirty="0" err="1">
-                <a:solidFill>
-                  <a:schemeClr val="tx1"/>
-                </a:solidFill>
-                <a:latin typeface="Bahnschrift" panose="020B0502040204020203" pitchFamily="34" charset="0"/>
-              </a:rPr>
-              <a:t>is</a:t>
-            </a:r>
-            <a:r>
-              <a:rPr lang="de-DE" sz="3200" b="1" dirty="0">
-                <a:solidFill>
-                  <a:schemeClr val="tx1"/>
-                </a:solidFill>
-                <a:latin typeface="Bahnschrift" panose="020B0502040204020203" pitchFamily="34" charset="0"/>
-              </a:rPr>
-              <a:t> </a:t>
-            </a:r>
-            <a:r>
-              <a:rPr lang="de-DE" sz="3200" b="1" dirty="0" err="1">
-                <a:solidFill>
-                  <a:schemeClr val="tx1"/>
-                </a:solidFill>
-                <a:latin typeface="Bahnschrift" panose="020B0502040204020203" pitchFamily="34" charset="0"/>
-              </a:rPr>
-              <a:t>the</a:t>
-            </a:r>
-            <a:r>
-              <a:rPr lang="de-DE" sz="3200" b="1" dirty="0">
-                <a:solidFill>
-                  <a:schemeClr val="tx1"/>
-                </a:solidFill>
-                <a:latin typeface="Bahnschrift" panose="020B0502040204020203" pitchFamily="34" charset="0"/>
-              </a:rPr>
-              <a:t> </a:t>
-            </a:r>
-            <a:r>
-              <a:rPr lang="de-DE" sz="3200" b="1" dirty="0" err="1">
-                <a:solidFill>
-                  <a:schemeClr val="tx1"/>
-                </a:solidFill>
-                <a:latin typeface="Bahnschrift" panose="020B0502040204020203" pitchFamily="34" charset="0"/>
-              </a:rPr>
-              <a:t>meaning</a:t>
-            </a:r>
-            <a:r>
-              <a:rPr lang="de-DE" sz="3200" b="1" dirty="0">
-                <a:solidFill>
-                  <a:schemeClr val="tx1"/>
-                </a:solidFill>
-                <a:latin typeface="Bahnschrift" panose="020B0502040204020203" pitchFamily="34" charset="0"/>
-              </a:rPr>
-              <a:t> </a:t>
-            </a:r>
-            <a:r>
-              <a:rPr lang="de-DE" sz="3200" b="1" dirty="0" err="1">
-                <a:solidFill>
-                  <a:schemeClr val="tx1"/>
-                </a:solidFill>
-                <a:latin typeface="Bahnschrift" panose="020B0502040204020203" pitchFamily="34" charset="0"/>
-              </a:rPr>
-              <a:t>of</a:t>
-            </a:r>
-            <a:r>
-              <a:rPr lang="de-DE" sz="3200" b="1" dirty="0">
-                <a:solidFill>
-                  <a:schemeClr val="tx1"/>
-                </a:solidFill>
-                <a:latin typeface="Bahnschrift" panose="020B0502040204020203" pitchFamily="34" charset="0"/>
-              </a:rPr>
-              <a:t> </a:t>
-            </a:r>
-            <a:r>
-              <a:rPr lang="de-DE" sz="3200" b="1" dirty="0" err="1">
-                <a:solidFill>
-                  <a:schemeClr val="tx1"/>
-                </a:solidFill>
-                <a:latin typeface="Bahnschrift" panose="020B0502040204020203" pitchFamily="34" charset="0"/>
-              </a:rPr>
-              <a:t>the</a:t>
-            </a:r>
-            <a:r>
-              <a:rPr lang="de-DE" sz="3200" b="1" dirty="0">
-                <a:solidFill>
-                  <a:schemeClr val="tx1"/>
-                </a:solidFill>
-                <a:latin typeface="Bahnschrift" panose="020B0502040204020203" pitchFamily="34" charset="0"/>
-              </a:rPr>
-              <a:t> ZETA </a:t>
-            </a:r>
-            <a:r>
-              <a:rPr lang="de-DE" sz="3200" b="1" dirty="0" err="1">
-                <a:solidFill>
-                  <a:schemeClr val="tx1"/>
-                </a:solidFill>
-                <a:latin typeface="Bahnschrift" panose="020B0502040204020203" pitchFamily="34" charset="0"/>
-              </a:rPr>
-              <a:t>value</a:t>
-            </a:r>
-            <a:r>
-              <a:rPr lang="de-DE" sz="3200" b="1" dirty="0">
-                <a:solidFill>
-                  <a:schemeClr val="tx1"/>
-                </a:solidFill>
-                <a:latin typeface="Bahnschrift" panose="020B0502040204020203" pitchFamily="34" charset="0"/>
-              </a:rPr>
-              <a:t>?</a:t>
-            </a:r>
-            <a:endParaRPr lang="en-GB" sz="1200" b="1" dirty="0">
-              <a:solidFill>
-                <a:schemeClr val="tx1"/>
-              </a:solidFill>
-              <a:latin typeface="Bahnschrift" panose="020B0502040204020203" pitchFamily="34" charset="0"/>
-            </a:endParaRPr>
-          </a:p>
-        </p:txBody>
-      </p:sp>
+      </p:pic>
     </p:spTree>
     <p:extLst>
       <p:ext uri="{BB962C8B-B14F-4D97-AF65-F5344CB8AC3E}">
@@ -16341,50 +17790,6 @@
                             </p:childTnLst>
                           </p:cTn>
                         </p:par>
-                        <p:par>
-                          <p:cTn id="16" fill="hold">
-                            <p:stCondLst>
-                              <p:cond delay="250"/>
-                            </p:stCondLst>
-                            <p:childTnLst>
-                              <p:par>
-                                <p:cTn id="17" presetID="10" presetClass="entr" presetSubtype="0" fill="hold" grpId="0" nodeType="afterEffect">
-                                  <p:stCondLst>
-                                    <p:cond delay="0"/>
-                                  </p:stCondLst>
-                                  <p:childTnLst>
-                                    <p:set>
-                                      <p:cBhvr>
-                                        <p:cTn id="18" dur="1" fill="hold">
-                                          <p:stCondLst>
-                                            <p:cond delay="0"/>
-                                          </p:stCondLst>
-                                        </p:cTn>
-                                        <p:tgtEl>
-                                          <p:spTgt spid="3"/>
-                                        </p:tgtEl>
-                                        <p:attrNameLst>
-                                          <p:attrName>style.visibility</p:attrName>
-                                        </p:attrNameLst>
-                                      </p:cBhvr>
-                                      <p:to>
-                                        <p:strVal val="visible"/>
-                                      </p:to>
-                                    </p:set>
-                                    <p:animEffect transition="in" filter="fade">
-                                      <p:cBhvr>
-                                        <p:cTn id="19" dur="250"/>
-                                        <p:tgtEl>
-                                          <p:spTgt spid="3"/>
-                                        </p:tgtEl>
-                                      </p:cBhvr>
-                                    </p:animEffect>
-                                  </p:childTnLst>
-                                </p:cTn>
-                              </p:par>
-                            </p:childTnLst>
-                          </p:cTn>
-                        </p:par>
                       </p:childTnLst>
                     </p:cTn>
                   </p:par>
@@ -16411,211 +17816,12 @@
     </p:tnLst>
     <p:bldLst>
       <p:bldP spid="6" grpId="0" animBg="1"/>
-      <p:bldP spid="3" grpId="0" animBg="1"/>
     </p:bldLst>
   </p:timing>
 </p:sld>
 </file>
 
-<file path=ppt/slides/slide2.xml><?xml version="1.0" encoding="utf-8"?>
-<p:sld xmlns:a="http://schemas.openxmlformats.org/drawingml/2006/main" xmlns:r="http://schemas.openxmlformats.org/officeDocument/2006/relationships" xmlns:p="http://schemas.openxmlformats.org/presentationml/2006/main">
-  <p:cSld>
-    <p:spTree>
-      <p:nvGrpSpPr>
-        <p:cNvPr id="1" name=""/>
-        <p:cNvGrpSpPr/>
-        <p:nvPr/>
-      </p:nvGrpSpPr>
-      <p:grpSpPr>
-        <a:xfrm>
-          <a:off x="0" y="0"/>
-          <a:ext cx="0" cy="0"/>
-          <a:chOff x="0" y="0"/>
-          <a:chExt cx="0" cy="0"/>
-        </a:xfrm>
-      </p:grpSpPr>
-      <p:sp>
-        <p:nvSpPr>
-          <p:cNvPr id="4" name="Rectangle 3"/>
-          <p:cNvSpPr/>
-          <p:nvPr/>
-        </p:nvSpPr>
-        <p:spPr>
-          <a:xfrm>
-            <a:off x="-278953" y="1407985"/>
-            <a:ext cx="12776548" cy="5558872"/>
-          </a:xfrm>
-          <a:prstGeom prst="rect">
-            <a:avLst/>
-          </a:prstGeom>
-          <a:solidFill>
-            <a:srgbClr val="FFFDF7"/>
-          </a:solidFill>
-          <a:ln w="76200">
-            <a:noFill/>
-          </a:ln>
-        </p:spPr>
-        <p:style>
-          <a:lnRef idx="2">
-            <a:schemeClr val="accent1">
-              <a:shade val="50000"/>
-            </a:schemeClr>
-          </a:lnRef>
-          <a:fillRef idx="1">
-            <a:schemeClr val="accent1"/>
-          </a:fillRef>
-          <a:effectRef idx="0">
-            <a:schemeClr val="accent1"/>
-          </a:effectRef>
-          <a:fontRef idx="minor">
-            <a:schemeClr val="lt1"/>
-          </a:fontRef>
-        </p:style>
-        <p:txBody>
-          <a:bodyPr rtlCol="0" anchor="ctr"/>
-          <a:lstStyle/>
-          <a:p>
-            <a:pPr algn="ctr"/>
-            <a:endParaRPr lang="en-GB" dirty="0"/>
-          </a:p>
-        </p:txBody>
-      </p:sp>
-      <p:sp>
-        <p:nvSpPr>
-          <p:cNvPr id="2" name="Rectangle 1"/>
-          <p:cNvSpPr/>
-          <p:nvPr/>
-        </p:nvSpPr>
-        <p:spPr>
-          <a:xfrm>
-            <a:off x="-278953" y="-395763"/>
-            <a:ext cx="12776548" cy="1803748"/>
-          </a:xfrm>
-          <a:prstGeom prst="rect">
-            <a:avLst/>
-          </a:prstGeom>
-          <a:solidFill>
-            <a:srgbClr val="CFF1E6"/>
-          </a:solidFill>
-          <a:ln w="76200">
-            <a:solidFill>
-              <a:srgbClr val="0CB87F"/>
-            </a:solidFill>
-          </a:ln>
-        </p:spPr>
-        <p:style>
-          <a:lnRef idx="2">
-            <a:schemeClr val="accent1">
-              <a:shade val="50000"/>
-            </a:schemeClr>
-          </a:lnRef>
-          <a:fillRef idx="1">
-            <a:schemeClr val="accent1"/>
-          </a:fillRef>
-          <a:effectRef idx="0">
-            <a:schemeClr val="accent1"/>
-          </a:effectRef>
-          <a:fontRef idx="minor">
-            <a:schemeClr val="lt1"/>
-          </a:fontRef>
-        </p:style>
-        <p:txBody>
-          <a:bodyPr rtlCol="0" anchor="ctr"/>
-          <a:lstStyle/>
-          <a:p>
-            <a:pPr algn="ctr"/>
-            <a:endParaRPr lang="en-GB" dirty="0"/>
-          </a:p>
-        </p:txBody>
-      </p:sp>
-      <p:sp>
-        <p:nvSpPr>
-          <p:cNvPr id="8" name="Rounded Rectangle 7"/>
-          <p:cNvSpPr/>
-          <p:nvPr/>
-        </p:nvSpPr>
-        <p:spPr>
-          <a:xfrm>
-            <a:off x="838201" y="365125"/>
-            <a:ext cx="4154714" cy="912132"/>
-          </a:xfrm>
-          <a:prstGeom prst="roundRect">
-            <a:avLst>
-              <a:gd name="adj" fmla="val 50000"/>
-            </a:avLst>
-          </a:prstGeom>
-          <a:solidFill>
-            <a:srgbClr val="FFFDF7"/>
-          </a:solidFill>
-          <a:ln w="76200">
-            <a:solidFill>
-              <a:schemeClr val="accent4">
-                <a:lumMod val="20000"/>
-                <a:lumOff val="80000"/>
-              </a:schemeClr>
-            </a:solidFill>
-          </a:ln>
-        </p:spPr>
-        <p:style>
-          <a:lnRef idx="2">
-            <a:schemeClr val="accent1">
-              <a:shade val="50000"/>
-            </a:schemeClr>
-          </a:lnRef>
-          <a:fillRef idx="1">
-            <a:schemeClr val="accent1"/>
-          </a:fillRef>
-          <a:effectRef idx="0">
-            <a:schemeClr val="accent1"/>
-          </a:effectRef>
-          <a:fontRef idx="minor">
-            <a:schemeClr val="lt1"/>
-          </a:fontRef>
-        </p:style>
-        <p:txBody>
-          <a:bodyPr rtlCol="0" anchor="ctr"/>
-          <a:lstStyle/>
-          <a:p>
-            <a:pPr algn="ctr"/>
-            <a:r>
-              <a:rPr lang="de-DE" sz="3200" b="1" dirty="0">
-                <a:solidFill>
-                  <a:schemeClr val="tx1"/>
-                </a:solidFill>
-                <a:latin typeface="Geneva" panose="020B0503030404040204" pitchFamily="34" charset="0"/>
-              </a:rPr>
-              <a:t>Project summary</a:t>
-            </a:r>
-            <a:endParaRPr lang="en-GB" sz="3200" b="1" dirty="0">
-              <a:solidFill>
-                <a:schemeClr val="tx1"/>
-              </a:solidFill>
-              <a:latin typeface="Geneva" panose="020B0503030404040204" pitchFamily="34" charset="0"/>
-            </a:endParaRPr>
-          </a:p>
-        </p:txBody>
-      </p:sp>
-    </p:spTree>
-    <p:extLst>
-      <p:ext uri="{BB962C8B-B14F-4D97-AF65-F5344CB8AC3E}">
-        <p14:creationId xmlns:p14="http://schemas.microsoft.com/office/powerpoint/2010/main" val="22455855"/>
-      </p:ext>
-    </p:extLst>
-  </p:cSld>
-  <p:clrMapOvr>
-    <a:masterClrMapping/>
-  </p:clrMapOvr>
-  <p:timing>
-    <p:tnLst>
-      <p:par>
-        <p:cTn id="1" dur="indefinite" restart="never" nodeType="tmRoot"/>
-      </p:par>
-    </p:tnLst>
-  </p:timing>
-</p:sld>
-</file>
-
-<file path=ppt/slides/slide20.xml><?xml version="1.0" encoding="utf-8"?>
+<file path=ppt/slides/slide23.xml><?xml version="1.0" encoding="utf-8"?>
 <p:sld xmlns:a="http://schemas.openxmlformats.org/drawingml/2006/main" xmlns:r="http://schemas.openxmlformats.org/officeDocument/2006/relationships" xmlns:p="http://schemas.openxmlformats.org/presentationml/2006/main">
   <p:cSld>
     <p:bg>
@@ -16718,9 +17924,38 @@
           </a:p>
         </p:txBody>
       </p:sp>
+      <p:sp>
+        <p:nvSpPr>
+          <p:cNvPr id="2" name="Title 1"/>
+          <p:cNvSpPr>
+            <a:spLocks noGrp="1"/>
+          </p:cNvSpPr>
+          <p:nvPr>
+            <p:ph type="title"/>
+          </p:nvPr>
+        </p:nvSpPr>
+        <p:spPr/>
+        <p:txBody>
+          <a:bodyPr/>
+          <a:lstStyle/>
+          <a:p>
+            <a:r>
+              <a:rPr lang="de-DE" dirty="0"/>
+              <a:t>ZETA2 visualization</a:t>
+            </a:r>
+            <a:endParaRPr lang="en-GB" dirty="0"/>
+          </a:p>
+        </p:txBody>
+      </p:sp>
       <p:pic>
         <p:nvPicPr>
-          <p:cNvPr id="5" name="Content Placeholder 3"/>
+          <p:cNvPr id="7" name="Grafik 6">
+            <a:extLst>
+              <a:ext uri="{FF2B5EF4-FFF2-40B4-BE49-F238E27FC236}">
+                <a16:creationId xmlns:a16="http://schemas.microsoft.com/office/drawing/2014/main" id="{E21E40F9-94A8-3DAA-850C-4581A8A5FC92}"/>
+              </a:ext>
+            </a:extLst>
+          </p:cNvPr>
           <p:cNvPicPr>
             <a:picLocks noChangeAspect="1"/>
           </p:cNvPicPr>
@@ -16740,37 +17975,14 @@
         </p:blipFill>
         <p:spPr>
           <a:xfrm>
-            <a:off x="52242" y="2168872"/>
-            <a:ext cx="3982909" cy="3713551"/>
+            <a:off x="230552" y="2533650"/>
+            <a:ext cx="3657287" cy="3409950"/>
           </a:xfrm>
           <a:prstGeom prst="rect">
             <a:avLst/>
           </a:prstGeom>
         </p:spPr>
       </p:pic>
-      <p:sp>
-        <p:nvSpPr>
-          <p:cNvPr id="2" name="Title 1"/>
-          <p:cNvSpPr>
-            <a:spLocks noGrp="1"/>
-          </p:cNvSpPr>
-          <p:nvPr>
-            <p:ph type="title"/>
-          </p:nvPr>
-        </p:nvSpPr>
-        <p:spPr/>
-        <p:txBody>
-          <a:bodyPr/>
-          <a:lstStyle/>
-          <a:p>
-            <a:r>
-              <a:rPr lang="de-DE" dirty="0"/>
-              <a:t>ZETA2 visualization</a:t>
-            </a:r>
-            <a:endParaRPr lang="en-GB" dirty="0"/>
-          </a:p>
-        </p:txBody>
-      </p:sp>
     </p:spTree>
     <p:extLst>
       <p:ext uri="{BB962C8B-B14F-4D97-AF65-F5344CB8AC3E}">
@@ -16781,17 +17993,10 @@
   <p:clrMapOvr>
     <a:masterClrMapping/>
   </p:clrMapOvr>
-  <p:timing>
-    <p:tnLst>
-      <p:par>
-        <p:cTn id="1" dur="indefinite" restart="never" nodeType="tmRoot"/>
-      </p:par>
-    </p:tnLst>
-  </p:timing>
 </p:sld>
 </file>
 
-<file path=ppt/slides/slide21.xml><?xml version="1.0" encoding="utf-8"?>
+<file path=ppt/slides/slide24.xml><?xml version="1.0" encoding="utf-8"?>
 <p:sld xmlns:a="http://schemas.openxmlformats.org/drawingml/2006/main" xmlns:r="http://schemas.openxmlformats.org/officeDocument/2006/relationships" xmlns:p="http://schemas.openxmlformats.org/presentationml/2006/main">
   <p:cSld>
     <p:spTree>
@@ -16917,22 +18122,13 @@
               <a:t>—</a:t>
             </a:r>
             <a:r>
-              <a:rPr lang="de-DE" dirty="0" smtClean="0">
-                <a:solidFill>
-                  <a:schemeClr val="tx1"/>
-                </a:solidFill>
-                <a:latin typeface="Bahnschrift" panose="020B0502040204020203" pitchFamily="34" charset="0"/>
-              </a:rPr>
-              <a:t> </a:t>
-            </a:r>
-            <a:r>
               <a:rPr lang="de-DE" dirty="0">
                 <a:solidFill>
                   <a:schemeClr val="tx1"/>
                 </a:solidFill>
                 <a:latin typeface="Bahnschrift" panose="020B0502040204020203" pitchFamily="34" charset="0"/>
               </a:rPr>
-              <a:t>Gamble + Rew; </a:t>
+              <a:t> Gamble + Rew; </a:t>
             </a:r>
             <a:r>
               <a:rPr lang="de-DE" sz="2400" dirty="0">
@@ -16944,22 +18140,13 @@
               <a:t>—</a:t>
             </a:r>
             <a:r>
-              <a:rPr lang="de-DE" dirty="0" smtClean="0">
-                <a:solidFill>
-                  <a:schemeClr val="tx1"/>
-                </a:solidFill>
-                <a:latin typeface="Bahnschrift" panose="020B0502040204020203" pitchFamily="34" charset="0"/>
-              </a:rPr>
-              <a:t> </a:t>
-            </a:r>
-            <a:r>
               <a:rPr lang="de-DE" dirty="0">
                 <a:solidFill>
                   <a:schemeClr val="tx1"/>
                 </a:solidFill>
                 <a:latin typeface="Bahnschrift" panose="020B0502040204020203" pitchFamily="34" charset="0"/>
               </a:rPr>
-              <a:t>Gamble + No Rew; </a:t>
+              <a:t> Gamble + No Rew; </a:t>
             </a:r>
             <a:r>
               <a:rPr lang="de-DE" sz="2400" dirty="0">
@@ -16971,22 +18158,13 @@
               <a:t>—</a:t>
             </a:r>
             <a:r>
-              <a:rPr lang="de-DE" dirty="0" smtClean="0">
-                <a:solidFill>
-                  <a:schemeClr val="tx1"/>
-                </a:solidFill>
-                <a:latin typeface="Bahnschrift" panose="020B0502040204020203" pitchFamily="34" charset="0"/>
-              </a:rPr>
-              <a:t> </a:t>
-            </a:r>
-            <a:r>
               <a:rPr lang="de-DE" dirty="0">
                 <a:solidFill>
                   <a:schemeClr val="tx1"/>
                 </a:solidFill>
                 <a:latin typeface="Bahnschrift" panose="020B0502040204020203" pitchFamily="34" charset="0"/>
               </a:rPr>
-              <a:t>Safe + Rew; </a:t>
+              <a:t> Safe + Rew; </a:t>
             </a:r>
             <a:r>
               <a:rPr lang="de-DE" dirty="0">
@@ -17025,106 +18203,10 @@
   <p:clrMapOvr>
     <a:masterClrMapping/>
   </p:clrMapOvr>
-  <p:timing>
-    <p:tnLst>
-      <p:par>
-        <p:cTn id="1" dur="indefinite" restart="never" nodeType="tmRoot"/>
-      </p:par>
-    </p:tnLst>
-  </p:timing>
 </p:sld>
 </file>
 
-<file path=ppt/slides/slide22.xml><?xml version="1.0" encoding="utf-8"?>
-<p:sld xmlns:a="http://schemas.openxmlformats.org/drawingml/2006/main" xmlns:r="http://schemas.openxmlformats.org/officeDocument/2006/relationships" xmlns:p="http://schemas.openxmlformats.org/presentationml/2006/main">
-  <p:cSld>
-    <p:spTree>
-      <p:nvGrpSpPr>
-        <p:cNvPr id="1" name=""/>
-        <p:cNvGrpSpPr/>
-        <p:nvPr/>
-      </p:nvGrpSpPr>
-      <p:grpSpPr>
-        <a:xfrm>
-          <a:off x="0" y="0"/>
-          <a:ext cx="0" cy="0"/>
-          <a:chOff x="0" y="0"/>
-          <a:chExt cx="0" cy="0"/>
-        </a:xfrm>
-      </p:grpSpPr>
-      <p:sp>
-        <p:nvSpPr>
-          <p:cNvPr id="2" name="Title 1"/>
-          <p:cNvSpPr>
-            <a:spLocks noGrp="1"/>
-          </p:cNvSpPr>
-          <p:nvPr>
-            <p:ph type="title"/>
-          </p:nvPr>
-        </p:nvSpPr>
-        <p:spPr/>
-        <p:txBody>
-          <a:bodyPr/>
-          <a:lstStyle/>
-          <a:p>
-            <a:r>
-              <a:rPr lang="de-DE" dirty="0"/>
-              <a:t>ZETA2 visualization</a:t>
-            </a:r>
-            <a:endParaRPr lang="en-GB" dirty="0"/>
-          </a:p>
-        </p:txBody>
-      </p:sp>
-      <p:pic>
-        <p:nvPicPr>
-          <p:cNvPr id="5" name="Content Placeholder 4"/>
-          <p:cNvPicPr>
-            <a:picLocks noGrp="1" noChangeAspect="1"/>
-          </p:cNvPicPr>
-          <p:nvPr>
-            <p:ph idx="1"/>
-          </p:nvPr>
-        </p:nvPicPr>
-        <p:blipFill>
-          <a:blip r:embed="rId2">
-            <a:extLst>
-              <a:ext uri="{28A0092B-C50C-407E-A947-70E740481C1C}">
-                <a14:useLocalDpi xmlns:a14="http://schemas.microsoft.com/office/drawing/2010/main" val="0"/>
-              </a:ext>
-            </a:extLst>
-          </a:blip>
-          <a:stretch>
-            <a:fillRect/>
-          </a:stretch>
-        </p:blipFill>
-        <p:spPr>
-          <a:xfrm>
-            <a:off x="32310" y="1549372"/>
-            <a:ext cx="12127380" cy="4653411"/>
-          </a:xfrm>
-        </p:spPr>
-      </p:pic>
-    </p:spTree>
-    <p:extLst>
-      <p:ext uri="{BB962C8B-B14F-4D97-AF65-F5344CB8AC3E}">
-        <p14:creationId xmlns:p14="http://schemas.microsoft.com/office/powerpoint/2010/main" val="4134275196"/>
-      </p:ext>
-    </p:extLst>
-  </p:cSld>
-  <p:clrMapOvr>
-    <a:masterClrMapping/>
-  </p:clrMapOvr>
-  <p:timing>
-    <p:tnLst>
-      <p:par>
-        <p:cTn id="1" dur="indefinite" restart="never" nodeType="tmRoot"/>
-      </p:par>
-    </p:tnLst>
-  </p:timing>
-</p:sld>
-</file>
-
-<file path=ppt/slides/slide23.xml><?xml version="1.0" encoding="utf-8"?>
+<file path=ppt/slides/slide25.xml><?xml version="1.0" encoding="utf-8"?>
 <p:sld xmlns:a="http://schemas.openxmlformats.org/drawingml/2006/main" xmlns:r="http://schemas.openxmlformats.org/officeDocument/2006/relationships" xmlns:p="http://schemas.openxmlformats.org/presentationml/2006/main">
   <p:cSld>
     <p:spTree>
@@ -17294,7 +18376,7 @@
           <a:p>
             <a:pPr algn="ctr"/>
             <a:r>
-              <a:rPr lang="de-DE" sz="3200" b="1" dirty="0" smtClean="0">
+              <a:rPr lang="de-DE" sz="3200" b="1" dirty="0">
                 <a:solidFill>
                   <a:schemeClr val="tx1"/>
                 </a:solidFill>
@@ -17624,7 +18706,7 @@
 </p:sld>
 </file>
 
-<file path=ppt/slides/slide24.xml><?xml version="1.0" encoding="utf-8"?>
+<file path=ppt/slides/slide26.xml><?xml version="1.0" encoding="utf-8"?>
 <p:sld xmlns:a="http://schemas.openxmlformats.org/drawingml/2006/main" xmlns:r="http://schemas.openxmlformats.org/officeDocument/2006/relationships" xmlns:p="http://schemas.openxmlformats.org/presentationml/2006/main">
   <p:cSld>
     <p:spTree>
@@ -17874,7 +18956,7 @@
           <a:lstStyle/>
           <a:p>
             <a:r>
-              <a:rPr lang="de-AT" sz="4800" dirty="0" smtClean="0">
+              <a:rPr lang="de-AT" sz="4800" dirty="0">
                 <a:latin typeface="Bahnschrift" panose="020B0502040204020203" pitchFamily="34" charset="0"/>
               </a:rPr>
               <a:t>Yes</a:t>
@@ -18030,7 +19112,7 @@
 </p:sld>
 </file>
 
-<file path=ppt/slides/slide25.xml><?xml version="1.0" encoding="utf-8"?>
+<file path=ppt/slides/slide27.xml><?xml version="1.0" encoding="utf-8"?>
 <p:sld xmlns:a="http://schemas.openxmlformats.org/drawingml/2006/main" xmlns:r="http://schemas.openxmlformats.org/officeDocument/2006/relationships" xmlns:p="http://schemas.openxmlformats.org/presentationml/2006/main">
   <p:cSld>
     <p:spTree>
@@ -18362,7 +19444,7 @@
 </p:sld>
 </file>
 
-<file path=ppt/slides/slide26.xml><?xml version="1.0" encoding="utf-8"?>
+<file path=ppt/slides/slide28.xml><?xml version="1.0" encoding="utf-8"?>
 <p:sld xmlns:a="http://schemas.openxmlformats.org/drawingml/2006/main" xmlns:r="http://schemas.openxmlformats.org/officeDocument/2006/relationships" xmlns:p="http://schemas.openxmlformats.org/presentationml/2006/main">
   <p:cSld>
     <p:spTree>
@@ -18976,8 +20058,8 @@
             <a:chExt cx="10515600" cy="1475178"/>
           </a:xfrm>
         </p:grpSpPr>
-        <mc:AlternateContent xmlns:mc="http://schemas.openxmlformats.org/markup-compatibility/2006" xmlns:a14="http://schemas.microsoft.com/office/drawing/2010/main">
-          <mc:Choice Requires="a14">
+        <mc:AlternateContent xmlns:mc="http://schemas.openxmlformats.org/markup-compatibility/2006">
+          <mc:Choice xmlns:a14="http://schemas.microsoft.com/office/drawing/2010/main" Requires="a14">
             <p:sp>
               <p:nvSpPr>
                 <p:cNvPr id="8" name="Rounded Rectangle 7"/>
@@ -19085,6 +20167,24 @@
                       </a:solidFill>
                       <a:latin typeface="Bahnschrift" panose="020B0502040204020203" pitchFamily="34" charset="0"/>
                     </a:rPr>
+                    <a:t>inverse</a:t>
+                  </a:r>
+                  <a:r>
+                    <a:rPr lang="de-DE" sz="2400" dirty="0">
+                      <a:solidFill>
+                        <a:schemeClr val="tx1"/>
+                      </a:solidFill>
+                      <a:ea typeface="Cambria Math" panose="02040503050406030204" pitchFamily="18" charset="0"/>
+                    </a:rPr>
+                    <a:t> </a:t>
+                  </a:r>
+                  <a:r>
+                    <a:rPr lang="de-DE" sz="2400" dirty="0">
+                      <a:solidFill>
+                        <a:schemeClr val="tx1"/>
+                      </a:solidFill>
+                      <a:latin typeface="Bahnschrift" panose="020B0502040204020203" pitchFamily="34" charset="0"/>
+                    </a:rPr>
                     <a:t>temperature</a:t>
                   </a:r>
                   <a:endParaRPr lang="en-GB" sz="2400" dirty="0">
@@ -19097,7 +20197,7 @@
               </p:txBody>
             </p:sp>
           </mc:Choice>
-          <mc:Fallback xmlns="">
+          <mc:Fallback>
             <p:sp>
               <p:nvSpPr>
                 <p:cNvPr id="8" name="Rounded Rectangle 7"/>
@@ -19136,7 +20236,7 @@
                 <a:lstStyle/>
                 <a:p>
                   <a:r>
-                    <a:rPr lang="en-GB">
+                    <a:rPr lang="en-US">
                       <a:noFill/>
                     </a:rPr>
                     <a:t> </a:t>
@@ -19395,8 +20495,8 @@
           </a:p>
         </p:txBody>
       </p:sp>
-      <mc:AlternateContent xmlns:mc="http://schemas.openxmlformats.org/markup-compatibility/2006" xmlns:a14="http://schemas.microsoft.com/office/drawing/2010/main">
-        <mc:Choice Requires="a14">
+      <mc:AlternateContent xmlns:mc="http://schemas.openxmlformats.org/markup-compatibility/2006">
+        <mc:Choice xmlns:a14="http://schemas.microsoft.com/office/drawing/2010/main" Requires="a14">
           <p:sp>
             <p:nvSpPr>
               <p:cNvPr id="9" name="Rounded Rectangle 8"/>
@@ -19405,7 +20505,7 @@
             </p:nvSpPr>
             <p:spPr>
               <a:xfrm>
-                <a:off x="7946474" y="4545597"/>
+                <a:off x="8035374" y="4585398"/>
                 <a:ext cx="2507295" cy="1502310"/>
               </a:xfrm>
               <a:prstGeom prst="roundRect">
@@ -19605,7 +20705,7 @@
             </p:txBody>
           </p:sp>
         </mc:Choice>
-        <mc:Fallback xmlns="">
+        <mc:Fallback>
           <p:sp>
             <p:nvSpPr>
               <p:cNvPr id="9" name="Rounded Rectangle 8"/>
@@ -19616,7 +20716,7 @@
             </p:nvSpPr>
             <p:spPr>
               <a:xfrm>
-                <a:off x="7946474" y="4545597"/>
+                <a:off x="8035374" y="4585398"/>
                 <a:ext cx="2507295" cy="1502310"/>
               </a:xfrm>
               <a:prstGeom prst="roundRect">
@@ -19627,7 +20727,7 @@
               <a:blipFill>
                 <a:blip r:embed="rId7"/>
                 <a:stretch>
-                  <a:fillRect/>
+                  <a:fillRect r="-472"/>
                 </a:stretch>
               </a:blipFill>
               <a:ln w="76200">
@@ -19644,7 +20744,7 @@
               <a:lstStyle/>
               <a:p>
                 <a:r>
-                  <a:rPr lang="en-GB">
+                  <a:rPr lang="en-US">
                     <a:noFill/>
                   </a:rPr>
                   <a:t> </a:t>
@@ -19676,9 +20776,6 @@
                     <p:cTn id="3" fill="hold">
                       <p:stCondLst>
                         <p:cond delay="indefinite"/>
-                        <p:cond evt="onBegin" delay="0">
-                          <p:tn val="2"/>
-                        </p:cond>
                       </p:stCondLst>
                       <p:childTnLst>
                         <p:par>
@@ -19688,7 +20785,7 @@
                             </p:stCondLst>
                             <p:childTnLst>
                               <p:par>
-                                <p:cTn id="5" presetID="1" presetClass="exit" presetSubtype="0" fill="hold" grpId="2" nodeType="withEffect">
+                                <p:cTn id="5" presetID="1" presetClass="entr" presetSubtype="0" fill="hold" nodeType="clickEffect">
                                   <p:stCondLst>
                                     <p:cond delay="0"/>
                                   </p:stCondLst>
@@ -19701,16 +20798,64 @@
                                           </p:stCondLst>
                                         </p:cTn>
                                         <p:tgtEl>
-                                          <p:spTgt spid="9"/>
+                                          <p:spTgt spid="10">
+                                            <p:txEl>
+                                              <p:pRg st="0" end="0"/>
+                                            </p:txEl>
+                                          </p:spTgt>
                                         </p:tgtEl>
                                         <p:attrNameLst>
                                           <p:attrName>style.visibility</p:attrName>
                                         </p:attrNameLst>
                                       </p:cBhvr>
                                       <p:to>
-                                        <p:strVal val="hidden"/>
+                                        <p:strVal val="visible"/>
                                       </p:to>
                                     </p:set>
+                                  </p:childTnLst>
+                                </p:cTn>
+                              </p:par>
+                            </p:childTnLst>
+                          </p:cTn>
+                        </p:par>
+                        <p:par>
+                          <p:cTn id="7" fill="hold">
+                            <p:stCondLst>
+                              <p:cond delay="0"/>
+                            </p:stCondLst>
+                            <p:childTnLst>
+                              <p:par>
+                                <p:cTn id="8" presetID="22" presetClass="entr" presetSubtype="1" fill="hold" nodeType="afterEffect">
+                                  <p:stCondLst>
+                                    <p:cond delay="0"/>
+                                  </p:stCondLst>
+                                  <p:childTnLst>
+                                    <p:set>
+                                      <p:cBhvr>
+                                        <p:cTn id="9" dur="1" fill="hold">
+                                          <p:stCondLst>
+                                            <p:cond delay="0"/>
+                                          </p:stCondLst>
+                                        </p:cTn>
+                                        <p:tgtEl>
+                                          <p:spTgt spid="4"/>
+                                        </p:tgtEl>
+                                        <p:attrNameLst>
+                                          <p:attrName>style.visibility</p:attrName>
+                                        </p:attrNameLst>
+                                      </p:cBhvr>
+                                      <p:to>
+                                        <p:strVal val="visible"/>
+                                      </p:to>
+                                    </p:set>
+                                    <p:animEffect transition="in" filter="wipe(up)">
+                                      <p:cBhvr>
+                                        <p:cTn id="10" dur="500"/>
+                                        <p:tgtEl>
+                                          <p:spTgt spid="4"/>
+                                        </p:tgtEl>
+                                      </p:cBhvr>
+                                    </p:animEffect>
                                   </p:childTnLst>
                                 </p:cTn>
                               </p:par>
@@ -19721,26 +20866,110 @@
                     </p:cTn>
                   </p:par>
                   <p:par>
-                    <p:cTn id="7" fill="hold">
+                    <p:cTn id="11" fill="hold">
                       <p:stCondLst>
                         <p:cond delay="indefinite"/>
                       </p:stCondLst>
                       <p:childTnLst>
                         <p:par>
-                          <p:cTn id="8" fill="hold">
+                          <p:cTn id="12" fill="hold">
                             <p:stCondLst>
                               <p:cond delay="0"/>
                             </p:stCondLst>
                             <p:childTnLst>
                               <p:par>
-                                <p:cTn id="9" presetID="53" presetClass="entr" presetSubtype="16" fill="hold" grpId="0" nodeType="clickEffect">
+                                <p:cTn id="13" presetID="1" presetClass="entr" presetSubtype="0" fill="hold" nodeType="clickEffect">
                                   <p:stCondLst>
                                     <p:cond delay="0"/>
                                   </p:stCondLst>
                                   <p:childTnLst>
                                     <p:set>
                                       <p:cBhvr>
-                                        <p:cTn id="10" dur="1" fill="hold">
+                                        <p:cTn id="14" dur="1" fill="hold">
+                                          <p:stCondLst>
+                                            <p:cond delay="0"/>
+                                          </p:stCondLst>
+                                        </p:cTn>
+                                        <p:tgtEl>
+                                          <p:spTgt spid="10">
+                                            <p:txEl>
+                                              <p:pRg st="5" end="5"/>
+                                            </p:txEl>
+                                          </p:spTgt>
+                                        </p:tgtEl>
+                                        <p:attrNameLst>
+                                          <p:attrName>style.visibility</p:attrName>
+                                        </p:attrNameLst>
+                                      </p:cBhvr>
+                                      <p:to>
+                                        <p:strVal val="visible"/>
+                                      </p:to>
+                                    </p:set>
+                                  </p:childTnLst>
+                                </p:cTn>
+                              </p:par>
+                              <p:par>
+                                <p:cTn id="15" presetID="22" presetClass="entr" presetSubtype="1" fill="hold" nodeType="withEffect">
+                                  <p:stCondLst>
+                                    <p:cond delay="0"/>
+                                  </p:stCondLst>
+                                  <p:childTnLst>
+                                    <p:set>
+                                      <p:cBhvr>
+                                        <p:cTn id="16" dur="1" fill="hold">
+                                          <p:stCondLst>
+                                            <p:cond delay="0"/>
+                                          </p:stCondLst>
+                                        </p:cTn>
+                                        <p:tgtEl>
+                                          <p:spTgt spid="11"/>
+                                        </p:tgtEl>
+                                        <p:attrNameLst>
+                                          <p:attrName>style.visibility</p:attrName>
+                                        </p:attrNameLst>
+                                      </p:cBhvr>
+                                      <p:to>
+                                        <p:strVal val="visible"/>
+                                      </p:to>
+                                    </p:set>
+                                    <p:animEffect transition="in" filter="wipe(up)">
+                                      <p:cBhvr>
+                                        <p:cTn id="17" dur="500"/>
+                                        <p:tgtEl>
+                                          <p:spTgt spid="11"/>
+                                        </p:tgtEl>
+                                      </p:cBhvr>
+                                    </p:animEffect>
+                                  </p:childTnLst>
+                                </p:cTn>
+                              </p:par>
+                            </p:childTnLst>
+                          </p:cTn>
+                        </p:par>
+                      </p:childTnLst>
+                    </p:cTn>
+                  </p:par>
+                  <p:par>
+                    <p:cTn id="18" fill="hold">
+                      <p:stCondLst>
+                        <p:cond delay="indefinite"/>
+                      </p:stCondLst>
+                      <p:childTnLst>
+                        <p:par>
+                          <p:cTn id="19" fill="hold">
+                            <p:stCondLst>
+                              <p:cond delay="0"/>
+                            </p:stCondLst>
+                            <p:childTnLst>
+                              <p:par>
+                                <p:cTn id="20" presetID="53" presetClass="entr" presetSubtype="16" fill="hold" grpId="0" nodeType="clickEffect">
+                                  <p:stCondLst>
+                                    <p:cond delay="0"/>
+                                  </p:stCondLst>
+                                  <p:childTnLst>
+                                    <p:set>
+                                      <p:cBhvr>
+                                        <p:cTn id="21" dur="1" fill="hold">
                                           <p:stCondLst>
                                             <p:cond delay="0"/>
                                           </p:stCondLst>
@@ -19758,7 +20987,7 @@
                                     </p:set>
                                     <p:anim calcmode="lin" valueType="num">
                                       <p:cBhvr>
-                                        <p:cTn id="11" dur="250" fill="hold"/>
+                                        <p:cTn id="22" dur="250" fill="hold"/>
                                         <p:tgtEl>
                                           <p:spTgt spid="9"/>
                                         </p:tgtEl>
@@ -19781,7 +21010,7 @@
                                     </p:anim>
                                     <p:anim calcmode="lin" valueType="num">
                                       <p:cBhvr>
-                                        <p:cTn id="12" dur="250" fill="hold"/>
+                                        <p:cTn id="23" dur="250" fill="hold"/>
                                         <p:tgtEl>
                                           <p:spTgt spid="9"/>
                                         </p:tgtEl>
@@ -19804,7 +21033,7 @@
                                     </p:anim>
                                     <p:animEffect transition="in" filter="fade">
                                       <p:cBhvr>
-                                        <p:cTn id="13" dur="250"/>
+                                        <p:cTn id="24" dur="250"/>
                                         <p:tgtEl>
                                           <p:spTgt spid="9"/>
                                         </p:tgtEl>
@@ -19820,26 +21049,26 @@
                     </p:cTn>
                   </p:par>
                   <p:par>
-                    <p:cTn id="14" fill="hold">
+                    <p:cTn id="25" fill="hold">
                       <p:stCondLst>
                         <p:cond delay="indefinite"/>
                       </p:stCondLst>
                       <p:childTnLst>
                         <p:par>
-                          <p:cTn id="15" fill="hold">
+                          <p:cTn id="26" fill="hold">
                             <p:stCondLst>
                               <p:cond delay="0"/>
                             </p:stCondLst>
                             <p:childTnLst>
                               <p:par>
-                                <p:cTn id="16" presetID="10" presetClass="exit" presetSubtype="0" fill="hold" grpId="1" nodeType="clickEffect">
+                                <p:cTn id="27" presetID="10" presetClass="exit" presetSubtype="0" fill="hold" grpId="1" nodeType="clickEffect">
                                   <p:stCondLst>
                                     <p:cond delay="0"/>
                                   </p:stCondLst>
                                   <p:childTnLst>
                                     <p:animEffect transition="out" filter="fade">
                                       <p:cBhvr>
-                                        <p:cTn id="17" dur="250"/>
+                                        <p:cTn id="28" dur="250"/>
                                         <p:tgtEl>
                                           <p:spTgt spid="9"/>
                                         </p:tgtEl>
@@ -19847,7 +21076,7 @@
                                     </p:animEffect>
                                     <p:set>
                                       <p:cBhvr>
-                                        <p:cTn id="18" dur="1" fill="hold">
+                                        <p:cTn id="29" dur="1" fill="hold">
                                           <p:stCondLst>
                                             <p:cond delay="249"/>
                                           </p:stCondLst>
@@ -19861,55 +21090,6 @@
                                       </p:cBhvr>
                                       <p:to>
                                         <p:strVal val="hidden"/>
-                                      </p:to>
-                                    </p:set>
-                                  </p:childTnLst>
-                                </p:cTn>
-                              </p:par>
-                            </p:childTnLst>
-                          </p:cTn>
-                        </p:par>
-                      </p:childTnLst>
-                    </p:cTn>
-                  </p:par>
-                  <p:par>
-                    <p:cTn id="19" fill="hold">
-                      <p:stCondLst>
-                        <p:cond delay="indefinite"/>
-                      </p:stCondLst>
-                      <p:childTnLst>
-                        <p:par>
-                          <p:cTn id="20" fill="hold">
-                            <p:stCondLst>
-                              <p:cond delay="0"/>
-                            </p:stCondLst>
-                            <p:childTnLst>
-                              <p:par>
-                                <p:cTn id="21" presetID="1" presetClass="entr" presetSubtype="0" fill="hold" nodeType="clickEffect">
-                                  <p:stCondLst>
-                                    <p:cond delay="0"/>
-                                  </p:stCondLst>
-                                  <p:childTnLst>
-                                    <p:set>
-                                      <p:cBhvr>
-                                        <p:cTn id="22" dur="1" fill="hold">
-                                          <p:stCondLst>
-                                            <p:cond delay="0"/>
-                                          </p:stCondLst>
-                                        </p:cTn>
-                                        <p:tgtEl>
-                                          <p:spTgt spid="10">
-                                            <p:txEl>
-                                              <p:pRg st="0" end="0"/>
-                                            </p:txEl>
-                                          </p:spTgt>
-                                        </p:tgtEl>
-                                        <p:attrNameLst>
-                                          <p:attrName>style.visibility</p:attrName>
-                                        </p:attrNameLst>
-                                      </p:cBhvr>
-                                      <p:to>
-                                        <p:strVal val="visible"/>
                                       </p:to>
                                     </p:set>
                                   </p:childTnLst>
@@ -19945,13 +21125,12 @@
     <p:bldLst>
       <p:bldP spid="9" grpId="0" animBg="1"/>
       <p:bldP spid="9" grpId="1" animBg="1"/>
-      <p:bldP spid="9" grpId="2" animBg="1"/>
     </p:bldLst>
   </p:timing>
 </p:sld>
 </file>
 
-<file path=ppt/slides/slide27.xml><?xml version="1.0" encoding="utf-8"?>
+<file path=ppt/slides/slide29.xml><?xml version="1.0" encoding="utf-8"?>
 <p:sld xmlns:a="http://schemas.openxmlformats.org/drawingml/2006/main" xmlns:r="http://schemas.openxmlformats.org/officeDocument/2006/relationships" xmlns:p="http://schemas.openxmlformats.org/presentationml/2006/main">
   <p:cSld>
     <p:spTree>
@@ -21146,8 +22325,8 @@
           </a:p>
         </p:txBody>
       </p:sp>
-      <mc:AlternateContent xmlns:mc="http://schemas.openxmlformats.org/markup-compatibility/2006" xmlns:a14="http://schemas.microsoft.com/office/drawing/2010/main">
-        <mc:Choice Requires="a14">
+      <mc:AlternateContent xmlns:mc="http://schemas.openxmlformats.org/markup-compatibility/2006">
+        <mc:Choice xmlns:a14="http://schemas.microsoft.com/office/drawing/2010/main" Requires="a14">
           <p:sp>
             <p:nvSpPr>
               <p:cNvPr id="9" name="Rounded Rectangle 8"/>
@@ -21156,7 +22335,7 @@
             </p:nvSpPr>
             <p:spPr>
               <a:xfrm>
-                <a:off x="12557098" y="2439693"/>
+                <a:off x="8766592" y="2772983"/>
                 <a:ext cx="4106573" cy="2871189"/>
               </a:xfrm>
               <a:prstGeom prst="roundRect">
@@ -21418,7 +22597,7 @@
             </p:txBody>
           </p:sp>
         </mc:Choice>
-        <mc:Fallback xmlns="">
+        <mc:Fallback>
           <p:sp>
             <p:nvSpPr>
               <p:cNvPr id="9" name="Rounded Rectangle 8"/>
@@ -21429,7 +22608,7 @@
             </p:nvSpPr>
             <p:spPr>
               <a:xfrm>
-                <a:off x="12557098" y="2439693"/>
+                <a:off x="8766592" y="2772983"/>
                 <a:ext cx="4106573" cy="2871189"/>
               </a:xfrm>
               <a:prstGeom prst="roundRect">
@@ -21457,7 +22636,7 @@
               <a:lstStyle/>
               <a:p>
                 <a:r>
-                  <a:rPr lang="en-GB">
+                  <a:rPr lang="en-US">
                     <a:noFill/>
                   </a:rPr>
                   <a:t> </a:t>
@@ -21477,17 +22656,976 @@
   <p:clrMapOvr>
     <a:masterClrMapping/>
   </p:clrMapOvr>
+</p:sld>
+</file>
+
+<file path=ppt/slides/slide3.xml><?xml version="1.0" encoding="utf-8"?>
+<p:sld xmlns:a="http://schemas.openxmlformats.org/drawingml/2006/main" xmlns:r="http://schemas.openxmlformats.org/officeDocument/2006/relationships" xmlns:p="http://schemas.openxmlformats.org/presentationml/2006/main">
+  <p:cSld>
+    <p:bg>
+      <p:bgPr>
+        <a:solidFill>
+          <a:srgbClr val="FFFDF7"/>
+        </a:solidFill>
+        <a:effectLst/>
+      </p:bgPr>
+    </p:bg>
+    <p:spTree>
+      <p:nvGrpSpPr>
+        <p:cNvPr id="1" name=""/>
+        <p:cNvGrpSpPr/>
+        <p:nvPr/>
+      </p:nvGrpSpPr>
+      <p:grpSpPr>
+        <a:xfrm>
+          <a:off x="0" y="0"/>
+          <a:ext cx="0" cy="0"/>
+          <a:chOff x="0" y="0"/>
+          <a:chExt cx="0" cy="0"/>
+        </a:xfrm>
+      </p:grpSpPr>
+      <p:sp>
+        <p:nvSpPr>
+          <p:cNvPr id="19" name="Rectangle 1">
+            <a:extLst>
+              <a:ext uri="{FF2B5EF4-FFF2-40B4-BE49-F238E27FC236}">
+                <a16:creationId xmlns:a16="http://schemas.microsoft.com/office/drawing/2014/main" id="{F4875B6E-600E-B7F3-4F41-95FCDC3AF294}"/>
+              </a:ext>
+            </a:extLst>
+          </p:cNvPr>
+          <p:cNvSpPr/>
+          <p:nvPr/>
+        </p:nvSpPr>
+        <p:spPr>
+          <a:xfrm>
+            <a:off x="5291423" y="-126805"/>
+            <a:ext cx="12776548" cy="7356400"/>
+          </a:xfrm>
+          <a:prstGeom prst="rect">
+            <a:avLst/>
+          </a:prstGeom>
+          <a:solidFill>
+            <a:srgbClr val="CFF1E6"/>
+          </a:solidFill>
+          <a:ln w="76200">
+            <a:noFill/>
+          </a:ln>
+        </p:spPr>
+        <p:style>
+          <a:lnRef idx="2">
+            <a:schemeClr val="accent1">
+              <a:shade val="50000"/>
+            </a:schemeClr>
+          </a:lnRef>
+          <a:fillRef idx="1">
+            <a:schemeClr val="accent1"/>
+          </a:fillRef>
+          <a:effectRef idx="0">
+            <a:schemeClr val="accent1"/>
+          </a:effectRef>
+          <a:fontRef idx="minor">
+            <a:schemeClr val="lt1"/>
+          </a:fontRef>
+        </p:style>
+        <p:txBody>
+          <a:bodyPr rtlCol="0" anchor="ctr"/>
+          <a:lstStyle/>
+          <a:p>
+            <a:pPr algn="ctr"/>
+            <a:endParaRPr lang="en-GB" dirty="0"/>
+          </a:p>
+        </p:txBody>
+      </p:sp>
+      <p:pic>
+        <p:nvPicPr>
+          <p:cNvPr id="3" name="Grafik 2">
+            <a:extLst>
+              <a:ext uri="{FF2B5EF4-FFF2-40B4-BE49-F238E27FC236}">
+                <a16:creationId xmlns:a16="http://schemas.microsoft.com/office/drawing/2014/main" id="{0753DEEA-E640-8FE9-D6D0-74CDDF07C7EB}"/>
+              </a:ext>
+            </a:extLst>
+          </p:cNvPr>
+          <p:cNvPicPr>
+            <a:picLocks noChangeAspect="1"/>
+          </p:cNvPicPr>
+          <p:nvPr/>
+        </p:nvPicPr>
+        <p:blipFill>
+          <a:blip r:embed="rId2" cstate="print">
+            <a:extLst>
+              <a:ext uri="{28A0092B-C50C-407E-A947-70E740481C1C}">
+                <a14:useLocalDpi xmlns:a14="http://schemas.microsoft.com/office/drawing/2010/main" val="0"/>
+              </a:ext>
+            </a:extLst>
+          </a:blip>
+          <a:stretch>
+            <a:fillRect/>
+          </a:stretch>
+        </p:blipFill>
+        <p:spPr>
+          <a:xfrm>
+            <a:off x="5988429" y="3551395"/>
+            <a:ext cx="1543046" cy="2743194"/>
+          </a:xfrm>
+          <a:prstGeom prst="rect">
+            <a:avLst/>
+          </a:prstGeom>
+        </p:spPr>
+      </p:pic>
+      <p:pic>
+        <p:nvPicPr>
+          <p:cNvPr id="7" name="Grafik 6">
+            <a:extLst>
+              <a:ext uri="{FF2B5EF4-FFF2-40B4-BE49-F238E27FC236}">
+                <a16:creationId xmlns:a16="http://schemas.microsoft.com/office/drawing/2014/main" id="{557D7CBF-6343-9F61-58AC-B0C3A94720FA}"/>
+              </a:ext>
+            </a:extLst>
+          </p:cNvPr>
+          <p:cNvPicPr>
+            <a:picLocks noChangeAspect="1"/>
+          </p:cNvPicPr>
+          <p:nvPr/>
+        </p:nvPicPr>
+        <p:blipFill>
+          <a:blip r:embed="rId3" cstate="print">
+            <a:extLst>
+              <a:ext uri="{28A0092B-C50C-407E-A947-70E740481C1C}">
+                <a14:useLocalDpi xmlns:a14="http://schemas.microsoft.com/office/drawing/2010/main" val="0"/>
+              </a:ext>
+            </a:extLst>
+          </a:blip>
+          <a:stretch>
+            <a:fillRect/>
+          </a:stretch>
+        </p:blipFill>
+        <p:spPr>
+          <a:xfrm>
+            <a:off x="9643922" y="452475"/>
+            <a:ext cx="1694638" cy="3012692"/>
+          </a:xfrm>
+          <a:prstGeom prst="rect">
+            <a:avLst/>
+          </a:prstGeom>
+        </p:spPr>
+      </p:pic>
+      <p:sp>
+        <p:nvSpPr>
+          <p:cNvPr id="23" name="Rectangle 1">
+            <a:extLst>
+              <a:ext uri="{FF2B5EF4-FFF2-40B4-BE49-F238E27FC236}">
+                <a16:creationId xmlns:a16="http://schemas.microsoft.com/office/drawing/2014/main" id="{30BD6577-97BB-FA0F-B466-5F9C8E068385}"/>
+              </a:ext>
+            </a:extLst>
+          </p:cNvPr>
+          <p:cNvSpPr/>
+          <p:nvPr/>
+        </p:nvSpPr>
+        <p:spPr>
+          <a:xfrm>
+            <a:off x="10694" y="1671088"/>
+            <a:ext cx="5280729" cy="996558"/>
+          </a:xfrm>
+          <a:prstGeom prst="rect">
+            <a:avLst/>
+          </a:prstGeom>
+          <a:solidFill>
+            <a:srgbClr val="CFF1E6"/>
+          </a:solidFill>
+          <a:ln w="76200">
+            <a:noFill/>
+          </a:ln>
+        </p:spPr>
+        <p:style>
+          <a:lnRef idx="2">
+            <a:schemeClr val="accent1">
+              <a:shade val="50000"/>
+            </a:schemeClr>
+          </a:lnRef>
+          <a:fillRef idx="1">
+            <a:schemeClr val="accent1"/>
+          </a:fillRef>
+          <a:effectRef idx="0">
+            <a:schemeClr val="accent1"/>
+          </a:effectRef>
+          <a:fontRef idx="minor">
+            <a:schemeClr val="lt1"/>
+          </a:fontRef>
+        </p:style>
+        <p:txBody>
+          <a:bodyPr rtlCol="0" anchor="ctr"/>
+          <a:lstStyle/>
+          <a:p>
+            <a:pPr marL="0" marR="0" lvl="0" indent="0" algn="l" defTabSz="914400" rtl="0" eaLnBrk="1" fontAlgn="auto" latinLnBrk="0" hangingPunct="1">
+              <a:lnSpc>
+                <a:spcPct val="100000"/>
+              </a:lnSpc>
+              <a:spcBef>
+                <a:spcPts val="0"/>
+              </a:spcBef>
+              <a:spcAft>
+                <a:spcPts val="0"/>
+              </a:spcAft>
+              <a:buClr>
+                <a:prstClr val="black"/>
+              </a:buClr>
+              <a:buSzTx/>
+              <a:buFontTx/>
+              <a:buNone/>
+              <a:tabLst/>
+              <a:defRPr/>
+            </a:pPr>
+            <a:r>
+              <a:rPr kumimoji="0" lang="de-DE" sz="2800" b="0" i="0" u="none" strike="noStrike" kern="1200" cap="none" spc="0" normalizeH="0" baseline="0" noProof="0" dirty="0">
+                <a:ln>
+                  <a:noFill/>
+                </a:ln>
+                <a:solidFill>
+                  <a:prstClr val="black"/>
+                </a:solidFill>
+                <a:effectLst/>
+                <a:uLnTx/>
+                <a:uFillTx/>
+                <a:latin typeface="Bahnschrift" panose="020B0502040204020203" pitchFamily="34" charset="0"/>
+                <a:ea typeface="+mn-ea"/>
+                <a:cs typeface="+mn-cs"/>
+              </a:rPr>
+              <a:t>    Salzkammergut</a:t>
+            </a:r>
+            <a:endParaRPr kumimoji="0" lang="de-DE" sz="1800" b="0" i="0" u="none" strike="noStrike" kern="1200" cap="none" spc="0" normalizeH="0" baseline="0" noProof="0" dirty="0">
+              <a:ln>
+                <a:noFill/>
+              </a:ln>
+              <a:solidFill>
+                <a:prstClr val="black"/>
+              </a:solidFill>
+              <a:effectLst/>
+              <a:uLnTx/>
+              <a:uFillTx/>
+              <a:latin typeface="Bahnschrift" panose="020B0502040204020203" pitchFamily="34" charset="0"/>
+              <a:ea typeface="+mn-ea"/>
+              <a:cs typeface="+mn-cs"/>
+            </a:endParaRPr>
+          </a:p>
+        </p:txBody>
+      </p:sp>
+      <p:pic>
+        <p:nvPicPr>
+          <p:cNvPr id="9" name="Grafik 8">
+            <a:extLst>
+              <a:ext uri="{FF2B5EF4-FFF2-40B4-BE49-F238E27FC236}">
+                <a16:creationId xmlns:a16="http://schemas.microsoft.com/office/drawing/2014/main" id="{387893AC-5000-9F03-3725-FAC9E76339A7}"/>
+              </a:ext>
+            </a:extLst>
+          </p:cNvPr>
+          <p:cNvPicPr>
+            <a:picLocks noChangeAspect="1"/>
+          </p:cNvPicPr>
+          <p:nvPr/>
+        </p:nvPicPr>
+        <p:blipFill>
+          <a:blip r:embed="rId4" cstate="print">
+            <a:extLst>
+              <a:ext uri="{28A0092B-C50C-407E-A947-70E740481C1C}">
+                <a14:useLocalDpi xmlns:a14="http://schemas.microsoft.com/office/drawing/2010/main" val="0"/>
+              </a:ext>
+            </a:extLst>
+          </a:blip>
+          <a:stretch>
+            <a:fillRect/>
+          </a:stretch>
+        </p:blipFill>
+        <p:spPr>
+          <a:xfrm>
+            <a:off x="5548291" y="821191"/>
+            <a:ext cx="3966368" cy="2643976"/>
+          </a:xfrm>
+          <a:prstGeom prst="rect">
+            <a:avLst/>
+          </a:prstGeom>
+        </p:spPr>
+      </p:pic>
+      <p:pic>
+        <p:nvPicPr>
+          <p:cNvPr id="13" name="Grafik 12">
+            <a:extLst>
+              <a:ext uri="{FF2B5EF4-FFF2-40B4-BE49-F238E27FC236}">
+                <a16:creationId xmlns:a16="http://schemas.microsoft.com/office/drawing/2014/main" id="{E7C9F4DC-1BEC-A958-08ED-B179A946694F}"/>
+              </a:ext>
+            </a:extLst>
+          </p:cNvPr>
+          <p:cNvPicPr>
+            <a:picLocks noChangeAspect="1"/>
+          </p:cNvPicPr>
+          <p:nvPr/>
+        </p:nvPicPr>
+        <p:blipFill>
+          <a:blip r:embed="rId5" cstate="print">
+            <a:extLst>
+              <a:ext uri="{28A0092B-C50C-407E-A947-70E740481C1C}">
+                <a14:useLocalDpi xmlns:a14="http://schemas.microsoft.com/office/drawing/2010/main" val="0"/>
+              </a:ext>
+            </a:extLst>
+          </a:blip>
+          <a:stretch>
+            <a:fillRect/>
+          </a:stretch>
+        </p:blipFill>
+        <p:spPr>
+          <a:xfrm>
+            <a:off x="9332437" y="3551395"/>
+            <a:ext cx="2608860" cy="1739062"/>
+          </a:xfrm>
+          <a:prstGeom prst="rect">
+            <a:avLst/>
+          </a:prstGeom>
+        </p:spPr>
+      </p:pic>
+      <p:pic>
+        <p:nvPicPr>
+          <p:cNvPr id="15" name="Grafik 14">
+            <a:extLst>
+              <a:ext uri="{FF2B5EF4-FFF2-40B4-BE49-F238E27FC236}">
+                <a16:creationId xmlns:a16="http://schemas.microsoft.com/office/drawing/2014/main" id="{77507B0C-2797-2758-F38A-81D4642DB0BB}"/>
+              </a:ext>
+            </a:extLst>
+          </p:cNvPr>
+          <p:cNvPicPr>
+            <a:picLocks noChangeAspect="1"/>
+          </p:cNvPicPr>
+          <p:nvPr/>
+        </p:nvPicPr>
+        <p:blipFill>
+          <a:blip r:embed="rId6" cstate="print">
+            <a:extLst>
+              <a:ext uri="{28A0092B-C50C-407E-A947-70E740481C1C}">
+                <a14:useLocalDpi xmlns:a14="http://schemas.microsoft.com/office/drawing/2010/main" val="0"/>
+              </a:ext>
+            </a:extLst>
+          </a:blip>
+          <a:stretch>
+            <a:fillRect/>
+          </a:stretch>
+        </p:blipFill>
+        <p:spPr>
+          <a:xfrm>
+            <a:off x="7660433" y="3551395"/>
+            <a:ext cx="1543046" cy="2743193"/>
+          </a:xfrm>
+          <a:prstGeom prst="rect">
+            <a:avLst/>
+          </a:prstGeom>
+        </p:spPr>
+      </p:pic>
+      <p:sp>
+        <p:nvSpPr>
+          <p:cNvPr id="17" name="Rounded Rectangle 7">
+            <a:extLst>
+              <a:ext uri="{FF2B5EF4-FFF2-40B4-BE49-F238E27FC236}">
+                <a16:creationId xmlns:a16="http://schemas.microsoft.com/office/drawing/2014/main" id="{DA6E508B-91E6-A16E-935E-537BA37E3C18}"/>
+              </a:ext>
+            </a:extLst>
+          </p:cNvPr>
+          <p:cNvSpPr/>
+          <p:nvPr/>
+        </p:nvSpPr>
+        <p:spPr>
+          <a:xfrm>
+            <a:off x="192521" y="205986"/>
+            <a:ext cx="4969639" cy="1230410"/>
+          </a:xfrm>
+          <a:prstGeom prst="roundRect">
+            <a:avLst>
+              <a:gd name="adj" fmla="val 50000"/>
+            </a:avLst>
+          </a:prstGeom>
+          <a:solidFill>
+            <a:srgbClr val="FFFDF7"/>
+          </a:solidFill>
+          <a:ln w="76200">
+            <a:solidFill>
+              <a:schemeClr val="accent4">
+                <a:lumMod val="20000"/>
+                <a:lumOff val="80000"/>
+              </a:schemeClr>
+            </a:solidFill>
+          </a:ln>
+        </p:spPr>
+        <p:style>
+          <a:lnRef idx="2">
+            <a:schemeClr val="accent1">
+              <a:shade val="50000"/>
+            </a:schemeClr>
+          </a:lnRef>
+          <a:fillRef idx="1">
+            <a:schemeClr val="accent1"/>
+          </a:fillRef>
+          <a:effectRef idx="0">
+            <a:schemeClr val="accent1"/>
+          </a:effectRef>
+          <a:fontRef idx="minor">
+            <a:schemeClr val="lt1"/>
+          </a:fontRef>
+        </p:style>
+        <p:txBody>
+          <a:bodyPr rtlCol="0" anchor="ctr"/>
+          <a:lstStyle/>
+          <a:p>
+            <a:pPr algn="ctr"/>
+            <a:r>
+              <a:rPr lang="de-DE" sz="3200" b="1" dirty="0">
+                <a:solidFill>
+                  <a:schemeClr val="tx1"/>
+                </a:solidFill>
+                <a:latin typeface="Geneva" panose="020B0503030404040204" pitchFamily="34" charset="0"/>
+              </a:rPr>
+              <a:t>Who </a:t>
+            </a:r>
+            <a:r>
+              <a:rPr lang="de-DE" sz="3200" b="1" dirty="0" err="1">
+                <a:solidFill>
+                  <a:schemeClr val="tx1"/>
+                </a:solidFill>
+                <a:latin typeface="Geneva" panose="020B0503030404040204" pitchFamily="34" charset="0"/>
+              </a:rPr>
+              <a:t>is</a:t>
+            </a:r>
+            <a:r>
+              <a:rPr lang="de-DE" sz="3200" b="1" dirty="0">
+                <a:solidFill>
+                  <a:schemeClr val="tx1"/>
+                </a:solidFill>
+                <a:latin typeface="Geneva" panose="020B0503030404040204" pitchFamily="34" charset="0"/>
+              </a:rPr>
+              <a:t> </a:t>
+            </a:r>
+            <a:r>
+              <a:rPr lang="de-DE" sz="3200" b="1" dirty="0" err="1">
+                <a:solidFill>
+                  <a:schemeClr val="tx1"/>
+                </a:solidFill>
+                <a:latin typeface="Geneva" panose="020B0503030404040204" pitchFamily="34" charset="0"/>
+              </a:rPr>
+              <a:t>this</a:t>
+            </a:r>
+            <a:r>
+              <a:rPr lang="de-DE" sz="3200" b="1" dirty="0">
+                <a:solidFill>
+                  <a:schemeClr val="tx1"/>
+                </a:solidFill>
+                <a:latin typeface="Geneva" panose="020B0503030404040204" pitchFamily="34" charset="0"/>
+              </a:rPr>
+              <a:t> </a:t>
+            </a:r>
+            <a:r>
+              <a:rPr lang="de-DE" sz="3200" b="1" dirty="0" err="1">
+                <a:solidFill>
+                  <a:schemeClr val="tx1"/>
+                </a:solidFill>
+                <a:latin typeface="Geneva" panose="020B0503030404040204" pitchFamily="34" charset="0"/>
+              </a:rPr>
+              <a:t>guy</a:t>
+            </a:r>
+            <a:r>
+              <a:rPr lang="de-DE" sz="3200" b="1" dirty="0">
+                <a:solidFill>
+                  <a:schemeClr val="tx1"/>
+                </a:solidFill>
+                <a:latin typeface="Geneva" panose="020B0503030404040204" pitchFamily="34" charset="0"/>
+              </a:rPr>
+              <a:t> </a:t>
+            </a:r>
+            <a:r>
+              <a:rPr lang="de-DE" sz="3200" b="1" dirty="0" err="1">
+                <a:solidFill>
+                  <a:schemeClr val="tx1"/>
+                </a:solidFill>
+                <a:latin typeface="Geneva" panose="020B0503030404040204" pitchFamily="34" charset="0"/>
+              </a:rPr>
+              <a:t>even</a:t>
+            </a:r>
+            <a:r>
+              <a:rPr lang="de-DE" sz="3200" b="1" dirty="0">
+                <a:solidFill>
+                  <a:schemeClr val="tx1"/>
+                </a:solidFill>
+                <a:latin typeface="Geneva" panose="020B0503030404040204" pitchFamily="34" charset="0"/>
+              </a:rPr>
+              <a:t>?</a:t>
+            </a:r>
+            <a:endParaRPr lang="en-GB" sz="3200" b="1" dirty="0">
+              <a:solidFill>
+                <a:schemeClr val="tx1"/>
+              </a:solidFill>
+              <a:latin typeface="Geneva" panose="020B0503030404040204" pitchFamily="34" charset="0"/>
+            </a:endParaRPr>
+          </a:p>
+        </p:txBody>
+      </p:sp>
+      <p:sp>
+        <p:nvSpPr>
+          <p:cNvPr id="25" name="Rectangle 1">
+            <a:extLst>
+              <a:ext uri="{FF2B5EF4-FFF2-40B4-BE49-F238E27FC236}">
+                <a16:creationId xmlns:a16="http://schemas.microsoft.com/office/drawing/2014/main" id="{A0681CB9-AD55-587D-A99F-B31A6847907C}"/>
+              </a:ext>
+            </a:extLst>
+          </p:cNvPr>
+          <p:cNvSpPr/>
+          <p:nvPr/>
+        </p:nvSpPr>
+        <p:spPr>
+          <a:xfrm>
+            <a:off x="0" y="2667646"/>
+            <a:ext cx="5291423" cy="996558"/>
+          </a:xfrm>
+          <a:prstGeom prst="rect">
+            <a:avLst/>
+          </a:prstGeom>
+          <a:solidFill>
+            <a:srgbClr val="CFF1E6">
+              <a:alpha val="46000"/>
+            </a:srgbClr>
+          </a:solidFill>
+          <a:ln w="76200">
+            <a:noFill/>
+          </a:ln>
+        </p:spPr>
+        <p:style>
+          <a:lnRef idx="2">
+            <a:schemeClr val="accent1">
+              <a:shade val="50000"/>
+            </a:schemeClr>
+          </a:lnRef>
+          <a:fillRef idx="1">
+            <a:schemeClr val="accent1"/>
+          </a:fillRef>
+          <a:effectRef idx="0">
+            <a:schemeClr val="accent1"/>
+          </a:effectRef>
+          <a:fontRef idx="minor">
+            <a:schemeClr val="lt1"/>
+          </a:fontRef>
+        </p:style>
+        <p:txBody>
+          <a:bodyPr rtlCol="0" anchor="ctr"/>
+          <a:lstStyle/>
+          <a:p>
+            <a:r>
+              <a:rPr lang="en-GB" sz="2800" dirty="0">
+                <a:solidFill>
+                  <a:schemeClr val="bg1">
+                    <a:lumMod val="75000"/>
+                  </a:schemeClr>
+                </a:solidFill>
+                <a:latin typeface="Bahnschrift" panose="020B0502040204020203" pitchFamily="34" charset="0"/>
+              </a:rPr>
+              <a:t>    Budweis</a:t>
+            </a:r>
+          </a:p>
+        </p:txBody>
+      </p:sp>
+      <p:sp>
+        <p:nvSpPr>
+          <p:cNvPr id="27" name="Rectangle 1">
+            <a:extLst>
+              <a:ext uri="{FF2B5EF4-FFF2-40B4-BE49-F238E27FC236}">
+                <a16:creationId xmlns:a16="http://schemas.microsoft.com/office/drawing/2014/main" id="{EB88FD50-47E5-2BD3-31EE-9686512815CE}"/>
+              </a:ext>
+            </a:extLst>
+          </p:cNvPr>
+          <p:cNvSpPr/>
+          <p:nvPr/>
+        </p:nvSpPr>
+        <p:spPr>
+          <a:xfrm>
+            <a:off x="-1" y="3664204"/>
+            <a:ext cx="5291423" cy="996558"/>
+          </a:xfrm>
+          <a:prstGeom prst="rect">
+            <a:avLst/>
+          </a:prstGeom>
+          <a:solidFill>
+            <a:srgbClr val="CFF1E6">
+              <a:alpha val="46000"/>
+            </a:srgbClr>
+          </a:solidFill>
+          <a:ln w="76200">
+            <a:noFill/>
+          </a:ln>
+        </p:spPr>
+        <p:style>
+          <a:lnRef idx="2">
+            <a:schemeClr val="accent1">
+              <a:shade val="50000"/>
+            </a:schemeClr>
+          </a:lnRef>
+          <a:fillRef idx="1">
+            <a:schemeClr val="accent1"/>
+          </a:fillRef>
+          <a:effectRef idx="0">
+            <a:schemeClr val="accent1"/>
+          </a:effectRef>
+          <a:fontRef idx="minor">
+            <a:schemeClr val="lt1"/>
+          </a:fontRef>
+        </p:style>
+        <p:txBody>
+          <a:bodyPr rtlCol="0" anchor="ctr"/>
+          <a:lstStyle/>
+          <a:p>
+            <a:r>
+              <a:rPr lang="en-GB" sz="2800" dirty="0">
+                <a:solidFill>
+                  <a:schemeClr val="bg1">
+                    <a:lumMod val="75000"/>
+                  </a:schemeClr>
+                </a:solidFill>
+                <a:latin typeface="Bahnschrift" panose="020B0502040204020203" pitchFamily="34" charset="0"/>
+              </a:rPr>
+              <a:t>    Linz</a:t>
+            </a:r>
+          </a:p>
+        </p:txBody>
+      </p:sp>
+      <p:sp>
+        <p:nvSpPr>
+          <p:cNvPr id="29" name="Rectangle 1">
+            <a:extLst>
+              <a:ext uri="{FF2B5EF4-FFF2-40B4-BE49-F238E27FC236}">
+                <a16:creationId xmlns:a16="http://schemas.microsoft.com/office/drawing/2014/main" id="{79AE1061-F0DE-4477-29F4-91AE43BD8BC9}"/>
+              </a:ext>
+            </a:extLst>
+          </p:cNvPr>
+          <p:cNvSpPr/>
+          <p:nvPr/>
+        </p:nvSpPr>
+        <p:spPr>
+          <a:xfrm>
+            <a:off x="-2" y="4660762"/>
+            <a:ext cx="5291423" cy="996558"/>
+          </a:xfrm>
+          <a:prstGeom prst="rect">
+            <a:avLst/>
+          </a:prstGeom>
+          <a:solidFill>
+            <a:srgbClr val="CFF1E6">
+              <a:alpha val="46000"/>
+            </a:srgbClr>
+          </a:solidFill>
+          <a:ln w="76200">
+            <a:noFill/>
+          </a:ln>
+        </p:spPr>
+        <p:style>
+          <a:lnRef idx="2">
+            <a:schemeClr val="accent1">
+              <a:shade val="50000"/>
+            </a:schemeClr>
+          </a:lnRef>
+          <a:fillRef idx="1">
+            <a:schemeClr val="accent1"/>
+          </a:fillRef>
+          <a:effectRef idx="0">
+            <a:schemeClr val="accent1"/>
+          </a:effectRef>
+          <a:fontRef idx="minor">
+            <a:schemeClr val="lt1"/>
+          </a:fontRef>
+        </p:style>
+        <p:txBody>
+          <a:bodyPr rtlCol="0" anchor="ctr"/>
+          <a:lstStyle/>
+          <a:p>
+            <a:r>
+              <a:rPr lang="en-GB" sz="2800" dirty="0">
+                <a:solidFill>
+                  <a:schemeClr val="bg1">
+                    <a:lumMod val="75000"/>
+                  </a:schemeClr>
+                </a:solidFill>
+                <a:latin typeface="Bahnschrift" panose="020B0502040204020203" pitchFamily="34" charset="0"/>
+              </a:rPr>
+              <a:t>    Vienna</a:t>
+            </a:r>
+          </a:p>
+        </p:txBody>
+      </p:sp>
+    </p:spTree>
+    <p:extLst>
+      <p:ext uri="{BB962C8B-B14F-4D97-AF65-F5344CB8AC3E}">
+        <p14:creationId xmlns:p14="http://schemas.microsoft.com/office/powerpoint/2010/main" val="2306856988"/>
+      </p:ext>
+    </p:extLst>
+  </p:cSld>
+  <p:clrMapOvr>
+    <a:masterClrMapping/>
+  </p:clrMapOvr>
   <p:timing>
     <p:tnLst>
       <p:par>
-        <p:cTn id="1" dur="indefinite" restart="never" nodeType="tmRoot"/>
+        <p:cTn id="1" dur="indefinite" restart="never" nodeType="tmRoot">
+          <p:childTnLst>
+            <p:seq concurrent="1" nextAc="seek">
+              <p:cTn id="2" dur="indefinite" nodeType="mainSeq">
+                <p:childTnLst>
+                  <p:par>
+                    <p:cTn id="3" fill="hold">
+                      <p:stCondLst>
+                        <p:cond delay="indefinite"/>
+                        <p:cond evt="onBegin" delay="0">
+                          <p:tn val="2"/>
+                        </p:cond>
+                      </p:stCondLst>
+                      <p:childTnLst>
+                        <p:par>
+                          <p:cTn id="4" fill="hold">
+                            <p:stCondLst>
+                              <p:cond delay="0"/>
+                            </p:stCondLst>
+                            <p:childTnLst>
+                              <p:par>
+                                <p:cTn id="5" presetID="10" presetClass="entr" presetSubtype="0" fill="hold" nodeType="afterEffect">
+                                  <p:stCondLst>
+                                    <p:cond delay="0"/>
+                                  </p:stCondLst>
+                                  <p:childTnLst>
+                                    <p:set>
+                                      <p:cBhvr>
+                                        <p:cTn id="6" dur="1" fill="hold">
+                                          <p:stCondLst>
+                                            <p:cond delay="0"/>
+                                          </p:stCondLst>
+                                        </p:cTn>
+                                        <p:tgtEl>
+                                          <p:spTgt spid="9"/>
+                                        </p:tgtEl>
+                                        <p:attrNameLst>
+                                          <p:attrName>style.visibility</p:attrName>
+                                        </p:attrNameLst>
+                                      </p:cBhvr>
+                                      <p:to>
+                                        <p:strVal val="visible"/>
+                                      </p:to>
+                                    </p:set>
+                                    <p:animEffect transition="in" filter="fade">
+                                      <p:cBhvr>
+                                        <p:cTn id="7" dur="100"/>
+                                        <p:tgtEl>
+                                          <p:spTgt spid="9"/>
+                                        </p:tgtEl>
+                                      </p:cBhvr>
+                                    </p:animEffect>
+                                  </p:childTnLst>
+                                </p:cTn>
+                              </p:par>
+                            </p:childTnLst>
+                          </p:cTn>
+                        </p:par>
+                        <p:par>
+                          <p:cTn id="8" fill="hold">
+                            <p:stCondLst>
+                              <p:cond delay="100"/>
+                            </p:stCondLst>
+                            <p:childTnLst>
+                              <p:par>
+                                <p:cTn id="9" presetID="10" presetClass="entr" presetSubtype="0" fill="hold" nodeType="afterEffect">
+                                  <p:stCondLst>
+                                    <p:cond delay="0"/>
+                                  </p:stCondLst>
+                                  <p:childTnLst>
+                                    <p:set>
+                                      <p:cBhvr>
+                                        <p:cTn id="10" dur="1" fill="hold">
+                                          <p:stCondLst>
+                                            <p:cond delay="0"/>
+                                          </p:stCondLst>
+                                        </p:cTn>
+                                        <p:tgtEl>
+                                          <p:spTgt spid="7"/>
+                                        </p:tgtEl>
+                                        <p:attrNameLst>
+                                          <p:attrName>style.visibility</p:attrName>
+                                        </p:attrNameLst>
+                                      </p:cBhvr>
+                                      <p:to>
+                                        <p:strVal val="visible"/>
+                                      </p:to>
+                                    </p:set>
+                                    <p:animEffect transition="in" filter="fade">
+                                      <p:cBhvr>
+                                        <p:cTn id="11" dur="100"/>
+                                        <p:tgtEl>
+                                          <p:spTgt spid="7"/>
+                                        </p:tgtEl>
+                                      </p:cBhvr>
+                                    </p:animEffect>
+                                  </p:childTnLst>
+                                </p:cTn>
+                              </p:par>
+                            </p:childTnLst>
+                          </p:cTn>
+                        </p:par>
+                        <p:par>
+                          <p:cTn id="12" fill="hold">
+                            <p:stCondLst>
+                              <p:cond delay="200"/>
+                            </p:stCondLst>
+                            <p:childTnLst>
+                              <p:par>
+                                <p:cTn id="13" presetID="10" presetClass="entr" presetSubtype="0" fill="hold" nodeType="afterEffect">
+                                  <p:stCondLst>
+                                    <p:cond delay="0"/>
+                                  </p:stCondLst>
+                                  <p:childTnLst>
+                                    <p:set>
+                                      <p:cBhvr>
+                                        <p:cTn id="14" dur="1" fill="hold">
+                                          <p:stCondLst>
+                                            <p:cond delay="0"/>
+                                          </p:stCondLst>
+                                        </p:cTn>
+                                        <p:tgtEl>
+                                          <p:spTgt spid="15"/>
+                                        </p:tgtEl>
+                                        <p:attrNameLst>
+                                          <p:attrName>style.visibility</p:attrName>
+                                        </p:attrNameLst>
+                                      </p:cBhvr>
+                                      <p:to>
+                                        <p:strVal val="visible"/>
+                                      </p:to>
+                                    </p:set>
+                                    <p:animEffect transition="in" filter="fade">
+                                      <p:cBhvr>
+                                        <p:cTn id="15" dur="100"/>
+                                        <p:tgtEl>
+                                          <p:spTgt spid="15"/>
+                                        </p:tgtEl>
+                                      </p:cBhvr>
+                                    </p:animEffect>
+                                  </p:childTnLst>
+                                </p:cTn>
+                              </p:par>
+                            </p:childTnLst>
+                          </p:cTn>
+                        </p:par>
+                        <p:par>
+                          <p:cTn id="16" fill="hold">
+                            <p:stCondLst>
+                              <p:cond delay="300"/>
+                            </p:stCondLst>
+                            <p:childTnLst>
+                              <p:par>
+                                <p:cTn id="17" presetID="10" presetClass="entr" presetSubtype="0" fill="hold" nodeType="afterEffect">
+                                  <p:stCondLst>
+                                    <p:cond delay="0"/>
+                                  </p:stCondLst>
+                                  <p:childTnLst>
+                                    <p:set>
+                                      <p:cBhvr>
+                                        <p:cTn id="18" dur="1" fill="hold">
+                                          <p:stCondLst>
+                                            <p:cond delay="0"/>
+                                          </p:stCondLst>
+                                        </p:cTn>
+                                        <p:tgtEl>
+                                          <p:spTgt spid="3"/>
+                                        </p:tgtEl>
+                                        <p:attrNameLst>
+                                          <p:attrName>style.visibility</p:attrName>
+                                        </p:attrNameLst>
+                                      </p:cBhvr>
+                                      <p:to>
+                                        <p:strVal val="visible"/>
+                                      </p:to>
+                                    </p:set>
+                                    <p:animEffect transition="in" filter="fade">
+                                      <p:cBhvr>
+                                        <p:cTn id="19" dur="100"/>
+                                        <p:tgtEl>
+                                          <p:spTgt spid="3"/>
+                                        </p:tgtEl>
+                                      </p:cBhvr>
+                                    </p:animEffect>
+                                  </p:childTnLst>
+                                </p:cTn>
+                              </p:par>
+                            </p:childTnLst>
+                          </p:cTn>
+                        </p:par>
+                        <p:par>
+                          <p:cTn id="20" fill="hold">
+                            <p:stCondLst>
+                              <p:cond delay="400"/>
+                            </p:stCondLst>
+                            <p:childTnLst>
+                              <p:par>
+                                <p:cTn id="21" presetID="10" presetClass="entr" presetSubtype="0" fill="hold" nodeType="afterEffect">
+                                  <p:stCondLst>
+                                    <p:cond delay="0"/>
+                                  </p:stCondLst>
+                                  <p:childTnLst>
+                                    <p:set>
+                                      <p:cBhvr>
+                                        <p:cTn id="22" dur="1" fill="hold">
+                                          <p:stCondLst>
+                                            <p:cond delay="0"/>
+                                          </p:stCondLst>
+                                        </p:cTn>
+                                        <p:tgtEl>
+                                          <p:spTgt spid="13"/>
+                                        </p:tgtEl>
+                                        <p:attrNameLst>
+                                          <p:attrName>style.visibility</p:attrName>
+                                        </p:attrNameLst>
+                                      </p:cBhvr>
+                                      <p:to>
+                                        <p:strVal val="visible"/>
+                                      </p:to>
+                                    </p:set>
+                                    <p:animEffect transition="in" filter="fade">
+                                      <p:cBhvr>
+                                        <p:cTn id="23" dur="100"/>
+                                        <p:tgtEl>
+                                          <p:spTgt spid="13"/>
+                                        </p:tgtEl>
+                                      </p:cBhvr>
+                                    </p:animEffect>
+                                  </p:childTnLst>
+                                </p:cTn>
+                              </p:par>
+                            </p:childTnLst>
+                          </p:cTn>
+                        </p:par>
+                      </p:childTnLst>
+                    </p:cTn>
+                  </p:par>
+                </p:childTnLst>
+              </p:cTn>
+              <p:prevCondLst>
+                <p:cond evt="onPrev" delay="0">
+                  <p:tgtEl>
+                    <p:sldTgt/>
+                  </p:tgtEl>
+                </p:cond>
+              </p:prevCondLst>
+              <p:nextCondLst>
+                <p:cond evt="onNext" delay="0">
+                  <p:tgtEl>
+                    <p:sldTgt/>
+                  </p:tgtEl>
+                </p:cond>
+              </p:nextCondLst>
+            </p:seq>
+          </p:childTnLst>
+        </p:cTn>
       </p:par>
     </p:tnLst>
   </p:timing>
 </p:sld>
 </file>
 
-<file path=ppt/slides/slide28.xml><?xml version="1.0" encoding="utf-8"?>
+<file path=ppt/slides/slide30.xml><?xml version="1.0" encoding="utf-8"?>
 <p:sld xmlns:a="http://schemas.openxmlformats.org/drawingml/2006/main" xmlns:r="http://schemas.openxmlformats.org/officeDocument/2006/relationships" xmlns:p="http://schemas.openxmlformats.org/presentationml/2006/main">
   <p:cSld>
     <p:spTree>
@@ -21874,7 +24012,7 @@
         <p:spPr>
           <a:xfrm>
             <a:off x="927100" y="1930400"/>
-            <a:ext cx="10337800" cy="3539430"/>
+            <a:ext cx="10337800" cy="3970318"/>
           </a:xfrm>
           <a:prstGeom prst="rect">
             <a:avLst/>
@@ -21891,7 +24029,48 @@
               <a:rPr lang="de-DE" sz="2800" dirty="0">
                 <a:latin typeface="Bahnschrift" panose="020B0502040204020203" pitchFamily="34" charset="0"/>
               </a:rPr>
-              <a:t>This allows us to simulate what the model would do and see how well it would match the participants choices, but this is </a:t>
+              <a:t>This allows us to simulate what the model would do.</a:t>
+            </a:r>
+            <a:br>
+              <a:rPr lang="de-DE" sz="2800" dirty="0">
+                <a:latin typeface="Bahnschrift" panose="020B0502040204020203" pitchFamily="34" charset="0"/>
+              </a:rPr>
+            </a:br>
+            <a:r>
+              <a:rPr lang="de-DE" sz="2800" dirty="0" err="1">
+                <a:latin typeface="Bahnschrift" panose="020B0502040204020203" pitchFamily="34" charset="0"/>
+              </a:rPr>
+              <a:t>We</a:t>
+            </a:r>
+            <a:r>
+              <a:rPr lang="de-DE" sz="2800" dirty="0">
+                <a:latin typeface="Bahnschrift" panose="020B0502040204020203" pitchFamily="34" charset="0"/>
+              </a:rPr>
+              <a:t> </a:t>
+            </a:r>
+            <a:r>
+              <a:rPr lang="de-DE" sz="2800" dirty="0" err="1">
+                <a:latin typeface="Bahnschrift" panose="020B0502040204020203" pitchFamily="34" charset="0"/>
+              </a:rPr>
+              <a:t>can</a:t>
+            </a:r>
+            <a:r>
+              <a:rPr lang="de-DE" sz="2800" dirty="0">
+                <a:latin typeface="Bahnschrift" panose="020B0502040204020203" pitchFamily="34" charset="0"/>
+              </a:rPr>
+              <a:t> </a:t>
+            </a:r>
+            <a:r>
+              <a:rPr lang="de-DE" sz="2800" dirty="0" err="1">
+                <a:latin typeface="Bahnschrift" panose="020B0502040204020203" pitchFamily="34" charset="0"/>
+              </a:rPr>
+              <a:t>observe</a:t>
+            </a:r>
+            <a:r>
+              <a:rPr lang="de-DE" sz="2800" dirty="0">
+                <a:latin typeface="Bahnschrift" panose="020B0502040204020203" pitchFamily="34" charset="0"/>
+              </a:rPr>
+              <a:t> how well it would match the participants choices, but this is </a:t>
             </a:r>
             <a:r>
               <a:rPr lang="de-DE" sz="2800" b="1" dirty="0">
@@ -21903,7 +24082,43 @@
               <a:rPr lang="de-DE" sz="2800" dirty="0">
                 <a:latin typeface="Bahnschrift" panose="020B0502040204020203" pitchFamily="34" charset="0"/>
               </a:rPr>
-              <a:t>what we want.</a:t>
+              <a:t>what </a:t>
+            </a:r>
+            <a:r>
+              <a:rPr lang="de-DE" sz="2800" dirty="0" err="1">
+                <a:latin typeface="Bahnschrift" panose="020B0502040204020203" pitchFamily="34" charset="0"/>
+              </a:rPr>
+              <a:t>we</a:t>
+            </a:r>
+            <a:r>
+              <a:rPr lang="de-DE" sz="2800" dirty="0">
+                <a:latin typeface="Bahnschrift" panose="020B0502040204020203" pitchFamily="34" charset="0"/>
+              </a:rPr>
+              <a:t> </a:t>
+            </a:r>
+            <a:r>
+              <a:rPr lang="de-DE" sz="2800" dirty="0" err="1">
+                <a:latin typeface="Bahnschrift" panose="020B0502040204020203" pitchFamily="34" charset="0"/>
+              </a:rPr>
+              <a:t>actually</a:t>
+            </a:r>
+            <a:r>
+              <a:rPr lang="de-DE" sz="2800" dirty="0">
+                <a:latin typeface="Bahnschrift" panose="020B0502040204020203" pitchFamily="34" charset="0"/>
+              </a:rPr>
+              <a:t> </a:t>
+            </a:r>
+            <a:r>
+              <a:rPr lang="de-DE" sz="2800" dirty="0" err="1">
+                <a:latin typeface="Bahnschrift" panose="020B0502040204020203" pitchFamily="34" charset="0"/>
+              </a:rPr>
+              <a:t>want</a:t>
+            </a:r>
+            <a:r>
+              <a:rPr lang="de-DE" sz="2800" dirty="0">
+                <a:latin typeface="Bahnschrift" panose="020B0502040204020203" pitchFamily="34" charset="0"/>
+              </a:rPr>
+              <a:t>.</a:t>
             </a:r>
           </a:p>
           <a:p>
@@ -21912,6 +24127,86 @@
             </a:endParaRPr>
           </a:p>
           <a:p>
+            <a:r>
+              <a:rPr lang="de-DE" sz="2800" dirty="0">
+                <a:latin typeface="Bahnschrift" panose="020B0502040204020203" pitchFamily="34" charset="0"/>
+              </a:rPr>
+              <a:t>Instead </a:t>
+            </a:r>
+            <a:r>
+              <a:rPr lang="de-DE" sz="2800" dirty="0" err="1">
+                <a:latin typeface="Bahnschrift" panose="020B0502040204020203" pitchFamily="34" charset="0"/>
+              </a:rPr>
+              <a:t>the</a:t>
+            </a:r>
+            <a:r>
+              <a:rPr lang="de-DE" sz="2800" dirty="0">
+                <a:latin typeface="Bahnschrift" panose="020B0502040204020203" pitchFamily="34" charset="0"/>
+              </a:rPr>
+              <a:t> </a:t>
+            </a:r>
+            <a:r>
+              <a:rPr lang="de-DE" sz="2800" dirty="0" err="1">
+                <a:latin typeface="Bahnschrift" panose="020B0502040204020203" pitchFamily="34" charset="0"/>
+              </a:rPr>
+              <a:t>model</a:t>
+            </a:r>
+            <a:r>
+              <a:rPr lang="de-DE" sz="2800" dirty="0">
+                <a:latin typeface="Bahnschrift" panose="020B0502040204020203" pitchFamily="34" charset="0"/>
+              </a:rPr>
+              <a:t> </a:t>
+            </a:r>
+            <a:r>
+              <a:rPr lang="de-DE" sz="2800" dirty="0" err="1">
+                <a:latin typeface="Bahnschrift" panose="020B0502040204020203" pitchFamily="34" charset="0"/>
+              </a:rPr>
+              <a:t>must</a:t>
+            </a:r>
+            <a:r>
+              <a:rPr lang="de-DE" sz="2800" dirty="0">
+                <a:latin typeface="Bahnschrift" panose="020B0502040204020203" pitchFamily="34" charset="0"/>
+              </a:rPr>
+              <a:t> </a:t>
+            </a:r>
+            <a:r>
+              <a:rPr lang="de-DE" sz="2800" b="1" dirty="0" err="1">
+                <a:latin typeface="Bahnschrift" panose="020B0502040204020203" pitchFamily="34" charset="0"/>
+              </a:rPr>
+              <a:t>shadow</a:t>
+            </a:r>
+            <a:r>
+              <a:rPr lang="de-DE" sz="2800" dirty="0">
+                <a:latin typeface="Bahnschrift" panose="020B0502040204020203" pitchFamily="34" charset="0"/>
+              </a:rPr>
+              <a:t> the participants choices and at each </a:t>
+            </a:r>
+            <a:r>
+              <a:rPr lang="de-DE" sz="2800" dirty="0" err="1">
+                <a:latin typeface="Bahnschrift" panose="020B0502040204020203" pitchFamily="34" charset="0"/>
+              </a:rPr>
+              <a:t>step</a:t>
+            </a:r>
+            <a:r>
+              <a:rPr lang="de-DE" sz="2800" dirty="0">
+                <a:latin typeface="Bahnschrift" panose="020B0502040204020203" pitchFamily="34" charset="0"/>
+              </a:rPr>
+              <a:t> </a:t>
+            </a:r>
+            <a:r>
+              <a:rPr lang="de-DE" sz="2800" dirty="0" err="1">
+                <a:latin typeface="Bahnschrift" panose="020B0502040204020203" pitchFamily="34" charset="0"/>
+              </a:rPr>
+              <a:t>determine</a:t>
+            </a:r>
+            <a:r>
+              <a:rPr lang="de-DE" sz="2800" dirty="0">
+                <a:latin typeface="Bahnschrift" panose="020B0502040204020203" pitchFamily="34" charset="0"/>
+              </a:rPr>
+              <a:t> how likely their choices are using the model weights. </a:t>
+            </a:r>
+          </a:p>
+          <a:p>
             <a:endParaRPr lang="de-DE" sz="2800" dirty="0">
               <a:latin typeface="Bahnschrift" panose="020B0502040204020203" pitchFamily="34" charset="0"/>
             </a:endParaRPr>
@@ -21921,19 +24216,91 @@
               <a:rPr lang="de-DE" sz="2800" dirty="0">
                 <a:latin typeface="Bahnschrift" panose="020B0502040204020203" pitchFamily="34" charset="0"/>
               </a:rPr>
-              <a:t>Instead the model </a:t>
-            </a:r>
-            <a:r>
-              <a:rPr lang="de-DE" sz="2800" b="1" dirty="0">
+              <a:t>Doing </a:t>
+            </a:r>
+            <a:r>
+              <a:rPr lang="de-DE" sz="2800" dirty="0" err="1">
                 <a:latin typeface="Bahnschrift" panose="020B0502040204020203" pitchFamily="34" charset="0"/>
               </a:rPr>
-              <a:t>shadows</a:t>
+              <a:t>this</a:t>
             </a:r>
             <a:r>
               <a:rPr lang="de-DE" sz="2800" dirty="0">
                 <a:latin typeface="Bahnschrift" panose="020B0502040204020203" pitchFamily="34" charset="0"/>
               </a:rPr>
-              <a:t> the participants choices and at each step determines how likely their choices are using the model weights. </a:t>
+              <a:t> </a:t>
+            </a:r>
+            <a:r>
+              <a:rPr lang="de-DE" sz="2800" dirty="0" err="1">
+                <a:latin typeface="Bahnschrift" panose="020B0502040204020203" pitchFamily="34" charset="0"/>
+              </a:rPr>
+              <a:t>gives</a:t>
+            </a:r>
+            <a:r>
+              <a:rPr lang="de-DE" sz="2800" dirty="0">
+                <a:latin typeface="Bahnschrift" panose="020B0502040204020203" pitchFamily="34" charset="0"/>
+              </a:rPr>
+              <a:t> </a:t>
+            </a:r>
+            <a:r>
+              <a:rPr lang="de-DE" sz="2800" dirty="0" err="1">
+                <a:latin typeface="Bahnschrift" panose="020B0502040204020203" pitchFamily="34" charset="0"/>
+              </a:rPr>
+              <a:t>us</a:t>
+            </a:r>
+            <a:r>
+              <a:rPr lang="de-DE" sz="2800" dirty="0">
+                <a:latin typeface="Bahnschrift" panose="020B0502040204020203" pitchFamily="34" charset="0"/>
+              </a:rPr>
+              <a:t> </a:t>
+            </a:r>
+            <a:r>
+              <a:rPr lang="de-DE" sz="2800" dirty="0" err="1">
+                <a:latin typeface="Bahnschrift" panose="020B0502040204020203" pitchFamily="34" charset="0"/>
+              </a:rPr>
+              <a:t>the</a:t>
+            </a:r>
+            <a:r>
+              <a:rPr lang="de-DE" sz="2800" dirty="0">
+                <a:latin typeface="Bahnschrift" panose="020B0502040204020203" pitchFamily="34" charset="0"/>
+              </a:rPr>
+              <a:t> </a:t>
+            </a:r>
+            <a:r>
+              <a:rPr lang="de-DE" sz="2800" dirty="0" err="1">
+                <a:latin typeface="Bahnschrift" panose="020B0502040204020203" pitchFamily="34" charset="0"/>
+              </a:rPr>
+              <a:t>quality</a:t>
+            </a:r>
+            <a:r>
+              <a:rPr lang="de-DE" sz="2800" dirty="0">
+                <a:latin typeface="Bahnschrift" panose="020B0502040204020203" pitchFamily="34" charset="0"/>
+              </a:rPr>
+              <a:t> </a:t>
+            </a:r>
+            <a:r>
+              <a:rPr lang="de-DE" sz="2800" dirty="0" err="1">
+                <a:latin typeface="Bahnschrift" panose="020B0502040204020203" pitchFamily="34" charset="0"/>
+              </a:rPr>
+              <a:t>of</a:t>
+            </a:r>
+            <a:r>
+              <a:rPr lang="de-DE" sz="2800" dirty="0">
+                <a:latin typeface="Bahnschrift" panose="020B0502040204020203" pitchFamily="34" charset="0"/>
+              </a:rPr>
+              <a:t> </a:t>
+            </a:r>
+            <a:r>
+              <a:rPr lang="de-DE" sz="2800" dirty="0" err="1">
+                <a:latin typeface="Bahnschrift" panose="020B0502040204020203" pitchFamily="34" charset="0"/>
+              </a:rPr>
+              <a:t>the</a:t>
+            </a:r>
+            <a:r>
+              <a:rPr lang="de-DE" sz="2800" dirty="0">
+                <a:latin typeface="Bahnschrift" panose="020B0502040204020203" pitchFamily="34" charset="0"/>
+              </a:rPr>
+              <a:t> fit.</a:t>
             </a:r>
             <a:endParaRPr lang="en-GB" sz="2800" dirty="0">
               <a:latin typeface="Bahnschrift" panose="020B0502040204020203" pitchFamily="34" charset="0"/>
@@ -21951,17 +24318,10 @@
   <p:clrMapOvr>
     <a:masterClrMapping/>
   </p:clrMapOvr>
-  <p:timing>
-    <p:tnLst>
-      <p:par>
-        <p:cTn id="1" dur="indefinite" restart="never" nodeType="tmRoot"/>
-      </p:par>
-    </p:tnLst>
-  </p:timing>
 </p:sld>
 </file>
 
-<file path=ppt/slides/slide29.xml><?xml version="1.0" encoding="utf-8"?>
+<file path=ppt/slides/slide31.xml><?xml version="1.0" encoding="utf-8"?>
 <p:sld xmlns:a="http://schemas.openxmlformats.org/drawingml/2006/main" xmlns:r="http://schemas.openxmlformats.org/officeDocument/2006/relationships" xmlns:p="http://schemas.openxmlformats.org/presentationml/2006/main">
   <p:cSld>
     <p:spTree>
@@ -22101,7 +24461,7 @@
           <a:p>
             <a:pPr algn="ctr"/>
             <a:r>
-              <a:rPr lang="de-DE" sz="3200" b="1" dirty="0" smtClean="0">
+              <a:rPr lang="de-DE" sz="3200" b="1" dirty="0">
                 <a:solidFill>
                   <a:schemeClr val="tx1"/>
                 </a:solidFill>
@@ -22249,973 +24609,7 @@
 </p:sld>
 </file>
 
-<file path=ppt/slides/slide3.xml><?xml version="1.0" encoding="utf-8"?>
-<p:sld xmlns:a="http://schemas.openxmlformats.org/drawingml/2006/main" xmlns:r="http://schemas.openxmlformats.org/officeDocument/2006/relationships" xmlns:p="http://schemas.openxmlformats.org/presentationml/2006/main">
-  <p:cSld>
-    <p:bg>
-      <p:bgPr>
-        <a:solidFill>
-          <a:srgbClr val="FFFDF7"/>
-        </a:solidFill>
-        <a:effectLst/>
-      </p:bgPr>
-    </p:bg>
-    <p:spTree>
-      <p:nvGrpSpPr>
-        <p:cNvPr id="1" name=""/>
-        <p:cNvGrpSpPr/>
-        <p:nvPr/>
-      </p:nvGrpSpPr>
-      <p:grpSpPr>
-        <a:xfrm>
-          <a:off x="0" y="0"/>
-          <a:ext cx="0" cy="0"/>
-          <a:chOff x="0" y="0"/>
-          <a:chExt cx="0" cy="0"/>
-        </a:xfrm>
-      </p:grpSpPr>
-      <p:sp>
-        <p:nvSpPr>
-          <p:cNvPr id="19" name="Rectangle 1">
-            <a:extLst>
-              <a:ext uri="{FF2B5EF4-FFF2-40B4-BE49-F238E27FC236}">
-                <a16:creationId xmlns:a16="http://schemas.microsoft.com/office/drawing/2014/main" id="{F4875B6E-600E-B7F3-4F41-95FCDC3AF294}"/>
-              </a:ext>
-            </a:extLst>
-          </p:cNvPr>
-          <p:cNvSpPr/>
-          <p:nvPr/>
-        </p:nvSpPr>
-        <p:spPr>
-          <a:xfrm>
-            <a:off x="5291423" y="-126805"/>
-            <a:ext cx="12776548" cy="7356400"/>
-          </a:xfrm>
-          <a:prstGeom prst="rect">
-            <a:avLst/>
-          </a:prstGeom>
-          <a:solidFill>
-            <a:srgbClr val="CFF1E6"/>
-          </a:solidFill>
-          <a:ln w="76200">
-            <a:noFill/>
-          </a:ln>
-        </p:spPr>
-        <p:style>
-          <a:lnRef idx="2">
-            <a:schemeClr val="accent1">
-              <a:shade val="50000"/>
-            </a:schemeClr>
-          </a:lnRef>
-          <a:fillRef idx="1">
-            <a:schemeClr val="accent1"/>
-          </a:fillRef>
-          <a:effectRef idx="0">
-            <a:schemeClr val="accent1"/>
-          </a:effectRef>
-          <a:fontRef idx="minor">
-            <a:schemeClr val="lt1"/>
-          </a:fontRef>
-        </p:style>
-        <p:txBody>
-          <a:bodyPr rtlCol="0" anchor="ctr"/>
-          <a:lstStyle/>
-          <a:p>
-            <a:pPr algn="ctr"/>
-            <a:endParaRPr lang="en-GB" dirty="0"/>
-          </a:p>
-        </p:txBody>
-      </p:sp>
-      <p:pic>
-        <p:nvPicPr>
-          <p:cNvPr id="3" name="Grafik 2">
-            <a:extLst>
-              <a:ext uri="{FF2B5EF4-FFF2-40B4-BE49-F238E27FC236}">
-                <a16:creationId xmlns:a16="http://schemas.microsoft.com/office/drawing/2014/main" id="{0753DEEA-E640-8FE9-D6D0-74CDDF07C7EB}"/>
-              </a:ext>
-            </a:extLst>
-          </p:cNvPr>
-          <p:cNvPicPr>
-            <a:picLocks noChangeAspect="1"/>
-          </p:cNvPicPr>
-          <p:nvPr/>
-        </p:nvPicPr>
-        <p:blipFill>
-          <a:blip r:embed="rId2" cstate="print">
-            <a:extLst>
-              <a:ext uri="{28A0092B-C50C-407E-A947-70E740481C1C}">
-                <a14:useLocalDpi xmlns:a14="http://schemas.microsoft.com/office/drawing/2010/main" val="0"/>
-              </a:ext>
-            </a:extLst>
-          </a:blip>
-          <a:stretch>
-            <a:fillRect/>
-          </a:stretch>
-        </p:blipFill>
-        <p:spPr>
-          <a:xfrm>
-            <a:off x="5988429" y="3551395"/>
-            <a:ext cx="1543046" cy="2743194"/>
-          </a:xfrm>
-          <a:prstGeom prst="rect">
-            <a:avLst/>
-          </a:prstGeom>
-        </p:spPr>
-      </p:pic>
-      <p:pic>
-        <p:nvPicPr>
-          <p:cNvPr id="7" name="Grafik 6">
-            <a:extLst>
-              <a:ext uri="{FF2B5EF4-FFF2-40B4-BE49-F238E27FC236}">
-                <a16:creationId xmlns:a16="http://schemas.microsoft.com/office/drawing/2014/main" id="{557D7CBF-6343-9F61-58AC-B0C3A94720FA}"/>
-              </a:ext>
-            </a:extLst>
-          </p:cNvPr>
-          <p:cNvPicPr>
-            <a:picLocks noChangeAspect="1"/>
-          </p:cNvPicPr>
-          <p:nvPr/>
-        </p:nvPicPr>
-        <p:blipFill>
-          <a:blip r:embed="rId3" cstate="print">
-            <a:extLst>
-              <a:ext uri="{28A0092B-C50C-407E-A947-70E740481C1C}">
-                <a14:useLocalDpi xmlns:a14="http://schemas.microsoft.com/office/drawing/2010/main" val="0"/>
-              </a:ext>
-            </a:extLst>
-          </a:blip>
-          <a:stretch>
-            <a:fillRect/>
-          </a:stretch>
-        </p:blipFill>
-        <p:spPr>
-          <a:xfrm>
-            <a:off x="9659161" y="416309"/>
-            <a:ext cx="1694638" cy="3012692"/>
-          </a:xfrm>
-          <a:prstGeom prst="rect">
-            <a:avLst/>
-          </a:prstGeom>
-        </p:spPr>
-      </p:pic>
-      <p:sp>
-        <p:nvSpPr>
-          <p:cNvPr id="23" name="Rectangle 1">
-            <a:extLst>
-              <a:ext uri="{FF2B5EF4-FFF2-40B4-BE49-F238E27FC236}">
-                <a16:creationId xmlns:a16="http://schemas.microsoft.com/office/drawing/2014/main" id="{30BD6577-97BB-FA0F-B466-5F9C8E068385}"/>
-              </a:ext>
-            </a:extLst>
-          </p:cNvPr>
-          <p:cNvSpPr/>
-          <p:nvPr/>
-        </p:nvSpPr>
-        <p:spPr>
-          <a:xfrm>
-            <a:off x="10694" y="1671088"/>
-            <a:ext cx="5280729" cy="996558"/>
-          </a:xfrm>
-          <a:prstGeom prst="rect">
-            <a:avLst/>
-          </a:prstGeom>
-          <a:solidFill>
-            <a:srgbClr val="CFF1E6"/>
-          </a:solidFill>
-          <a:ln w="76200">
-            <a:noFill/>
-          </a:ln>
-        </p:spPr>
-        <p:style>
-          <a:lnRef idx="2">
-            <a:schemeClr val="accent1">
-              <a:shade val="50000"/>
-            </a:schemeClr>
-          </a:lnRef>
-          <a:fillRef idx="1">
-            <a:schemeClr val="accent1"/>
-          </a:fillRef>
-          <a:effectRef idx="0">
-            <a:schemeClr val="accent1"/>
-          </a:effectRef>
-          <a:fontRef idx="minor">
-            <a:schemeClr val="lt1"/>
-          </a:fontRef>
-        </p:style>
-        <p:txBody>
-          <a:bodyPr rtlCol="0" anchor="ctr"/>
-          <a:lstStyle/>
-          <a:p>
-            <a:pPr marL="0" marR="0" lvl="0" indent="0" algn="l" defTabSz="914400" rtl="0" eaLnBrk="1" fontAlgn="auto" latinLnBrk="0" hangingPunct="1">
-              <a:lnSpc>
-                <a:spcPct val="100000"/>
-              </a:lnSpc>
-              <a:spcBef>
-                <a:spcPts val="0"/>
-              </a:spcBef>
-              <a:spcAft>
-                <a:spcPts val="0"/>
-              </a:spcAft>
-              <a:buClr>
-                <a:prstClr val="black"/>
-              </a:buClr>
-              <a:buSzTx/>
-              <a:buFontTx/>
-              <a:buNone/>
-              <a:tabLst/>
-              <a:defRPr/>
-            </a:pPr>
-            <a:r>
-              <a:rPr kumimoji="0" lang="de-DE" sz="2800" b="0" i="0" u="none" strike="noStrike" kern="1200" cap="none" spc="0" normalizeH="0" baseline="0" noProof="0" dirty="0">
-                <a:ln>
-                  <a:noFill/>
-                </a:ln>
-                <a:solidFill>
-                  <a:prstClr val="black"/>
-                </a:solidFill>
-                <a:effectLst/>
-                <a:uLnTx/>
-                <a:uFillTx/>
-                <a:latin typeface="Bahnschrift" panose="020B0502040204020203" pitchFamily="34" charset="0"/>
-                <a:ea typeface="+mn-ea"/>
-                <a:cs typeface="+mn-cs"/>
-              </a:rPr>
-              <a:t>    Salzkammergut</a:t>
-            </a:r>
-            <a:endParaRPr kumimoji="0" lang="de-DE" sz="1800" b="0" i="0" u="none" strike="noStrike" kern="1200" cap="none" spc="0" normalizeH="0" baseline="0" noProof="0" dirty="0">
-              <a:ln>
-                <a:noFill/>
-              </a:ln>
-              <a:solidFill>
-                <a:prstClr val="black"/>
-              </a:solidFill>
-              <a:effectLst/>
-              <a:uLnTx/>
-              <a:uFillTx/>
-              <a:latin typeface="Bahnschrift" panose="020B0502040204020203" pitchFamily="34" charset="0"/>
-              <a:ea typeface="+mn-ea"/>
-              <a:cs typeface="+mn-cs"/>
-            </a:endParaRPr>
-          </a:p>
-        </p:txBody>
-      </p:sp>
-      <p:pic>
-        <p:nvPicPr>
-          <p:cNvPr id="9" name="Grafik 8">
-            <a:extLst>
-              <a:ext uri="{FF2B5EF4-FFF2-40B4-BE49-F238E27FC236}">
-                <a16:creationId xmlns:a16="http://schemas.microsoft.com/office/drawing/2014/main" id="{387893AC-5000-9F03-3725-FAC9E76339A7}"/>
-              </a:ext>
-            </a:extLst>
-          </p:cNvPr>
-          <p:cNvPicPr>
-            <a:picLocks noChangeAspect="1"/>
-          </p:cNvPicPr>
-          <p:nvPr/>
-        </p:nvPicPr>
-        <p:blipFill>
-          <a:blip r:embed="rId4" cstate="print">
-            <a:extLst>
-              <a:ext uri="{28A0092B-C50C-407E-A947-70E740481C1C}">
-                <a14:useLocalDpi xmlns:a14="http://schemas.microsoft.com/office/drawing/2010/main" val="0"/>
-              </a:ext>
-            </a:extLst>
-          </a:blip>
-          <a:stretch>
-            <a:fillRect/>
-          </a:stretch>
-        </p:blipFill>
-        <p:spPr>
-          <a:xfrm>
-            <a:off x="5548291" y="821191"/>
-            <a:ext cx="3966368" cy="2643976"/>
-          </a:xfrm>
-          <a:prstGeom prst="rect">
-            <a:avLst/>
-          </a:prstGeom>
-        </p:spPr>
-      </p:pic>
-      <p:pic>
-        <p:nvPicPr>
-          <p:cNvPr id="13" name="Grafik 12">
-            <a:extLst>
-              <a:ext uri="{FF2B5EF4-FFF2-40B4-BE49-F238E27FC236}">
-                <a16:creationId xmlns:a16="http://schemas.microsoft.com/office/drawing/2014/main" id="{E7C9F4DC-1BEC-A958-08ED-B179A946694F}"/>
-              </a:ext>
-            </a:extLst>
-          </p:cNvPr>
-          <p:cNvPicPr>
-            <a:picLocks noChangeAspect="1"/>
-          </p:cNvPicPr>
-          <p:nvPr/>
-        </p:nvPicPr>
-        <p:blipFill>
-          <a:blip r:embed="rId5" cstate="print">
-            <a:extLst>
-              <a:ext uri="{28A0092B-C50C-407E-A947-70E740481C1C}">
-                <a14:useLocalDpi xmlns:a14="http://schemas.microsoft.com/office/drawing/2010/main" val="0"/>
-              </a:ext>
-            </a:extLst>
-          </a:blip>
-          <a:stretch>
-            <a:fillRect/>
-          </a:stretch>
-        </p:blipFill>
-        <p:spPr>
-          <a:xfrm>
-            <a:off x="9332437" y="3551395"/>
-            <a:ext cx="2608860" cy="1739062"/>
-          </a:xfrm>
-          <a:prstGeom prst="rect">
-            <a:avLst/>
-          </a:prstGeom>
-        </p:spPr>
-      </p:pic>
-      <p:pic>
-        <p:nvPicPr>
-          <p:cNvPr id="15" name="Grafik 14">
-            <a:extLst>
-              <a:ext uri="{FF2B5EF4-FFF2-40B4-BE49-F238E27FC236}">
-                <a16:creationId xmlns:a16="http://schemas.microsoft.com/office/drawing/2014/main" id="{77507B0C-2797-2758-F38A-81D4642DB0BB}"/>
-              </a:ext>
-            </a:extLst>
-          </p:cNvPr>
-          <p:cNvPicPr>
-            <a:picLocks noChangeAspect="1"/>
-          </p:cNvPicPr>
-          <p:nvPr/>
-        </p:nvPicPr>
-        <p:blipFill>
-          <a:blip r:embed="rId6" cstate="print">
-            <a:extLst>
-              <a:ext uri="{28A0092B-C50C-407E-A947-70E740481C1C}">
-                <a14:useLocalDpi xmlns:a14="http://schemas.microsoft.com/office/drawing/2010/main" val="0"/>
-              </a:ext>
-            </a:extLst>
-          </a:blip>
-          <a:stretch>
-            <a:fillRect/>
-          </a:stretch>
-        </p:blipFill>
-        <p:spPr>
-          <a:xfrm>
-            <a:off x="7660433" y="3551395"/>
-            <a:ext cx="1543046" cy="2743193"/>
-          </a:xfrm>
-          <a:prstGeom prst="rect">
-            <a:avLst/>
-          </a:prstGeom>
-        </p:spPr>
-      </p:pic>
-      <p:sp>
-        <p:nvSpPr>
-          <p:cNvPr id="17" name="Rounded Rectangle 7">
-            <a:extLst>
-              <a:ext uri="{FF2B5EF4-FFF2-40B4-BE49-F238E27FC236}">
-                <a16:creationId xmlns:a16="http://schemas.microsoft.com/office/drawing/2014/main" id="{DA6E508B-91E6-A16E-935E-537BA37E3C18}"/>
-              </a:ext>
-            </a:extLst>
-          </p:cNvPr>
-          <p:cNvSpPr/>
-          <p:nvPr/>
-        </p:nvSpPr>
-        <p:spPr>
-          <a:xfrm>
-            <a:off x="192521" y="205986"/>
-            <a:ext cx="4969639" cy="1230410"/>
-          </a:xfrm>
-          <a:prstGeom prst="roundRect">
-            <a:avLst>
-              <a:gd name="adj" fmla="val 50000"/>
-            </a:avLst>
-          </a:prstGeom>
-          <a:solidFill>
-            <a:srgbClr val="FFFDF7"/>
-          </a:solidFill>
-          <a:ln w="76200">
-            <a:solidFill>
-              <a:schemeClr val="accent4">
-                <a:lumMod val="20000"/>
-                <a:lumOff val="80000"/>
-              </a:schemeClr>
-            </a:solidFill>
-          </a:ln>
-        </p:spPr>
-        <p:style>
-          <a:lnRef idx="2">
-            <a:schemeClr val="accent1">
-              <a:shade val="50000"/>
-            </a:schemeClr>
-          </a:lnRef>
-          <a:fillRef idx="1">
-            <a:schemeClr val="accent1"/>
-          </a:fillRef>
-          <a:effectRef idx="0">
-            <a:schemeClr val="accent1"/>
-          </a:effectRef>
-          <a:fontRef idx="minor">
-            <a:schemeClr val="lt1"/>
-          </a:fontRef>
-        </p:style>
-        <p:txBody>
-          <a:bodyPr rtlCol="0" anchor="ctr"/>
-          <a:lstStyle/>
-          <a:p>
-            <a:pPr algn="ctr"/>
-            <a:r>
-              <a:rPr lang="de-DE" sz="3200" b="1" dirty="0">
-                <a:solidFill>
-                  <a:schemeClr val="tx1"/>
-                </a:solidFill>
-                <a:latin typeface="Geneva" panose="020B0503030404040204" pitchFamily="34" charset="0"/>
-              </a:rPr>
-              <a:t>Who </a:t>
-            </a:r>
-            <a:r>
-              <a:rPr lang="de-DE" sz="3200" b="1" dirty="0" err="1">
-                <a:solidFill>
-                  <a:schemeClr val="tx1"/>
-                </a:solidFill>
-                <a:latin typeface="Geneva" panose="020B0503030404040204" pitchFamily="34" charset="0"/>
-              </a:rPr>
-              <a:t>is</a:t>
-            </a:r>
-            <a:r>
-              <a:rPr lang="de-DE" sz="3200" b="1" dirty="0">
-                <a:solidFill>
-                  <a:schemeClr val="tx1"/>
-                </a:solidFill>
-                <a:latin typeface="Geneva" panose="020B0503030404040204" pitchFamily="34" charset="0"/>
-              </a:rPr>
-              <a:t> </a:t>
-            </a:r>
-            <a:r>
-              <a:rPr lang="de-DE" sz="3200" b="1" dirty="0" err="1">
-                <a:solidFill>
-                  <a:schemeClr val="tx1"/>
-                </a:solidFill>
-                <a:latin typeface="Geneva" panose="020B0503030404040204" pitchFamily="34" charset="0"/>
-              </a:rPr>
-              <a:t>this</a:t>
-            </a:r>
-            <a:r>
-              <a:rPr lang="de-DE" sz="3200" b="1" dirty="0">
-                <a:solidFill>
-                  <a:schemeClr val="tx1"/>
-                </a:solidFill>
-                <a:latin typeface="Geneva" panose="020B0503030404040204" pitchFamily="34" charset="0"/>
-              </a:rPr>
-              <a:t> </a:t>
-            </a:r>
-            <a:r>
-              <a:rPr lang="de-DE" sz="3200" b="1" dirty="0" err="1">
-                <a:solidFill>
-                  <a:schemeClr val="tx1"/>
-                </a:solidFill>
-                <a:latin typeface="Geneva" panose="020B0503030404040204" pitchFamily="34" charset="0"/>
-              </a:rPr>
-              <a:t>guy</a:t>
-            </a:r>
-            <a:r>
-              <a:rPr lang="de-DE" sz="3200" b="1" dirty="0">
-                <a:solidFill>
-                  <a:schemeClr val="tx1"/>
-                </a:solidFill>
-                <a:latin typeface="Geneva" panose="020B0503030404040204" pitchFamily="34" charset="0"/>
-              </a:rPr>
-              <a:t> </a:t>
-            </a:r>
-            <a:r>
-              <a:rPr lang="de-DE" sz="3200" b="1" dirty="0" err="1">
-                <a:solidFill>
-                  <a:schemeClr val="tx1"/>
-                </a:solidFill>
-                <a:latin typeface="Geneva" panose="020B0503030404040204" pitchFamily="34" charset="0"/>
-              </a:rPr>
-              <a:t>even</a:t>
-            </a:r>
-            <a:r>
-              <a:rPr lang="de-DE" sz="3200" b="1" dirty="0">
-                <a:solidFill>
-                  <a:schemeClr val="tx1"/>
-                </a:solidFill>
-                <a:latin typeface="Geneva" panose="020B0503030404040204" pitchFamily="34" charset="0"/>
-              </a:rPr>
-              <a:t>?</a:t>
-            </a:r>
-            <a:endParaRPr lang="en-GB" sz="3200" b="1" dirty="0">
-              <a:solidFill>
-                <a:schemeClr val="tx1"/>
-              </a:solidFill>
-              <a:latin typeface="Geneva" panose="020B0503030404040204" pitchFamily="34" charset="0"/>
-            </a:endParaRPr>
-          </a:p>
-        </p:txBody>
-      </p:sp>
-      <p:sp>
-        <p:nvSpPr>
-          <p:cNvPr id="25" name="Rectangle 1">
-            <a:extLst>
-              <a:ext uri="{FF2B5EF4-FFF2-40B4-BE49-F238E27FC236}">
-                <a16:creationId xmlns:a16="http://schemas.microsoft.com/office/drawing/2014/main" id="{A0681CB9-AD55-587D-A99F-B31A6847907C}"/>
-              </a:ext>
-            </a:extLst>
-          </p:cNvPr>
-          <p:cNvSpPr/>
-          <p:nvPr/>
-        </p:nvSpPr>
-        <p:spPr>
-          <a:xfrm>
-            <a:off x="0" y="2667646"/>
-            <a:ext cx="5291423" cy="996558"/>
-          </a:xfrm>
-          <a:prstGeom prst="rect">
-            <a:avLst/>
-          </a:prstGeom>
-          <a:solidFill>
-            <a:srgbClr val="CFF1E6">
-              <a:alpha val="46000"/>
-            </a:srgbClr>
-          </a:solidFill>
-          <a:ln w="76200">
-            <a:noFill/>
-          </a:ln>
-        </p:spPr>
-        <p:style>
-          <a:lnRef idx="2">
-            <a:schemeClr val="accent1">
-              <a:shade val="50000"/>
-            </a:schemeClr>
-          </a:lnRef>
-          <a:fillRef idx="1">
-            <a:schemeClr val="accent1"/>
-          </a:fillRef>
-          <a:effectRef idx="0">
-            <a:schemeClr val="accent1"/>
-          </a:effectRef>
-          <a:fontRef idx="minor">
-            <a:schemeClr val="lt1"/>
-          </a:fontRef>
-        </p:style>
-        <p:txBody>
-          <a:bodyPr rtlCol="0" anchor="ctr"/>
-          <a:lstStyle/>
-          <a:p>
-            <a:r>
-              <a:rPr lang="en-GB" sz="2800" dirty="0">
-                <a:solidFill>
-                  <a:schemeClr val="bg1">
-                    <a:lumMod val="75000"/>
-                  </a:schemeClr>
-                </a:solidFill>
-                <a:latin typeface="Bahnschrift" panose="020B0502040204020203" pitchFamily="34" charset="0"/>
-              </a:rPr>
-              <a:t>    Budweis</a:t>
-            </a:r>
-          </a:p>
-        </p:txBody>
-      </p:sp>
-      <p:sp>
-        <p:nvSpPr>
-          <p:cNvPr id="27" name="Rectangle 1">
-            <a:extLst>
-              <a:ext uri="{FF2B5EF4-FFF2-40B4-BE49-F238E27FC236}">
-                <a16:creationId xmlns:a16="http://schemas.microsoft.com/office/drawing/2014/main" id="{EB88FD50-47E5-2BD3-31EE-9686512815CE}"/>
-              </a:ext>
-            </a:extLst>
-          </p:cNvPr>
-          <p:cNvSpPr/>
-          <p:nvPr/>
-        </p:nvSpPr>
-        <p:spPr>
-          <a:xfrm>
-            <a:off x="-1" y="3664204"/>
-            <a:ext cx="5291423" cy="996558"/>
-          </a:xfrm>
-          <a:prstGeom prst="rect">
-            <a:avLst/>
-          </a:prstGeom>
-          <a:solidFill>
-            <a:srgbClr val="CFF1E6">
-              <a:alpha val="46000"/>
-            </a:srgbClr>
-          </a:solidFill>
-          <a:ln w="76200">
-            <a:noFill/>
-          </a:ln>
-        </p:spPr>
-        <p:style>
-          <a:lnRef idx="2">
-            <a:schemeClr val="accent1">
-              <a:shade val="50000"/>
-            </a:schemeClr>
-          </a:lnRef>
-          <a:fillRef idx="1">
-            <a:schemeClr val="accent1"/>
-          </a:fillRef>
-          <a:effectRef idx="0">
-            <a:schemeClr val="accent1"/>
-          </a:effectRef>
-          <a:fontRef idx="minor">
-            <a:schemeClr val="lt1"/>
-          </a:fontRef>
-        </p:style>
-        <p:txBody>
-          <a:bodyPr rtlCol="0" anchor="ctr"/>
-          <a:lstStyle/>
-          <a:p>
-            <a:r>
-              <a:rPr lang="en-GB" sz="2800" dirty="0">
-                <a:solidFill>
-                  <a:schemeClr val="bg1">
-                    <a:lumMod val="75000"/>
-                  </a:schemeClr>
-                </a:solidFill>
-                <a:latin typeface="Bahnschrift" panose="020B0502040204020203" pitchFamily="34" charset="0"/>
-              </a:rPr>
-              <a:t>    Linz</a:t>
-            </a:r>
-          </a:p>
-        </p:txBody>
-      </p:sp>
-      <p:sp>
-        <p:nvSpPr>
-          <p:cNvPr id="29" name="Rectangle 1">
-            <a:extLst>
-              <a:ext uri="{FF2B5EF4-FFF2-40B4-BE49-F238E27FC236}">
-                <a16:creationId xmlns:a16="http://schemas.microsoft.com/office/drawing/2014/main" id="{79AE1061-F0DE-4477-29F4-91AE43BD8BC9}"/>
-              </a:ext>
-            </a:extLst>
-          </p:cNvPr>
-          <p:cNvSpPr/>
-          <p:nvPr/>
-        </p:nvSpPr>
-        <p:spPr>
-          <a:xfrm>
-            <a:off x="-2" y="4660762"/>
-            <a:ext cx="5291423" cy="996558"/>
-          </a:xfrm>
-          <a:prstGeom prst="rect">
-            <a:avLst/>
-          </a:prstGeom>
-          <a:solidFill>
-            <a:srgbClr val="CFF1E6">
-              <a:alpha val="46000"/>
-            </a:srgbClr>
-          </a:solidFill>
-          <a:ln w="76200">
-            <a:noFill/>
-          </a:ln>
-        </p:spPr>
-        <p:style>
-          <a:lnRef idx="2">
-            <a:schemeClr val="accent1">
-              <a:shade val="50000"/>
-            </a:schemeClr>
-          </a:lnRef>
-          <a:fillRef idx="1">
-            <a:schemeClr val="accent1"/>
-          </a:fillRef>
-          <a:effectRef idx="0">
-            <a:schemeClr val="accent1"/>
-          </a:effectRef>
-          <a:fontRef idx="minor">
-            <a:schemeClr val="lt1"/>
-          </a:fontRef>
-        </p:style>
-        <p:txBody>
-          <a:bodyPr rtlCol="0" anchor="ctr"/>
-          <a:lstStyle/>
-          <a:p>
-            <a:r>
-              <a:rPr lang="en-GB" sz="2800" dirty="0">
-                <a:solidFill>
-                  <a:schemeClr val="bg1">
-                    <a:lumMod val="75000"/>
-                  </a:schemeClr>
-                </a:solidFill>
-                <a:latin typeface="Bahnschrift" panose="020B0502040204020203" pitchFamily="34" charset="0"/>
-              </a:rPr>
-              <a:t>    Vienna</a:t>
-            </a:r>
-          </a:p>
-        </p:txBody>
-      </p:sp>
-    </p:spTree>
-    <p:extLst>
-      <p:ext uri="{BB962C8B-B14F-4D97-AF65-F5344CB8AC3E}">
-        <p14:creationId xmlns:p14="http://schemas.microsoft.com/office/powerpoint/2010/main" val="2306856988"/>
-      </p:ext>
-    </p:extLst>
-  </p:cSld>
-  <p:clrMapOvr>
-    <a:masterClrMapping/>
-  </p:clrMapOvr>
-  <p:timing>
-    <p:tnLst>
-      <p:par>
-        <p:cTn id="1" dur="indefinite" restart="never" nodeType="tmRoot">
-          <p:childTnLst>
-            <p:seq concurrent="1" nextAc="seek">
-              <p:cTn id="2" dur="indefinite" nodeType="mainSeq">
-                <p:childTnLst>
-                  <p:par>
-                    <p:cTn id="3" fill="hold">
-                      <p:stCondLst>
-                        <p:cond delay="indefinite"/>
-                        <p:cond evt="onBegin" delay="0">
-                          <p:tn val="2"/>
-                        </p:cond>
-                      </p:stCondLst>
-                      <p:childTnLst>
-                        <p:par>
-                          <p:cTn id="4" fill="hold">
-                            <p:stCondLst>
-                              <p:cond delay="0"/>
-                            </p:stCondLst>
-                            <p:childTnLst>
-                              <p:par>
-                                <p:cTn id="5" presetID="10" presetClass="entr" presetSubtype="0" fill="hold" nodeType="afterEffect">
-                                  <p:stCondLst>
-                                    <p:cond delay="0"/>
-                                  </p:stCondLst>
-                                  <p:childTnLst>
-                                    <p:set>
-                                      <p:cBhvr>
-                                        <p:cTn id="6" dur="1" fill="hold">
-                                          <p:stCondLst>
-                                            <p:cond delay="0"/>
-                                          </p:stCondLst>
-                                        </p:cTn>
-                                        <p:tgtEl>
-                                          <p:spTgt spid="9"/>
-                                        </p:tgtEl>
-                                        <p:attrNameLst>
-                                          <p:attrName>style.visibility</p:attrName>
-                                        </p:attrNameLst>
-                                      </p:cBhvr>
-                                      <p:to>
-                                        <p:strVal val="visible"/>
-                                      </p:to>
-                                    </p:set>
-                                    <p:animEffect transition="in" filter="fade">
-                                      <p:cBhvr>
-                                        <p:cTn id="7" dur="100"/>
-                                        <p:tgtEl>
-                                          <p:spTgt spid="9"/>
-                                        </p:tgtEl>
-                                      </p:cBhvr>
-                                    </p:animEffect>
-                                  </p:childTnLst>
-                                </p:cTn>
-                              </p:par>
-                            </p:childTnLst>
-                          </p:cTn>
-                        </p:par>
-                        <p:par>
-                          <p:cTn id="8" fill="hold">
-                            <p:stCondLst>
-                              <p:cond delay="100"/>
-                            </p:stCondLst>
-                            <p:childTnLst>
-                              <p:par>
-                                <p:cTn id="9" presetID="10" presetClass="entr" presetSubtype="0" fill="hold" nodeType="afterEffect">
-                                  <p:stCondLst>
-                                    <p:cond delay="0"/>
-                                  </p:stCondLst>
-                                  <p:childTnLst>
-                                    <p:set>
-                                      <p:cBhvr>
-                                        <p:cTn id="10" dur="1" fill="hold">
-                                          <p:stCondLst>
-                                            <p:cond delay="0"/>
-                                          </p:stCondLst>
-                                        </p:cTn>
-                                        <p:tgtEl>
-                                          <p:spTgt spid="7"/>
-                                        </p:tgtEl>
-                                        <p:attrNameLst>
-                                          <p:attrName>style.visibility</p:attrName>
-                                        </p:attrNameLst>
-                                      </p:cBhvr>
-                                      <p:to>
-                                        <p:strVal val="visible"/>
-                                      </p:to>
-                                    </p:set>
-                                    <p:animEffect transition="in" filter="fade">
-                                      <p:cBhvr>
-                                        <p:cTn id="11" dur="100"/>
-                                        <p:tgtEl>
-                                          <p:spTgt spid="7"/>
-                                        </p:tgtEl>
-                                      </p:cBhvr>
-                                    </p:animEffect>
-                                  </p:childTnLst>
-                                </p:cTn>
-                              </p:par>
-                            </p:childTnLst>
-                          </p:cTn>
-                        </p:par>
-                        <p:par>
-                          <p:cTn id="12" fill="hold">
-                            <p:stCondLst>
-                              <p:cond delay="200"/>
-                            </p:stCondLst>
-                            <p:childTnLst>
-                              <p:par>
-                                <p:cTn id="13" presetID="10" presetClass="entr" presetSubtype="0" fill="hold" nodeType="afterEffect">
-                                  <p:stCondLst>
-                                    <p:cond delay="0"/>
-                                  </p:stCondLst>
-                                  <p:childTnLst>
-                                    <p:set>
-                                      <p:cBhvr>
-                                        <p:cTn id="14" dur="1" fill="hold">
-                                          <p:stCondLst>
-                                            <p:cond delay="0"/>
-                                          </p:stCondLst>
-                                        </p:cTn>
-                                        <p:tgtEl>
-                                          <p:spTgt spid="15"/>
-                                        </p:tgtEl>
-                                        <p:attrNameLst>
-                                          <p:attrName>style.visibility</p:attrName>
-                                        </p:attrNameLst>
-                                      </p:cBhvr>
-                                      <p:to>
-                                        <p:strVal val="visible"/>
-                                      </p:to>
-                                    </p:set>
-                                    <p:animEffect transition="in" filter="fade">
-                                      <p:cBhvr>
-                                        <p:cTn id="15" dur="100"/>
-                                        <p:tgtEl>
-                                          <p:spTgt spid="15"/>
-                                        </p:tgtEl>
-                                      </p:cBhvr>
-                                    </p:animEffect>
-                                  </p:childTnLst>
-                                </p:cTn>
-                              </p:par>
-                            </p:childTnLst>
-                          </p:cTn>
-                        </p:par>
-                        <p:par>
-                          <p:cTn id="16" fill="hold">
-                            <p:stCondLst>
-                              <p:cond delay="300"/>
-                            </p:stCondLst>
-                            <p:childTnLst>
-                              <p:par>
-                                <p:cTn id="17" presetID="10" presetClass="entr" presetSubtype="0" fill="hold" nodeType="afterEffect">
-                                  <p:stCondLst>
-                                    <p:cond delay="0"/>
-                                  </p:stCondLst>
-                                  <p:childTnLst>
-                                    <p:set>
-                                      <p:cBhvr>
-                                        <p:cTn id="18" dur="1" fill="hold">
-                                          <p:stCondLst>
-                                            <p:cond delay="0"/>
-                                          </p:stCondLst>
-                                        </p:cTn>
-                                        <p:tgtEl>
-                                          <p:spTgt spid="3"/>
-                                        </p:tgtEl>
-                                        <p:attrNameLst>
-                                          <p:attrName>style.visibility</p:attrName>
-                                        </p:attrNameLst>
-                                      </p:cBhvr>
-                                      <p:to>
-                                        <p:strVal val="visible"/>
-                                      </p:to>
-                                    </p:set>
-                                    <p:animEffect transition="in" filter="fade">
-                                      <p:cBhvr>
-                                        <p:cTn id="19" dur="100"/>
-                                        <p:tgtEl>
-                                          <p:spTgt spid="3"/>
-                                        </p:tgtEl>
-                                      </p:cBhvr>
-                                    </p:animEffect>
-                                  </p:childTnLst>
-                                </p:cTn>
-                              </p:par>
-                            </p:childTnLst>
-                          </p:cTn>
-                        </p:par>
-                        <p:par>
-                          <p:cTn id="20" fill="hold">
-                            <p:stCondLst>
-                              <p:cond delay="400"/>
-                            </p:stCondLst>
-                            <p:childTnLst>
-                              <p:par>
-                                <p:cTn id="21" presetID="10" presetClass="entr" presetSubtype="0" fill="hold" nodeType="afterEffect">
-                                  <p:stCondLst>
-                                    <p:cond delay="0"/>
-                                  </p:stCondLst>
-                                  <p:childTnLst>
-                                    <p:set>
-                                      <p:cBhvr>
-                                        <p:cTn id="22" dur="1" fill="hold">
-                                          <p:stCondLst>
-                                            <p:cond delay="0"/>
-                                          </p:stCondLst>
-                                        </p:cTn>
-                                        <p:tgtEl>
-                                          <p:spTgt spid="13"/>
-                                        </p:tgtEl>
-                                        <p:attrNameLst>
-                                          <p:attrName>style.visibility</p:attrName>
-                                        </p:attrNameLst>
-                                      </p:cBhvr>
-                                      <p:to>
-                                        <p:strVal val="visible"/>
-                                      </p:to>
-                                    </p:set>
-                                    <p:animEffect transition="in" filter="fade">
-                                      <p:cBhvr>
-                                        <p:cTn id="23" dur="100"/>
-                                        <p:tgtEl>
-                                          <p:spTgt spid="13"/>
-                                        </p:tgtEl>
-                                      </p:cBhvr>
-                                    </p:animEffect>
-                                  </p:childTnLst>
-                                </p:cTn>
-                              </p:par>
-                            </p:childTnLst>
-                          </p:cTn>
-                        </p:par>
-                      </p:childTnLst>
-                    </p:cTn>
-                  </p:par>
-                </p:childTnLst>
-              </p:cTn>
-              <p:prevCondLst>
-                <p:cond evt="onPrev" delay="0">
-                  <p:tgtEl>
-                    <p:sldTgt/>
-                  </p:tgtEl>
-                </p:cond>
-              </p:prevCondLst>
-              <p:nextCondLst>
-                <p:cond evt="onNext" delay="0">
-                  <p:tgtEl>
-                    <p:sldTgt/>
-                  </p:tgtEl>
-                </p:cond>
-              </p:nextCondLst>
-            </p:seq>
-          </p:childTnLst>
-        </p:cTn>
-      </p:par>
-    </p:tnLst>
-  </p:timing>
-</p:sld>
-</file>
-
-<file path=ppt/slides/slide30.xml><?xml version="1.0" encoding="utf-8"?>
+<file path=ppt/slides/slide32.xml><?xml version="1.0" encoding="utf-8"?>
 <p:sld xmlns:a="http://schemas.openxmlformats.org/drawingml/2006/main" xmlns:r="http://schemas.openxmlformats.org/officeDocument/2006/relationships" xmlns:p="http://schemas.openxmlformats.org/presentationml/2006/main">
   <p:cSld>
     <p:spTree>
@@ -23453,17 +24847,10 @@
   <p:clrMapOvr>
     <a:masterClrMapping/>
   </p:clrMapOvr>
-  <p:timing>
-    <p:tnLst>
-      <p:par>
-        <p:cTn id="1" dur="indefinite" restart="never" nodeType="tmRoot"/>
-      </p:par>
-    </p:tnLst>
-  </p:timing>
 </p:sld>
 </file>
 
-<file path=ppt/slides/slide31.xml><?xml version="1.0" encoding="utf-8"?>
+<file path=ppt/slides/slide33.xml><?xml version="1.0" encoding="utf-8"?>
 <p:sld xmlns:a="http://schemas.openxmlformats.org/drawingml/2006/main" xmlns:r="http://schemas.openxmlformats.org/officeDocument/2006/relationships" xmlns:p="http://schemas.openxmlformats.org/presentationml/2006/main">
   <p:cSld>
     <p:spTree>
@@ -23663,17 +25050,10 @@
   <p:clrMapOvr>
     <a:masterClrMapping/>
   </p:clrMapOvr>
-  <p:timing>
-    <p:tnLst>
-      <p:par>
-        <p:cTn id="1" dur="indefinite" restart="never" nodeType="tmRoot"/>
-      </p:par>
-    </p:tnLst>
-  </p:timing>
 </p:sld>
 </file>
 
-<file path=ppt/slides/slide32.xml><?xml version="1.0" encoding="utf-8"?>
+<file path=ppt/slides/slide34.xml><?xml version="1.0" encoding="utf-8"?>
 <p:sld xmlns:a="http://schemas.openxmlformats.org/drawingml/2006/main" xmlns:r="http://schemas.openxmlformats.org/officeDocument/2006/relationships" xmlns:p="http://schemas.openxmlformats.org/presentationml/2006/main">
   <p:cSld>
     <p:bg>
@@ -25874,7 +27254,7 @@
             <a:blip>
               <a:extLst>
                 <a:ext uri="{96DAC541-7B7A-43D3-8B79-37D633B846F1}">
-                  <asvg:svgBlip xmlns:asvg="http://schemas.microsoft.com/office/drawing/2016/SVG/main" xmlns="" r:embed="rId10"/>
+                  <asvg:svgBlip xmlns:asvg="http://schemas.microsoft.com/office/drawing/2016/SVG/main" r:embed="rId10"/>
                 </a:ext>
               </a:extLst>
             </a:blip>
@@ -25910,7 +27290,7 @@
             <a:blip>
               <a:extLst>
                 <a:ext uri="{96DAC541-7B7A-43D3-8B79-37D633B846F1}">
-                  <asvg:svgBlip xmlns:asvg="http://schemas.microsoft.com/office/drawing/2016/SVG/main" xmlns="" r:embed="rId11"/>
+                  <asvg:svgBlip xmlns:asvg="http://schemas.microsoft.com/office/drawing/2016/SVG/main" r:embed="rId11"/>
                 </a:ext>
               </a:extLst>
             </a:blip>
@@ -27868,7 +29248,7 @@
 </p:sld>
 </file>
 
-<file path=ppt/slides/slide33.xml><?xml version="1.0" encoding="utf-8"?>
+<file path=ppt/slides/slide35.xml><?xml version="1.0" encoding="utf-8"?>
 <p:sld xmlns:a="http://schemas.openxmlformats.org/drawingml/2006/main" xmlns:r="http://schemas.openxmlformats.org/officeDocument/2006/relationships" xmlns:p="http://schemas.openxmlformats.org/presentationml/2006/main">
   <p:cSld>
     <p:spTree>
@@ -27981,7 +29361,7 @@
         </p:spPr>
         <p:txBody>
           <a:bodyPr vert="horz" lIns="91440" tIns="45720" rIns="91440" bIns="45720" rtlCol="0">
-            <a:normAutofit fontScale="85000" lnSpcReduction="20000"/>
+            <a:normAutofit fontScale="92500" lnSpcReduction="20000"/>
           </a:bodyPr>
           <a:lstStyle>
             <a:lvl1pPr marL="228600" indent="-228600" algn="l" defTabSz="914400" rtl="0" eaLnBrk="1" latinLnBrk="0" hangingPunct="1">
@@ -28154,7 +29534,7 @@
               </a:lnSpc>
             </a:pPr>
             <a:r>
-              <a:rPr lang="de-AT" sz="2400" dirty="0" smtClean="0"/>
+              <a:rPr lang="de-AT" sz="2400" dirty="0"/>
               <a:t>BIC = Bayesian Information Criterion. Measures model fit quality</a:t>
             </a:r>
           </a:p>
@@ -28165,7 +29545,7 @@
               </a:lnSpc>
             </a:pPr>
             <a:r>
-              <a:rPr lang="de-AT" sz="2400" dirty="0" smtClean="0"/>
+              <a:rPr lang="de-AT" sz="2400" dirty="0"/>
               <a:t>s</a:t>
             </a:r>
             <a:r>
@@ -28189,88 +29569,10 @@
   <p:clrMapOvr>
     <a:masterClrMapping/>
   </p:clrMapOvr>
-  <p:timing>
-    <p:tnLst>
-      <p:par>
-        <p:cTn id="1" dur="indefinite" restart="never" nodeType="tmRoot"/>
-      </p:par>
-    </p:tnLst>
-  </p:timing>
 </p:sld>
 </file>
 
-<file path=ppt/slides/slide34.xml><?xml version="1.0" encoding="utf-8"?>
-<p:sld xmlns:a="http://schemas.openxmlformats.org/drawingml/2006/main" xmlns:r="http://schemas.openxmlformats.org/officeDocument/2006/relationships" xmlns:p="http://schemas.openxmlformats.org/presentationml/2006/main">
-  <p:cSld>
-    <p:spTree>
-      <p:nvGrpSpPr>
-        <p:cNvPr id="1" name=""/>
-        <p:cNvGrpSpPr/>
-        <p:nvPr/>
-      </p:nvGrpSpPr>
-      <p:grpSpPr>
-        <a:xfrm>
-          <a:off x="0" y="0"/>
-          <a:ext cx="0" cy="0"/>
-          <a:chOff x="0" y="0"/>
-          <a:chExt cx="0" cy="0"/>
-        </a:xfrm>
-      </p:grpSpPr>
-      <p:pic>
-        <p:nvPicPr>
-          <p:cNvPr id="3" name="Content Placeholder 2"/>
-          <p:cNvPicPr>
-            <a:picLocks noGrp="1" noChangeAspect="1"/>
-          </p:cNvPicPr>
-          <p:nvPr>
-            <p:ph idx="1"/>
-          </p:nvPr>
-        </p:nvPicPr>
-        <p:blipFill>
-          <a:blip r:embed="rId2">
-            <a:extLst>
-              <a:ext uri="{28A0092B-C50C-407E-A947-70E740481C1C}">
-                <a14:useLocalDpi xmlns:a14="http://schemas.microsoft.com/office/drawing/2010/main" val="0"/>
-              </a:ext>
-            </a:extLst>
-          </a:blip>
-          <a:stretch>
-            <a:fillRect/>
-          </a:stretch>
-        </p:blipFill>
-        <p:spPr>
-          <a:xfrm>
-            <a:off x="1858148" y="476247"/>
-            <a:ext cx="8445731" cy="6009305"/>
-          </a:xfrm>
-          <a:ln w="76200">
-            <a:solidFill>
-              <a:srgbClr val="0CB87F"/>
-            </a:solidFill>
-          </a:ln>
-        </p:spPr>
-      </p:pic>
-    </p:spTree>
-    <p:extLst>
-      <p:ext uri="{BB962C8B-B14F-4D97-AF65-F5344CB8AC3E}">
-        <p14:creationId xmlns:p14="http://schemas.microsoft.com/office/powerpoint/2010/main" val="1339492739"/>
-      </p:ext>
-    </p:extLst>
-  </p:cSld>
-  <p:clrMapOvr>
-    <a:masterClrMapping/>
-  </p:clrMapOvr>
-  <p:timing>
-    <p:tnLst>
-      <p:par>
-        <p:cTn id="1" dur="indefinite" restart="never" nodeType="tmRoot"/>
-      </p:par>
-    </p:tnLst>
-  </p:timing>
-</p:sld>
-</file>
-
-<file path=ppt/slides/slide35.xml><?xml version="1.0" encoding="utf-8"?>
+<file path=ppt/slides/slide36.xml><?xml version="1.0" encoding="utf-8"?>
 <p:sld xmlns:a="http://schemas.openxmlformats.org/drawingml/2006/main" xmlns:r="http://schemas.openxmlformats.org/officeDocument/2006/relationships" xmlns:p="http://schemas.openxmlformats.org/presentationml/2006/main">
   <p:cSld>
     <p:spTree>
@@ -28332,17 +29634,10 @@
   <p:clrMapOvr>
     <a:masterClrMapping/>
   </p:clrMapOvr>
-  <p:timing>
-    <p:tnLst>
-      <p:par>
-        <p:cTn id="1" dur="indefinite" restart="never" nodeType="tmRoot"/>
-      </p:par>
-    </p:tnLst>
-  </p:timing>
 </p:sld>
 </file>
 
-<file path=ppt/slides/slide36.xml><?xml version="1.0" encoding="utf-8"?>
+<file path=ppt/slides/slide37.xml><?xml version="1.0" encoding="utf-8"?>
 <p:sld xmlns:a="http://schemas.openxmlformats.org/drawingml/2006/main" xmlns:r="http://schemas.openxmlformats.org/officeDocument/2006/relationships" xmlns:p="http://schemas.openxmlformats.org/presentationml/2006/main">
   <p:cSld>
     <p:spTree>
@@ -28404,17 +29699,74 @@
   <p:clrMapOvr>
     <a:masterClrMapping/>
   </p:clrMapOvr>
-  <p:timing>
-    <p:tnLst>
-      <p:par>
-        <p:cTn id="1" dur="indefinite" restart="never" nodeType="tmRoot"/>
-      </p:par>
-    </p:tnLst>
-  </p:timing>
 </p:sld>
 </file>
 
-<file path=ppt/slides/slide37.xml><?xml version="1.0" encoding="utf-8"?>
+<file path=ppt/slides/slide38.xml><?xml version="1.0" encoding="utf-8"?>
+<p:sld xmlns:a="http://schemas.openxmlformats.org/drawingml/2006/main" xmlns:r="http://schemas.openxmlformats.org/officeDocument/2006/relationships" xmlns:p="http://schemas.openxmlformats.org/presentationml/2006/main">
+  <p:cSld>
+    <p:spTree>
+      <p:nvGrpSpPr>
+        <p:cNvPr id="1" name=""/>
+        <p:cNvGrpSpPr/>
+        <p:nvPr/>
+      </p:nvGrpSpPr>
+      <p:grpSpPr>
+        <a:xfrm>
+          <a:off x="0" y="0"/>
+          <a:ext cx="0" cy="0"/>
+          <a:chOff x="0" y="0"/>
+          <a:chExt cx="0" cy="0"/>
+        </a:xfrm>
+      </p:grpSpPr>
+      <p:pic>
+        <p:nvPicPr>
+          <p:cNvPr id="3" name="Content Placeholder 2"/>
+          <p:cNvPicPr>
+            <a:picLocks noGrp="1" noChangeAspect="1"/>
+          </p:cNvPicPr>
+          <p:nvPr>
+            <p:ph idx="1"/>
+          </p:nvPr>
+        </p:nvPicPr>
+        <p:blipFill>
+          <a:blip r:embed="rId2">
+            <a:extLst>
+              <a:ext uri="{28A0092B-C50C-407E-A947-70E740481C1C}">
+                <a14:useLocalDpi xmlns:a14="http://schemas.microsoft.com/office/drawing/2010/main" val="0"/>
+              </a:ext>
+            </a:extLst>
+          </a:blip>
+          <a:stretch>
+            <a:fillRect/>
+          </a:stretch>
+        </p:blipFill>
+        <p:spPr>
+          <a:xfrm>
+            <a:off x="1858148" y="476247"/>
+            <a:ext cx="8445731" cy="6009305"/>
+          </a:xfrm>
+          <a:ln w="76200">
+            <a:solidFill>
+              <a:srgbClr val="0CB87F"/>
+            </a:solidFill>
+          </a:ln>
+        </p:spPr>
+      </p:pic>
+    </p:spTree>
+    <p:extLst>
+      <p:ext uri="{BB962C8B-B14F-4D97-AF65-F5344CB8AC3E}">
+        <p14:creationId xmlns:p14="http://schemas.microsoft.com/office/powerpoint/2010/main" val="1339492739"/>
+      </p:ext>
+    </p:extLst>
+  </p:cSld>
+  <p:clrMapOvr>
+    <a:masterClrMapping/>
+  </p:clrMapOvr>
+</p:sld>
+</file>
+
+<file path=ppt/slides/slide39.xml><?xml version="1.0" encoding="utf-8"?>
 <p:sld xmlns:a="http://schemas.openxmlformats.org/drawingml/2006/main" xmlns:r="http://schemas.openxmlformats.org/officeDocument/2006/relationships" xmlns:p="http://schemas.openxmlformats.org/presentationml/2006/main">
   <p:cSld>
     <p:spTree>
@@ -28628,7 +29980,7 @@
           <a:lstStyle/>
           <a:p>
             <a:r>
-              <a:rPr lang="de-AT" sz="4800" dirty="0" smtClean="0">
+              <a:rPr lang="de-AT" sz="4800" dirty="0">
                 <a:latin typeface="Bahnschrift" panose="020B0502040204020203" pitchFamily="34" charset="0"/>
               </a:rPr>
               <a:t>Probably?</a:t>
@@ -28784,7 +30136,1073 @@
 </p:sld>
 </file>
 
-<file path=ppt/slides/slide38.xml><?xml version="1.0" encoding="utf-8"?>
+<file path=ppt/slides/slide4.xml><?xml version="1.0" encoding="utf-8"?>
+<p:sld xmlns:a="http://schemas.openxmlformats.org/drawingml/2006/main" xmlns:r="http://schemas.openxmlformats.org/officeDocument/2006/relationships" xmlns:p="http://schemas.openxmlformats.org/presentationml/2006/main">
+  <p:cSld>
+    <p:bg>
+      <p:bgPr>
+        <a:solidFill>
+          <a:srgbClr val="FFFDF7"/>
+        </a:solidFill>
+        <a:effectLst/>
+      </p:bgPr>
+    </p:bg>
+    <p:spTree>
+      <p:nvGrpSpPr>
+        <p:cNvPr id="1" name="">
+          <a:extLst>
+            <a:ext uri="{FF2B5EF4-FFF2-40B4-BE49-F238E27FC236}">
+              <a16:creationId xmlns:a16="http://schemas.microsoft.com/office/drawing/2014/main" id="{2FC38D7E-EF5F-01F5-66B8-21DE711E24BE}"/>
+            </a:ext>
+          </a:extLst>
+        </p:cNvPr>
+        <p:cNvGrpSpPr/>
+        <p:nvPr/>
+      </p:nvGrpSpPr>
+      <p:grpSpPr>
+        <a:xfrm>
+          <a:off x="0" y="0"/>
+          <a:ext cx="0" cy="0"/>
+          <a:chOff x="0" y="0"/>
+          <a:chExt cx="0" cy="0"/>
+        </a:xfrm>
+      </p:grpSpPr>
+      <p:sp>
+        <p:nvSpPr>
+          <p:cNvPr id="19" name="Rectangle 1">
+            <a:extLst>
+              <a:ext uri="{FF2B5EF4-FFF2-40B4-BE49-F238E27FC236}">
+                <a16:creationId xmlns:a16="http://schemas.microsoft.com/office/drawing/2014/main" id="{6C81C306-53DD-CF56-AD58-916CE616DFD4}"/>
+              </a:ext>
+            </a:extLst>
+          </p:cNvPr>
+          <p:cNvSpPr/>
+          <p:nvPr/>
+        </p:nvSpPr>
+        <p:spPr>
+          <a:xfrm>
+            <a:off x="5291423" y="-1"/>
+            <a:ext cx="6889883" cy="6858001"/>
+          </a:xfrm>
+          <a:prstGeom prst="rect">
+            <a:avLst/>
+          </a:prstGeom>
+          <a:solidFill>
+            <a:srgbClr val="CFF1E6"/>
+          </a:solidFill>
+          <a:ln w="76200">
+            <a:noFill/>
+          </a:ln>
+        </p:spPr>
+        <p:style>
+          <a:lnRef idx="2">
+            <a:schemeClr val="accent1">
+              <a:shade val="50000"/>
+            </a:schemeClr>
+          </a:lnRef>
+          <a:fillRef idx="1">
+            <a:schemeClr val="accent1"/>
+          </a:fillRef>
+          <a:effectRef idx="0">
+            <a:schemeClr val="accent1"/>
+          </a:effectRef>
+          <a:fontRef idx="minor">
+            <a:schemeClr val="lt1"/>
+          </a:fontRef>
+        </p:style>
+        <p:txBody>
+          <a:bodyPr rtlCol="0" anchor="ctr"/>
+          <a:lstStyle/>
+          <a:p>
+            <a:pPr algn="ctr"/>
+            <a:endParaRPr lang="en-GB" dirty="0"/>
+          </a:p>
+        </p:txBody>
+      </p:sp>
+      <p:sp>
+        <p:nvSpPr>
+          <p:cNvPr id="23" name="Rectangle 1">
+            <a:extLst>
+              <a:ext uri="{FF2B5EF4-FFF2-40B4-BE49-F238E27FC236}">
+                <a16:creationId xmlns:a16="http://schemas.microsoft.com/office/drawing/2014/main" id="{55C29797-ADB5-E90A-CDF6-B92AD5F66666}"/>
+              </a:ext>
+            </a:extLst>
+          </p:cNvPr>
+          <p:cNvSpPr/>
+          <p:nvPr/>
+        </p:nvSpPr>
+        <p:spPr>
+          <a:xfrm>
+            <a:off x="10694" y="1671088"/>
+            <a:ext cx="5280729" cy="996558"/>
+          </a:xfrm>
+          <a:prstGeom prst="rect">
+            <a:avLst/>
+          </a:prstGeom>
+          <a:solidFill>
+            <a:srgbClr val="CFF1E6">
+              <a:alpha val="46000"/>
+            </a:srgbClr>
+          </a:solidFill>
+          <a:ln w="76200">
+            <a:noFill/>
+          </a:ln>
+        </p:spPr>
+        <p:style>
+          <a:lnRef idx="2">
+            <a:schemeClr val="accent1">
+              <a:shade val="50000"/>
+            </a:schemeClr>
+          </a:lnRef>
+          <a:fillRef idx="1">
+            <a:schemeClr val="accent1"/>
+          </a:fillRef>
+          <a:effectRef idx="0">
+            <a:schemeClr val="accent1"/>
+          </a:effectRef>
+          <a:fontRef idx="minor">
+            <a:schemeClr val="lt1"/>
+          </a:fontRef>
+        </p:style>
+        <p:txBody>
+          <a:bodyPr rtlCol="0" anchor="ctr"/>
+          <a:lstStyle/>
+          <a:p>
+            <a:r>
+              <a:rPr lang="de-DE" sz="2800">
+                <a:solidFill>
+                  <a:schemeClr val="bg1">
+                    <a:lumMod val="75000"/>
+                  </a:schemeClr>
+                </a:solidFill>
+                <a:latin typeface="Bahnschrift" panose="020B0502040204020203" pitchFamily="34" charset="0"/>
+              </a:rPr>
+              <a:t>    Salzkammergut</a:t>
+            </a:r>
+            <a:endParaRPr lang="de-DE" sz="2800" dirty="0">
+              <a:solidFill>
+                <a:schemeClr val="bg1">
+                  <a:lumMod val="75000"/>
+                </a:schemeClr>
+              </a:solidFill>
+              <a:latin typeface="Bahnschrift" panose="020B0502040204020203" pitchFamily="34" charset="0"/>
+            </a:endParaRPr>
+          </a:p>
+        </p:txBody>
+      </p:sp>
+      <p:sp>
+        <p:nvSpPr>
+          <p:cNvPr id="17" name="Rounded Rectangle 7">
+            <a:extLst>
+              <a:ext uri="{FF2B5EF4-FFF2-40B4-BE49-F238E27FC236}">
+                <a16:creationId xmlns:a16="http://schemas.microsoft.com/office/drawing/2014/main" id="{352722DE-CA00-0BB8-5720-F46A3F5A57C0}"/>
+              </a:ext>
+            </a:extLst>
+          </p:cNvPr>
+          <p:cNvSpPr/>
+          <p:nvPr/>
+        </p:nvSpPr>
+        <p:spPr>
+          <a:xfrm>
+            <a:off x="192521" y="205986"/>
+            <a:ext cx="4969639" cy="1230410"/>
+          </a:xfrm>
+          <a:prstGeom prst="roundRect">
+            <a:avLst>
+              <a:gd name="adj" fmla="val 50000"/>
+            </a:avLst>
+          </a:prstGeom>
+          <a:solidFill>
+            <a:srgbClr val="FFFDF7"/>
+          </a:solidFill>
+          <a:ln w="76200">
+            <a:solidFill>
+              <a:schemeClr val="accent4">
+                <a:lumMod val="20000"/>
+                <a:lumOff val="80000"/>
+              </a:schemeClr>
+            </a:solidFill>
+          </a:ln>
+        </p:spPr>
+        <p:style>
+          <a:lnRef idx="2">
+            <a:schemeClr val="accent1">
+              <a:shade val="50000"/>
+            </a:schemeClr>
+          </a:lnRef>
+          <a:fillRef idx="1">
+            <a:schemeClr val="accent1"/>
+          </a:fillRef>
+          <a:effectRef idx="0">
+            <a:schemeClr val="accent1"/>
+          </a:effectRef>
+          <a:fontRef idx="minor">
+            <a:schemeClr val="lt1"/>
+          </a:fontRef>
+        </p:style>
+        <p:txBody>
+          <a:bodyPr rtlCol="0" anchor="ctr"/>
+          <a:lstStyle/>
+          <a:p>
+            <a:pPr algn="ctr"/>
+            <a:r>
+              <a:rPr lang="de-DE" sz="3200" b="1" dirty="0">
+                <a:solidFill>
+                  <a:schemeClr val="tx1"/>
+                </a:solidFill>
+                <a:latin typeface="Bahnschrift" panose="020B0502040204020203" pitchFamily="34" charset="0"/>
+              </a:rPr>
+              <a:t>Who </a:t>
+            </a:r>
+            <a:r>
+              <a:rPr lang="de-DE" sz="3200" b="1" dirty="0" err="1">
+                <a:solidFill>
+                  <a:schemeClr val="tx1"/>
+                </a:solidFill>
+                <a:latin typeface="Bahnschrift" panose="020B0502040204020203" pitchFamily="34" charset="0"/>
+              </a:rPr>
+              <a:t>is</a:t>
+            </a:r>
+            <a:r>
+              <a:rPr lang="de-DE" sz="3200" b="1" dirty="0">
+                <a:solidFill>
+                  <a:schemeClr val="tx1"/>
+                </a:solidFill>
+                <a:latin typeface="Bahnschrift" panose="020B0502040204020203" pitchFamily="34" charset="0"/>
+              </a:rPr>
+              <a:t> </a:t>
+            </a:r>
+            <a:r>
+              <a:rPr lang="de-DE" sz="3200" b="1" dirty="0" err="1">
+                <a:solidFill>
+                  <a:schemeClr val="tx1"/>
+                </a:solidFill>
+                <a:latin typeface="Bahnschrift" panose="020B0502040204020203" pitchFamily="34" charset="0"/>
+              </a:rPr>
+              <a:t>this</a:t>
+            </a:r>
+            <a:r>
+              <a:rPr lang="de-DE" sz="3200" b="1" dirty="0">
+                <a:solidFill>
+                  <a:schemeClr val="tx1"/>
+                </a:solidFill>
+                <a:latin typeface="Bahnschrift" panose="020B0502040204020203" pitchFamily="34" charset="0"/>
+              </a:rPr>
+              <a:t> </a:t>
+            </a:r>
+            <a:r>
+              <a:rPr lang="de-DE" sz="3200" b="1" dirty="0" err="1">
+                <a:solidFill>
+                  <a:schemeClr val="tx1"/>
+                </a:solidFill>
+                <a:latin typeface="Bahnschrift" panose="020B0502040204020203" pitchFamily="34" charset="0"/>
+              </a:rPr>
+              <a:t>guy</a:t>
+            </a:r>
+            <a:r>
+              <a:rPr lang="de-DE" sz="3200" b="1" dirty="0">
+                <a:solidFill>
+                  <a:schemeClr val="tx1"/>
+                </a:solidFill>
+                <a:latin typeface="Bahnschrift" panose="020B0502040204020203" pitchFamily="34" charset="0"/>
+              </a:rPr>
+              <a:t> </a:t>
+            </a:r>
+            <a:r>
+              <a:rPr lang="de-DE" sz="3200" b="1" dirty="0" err="1">
+                <a:solidFill>
+                  <a:schemeClr val="tx1"/>
+                </a:solidFill>
+                <a:latin typeface="Bahnschrift" panose="020B0502040204020203" pitchFamily="34" charset="0"/>
+              </a:rPr>
+              <a:t>even</a:t>
+            </a:r>
+            <a:r>
+              <a:rPr lang="de-DE" sz="3200" b="1" dirty="0">
+                <a:solidFill>
+                  <a:schemeClr val="tx1"/>
+                </a:solidFill>
+                <a:latin typeface="Bahnschrift" panose="020B0502040204020203" pitchFamily="34" charset="0"/>
+              </a:rPr>
+              <a:t>?</a:t>
+            </a:r>
+            <a:endParaRPr lang="en-GB" sz="3200" b="1" dirty="0">
+              <a:solidFill>
+                <a:schemeClr val="tx1"/>
+              </a:solidFill>
+              <a:latin typeface="Bahnschrift" panose="020B0502040204020203" pitchFamily="34" charset="0"/>
+            </a:endParaRPr>
+          </a:p>
+        </p:txBody>
+      </p:sp>
+      <p:sp>
+        <p:nvSpPr>
+          <p:cNvPr id="25" name="Rectangle 1">
+            <a:extLst>
+              <a:ext uri="{FF2B5EF4-FFF2-40B4-BE49-F238E27FC236}">
+                <a16:creationId xmlns:a16="http://schemas.microsoft.com/office/drawing/2014/main" id="{2B906E58-DDDA-A628-6313-B3CAC5E4F4BC}"/>
+              </a:ext>
+            </a:extLst>
+          </p:cNvPr>
+          <p:cNvSpPr/>
+          <p:nvPr/>
+        </p:nvSpPr>
+        <p:spPr>
+          <a:xfrm>
+            <a:off x="0" y="2667646"/>
+            <a:ext cx="5291423" cy="996558"/>
+          </a:xfrm>
+          <a:prstGeom prst="rect">
+            <a:avLst/>
+          </a:prstGeom>
+          <a:solidFill>
+            <a:srgbClr val="CFF1E6"/>
+          </a:solidFill>
+          <a:ln w="76200">
+            <a:noFill/>
+          </a:ln>
+        </p:spPr>
+        <p:style>
+          <a:lnRef idx="2">
+            <a:schemeClr val="accent1">
+              <a:shade val="50000"/>
+            </a:schemeClr>
+          </a:lnRef>
+          <a:fillRef idx="1">
+            <a:schemeClr val="accent1"/>
+          </a:fillRef>
+          <a:effectRef idx="0">
+            <a:schemeClr val="accent1"/>
+          </a:effectRef>
+          <a:fontRef idx="minor">
+            <a:schemeClr val="lt1"/>
+          </a:fontRef>
+        </p:style>
+        <p:txBody>
+          <a:bodyPr rtlCol="0" anchor="ctr"/>
+          <a:lstStyle/>
+          <a:p>
+            <a:pPr>
+              <a:buClr>
+                <a:prstClr val="black"/>
+              </a:buClr>
+            </a:pPr>
+            <a:r>
+              <a:rPr lang="en-GB" sz="2800">
+                <a:solidFill>
+                  <a:prstClr val="black"/>
+                </a:solidFill>
+                <a:latin typeface="Bahnschrift" panose="020B0502040204020203" pitchFamily="34" charset="0"/>
+              </a:rPr>
+              <a:t>    Budweis</a:t>
+            </a:r>
+            <a:endParaRPr lang="en-GB" sz="2800" dirty="0">
+              <a:solidFill>
+                <a:prstClr val="black"/>
+              </a:solidFill>
+              <a:latin typeface="Bahnschrift" panose="020B0502040204020203" pitchFamily="34" charset="0"/>
+            </a:endParaRPr>
+          </a:p>
+        </p:txBody>
+      </p:sp>
+      <p:sp>
+        <p:nvSpPr>
+          <p:cNvPr id="27" name="Rectangle 1">
+            <a:extLst>
+              <a:ext uri="{FF2B5EF4-FFF2-40B4-BE49-F238E27FC236}">
+                <a16:creationId xmlns:a16="http://schemas.microsoft.com/office/drawing/2014/main" id="{485AF12C-6A53-3751-9969-61125435318E}"/>
+              </a:ext>
+            </a:extLst>
+          </p:cNvPr>
+          <p:cNvSpPr/>
+          <p:nvPr/>
+        </p:nvSpPr>
+        <p:spPr>
+          <a:xfrm>
+            <a:off x="-1" y="3664204"/>
+            <a:ext cx="5291423" cy="996558"/>
+          </a:xfrm>
+          <a:prstGeom prst="rect">
+            <a:avLst/>
+          </a:prstGeom>
+          <a:solidFill>
+            <a:srgbClr val="CFF1E6">
+              <a:alpha val="46000"/>
+            </a:srgbClr>
+          </a:solidFill>
+          <a:ln w="76200">
+            <a:noFill/>
+          </a:ln>
+        </p:spPr>
+        <p:style>
+          <a:lnRef idx="2">
+            <a:schemeClr val="accent1">
+              <a:shade val="50000"/>
+            </a:schemeClr>
+          </a:lnRef>
+          <a:fillRef idx="1">
+            <a:schemeClr val="accent1"/>
+          </a:fillRef>
+          <a:effectRef idx="0">
+            <a:schemeClr val="accent1"/>
+          </a:effectRef>
+          <a:fontRef idx="minor">
+            <a:schemeClr val="lt1"/>
+          </a:fontRef>
+        </p:style>
+        <p:txBody>
+          <a:bodyPr rtlCol="0" anchor="ctr"/>
+          <a:lstStyle/>
+          <a:p>
+            <a:r>
+              <a:rPr lang="en-GB" sz="2800" dirty="0">
+                <a:solidFill>
+                  <a:schemeClr val="bg1">
+                    <a:lumMod val="75000"/>
+                  </a:schemeClr>
+                </a:solidFill>
+                <a:latin typeface="Bahnschrift" panose="020B0502040204020203" pitchFamily="34" charset="0"/>
+              </a:rPr>
+              <a:t>    Linz</a:t>
+            </a:r>
+          </a:p>
+        </p:txBody>
+      </p:sp>
+      <p:sp>
+        <p:nvSpPr>
+          <p:cNvPr id="29" name="Rectangle 1">
+            <a:extLst>
+              <a:ext uri="{FF2B5EF4-FFF2-40B4-BE49-F238E27FC236}">
+                <a16:creationId xmlns:a16="http://schemas.microsoft.com/office/drawing/2014/main" id="{8208E304-5295-9570-2E8B-3AE0C555A984}"/>
+              </a:ext>
+            </a:extLst>
+          </p:cNvPr>
+          <p:cNvSpPr/>
+          <p:nvPr/>
+        </p:nvSpPr>
+        <p:spPr>
+          <a:xfrm>
+            <a:off x="-2" y="4660762"/>
+            <a:ext cx="5291423" cy="996558"/>
+          </a:xfrm>
+          <a:prstGeom prst="rect">
+            <a:avLst/>
+          </a:prstGeom>
+          <a:solidFill>
+            <a:srgbClr val="CFF1E6">
+              <a:alpha val="46000"/>
+            </a:srgbClr>
+          </a:solidFill>
+          <a:ln w="76200">
+            <a:noFill/>
+          </a:ln>
+        </p:spPr>
+        <p:style>
+          <a:lnRef idx="2">
+            <a:schemeClr val="accent1">
+              <a:shade val="50000"/>
+            </a:schemeClr>
+          </a:lnRef>
+          <a:fillRef idx="1">
+            <a:schemeClr val="accent1"/>
+          </a:fillRef>
+          <a:effectRef idx="0">
+            <a:schemeClr val="accent1"/>
+          </a:effectRef>
+          <a:fontRef idx="minor">
+            <a:schemeClr val="lt1"/>
+          </a:fontRef>
+        </p:style>
+        <p:txBody>
+          <a:bodyPr rtlCol="0" anchor="ctr"/>
+          <a:lstStyle/>
+          <a:p>
+            <a:r>
+              <a:rPr lang="en-GB" sz="2800" dirty="0">
+                <a:solidFill>
+                  <a:schemeClr val="bg1">
+                    <a:lumMod val="75000"/>
+                  </a:schemeClr>
+                </a:solidFill>
+                <a:latin typeface="Bahnschrift" panose="020B0502040204020203" pitchFamily="34" charset="0"/>
+              </a:rPr>
+              <a:t>    Vienna</a:t>
+            </a:r>
+          </a:p>
+        </p:txBody>
+      </p:sp>
+      <p:pic>
+        <p:nvPicPr>
+          <p:cNvPr id="6" name="Grafik 5">
+            <a:extLst>
+              <a:ext uri="{FF2B5EF4-FFF2-40B4-BE49-F238E27FC236}">
+                <a16:creationId xmlns:a16="http://schemas.microsoft.com/office/drawing/2014/main" id="{0D509AD2-043D-A360-6ECC-783436562B2F}"/>
+              </a:ext>
+            </a:extLst>
+          </p:cNvPr>
+          <p:cNvPicPr>
+            <a:picLocks noChangeAspect="1"/>
+          </p:cNvPicPr>
+          <p:nvPr/>
+        </p:nvPicPr>
+        <p:blipFill>
+          <a:blip r:embed="rId2" cstate="print">
+            <a:extLst>
+              <a:ext uri="{28A0092B-C50C-407E-A947-70E740481C1C}">
+                <a14:useLocalDpi xmlns:a14="http://schemas.microsoft.com/office/drawing/2010/main" val="0"/>
+              </a:ext>
+            </a:extLst>
+          </a:blip>
+          <a:stretch>
+            <a:fillRect/>
+          </a:stretch>
+        </p:blipFill>
+        <p:spPr>
+          <a:xfrm>
+            <a:off x="5774077" y="855790"/>
+            <a:ext cx="2717783" cy="3623711"/>
+          </a:xfrm>
+          <a:prstGeom prst="rect">
+            <a:avLst/>
+          </a:prstGeom>
+        </p:spPr>
+      </p:pic>
+      <p:pic>
+        <p:nvPicPr>
+          <p:cNvPr id="10" name="Grafik 9">
+            <a:extLst>
+              <a:ext uri="{FF2B5EF4-FFF2-40B4-BE49-F238E27FC236}">
+                <a16:creationId xmlns:a16="http://schemas.microsoft.com/office/drawing/2014/main" id="{411251EA-C252-072D-8245-F0A14B72DC5E}"/>
+              </a:ext>
+            </a:extLst>
+          </p:cNvPr>
+          <p:cNvPicPr>
+            <a:picLocks noChangeAspect="1"/>
+          </p:cNvPicPr>
+          <p:nvPr/>
+        </p:nvPicPr>
+        <p:blipFill>
+          <a:blip r:embed="rId3" cstate="print">
+            <a:extLst>
+              <a:ext uri="{28A0092B-C50C-407E-A947-70E740481C1C}">
+                <a14:useLocalDpi xmlns:a14="http://schemas.microsoft.com/office/drawing/2010/main" val="0"/>
+              </a:ext>
+            </a:extLst>
+          </a:blip>
+          <a:srcRect t="11917" b="10898"/>
+          <a:stretch>
+            <a:fillRect/>
+          </a:stretch>
+        </p:blipFill>
+        <p:spPr>
+          <a:xfrm>
+            <a:off x="8556492" y="439838"/>
+            <a:ext cx="3442987" cy="1993116"/>
+          </a:xfrm>
+          <a:prstGeom prst="rect">
+            <a:avLst/>
+          </a:prstGeom>
+        </p:spPr>
+      </p:pic>
+      <p:pic>
+        <p:nvPicPr>
+          <p:cNvPr id="12" name="Grafik 11">
+            <a:extLst>
+              <a:ext uri="{FF2B5EF4-FFF2-40B4-BE49-F238E27FC236}">
+                <a16:creationId xmlns:a16="http://schemas.microsoft.com/office/drawing/2014/main" id="{102B0A89-5515-6AD7-605A-67B50E93D780}"/>
+              </a:ext>
+            </a:extLst>
+          </p:cNvPr>
+          <p:cNvPicPr>
+            <a:picLocks noChangeAspect="1"/>
+          </p:cNvPicPr>
+          <p:nvPr/>
+        </p:nvPicPr>
+        <p:blipFill>
+          <a:blip r:embed="rId4" cstate="print">
+            <a:extLst>
+              <a:ext uri="{28A0092B-C50C-407E-A947-70E740481C1C}">
+                <a14:useLocalDpi xmlns:a14="http://schemas.microsoft.com/office/drawing/2010/main" val="0"/>
+              </a:ext>
+            </a:extLst>
+          </a:blip>
+          <a:stretch>
+            <a:fillRect/>
+          </a:stretch>
+        </p:blipFill>
+        <p:spPr>
+          <a:xfrm>
+            <a:off x="8556492" y="2533502"/>
+            <a:ext cx="2273839" cy="4042382"/>
+          </a:xfrm>
+          <a:prstGeom prst="rect">
+            <a:avLst/>
+          </a:prstGeom>
+        </p:spPr>
+      </p:pic>
+      <p:sp>
+        <p:nvSpPr>
+          <p:cNvPr id="22" name="Rounded Rectangle 7">
+            <a:extLst>
+              <a:ext uri="{FF2B5EF4-FFF2-40B4-BE49-F238E27FC236}">
+                <a16:creationId xmlns:a16="http://schemas.microsoft.com/office/drawing/2014/main" id="{3091F324-6B47-85C5-4CA7-5AE7CDFE7A17}"/>
+              </a:ext>
+            </a:extLst>
+          </p:cNvPr>
+          <p:cNvSpPr/>
+          <p:nvPr/>
+        </p:nvSpPr>
+        <p:spPr>
+          <a:xfrm>
+            <a:off x="5646407" y="4580049"/>
+            <a:ext cx="6179914" cy="1481034"/>
+          </a:xfrm>
+          <a:prstGeom prst="roundRect">
+            <a:avLst>
+              <a:gd name="adj" fmla="val 50000"/>
+            </a:avLst>
+          </a:prstGeom>
+          <a:solidFill>
+            <a:srgbClr val="FFFDF7">
+              <a:alpha val="64000"/>
+            </a:srgbClr>
+          </a:solidFill>
+          <a:ln w="76200">
+            <a:solidFill>
+              <a:schemeClr val="accent4">
+                <a:lumMod val="20000"/>
+                <a:lumOff val="80000"/>
+              </a:schemeClr>
+            </a:solidFill>
+          </a:ln>
+        </p:spPr>
+        <p:style>
+          <a:lnRef idx="2">
+            <a:schemeClr val="accent1">
+              <a:shade val="50000"/>
+            </a:schemeClr>
+          </a:lnRef>
+          <a:fillRef idx="1">
+            <a:schemeClr val="accent1"/>
+          </a:fillRef>
+          <a:effectRef idx="0">
+            <a:schemeClr val="accent1"/>
+          </a:effectRef>
+          <a:fontRef idx="minor">
+            <a:schemeClr val="lt1"/>
+          </a:fontRef>
+        </p:style>
+        <p:txBody>
+          <a:bodyPr rtlCol="0" anchor="ctr"/>
+          <a:lstStyle/>
+          <a:p>
+            <a:pPr marL="342900" indent="-342900">
+              <a:buFontTx/>
+              <a:buChar char="-"/>
+            </a:pPr>
+            <a:r>
+              <a:rPr lang="de-DE" sz="2000" dirty="0">
+                <a:solidFill>
+                  <a:schemeClr val="tx1"/>
+                </a:solidFill>
+                <a:latin typeface="Bahnschrift" panose="020B0502040204020203" pitchFamily="34" charset="0"/>
+              </a:rPr>
+              <a:t>double </a:t>
+            </a:r>
+            <a:r>
+              <a:rPr lang="de-DE" sz="2000" dirty="0" err="1">
+                <a:solidFill>
+                  <a:schemeClr val="tx1"/>
+                </a:solidFill>
+                <a:latin typeface="Bahnschrift" panose="020B0502040204020203" pitchFamily="34" charset="0"/>
+              </a:rPr>
+              <a:t>degree</a:t>
+            </a:r>
+            <a:r>
+              <a:rPr lang="de-DE" sz="2000" dirty="0">
+                <a:solidFill>
+                  <a:schemeClr val="tx1"/>
+                </a:solidFill>
+                <a:latin typeface="Bahnschrift" panose="020B0502040204020203" pitchFamily="34" charset="0"/>
+              </a:rPr>
+              <a:t> in Biological Chemistry</a:t>
+            </a:r>
+          </a:p>
+          <a:p>
+            <a:pPr marL="342900" indent="-342900">
+              <a:buFontTx/>
+              <a:buChar char="-"/>
+            </a:pPr>
+            <a:r>
+              <a:rPr lang="de-DE" sz="2000" dirty="0" err="1">
+                <a:solidFill>
+                  <a:schemeClr val="tx1"/>
+                </a:solidFill>
+                <a:latin typeface="Bahnschrift" panose="020B0502040204020203" pitchFamily="34" charset="0"/>
+              </a:rPr>
+              <a:t>thesis</a:t>
+            </a:r>
+            <a:r>
+              <a:rPr lang="de-DE" sz="2000" dirty="0">
+                <a:solidFill>
+                  <a:schemeClr val="tx1"/>
+                </a:solidFill>
+                <a:latin typeface="Bahnschrift" panose="020B0502040204020203" pitchFamily="34" charset="0"/>
+              </a:rPr>
+              <a:t> on </a:t>
+            </a:r>
+            <a:r>
+              <a:rPr lang="de-DE" sz="2000" dirty="0" err="1">
+                <a:solidFill>
+                  <a:schemeClr val="tx1"/>
+                </a:solidFill>
+                <a:latin typeface="Bahnschrift" panose="020B0502040204020203" pitchFamily="34" charset="0"/>
+              </a:rPr>
+              <a:t>probiotic</a:t>
+            </a:r>
+            <a:r>
+              <a:rPr lang="de-DE" sz="2000" dirty="0">
+                <a:solidFill>
+                  <a:schemeClr val="tx1"/>
+                </a:solidFill>
+                <a:latin typeface="Bahnschrift" panose="020B0502040204020203" pitchFamily="34" charset="0"/>
+              </a:rPr>
+              <a:t> </a:t>
+            </a:r>
+            <a:r>
+              <a:rPr lang="de-DE" sz="2000" dirty="0" err="1">
+                <a:solidFill>
+                  <a:schemeClr val="tx1"/>
+                </a:solidFill>
+                <a:latin typeface="Bahnschrift" panose="020B0502040204020203" pitchFamily="34" charset="0"/>
+              </a:rPr>
+              <a:t>treatment</a:t>
+            </a:r>
+            <a:r>
+              <a:rPr lang="de-DE" sz="2000" dirty="0">
+                <a:solidFill>
+                  <a:schemeClr val="tx1"/>
+                </a:solidFill>
+                <a:latin typeface="Bahnschrift" panose="020B0502040204020203" pitchFamily="34" charset="0"/>
+              </a:rPr>
+              <a:t> </a:t>
+            </a:r>
+            <a:r>
+              <a:rPr lang="de-DE" sz="2000" dirty="0" err="1">
+                <a:solidFill>
+                  <a:schemeClr val="tx1"/>
+                </a:solidFill>
+                <a:latin typeface="Bahnschrift" panose="020B0502040204020203" pitchFamily="34" charset="0"/>
+              </a:rPr>
+              <a:t>of</a:t>
+            </a:r>
+            <a:r>
+              <a:rPr lang="de-DE" sz="2000" dirty="0">
+                <a:solidFill>
+                  <a:schemeClr val="tx1"/>
+                </a:solidFill>
+                <a:latin typeface="Bahnschrift" panose="020B0502040204020203" pitchFamily="34" charset="0"/>
+              </a:rPr>
+              <a:t> </a:t>
+            </a:r>
+            <a:r>
+              <a:rPr lang="de-DE" sz="2000" dirty="0" err="1">
+                <a:solidFill>
+                  <a:schemeClr val="tx1"/>
+                </a:solidFill>
+                <a:latin typeface="Bahnschrift" panose="020B0502040204020203" pitchFamily="34" charset="0"/>
+              </a:rPr>
+              <a:t>carp</a:t>
+            </a:r>
+            <a:r>
+              <a:rPr lang="de-DE" sz="2000" dirty="0">
+                <a:solidFill>
+                  <a:schemeClr val="tx1"/>
+                </a:solidFill>
+                <a:latin typeface="Bahnschrift" panose="020B0502040204020203" pitchFamily="34" charset="0"/>
+              </a:rPr>
+              <a:t> </a:t>
+            </a:r>
+            <a:r>
+              <a:rPr lang="de-DE" sz="2000" dirty="0" err="1">
+                <a:solidFill>
+                  <a:schemeClr val="tx1"/>
+                </a:solidFill>
+                <a:latin typeface="Bahnschrift" panose="020B0502040204020203" pitchFamily="34" charset="0"/>
+              </a:rPr>
+              <a:t>endoparasite</a:t>
+            </a:r>
+            <a:r>
+              <a:rPr lang="de-DE" sz="2000" dirty="0">
+                <a:solidFill>
+                  <a:schemeClr val="tx1"/>
+                </a:solidFill>
+                <a:latin typeface="Bahnschrift" panose="020B0502040204020203" pitchFamily="34" charset="0"/>
+              </a:rPr>
+              <a:t> </a:t>
+            </a:r>
+            <a:r>
+              <a:rPr lang="de-DE" sz="2000" dirty="0" err="1">
+                <a:solidFill>
+                  <a:schemeClr val="tx1"/>
+                </a:solidFill>
+                <a:latin typeface="Bahnschrift" panose="020B0502040204020203" pitchFamily="34" charset="0"/>
+              </a:rPr>
+              <a:t>infection</a:t>
+            </a:r>
+            <a:endParaRPr lang="de-DE" sz="2000" dirty="0">
+              <a:solidFill>
+                <a:schemeClr val="tx1"/>
+              </a:solidFill>
+              <a:latin typeface="Bahnschrift" panose="020B0502040204020203" pitchFamily="34" charset="0"/>
+            </a:endParaRPr>
+          </a:p>
+        </p:txBody>
+      </p:sp>
+    </p:spTree>
+    <p:extLst>
+      <p:ext uri="{BB962C8B-B14F-4D97-AF65-F5344CB8AC3E}">
+        <p14:creationId xmlns:p14="http://schemas.microsoft.com/office/powerpoint/2010/main" val="3398236915"/>
+      </p:ext>
+    </p:extLst>
+  </p:cSld>
+  <p:clrMapOvr>
+    <a:masterClrMapping/>
+  </p:clrMapOvr>
+  <p:timing>
+    <p:tnLst>
+      <p:par>
+        <p:cTn id="1" dur="indefinite" restart="never" nodeType="tmRoot">
+          <p:childTnLst>
+            <p:seq concurrent="1" nextAc="seek">
+              <p:cTn id="2" dur="indefinite" nodeType="mainSeq">
+                <p:childTnLst>
+                  <p:par>
+                    <p:cTn id="3" fill="hold">
+                      <p:stCondLst>
+                        <p:cond delay="indefinite"/>
+                        <p:cond evt="onBegin" delay="0">
+                          <p:tn val="2"/>
+                        </p:cond>
+                      </p:stCondLst>
+                      <p:childTnLst>
+                        <p:par>
+                          <p:cTn id="4" fill="hold">
+                            <p:stCondLst>
+                              <p:cond delay="0"/>
+                            </p:stCondLst>
+                            <p:childTnLst>
+                              <p:par>
+                                <p:cTn id="5" presetID="10" presetClass="entr" presetSubtype="0" fill="hold" nodeType="afterEffect">
+                                  <p:stCondLst>
+                                    <p:cond delay="0"/>
+                                  </p:stCondLst>
+                                  <p:childTnLst>
+                                    <p:set>
+                                      <p:cBhvr>
+                                        <p:cTn id="6" dur="1" fill="hold">
+                                          <p:stCondLst>
+                                            <p:cond delay="0"/>
+                                          </p:stCondLst>
+                                        </p:cTn>
+                                        <p:tgtEl>
+                                          <p:spTgt spid="10"/>
+                                        </p:tgtEl>
+                                        <p:attrNameLst>
+                                          <p:attrName>style.visibility</p:attrName>
+                                        </p:attrNameLst>
+                                      </p:cBhvr>
+                                      <p:to>
+                                        <p:strVal val="visible"/>
+                                      </p:to>
+                                    </p:set>
+                                    <p:animEffect transition="in" filter="fade">
+                                      <p:cBhvr>
+                                        <p:cTn id="7" dur="100"/>
+                                        <p:tgtEl>
+                                          <p:spTgt spid="10"/>
+                                        </p:tgtEl>
+                                      </p:cBhvr>
+                                    </p:animEffect>
+                                  </p:childTnLst>
+                                </p:cTn>
+                              </p:par>
+                            </p:childTnLst>
+                          </p:cTn>
+                        </p:par>
+                        <p:par>
+                          <p:cTn id="8" fill="hold">
+                            <p:stCondLst>
+                              <p:cond delay="100"/>
+                            </p:stCondLst>
+                            <p:childTnLst>
+                              <p:par>
+                                <p:cTn id="9" presetID="10" presetClass="entr" presetSubtype="0" fill="hold" nodeType="afterEffect">
+                                  <p:stCondLst>
+                                    <p:cond delay="0"/>
+                                  </p:stCondLst>
+                                  <p:childTnLst>
+                                    <p:set>
+                                      <p:cBhvr>
+                                        <p:cTn id="10" dur="1" fill="hold">
+                                          <p:stCondLst>
+                                            <p:cond delay="0"/>
+                                          </p:stCondLst>
+                                        </p:cTn>
+                                        <p:tgtEl>
+                                          <p:spTgt spid="6"/>
+                                        </p:tgtEl>
+                                        <p:attrNameLst>
+                                          <p:attrName>style.visibility</p:attrName>
+                                        </p:attrNameLst>
+                                      </p:cBhvr>
+                                      <p:to>
+                                        <p:strVal val="visible"/>
+                                      </p:to>
+                                    </p:set>
+                                    <p:animEffect transition="in" filter="fade">
+                                      <p:cBhvr>
+                                        <p:cTn id="11" dur="100"/>
+                                        <p:tgtEl>
+                                          <p:spTgt spid="6"/>
+                                        </p:tgtEl>
+                                      </p:cBhvr>
+                                    </p:animEffect>
+                                  </p:childTnLst>
+                                </p:cTn>
+                              </p:par>
+                            </p:childTnLst>
+                          </p:cTn>
+                        </p:par>
+                        <p:par>
+                          <p:cTn id="12" fill="hold">
+                            <p:stCondLst>
+                              <p:cond delay="200"/>
+                            </p:stCondLst>
+                            <p:childTnLst>
+                              <p:par>
+                                <p:cTn id="13" presetID="10" presetClass="entr" presetSubtype="0" fill="hold" nodeType="afterEffect">
+                                  <p:stCondLst>
+                                    <p:cond delay="0"/>
+                                  </p:stCondLst>
+                                  <p:childTnLst>
+                                    <p:set>
+                                      <p:cBhvr>
+                                        <p:cTn id="14" dur="1" fill="hold">
+                                          <p:stCondLst>
+                                            <p:cond delay="0"/>
+                                          </p:stCondLst>
+                                        </p:cTn>
+                                        <p:tgtEl>
+                                          <p:spTgt spid="12"/>
+                                        </p:tgtEl>
+                                        <p:attrNameLst>
+                                          <p:attrName>style.visibility</p:attrName>
+                                        </p:attrNameLst>
+                                      </p:cBhvr>
+                                      <p:to>
+                                        <p:strVal val="visible"/>
+                                      </p:to>
+                                    </p:set>
+                                    <p:animEffect transition="in" filter="fade">
+                                      <p:cBhvr>
+                                        <p:cTn id="15" dur="100"/>
+                                        <p:tgtEl>
+                                          <p:spTgt spid="12"/>
+                                        </p:tgtEl>
+                                      </p:cBhvr>
+                                    </p:animEffect>
+                                  </p:childTnLst>
+                                </p:cTn>
+                              </p:par>
+                            </p:childTnLst>
+                          </p:cTn>
+                        </p:par>
+                      </p:childTnLst>
+                    </p:cTn>
+                  </p:par>
+                  <p:par>
+                    <p:cTn id="16" fill="hold">
+                      <p:stCondLst>
+                        <p:cond delay="indefinite"/>
+                      </p:stCondLst>
+                      <p:childTnLst>
+                        <p:par>
+                          <p:cTn id="17" fill="hold">
+                            <p:stCondLst>
+                              <p:cond delay="0"/>
+                            </p:stCondLst>
+                            <p:childTnLst>
+                              <p:par>
+                                <p:cTn id="18" presetID="10" presetClass="entr" presetSubtype="0" fill="hold" grpId="0" nodeType="clickEffect">
+                                  <p:stCondLst>
+                                    <p:cond delay="0"/>
+                                  </p:stCondLst>
+                                  <p:childTnLst>
+                                    <p:set>
+                                      <p:cBhvr>
+                                        <p:cTn id="19" dur="1" fill="hold">
+                                          <p:stCondLst>
+                                            <p:cond delay="0"/>
+                                          </p:stCondLst>
+                                        </p:cTn>
+                                        <p:tgtEl>
+                                          <p:spTgt spid="22"/>
+                                        </p:tgtEl>
+                                        <p:attrNameLst>
+                                          <p:attrName>style.visibility</p:attrName>
+                                        </p:attrNameLst>
+                                      </p:cBhvr>
+                                      <p:to>
+                                        <p:strVal val="visible"/>
+                                      </p:to>
+                                    </p:set>
+                                    <p:animEffect transition="in" filter="fade">
+                                      <p:cBhvr>
+                                        <p:cTn id="20" dur="250"/>
+                                        <p:tgtEl>
+                                          <p:spTgt spid="22"/>
+                                        </p:tgtEl>
+                                      </p:cBhvr>
+                                    </p:animEffect>
+                                  </p:childTnLst>
+                                </p:cTn>
+                              </p:par>
+                            </p:childTnLst>
+                          </p:cTn>
+                        </p:par>
+                      </p:childTnLst>
+                    </p:cTn>
+                  </p:par>
+                </p:childTnLst>
+              </p:cTn>
+              <p:prevCondLst>
+                <p:cond evt="onPrev" delay="0">
+                  <p:tgtEl>
+                    <p:sldTgt/>
+                  </p:tgtEl>
+                </p:cond>
+              </p:prevCondLst>
+              <p:nextCondLst>
+                <p:cond evt="onNext" delay="0">
+                  <p:tgtEl>
+                    <p:sldTgt/>
+                  </p:tgtEl>
+                </p:cond>
+              </p:nextCondLst>
+            </p:seq>
+          </p:childTnLst>
+        </p:cTn>
+      </p:par>
+    </p:tnLst>
+    <p:bldLst>
+      <p:bldP spid="22" grpId="0" animBg="1"/>
+    </p:bldLst>
+  </p:timing>
+</p:sld>
+</file>
+
+<file path=ppt/slides/slide40.xml><?xml version="1.0" encoding="utf-8"?>
 <p:sld xmlns:a="http://schemas.openxmlformats.org/drawingml/2006/main" xmlns:r="http://schemas.openxmlformats.org/officeDocument/2006/relationships" xmlns:p="http://schemas.openxmlformats.org/presentationml/2006/main">
   <p:cSld>
     <p:spTree>
@@ -28817,7 +31235,7 @@
           <a:lstStyle/>
           <a:p>
             <a:r>
-              <a:rPr lang="de-DE" dirty="0" smtClean="0"/>
+              <a:rPr lang="de-DE" dirty="0"/>
               <a:t>Conclusion</a:t>
             </a:r>
             <a:endParaRPr lang="en-GB" dirty="0"/>
@@ -29259,7 +31677,7 @@
 </p:sld>
 </file>
 
-<file path=ppt/slides/slide39.xml><?xml version="1.0" encoding="utf-8"?>
+<file path=ppt/slides/slide41.xml><?xml version="1.0" encoding="utf-8"?>
 <p:sld xmlns:a="http://schemas.openxmlformats.org/drawingml/2006/main" xmlns:r="http://schemas.openxmlformats.org/officeDocument/2006/relationships" xmlns:p="http://schemas.openxmlformats.org/presentationml/2006/main">
   <p:cSld>
     <p:spTree>
@@ -29292,7 +31710,7 @@
           <a:lstStyle/>
           <a:p>
             <a:r>
-              <a:rPr lang="de-DE" dirty="0" smtClean="0"/>
+              <a:rPr lang="de-DE" dirty="0"/>
               <a:t>Future Direction</a:t>
             </a:r>
             <a:endParaRPr lang="en-GB" dirty="0"/>
@@ -29315,31 +31733,31 @@
           <a:lstStyle/>
           <a:p>
             <a:r>
-              <a:rPr lang="de-DE" dirty="0" smtClean="0"/>
+              <a:rPr lang="de-DE" dirty="0"/>
               <a:t>Sign of prediction error vs firing rate correlation</a:t>
             </a:r>
           </a:p>
           <a:p>
             <a:r>
-              <a:rPr lang="de-DE" dirty="0" smtClean="0"/>
+              <a:rPr lang="de-DE" dirty="0"/>
               <a:t>Find a better model</a:t>
             </a:r>
           </a:p>
           <a:p>
             <a:r>
-              <a:rPr lang="de-DE" dirty="0" smtClean="0"/>
+              <a:rPr lang="de-DE" dirty="0"/>
               <a:t>Timing of firing rate changes after events</a:t>
             </a:r>
           </a:p>
           <a:p>
             <a:r>
-              <a:rPr lang="de-DE" dirty="0" smtClean="0"/>
+              <a:rPr lang="de-DE" dirty="0"/>
               <a:t>Choice selectivity</a:t>
             </a:r>
           </a:p>
           <a:p>
             <a:r>
-              <a:rPr lang="de-DE" dirty="0" smtClean="0"/>
+              <a:rPr lang="de-DE" dirty="0"/>
               <a:t>Research Angual Gyrus</a:t>
             </a:r>
             <a:endParaRPr lang="en-GB" dirty="0"/>
@@ -29356,1065 +31774,10 @@
   <p:clrMapOvr>
     <a:masterClrMapping/>
   </p:clrMapOvr>
-  <p:timing>
-    <p:tnLst>
-      <p:par>
-        <p:cTn id="1" dur="indefinite" restart="never" nodeType="tmRoot"/>
-      </p:par>
-    </p:tnLst>
-  </p:timing>
 </p:sld>
 </file>
 
-<file path=ppt/slides/slide4.xml><?xml version="1.0" encoding="utf-8"?>
-<p:sld xmlns:a="http://schemas.openxmlformats.org/drawingml/2006/main" xmlns:r="http://schemas.openxmlformats.org/officeDocument/2006/relationships" xmlns:p="http://schemas.openxmlformats.org/presentationml/2006/main">
-  <p:cSld>
-    <p:bg>
-      <p:bgPr>
-        <a:solidFill>
-          <a:srgbClr val="FFFDF7"/>
-        </a:solidFill>
-        <a:effectLst/>
-      </p:bgPr>
-    </p:bg>
-    <p:spTree>
-      <p:nvGrpSpPr>
-        <p:cNvPr id="1" name="">
-          <a:extLst>
-            <a:ext uri="{FF2B5EF4-FFF2-40B4-BE49-F238E27FC236}">
-              <a16:creationId xmlns:a16="http://schemas.microsoft.com/office/drawing/2014/main" id="{2FC38D7E-EF5F-01F5-66B8-21DE711E24BE}"/>
-            </a:ext>
-          </a:extLst>
-        </p:cNvPr>
-        <p:cNvGrpSpPr/>
-        <p:nvPr/>
-      </p:nvGrpSpPr>
-      <p:grpSpPr>
-        <a:xfrm>
-          <a:off x="0" y="0"/>
-          <a:ext cx="0" cy="0"/>
-          <a:chOff x="0" y="0"/>
-          <a:chExt cx="0" cy="0"/>
-        </a:xfrm>
-      </p:grpSpPr>
-      <p:sp>
-        <p:nvSpPr>
-          <p:cNvPr id="19" name="Rectangle 1">
-            <a:extLst>
-              <a:ext uri="{FF2B5EF4-FFF2-40B4-BE49-F238E27FC236}">
-                <a16:creationId xmlns:a16="http://schemas.microsoft.com/office/drawing/2014/main" id="{6C81C306-53DD-CF56-AD58-916CE616DFD4}"/>
-              </a:ext>
-            </a:extLst>
-          </p:cNvPr>
-          <p:cNvSpPr/>
-          <p:nvPr/>
-        </p:nvSpPr>
-        <p:spPr>
-          <a:xfrm>
-            <a:off x="5291423" y="-1"/>
-            <a:ext cx="6889883" cy="6858001"/>
-          </a:xfrm>
-          <a:prstGeom prst="rect">
-            <a:avLst/>
-          </a:prstGeom>
-          <a:solidFill>
-            <a:srgbClr val="CFF1E6"/>
-          </a:solidFill>
-          <a:ln w="76200">
-            <a:noFill/>
-          </a:ln>
-        </p:spPr>
-        <p:style>
-          <a:lnRef idx="2">
-            <a:schemeClr val="accent1">
-              <a:shade val="50000"/>
-            </a:schemeClr>
-          </a:lnRef>
-          <a:fillRef idx="1">
-            <a:schemeClr val="accent1"/>
-          </a:fillRef>
-          <a:effectRef idx="0">
-            <a:schemeClr val="accent1"/>
-          </a:effectRef>
-          <a:fontRef idx="minor">
-            <a:schemeClr val="lt1"/>
-          </a:fontRef>
-        </p:style>
-        <p:txBody>
-          <a:bodyPr rtlCol="0" anchor="ctr"/>
-          <a:lstStyle/>
-          <a:p>
-            <a:pPr algn="ctr"/>
-            <a:endParaRPr lang="en-GB" dirty="0"/>
-          </a:p>
-        </p:txBody>
-      </p:sp>
-      <p:sp>
-        <p:nvSpPr>
-          <p:cNvPr id="23" name="Rectangle 1">
-            <a:extLst>
-              <a:ext uri="{FF2B5EF4-FFF2-40B4-BE49-F238E27FC236}">
-                <a16:creationId xmlns:a16="http://schemas.microsoft.com/office/drawing/2014/main" id="{55C29797-ADB5-E90A-CDF6-B92AD5F66666}"/>
-              </a:ext>
-            </a:extLst>
-          </p:cNvPr>
-          <p:cNvSpPr/>
-          <p:nvPr/>
-        </p:nvSpPr>
-        <p:spPr>
-          <a:xfrm>
-            <a:off x="10694" y="1671088"/>
-            <a:ext cx="5280729" cy="996558"/>
-          </a:xfrm>
-          <a:prstGeom prst="rect">
-            <a:avLst/>
-          </a:prstGeom>
-          <a:solidFill>
-            <a:srgbClr val="CFF1E6">
-              <a:alpha val="46000"/>
-            </a:srgbClr>
-          </a:solidFill>
-          <a:ln w="76200">
-            <a:noFill/>
-          </a:ln>
-        </p:spPr>
-        <p:style>
-          <a:lnRef idx="2">
-            <a:schemeClr val="accent1">
-              <a:shade val="50000"/>
-            </a:schemeClr>
-          </a:lnRef>
-          <a:fillRef idx="1">
-            <a:schemeClr val="accent1"/>
-          </a:fillRef>
-          <a:effectRef idx="0">
-            <a:schemeClr val="accent1"/>
-          </a:effectRef>
-          <a:fontRef idx="minor">
-            <a:schemeClr val="lt1"/>
-          </a:fontRef>
-        </p:style>
-        <p:txBody>
-          <a:bodyPr rtlCol="0" anchor="ctr"/>
-          <a:lstStyle/>
-          <a:p>
-            <a:r>
-              <a:rPr lang="de-DE" sz="2800">
-                <a:solidFill>
-                  <a:schemeClr val="bg1">
-                    <a:lumMod val="75000"/>
-                  </a:schemeClr>
-                </a:solidFill>
-                <a:latin typeface="Bahnschrift" panose="020B0502040204020203" pitchFamily="34" charset="0"/>
-              </a:rPr>
-              <a:t>    Salzkammergut</a:t>
-            </a:r>
-            <a:endParaRPr lang="de-DE" sz="2800" dirty="0">
-              <a:solidFill>
-                <a:schemeClr val="bg1">
-                  <a:lumMod val="75000"/>
-                </a:schemeClr>
-              </a:solidFill>
-              <a:latin typeface="Bahnschrift" panose="020B0502040204020203" pitchFamily="34" charset="0"/>
-            </a:endParaRPr>
-          </a:p>
-        </p:txBody>
-      </p:sp>
-      <p:sp>
-        <p:nvSpPr>
-          <p:cNvPr id="17" name="Rounded Rectangle 7">
-            <a:extLst>
-              <a:ext uri="{FF2B5EF4-FFF2-40B4-BE49-F238E27FC236}">
-                <a16:creationId xmlns:a16="http://schemas.microsoft.com/office/drawing/2014/main" id="{352722DE-CA00-0BB8-5720-F46A3F5A57C0}"/>
-              </a:ext>
-            </a:extLst>
-          </p:cNvPr>
-          <p:cNvSpPr/>
-          <p:nvPr/>
-        </p:nvSpPr>
-        <p:spPr>
-          <a:xfrm>
-            <a:off x="192521" y="205986"/>
-            <a:ext cx="4969639" cy="1230410"/>
-          </a:xfrm>
-          <a:prstGeom prst="roundRect">
-            <a:avLst>
-              <a:gd name="adj" fmla="val 50000"/>
-            </a:avLst>
-          </a:prstGeom>
-          <a:solidFill>
-            <a:srgbClr val="FFFDF7"/>
-          </a:solidFill>
-          <a:ln w="76200">
-            <a:solidFill>
-              <a:schemeClr val="accent4">
-                <a:lumMod val="20000"/>
-                <a:lumOff val="80000"/>
-              </a:schemeClr>
-            </a:solidFill>
-          </a:ln>
-        </p:spPr>
-        <p:style>
-          <a:lnRef idx="2">
-            <a:schemeClr val="accent1">
-              <a:shade val="50000"/>
-            </a:schemeClr>
-          </a:lnRef>
-          <a:fillRef idx="1">
-            <a:schemeClr val="accent1"/>
-          </a:fillRef>
-          <a:effectRef idx="0">
-            <a:schemeClr val="accent1"/>
-          </a:effectRef>
-          <a:fontRef idx="minor">
-            <a:schemeClr val="lt1"/>
-          </a:fontRef>
-        </p:style>
-        <p:txBody>
-          <a:bodyPr rtlCol="0" anchor="ctr"/>
-          <a:lstStyle/>
-          <a:p>
-            <a:pPr algn="ctr"/>
-            <a:r>
-              <a:rPr lang="de-DE" sz="3200" b="1" dirty="0">
-                <a:solidFill>
-                  <a:schemeClr val="tx1"/>
-                </a:solidFill>
-                <a:latin typeface="Bahnschrift" panose="020B0502040204020203" pitchFamily="34" charset="0"/>
-              </a:rPr>
-              <a:t>Who </a:t>
-            </a:r>
-            <a:r>
-              <a:rPr lang="de-DE" sz="3200" b="1" dirty="0" err="1">
-                <a:solidFill>
-                  <a:schemeClr val="tx1"/>
-                </a:solidFill>
-                <a:latin typeface="Bahnschrift" panose="020B0502040204020203" pitchFamily="34" charset="0"/>
-              </a:rPr>
-              <a:t>is</a:t>
-            </a:r>
-            <a:r>
-              <a:rPr lang="de-DE" sz="3200" b="1" dirty="0">
-                <a:solidFill>
-                  <a:schemeClr val="tx1"/>
-                </a:solidFill>
-                <a:latin typeface="Bahnschrift" panose="020B0502040204020203" pitchFamily="34" charset="0"/>
-              </a:rPr>
-              <a:t> </a:t>
-            </a:r>
-            <a:r>
-              <a:rPr lang="de-DE" sz="3200" b="1" dirty="0" err="1">
-                <a:solidFill>
-                  <a:schemeClr val="tx1"/>
-                </a:solidFill>
-                <a:latin typeface="Bahnschrift" panose="020B0502040204020203" pitchFamily="34" charset="0"/>
-              </a:rPr>
-              <a:t>this</a:t>
-            </a:r>
-            <a:r>
-              <a:rPr lang="de-DE" sz="3200" b="1" dirty="0">
-                <a:solidFill>
-                  <a:schemeClr val="tx1"/>
-                </a:solidFill>
-                <a:latin typeface="Bahnschrift" panose="020B0502040204020203" pitchFamily="34" charset="0"/>
-              </a:rPr>
-              <a:t> </a:t>
-            </a:r>
-            <a:r>
-              <a:rPr lang="de-DE" sz="3200" b="1" dirty="0" err="1">
-                <a:solidFill>
-                  <a:schemeClr val="tx1"/>
-                </a:solidFill>
-                <a:latin typeface="Bahnschrift" panose="020B0502040204020203" pitchFamily="34" charset="0"/>
-              </a:rPr>
-              <a:t>guy</a:t>
-            </a:r>
-            <a:r>
-              <a:rPr lang="de-DE" sz="3200" b="1" dirty="0">
-                <a:solidFill>
-                  <a:schemeClr val="tx1"/>
-                </a:solidFill>
-                <a:latin typeface="Bahnschrift" panose="020B0502040204020203" pitchFamily="34" charset="0"/>
-              </a:rPr>
-              <a:t> </a:t>
-            </a:r>
-            <a:r>
-              <a:rPr lang="de-DE" sz="3200" b="1" dirty="0" err="1">
-                <a:solidFill>
-                  <a:schemeClr val="tx1"/>
-                </a:solidFill>
-                <a:latin typeface="Bahnschrift" panose="020B0502040204020203" pitchFamily="34" charset="0"/>
-              </a:rPr>
-              <a:t>even</a:t>
-            </a:r>
-            <a:r>
-              <a:rPr lang="de-DE" sz="3200" b="1" dirty="0">
-                <a:solidFill>
-                  <a:schemeClr val="tx1"/>
-                </a:solidFill>
-                <a:latin typeface="Bahnschrift" panose="020B0502040204020203" pitchFamily="34" charset="0"/>
-              </a:rPr>
-              <a:t>?</a:t>
-            </a:r>
-            <a:endParaRPr lang="en-GB" sz="3200" b="1" dirty="0">
-              <a:solidFill>
-                <a:schemeClr val="tx1"/>
-              </a:solidFill>
-              <a:latin typeface="Bahnschrift" panose="020B0502040204020203" pitchFamily="34" charset="0"/>
-            </a:endParaRPr>
-          </a:p>
-        </p:txBody>
-      </p:sp>
-      <p:sp>
-        <p:nvSpPr>
-          <p:cNvPr id="25" name="Rectangle 1">
-            <a:extLst>
-              <a:ext uri="{FF2B5EF4-FFF2-40B4-BE49-F238E27FC236}">
-                <a16:creationId xmlns:a16="http://schemas.microsoft.com/office/drawing/2014/main" id="{2B906E58-DDDA-A628-6313-B3CAC5E4F4BC}"/>
-              </a:ext>
-            </a:extLst>
-          </p:cNvPr>
-          <p:cNvSpPr/>
-          <p:nvPr/>
-        </p:nvSpPr>
-        <p:spPr>
-          <a:xfrm>
-            <a:off x="0" y="2667646"/>
-            <a:ext cx="5291423" cy="996558"/>
-          </a:xfrm>
-          <a:prstGeom prst="rect">
-            <a:avLst/>
-          </a:prstGeom>
-          <a:solidFill>
-            <a:srgbClr val="CFF1E6"/>
-          </a:solidFill>
-          <a:ln w="76200">
-            <a:noFill/>
-          </a:ln>
-        </p:spPr>
-        <p:style>
-          <a:lnRef idx="2">
-            <a:schemeClr val="accent1">
-              <a:shade val="50000"/>
-            </a:schemeClr>
-          </a:lnRef>
-          <a:fillRef idx="1">
-            <a:schemeClr val="accent1"/>
-          </a:fillRef>
-          <a:effectRef idx="0">
-            <a:schemeClr val="accent1"/>
-          </a:effectRef>
-          <a:fontRef idx="minor">
-            <a:schemeClr val="lt1"/>
-          </a:fontRef>
-        </p:style>
-        <p:txBody>
-          <a:bodyPr rtlCol="0" anchor="ctr"/>
-          <a:lstStyle/>
-          <a:p>
-            <a:pPr>
-              <a:buClr>
-                <a:prstClr val="black"/>
-              </a:buClr>
-            </a:pPr>
-            <a:r>
-              <a:rPr lang="en-GB" sz="2800">
-                <a:solidFill>
-                  <a:prstClr val="black"/>
-                </a:solidFill>
-                <a:latin typeface="Bahnschrift" panose="020B0502040204020203" pitchFamily="34" charset="0"/>
-              </a:rPr>
-              <a:t>    Budweis</a:t>
-            </a:r>
-            <a:endParaRPr lang="en-GB" sz="2800" dirty="0">
-              <a:solidFill>
-                <a:prstClr val="black"/>
-              </a:solidFill>
-              <a:latin typeface="Bahnschrift" panose="020B0502040204020203" pitchFamily="34" charset="0"/>
-            </a:endParaRPr>
-          </a:p>
-        </p:txBody>
-      </p:sp>
-      <p:sp>
-        <p:nvSpPr>
-          <p:cNvPr id="27" name="Rectangle 1">
-            <a:extLst>
-              <a:ext uri="{FF2B5EF4-FFF2-40B4-BE49-F238E27FC236}">
-                <a16:creationId xmlns:a16="http://schemas.microsoft.com/office/drawing/2014/main" id="{485AF12C-6A53-3751-9969-61125435318E}"/>
-              </a:ext>
-            </a:extLst>
-          </p:cNvPr>
-          <p:cNvSpPr/>
-          <p:nvPr/>
-        </p:nvSpPr>
-        <p:spPr>
-          <a:xfrm>
-            <a:off x="-1" y="3664204"/>
-            <a:ext cx="5291423" cy="996558"/>
-          </a:xfrm>
-          <a:prstGeom prst="rect">
-            <a:avLst/>
-          </a:prstGeom>
-          <a:solidFill>
-            <a:srgbClr val="CFF1E6">
-              <a:alpha val="46000"/>
-            </a:srgbClr>
-          </a:solidFill>
-          <a:ln w="76200">
-            <a:noFill/>
-          </a:ln>
-        </p:spPr>
-        <p:style>
-          <a:lnRef idx="2">
-            <a:schemeClr val="accent1">
-              <a:shade val="50000"/>
-            </a:schemeClr>
-          </a:lnRef>
-          <a:fillRef idx="1">
-            <a:schemeClr val="accent1"/>
-          </a:fillRef>
-          <a:effectRef idx="0">
-            <a:schemeClr val="accent1"/>
-          </a:effectRef>
-          <a:fontRef idx="minor">
-            <a:schemeClr val="lt1"/>
-          </a:fontRef>
-        </p:style>
-        <p:txBody>
-          <a:bodyPr rtlCol="0" anchor="ctr"/>
-          <a:lstStyle/>
-          <a:p>
-            <a:r>
-              <a:rPr lang="en-GB" sz="2800" dirty="0">
-                <a:solidFill>
-                  <a:schemeClr val="bg1">
-                    <a:lumMod val="75000"/>
-                  </a:schemeClr>
-                </a:solidFill>
-                <a:latin typeface="Bahnschrift" panose="020B0502040204020203" pitchFamily="34" charset="0"/>
-              </a:rPr>
-              <a:t>    Linz</a:t>
-            </a:r>
-          </a:p>
-        </p:txBody>
-      </p:sp>
-      <p:sp>
-        <p:nvSpPr>
-          <p:cNvPr id="29" name="Rectangle 1">
-            <a:extLst>
-              <a:ext uri="{FF2B5EF4-FFF2-40B4-BE49-F238E27FC236}">
-                <a16:creationId xmlns:a16="http://schemas.microsoft.com/office/drawing/2014/main" id="{8208E304-5295-9570-2E8B-3AE0C555A984}"/>
-              </a:ext>
-            </a:extLst>
-          </p:cNvPr>
-          <p:cNvSpPr/>
-          <p:nvPr/>
-        </p:nvSpPr>
-        <p:spPr>
-          <a:xfrm>
-            <a:off x="-2" y="4660762"/>
-            <a:ext cx="5291423" cy="996558"/>
-          </a:xfrm>
-          <a:prstGeom prst="rect">
-            <a:avLst/>
-          </a:prstGeom>
-          <a:solidFill>
-            <a:srgbClr val="CFF1E6">
-              <a:alpha val="46000"/>
-            </a:srgbClr>
-          </a:solidFill>
-          <a:ln w="76200">
-            <a:noFill/>
-          </a:ln>
-        </p:spPr>
-        <p:style>
-          <a:lnRef idx="2">
-            <a:schemeClr val="accent1">
-              <a:shade val="50000"/>
-            </a:schemeClr>
-          </a:lnRef>
-          <a:fillRef idx="1">
-            <a:schemeClr val="accent1"/>
-          </a:fillRef>
-          <a:effectRef idx="0">
-            <a:schemeClr val="accent1"/>
-          </a:effectRef>
-          <a:fontRef idx="minor">
-            <a:schemeClr val="lt1"/>
-          </a:fontRef>
-        </p:style>
-        <p:txBody>
-          <a:bodyPr rtlCol="0" anchor="ctr"/>
-          <a:lstStyle/>
-          <a:p>
-            <a:r>
-              <a:rPr lang="en-GB" sz="2800" dirty="0">
-                <a:solidFill>
-                  <a:schemeClr val="bg1">
-                    <a:lumMod val="75000"/>
-                  </a:schemeClr>
-                </a:solidFill>
-                <a:latin typeface="Bahnschrift" panose="020B0502040204020203" pitchFamily="34" charset="0"/>
-              </a:rPr>
-              <a:t>    Vienna</a:t>
-            </a:r>
-          </a:p>
-        </p:txBody>
-      </p:sp>
-      <p:pic>
-        <p:nvPicPr>
-          <p:cNvPr id="6" name="Grafik 5">
-            <a:extLst>
-              <a:ext uri="{FF2B5EF4-FFF2-40B4-BE49-F238E27FC236}">
-                <a16:creationId xmlns:a16="http://schemas.microsoft.com/office/drawing/2014/main" id="{0D509AD2-043D-A360-6ECC-783436562B2F}"/>
-              </a:ext>
-            </a:extLst>
-          </p:cNvPr>
-          <p:cNvPicPr>
-            <a:picLocks noChangeAspect="1"/>
-          </p:cNvPicPr>
-          <p:nvPr/>
-        </p:nvPicPr>
-        <p:blipFill>
-          <a:blip r:embed="rId2" cstate="print">
-            <a:extLst>
-              <a:ext uri="{28A0092B-C50C-407E-A947-70E740481C1C}">
-                <a14:useLocalDpi xmlns:a14="http://schemas.microsoft.com/office/drawing/2010/main" val="0"/>
-              </a:ext>
-            </a:extLst>
-          </a:blip>
-          <a:stretch>
-            <a:fillRect/>
-          </a:stretch>
-        </p:blipFill>
-        <p:spPr>
-          <a:xfrm>
-            <a:off x="5774077" y="855790"/>
-            <a:ext cx="2717783" cy="3623711"/>
-          </a:xfrm>
-          <a:prstGeom prst="rect">
-            <a:avLst/>
-          </a:prstGeom>
-        </p:spPr>
-      </p:pic>
-      <p:pic>
-        <p:nvPicPr>
-          <p:cNvPr id="10" name="Grafik 9">
-            <a:extLst>
-              <a:ext uri="{FF2B5EF4-FFF2-40B4-BE49-F238E27FC236}">
-                <a16:creationId xmlns:a16="http://schemas.microsoft.com/office/drawing/2014/main" id="{411251EA-C252-072D-8245-F0A14B72DC5E}"/>
-              </a:ext>
-            </a:extLst>
-          </p:cNvPr>
-          <p:cNvPicPr>
-            <a:picLocks noChangeAspect="1"/>
-          </p:cNvPicPr>
-          <p:nvPr/>
-        </p:nvPicPr>
-        <p:blipFill>
-          <a:blip r:embed="rId3" cstate="print">
-            <a:extLst>
-              <a:ext uri="{28A0092B-C50C-407E-A947-70E740481C1C}">
-                <a14:useLocalDpi xmlns:a14="http://schemas.microsoft.com/office/drawing/2010/main" val="0"/>
-              </a:ext>
-            </a:extLst>
-          </a:blip>
-          <a:srcRect t="11917" b="10898"/>
-          <a:stretch>
-            <a:fillRect/>
-          </a:stretch>
-        </p:blipFill>
-        <p:spPr>
-          <a:xfrm>
-            <a:off x="8556492" y="439838"/>
-            <a:ext cx="3442987" cy="1993116"/>
-          </a:xfrm>
-          <a:prstGeom prst="rect">
-            <a:avLst/>
-          </a:prstGeom>
-        </p:spPr>
-      </p:pic>
-      <p:pic>
-        <p:nvPicPr>
-          <p:cNvPr id="12" name="Grafik 11">
-            <a:extLst>
-              <a:ext uri="{FF2B5EF4-FFF2-40B4-BE49-F238E27FC236}">
-                <a16:creationId xmlns:a16="http://schemas.microsoft.com/office/drawing/2014/main" id="{102B0A89-5515-6AD7-605A-67B50E93D780}"/>
-              </a:ext>
-            </a:extLst>
-          </p:cNvPr>
-          <p:cNvPicPr>
-            <a:picLocks noChangeAspect="1"/>
-          </p:cNvPicPr>
-          <p:nvPr/>
-        </p:nvPicPr>
-        <p:blipFill>
-          <a:blip r:embed="rId4" cstate="print">
-            <a:extLst>
-              <a:ext uri="{28A0092B-C50C-407E-A947-70E740481C1C}">
-                <a14:useLocalDpi xmlns:a14="http://schemas.microsoft.com/office/drawing/2010/main" val="0"/>
-              </a:ext>
-            </a:extLst>
-          </a:blip>
-          <a:stretch>
-            <a:fillRect/>
-          </a:stretch>
-        </p:blipFill>
-        <p:spPr>
-          <a:xfrm>
-            <a:off x="8556492" y="2533502"/>
-            <a:ext cx="2273839" cy="4042382"/>
-          </a:xfrm>
-          <a:prstGeom prst="rect">
-            <a:avLst/>
-          </a:prstGeom>
-        </p:spPr>
-      </p:pic>
-      <p:sp>
-        <p:nvSpPr>
-          <p:cNvPr id="22" name="Rounded Rectangle 7">
-            <a:extLst>
-              <a:ext uri="{FF2B5EF4-FFF2-40B4-BE49-F238E27FC236}">
-                <a16:creationId xmlns:a16="http://schemas.microsoft.com/office/drawing/2014/main" id="{3091F324-6B47-85C5-4CA7-5AE7CDFE7A17}"/>
-              </a:ext>
-            </a:extLst>
-          </p:cNvPr>
-          <p:cNvSpPr/>
-          <p:nvPr/>
-        </p:nvSpPr>
-        <p:spPr>
-          <a:xfrm>
-            <a:off x="5646407" y="4580049"/>
-            <a:ext cx="6179914" cy="1481034"/>
-          </a:xfrm>
-          <a:prstGeom prst="roundRect">
-            <a:avLst>
-              <a:gd name="adj" fmla="val 50000"/>
-            </a:avLst>
-          </a:prstGeom>
-          <a:solidFill>
-            <a:srgbClr val="FFFDF7">
-              <a:alpha val="64000"/>
-            </a:srgbClr>
-          </a:solidFill>
-          <a:ln w="76200">
-            <a:solidFill>
-              <a:schemeClr val="accent4">
-                <a:lumMod val="20000"/>
-                <a:lumOff val="80000"/>
-              </a:schemeClr>
-            </a:solidFill>
-          </a:ln>
-        </p:spPr>
-        <p:style>
-          <a:lnRef idx="2">
-            <a:schemeClr val="accent1">
-              <a:shade val="50000"/>
-            </a:schemeClr>
-          </a:lnRef>
-          <a:fillRef idx="1">
-            <a:schemeClr val="accent1"/>
-          </a:fillRef>
-          <a:effectRef idx="0">
-            <a:schemeClr val="accent1"/>
-          </a:effectRef>
-          <a:fontRef idx="minor">
-            <a:schemeClr val="lt1"/>
-          </a:fontRef>
-        </p:style>
-        <p:txBody>
-          <a:bodyPr rtlCol="0" anchor="ctr"/>
-          <a:lstStyle/>
-          <a:p>
-            <a:pPr marL="342900" indent="-342900">
-              <a:buFontTx/>
-              <a:buChar char="-"/>
-            </a:pPr>
-            <a:r>
-              <a:rPr lang="de-DE" sz="2000" dirty="0">
-                <a:solidFill>
-                  <a:schemeClr val="tx1"/>
-                </a:solidFill>
-                <a:latin typeface="Bahnschrift" panose="020B0502040204020203" pitchFamily="34" charset="0"/>
-              </a:rPr>
-              <a:t>double </a:t>
-            </a:r>
-            <a:r>
-              <a:rPr lang="de-DE" sz="2000" dirty="0" err="1">
-                <a:solidFill>
-                  <a:schemeClr val="tx1"/>
-                </a:solidFill>
-                <a:latin typeface="Bahnschrift" panose="020B0502040204020203" pitchFamily="34" charset="0"/>
-              </a:rPr>
-              <a:t>degree</a:t>
-            </a:r>
-            <a:r>
-              <a:rPr lang="de-DE" sz="2000" dirty="0">
-                <a:solidFill>
-                  <a:schemeClr val="tx1"/>
-                </a:solidFill>
-                <a:latin typeface="Bahnschrift" panose="020B0502040204020203" pitchFamily="34" charset="0"/>
-              </a:rPr>
-              <a:t> in Biological Chemistry</a:t>
-            </a:r>
-          </a:p>
-          <a:p>
-            <a:pPr marL="342900" indent="-342900">
-              <a:buFontTx/>
-              <a:buChar char="-"/>
-            </a:pPr>
-            <a:r>
-              <a:rPr lang="de-DE" sz="2000" dirty="0" err="1">
-                <a:solidFill>
-                  <a:schemeClr val="tx1"/>
-                </a:solidFill>
-                <a:latin typeface="Bahnschrift" panose="020B0502040204020203" pitchFamily="34" charset="0"/>
-              </a:rPr>
-              <a:t>thesis</a:t>
-            </a:r>
-            <a:r>
-              <a:rPr lang="de-DE" sz="2000" dirty="0">
-                <a:solidFill>
-                  <a:schemeClr val="tx1"/>
-                </a:solidFill>
-                <a:latin typeface="Bahnschrift" panose="020B0502040204020203" pitchFamily="34" charset="0"/>
-              </a:rPr>
-              <a:t> on </a:t>
-            </a:r>
-            <a:r>
-              <a:rPr lang="de-DE" sz="2000" dirty="0" err="1">
-                <a:solidFill>
-                  <a:schemeClr val="tx1"/>
-                </a:solidFill>
-                <a:latin typeface="Bahnschrift" panose="020B0502040204020203" pitchFamily="34" charset="0"/>
-              </a:rPr>
-              <a:t>probiotic</a:t>
-            </a:r>
-            <a:r>
-              <a:rPr lang="de-DE" sz="2000" dirty="0">
-                <a:solidFill>
-                  <a:schemeClr val="tx1"/>
-                </a:solidFill>
-                <a:latin typeface="Bahnschrift" panose="020B0502040204020203" pitchFamily="34" charset="0"/>
-              </a:rPr>
-              <a:t> </a:t>
-            </a:r>
-            <a:r>
-              <a:rPr lang="de-DE" sz="2000" dirty="0" err="1">
-                <a:solidFill>
-                  <a:schemeClr val="tx1"/>
-                </a:solidFill>
-                <a:latin typeface="Bahnschrift" panose="020B0502040204020203" pitchFamily="34" charset="0"/>
-              </a:rPr>
-              <a:t>treatment</a:t>
-            </a:r>
-            <a:r>
-              <a:rPr lang="de-DE" sz="2000" dirty="0">
-                <a:solidFill>
-                  <a:schemeClr val="tx1"/>
-                </a:solidFill>
-                <a:latin typeface="Bahnschrift" panose="020B0502040204020203" pitchFamily="34" charset="0"/>
-              </a:rPr>
-              <a:t> </a:t>
-            </a:r>
-            <a:r>
-              <a:rPr lang="de-DE" sz="2000" dirty="0" err="1">
-                <a:solidFill>
-                  <a:schemeClr val="tx1"/>
-                </a:solidFill>
-                <a:latin typeface="Bahnschrift" panose="020B0502040204020203" pitchFamily="34" charset="0"/>
-              </a:rPr>
-              <a:t>of</a:t>
-            </a:r>
-            <a:r>
-              <a:rPr lang="de-DE" sz="2000" dirty="0">
-                <a:solidFill>
-                  <a:schemeClr val="tx1"/>
-                </a:solidFill>
-                <a:latin typeface="Bahnschrift" panose="020B0502040204020203" pitchFamily="34" charset="0"/>
-              </a:rPr>
-              <a:t> </a:t>
-            </a:r>
-            <a:r>
-              <a:rPr lang="de-DE" sz="2000" dirty="0" err="1">
-                <a:solidFill>
-                  <a:schemeClr val="tx1"/>
-                </a:solidFill>
-                <a:latin typeface="Bahnschrift" panose="020B0502040204020203" pitchFamily="34" charset="0"/>
-              </a:rPr>
-              <a:t>fish</a:t>
-            </a:r>
-            <a:r>
-              <a:rPr lang="de-DE" sz="2000" dirty="0">
-                <a:solidFill>
-                  <a:schemeClr val="tx1"/>
-                </a:solidFill>
-                <a:latin typeface="Bahnschrift" panose="020B0502040204020203" pitchFamily="34" charset="0"/>
-              </a:rPr>
-              <a:t> </a:t>
-            </a:r>
-            <a:r>
-              <a:rPr lang="de-DE" sz="2000" dirty="0" err="1">
-                <a:solidFill>
-                  <a:schemeClr val="tx1"/>
-                </a:solidFill>
-                <a:latin typeface="Bahnschrift" panose="020B0502040204020203" pitchFamily="34" charset="0"/>
-              </a:rPr>
-              <a:t>endoparasites</a:t>
-            </a:r>
-            <a:endParaRPr lang="de-DE" sz="2000" dirty="0">
-              <a:solidFill>
-                <a:schemeClr val="tx1"/>
-              </a:solidFill>
-              <a:latin typeface="Bahnschrift" panose="020B0502040204020203" pitchFamily="34" charset="0"/>
-            </a:endParaRPr>
-          </a:p>
-        </p:txBody>
-      </p:sp>
-    </p:spTree>
-    <p:extLst>
-      <p:ext uri="{BB962C8B-B14F-4D97-AF65-F5344CB8AC3E}">
-        <p14:creationId xmlns:p14="http://schemas.microsoft.com/office/powerpoint/2010/main" val="3398236915"/>
-      </p:ext>
-    </p:extLst>
-  </p:cSld>
-  <p:clrMapOvr>
-    <a:masterClrMapping/>
-  </p:clrMapOvr>
-  <p:timing>
-    <p:tnLst>
-      <p:par>
-        <p:cTn id="1" dur="indefinite" restart="never" nodeType="tmRoot">
-          <p:childTnLst>
-            <p:seq concurrent="1" nextAc="seek">
-              <p:cTn id="2" dur="indefinite" nodeType="mainSeq">
-                <p:childTnLst>
-                  <p:par>
-                    <p:cTn id="3" fill="hold">
-                      <p:stCondLst>
-                        <p:cond delay="indefinite"/>
-                        <p:cond evt="onBegin" delay="0">
-                          <p:tn val="2"/>
-                        </p:cond>
-                      </p:stCondLst>
-                      <p:childTnLst>
-                        <p:par>
-                          <p:cTn id="4" fill="hold">
-                            <p:stCondLst>
-                              <p:cond delay="0"/>
-                            </p:stCondLst>
-                            <p:childTnLst>
-                              <p:par>
-                                <p:cTn id="5" presetID="10" presetClass="entr" presetSubtype="0" fill="hold" nodeType="afterEffect">
-                                  <p:stCondLst>
-                                    <p:cond delay="0"/>
-                                  </p:stCondLst>
-                                  <p:childTnLst>
-                                    <p:set>
-                                      <p:cBhvr>
-                                        <p:cTn id="6" dur="1" fill="hold">
-                                          <p:stCondLst>
-                                            <p:cond delay="0"/>
-                                          </p:stCondLst>
-                                        </p:cTn>
-                                        <p:tgtEl>
-                                          <p:spTgt spid="10"/>
-                                        </p:tgtEl>
-                                        <p:attrNameLst>
-                                          <p:attrName>style.visibility</p:attrName>
-                                        </p:attrNameLst>
-                                      </p:cBhvr>
-                                      <p:to>
-                                        <p:strVal val="visible"/>
-                                      </p:to>
-                                    </p:set>
-                                    <p:animEffect transition="in" filter="fade">
-                                      <p:cBhvr>
-                                        <p:cTn id="7" dur="100"/>
-                                        <p:tgtEl>
-                                          <p:spTgt spid="10"/>
-                                        </p:tgtEl>
-                                      </p:cBhvr>
-                                    </p:animEffect>
-                                  </p:childTnLst>
-                                </p:cTn>
-                              </p:par>
-                            </p:childTnLst>
-                          </p:cTn>
-                        </p:par>
-                        <p:par>
-                          <p:cTn id="8" fill="hold">
-                            <p:stCondLst>
-                              <p:cond delay="100"/>
-                            </p:stCondLst>
-                            <p:childTnLst>
-                              <p:par>
-                                <p:cTn id="9" presetID="10" presetClass="entr" presetSubtype="0" fill="hold" nodeType="afterEffect">
-                                  <p:stCondLst>
-                                    <p:cond delay="0"/>
-                                  </p:stCondLst>
-                                  <p:childTnLst>
-                                    <p:set>
-                                      <p:cBhvr>
-                                        <p:cTn id="10" dur="1" fill="hold">
-                                          <p:stCondLst>
-                                            <p:cond delay="0"/>
-                                          </p:stCondLst>
-                                        </p:cTn>
-                                        <p:tgtEl>
-                                          <p:spTgt spid="6"/>
-                                        </p:tgtEl>
-                                        <p:attrNameLst>
-                                          <p:attrName>style.visibility</p:attrName>
-                                        </p:attrNameLst>
-                                      </p:cBhvr>
-                                      <p:to>
-                                        <p:strVal val="visible"/>
-                                      </p:to>
-                                    </p:set>
-                                    <p:animEffect transition="in" filter="fade">
-                                      <p:cBhvr>
-                                        <p:cTn id="11" dur="100"/>
-                                        <p:tgtEl>
-                                          <p:spTgt spid="6"/>
-                                        </p:tgtEl>
-                                      </p:cBhvr>
-                                    </p:animEffect>
-                                  </p:childTnLst>
-                                </p:cTn>
-                              </p:par>
-                            </p:childTnLst>
-                          </p:cTn>
-                        </p:par>
-                        <p:par>
-                          <p:cTn id="12" fill="hold">
-                            <p:stCondLst>
-                              <p:cond delay="200"/>
-                            </p:stCondLst>
-                            <p:childTnLst>
-                              <p:par>
-                                <p:cTn id="13" presetID="10" presetClass="entr" presetSubtype="0" fill="hold" nodeType="afterEffect">
-                                  <p:stCondLst>
-                                    <p:cond delay="0"/>
-                                  </p:stCondLst>
-                                  <p:childTnLst>
-                                    <p:set>
-                                      <p:cBhvr>
-                                        <p:cTn id="14" dur="1" fill="hold">
-                                          <p:stCondLst>
-                                            <p:cond delay="0"/>
-                                          </p:stCondLst>
-                                        </p:cTn>
-                                        <p:tgtEl>
-                                          <p:spTgt spid="12"/>
-                                        </p:tgtEl>
-                                        <p:attrNameLst>
-                                          <p:attrName>style.visibility</p:attrName>
-                                        </p:attrNameLst>
-                                      </p:cBhvr>
-                                      <p:to>
-                                        <p:strVal val="visible"/>
-                                      </p:to>
-                                    </p:set>
-                                    <p:animEffect transition="in" filter="fade">
-                                      <p:cBhvr>
-                                        <p:cTn id="15" dur="100"/>
-                                        <p:tgtEl>
-                                          <p:spTgt spid="12"/>
-                                        </p:tgtEl>
-                                      </p:cBhvr>
-                                    </p:animEffect>
-                                  </p:childTnLst>
-                                </p:cTn>
-                              </p:par>
-                            </p:childTnLst>
-                          </p:cTn>
-                        </p:par>
-                      </p:childTnLst>
-                    </p:cTn>
-                  </p:par>
-                  <p:par>
-                    <p:cTn id="16" fill="hold">
-                      <p:stCondLst>
-                        <p:cond delay="indefinite"/>
-                      </p:stCondLst>
-                      <p:childTnLst>
-                        <p:par>
-                          <p:cTn id="17" fill="hold">
-                            <p:stCondLst>
-                              <p:cond delay="0"/>
-                            </p:stCondLst>
-                            <p:childTnLst>
-                              <p:par>
-                                <p:cTn id="18" presetID="10" presetClass="entr" presetSubtype="0" fill="hold" grpId="0" nodeType="clickEffect">
-                                  <p:stCondLst>
-                                    <p:cond delay="0"/>
-                                  </p:stCondLst>
-                                  <p:childTnLst>
-                                    <p:set>
-                                      <p:cBhvr>
-                                        <p:cTn id="19" dur="1" fill="hold">
-                                          <p:stCondLst>
-                                            <p:cond delay="0"/>
-                                          </p:stCondLst>
-                                        </p:cTn>
-                                        <p:tgtEl>
-                                          <p:spTgt spid="22"/>
-                                        </p:tgtEl>
-                                        <p:attrNameLst>
-                                          <p:attrName>style.visibility</p:attrName>
-                                        </p:attrNameLst>
-                                      </p:cBhvr>
-                                      <p:to>
-                                        <p:strVal val="visible"/>
-                                      </p:to>
-                                    </p:set>
-                                    <p:animEffect transition="in" filter="fade">
-                                      <p:cBhvr>
-                                        <p:cTn id="20" dur="250"/>
-                                        <p:tgtEl>
-                                          <p:spTgt spid="22"/>
-                                        </p:tgtEl>
-                                      </p:cBhvr>
-                                    </p:animEffect>
-                                  </p:childTnLst>
-                                </p:cTn>
-                              </p:par>
-                            </p:childTnLst>
-                          </p:cTn>
-                        </p:par>
-                      </p:childTnLst>
-                    </p:cTn>
-                  </p:par>
-                </p:childTnLst>
-              </p:cTn>
-              <p:prevCondLst>
-                <p:cond evt="onPrev" delay="0">
-                  <p:tgtEl>
-                    <p:sldTgt/>
-                  </p:tgtEl>
-                </p:cond>
-              </p:prevCondLst>
-              <p:nextCondLst>
-                <p:cond evt="onNext" delay="0">
-                  <p:tgtEl>
-                    <p:sldTgt/>
-                  </p:tgtEl>
-                </p:cond>
-              </p:nextCondLst>
-            </p:seq>
-          </p:childTnLst>
-        </p:cTn>
-      </p:par>
-    </p:tnLst>
-    <p:bldLst>
-      <p:bldP spid="22" grpId="0" animBg="1"/>
-    </p:bldLst>
-  </p:timing>
-</p:sld>
-</file>
-
-<file path=ppt/slides/slide40.xml><?xml version="1.0" encoding="utf-8"?>
+<file path=ppt/slides/slide42.xml><?xml version="1.0" encoding="utf-8"?>
 <p:sld xmlns:a="http://schemas.openxmlformats.org/drawingml/2006/main" xmlns:r="http://schemas.openxmlformats.org/officeDocument/2006/relationships" xmlns:p="http://schemas.openxmlformats.org/presentationml/2006/main">
   <p:cSld>
     <p:spTree>
@@ -30447,7 +31810,7 @@
           <a:lstStyle/>
           <a:p>
             <a:r>
-              <a:rPr lang="de-DE" dirty="0" smtClean="0"/>
+              <a:rPr lang="de-DE" dirty="0"/>
               <a:t>Acknowledgements</a:t>
             </a:r>
             <a:endParaRPr lang="en-GB" dirty="0"/>
@@ -30475,25 +31838,25 @@
           <a:lstStyle/>
           <a:p>
             <a:r>
-              <a:rPr lang="de-DE" dirty="0" smtClean="0"/>
+              <a:rPr lang="de-DE" dirty="0"/>
               <a:t>Hugo, Dimitris and everyone in the lab giving me much needed advice and direction</a:t>
             </a:r>
           </a:p>
           <a:p>
             <a:r>
-              <a:rPr lang="de-DE" dirty="0" smtClean="0"/>
+              <a:rPr lang="de-DE" dirty="0"/>
               <a:t>Simon Jacob Lab</a:t>
             </a:r>
           </a:p>
           <a:p>
             <a:r>
-              <a:rPr lang="de-DE" dirty="0" smtClean="0"/>
+              <a:rPr lang="de-DE" dirty="0"/>
               <a:t>Chen Hongbiao</a:t>
             </a:r>
           </a:p>
           <a:p>
             <a:r>
-              <a:rPr lang="de-DE" dirty="0" smtClean="0">
+              <a:rPr lang="de-DE" dirty="0">
                 <a:solidFill>
                   <a:srgbClr val="FFF8E5"/>
                 </a:solidFill>
@@ -30516,13 +31879,6 @@
   <p:clrMapOvr>
     <a:masterClrMapping/>
   </p:clrMapOvr>
-  <p:timing>
-    <p:tnLst>
-      <p:par>
-        <p:cTn id="1" dur="indefinite" restart="never" nodeType="tmRoot"/>
-      </p:par>
-    </p:tnLst>
-  </p:timing>
 </p:sld>
 </file>
 
@@ -32125,13 +33481,6 @@
   <p:clrMapOvr>
     <a:masterClrMapping/>
   </p:clrMapOvr>
-  <p:timing>
-    <p:tnLst>
-      <p:par>
-        <p:cTn id="1" dur="indefinite" restart="never" nodeType="tmRoot"/>
-      </p:par>
-    </p:tnLst>
-  </p:timing>
 </p:sld>
 </file>
 
@@ -32608,13 +33957,6 @@
   <p:clrMapOvr>
     <a:masterClrMapping/>
   </p:clrMapOvr>
-  <p:timing>
-    <p:tnLst>
-      <p:par>
-        <p:cTn id="1" dur="indefinite" restart="never" nodeType="tmRoot"/>
-      </p:par>
-    </p:tnLst>
-  </p:timing>
 </p:sld>
 </file>
 
@@ -33118,13 +34460,6 @@
   <p:clrMapOvr>
     <a:masterClrMapping/>
   </p:clrMapOvr>
-  <p:timing>
-    <p:tnLst>
-      <p:par>
-        <p:cTn id="1" dur="indefinite" restart="never" nodeType="tmRoot"/>
-      </p:par>
-    </p:tnLst>
-  </p:timing>
 </p:sld>
 </file>
 
